--- a/output/1.pptx
+++ b/output/1.pptx
@@ -3104,8 +3104,8 @@
         </p:nvCxnSpPr>
         <p:spPr>
           <a:xfrm>
-            <a:off x="2286000.0" y="2571750.0"/>
-            <a:ext cx="4572000.0" cy="0.0"/>
+            <a:off x="4343400.0" y="2571750.0"/>
+            <a:ext cx="1920240.0" cy="0.0"/>
           </a:xfrm>
           <a:prstGeom prst="line">
             <a:avLst/>
@@ -3139,8 +3139,8 @@
         </p:nvCxnSpPr>
         <p:spPr>
           <a:xfrm flipV="1">
-            <a:off x="4572000.0" y="285750.0"/>
-            <a:ext cx="0.0" cy="4572000.0"/>
+            <a:off x="4572000.0" y="971550.0"/>
+            <a:ext cx="0.0" cy="1828800.0"/>
           </a:xfrm>
           <a:prstGeom prst="line">
             <a:avLst/>
@@ -3166,6 +3166,1910 @@
           </a:fontRef>
         </p:style>
       </p:cxnSp>
+      <p:cxnSp>
+        <p:nvCxnSpPr>
+          <p:cNvPr id="4" name="Connector 3"/>
+          <p:cNvCxnSpPr/>
+          <p:nvPr/>
+        </p:nvCxnSpPr>
+        <p:spPr>
+          <a:xfrm flipV="1">
+            <a:off x="4572000.0" y="2526030.0"/>
+            <a:ext cx="228600.0" cy="45720.0"/>
+          </a:xfrm>
+          <a:prstGeom prst="line">
+            <a:avLst/>
+          </a:prstGeom>
+          <a:ln w="25400">
+            <a:solidFill>
+              <a:srgbClr val="00C8FF"/>
+            </a:solidFill>
+          </a:ln>
+        </p:spPr>
+        <p:style>
+          <a:lnRef idx="2">
+            <a:schemeClr val="accent1"/>
+          </a:lnRef>
+          <a:fillRef idx="0">
+            <a:schemeClr val="accent1"/>
+          </a:fillRef>
+          <a:effectRef idx="1">
+            <a:schemeClr val="accent1"/>
+          </a:effectRef>
+          <a:fontRef idx="minor">
+            <a:schemeClr val="tx1"/>
+          </a:fontRef>
+        </p:style>
+      </p:cxnSp>
+      <p:cxnSp>
+        <p:nvCxnSpPr>
+          <p:cNvPr id="5" name="Connector 4"/>
+          <p:cNvCxnSpPr/>
+          <p:nvPr/>
+        </p:nvCxnSpPr>
+        <p:spPr>
+          <a:xfrm flipV="1">
+            <a:off x="4800600.0" y="2434590.0"/>
+            <a:ext cx="228600.0" cy="91440.0"/>
+          </a:xfrm>
+          <a:prstGeom prst="line">
+            <a:avLst/>
+          </a:prstGeom>
+          <a:ln w="25400">
+            <a:solidFill>
+              <a:srgbClr val="00C8FF"/>
+            </a:solidFill>
+          </a:ln>
+        </p:spPr>
+        <p:style>
+          <a:lnRef idx="2">
+            <a:schemeClr val="accent1"/>
+          </a:lnRef>
+          <a:fillRef idx="0">
+            <a:schemeClr val="accent1"/>
+          </a:fillRef>
+          <a:effectRef idx="1">
+            <a:schemeClr val="accent1"/>
+          </a:effectRef>
+          <a:fontRef idx="minor">
+            <a:schemeClr val="tx1"/>
+          </a:fontRef>
+        </p:style>
+      </p:cxnSp>
+      <p:cxnSp>
+        <p:nvCxnSpPr>
+          <p:cNvPr id="6" name="Connector 5"/>
+          <p:cNvCxnSpPr/>
+          <p:nvPr/>
+        </p:nvCxnSpPr>
+        <p:spPr>
+          <a:xfrm flipV="1">
+            <a:off x="5029200.0" y="2297430.0"/>
+            <a:ext cx="228600.0" cy="137160.0"/>
+          </a:xfrm>
+          <a:prstGeom prst="line">
+            <a:avLst/>
+          </a:prstGeom>
+          <a:ln w="25400">
+            <a:solidFill>
+              <a:srgbClr val="00C8FF"/>
+            </a:solidFill>
+          </a:ln>
+        </p:spPr>
+        <p:style>
+          <a:lnRef idx="2">
+            <a:schemeClr val="accent1"/>
+          </a:lnRef>
+          <a:fillRef idx="0">
+            <a:schemeClr val="accent1"/>
+          </a:fillRef>
+          <a:effectRef idx="1">
+            <a:schemeClr val="accent1"/>
+          </a:effectRef>
+          <a:fontRef idx="minor">
+            <a:schemeClr val="tx1"/>
+          </a:fontRef>
+        </p:style>
+      </p:cxnSp>
+      <p:cxnSp>
+        <p:nvCxnSpPr>
+          <p:cNvPr id="7" name="Connector 6"/>
+          <p:cNvCxnSpPr/>
+          <p:nvPr/>
+        </p:nvCxnSpPr>
+        <p:spPr>
+          <a:xfrm flipV="1">
+            <a:off x="5257800.0" y="2114550.0"/>
+            <a:ext cx="228600.0" cy="182880.0"/>
+          </a:xfrm>
+          <a:prstGeom prst="line">
+            <a:avLst/>
+          </a:prstGeom>
+          <a:ln w="25400">
+            <a:solidFill>
+              <a:srgbClr val="00C8FF"/>
+            </a:solidFill>
+          </a:ln>
+        </p:spPr>
+        <p:style>
+          <a:lnRef idx="2">
+            <a:schemeClr val="accent1"/>
+          </a:lnRef>
+          <a:fillRef idx="0">
+            <a:schemeClr val="accent1"/>
+          </a:fillRef>
+          <a:effectRef idx="1">
+            <a:schemeClr val="accent1"/>
+          </a:effectRef>
+          <a:fontRef idx="minor">
+            <a:schemeClr val="tx1"/>
+          </a:fontRef>
+        </p:style>
+      </p:cxnSp>
+      <p:cxnSp>
+        <p:nvCxnSpPr>
+          <p:cNvPr id="8" name="Connector 7"/>
+          <p:cNvCxnSpPr/>
+          <p:nvPr/>
+        </p:nvCxnSpPr>
+        <p:spPr>
+          <a:xfrm flipV="1">
+            <a:off x="5486400.0" y="1977390.0"/>
+            <a:ext cx="91440.0" cy="137160.0"/>
+          </a:xfrm>
+          <a:prstGeom prst="line">
+            <a:avLst/>
+          </a:prstGeom>
+          <a:ln w="25400">
+            <a:solidFill>
+              <a:srgbClr val="00C8FF"/>
+            </a:solidFill>
+          </a:ln>
+        </p:spPr>
+        <p:style>
+          <a:lnRef idx="2">
+            <a:schemeClr val="accent1"/>
+          </a:lnRef>
+          <a:fillRef idx="0">
+            <a:schemeClr val="accent1"/>
+          </a:fillRef>
+          <a:effectRef idx="1">
+            <a:schemeClr val="accent1"/>
+          </a:effectRef>
+          <a:fontRef idx="minor">
+            <a:schemeClr val="tx1"/>
+          </a:fontRef>
+        </p:style>
+      </p:cxnSp>
+      <p:cxnSp>
+        <p:nvCxnSpPr>
+          <p:cNvPr id="9" name="Connector 8"/>
+          <p:cNvCxnSpPr/>
+          <p:nvPr/>
+        </p:nvCxnSpPr>
+        <p:spPr>
+          <a:xfrm flipV="1">
+            <a:off x="5577840.0" y="1885950.0"/>
+            <a:ext cx="45720.0" cy="91440.0"/>
+          </a:xfrm>
+          <a:prstGeom prst="line">
+            <a:avLst/>
+          </a:prstGeom>
+          <a:ln w="25400">
+            <a:solidFill>
+              <a:srgbClr val="00C8FF"/>
+            </a:solidFill>
+          </a:ln>
+        </p:spPr>
+        <p:style>
+          <a:lnRef idx="2">
+            <a:schemeClr val="accent1"/>
+          </a:lnRef>
+          <a:fillRef idx="0">
+            <a:schemeClr val="accent1"/>
+          </a:fillRef>
+          <a:effectRef idx="1">
+            <a:schemeClr val="accent1"/>
+          </a:effectRef>
+          <a:fontRef idx="minor">
+            <a:schemeClr val="tx1"/>
+          </a:fontRef>
+        </p:style>
+      </p:cxnSp>
+      <p:cxnSp>
+        <p:nvCxnSpPr>
+          <p:cNvPr id="10" name="Connector 9"/>
+          <p:cNvCxnSpPr/>
+          <p:nvPr/>
+        </p:nvCxnSpPr>
+        <p:spPr>
+          <a:xfrm flipV="1">
+            <a:off x="5623560.0" y="1794510.0"/>
+            <a:ext cx="45720.0" cy="91440.0"/>
+          </a:xfrm>
+          <a:prstGeom prst="line">
+            <a:avLst/>
+          </a:prstGeom>
+          <a:ln w="25400">
+            <a:solidFill>
+              <a:srgbClr val="00C8FF"/>
+            </a:solidFill>
+          </a:ln>
+        </p:spPr>
+        <p:style>
+          <a:lnRef idx="2">
+            <a:schemeClr val="accent1"/>
+          </a:lnRef>
+          <a:fillRef idx="0">
+            <a:schemeClr val="accent1"/>
+          </a:fillRef>
+          <a:effectRef idx="1">
+            <a:schemeClr val="accent1"/>
+          </a:effectRef>
+          <a:fontRef idx="minor">
+            <a:schemeClr val="tx1"/>
+          </a:fontRef>
+        </p:style>
+      </p:cxnSp>
+      <p:cxnSp>
+        <p:nvCxnSpPr>
+          <p:cNvPr id="11" name="Connector 10"/>
+          <p:cNvCxnSpPr/>
+          <p:nvPr/>
+        </p:nvCxnSpPr>
+        <p:spPr>
+          <a:xfrm flipV="1">
+            <a:off x="5669280.0" y="1748790.0"/>
+            <a:ext cx="22860.0" cy="45720.0"/>
+          </a:xfrm>
+          <a:prstGeom prst="line">
+            <a:avLst/>
+          </a:prstGeom>
+          <a:ln w="25400">
+            <a:solidFill>
+              <a:srgbClr val="00C8FF"/>
+            </a:solidFill>
+          </a:ln>
+        </p:spPr>
+        <p:style>
+          <a:lnRef idx="2">
+            <a:schemeClr val="accent1"/>
+          </a:lnRef>
+          <a:fillRef idx="0">
+            <a:schemeClr val="accent1"/>
+          </a:fillRef>
+          <a:effectRef idx="1">
+            <a:schemeClr val="accent1"/>
+          </a:effectRef>
+          <a:fontRef idx="minor">
+            <a:schemeClr val="tx1"/>
+          </a:fontRef>
+        </p:style>
+      </p:cxnSp>
+      <p:cxnSp>
+        <p:nvCxnSpPr>
+          <p:cNvPr id="12" name="Connector 11"/>
+          <p:cNvCxnSpPr/>
+          <p:nvPr/>
+        </p:nvCxnSpPr>
+        <p:spPr>
+          <a:xfrm flipV="1">
+            <a:off x="5692140.0" y="1611630.0"/>
+            <a:ext cx="45720.0" cy="137160.0"/>
+          </a:xfrm>
+          <a:prstGeom prst="line">
+            <a:avLst/>
+          </a:prstGeom>
+          <a:ln w="25400">
+            <a:solidFill>
+              <a:srgbClr val="00C8FF"/>
+            </a:solidFill>
+          </a:ln>
+        </p:spPr>
+        <p:style>
+          <a:lnRef idx="2">
+            <a:schemeClr val="accent1"/>
+          </a:lnRef>
+          <a:fillRef idx="0">
+            <a:schemeClr val="accent1"/>
+          </a:fillRef>
+          <a:effectRef idx="1">
+            <a:schemeClr val="accent1"/>
+          </a:effectRef>
+          <a:fontRef idx="minor">
+            <a:schemeClr val="tx1"/>
+          </a:fontRef>
+        </p:style>
+      </p:cxnSp>
+      <p:cxnSp>
+        <p:nvCxnSpPr>
+          <p:cNvPr id="13" name="Connector 12"/>
+          <p:cNvCxnSpPr/>
+          <p:nvPr/>
+        </p:nvCxnSpPr>
+        <p:spPr>
+          <a:xfrm flipV="1">
+            <a:off x="5737860.0" y="1520190.0"/>
+            <a:ext cx="45720.0" cy="91440.0"/>
+          </a:xfrm>
+          <a:prstGeom prst="line">
+            <a:avLst/>
+          </a:prstGeom>
+          <a:ln w="25400">
+            <a:solidFill>
+              <a:srgbClr val="00C8FF"/>
+            </a:solidFill>
+          </a:ln>
+        </p:spPr>
+        <p:style>
+          <a:lnRef idx="2">
+            <a:schemeClr val="accent1"/>
+          </a:lnRef>
+          <a:fillRef idx="0">
+            <a:schemeClr val="accent1"/>
+          </a:fillRef>
+          <a:effectRef idx="1">
+            <a:schemeClr val="accent1"/>
+          </a:effectRef>
+          <a:fontRef idx="minor">
+            <a:schemeClr val="tx1"/>
+          </a:fontRef>
+        </p:style>
+      </p:cxnSp>
+      <p:cxnSp>
+        <p:nvCxnSpPr>
+          <p:cNvPr id="14" name="Connector 13"/>
+          <p:cNvCxnSpPr/>
+          <p:nvPr/>
+        </p:nvCxnSpPr>
+        <p:spPr>
+          <a:xfrm flipV="1">
+            <a:off x="5783580.0" y="1428750.0"/>
+            <a:ext cx="45720.0" cy="91440.0"/>
+          </a:xfrm>
+          <a:prstGeom prst="line">
+            <a:avLst/>
+          </a:prstGeom>
+          <a:ln w="25400">
+            <a:solidFill>
+              <a:srgbClr val="00C8FF"/>
+            </a:solidFill>
+          </a:ln>
+        </p:spPr>
+        <p:style>
+          <a:lnRef idx="2">
+            <a:schemeClr val="accent1"/>
+          </a:lnRef>
+          <a:fillRef idx="0">
+            <a:schemeClr val="accent1"/>
+          </a:fillRef>
+          <a:effectRef idx="1">
+            <a:schemeClr val="accent1"/>
+          </a:effectRef>
+          <a:fontRef idx="minor">
+            <a:schemeClr val="tx1"/>
+          </a:fontRef>
+        </p:style>
+      </p:cxnSp>
+      <p:cxnSp>
+        <p:nvCxnSpPr>
+          <p:cNvPr id="15" name="Connector 14"/>
+          <p:cNvCxnSpPr/>
+          <p:nvPr/>
+        </p:nvCxnSpPr>
+        <p:spPr>
+          <a:xfrm>
+            <a:off x="4572000.0" y="1657350.0"/>
+            <a:ext cx="45720.0" cy="45720.0"/>
+          </a:xfrm>
+          <a:prstGeom prst="line">
+            <a:avLst/>
+          </a:prstGeom>
+          <a:ln w="25400">
+            <a:solidFill>
+              <a:srgbClr val="00C8FF"/>
+            </a:solidFill>
+          </a:ln>
+        </p:spPr>
+        <p:style>
+          <a:lnRef idx="2">
+            <a:schemeClr val="accent1"/>
+          </a:lnRef>
+          <a:fillRef idx="0">
+            <a:schemeClr val="accent1"/>
+          </a:fillRef>
+          <a:effectRef idx="1">
+            <a:schemeClr val="accent1"/>
+          </a:effectRef>
+          <a:fontRef idx="minor">
+            <a:schemeClr val="tx1"/>
+          </a:fontRef>
+        </p:style>
+      </p:cxnSp>
+      <p:cxnSp>
+        <p:nvCxnSpPr>
+          <p:cNvPr id="16" name="Connector 15"/>
+          <p:cNvCxnSpPr/>
+          <p:nvPr/>
+        </p:nvCxnSpPr>
+        <p:spPr>
+          <a:xfrm>
+            <a:off x="4617720.0" y="1703070.0"/>
+            <a:ext cx="45720.0" cy="45720.0"/>
+          </a:xfrm>
+          <a:prstGeom prst="line">
+            <a:avLst/>
+          </a:prstGeom>
+          <a:ln w="25400">
+            <a:solidFill>
+              <a:srgbClr val="00C8FF"/>
+            </a:solidFill>
+          </a:ln>
+        </p:spPr>
+        <p:style>
+          <a:lnRef idx="2">
+            <a:schemeClr val="accent1"/>
+          </a:lnRef>
+          <a:fillRef idx="0">
+            <a:schemeClr val="accent1"/>
+          </a:fillRef>
+          <a:effectRef idx="1">
+            <a:schemeClr val="accent1"/>
+          </a:effectRef>
+          <a:fontRef idx="minor">
+            <a:schemeClr val="tx1"/>
+          </a:fontRef>
+        </p:style>
+      </p:cxnSp>
+      <p:cxnSp>
+        <p:nvCxnSpPr>
+          <p:cNvPr id="17" name="Connector 16"/>
+          <p:cNvCxnSpPr/>
+          <p:nvPr/>
+        </p:nvCxnSpPr>
+        <p:spPr>
+          <a:xfrm>
+            <a:off x="4663440.0" y="1748790.0"/>
+            <a:ext cx="45720.0" cy="45720.0"/>
+          </a:xfrm>
+          <a:prstGeom prst="line">
+            <a:avLst/>
+          </a:prstGeom>
+          <a:ln w="25400">
+            <a:solidFill>
+              <a:srgbClr val="00C8FF"/>
+            </a:solidFill>
+          </a:ln>
+        </p:spPr>
+        <p:style>
+          <a:lnRef idx="2">
+            <a:schemeClr val="accent1"/>
+          </a:lnRef>
+          <a:fillRef idx="0">
+            <a:schemeClr val="accent1"/>
+          </a:fillRef>
+          <a:effectRef idx="1">
+            <a:schemeClr val="accent1"/>
+          </a:effectRef>
+          <a:fontRef idx="minor">
+            <a:schemeClr val="tx1"/>
+          </a:fontRef>
+        </p:style>
+      </p:cxnSp>
+      <p:cxnSp>
+        <p:nvCxnSpPr>
+          <p:cNvPr id="18" name="Connector 17"/>
+          <p:cNvCxnSpPr/>
+          <p:nvPr/>
+        </p:nvCxnSpPr>
+        <p:spPr>
+          <a:xfrm>
+            <a:off x="4709160.0" y="1794510.0"/>
+            <a:ext cx="45720.0" cy="45720.0"/>
+          </a:xfrm>
+          <a:prstGeom prst="line">
+            <a:avLst/>
+          </a:prstGeom>
+          <a:ln w="25400">
+            <a:solidFill>
+              <a:srgbClr val="00C8FF"/>
+            </a:solidFill>
+          </a:ln>
+        </p:spPr>
+        <p:style>
+          <a:lnRef idx="2">
+            <a:schemeClr val="accent1"/>
+          </a:lnRef>
+          <a:fillRef idx="0">
+            <a:schemeClr val="accent1"/>
+          </a:fillRef>
+          <a:effectRef idx="1">
+            <a:schemeClr val="accent1"/>
+          </a:effectRef>
+          <a:fontRef idx="minor">
+            <a:schemeClr val="tx1"/>
+          </a:fontRef>
+        </p:style>
+      </p:cxnSp>
+      <p:cxnSp>
+        <p:nvCxnSpPr>
+          <p:cNvPr id="19" name="Connector 18"/>
+          <p:cNvCxnSpPr/>
+          <p:nvPr/>
+        </p:nvCxnSpPr>
+        <p:spPr>
+          <a:xfrm>
+            <a:off x="4754880.0" y="1840230.0"/>
+            <a:ext cx="45720.0" cy="45720.0"/>
+          </a:xfrm>
+          <a:prstGeom prst="line">
+            <a:avLst/>
+          </a:prstGeom>
+          <a:ln w="25400">
+            <a:solidFill>
+              <a:srgbClr val="00C8FF"/>
+            </a:solidFill>
+          </a:ln>
+        </p:spPr>
+        <p:style>
+          <a:lnRef idx="2">
+            <a:schemeClr val="accent1"/>
+          </a:lnRef>
+          <a:fillRef idx="0">
+            <a:schemeClr val="accent1"/>
+          </a:fillRef>
+          <a:effectRef idx="1">
+            <a:schemeClr val="accent1"/>
+          </a:effectRef>
+          <a:fontRef idx="minor">
+            <a:schemeClr val="tx1"/>
+          </a:fontRef>
+        </p:style>
+      </p:cxnSp>
+      <p:cxnSp>
+        <p:nvCxnSpPr>
+          <p:cNvPr id="20" name="Connector 19"/>
+          <p:cNvCxnSpPr/>
+          <p:nvPr/>
+        </p:nvCxnSpPr>
+        <p:spPr>
+          <a:xfrm>
+            <a:off x="4800600.0" y="1885950.0"/>
+            <a:ext cx="45720.0" cy="45720.0"/>
+          </a:xfrm>
+          <a:prstGeom prst="line">
+            <a:avLst/>
+          </a:prstGeom>
+          <a:ln w="25400">
+            <a:solidFill>
+              <a:srgbClr val="00C8FF"/>
+            </a:solidFill>
+          </a:ln>
+        </p:spPr>
+        <p:style>
+          <a:lnRef idx="2">
+            <a:schemeClr val="accent1"/>
+          </a:lnRef>
+          <a:fillRef idx="0">
+            <a:schemeClr val="accent1"/>
+          </a:fillRef>
+          <a:effectRef idx="1">
+            <a:schemeClr val="accent1"/>
+          </a:effectRef>
+          <a:fontRef idx="minor">
+            <a:schemeClr val="tx1"/>
+          </a:fontRef>
+        </p:style>
+      </p:cxnSp>
+      <p:cxnSp>
+        <p:nvCxnSpPr>
+          <p:cNvPr id="21" name="Connector 20"/>
+          <p:cNvCxnSpPr/>
+          <p:nvPr/>
+        </p:nvCxnSpPr>
+        <p:spPr>
+          <a:xfrm>
+            <a:off x="4846320.0" y="1931670.0"/>
+            <a:ext cx="45720.0" cy="45720.0"/>
+          </a:xfrm>
+          <a:prstGeom prst="line">
+            <a:avLst/>
+          </a:prstGeom>
+          <a:ln w="25400">
+            <a:solidFill>
+              <a:srgbClr val="00C8FF"/>
+            </a:solidFill>
+          </a:ln>
+        </p:spPr>
+        <p:style>
+          <a:lnRef idx="2">
+            <a:schemeClr val="accent1"/>
+          </a:lnRef>
+          <a:fillRef idx="0">
+            <a:schemeClr val="accent1"/>
+          </a:fillRef>
+          <a:effectRef idx="1">
+            <a:schemeClr val="accent1"/>
+          </a:effectRef>
+          <a:fontRef idx="minor">
+            <a:schemeClr val="tx1"/>
+          </a:fontRef>
+        </p:style>
+      </p:cxnSp>
+      <p:cxnSp>
+        <p:nvCxnSpPr>
+          <p:cNvPr id="22" name="Connector 21"/>
+          <p:cNvCxnSpPr/>
+          <p:nvPr/>
+        </p:nvCxnSpPr>
+        <p:spPr>
+          <a:xfrm>
+            <a:off x="4892040.0" y="1977390.0"/>
+            <a:ext cx="45720.0" cy="45720.0"/>
+          </a:xfrm>
+          <a:prstGeom prst="line">
+            <a:avLst/>
+          </a:prstGeom>
+          <a:ln w="25400">
+            <a:solidFill>
+              <a:srgbClr val="00C8FF"/>
+            </a:solidFill>
+          </a:ln>
+        </p:spPr>
+        <p:style>
+          <a:lnRef idx="2">
+            <a:schemeClr val="accent1"/>
+          </a:lnRef>
+          <a:fillRef idx="0">
+            <a:schemeClr val="accent1"/>
+          </a:fillRef>
+          <a:effectRef idx="1">
+            <a:schemeClr val="accent1"/>
+          </a:effectRef>
+          <a:fontRef idx="minor">
+            <a:schemeClr val="tx1"/>
+          </a:fontRef>
+        </p:style>
+      </p:cxnSp>
+      <p:cxnSp>
+        <p:nvCxnSpPr>
+          <p:cNvPr id="23" name="Connector 22"/>
+          <p:cNvCxnSpPr/>
+          <p:nvPr/>
+        </p:nvCxnSpPr>
+        <p:spPr>
+          <a:xfrm>
+            <a:off x="4937760.0" y="2023110.0"/>
+            <a:ext cx="45720.0" cy="45720.0"/>
+          </a:xfrm>
+          <a:prstGeom prst="line">
+            <a:avLst/>
+          </a:prstGeom>
+          <a:ln w="25400">
+            <a:solidFill>
+              <a:srgbClr val="00C8FF"/>
+            </a:solidFill>
+          </a:ln>
+        </p:spPr>
+        <p:style>
+          <a:lnRef idx="2">
+            <a:schemeClr val="accent1"/>
+          </a:lnRef>
+          <a:fillRef idx="0">
+            <a:schemeClr val="accent1"/>
+          </a:fillRef>
+          <a:effectRef idx="1">
+            <a:schemeClr val="accent1"/>
+          </a:effectRef>
+          <a:fontRef idx="minor">
+            <a:schemeClr val="tx1"/>
+          </a:fontRef>
+        </p:style>
+      </p:cxnSp>
+      <p:cxnSp>
+        <p:nvCxnSpPr>
+          <p:cNvPr id="24" name="Connector 23"/>
+          <p:cNvCxnSpPr/>
+          <p:nvPr/>
+        </p:nvCxnSpPr>
+        <p:spPr>
+          <a:xfrm flipV="1">
+            <a:off x="5029200.0" y="1611630.0"/>
+            <a:ext cx="45720.0" cy="45720.0"/>
+          </a:xfrm>
+          <a:prstGeom prst="line">
+            <a:avLst/>
+          </a:prstGeom>
+          <a:ln w="25400">
+            <a:solidFill>
+              <a:srgbClr val="00C8FF"/>
+            </a:solidFill>
+          </a:ln>
+        </p:spPr>
+        <p:style>
+          <a:lnRef idx="2">
+            <a:schemeClr val="accent1"/>
+          </a:lnRef>
+          <a:fillRef idx="0">
+            <a:schemeClr val="accent1"/>
+          </a:fillRef>
+          <a:effectRef idx="1">
+            <a:schemeClr val="accent1"/>
+          </a:effectRef>
+          <a:fontRef idx="minor">
+            <a:schemeClr val="tx1"/>
+          </a:fontRef>
+        </p:style>
+      </p:cxnSp>
+      <p:cxnSp>
+        <p:nvCxnSpPr>
+          <p:cNvPr id="25" name="Connector 24"/>
+          <p:cNvCxnSpPr/>
+          <p:nvPr/>
+        </p:nvCxnSpPr>
+        <p:spPr>
+          <a:xfrm flipV="1">
+            <a:off x="5074920.0" y="1565910.0"/>
+            <a:ext cx="45720.0" cy="45720.0"/>
+          </a:xfrm>
+          <a:prstGeom prst="line">
+            <a:avLst/>
+          </a:prstGeom>
+          <a:ln w="25400">
+            <a:solidFill>
+              <a:srgbClr val="00C8FF"/>
+            </a:solidFill>
+          </a:ln>
+        </p:spPr>
+        <p:style>
+          <a:lnRef idx="2">
+            <a:schemeClr val="accent1"/>
+          </a:lnRef>
+          <a:fillRef idx="0">
+            <a:schemeClr val="accent1"/>
+          </a:fillRef>
+          <a:effectRef idx="1">
+            <a:schemeClr val="accent1"/>
+          </a:effectRef>
+          <a:fontRef idx="minor">
+            <a:schemeClr val="tx1"/>
+          </a:fontRef>
+        </p:style>
+      </p:cxnSp>
+      <p:cxnSp>
+        <p:nvCxnSpPr>
+          <p:cNvPr id="26" name="Connector 25"/>
+          <p:cNvCxnSpPr/>
+          <p:nvPr/>
+        </p:nvCxnSpPr>
+        <p:spPr>
+          <a:xfrm flipV="1">
+            <a:off x="5120640.0" y="1520190.0"/>
+            <a:ext cx="45720.0" cy="45720.0"/>
+          </a:xfrm>
+          <a:prstGeom prst="line">
+            <a:avLst/>
+          </a:prstGeom>
+          <a:ln w="25400">
+            <a:solidFill>
+              <a:srgbClr val="00C8FF"/>
+            </a:solidFill>
+          </a:ln>
+        </p:spPr>
+        <p:style>
+          <a:lnRef idx="2">
+            <a:schemeClr val="accent1"/>
+          </a:lnRef>
+          <a:fillRef idx="0">
+            <a:schemeClr val="accent1"/>
+          </a:fillRef>
+          <a:effectRef idx="1">
+            <a:schemeClr val="accent1"/>
+          </a:effectRef>
+          <a:fontRef idx="minor">
+            <a:schemeClr val="tx1"/>
+          </a:fontRef>
+        </p:style>
+      </p:cxnSp>
+      <p:cxnSp>
+        <p:nvCxnSpPr>
+          <p:cNvPr id="27" name="Connector 26"/>
+          <p:cNvCxnSpPr/>
+          <p:nvPr/>
+        </p:nvCxnSpPr>
+        <p:spPr>
+          <a:xfrm flipV="1">
+            <a:off x="5166360.0" y="1474470.0"/>
+            <a:ext cx="45720.0" cy="45720.0"/>
+          </a:xfrm>
+          <a:prstGeom prst="line">
+            <a:avLst/>
+          </a:prstGeom>
+          <a:ln w="25400">
+            <a:solidFill>
+              <a:srgbClr val="00C8FF"/>
+            </a:solidFill>
+          </a:ln>
+        </p:spPr>
+        <p:style>
+          <a:lnRef idx="2">
+            <a:schemeClr val="accent1"/>
+          </a:lnRef>
+          <a:fillRef idx="0">
+            <a:schemeClr val="accent1"/>
+          </a:fillRef>
+          <a:effectRef idx="1">
+            <a:schemeClr val="accent1"/>
+          </a:effectRef>
+          <a:fontRef idx="minor">
+            <a:schemeClr val="tx1"/>
+          </a:fontRef>
+        </p:style>
+      </p:cxnSp>
+      <p:cxnSp>
+        <p:nvCxnSpPr>
+          <p:cNvPr id="28" name="Connector 27"/>
+          <p:cNvCxnSpPr/>
+          <p:nvPr/>
+        </p:nvCxnSpPr>
+        <p:spPr>
+          <a:xfrm flipV="1">
+            <a:off x="5212080.0" y="1428750.0"/>
+            <a:ext cx="45720.0" cy="45720.0"/>
+          </a:xfrm>
+          <a:prstGeom prst="line">
+            <a:avLst/>
+          </a:prstGeom>
+          <a:ln w="25400">
+            <a:solidFill>
+              <a:srgbClr val="00C8FF"/>
+            </a:solidFill>
+          </a:ln>
+        </p:spPr>
+        <p:style>
+          <a:lnRef idx="2">
+            <a:schemeClr val="accent1"/>
+          </a:lnRef>
+          <a:fillRef idx="0">
+            <a:schemeClr val="accent1"/>
+          </a:fillRef>
+          <a:effectRef idx="1">
+            <a:schemeClr val="accent1"/>
+          </a:effectRef>
+          <a:fontRef idx="minor">
+            <a:schemeClr val="tx1"/>
+          </a:fontRef>
+        </p:style>
+      </p:cxnSp>
+      <p:cxnSp>
+        <p:nvCxnSpPr>
+          <p:cNvPr id="29" name="Connector 28"/>
+          <p:cNvCxnSpPr/>
+          <p:nvPr/>
+        </p:nvCxnSpPr>
+        <p:spPr>
+          <a:xfrm flipV="1">
+            <a:off x="5257800.0" y="1383030.0"/>
+            <a:ext cx="45720.0" cy="45720.0"/>
+          </a:xfrm>
+          <a:prstGeom prst="line">
+            <a:avLst/>
+          </a:prstGeom>
+          <a:ln w="25400">
+            <a:solidFill>
+              <a:srgbClr val="00C8FF"/>
+            </a:solidFill>
+          </a:ln>
+        </p:spPr>
+        <p:style>
+          <a:lnRef idx="2">
+            <a:schemeClr val="accent1"/>
+          </a:lnRef>
+          <a:fillRef idx="0">
+            <a:schemeClr val="accent1"/>
+          </a:fillRef>
+          <a:effectRef idx="1">
+            <a:schemeClr val="accent1"/>
+          </a:effectRef>
+          <a:fontRef idx="minor">
+            <a:schemeClr val="tx1"/>
+          </a:fontRef>
+        </p:style>
+      </p:cxnSp>
+      <p:cxnSp>
+        <p:nvCxnSpPr>
+          <p:cNvPr id="30" name="Connector 29"/>
+          <p:cNvCxnSpPr/>
+          <p:nvPr/>
+        </p:nvCxnSpPr>
+        <p:spPr>
+          <a:xfrm flipV="1">
+            <a:off x="5303520.0" y="1337310.0"/>
+            <a:ext cx="45720.0" cy="45720.0"/>
+          </a:xfrm>
+          <a:prstGeom prst="line">
+            <a:avLst/>
+          </a:prstGeom>
+          <a:ln w="25400">
+            <a:solidFill>
+              <a:srgbClr val="00C8FF"/>
+            </a:solidFill>
+          </a:ln>
+        </p:spPr>
+        <p:style>
+          <a:lnRef idx="2">
+            <a:schemeClr val="accent1"/>
+          </a:lnRef>
+          <a:fillRef idx="0">
+            <a:schemeClr val="accent1"/>
+          </a:fillRef>
+          <a:effectRef idx="1">
+            <a:schemeClr val="accent1"/>
+          </a:effectRef>
+          <a:fontRef idx="minor">
+            <a:schemeClr val="tx1"/>
+          </a:fontRef>
+        </p:style>
+      </p:cxnSp>
+      <p:cxnSp>
+        <p:nvCxnSpPr>
+          <p:cNvPr id="31" name="Connector 30"/>
+          <p:cNvCxnSpPr/>
+          <p:nvPr/>
+        </p:nvCxnSpPr>
+        <p:spPr>
+          <a:xfrm flipV="1">
+            <a:off x="5349240.0" y="1291590.0"/>
+            <a:ext cx="45720.0" cy="45720.0"/>
+          </a:xfrm>
+          <a:prstGeom prst="line">
+            <a:avLst/>
+          </a:prstGeom>
+          <a:ln w="25400">
+            <a:solidFill>
+              <a:srgbClr val="00C8FF"/>
+            </a:solidFill>
+          </a:ln>
+        </p:spPr>
+        <p:style>
+          <a:lnRef idx="2">
+            <a:schemeClr val="accent1"/>
+          </a:lnRef>
+          <a:fillRef idx="0">
+            <a:schemeClr val="accent1"/>
+          </a:fillRef>
+          <a:effectRef idx="1">
+            <a:schemeClr val="accent1"/>
+          </a:effectRef>
+          <a:fontRef idx="minor">
+            <a:schemeClr val="tx1"/>
+          </a:fontRef>
+        </p:style>
+      </p:cxnSp>
+      <p:cxnSp>
+        <p:nvCxnSpPr>
+          <p:cNvPr id="32" name="Connector 31"/>
+          <p:cNvCxnSpPr/>
+          <p:nvPr/>
+        </p:nvCxnSpPr>
+        <p:spPr>
+          <a:xfrm flipV="1">
+            <a:off x="5394960.0" y="1245870.0"/>
+            <a:ext cx="45720.0" cy="45720.0"/>
+          </a:xfrm>
+          <a:prstGeom prst="line">
+            <a:avLst/>
+          </a:prstGeom>
+          <a:ln w="25400">
+            <a:solidFill>
+              <a:srgbClr val="00C8FF"/>
+            </a:solidFill>
+          </a:ln>
+        </p:spPr>
+        <p:style>
+          <a:lnRef idx="2">
+            <a:schemeClr val="accent1"/>
+          </a:lnRef>
+          <a:fillRef idx="0">
+            <a:schemeClr val="accent1"/>
+          </a:fillRef>
+          <a:effectRef idx="1">
+            <a:schemeClr val="accent1"/>
+          </a:effectRef>
+          <a:fontRef idx="minor">
+            <a:schemeClr val="tx1"/>
+          </a:fontRef>
+        </p:style>
+      </p:cxnSp>
+      <p:cxnSp>
+        <p:nvCxnSpPr>
+          <p:cNvPr id="33" name="Connector 32"/>
+          <p:cNvCxnSpPr/>
+          <p:nvPr/>
+        </p:nvCxnSpPr>
+        <p:spPr>
+          <a:xfrm flipV="1">
+            <a:off x="5440680.0" y="1200150.0"/>
+            <a:ext cx="45720.0" cy="45720.0"/>
+          </a:xfrm>
+          <a:prstGeom prst="line">
+            <a:avLst/>
+          </a:prstGeom>
+          <a:ln w="25400">
+            <a:solidFill>
+              <a:srgbClr val="00C8FF"/>
+            </a:solidFill>
+          </a:ln>
+        </p:spPr>
+        <p:style>
+          <a:lnRef idx="2">
+            <a:schemeClr val="accent1"/>
+          </a:lnRef>
+          <a:fillRef idx="0">
+            <a:schemeClr val="accent1"/>
+          </a:fillRef>
+          <a:effectRef idx="1">
+            <a:schemeClr val="accent1"/>
+          </a:effectRef>
+          <a:fontRef idx="minor">
+            <a:schemeClr val="tx1"/>
+          </a:fontRef>
+        </p:style>
+      </p:cxnSp>
+      <p:sp>
+        <p:nvSpPr>
+          <p:cNvPr id="34" name="Oval 33"/>
+          <p:cNvSpPr/>
+          <p:nvPr/>
+        </p:nvSpPr>
+        <p:spPr>
+          <a:xfrm>
+            <a:off x="5676900" y="1619250"/>
+            <a:ext cx="76200" cy="76200"/>
+          </a:xfrm>
+          <a:prstGeom prst="ellipse">
+            <a:avLst/>
+          </a:prstGeom>
+          <a:noFill/>
+          <a:ln>
+            <a:solidFill>
+              <a:srgbClr val="FFFFFF"/>
+            </a:solidFill>
+          </a:ln>
+        </p:spPr>
+        <p:style>
+          <a:lnRef idx="1">
+            <a:schemeClr val="accent1"/>
+          </a:lnRef>
+          <a:fillRef idx="3">
+            <a:schemeClr val="accent1"/>
+          </a:fillRef>
+          <a:effectRef idx="2">
+            <a:schemeClr val="accent1"/>
+          </a:effectRef>
+          <a:fontRef idx="minor">
+            <a:schemeClr val="lt1"/>
+          </a:fontRef>
+        </p:style>
+        <p:txBody>
+          <a:bodyPr rtlCol="0" anchor="ctr"/>
+          <a:lstStyle/>
+          <a:p>
+            <a:pPr algn="ctr"/>
+          </a:p>
+        </p:txBody>
+      </p:sp>
+      <p:sp>
+        <p:nvSpPr>
+          <p:cNvPr id="35" name="Oval 34"/>
+          <p:cNvSpPr/>
+          <p:nvPr/>
+        </p:nvSpPr>
+        <p:spPr>
+          <a:xfrm>
+            <a:off x="4991100" y="2076450"/>
+            <a:ext cx="76200" cy="76200"/>
+          </a:xfrm>
+          <a:prstGeom prst="ellipse">
+            <a:avLst/>
+          </a:prstGeom>
+          <a:noFill/>
+          <a:ln>
+            <a:solidFill>
+              <a:srgbClr val="FFFFFF"/>
+            </a:solidFill>
+          </a:ln>
+        </p:spPr>
+        <p:style>
+          <a:lnRef idx="1">
+            <a:schemeClr val="accent1"/>
+          </a:lnRef>
+          <a:fillRef idx="3">
+            <a:schemeClr val="accent1"/>
+          </a:fillRef>
+          <a:effectRef idx="2">
+            <a:schemeClr val="accent1"/>
+          </a:effectRef>
+          <a:fontRef idx="minor">
+            <a:schemeClr val="lt1"/>
+          </a:fontRef>
+        </p:style>
+        <p:txBody>
+          <a:bodyPr rtlCol="0" anchor="ctr"/>
+          <a:lstStyle/>
+          <a:p>
+            <a:pPr algn="ctr"/>
+          </a:p>
+        </p:txBody>
+      </p:sp>
+      <p:sp>
+        <p:nvSpPr>
+          <p:cNvPr id="36" name="Oval 35"/>
+          <p:cNvSpPr/>
+          <p:nvPr/>
+        </p:nvSpPr>
+        <p:spPr>
+          <a:xfrm>
+            <a:off x="4991100" y="1619250"/>
+            <a:ext cx="76200" cy="76200"/>
+          </a:xfrm>
+          <a:prstGeom prst="ellipse">
+            <a:avLst/>
+          </a:prstGeom>
+          <a:solidFill>
+            <a:srgbClr val="FFFFFF"/>
+          </a:solidFill>
+          <a:ln>
+            <a:solidFill>
+              <a:srgbClr val="FFFFFF"/>
+            </a:solidFill>
+          </a:ln>
+        </p:spPr>
+        <p:style>
+          <a:lnRef idx="1">
+            <a:schemeClr val="accent1"/>
+          </a:lnRef>
+          <a:fillRef idx="3">
+            <a:schemeClr val="accent1"/>
+          </a:fillRef>
+          <a:effectRef idx="2">
+            <a:schemeClr val="accent1"/>
+          </a:effectRef>
+          <a:fontRef idx="minor">
+            <a:schemeClr val="lt1"/>
+          </a:fontRef>
+        </p:style>
+        <p:txBody>
+          <a:bodyPr rtlCol="0" anchor="ctr"/>
+          <a:lstStyle/>
+          <a:p>
+            <a:pPr algn="ctr"/>
+          </a:p>
+        </p:txBody>
+      </p:sp>
+      <p:sp>
+        <p:nvSpPr>
+          <p:cNvPr id="37" name="TextBox 36"/>
+          <p:cNvSpPr txBox="1"/>
+          <p:nvPr/>
+        </p:nvSpPr>
+        <p:spPr>
+          <a:xfrm>
+            <a:off x="4480560" y="2663190"/>
+            <a:ext cx="635000" cy="254000"/>
+          </a:xfrm>
+          <a:prstGeom prst="rect">
+            <a:avLst/>
+          </a:prstGeom>
+          <a:noFill/>
+        </p:spPr>
+        <p:txBody>
+          <a:bodyPr wrap="none">
+            <a:spAutoFit/>
+          </a:bodyPr>
+          <a:lstStyle/>
+          <a:p>
+            <a:pPr>
+              <a:defRPr sz="1200">
+                <a:solidFill>
+                  <a:srgbClr val="FFFFFF"/>
+                </a:solidFill>
+                <a:latin typeface="Inter"/>
+              </a:defRPr>
+            </a:pPr>
+            <a:r>
+              <a:t>O</a:t>
+            </a:r>
+          </a:p>
+        </p:txBody>
+      </p:sp>
+      <p:sp>
+        <p:nvSpPr>
+          <p:cNvPr id="38" name="TextBox 37"/>
+          <p:cNvSpPr txBox="1"/>
+          <p:nvPr/>
+        </p:nvSpPr>
+        <p:spPr>
+          <a:xfrm>
+            <a:off x="6217920" y="2663190"/>
+            <a:ext cx="635000" cy="254000"/>
+          </a:xfrm>
+          <a:prstGeom prst="rect">
+            <a:avLst/>
+          </a:prstGeom>
+          <a:noFill/>
+        </p:spPr>
+        <p:txBody>
+          <a:bodyPr wrap="none">
+            <a:spAutoFit/>
+          </a:bodyPr>
+          <a:lstStyle/>
+          <a:p>
+            <a:pPr>
+              <a:defRPr sz="1200">
+                <a:solidFill>
+                  <a:srgbClr val="FFFFFF"/>
+                </a:solidFill>
+                <a:latin typeface="Inter"/>
+              </a:defRPr>
+            </a:pPr>
+            <a:r>
+              <a:t>x</a:t>
+            </a:r>
+          </a:p>
+        </p:txBody>
+      </p:sp>
+      <p:sp>
+        <p:nvSpPr>
+          <p:cNvPr id="39" name="TextBox 38"/>
+          <p:cNvSpPr txBox="1"/>
+          <p:nvPr/>
+        </p:nvSpPr>
+        <p:spPr>
+          <a:xfrm>
+            <a:off x="4480560" y="1017270"/>
+            <a:ext cx="635000" cy="254000"/>
+          </a:xfrm>
+          <a:prstGeom prst="rect">
+            <a:avLst/>
+          </a:prstGeom>
+          <a:noFill/>
+        </p:spPr>
+        <p:txBody>
+          <a:bodyPr wrap="none">
+            <a:spAutoFit/>
+          </a:bodyPr>
+          <a:lstStyle/>
+          <a:p>
+            <a:pPr>
+              <a:defRPr sz="1200">
+                <a:solidFill>
+                  <a:srgbClr val="FFFFFF"/>
+                </a:solidFill>
+                <a:latin typeface="Inter"/>
+              </a:defRPr>
+            </a:pPr>
+            <a:r>
+              <a:t>y</a:t>
+            </a:r>
+          </a:p>
+        </p:txBody>
+      </p:sp>
+      <p:sp>
+        <p:nvSpPr>
+          <p:cNvPr id="40" name="TextBox 39"/>
+          <p:cNvSpPr txBox="1"/>
+          <p:nvPr/>
+        </p:nvSpPr>
+        <p:spPr>
+          <a:xfrm>
+            <a:off x="5715000" y="2663190"/>
+            <a:ext cx="635000" cy="254000"/>
+          </a:xfrm>
+          <a:prstGeom prst="rect">
+            <a:avLst/>
+          </a:prstGeom>
+          <a:noFill/>
+        </p:spPr>
+        <p:txBody>
+          <a:bodyPr wrap="none">
+            <a:spAutoFit/>
+          </a:bodyPr>
+          <a:lstStyle/>
+          <a:p>
+            <a:pPr>
+              <a:defRPr sz="1200">
+                <a:solidFill>
+                  <a:srgbClr val="FFFFFF"/>
+                </a:solidFill>
+                <a:latin typeface="Inter"/>
+              </a:defRPr>
+            </a:pPr>
+            <a:r>
+              <a:t>a</a:t>
+            </a:r>
+          </a:p>
+        </p:txBody>
+      </p:sp>
+      <p:sp>
+        <p:nvSpPr>
+          <p:cNvPr id="41" name="TextBox 40"/>
+          <p:cNvSpPr txBox="1"/>
+          <p:nvPr/>
+        </p:nvSpPr>
+        <p:spPr>
+          <a:xfrm>
+            <a:off x="4480560" y="1657350"/>
+            <a:ext cx="635000" cy="254000"/>
+          </a:xfrm>
+          <a:prstGeom prst="rect">
+            <a:avLst/>
+          </a:prstGeom>
+          <a:noFill/>
+        </p:spPr>
+        <p:txBody>
+          <a:bodyPr wrap="none">
+            <a:spAutoFit/>
+          </a:bodyPr>
+          <a:lstStyle/>
+          <a:p>
+            <a:pPr>
+              <a:defRPr sz="1200">
+                <a:solidFill>
+                  <a:srgbClr val="FFFFFF"/>
+                </a:solidFill>
+                <a:latin typeface="Inter"/>
+              </a:defRPr>
+            </a:pPr>
+            <a:r>
+              <a:t>L</a:t>
+            </a:r>
+          </a:p>
+        </p:txBody>
+      </p:sp>
+      <p:sp>
+        <p:nvSpPr>
+          <p:cNvPr id="42" name="TextBox 41"/>
+          <p:cNvSpPr txBox="1"/>
+          <p:nvPr/>
+        </p:nvSpPr>
+        <p:spPr>
+          <a:xfrm>
+            <a:off x="5806440" y="1565910"/>
+            <a:ext cx="635000" cy="254000"/>
+          </a:xfrm>
+          <a:prstGeom prst="rect">
+            <a:avLst/>
+          </a:prstGeom>
+          <a:noFill/>
+        </p:spPr>
+        <p:txBody>
+          <a:bodyPr wrap="none">
+            <a:spAutoFit/>
+          </a:bodyPr>
+          <a:lstStyle/>
+          <a:p>
+            <a:pPr>
+              <a:defRPr sz="1200">
+                <a:solidFill>
+                  <a:srgbClr val="FFFFFF"/>
+                </a:solidFill>
+                <a:latin typeface="Inter"/>
+              </a:defRPr>
+            </a:pPr>
+            <a:r>
+              <a:t>y=f(x)</a:t>
+            </a:r>
+          </a:p>
+        </p:txBody>
+      </p:sp>
+      <p:sp>
+        <p:nvSpPr>
+          <p:cNvPr id="43" name="TextBox 42"/>
+          <p:cNvSpPr txBox="1"/>
+          <p:nvPr/>
+        </p:nvSpPr>
+        <p:spPr>
+          <a:xfrm>
+            <a:off x="4572000" y="2571750"/>
+            <a:ext cx="635000" cy="254000"/>
+          </a:xfrm>
+          <a:prstGeom prst="rect">
+            <a:avLst/>
+          </a:prstGeom>
+          <a:noFill/>
+        </p:spPr>
+        <p:txBody>
+          <a:bodyPr wrap="none">
+            <a:spAutoFit/>
+          </a:bodyPr>
+          <a:lstStyle/>
+          <a:p>
+            <a:pPr>
+              <a:defRPr sz="1200">
+                <a:solidFill>
+                  <a:srgbClr val="FFFFFF"/>
+                </a:solidFill>
+                <a:latin typeface="Inter"/>
+              </a:defRPr>
+            </a:pPr>
+          </a:p>
+        </p:txBody>
+      </p:sp>
+      <p:sp>
+        <p:nvSpPr>
+          <p:cNvPr id="44" name="TextBox 43"/>
+          <p:cNvSpPr txBox="1"/>
+          <p:nvPr/>
+        </p:nvSpPr>
+        <p:spPr>
+          <a:xfrm>
+            <a:off x="4572000" y="2571750"/>
+            <a:ext cx="635000" cy="254000"/>
+          </a:xfrm>
+          <a:prstGeom prst="rect">
+            <a:avLst/>
+          </a:prstGeom>
+          <a:noFill/>
+        </p:spPr>
+        <p:txBody>
+          <a:bodyPr wrap="none">
+            <a:spAutoFit/>
+          </a:bodyPr>
+          <a:lstStyle/>
+          <a:p>
+            <a:pPr>
+              <a:defRPr sz="1200">
+                <a:solidFill>
+                  <a:srgbClr val="FFFFFF"/>
+                </a:solidFill>
+                <a:latin typeface="Inter"/>
+              </a:defRPr>
+            </a:pPr>
+          </a:p>
+        </p:txBody>
+      </p:sp>
+      <p:sp>
+        <p:nvSpPr>
+          <p:cNvPr id="45" name="TextBox 44"/>
+          <p:cNvSpPr txBox="1"/>
+          <p:nvPr/>
+        </p:nvSpPr>
+        <p:spPr>
+          <a:xfrm>
+            <a:off x="4572000" y="2571750"/>
+            <a:ext cx="635000" cy="254000"/>
+          </a:xfrm>
+          <a:prstGeom prst="rect">
+            <a:avLst/>
+          </a:prstGeom>
+          <a:noFill/>
+        </p:spPr>
+        <p:txBody>
+          <a:bodyPr wrap="none">
+            <a:spAutoFit/>
+          </a:bodyPr>
+          <a:lstStyle/>
+          <a:p>
+            <a:pPr>
+              <a:defRPr sz="1200">
+                <a:solidFill>
+                  <a:srgbClr val="FFFFFF"/>
+                </a:solidFill>
+                <a:latin typeface="Inter"/>
+              </a:defRPr>
+            </a:pPr>
+          </a:p>
+        </p:txBody>
+      </p:sp>
+      <p:sp>
+        <p:nvSpPr>
+          <p:cNvPr id="46" name="TextBox 45"/>
+          <p:cNvSpPr txBox="1"/>
+          <p:nvPr/>
+        </p:nvSpPr>
+        <p:spPr>
+          <a:xfrm>
+            <a:off x="4572000" y="2571750"/>
+            <a:ext cx="635000" cy="254000"/>
+          </a:xfrm>
+          <a:prstGeom prst="rect">
+            <a:avLst/>
+          </a:prstGeom>
+          <a:noFill/>
+        </p:spPr>
+        <p:txBody>
+          <a:bodyPr wrap="none">
+            <a:spAutoFit/>
+          </a:bodyPr>
+          <a:lstStyle/>
+          <a:p>
+            <a:pPr>
+              <a:defRPr sz="1200">
+                <a:solidFill>
+                  <a:srgbClr val="FFFFFF"/>
+                </a:solidFill>
+                <a:latin typeface="Inter"/>
+              </a:defRPr>
+            </a:pPr>
+          </a:p>
+        </p:txBody>
+      </p:sp>
+      <p:sp>
+        <p:nvSpPr>
+          <p:cNvPr id="47" name="TextBox 46"/>
+          <p:cNvSpPr txBox="1"/>
+          <p:nvPr/>
+        </p:nvSpPr>
+        <p:spPr>
+          <a:xfrm>
+            <a:off x="4572000" y="2571750"/>
+            <a:ext cx="635000" cy="254000"/>
+          </a:xfrm>
+          <a:prstGeom prst="rect">
+            <a:avLst/>
+          </a:prstGeom>
+          <a:noFill/>
+        </p:spPr>
+        <p:txBody>
+          <a:bodyPr wrap="none">
+            <a:spAutoFit/>
+          </a:bodyPr>
+          <a:lstStyle/>
+          <a:p>
+            <a:pPr>
+              <a:defRPr sz="1200">
+                <a:solidFill>
+                  <a:srgbClr val="FFFFFF"/>
+                </a:solidFill>
+                <a:latin typeface="Inter"/>
+              </a:defRPr>
+            </a:pPr>
+          </a:p>
+        </p:txBody>
+      </p:sp>
+      <p:sp>
+        <p:nvSpPr>
+          <p:cNvPr id="48" name="TextBox 47"/>
+          <p:cNvSpPr txBox="1"/>
+          <p:nvPr/>
+        </p:nvSpPr>
+        <p:spPr>
+          <a:xfrm>
+            <a:off x="4572000" y="2571750"/>
+            <a:ext cx="635000" cy="254000"/>
+          </a:xfrm>
+          <a:prstGeom prst="rect">
+            <a:avLst/>
+          </a:prstGeom>
+          <a:noFill/>
+        </p:spPr>
+        <p:txBody>
+          <a:bodyPr wrap="none">
+            <a:spAutoFit/>
+          </a:bodyPr>
+          <a:lstStyle/>
+          <a:p>
+            <a:pPr>
+              <a:defRPr sz="1200">
+                <a:solidFill>
+                  <a:srgbClr val="FFFFFF"/>
+                </a:solidFill>
+                <a:latin typeface="Inter"/>
+              </a:defRPr>
+            </a:pPr>
+          </a:p>
+        </p:txBody>
+      </p:sp>
+      <p:sp>
+        <p:nvSpPr>
+          <p:cNvPr id="49" name="TextBox 48"/>
+          <p:cNvSpPr txBox="1"/>
+          <p:nvPr/>
+        </p:nvSpPr>
+        <p:spPr>
+          <a:xfrm>
+            <a:off x="5029200" y="2663190"/>
+            <a:ext cx="635000" cy="254000"/>
+          </a:xfrm>
+          <a:prstGeom prst="rect">
+            <a:avLst/>
+          </a:prstGeom>
+          <a:noFill/>
+        </p:spPr>
+        <p:txBody>
+          <a:bodyPr wrap="none">
+            <a:spAutoFit/>
+          </a:bodyPr>
+          <a:lstStyle/>
+          <a:p>
+            <a:pPr>
+              <a:defRPr sz="1200">
+                <a:solidFill>
+                  <a:srgbClr val="FFFFFF"/>
+                </a:solidFill>
+                <a:latin typeface="Inter"/>
+              </a:defRPr>
+            </a:pPr>
+            <a:r>
+              <a:t>1</a:t>
+            </a:r>
+          </a:p>
+        </p:txBody>
+      </p:sp>
+      <p:sp>
+        <p:nvSpPr>
+          <p:cNvPr id="50" name="TextBox 49"/>
+          <p:cNvSpPr txBox="1"/>
+          <p:nvPr/>
+        </p:nvSpPr>
+        <p:spPr>
+          <a:xfrm>
+            <a:off x="4480560" y="2114550"/>
+            <a:ext cx="635000" cy="254000"/>
+          </a:xfrm>
+          <a:prstGeom prst="rect">
+            <a:avLst/>
+          </a:prstGeom>
+          <a:noFill/>
+        </p:spPr>
+        <p:txBody>
+          <a:bodyPr wrap="none">
+            <a:spAutoFit/>
+          </a:bodyPr>
+          <a:lstStyle/>
+          <a:p>
+            <a:pPr>
+              <a:defRPr sz="1200">
+                <a:solidFill>
+                  <a:srgbClr val="FFFFFF"/>
+                </a:solidFill>
+                <a:latin typeface="Inter"/>
+              </a:defRPr>
+            </a:pPr>
+            <a:r>
+              <a:t>1</a:t>
+            </a:r>
+          </a:p>
+        </p:txBody>
+      </p:sp>
+      <p:sp>
+        <p:nvSpPr>
+          <p:cNvPr id="51" name="TextBox 50"/>
+          <p:cNvSpPr txBox="1"/>
+          <p:nvPr/>
+        </p:nvSpPr>
+        <p:spPr>
+          <a:xfrm>
+            <a:off x="4480560" y="1657350"/>
+            <a:ext cx="635000" cy="254000"/>
+          </a:xfrm>
+          <a:prstGeom prst="rect">
+            <a:avLst/>
+          </a:prstGeom>
+          <a:noFill/>
+        </p:spPr>
+        <p:txBody>
+          <a:bodyPr wrap="none">
+            <a:spAutoFit/>
+          </a:bodyPr>
+          <a:lstStyle/>
+          <a:p>
+            <a:pPr>
+              <a:defRPr sz="1200">
+                <a:solidFill>
+                  <a:srgbClr val="FFFFFF"/>
+                </a:solidFill>
+                <a:latin typeface="Inter"/>
+              </a:defRPr>
+            </a:pPr>
+            <a:r>
+              <a:t>2</a:t>
+            </a:r>
+          </a:p>
+        </p:txBody>
+      </p:sp>
+      <p:sp>
+        <p:nvSpPr>
+          <p:cNvPr id="52" name="TextBox 51"/>
+          <p:cNvSpPr txBox="1"/>
+          <p:nvPr/>
+        </p:nvSpPr>
+        <p:spPr>
+          <a:xfrm>
+            <a:off x="5394960" y="1291590"/>
+            <a:ext cx="635000" cy="254000"/>
+          </a:xfrm>
+          <a:prstGeom prst="rect">
+            <a:avLst/>
+          </a:prstGeom>
+          <a:noFill/>
+        </p:spPr>
+        <p:txBody>
+          <a:bodyPr wrap="none">
+            <a:spAutoFit/>
+          </a:bodyPr>
+          <a:lstStyle/>
+          <a:p>
+            <a:pPr>
+              <a:defRPr sz="1200">
+                <a:solidFill>
+                  <a:srgbClr val="FFFFFF"/>
+                </a:solidFill>
+                <a:latin typeface="Inter"/>
+              </a:defRPr>
+            </a:pPr>
+            <a:r>
+              <a:t>y=f(x)</a:t>
+            </a:r>
+          </a:p>
+        </p:txBody>
+      </p:sp>
+      <p:sp>
+        <p:nvSpPr>
+          <p:cNvPr id="53" name="TextBox 52"/>
+          <p:cNvSpPr txBox="1"/>
+          <p:nvPr/>
+        </p:nvSpPr>
+        <p:spPr>
+          <a:xfrm>
+            <a:off x="4572000" y="2571750"/>
+            <a:ext cx="635000" cy="254000"/>
+          </a:xfrm>
+          <a:prstGeom prst="rect">
+            <a:avLst/>
+          </a:prstGeom>
+          <a:noFill/>
+        </p:spPr>
+        <p:txBody>
+          <a:bodyPr wrap="none">
+            <a:spAutoFit/>
+          </a:bodyPr>
+          <a:lstStyle/>
+          <a:p>
+            <a:pPr>
+              <a:defRPr sz="1200">
+                <a:solidFill>
+                  <a:srgbClr val="FFFFFF"/>
+                </a:solidFill>
+                <a:latin typeface="Inter"/>
+              </a:defRPr>
+            </a:pPr>
+          </a:p>
+        </p:txBody>
+      </p:sp>
+      <p:sp>
+        <p:nvSpPr>
+          <p:cNvPr id="54" name="TextBox 53"/>
+          <p:cNvSpPr txBox="1"/>
+          <p:nvPr/>
+        </p:nvSpPr>
+        <p:spPr>
+          <a:xfrm>
+            <a:off x="4572000" y="2571750"/>
+            <a:ext cx="635000" cy="254000"/>
+          </a:xfrm>
+          <a:prstGeom prst="rect">
+            <a:avLst/>
+          </a:prstGeom>
+          <a:noFill/>
+        </p:spPr>
+        <p:txBody>
+          <a:bodyPr wrap="none">
+            <a:spAutoFit/>
+          </a:bodyPr>
+          <a:lstStyle/>
+          <a:p>
+            <a:pPr>
+              <a:defRPr sz="1200">
+                <a:solidFill>
+                  <a:srgbClr val="FFFFFF"/>
+                </a:solidFill>
+                <a:latin typeface="Inter"/>
+              </a:defRPr>
+            </a:pPr>
+          </a:p>
+        </p:txBody>
+      </p:sp>
+      <p:sp>
+        <p:nvSpPr>
+          <p:cNvPr id="55" name="TextBox 54"/>
+          <p:cNvSpPr txBox="1"/>
+          <p:nvPr/>
+        </p:nvSpPr>
+        <p:spPr>
+          <a:xfrm>
+            <a:off x="4572000" y="2571750"/>
+            <a:ext cx="635000" cy="254000"/>
+          </a:xfrm>
+          <a:prstGeom prst="rect">
+            <a:avLst/>
+          </a:prstGeom>
+          <a:noFill/>
+        </p:spPr>
+        <p:txBody>
+          <a:bodyPr wrap="none">
+            <a:spAutoFit/>
+          </a:bodyPr>
+          <a:lstStyle/>
+          <a:p>
+            <a:pPr>
+              <a:defRPr sz="1200">
+                <a:solidFill>
+                  <a:srgbClr val="FFFFFF"/>
+                </a:solidFill>
+                <a:latin typeface="Inter"/>
+              </a:defRPr>
+            </a:pPr>
+          </a:p>
+        </p:txBody>
+      </p:sp>
+      <p:sp>
+        <p:nvSpPr>
+          <p:cNvPr id="56" name="TextBox 55"/>
+          <p:cNvSpPr txBox="1"/>
+          <p:nvPr/>
+        </p:nvSpPr>
+        <p:spPr>
+          <a:xfrm>
+            <a:off x="4572000" y="2571750"/>
+            <a:ext cx="635000" cy="254000"/>
+          </a:xfrm>
+          <a:prstGeom prst="rect">
+            <a:avLst/>
+          </a:prstGeom>
+          <a:noFill/>
+        </p:spPr>
+        <p:txBody>
+          <a:bodyPr wrap="none">
+            <a:spAutoFit/>
+          </a:bodyPr>
+          <a:lstStyle/>
+          <a:p>
+            <a:pPr>
+              <a:defRPr sz="1200">
+                <a:solidFill>
+                  <a:srgbClr val="FFFFFF"/>
+                </a:solidFill>
+                <a:latin typeface="Inter"/>
+              </a:defRPr>
+            </a:pPr>
+          </a:p>
+        </p:txBody>
+      </p:sp>
+      <p:sp>
+        <p:nvSpPr>
+          <p:cNvPr id="57" name="TextBox 56"/>
+          <p:cNvSpPr txBox="1"/>
+          <p:nvPr/>
+        </p:nvSpPr>
+        <p:spPr>
+          <a:xfrm>
+            <a:off x="4572000" y="2571750"/>
+            <a:ext cx="635000" cy="254000"/>
+          </a:xfrm>
+          <a:prstGeom prst="rect">
+            <a:avLst/>
+          </a:prstGeom>
+          <a:noFill/>
+        </p:spPr>
+        <p:txBody>
+          <a:bodyPr wrap="none">
+            <a:spAutoFit/>
+          </a:bodyPr>
+          <a:lstStyle/>
+          <a:p>
+            <a:pPr>
+              <a:defRPr sz="1200">
+                <a:solidFill>
+                  <a:srgbClr val="FFFFFF"/>
+                </a:solidFill>
+                <a:latin typeface="Inter"/>
+              </a:defRPr>
+            </a:pPr>
+          </a:p>
+        </p:txBody>
+      </p:sp>
     </p:spTree>
   </p:cSld>
   <p:clrMapOvr>

--- a/output/1.pptx
+++ b/output/1.pptx
@@ -3104,8 +3104,8 @@
         </p:nvCxnSpPr>
         <p:spPr>
           <a:xfrm>
-            <a:off x="4343400.0" y="2571750.0"/>
-            <a:ext cx="1920240.0" cy="0.0"/>
+            <a:off x="2286000.0" y="2571750.0"/>
+            <a:ext cx="4572000.0" cy="0.0"/>
           </a:xfrm>
           <a:prstGeom prst="line">
             <a:avLst/>
@@ -3139,8 +3139,8 @@
         </p:nvCxnSpPr>
         <p:spPr>
           <a:xfrm flipV="1">
-            <a:off x="4572000.0" y="971550.0"/>
-            <a:ext cx="0.0" cy="1828800.0"/>
+            <a:off x="4572000.0" y="285750.0"/>
+            <a:ext cx="0.0" cy="4572000.0"/>
           </a:xfrm>
           <a:prstGeom prst="line">
             <a:avLst/>
@@ -3174,8 +3174,8 @@
         </p:nvCxnSpPr>
         <p:spPr>
           <a:xfrm flipV="1">
-            <a:off x="4572000.0" y="2526030.0"/>
-            <a:ext cx="228600.0" cy="45720.0"/>
+            <a:off x="4572000.0" y="2375656.92"/>
+            <a:ext cx="42062.40000000037" cy="196093.08000000007"/>
           </a:xfrm>
           <a:prstGeom prst="line">
             <a:avLst/>
@@ -3209,8 +3209,8 @@
         </p:nvCxnSpPr>
         <p:spPr>
           <a:xfrm flipV="1">
-            <a:off x="4800600.0" y="2434590.0"/>
-            <a:ext cx="228600.0" cy="91440.0"/>
+            <a:off x="4614062.4" y="2294412.48"/>
+            <a:ext cx="42062.39999999944" cy="81244.43999999994"/>
           </a:xfrm>
           <a:prstGeom prst="line">
             <a:avLst/>
@@ -3244,8 +3244,8 @@
         </p:nvCxnSpPr>
         <p:spPr>
           <a:xfrm flipV="1">
-            <a:off x="5029200.0" y="2297430.0"/>
-            <a:ext cx="228600.0" cy="137160.0"/>
+            <a:off x="4656124.8" y="2232141.84"/>
+            <a:ext cx="42062.40000000037" cy="62270.64000000013"/>
           </a:xfrm>
           <a:prstGeom prst="line">
             <a:avLst/>
@@ -3279,8 +3279,8 @@
         </p:nvCxnSpPr>
         <p:spPr>
           <a:xfrm flipV="1">
-            <a:off x="5257800.0" y="2114550.0"/>
-            <a:ext cx="228600.0" cy="182880.0"/>
+            <a:off x="4698187.2" y="2180432.52"/>
+            <a:ext cx="42062.39999999944" cy="51709.31999999983"/>
           </a:xfrm>
           <a:prstGeom prst="line">
             <a:avLst/>
@@ -3314,8 +3314,8 @@
         </p:nvCxnSpPr>
         <p:spPr>
           <a:xfrm flipV="1">
-            <a:off x="5486400.0" y="1977390.0"/>
-            <a:ext cx="91440.0" cy="137160.0"/>
+            <a:off x="4740249.6" y="2135306.88"/>
+            <a:ext cx="42062.40000000037" cy="45125.64000000013"/>
           </a:xfrm>
           <a:prstGeom prst="line">
             <a:avLst/>
@@ -3349,8 +3349,8 @@
         </p:nvCxnSpPr>
         <p:spPr>
           <a:xfrm flipV="1">
-            <a:off x="5577840.0" y="1885950.0"/>
-            <a:ext cx="45720.0" cy="91440.0"/>
+            <a:off x="4782312.0" y="2095073.28"/>
+            <a:ext cx="42062.40000000037" cy="40233.59999999986"/>
           </a:xfrm>
           <a:prstGeom prst="line">
             <a:avLst/>
@@ -3384,8 +3384,8 @@
         </p:nvCxnSpPr>
         <p:spPr>
           <a:xfrm flipV="1">
-            <a:off x="5623560.0" y="1794510.0"/>
-            <a:ext cx="45720.0" cy="91440.0"/>
+            <a:off x="4824374.4" y="2058863.04"/>
+            <a:ext cx="42062.39999999944" cy="36210.23999999999"/>
           </a:xfrm>
           <a:prstGeom prst="line">
             <a:avLst/>
@@ -3419,8 +3419,8 @@
         </p:nvCxnSpPr>
         <p:spPr>
           <a:xfrm flipV="1">
-            <a:off x="5669280.0" y="1748790.0"/>
-            <a:ext cx="22860.0" cy="45720.0"/>
+            <a:off x="4866436.8" y="2025853.2000000002"/>
+            <a:ext cx="42062.40000000037" cy="33009.83999999985"/>
           </a:xfrm>
           <a:prstGeom prst="line">
             <a:avLst/>
@@ -3454,8 +3454,8 @@
         </p:nvCxnSpPr>
         <p:spPr>
           <a:xfrm flipV="1">
-            <a:off x="5692140.0" y="1611630.0"/>
-            <a:ext cx="45720.0" cy="137160.0"/>
+            <a:off x="4908499.2" y="1995495.12"/>
+            <a:ext cx="42062.39999999944" cy="30358.080000000075"/>
           </a:xfrm>
           <a:prstGeom prst="line">
             <a:avLst/>
@@ -3489,8 +3489,8 @@
         </p:nvCxnSpPr>
         <p:spPr>
           <a:xfrm flipV="1">
-            <a:off x="5737860.0" y="1520190.0"/>
-            <a:ext cx="45720.0" cy="91440.0"/>
+            <a:off x="4950561.6" y="1967514.48"/>
+            <a:ext cx="42062.40000000037" cy="27980.64000000013"/>
           </a:xfrm>
           <a:prstGeom prst="line">
             <a:avLst/>
@@ -3524,8 +3524,8 @@
         </p:nvCxnSpPr>
         <p:spPr>
           <a:xfrm flipV="1">
-            <a:off x="5783580.0" y="1428750.0"/>
-            <a:ext cx="45720.0" cy="91440.0"/>
+            <a:off x="4992624.0" y="1941591.24"/>
+            <a:ext cx="42062.40000000037" cy="25923.23999999999"/>
           </a:xfrm>
           <a:prstGeom prst="line">
             <a:avLst/>
@@ -3558,9 +3558,9 @@
           <p:nvPr/>
         </p:nvCxnSpPr>
         <p:spPr>
-          <a:xfrm>
-            <a:off x="4572000.0" y="1657350.0"/>
-            <a:ext cx="45720.0" cy="45720.0"/>
+          <a:xfrm flipV="1">
+            <a:off x="5034686.4" y="1917496.7999999998"/>
+            <a:ext cx="42062.39999999944" cy="24094.440000000177"/>
           </a:xfrm>
           <a:prstGeom prst="line">
             <a:avLst/>
@@ -3593,9 +3593,9 @@
           <p:nvPr/>
         </p:nvCxnSpPr>
         <p:spPr>
-          <a:xfrm>
-            <a:off x="4617720.0" y="1703070.0"/>
-            <a:ext cx="45720.0" cy="45720.0"/>
+          <a:xfrm flipV="1">
+            <a:off x="5076748.8" y="1894956.8399999999"/>
+            <a:ext cx="42062.40000000037" cy="22539.959999999963"/>
           </a:xfrm>
           <a:prstGeom prst="line">
             <a:avLst/>
@@ -3628,9 +3628,9 @@
           <p:nvPr/>
         </p:nvCxnSpPr>
         <p:spPr>
-          <a:xfrm>
-            <a:off x="4663440.0" y="1748790.0"/>
-            <a:ext cx="45720.0" cy="45720.0"/>
+          <a:xfrm flipV="1">
+            <a:off x="5118811.2" y="1873834.2000000002"/>
+            <a:ext cx="42062.39999999944" cy="21122.639999999665"/>
           </a:xfrm>
           <a:prstGeom prst="line">
             <a:avLst/>
@@ -3663,9 +3663,9 @@
           <p:nvPr/>
         </p:nvCxnSpPr>
         <p:spPr>
-          <a:xfrm>
-            <a:off x="4709160.0" y="1794510.0"/>
-            <a:ext cx="45720.0" cy="45720.0"/>
+          <a:xfrm flipV="1">
+            <a:off x="5160873.6" y="1853946.0"/>
+            <a:ext cx="42062.40000000037" cy="19888.200000000186"/>
           </a:xfrm>
           <a:prstGeom prst="line">
             <a:avLst/>
@@ -3698,9 +3698,9 @@
           <p:nvPr/>
         </p:nvCxnSpPr>
         <p:spPr>
-          <a:xfrm>
-            <a:off x="4754880.0" y="1840230.0"/>
-            <a:ext cx="45720.0" cy="45720.0"/>
+          <a:xfrm flipV="1">
+            <a:off x="5202936.0" y="1835155.08"/>
+            <a:ext cx="42062.40000000037" cy="18790.919999999925"/>
           </a:xfrm>
           <a:prstGeom prst="line">
             <a:avLst/>
@@ -3733,9 +3733,9 @@
           <p:nvPr/>
         </p:nvCxnSpPr>
         <p:spPr>
-          <a:xfrm>
-            <a:off x="4800600.0" y="1885950.0"/>
-            <a:ext cx="45720.0" cy="45720.0"/>
+          <a:xfrm flipV="1">
+            <a:off x="5244998.4" y="1817324.28"/>
+            <a:ext cx="42062.39999999944" cy="17830.800000000047"/>
           </a:xfrm>
           <a:prstGeom prst="line">
             <a:avLst/>
@@ -3768,9 +3768,9 @@
           <p:nvPr/>
         </p:nvCxnSpPr>
         <p:spPr>
-          <a:xfrm>
-            <a:off x="4846320.0" y="1931670.0"/>
-            <a:ext cx="45720.0" cy="45720.0"/>
+          <a:xfrm flipV="1">
+            <a:off x="5287060.8" y="1800362.1600000001"/>
+            <a:ext cx="42062.40000000037" cy="16962.11999999988"/>
           </a:xfrm>
           <a:prstGeom prst="line">
             <a:avLst/>
@@ -3803,9 +3803,9 @@
           <p:nvPr/>
         </p:nvCxnSpPr>
         <p:spPr>
-          <a:xfrm>
-            <a:off x="4892040.0" y="1977390.0"/>
-            <a:ext cx="45720.0" cy="45720.0"/>
+          <a:xfrm flipV="1">
+            <a:off x="5329123.2" y="1784223.0"/>
+            <a:ext cx="42062.39999999944" cy="16139.160000000149"/>
           </a:xfrm>
           <a:prstGeom prst="line">
             <a:avLst/>
@@ -3838,9 +3838,9 @@
           <p:nvPr/>
         </p:nvCxnSpPr>
         <p:spPr>
-          <a:xfrm>
-            <a:off x="4937760.0" y="2023110.0"/>
-            <a:ext cx="45720.0" cy="45720.0"/>
+          <a:xfrm flipV="1">
+            <a:off x="5371185.6" y="1768769.6400000001"/>
+            <a:ext cx="42062.40000000037" cy="15453.35999999987"/>
           </a:xfrm>
           <a:prstGeom prst="line">
             <a:avLst/>
@@ -3874,8 +3874,8 @@
         </p:nvCxnSpPr>
         <p:spPr>
           <a:xfrm flipV="1">
-            <a:off x="5029200.0" y="1611630.0"/>
-            <a:ext cx="45720.0" cy="45720.0"/>
+            <a:off x="5413248.0" y="1754047.8"/>
+            <a:ext cx="42062.40000000037" cy="14721.840000000084"/>
           </a:xfrm>
           <a:prstGeom prst="line">
             <a:avLst/>
@@ -3909,8 +3909,8 @@
         </p:nvCxnSpPr>
         <p:spPr>
           <a:xfrm flipV="1">
-            <a:off x="5074920.0" y="1565910.0"/>
-            <a:ext cx="45720.0" cy="45720.0"/>
+            <a:off x="5455310.4" y="1739920.32"/>
+            <a:ext cx="42062.39999999944" cy="14127.479999999981"/>
           </a:xfrm>
           <a:prstGeom prst="line">
             <a:avLst/>
@@ -3944,8 +3944,8 @@
         </p:nvCxnSpPr>
         <p:spPr>
           <a:xfrm flipV="1">
-            <a:off x="5120640.0" y="1520190.0"/>
-            <a:ext cx="45720.0" cy="45720.0"/>
+            <a:off x="5497372.8" y="1726341.48"/>
+            <a:ext cx="42062.40000000037" cy="13578.840000000084"/>
           </a:xfrm>
           <a:prstGeom prst="line">
             <a:avLst/>
@@ -3979,8 +3979,8 @@
         </p:nvCxnSpPr>
         <p:spPr>
           <a:xfrm flipV="1">
-            <a:off x="5166360.0" y="1474470.0"/>
-            <a:ext cx="45720.0" cy="45720.0"/>
+            <a:off x="5539435.2" y="1713311.28"/>
+            <a:ext cx="42062.39999999944" cy="13030.199999999953"/>
           </a:xfrm>
           <a:prstGeom prst="line">
             <a:avLst/>
@@ -4014,8 +4014,8 @@
         </p:nvCxnSpPr>
         <p:spPr>
           <a:xfrm flipV="1">
-            <a:off x="5212080.0" y="1428750.0"/>
-            <a:ext cx="45720.0" cy="45720.0"/>
+            <a:off x="5581497.6" y="1700784.0"/>
+            <a:ext cx="42062.40000000037" cy="12527.280000000028"/>
           </a:xfrm>
           <a:prstGeom prst="line">
             <a:avLst/>
@@ -4041,190 +4041,15 @@
           </a:fontRef>
         </p:style>
       </p:cxnSp>
-      <p:cxnSp>
-        <p:nvCxnSpPr>
-          <p:cNvPr id="29" name="Connector 28"/>
-          <p:cNvCxnSpPr/>
-          <p:nvPr/>
-        </p:nvCxnSpPr>
-        <p:spPr>
-          <a:xfrm flipV="1">
-            <a:off x="5257800.0" y="1383030.0"/>
-            <a:ext cx="45720.0" cy="45720.0"/>
-          </a:xfrm>
-          <a:prstGeom prst="line">
-            <a:avLst/>
-          </a:prstGeom>
-          <a:ln w="25400">
-            <a:solidFill>
-              <a:srgbClr val="00C8FF"/>
-            </a:solidFill>
-          </a:ln>
-        </p:spPr>
-        <p:style>
-          <a:lnRef idx="2">
-            <a:schemeClr val="accent1"/>
-          </a:lnRef>
-          <a:fillRef idx="0">
-            <a:schemeClr val="accent1"/>
-          </a:fillRef>
-          <a:effectRef idx="1">
-            <a:schemeClr val="accent1"/>
-          </a:effectRef>
-          <a:fontRef idx="minor">
-            <a:schemeClr val="tx1"/>
-          </a:fontRef>
-        </p:style>
-      </p:cxnSp>
-      <p:cxnSp>
-        <p:nvCxnSpPr>
-          <p:cNvPr id="30" name="Connector 29"/>
-          <p:cNvCxnSpPr/>
-          <p:nvPr/>
-        </p:nvCxnSpPr>
-        <p:spPr>
-          <a:xfrm flipV="1">
-            <a:off x="5303520.0" y="1337310.0"/>
-            <a:ext cx="45720.0" cy="45720.0"/>
-          </a:xfrm>
-          <a:prstGeom prst="line">
-            <a:avLst/>
-          </a:prstGeom>
-          <a:ln w="25400">
-            <a:solidFill>
-              <a:srgbClr val="00C8FF"/>
-            </a:solidFill>
-          </a:ln>
-        </p:spPr>
-        <p:style>
-          <a:lnRef idx="2">
-            <a:schemeClr val="accent1"/>
-          </a:lnRef>
-          <a:fillRef idx="0">
-            <a:schemeClr val="accent1"/>
-          </a:fillRef>
-          <a:effectRef idx="1">
-            <a:schemeClr val="accent1"/>
-          </a:effectRef>
-          <a:fontRef idx="minor">
-            <a:schemeClr val="tx1"/>
-          </a:fontRef>
-        </p:style>
-      </p:cxnSp>
-      <p:cxnSp>
-        <p:nvCxnSpPr>
-          <p:cNvPr id="31" name="Connector 30"/>
-          <p:cNvCxnSpPr/>
-          <p:nvPr/>
-        </p:nvCxnSpPr>
-        <p:spPr>
-          <a:xfrm flipV="1">
-            <a:off x="5349240.0" y="1291590.0"/>
-            <a:ext cx="45720.0" cy="45720.0"/>
-          </a:xfrm>
-          <a:prstGeom prst="line">
-            <a:avLst/>
-          </a:prstGeom>
-          <a:ln w="25400">
-            <a:solidFill>
-              <a:srgbClr val="00C8FF"/>
-            </a:solidFill>
-          </a:ln>
-        </p:spPr>
-        <p:style>
-          <a:lnRef idx="2">
-            <a:schemeClr val="accent1"/>
-          </a:lnRef>
-          <a:fillRef idx="0">
-            <a:schemeClr val="accent1"/>
-          </a:fillRef>
-          <a:effectRef idx="1">
-            <a:schemeClr val="accent1"/>
-          </a:effectRef>
-          <a:fontRef idx="minor">
-            <a:schemeClr val="tx1"/>
-          </a:fontRef>
-        </p:style>
-      </p:cxnSp>
-      <p:cxnSp>
-        <p:nvCxnSpPr>
-          <p:cNvPr id="32" name="Connector 31"/>
-          <p:cNvCxnSpPr/>
-          <p:nvPr/>
-        </p:nvCxnSpPr>
-        <p:spPr>
-          <a:xfrm flipV="1">
-            <a:off x="5394960.0" y="1245870.0"/>
-            <a:ext cx="45720.0" cy="45720.0"/>
-          </a:xfrm>
-          <a:prstGeom prst="line">
-            <a:avLst/>
-          </a:prstGeom>
-          <a:ln w="25400">
-            <a:solidFill>
-              <a:srgbClr val="00C8FF"/>
-            </a:solidFill>
-          </a:ln>
-        </p:spPr>
-        <p:style>
-          <a:lnRef idx="2">
-            <a:schemeClr val="accent1"/>
-          </a:lnRef>
-          <a:fillRef idx="0">
-            <a:schemeClr val="accent1"/>
-          </a:fillRef>
-          <a:effectRef idx="1">
-            <a:schemeClr val="accent1"/>
-          </a:effectRef>
-          <a:fontRef idx="minor">
-            <a:schemeClr val="tx1"/>
-          </a:fontRef>
-        </p:style>
-      </p:cxnSp>
-      <p:cxnSp>
-        <p:nvCxnSpPr>
-          <p:cNvPr id="33" name="Connector 32"/>
-          <p:cNvCxnSpPr/>
-          <p:nvPr/>
-        </p:nvCxnSpPr>
-        <p:spPr>
-          <a:xfrm flipV="1">
-            <a:off x="5440680.0" y="1200150.0"/>
-            <a:ext cx="45720.0" cy="45720.0"/>
-          </a:xfrm>
-          <a:prstGeom prst="line">
-            <a:avLst/>
-          </a:prstGeom>
-          <a:ln w="25400">
-            <a:solidFill>
-              <a:srgbClr val="00C8FF"/>
-            </a:solidFill>
-          </a:ln>
-        </p:spPr>
-        <p:style>
-          <a:lnRef idx="2">
-            <a:schemeClr val="accent1"/>
-          </a:lnRef>
-          <a:fillRef idx="0">
-            <a:schemeClr val="accent1"/>
-          </a:fillRef>
-          <a:effectRef idx="1">
-            <a:schemeClr val="accent1"/>
-          </a:effectRef>
-          <a:fontRef idx="minor">
-            <a:schemeClr val="tx1"/>
-          </a:fontRef>
-        </p:style>
-      </p:cxnSp>
-      <p:sp>
-        <p:nvSpPr>
-          <p:cNvPr id="34" name="Oval 33"/>
+      <p:sp>
+        <p:nvSpPr>
+          <p:cNvPr id="29" name="Oval 28"/>
           <p:cNvSpPr/>
           <p:nvPr/>
         </p:nvSpPr>
         <p:spPr>
           <a:xfrm>
-            <a:off x="5676900" y="1619250"/>
+            <a:off x="5448300" y="1710690"/>
             <a:ext cx="76200" cy="76200"/>
           </a:xfrm>
           <a:prstGeom prst="ellipse">
@@ -4261,101 +4086,13 @@
       </p:sp>
       <p:sp>
         <p:nvSpPr>
-          <p:cNvPr id="35" name="Oval 34"/>
-          <p:cNvSpPr/>
-          <p:nvPr/>
-        </p:nvSpPr>
-        <p:spPr>
-          <a:xfrm>
-            <a:off x="4991100" y="2076450"/>
-            <a:ext cx="76200" cy="76200"/>
-          </a:xfrm>
-          <a:prstGeom prst="ellipse">
-            <a:avLst/>
-          </a:prstGeom>
-          <a:noFill/>
-          <a:ln>
-            <a:solidFill>
-              <a:srgbClr val="FFFFFF"/>
-            </a:solidFill>
-          </a:ln>
-        </p:spPr>
-        <p:style>
-          <a:lnRef idx="1">
-            <a:schemeClr val="accent1"/>
-          </a:lnRef>
-          <a:fillRef idx="3">
-            <a:schemeClr val="accent1"/>
-          </a:fillRef>
-          <a:effectRef idx="2">
-            <a:schemeClr val="accent1"/>
-          </a:effectRef>
-          <a:fontRef idx="minor">
-            <a:schemeClr val="lt1"/>
-          </a:fontRef>
-        </p:style>
-        <p:txBody>
-          <a:bodyPr rtlCol="0" anchor="ctr"/>
-          <a:lstStyle/>
-          <a:p>
-            <a:pPr algn="ctr"/>
-          </a:p>
-        </p:txBody>
-      </p:sp>
-      <p:sp>
-        <p:nvSpPr>
-          <p:cNvPr id="36" name="Oval 35"/>
-          <p:cNvSpPr/>
-          <p:nvPr/>
-        </p:nvSpPr>
-        <p:spPr>
-          <a:xfrm>
-            <a:off x="4991100" y="1619250"/>
-            <a:ext cx="76200" cy="76200"/>
-          </a:xfrm>
-          <a:prstGeom prst="ellipse">
-            <a:avLst/>
-          </a:prstGeom>
-          <a:solidFill>
-            <a:srgbClr val="FFFFFF"/>
-          </a:solidFill>
-          <a:ln>
-            <a:solidFill>
-              <a:srgbClr val="FFFFFF"/>
-            </a:solidFill>
-          </a:ln>
-        </p:spPr>
-        <p:style>
-          <a:lnRef idx="1">
-            <a:schemeClr val="accent1"/>
-          </a:lnRef>
-          <a:fillRef idx="3">
-            <a:schemeClr val="accent1"/>
-          </a:fillRef>
-          <a:effectRef idx="2">
-            <a:schemeClr val="accent1"/>
-          </a:effectRef>
-          <a:fontRef idx="minor">
-            <a:schemeClr val="lt1"/>
-          </a:fontRef>
-        </p:style>
-        <p:txBody>
-          <a:bodyPr rtlCol="0" anchor="ctr"/>
-          <a:lstStyle/>
-          <a:p>
-            <a:pPr algn="ctr"/>
-          </a:p>
-        </p:txBody>
-      </p:sp>
-      <p:sp>
-        <p:nvSpPr>
-          <p:cNvPr id="37" name="TextBox 36"/>
+          <p:cNvPr id="30" name="TextBox 29"/>
           <p:cNvSpPr txBox="1"/>
           <p:nvPr/>
         </p:nvSpPr>
         <p:spPr>
           <a:xfrm>
-            <a:off x="4480560" y="2663190"/>
+            <a:off x="5486400" y="2754630"/>
             <a:ext cx="635000" cy="254000"/>
           </a:xfrm>
           <a:prstGeom prst="rect">
@@ -4378,20 +4115,20 @@
               </a:defRPr>
             </a:pPr>
             <a:r>
-              <a:t>O</a:t>
-            </a:r>
-          </a:p>
-        </p:txBody>
-      </p:sp>
-      <p:sp>
-        <p:nvSpPr>
-          <p:cNvPr id="38" name="TextBox 37"/>
+              <a:t>a</a:t>
+            </a:r>
+          </a:p>
+        </p:txBody>
+      </p:sp>
+      <p:sp>
+        <p:nvSpPr>
+          <p:cNvPr id="31" name="TextBox 30"/>
           <p:cNvSpPr txBox="1"/>
           <p:nvPr/>
         </p:nvSpPr>
         <p:spPr>
           <a:xfrm>
-            <a:off x="6217920" y="2663190"/>
+            <a:off x="4389120" y="1748790"/>
             <a:ext cx="635000" cy="254000"/>
           </a:xfrm>
           <a:prstGeom prst="rect">
@@ -4414,659 +4151,8 @@
               </a:defRPr>
             </a:pPr>
             <a:r>
-              <a:t>x</a:t>
-            </a:r>
-          </a:p>
-        </p:txBody>
-      </p:sp>
-      <p:sp>
-        <p:nvSpPr>
-          <p:cNvPr id="39" name="TextBox 38"/>
-          <p:cNvSpPr txBox="1"/>
-          <p:nvPr/>
-        </p:nvSpPr>
-        <p:spPr>
-          <a:xfrm>
-            <a:off x="4480560" y="1017270"/>
-            <a:ext cx="635000" cy="254000"/>
-          </a:xfrm>
-          <a:prstGeom prst="rect">
-            <a:avLst/>
-          </a:prstGeom>
-          <a:noFill/>
-        </p:spPr>
-        <p:txBody>
-          <a:bodyPr wrap="none">
-            <a:spAutoFit/>
-          </a:bodyPr>
-          <a:lstStyle/>
-          <a:p>
-            <a:pPr>
-              <a:defRPr sz="1200">
-                <a:solidFill>
-                  <a:srgbClr val="FFFFFF"/>
-                </a:solidFill>
-                <a:latin typeface="Inter"/>
-              </a:defRPr>
-            </a:pPr>
-            <a:r>
-              <a:t>y</a:t>
-            </a:r>
-          </a:p>
-        </p:txBody>
-      </p:sp>
-      <p:sp>
-        <p:nvSpPr>
-          <p:cNvPr id="40" name="TextBox 39"/>
-          <p:cNvSpPr txBox="1"/>
-          <p:nvPr/>
-        </p:nvSpPr>
-        <p:spPr>
-          <a:xfrm>
-            <a:off x="5715000" y="2663190"/>
-            <a:ext cx="635000" cy="254000"/>
-          </a:xfrm>
-          <a:prstGeom prst="rect">
-            <a:avLst/>
-          </a:prstGeom>
-          <a:noFill/>
-        </p:spPr>
-        <p:txBody>
-          <a:bodyPr wrap="none">
-            <a:spAutoFit/>
-          </a:bodyPr>
-          <a:lstStyle/>
-          <a:p>
-            <a:pPr>
-              <a:defRPr sz="1200">
-                <a:solidFill>
-                  <a:srgbClr val="FFFFFF"/>
-                </a:solidFill>
-                <a:latin typeface="Inter"/>
-              </a:defRPr>
-            </a:pPr>
-            <a:r>
-              <a:t>a</a:t>
-            </a:r>
-          </a:p>
-        </p:txBody>
-      </p:sp>
-      <p:sp>
-        <p:nvSpPr>
-          <p:cNvPr id="41" name="TextBox 40"/>
-          <p:cNvSpPr txBox="1"/>
-          <p:nvPr/>
-        </p:nvSpPr>
-        <p:spPr>
-          <a:xfrm>
-            <a:off x="4480560" y="1657350"/>
-            <a:ext cx="635000" cy="254000"/>
-          </a:xfrm>
-          <a:prstGeom prst="rect">
-            <a:avLst/>
-          </a:prstGeom>
-          <a:noFill/>
-        </p:spPr>
-        <p:txBody>
-          <a:bodyPr wrap="none">
-            <a:spAutoFit/>
-          </a:bodyPr>
-          <a:lstStyle/>
-          <a:p>
-            <a:pPr>
-              <a:defRPr sz="1200">
-                <a:solidFill>
-                  <a:srgbClr val="FFFFFF"/>
-                </a:solidFill>
-                <a:latin typeface="Inter"/>
-              </a:defRPr>
-            </a:pPr>
-            <a:r>
               <a:t>L</a:t>
             </a:r>
-          </a:p>
-        </p:txBody>
-      </p:sp>
-      <p:sp>
-        <p:nvSpPr>
-          <p:cNvPr id="42" name="TextBox 41"/>
-          <p:cNvSpPr txBox="1"/>
-          <p:nvPr/>
-        </p:nvSpPr>
-        <p:spPr>
-          <a:xfrm>
-            <a:off x="5806440" y="1565910"/>
-            <a:ext cx="635000" cy="254000"/>
-          </a:xfrm>
-          <a:prstGeom prst="rect">
-            <a:avLst/>
-          </a:prstGeom>
-          <a:noFill/>
-        </p:spPr>
-        <p:txBody>
-          <a:bodyPr wrap="none">
-            <a:spAutoFit/>
-          </a:bodyPr>
-          <a:lstStyle/>
-          <a:p>
-            <a:pPr>
-              <a:defRPr sz="1200">
-                <a:solidFill>
-                  <a:srgbClr val="FFFFFF"/>
-                </a:solidFill>
-                <a:latin typeface="Inter"/>
-              </a:defRPr>
-            </a:pPr>
-            <a:r>
-              <a:t>y=f(x)</a:t>
-            </a:r>
-          </a:p>
-        </p:txBody>
-      </p:sp>
-      <p:sp>
-        <p:nvSpPr>
-          <p:cNvPr id="43" name="TextBox 42"/>
-          <p:cNvSpPr txBox="1"/>
-          <p:nvPr/>
-        </p:nvSpPr>
-        <p:spPr>
-          <a:xfrm>
-            <a:off x="4572000" y="2571750"/>
-            <a:ext cx="635000" cy="254000"/>
-          </a:xfrm>
-          <a:prstGeom prst="rect">
-            <a:avLst/>
-          </a:prstGeom>
-          <a:noFill/>
-        </p:spPr>
-        <p:txBody>
-          <a:bodyPr wrap="none">
-            <a:spAutoFit/>
-          </a:bodyPr>
-          <a:lstStyle/>
-          <a:p>
-            <a:pPr>
-              <a:defRPr sz="1200">
-                <a:solidFill>
-                  <a:srgbClr val="FFFFFF"/>
-                </a:solidFill>
-                <a:latin typeface="Inter"/>
-              </a:defRPr>
-            </a:pPr>
-          </a:p>
-        </p:txBody>
-      </p:sp>
-      <p:sp>
-        <p:nvSpPr>
-          <p:cNvPr id="44" name="TextBox 43"/>
-          <p:cNvSpPr txBox="1"/>
-          <p:nvPr/>
-        </p:nvSpPr>
-        <p:spPr>
-          <a:xfrm>
-            <a:off x="4572000" y="2571750"/>
-            <a:ext cx="635000" cy="254000"/>
-          </a:xfrm>
-          <a:prstGeom prst="rect">
-            <a:avLst/>
-          </a:prstGeom>
-          <a:noFill/>
-        </p:spPr>
-        <p:txBody>
-          <a:bodyPr wrap="none">
-            <a:spAutoFit/>
-          </a:bodyPr>
-          <a:lstStyle/>
-          <a:p>
-            <a:pPr>
-              <a:defRPr sz="1200">
-                <a:solidFill>
-                  <a:srgbClr val="FFFFFF"/>
-                </a:solidFill>
-                <a:latin typeface="Inter"/>
-              </a:defRPr>
-            </a:pPr>
-          </a:p>
-        </p:txBody>
-      </p:sp>
-      <p:sp>
-        <p:nvSpPr>
-          <p:cNvPr id="45" name="TextBox 44"/>
-          <p:cNvSpPr txBox="1"/>
-          <p:nvPr/>
-        </p:nvSpPr>
-        <p:spPr>
-          <a:xfrm>
-            <a:off x="4572000" y="2571750"/>
-            <a:ext cx="635000" cy="254000"/>
-          </a:xfrm>
-          <a:prstGeom prst="rect">
-            <a:avLst/>
-          </a:prstGeom>
-          <a:noFill/>
-        </p:spPr>
-        <p:txBody>
-          <a:bodyPr wrap="none">
-            <a:spAutoFit/>
-          </a:bodyPr>
-          <a:lstStyle/>
-          <a:p>
-            <a:pPr>
-              <a:defRPr sz="1200">
-                <a:solidFill>
-                  <a:srgbClr val="FFFFFF"/>
-                </a:solidFill>
-                <a:latin typeface="Inter"/>
-              </a:defRPr>
-            </a:pPr>
-          </a:p>
-        </p:txBody>
-      </p:sp>
-      <p:sp>
-        <p:nvSpPr>
-          <p:cNvPr id="46" name="TextBox 45"/>
-          <p:cNvSpPr txBox="1"/>
-          <p:nvPr/>
-        </p:nvSpPr>
-        <p:spPr>
-          <a:xfrm>
-            <a:off x="4572000" y="2571750"/>
-            <a:ext cx="635000" cy="254000"/>
-          </a:xfrm>
-          <a:prstGeom prst="rect">
-            <a:avLst/>
-          </a:prstGeom>
-          <a:noFill/>
-        </p:spPr>
-        <p:txBody>
-          <a:bodyPr wrap="none">
-            <a:spAutoFit/>
-          </a:bodyPr>
-          <a:lstStyle/>
-          <a:p>
-            <a:pPr>
-              <a:defRPr sz="1200">
-                <a:solidFill>
-                  <a:srgbClr val="FFFFFF"/>
-                </a:solidFill>
-                <a:latin typeface="Inter"/>
-              </a:defRPr>
-            </a:pPr>
-          </a:p>
-        </p:txBody>
-      </p:sp>
-      <p:sp>
-        <p:nvSpPr>
-          <p:cNvPr id="47" name="TextBox 46"/>
-          <p:cNvSpPr txBox="1"/>
-          <p:nvPr/>
-        </p:nvSpPr>
-        <p:spPr>
-          <a:xfrm>
-            <a:off x="4572000" y="2571750"/>
-            <a:ext cx="635000" cy="254000"/>
-          </a:xfrm>
-          <a:prstGeom prst="rect">
-            <a:avLst/>
-          </a:prstGeom>
-          <a:noFill/>
-        </p:spPr>
-        <p:txBody>
-          <a:bodyPr wrap="none">
-            <a:spAutoFit/>
-          </a:bodyPr>
-          <a:lstStyle/>
-          <a:p>
-            <a:pPr>
-              <a:defRPr sz="1200">
-                <a:solidFill>
-                  <a:srgbClr val="FFFFFF"/>
-                </a:solidFill>
-                <a:latin typeface="Inter"/>
-              </a:defRPr>
-            </a:pPr>
-          </a:p>
-        </p:txBody>
-      </p:sp>
-      <p:sp>
-        <p:nvSpPr>
-          <p:cNvPr id="48" name="TextBox 47"/>
-          <p:cNvSpPr txBox="1"/>
-          <p:nvPr/>
-        </p:nvSpPr>
-        <p:spPr>
-          <a:xfrm>
-            <a:off x="4572000" y="2571750"/>
-            <a:ext cx="635000" cy="254000"/>
-          </a:xfrm>
-          <a:prstGeom prst="rect">
-            <a:avLst/>
-          </a:prstGeom>
-          <a:noFill/>
-        </p:spPr>
-        <p:txBody>
-          <a:bodyPr wrap="none">
-            <a:spAutoFit/>
-          </a:bodyPr>
-          <a:lstStyle/>
-          <a:p>
-            <a:pPr>
-              <a:defRPr sz="1200">
-                <a:solidFill>
-                  <a:srgbClr val="FFFFFF"/>
-                </a:solidFill>
-                <a:latin typeface="Inter"/>
-              </a:defRPr>
-            </a:pPr>
-          </a:p>
-        </p:txBody>
-      </p:sp>
-      <p:sp>
-        <p:nvSpPr>
-          <p:cNvPr id="49" name="TextBox 48"/>
-          <p:cNvSpPr txBox="1"/>
-          <p:nvPr/>
-        </p:nvSpPr>
-        <p:spPr>
-          <a:xfrm>
-            <a:off x="5029200" y="2663190"/>
-            <a:ext cx="635000" cy="254000"/>
-          </a:xfrm>
-          <a:prstGeom prst="rect">
-            <a:avLst/>
-          </a:prstGeom>
-          <a:noFill/>
-        </p:spPr>
-        <p:txBody>
-          <a:bodyPr wrap="none">
-            <a:spAutoFit/>
-          </a:bodyPr>
-          <a:lstStyle/>
-          <a:p>
-            <a:pPr>
-              <a:defRPr sz="1200">
-                <a:solidFill>
-                  <a:srgbClr val="FFFFFF"/>
-                </a:solidFill>
-                <a:latin typeface="Inter"/>
-              </a:defRPr>
-            </a:pPr>
-            <a:r>
-              <a:t>1</a:t>
-            </a:r>
-          </a:p>
-        </p:txBody>
-      </p:sp>
-      <p:sp>
-        <p:nvSpPr>
-          <p:cNvPr id="50" name="TextBox 49"/>
-          <p:cNvSpPr txBox="1"/>
-          <p:nvPr/>
-        </p:nvSpPr>
-        <p:spPr>
-          <a:xfrm>
-            <a:off x="4480560" y="2114550"/>
-            <a:ext cx="635000" cy="254000"/>
-          </a:xfrm>
-          <a:prstGeom prst="rect">
-            <a:avLst/>
-          </a:prstGeom>
-          <a:noFill/>
-        </p:spPr>
-        <p:txBody>
-          <a:bodyPr wrap="none">
-            <a:spAutoFit/>
-          </a:bodyPr>
-          <a:lstStyle/>
-          <a:p>
-            <a:pPr>
-              <a:defRPr sz="1200">
-                <a:solidFill>
-                  <a:srgbClr val="FFFFFF"/>
-                </a:solidFill>
-                <a:latin typeface="Inter"/>
-              </a:defRPr>
-            </a:pPr>
-            <a:r>
-              <a:t>1</a:t>
-            </a:r>
-          </a:p>
-        </p:txBody>
-      </p:sp>
-      <p:sp>
-        <p:nvSpPr>
-          <p:cNvPr id="51" name="TextBox 50"/>
-          <p:cNvSpPr txBox="1"/>
-          <p:nvPr/>
-        </p:nvSpPr>
-        <p:spPr>
-          <a:xfrm>
-            <a:off x="4480560" y="1657350"/>
-            <a:ext cx="635000" cy="254000"/>
-          </a:xfrm>
-          <a:prstGeom prst="rect">
-            <a:avLst/>
-          </a:prstGeom>
-          <a:noFill/>
-        </p:spPr>
-        <p:txBody>
-          <a:bodyPr wrap="none">
-            <a:spAutoFit/>
-          </a:bodyPr>
-          <a:lstStyle/>
-          <a:p>
-            <a:pPr>
-              <a:defRPr sz="1200">
-                <a:solidFill>
-                  <a:srgbClr val="FFFFFF"/>
-                </a:solidFill>
-                <a:latin typeface="Inter"/>
-              </a:defRPr>
-            </a:pPr>
-            <a:r>
-              <a:t>2</a:t>
-            </a:r>
-          </a:p>
-        </p:txBody>
-      </p:sp>
-      <p:sp>
-        <p:nvSpPr>
-          <p:cNvPr id="52" name="TextBox 51"/>
-          <p:cNvSpPr txBox="1"/>
-          <p:nvPr/>
-        </p:nvSpPr>
-        <p:spPr>
-          <a:xfrm>
-            <a:off x="5394960" y="1291590"/>
-            <a:ext cx="635000" cy="254000"/>
-          </a:xfrm>
-          <a:prstGeom prst="rect">
-            <a:avLst/>
-          </a:prstGeom>
-          <a:noFill/>
-        </p:spPr>
-        <p:txBody>
-          <a:bodyPr wrap="none">
-            <a:spAutoFit/>
-          </a:bodyPr>
-          <a:lstStyle/>
-          <a:p>
-            <a:pPr>
-              <a:defRPr sz="1200">
-                <a:solidFill>
-                  <a:srgbClr val="FFFFFF"/>
-                </a:solidFill>
-                <a:latin typeface="Inter"/>
-              </a:defRPr>
-            </a:pPr>
-            <a:r>
-              <a:t>y=f(x)</a:t>
-            </a:r>
-          </a:p>
-        </p:txBody>
-      </p:sp>
-      <p:sp>
-        <p:nvSpPr>
-          <p:cNvPr id="53" name="TextBox 52"/>
-          <p:cNvSpPr txBox="1"/>
-          <p:nvPr/>
-        </p:nvSpPr>
-        <p:spPr>
-          <a:xfrm>
-            <a:off x="4572000" y="2571750"/>
-            <a:ext cx="635000" cy="254000"/>
-          </a:xfrm>
-          <a:prstGeom prst="rect">
-            <a:avLst/>
-          </a:prstGeom>
-          <a:noFill/>
-        </p:spPr>
-        <p:txBody>
-          <a:bodyPr wrap="none">
-            <a:spAutoFit/>
-          </a:bodyPr>
-          <a:lstStyle/>
-          <a:p>
-            <a:pPr>
-              <a:defRPr sz="1200">
-                <a:solidFill>
-                  <a:srgbClr val="FFFFFF"/>
-                </a:solidFill>
-                <a:latin typeface="Inter"/>
-              </a:defRPr>
-            </a:pPr>
-          </a:p>
-        </p:txBody>
-      </p:sp>
-      <p:sp>
-        <p:nvSpPr>
-          <p:cNvPr id="54" name="TextBox 53"/>
-          <p:cNvSpPr txBox="1"/>
-          <p:nvPr/>
-        </p:nvSpPr>
-        <p:spPr>
-          <a:xfrm>
-            <a:off x="4572000" y="2571750"/>
-            <a:ext cx="635000" cy="254000"/>
-          </a:xfrm>
-          <a:prstGeom prst="rect">
-            <a:avLst/>
-          </a:prstGeom>
-          <a:noFill/>
-        </p:spPr>
-        <p:txBody>
-          <a:bodyPr wrap="none">
-            <a:spAutoFit/>
-          </a:bodyPr>
-          <a:lstStyle/>
-          <a:p>
-            <a:pPr>
-              <a:defRPr sz="1200">
-                <a:solidFill>
-                  <a:srgbClr val="FFFFFF"/>
-                </a:solidFill>
-                <a:latin typeface="Inter"/>
-              </a:defRPr>
-            </a:pPr>
-          </a:p>
-        </p:txBody>
-      </p:sp>
-      <p:sp>
-        <p:nvSpPr>
-          <p:cNvPr id="55" name="TextBox 54"/>
-          <p:cNvSpPr txBox="1"/>
-          <p:nvPr/>
-        </p:nvSpPr>
-        <p:spPr>
-          <a:xfrm>
-            <a:off x="4572000" y="2571750"/>
-            <a:ext cx="635000" cy="254000"/>
-          </a:xfrm>
-          <a:prstGeom prst="rect">
-            <a:avLst/>
-          </a:prstGeom>
-          <a:noFill/>
-        </p:spPr>
-        <p:txBody>
-          <a:bodyPr wrap="none">
-            <a:spAutoFit/>
-          </a:bodyPr>
-          <a:lstStyle/>
-          <a:p>
-            <a:pPr>
-              <a:defRPr sz="1200">
-                <a:solidFill>
-                  <a:srgbClr val="FFFFFF"/>
-                </a:solidFill>
-                <a:latin typeface="Inter"/>
-              </a:defRPr>
-            </a:pPr>
-          </a:p>
-        </p:txBody>
-      </p:sp>
-      <p:sp>
-        <p:nvSpPr>
-          <p:cNvPr id="56" name="TextBox 55"/>
-          <p:cNvSpPr txBox="1"/>
-          <p:nvPr/>
-        </p:nvSpPr>
-        <p:spPr>
-          <a:xfrm>
-            <a:off x="4572000" y="2571750"/>
-            <a:ext cx="635000" cy="254000"/>
-          </a:xfrm>
-          <a:prstGeom prst="rect">
-            <a:avLst/>
-          </a:prstGeom>
-          <a:noFill/>
-        </p:spPr>
-        <p:txBody>
-          <a:bodyPr wrap="none">
-            <a:spAutoFit/>
-          </a:bodyPr>
-          <a:lstStyle/>
-          <a:p>
-            <a:pPr>
-              <a:defRPr sz="1200">
-                <a:solidFill>
-                  <a:srgbClr val="FFFFFF"/>
-                </a:solidFill>
-                <a:latin typeface="Inter"/>
-              </a:defRPr>
-            </a:pPr>
-          </a:p>
-        </p:txBody>
-      </p:sp>
-      <p:sp>
-        <p:nvSpPr>
-          <p:cNvPr id="57" name="TextBox 56"/>
-          <p:cNvSpPr txBox="1"/>
-          <p:nvPr/>
-        </p:nvSpPr>
-        <p:spPr>
-          <a:xfrm>
-            <a:off x="4572000" y="2571750"/>
-            <a:ext cx="635000" cy="254000"/>
-          </a:xfrm>
-          <a:prstGeom prst="rect">
-            <a:avLst/>
-          </a:prstGeom>
-          <a:noFill/>
-        </p:spPr>
-        <p:txBody>
-          <a:bodyPr wrap="none">
-            <a:spAutoFit/>
-          </a:bodyPr>
-          <a:lstStyle/>
-          <a:p>
-            <a:pPr>
-              <a:defRPr sz="1200">
-                <a:solidFill>
-                  <a:srgbClr val="FFFFFF"/>
-                </a:solidFill>
-                <a:latin typeface="Inter"/>
-              </a:defRPr>
-            </a:pPr>
           </a:p>
         </p:txBody>
       </p:sp>

--- a/output/1.pptx
+++ b/output/1.pptx
@@ -3174,8 +3174,8 @@
         </p:nvCxnSpPr>
         <p:spPr>
           <a:xfrm flipV="1">
-            <a:off x="4572000.0" y="2375656.92"/>
-            <a:ext cx="42062.40000000037" cy="196093.08000000007"/>
+            <a:off x="3200400.0" y="2983230.0"/>
+            <a:ext cx="228600.0" cy="137160.0"/>
           </a:xfrm>
           <a:prstGeom prst="line">
             <a:avLst/>
@@ -3209,8 +3209,8 @@
         </p:nvCxnSpPr>
         <p:spPr>
           <a:xfrm flipV="1">
-            <a:off x="4614062.4" y="2294412.48"/>
-            <a:ext cx="42062.39999999944" cy="81244.43999999994"/>
+            <a:off x="3429000.0" y="2846070.0"/>
+            <a:ext cx="228600.0" cy="137160.0"/>
           </a:xfrm>
           <a:prstGeom prst="line">
             <a:avLst/>
@@ -3244,8 +3244,8 @@
         </p:nvCxnSpPr>
         <p:spPr>
           <a:xfrm flipV="1">
-            <a:off x="4656124.8" y="2232141.84"/>
-            <a:ext cx="42062.40000000037" cy="62270.64000000013"/>
+            <a:off x="3657600.0" y="2708910.0"/>
+            <a:ext cx="228600.0" cy="137160.0"/>
           </a:xfrm>
           <a:prstGeom prst="line">
             <a:avLst/>
@@ -3279,8 +3279,8 @@
         </p:nvCxnSpPr>
         <p:spPr>
           <a:xfrm flipV="1">
-            <a:off x="4698187.2" y="2180432.52"/>
-            <a:ext cx="42062.39999999944" cy="51709.31999999983"/>
+            <a:off x="3886200.0" y="2571750.0"/>
+            <a:ext cx="228600.0" cy="137160.0"/>
           </a:xfrm>
           <a:prstGeom prst="line">
             <a:avLst/>
@@ -3314,8 +3314,8 @@
         </p:nvCxnSpPr>
         <p:spPr>
           <a:xfrm flipV="1">
-            <a:off x="4740249.6" y="2135306.88"/>
-            <a:ext cx="42062.40000000037" cy="45125.64000000013"/>
+            <a:off x="4114800.0" y="2480310.0"/>
+            <a:ext cx="228600.0" cy="91440.0"/>
           </a:xfrm>
           <a:prstGeom prst="line">
             <a:avLst/>
@@ -3349,8 +3349,8 @@
         </p:nvCxnSpPr>
         <p:spPr>
           <a:xfrm flipV="1">
-            <a:off x="4782312.0" y="2095073.28"/>
-            <a:ext cx="42062.40000000037" cy="40233.59999999986"/>
+            <a:off x="4343400.0" y="2388870.0"/>
+            <a:ext cx="228600.0" cy="91440.0"/>
           </a:xfrm>
           <a:prstGeom prst="line">
             <a:avLst/>
@@ -3384,8 +3384,8 @@
         </p:nvCxnSpPr>
         <p:spPr>
           <a:xfrm flipV="1">
-            <a:off x="4824374.4" y="2058863.04"/>
-            <a:ext cx="42062.39999999944" cy="36210.23999999999"/>
+            <a:off x="4572000.0" y="2297430.0"/>
+            <a:ext cx="228600.0" cy="91440.0"/>
           </a:xfrm>
           <a:prstGeom prst="line">
             <a:avLst/>
@@ -3419,8 +3419,8 @@
         </p:nvCxnSpPr>
         <p:spPr>
           <a:xfrm flipV="1">
-            <a:off x="4866436.8" y="2025853.2000000002"/>
-            <a:ext cx="42062.40000000037" cy="33009.83999999985"/>
+            <a:off x="4800600.0" y="2160270.0"/>
+            <a:ext cx="228600.0" cy="137160.0"/>
           </a:xfrm>
           <a:prstGeom prst="line">
             <a:avLst/>
@@ -3454,8 +3454,8 @@
         </p:nvCxnSpPr>
         <p:spPr>
           <a:xfrm flipV="1">
-            <a:off x="4908499.2" y="1995495.12"/>
-            <a:ext cx="42062.39999999944" cy="30358.080000000075"/>
+            <a:off x="5029200.0" y="2023110.0"/>
+            <a:ext cx="228600.0" cy="137160.0"/>
           </a:xfrm>
           <a:prstGeom prst="line">
             <a:avLst/>
@@ -3489,8 +3489,8 @@
         </p:nvCxnSpPr>
         <p:spPr>
           <a:xfrm flipV="1">
-            <a:off x="4950561.6" y="1967514.48"/>
-            <a:ext cx="42062.40000000037" cy="27980.64000000013"/>
+            <a:off x="5257800.0" y="1885950.0"/>
+            <a:ext cx="228600.0" cy="137160.0"/>
           </a:xfrm>
           <a:prstGeom prst="line">
             <a:avLst/>
@@ -3524,8 +3524,8 @@
         </p:nvCxnSpPr>
         <p:spPr>
           <a:xfrm flipV="1">
-            <a:off x="4992624.0" y="1941591.24"/>
-            <a:ext cx="42062.40000000037" cy="25923.23999999999"/>
+            <a:off x="5486400.0" y="1703070.0"/>
+            <a:ext cx="228600.0" cy="182880.0"/>
           </a:xfrm>
           <a:prstGeom prst="line">
             <a:avLst/>
@@ -3559,8 +3559,8 @@
         </p:nvCxnSpPr>
         <p:spPr>
           <a:xfrm flipV="1">
-            <a:off x="5034686.4" y="1917496.7999999998"/>
-            <a:ext cx="42062.39999999944" cy="24094.440000000177"/>
+            <a:off x="5715000.0" y="1565910.0"/>
+            <a:ext cx="228600.0" cy="137160.0"/>
           </a:xfrm>
           <a:prstGeom prst="line">
             <a:avLst/>
@@ -3594,8 +3594,8 @@
         </p:nvCxnSpPr>
         <p:spPr>
           <a:xfrm flipV="1">
-            <a:off x="5076748.8" y="1894956.8399999999"/>
-            <a:ext cx="42062.40000000037" cy="22539.959999999963"/>
+            <a:off x="5943600.0" y="1428750.0"/>
+            <a:ext cx="228600.0" cy="137160.0"/>
           </a:xfrm>
           <a:prstGeom prst="line">
             <a:avLst/>
@@ -3629,8 +3629,8 @@
         </p:nvCxnSpPr>
         <p:spPr>
           <a:xfrm flipV="1">
-            <a:off x="5118811.2" y="1873834.2000000002"/>
-            <a:ext cx="42062.39999999944" cy="21122.639999999665"/>
+            <a:off x="6172200.0" y="1291590.0"/>
+            <a:ext cx="137160.0" cy="137160.0"/>
           </a:xfrm>
           <a:prstGeom prst="line">
             <a:avLst/>
@@ -3664,8 +3664,8 @@
         </p:nvCxnSpPr>
         <p:spPr>
           <a:xfrm flipV="1">
-            <a:off x="5160873.6" y="1853946.0"/>
-            <a:ext cx="42062.40000000037" cy="19888.200000000186"/>
+            <a:off x="6309360.0" y="1200150.0"/>
+            <a:ext cx="91440.0" cy="91440.0"/>
           </a:xfrm>
           <a:prstGeom prst="line">
             <a:avLst/>
@@ -3699,8 +3699,8 @@
         </p:nvCxnSpPr>
         <p:spPr>
           <a:xfrm flipV="1">
-            <a:off x="5202936.0" y="1835155.08"/>
-            <a:ext cx="42062.40000000037" cy="18790.919999999925"/>
+            <a:off x="6400800.0" y="1108710.0"/>
+            <a:ext cx="91440.0" cy="91440.0"/>
           </a:xfrm>
           <a:prstGeom prst="line">
             <a:avLst/>
@@ -3734,8 +3734,8 @@
         </p:nvCxnSpPr>
         <p:spPr>
           <a:xfrm flipV="1">
-            <a:off x="5244998.4" y="1817324.28"/>
-            <a:ext cx="42062.39999999944" cy="17830.800000000047"/>
+            <a:off x="6492240.0" y="1017270.0"/>
+            <a:ext cx="137160.0" cy="91440.0"/>
           </a:xfrm>
           <a:prstGeom prst="line">
             <a:avLst/>
@@ -3769,8 +3769,8 @@
         </p:nvCxnSpPr>
         <p:spPr>
           <a:xfrm flipV="1">
-            <a:off x="5287060.8" y="1800362.1600000001"/>
-            <a:ext cx="42062.40000000037" cy="16962.11999999988"/>
+            <a:off x="6629400.0" y="925830.0"/>
+            <a:ext cx="137160.0" cy="91440.0"/>
           </a:xfrm>
           <a:prstGeom prst="line">
             <a:avLst/>
@@ -3804,8 +3804,8 @@
         </p:nvCxnSpPr>
         <p:spPr>
           <a:xfrm flipV="1">
-            <a:off x="5329123.2" y="1784223.0"/>
-            <a:ext cx="42062.39999999944" cy="16139.160000000149"/>
+            <a:off x="6766560.0" y="880110.0"/>
+            <a:ext cx="91440.0" cy="45720.0"/>
           </a:xfrm>
           <a:prstGeom prst="line">
             <a:avLst/>
@@ -3831,225 +3831,15 @@
           </a:fontRef>
         </p:style>
       </p:cxnSp>
-      <p:cxnSp>
-        <p:nvCxnSpPr>
-          <p:cNvPr id="23" name="Connector 22"/>
-          <p:cNvCxnSpPr/>
-          <p:nvPr/>
-        </p:nvCxnSpPr>
-        <p:spPr>
-          <a:xfrm flipV="1">
-            <a:off x="5371185.6" y="1768769.6400000001"/>
-            <a:ext cx="42062.40000000037" cy="15453.35999999987"/>
-          </a:xfrm>
-          <a:prstGeom prst="line">
-            <a:avLst/>
-          </a:prstGeom>
-          <a:ln w="25400">
-            <a:solidFill>
-              <a:srgbClr val="00C8FF"/>
-            </a:solidFill>
-          </a:ln>
-        </p:spPr>
-        <p:style>
-          <a:lnRef idx="2">
-            <a:schemeClr val="accent1"/>
-          </a:lnRef>
-          <a:fillRef idx="0">
-            <a:schemeClr val="accent1"/>
-          </a:fillRef>
-          <a:effectRef idx="1">
-            <a:schemeClr val="accent1"/>
-          </a:effectRef>
-          <a:fontRef idx="minor">
-            <a:schemeClr val="tx1"/>
-          </a:fontRef>
-        </p:style>
-      </p:cxnSp>
-      <p:cxnSp>
-        <p:nvCxnSpPr>
-          <p:cNvPr id="24" name="Connector 23"/>
-          <p:cNvCxnSpPr/>
-          <p:nvPr/>
-        </p:nvCxnSpPr>
-        <p:spPr>
-          <a:xfrm flipV="1">
-            <a:off x="5413248.0" y="1754047.8"/>
-            <a:ext cx="42062.40000000037" cy="14721.840000000084"/>
-          </a:xfrm>
-          <a:prstGeom prst="line">
-            <a:avLst/>
-          </a:prstGeom>
-          <a:ln w="25400">
-            <a:solidFill>
-              <a:srgbClr val="00C8FF"/>
-            </a:solidFill>
-          </a:ln>
-        </p:spPr>
-        <p:style>
-          <a:lnRef idx="2">
-            <a:schemeClr val="accent1"/>
-          </a:lnRef>
-          <a:fillRef idx="0">
-            <a:schemeClr val="accent1"/>
-          </a:fillRef>
-          <a:effectRef idx="1">
-            <a:schemeClr val="accent1"/>
-          </a:effectRef>
-          <a:fontRef idx="minor">
-            <a:schemeClr val="tx1"/>
-          </a:fontRef>
-        </p:style>
-      </p:cxnSp>
-      <p:cxnSp>
-        <p:nvCxnSpPr>
-          <p:cNvPr id="25" name="Connector 24"/>
-          <p:cNvCxnSpPr/>
-          <p:nvPr/>
-        </p:nvCxnSpPr>
-        <p:spPr>
-          <a:xfrm flipV="1">
-            <a:off x="5455310.4" y="1739920.32"/>
-            <a:ext cx="42062.39999999944" cy="14127.479999999981"/>
-          </a:xfrm>
-          <a:prstGeom prst="line">
-            <a:avLst/>
-          </a:prstGeom>
-          <a:ln w="25400">
-            <a:solidFill>
-              <a:srgbClr val="00C8FF"/>
-            </a:solidFill>
-          </a:ln>
-        </p:spPr>
-        <p:style>
-          <a:lnRef idx="2">
-            <a:schemeClr val="accent1"/>
-          </a:lnRef>
-          <a:fillRef idx="0">
-            <a:schemeClr val="accent1"/>
-          </a:fillRef>
-          <a:effectRef idx="1">
-            <a:schemeClr val="accent1"/>
-          </a:effectRef>
-          <a:fontRef idx="minor">
-            <a:schemeClr val="tx1"/>
-          </a:fontRef>
-        </p:style>
-      </p:cxnSp>
-      <p:cxnSp>
-        <p:nvCxnSpPr>
-          <p:cNvPr id="26" name="Connector 25"/>
-          <p:cNvCxnSpPr/>
-          <p:nvPr/>
-        </p:nvCxnSpPr>
-        <p:spPr>
-          <a:xfrm flipV="1">
-            <a:off x="5497372.8" y="1726341.48"/>
-            <a:ext cx="42062.40000000037" cy="13578.840000000084"/>
-          </a:xfrm>
-          <a:prstGeom prst="line">
-            <a:avLst/>
-          </a:prstGeom>
-          <a:ln w="25400">
-            <a:solidFill>
-              <a:srgbClr val="00C8FF"/>
-            </a:solidFill>
-          </a:ln>
-        </p:spPr>
-        <p:style>
-          <a:lnRef idx="2">
-            <a:schemeClr val="accent1"/>
-          </a:lnRef>
-          <a:fillRef idx="0">
-            <a:schemeClr val="accent1"/>
-          </a:fillRef>
-          <a:effectRef idx="1">
-            <a:schemeClr val="accent1"/>
-          </a:effectRef>
-          <a:fontRef idx="minor">
-            <a:schemeClr val="tx1"/>
-          </a:fontRef>
-        </p:style>
-      </p:cxnSp>
-      <p:cxnSp>
-        <p:nvCxnSpPr>
-          <p:cNvPr id="27" name="Connector 26"/>
-          <p:cNvCxnSpPr/>
-          <p:nvPr/>
-        </p:nvCxnSpPr>
-        <p:spPr>
-          <a:xfrm flipV="1">
-            <a:off x="5539435.2" y="1713311.28"/>
-            <a:ext cx="42062.39999999944" cy="13030.199999999953"/>
-          </a:xfrm>
-          <a:prstGeom prst="line">
-            <a:avLst/>
-          </a:prstGeom>
-          <a:ln w="25400">
-            <a:solidFill>
-              <a:srgbClr val="00C8FF"/>
-            </a:solidFill>
-          </a:ln>
-        </p:spPr>
-        <p:style>
-          <a:lnRef idx="2">
-            <a:schemeClr val="accent1"/>
-          </a:lnRef>
-          <a:fillRef idx="0">
-            <a:schemeClr val="accent1"/>
-          </a:fillRef>
-          <a:effectRef idx="1">
-            <a:schemeClr val="accent1"/>
-          </a:effectRef>
-          <a:fontRef idx="minor">
-            <a:schemeClr val="tx1"/>
-          </a:fontRef>
-        </p:style>
-      </p:cxnSp>
-      <p:cxnSp>
-        <p:nvCxnSpPr>
-          <p:cNvPr id="28" name="Connector 27"/>
-          <p:cNvCxnSpPr/>
-          <p:nvPr/>
-        </p:nvCxnSpPr>
-        <p:spPr>
-          <a:xfrm flipV="1">
-            <a:off x="5581497.6" y="1700784.0"/>
-            <a:ext cx="42062.40000000037" cy="12527.280000000028"/>
-          </a:xfrm>
-          <a:prstGeom prst="line">
-            <a:avLst/>
-          </a:prstGeom>
-          <a:ln w="25400">
-            <a:solidFill>
-              <a:srgbClr val="00C8FF"/>
-            </a:solidFill>
-          </a:ln>
-        </p:spPr>
-        <p:style>
-          <a:lnRef idx="2">
-            <a:schemeClr val="accent1"/>
-          </a:lnRef>
-          <a:fillRef idx="0">
-            <a:schemeClr val="accent1"/>
-          </a:fillRef>
-          <a:effectRef idx="1">
-            <a:schemeClr val="accent1"/>
-          </a:effectRef>
-          <a:fontRef idx="minor">
-            <a:schemeClr val="tx1"/>
-          </a:fontRef>
-        </p:style>
-      </p:cxnSp>
-      <p:sp>
-        <p:nvSpPr>
-          <p:cNvPr id="29" name="Oval 28"/>
+      <p:sp>
+        <p:nvSpPr>
+          <p:cNvPr id="23" name="Oval 22"/>
           <p:cNvSpPr/>
           <p:nvPr/>
         </p:nvSpPr>
         <p:spPr>
           <a:xfrm>
-            <a:off x="5448300" y="1710690"/>
+            <a:off x="6134100" y="1390650"/>
             <a:ext cx="76200" cy="76200"/>
           </a:xfrm>
           <a:prstGeom prst="ellipse">
@@ -4086,13 +3876,13 @@
       </p:sp>
       <p:sp>
         <p:nvSpPr>
-          <p:cNvPr id="30" name="TextBox 29"/>
+          <p:cNvPr id="24" name="TextBox 23"/>
           <p:cNvSpPr txBox="1"/>
           <p:nvPr/>
         </p:nvSpPr>
         <p:spPr>
           <a:xfrm>
-            <a:off x="5486400" y="2754630"/>
+            <a:off x="5715000" y="1200150"/>
             <a:ext cx="635000" cy="254000"/>
           </a:xfrm>
           <a:prstGeom prst="rect">
@@ -4115,20 +3905,56 @@
               </a:defRPr>
             </a:pPr>
             <a:r>
-              <a:t>a</a:t>
-            </a:r>
-          </a:p>
-        </p:txBody>
-      </p:sp>
-      <p:sp>
-        <p:nvSpPr>
-          <p:cNvPr id="31" name="TextBox 30"/>
+              <a:t>y=f(x)</a:t>
+            </a:r>
+          </a:p>
+        </p:txBody>
+      </p:sp>
+      <p:sp>
+        <p:nvSpPr>
+          <p:cNvPr id="25" name="TextBox 24"/>
           <p:cNvSpPr txBox="1"/>
           <p:nvPr/>
         </p:nvSpPr>
         <p:spPr>
           <a:xfrm>
-            <a:off x="4389120" y="1748790"/>
+            <a:off x="6172200" y="2754630"/>
+            <a:ext cx="635000" cy="254000"/>
+          </a:xfrm>
+          <a:prstGeom prst="rect">
+            <a:avLst/>
+          </a:prstGeom>
+          <a:noFill/>
+        </p:spPr>
+        <p:txBody>
+          <a:bodyPr wrap="none">
+            <a:spAutoFit/>
+          </a:bodyPr>
+          <a:lstStyle/>
+          <a:p>
+            <a:pPr>
+              <a:defRPr sz="1200">
+                <a:solidFill>
+                  <a:srgbClr val="FFFFFF"/>
+                </a:solidFill>
+                <a:latin typeface="Inter"/>
+              </a:defRPr>
+            </a:pPr>
+            <a:r>
+              <a:t>a</a:t>
+            </a:r>
+          </a:p>
+        </p:txBody>
+      </p:sp>
+      <p:sp>
+        <p:nvSpPr>
+          <p:cNvPr id="26" name="TextBox 25"/>
+          <p:cNvSpPr txBox="1"/>
+          <p:nvPr/>
+        </p:nvSpPr>
+        <p:spPr>
+          <a:xfrm>
+            <a:off x="4434840" y="1428750"/>
             <a:ext cx="635000" cy="254000"/>
           </a:xfrm>
           <a:prstGeom prst="rect">

--- a/output/1.pptx
+++ b/output/1.pptx
@@ -3174,8 +3174,8 @@
         </p:nvCxnSpPr>
         <p:spPr>
           <a:xfrm flipV="1">
-            <a:off x="3200400.0" y="2983230.0"/>
-            <a:ext cx="228600.0" cy="137160.0"/>
+            <a:off x="3886200.0" y="2934309.6"/>
+            <a:ext cx="69494.3999999999" cy="94640.3999999999"/>
           </a:xfrm>
           <a:prstGeom prst="line">
             <a:avLst/>
@@ -3209,8 +3209,8 @@
         </p:nvCxnSpPr>
         <p:spPr>
           <a:xfrm flipV="1">
-            <a:off x="3429000.0" y="2846070.0"/>
-            <a:ext cx="228600.0" cy="137160.0"/>
+            <a:off x="3955694.4" y="2851556.4"/>
+            <a:ext cx="69037.20000000019" cy="82753.20000000019"/>
           </a:xfrm>
           <a:prstGeom prst="line">
             <a:avLst/>
@@ -3244,8 +3244,8 @@
         </p:nvCxnSpPr>
         <p:spPr>
           <a:xfrm flipV="1">
-            <a:off x="3657600.0" y="2708910.0"/>
-            <a:ext cx="228600.0" cy="137160.0"/>
+            <a:off x="4024731.6" y="2780690.4"/>
+            <a:ext cx="69494.3999999999" cy="70866.0"/>
           </a:xfrm>
           <a:prstGeom prst="line">
             <a:avLst/>
@@ -3279,8 +3279,8 @@
         </p:nvCxnSpPr>
         <p:spPr>
           <a:xfrm flipV="1">
-            <a:off x="3886200.0" y="2571750.0"/>
-            <a:ext cx="228600.0" cy="137160.0"/>
+            <a:off x="4094226.0" y="2719425.6"/>
+            <a:ext cx="69494.3999999999" cy="61264.799999999814"/>
           </a:xfrm>
           <a:prstGeom prst="line">
             <a:avLst/>
@@ -3314,8 +3314,8 @@
         </p:nvCxnSpPr>
         <p:spPr>
           <a:xfrm flipV="1">
-            <a:off x="4114800.0" y="2480310.0"/>
-            <a:ext cx="228600.0" cy="91440.0"/>
+            <a:off x="4163720.4" y="2666390.4"/>
+            <a:ext cx="69037.19999999972" cy="53035.200000000186"/>
           </a:xfrm>
           <a:prstGeom prst="line">
             <a:avLst/>
@@ -3349,8 +3349,8 @@
         </p:nvCxnSpPr>
         <p:spPr>
           <a:xfrm flipV="1">
-            <a:off x="4343400.0" y="2388870.0"/>
-            <a:ext cx="228600.0" cy="91440.0"/>
+            <a:off x="4232757.6" y="2620213.2"/>
+            <a:ext cx="69494.40000000037" cy="46177.19999999972"/>
           </a:xfrm>
           <a:prstGeom prst="line">
             <a:avLst/>
@@ -3384,8 +3384,8 @@
         </p:nvCxnSpPr>
         <p:spPr>
           <a:xfrm flipV="1">
-            <a:off x="4572000.0" y="2297430.0"/>
-            <a:ext cx="228600.0" cy="91440.0"/>
+            <a:off x="4302252.0" y="2580436.8"/>
+            <a:ext cx="69494.40000000037" cy="39776.40000000037"/>
           </a:xfrm>
           <a:prstGeom prst="line">
             <a:avLst/>
@@ -3419,8 +3419,8 @@
         </p:nvCxnSpPr>
         <p:spPr>
           <a:xfrm flipV="1">
-            <a:off x="4800600.0" y="2160270.0"/>
-            <a:ext cx="228600.0" cy="137160.0"/>
+            <a:off x="4371746.4" y="2547061.2"/>
+            <a:ext cx="69037.19999999925" cy="33375.59999999963"/>
           </a:xfrm>
           <a:prstGeom prst="line">
             <a:avLst/>
@@ -3454,8 +3454,8 @@
         </p:nvCxnSpPr>
         <p:spPr>
           <a:xfrm flipV="1">
-            <a:off x="5029200.0" y="2023110.0"/>
-            <a:ext cx="228600.0" cy="137160.0"/>
+            <a:off x="4440783.6" y="2518257.6"/>
+            <a:ext cx="69494.40000000037" cy="28803.600000000093"/>
           </a:xfrm>
           <a:prstGeom prst="line">
             <a:avLst/>
@@ -3489,8 +3489,8 @@
         </p:nvCxnSpPr>
         <p:spPr>
           <a:xfrm flipV="1">
-            <a:off x="5257800.0" y="1885950.0"/>
-            <a:ext cx="228600.0" cy="137160.0"/>
+            <a:off x="4510278.0" y="2494026.0"/>
+            <a:ext cx="69494.40000000037" cy="24231.600000000093"/>
           </a:xfrm>
           <a:prstGeom prst="line">
             <a:avLst/>
@@ -3524,8 +3524,8 @@
         </p:nvCxnSpPr>
         <p:spPr>
           <a:xfrm flipV="1">
-            <a:off x="5486400.0" y="1703070.0"/>
-            <a:ext cx="228600.0" cy="182880.0"/>
+            <a:off x="4579772.4" y="2472994.8"/>
+            <a:ext cx="69037.19999999925" cy="21031.200000000186"/>
           </a:xfrm>
           <a:prstGeom prst="line">
             <a:avLst/>
@@ -3559,8 +3559,8 @@
         </p:nvCxnSpPr>
         <p:spPr>
           <a:xfrm flipV="1">
-            <a:off x="5715000.0" y="1565910.0"/>
-            <a:ext cx="228600.0" cy="137160.0"/>
+            <a:off x="4648809.6" y="2453792.4"/>
+            <a:ext cx="69494.40000000037" cy="19202.399999999907"/>
           </a:xfrm>
           <a:prstGeom prst="line">
             <a:avLst/>
@@ -3594,8 +3594,8 @@
         </p:nvCxnSpPr>
         <p:spPr>
           <a:xfrm flipV="1">
-            <a:off x="5943600.0" y="1428750.0"/>
-            <a:ext cx="228600.0" cy="137160.0"/>
+            <a:off x="4718304.0" y="2435961.6"/>
+            <a:ext cx="69037.20000000019" cy="17830.799999999814"/>
           </a:xfrm>
           <a:prstGeom prst="line">
             <a:avLst/>
@@ -3629,8 +3629,8 @@
         </p:nvCxnSpPr>
         <p:spPr>
           <a:xfrm flipV="1">
-            <a:off x="6172200.0" y="1291590.0"/>
-            <a:ext cx="137160.0" cy="137160.0"/>
+            <a:off x="4787341.2" y="2418130.8"/>
+            <a:ext cx="69494.39999999944" cy="17830.80000000028"/>
           </a:xfrm>
           <a:prstGeom prst="line">
             <a:avLst/>
@@ -3664,8 +3664,8 @@
         </p:nvCxnSpPr>
         <p:spPr>
           <a:xfrm flipV="1">
-            <a:off x="6309360.0" y="1200150.0"/>
-            <a:ext cx="91440.0" cy="91440.0"/>
+            <a:off x="4856835.6" y="2399385.6"/>
+            <a:ext cx="69037.20000000019" cy="18745.19999999972"/>
           </a:xfrm>
           <a:prstGeom prst="line">
             <a:avLst/>
@@ -3699,8 +3699,8 @@
         </p:nvCxnSpPr>
         <p:spPr>
           <a:xfrm flipV="1">
-            <a:off x="6400800.0" y="1108710.0"/>
-            <a:ext cx="91440.0" cy="91440.0"/>
+            <a:off x="4925872.8" y="2378811.6"/>
+            <a:ext cx="69494.40000000037" cy="20574.0"/>
           </a:xfrm>
           <a:prstGeom prst="line">
             <a:avLst/>
@@ -3734,8 +3734,8 @@
         </p:nvCxnSpPr>
         <p:spPr>
           <a:xfrm flipV="1">
-            <a:off x="6492240.0" y="1017270.0"/>
-            <a:ext cx="137160.0" cy="91440.0"/>
+            <a:off x="4995367.2" y="2355951.6"/>
+            <a:ext cx="69037.20000000019" cy="22860.0"/>
           </a:xfrm>
           <a:prstGeom prst="line">
             <a:avLst/>
@@ -3769,8 +3769,8 @@
         </p:nvCxnSpPr>
         <p:spPr>
           <a:xfrm flipV="1">
-            <a:off x="6629400.0" y="925830.0"/>
-            <a:ext cx="137160.0" cy="91440.0"/>
+            <a:off x="5064404.4" y="2330348.4"/>
+            <a:ext cx="69494.39999999944" cy="25603.200000000186"/>
           </a:xfrm>
           <a:prstGeom prst="line">
             <a:avLst/>
@@ -3804,8 +3804,8 @@
         </p:nvCxnSpPr>
         <p:spPr>
           <a:xfrm flipV="1">
-            <a:off x="6766560.0" y="880110.0"/>
-            <a:ext cx="91440.0" cy="45720.0"/>
+            <a:off x="5133898.8" y="2301087.6"/>
+            <a:ext cx="69494.40000000037" cy="29260.799999999814"/>
           </a:xfrm>
           <a:prstGeom prst="line">
             <a:avLst/>
@@ -3831,15 +3831,890 @@
           </a:fontRef>
         </p:style>
       </p:cxnSp>
-      <p:sp>
-        <p:nvSpPr>
-          <p:cNvPr id="23" name="Oval 22"/>
+      <p:cxnSp>
+        <p:nvCxnSpPr>
+          <p:cNvPr id="23" name="Connector 22"/>
+          <p:cNvCxnSpPr/>
+          <p:nvPr/>
+        </p:nvCxnSpPr>
+        <p:spPr>
+          <a:xfrm flipV="1">
+            <a:off x="5203393.2" y="2268169.2"/>
+            <a:ext cx="69037.20000000019" cy="32918.39999999991"/>
+          </a:xfrm>
+          <a:prstGeom prst="line">
+            <a:avLst/>
+          </a:prstGeom>
+          <a:ln w="25400">
+            <a:solidFill>
+              <a:srgbClr val="00C8FF"/>
+            </a:solidFill>
+          </a:ln>
+        </p:spPr>
+        <p:style>
+          <a:lnRef idx="2">
+            <a:schemeClr val="accent1"/>
+          </a:lnRef>
+          <a:fillRef idx="0">
+            <a:schemeClr val="accent1"/>
+          </a:fillRef>
+          <a:effectRef idx="1">
+            <a:schemeClr val="accent1"/>
+          </a:effectRef>
+          <a:fontRef idx="minor">
+            <a:schemeClr val="tx1"/>
+          </a:fontRef>
+        </p:style>
+      </p:cxnSp>
+      <p:cxnSp>
+        <p:nvCxnSpPr>
+          <p:cNvPr id="24" name="Connector 23"/>
+          <p:cNvCxnSpPr/>
+          <p:nvPr/>
+        </p:nvCxnSpPr>
+        <p:spPr>
+          <a:xfrm flipV="1">
+            <a:off x="5272430.4" y="2231136.0"/>
+            <a:ext cx="69494.39999999944" cy="37033.200000000186"/>
+          </a:xfrm>
+          <a:prstGeom prst="line">
+            <a:avLst/>
+          </a:prstGeom>
+          <a:ln w="25400">
+            <a:solidFill>
+              <a:srgbClr val="00C8FF"/>
+            </a:solidFill>
+          </a:ln>
+        </p:spPr>
+        <p:style>
+          <a:lnRef idx="2">
+            <a:schemeClr val="accent1"/>
+          </a:lnRef>
+          <a:fillRef idx="0">
+            <a:schemeClr val="accent1"/>
+          </a:fillRef>
+          <a:effectRef idx="1">
+            <a:schemeClr val="accent1"/>
+          </a:effectRef>
+          <a:fontRef idx="minor">
+            <a:schemeClr val="tx1"/>
+          </a:fontRef>
+        </p:style>
+      </p:cxnSp>
+      <p:cxnSp>
+        <p:nvCxnSpPr>
+          <p:cNvPr id="25" name="Connector 24"/>
+          <p:cNvCxnSpPr/>
+          <p:nvPr/>
+        </p:nvCxnSpPr>
+        <p:spPr>
+          <a:xfrm flipV="1">
+            <a:off x="5341924.8" y="2189073.6"/>
+            <a:ext cx="69037.20000000019" cy="42062.39999999991"/>
+          </a:xfrm>
+          <a:prstGeom prst="line">
+            <a:avLst/>
+          </a:prstGeom>
+          <a:ln w="25400">
+            <a:solidFill>
+              <a:srgbClr val="00C8FF"/>
+            </a:solidFill>
+          </a:ln>
+        </p:spPr>
+        <p:style>
+          <a:lnRef idx="2">
+            <a:schemeClr val="accent1"/>
+          </a:lnRef>
+          <a:fillRef idx="0">
+            <a:schemeClr val="accent1"/>
+          </a:fillRef>
+          <a:effectRef idx="1">
+            <a:schemeClr val="accent1"/>
+          </a:effectRef>
+          <a:fontRef idx="minor">
+            <a:schemeClr val="tx1"/>
+          </a:fontRef>
+        </p:style>
+      </p:cxnSp>
+      <p:cxnSp>
+        <p:nvCxnSpPr>
+          <p:cNvPr id="26" name="Connector 25"/>
+          <p:cNvCxnSpPr/>
+          <p:nvPr/>
+        </p:nvCxnSpPr>
+        <p:spPr>
+          <a:xfrm flipV="1">
+            <a:off x="5410962.0" y="2141524.8"/>
+            <a:ext cx="69494.40000000037" cy="47548.80000000028"/>
+          </a:xfrm>
+          <a:prstGeom prst="line">
+            <a:avLst/>
+          </a:prstGeom>
+          <a:ln w="25400">
+            <a:solidFill>
+              <a:srgbClr val="00C8FF"/>
+            </a:solidFill>
+          </a:ln>
+        </p:spPr>
+        <p:style>
+          <a:lnRef idx="2">
+            <a:schemeClr val="accent1"/>
+          </a:lnRef>
+          <a:fillRef idx="0">
+            <a:schemeClr val="accent1"/>
+          </a:fillRef>
+          <a:effectRef idx="1">
+            <a:schemeClr val="accent1"/>
+          </a:effectRef>
+          <a:fontRef idx="minor">
+            <a:schemeClr val="tx1"/>
+          </a:fontRef>
+        </p:style>
+      </p:cxnSp>
+      <p:cxnSp>
+        <p:nvCxnSpPr>
+          <p:cNvPr id="27" name="Connector 26"/>
+          <p:cNvCxnSpPr/>
+          <p:nvPr/>
+        </p:nvCxnSpPr>
+        <p:spPr>
+          <a:xfrm flipV="1">
+            <a:off x="5480456.4" y="2088489.6"/>
+            <a:ext cx="69037.19999999925" cy="53035.19999999972"/>
+          </a:xfrm>
+          <a:prstGeom prst="line">
+            <a:avLst/>
+          </a:prstGeom>
+          <a:ln w="25400">
+            <a:solidFill>
+              <a:srgbClr val="00C8FF"/>
+            </a:solidFill>
+          </a:ln>
+        </p:spPr>
+        <p:style>
+          <a:lnRef idx="2">
+            <a:schemeClr val="accent1"/>
+          </a:lnRef>
+          <a:fillRef idx="0">
+            <a:schemeClr val="accent1"/>
+          </a:fillRef>
+          <a:effectRef idx="1">
+            <a:schemeClr val="accent1"/>
+          </a:effectRef>
+          <a:fontRef idx="minor">
+            <a:schemeClr val="tx1"/>
+          </a:fontRef>
+        </p:style>
+      </p:cxnSp>
+      <p:cxnSp>
+        <p:nvCxnSpPr>
+          <p:cNvPr id="28" name="Connector 27"/>
+          <p:cNvCxnSpPr/>
+          <p:nvPr/>
+        </p:nvCxnSpPr>
+        <p:spPr>
+          <a:xfrm flipV="1">
+            <a:off x="5549493.6" y="2029510.8"/>
+            <a:ext cx="69494.40000000037" cy="58978.80000000005"/>
+          </a:xfrm>
+          <a:prstGeom prst="line">
+            <a:avLst/>
+          </a:prstGeom>
+          <a:ln w="25400">
+            <a:solidFill>
+              <a:srgbClr val="00C8FF"/>
+            </a:solidFill>
+          </a:ln>
+        </p:spPr>
+        <p:style>
+          <a:lnRef idx="2">
+            <a:schemeClr val="accent1"/>
+          </a:lnRef>
+          <a:fillRef idx="0">
+            <a:schemeClr val="accent1"/>
+          </a:fillRef>
+          <a:effectRef idx="1">
+            <a:schemeClr val="accent1"/>
+          </a:effectRef>
+          <a:fontRef idx="minor">
+            <a:schemeClr val="tx1"/>
+          </a:fontRef>
+        </p:style>
+      </p:cxnSp>
+      <p:cxnSp>
+        <p:nvCxnSpPr>
+          <p:cNvPr id="29" name="Connector 28"/>
+          <p:cNvCxnSpPr/>
+          <p:nvPr/>
+        </p:nvCxnSpPr>
+        <p:spPr>
+          <a:xfrm flipV="1">
+            <a:off x="5618988.0" y="1964588.4"/>
+            <a:ext cx="69494.40000000037" cy="64922.40000000014"/>
+          </a:xfrm>
+          <a:prstGeom prst="line">
+            <a:avLst/>
+          </a:prstGeom>
+          <a:ln w="25400">
+            <a:solidFill>
+              <a:srgbClr val="00C8FF"/>
+            </a:solidFill>
+          </a:ln>
+        </p:spPr>
+        <p:style>
+          <a:lnRef idx="2">
+            <a:schemeClr val="accent1"/>
+          </a:lnRef>
+          <a:fillRef idx="0">
+            <a:schemeClr val="accent1"/>
+          </a:fillRef>
+          <a:effectRef idx="1">
+            <a:schemeClr val="accent1"/>
+          </a:effectRef>
+          <a:fontRef idx="minor">
+            <a:schemeClr val="tx1"/>
+          </a:fontRef>
+        </p:style>
+      </p:cxnSp>
+      <p:cxnSp>
+        <p:nvCxnSpPr>
+          <p:cNvPr id="30" name="Connector 29"/>
+          <p:cNvCxnSpPr/>
+          <p:nvPr/>
+        </p:nvCxnSpPr>
+        <p:spPr>
+          <a:xfrm flipV="1">
+            <a:off x="5688482.4" y="1893265.2"/>
+            <a:ext cx="69037.19999999925" cy="71323.19999999995"/>
+          </a:xfrm>
+          <a:prstGeom prst="line">
+            <a:avLst/>
+          </a:prstGeom>
+          <a:ln w="25400">
+            <a:solidFill>
+              <a:srgbClr val="00C8FF"/>
+            </a:solidFill>
+          </a:ln>
+        </p:spPr>
+        <p:style>
+          <a:lnRef idx="2">
+            <a:schemeClr val="accent1"/>
+          </a:lnRef>
+          <a:fillRef idx="0">
+            <a:schemeClr val="accent1"/>
+          </a:fillRef>
+          <a:effectRef idx="1">
+            <a:schemeClr val="accent1"/>
+          </a:effectRef>
+          <a:fontRef idx="minor">
+            <a:schemeClr val="tx1"/>
+          </a:fontRef>
+        </p:style>
+      </p:cxnSp>
+      <p:cxnSp>
+        <p:nvCxnSpPr>
+          <p:cNvPr id="31" name="Connector 30"/>
+          <p:cNvCxnSpPr/>
+          <p:nvPr/>
+        </p:nvCxnSpPr>
+        <p:spPr>
+          <a:xfrm flipV="1">
+            <a:off x="5757519.6" y="1815084.0"/>
+            <a:ext cx="69494.40000000037" cy="78181.19999999995"/>
+          </a:xfrm>
+          <a:prstGeom prst="line">
+            <a:avLst/>
+          </a:prstGeom>
+          <a:ln w="25400">
+            <a:solidFill>
+              <a:srgbClr val="00C8FF"/>
+            </a:solidFill>
+          </a:ln>
+        </p:spPr>
+        <p:style>
+          <a:lnRef idx="2">
+            <a:schemeClr val="accent1"/>
+          </a:lnRef>
+          <a:fillRef idx="0">
+            <a:schemeClr val="accent1"/>
+          </a:fillRef>
+          <a:effectRef idx="1">
+            <a:schemeClr val="accent1"/>
+          </a:effectRef>
+          <a:fontRef idx="minor">
+            <a:schemeClr val="tx1"/>
+          </a:fontRef>
+        </p:style>
+      </p:cxnSp>
+      <p:cxnSp>
+        <p:nvCxnSpPr>
+          <p:cNvPr id="32" name="Connector 31"/>
+          <p:cNvCxnSpPr/>
+          <p:nvPr/>
+        </p:nvCxnSpPr>
+        <p:spPr>
+          <a:xfrm flipV="1">
+            <a:off x="5827014.0" y="1730044.8"/>
+            <a:ext cx="69037.20000000019" cy="85039.19999999995"/>
+          </a:xfrm>
+          <a:prstGeom prst="line">
+            <a:avLst/>
+          </a:prstGeom>
+          <a:ln w="25400">
+            <a:solidFill>
+              <a:srgbClr val="00C8FF"/>
+            </a:solidFill>
+          </a:ln>
+        </p:spPr>
+        <p:style>
+          <a:lnRef idx="2">
+            <a:schemeClr val="accent1"/>
+          </a:lnRef>
+          <a:fillRef idx="0">
+            <a:schemeClr val="accent1"/>
+          </a:fillRef>
+          <a:effectRef idx="1">
+            <a:schemeClr val="accent1"/>
+          </a:effectRef>
+          <a:fontRef idx="minor">
+            <a:schemeClr val="tx1"/>
+          </a:fontRef>
+        </p:style>
+      </p:cxnSp>
+      <p:cxnSp>
+        <p:nvCxnSpPr>
+          <p:cNvPr id="33" name="Connector 32"/>
+          <p:cNvCxnSpPr/>
+          <p:nvPr/>
+        </p:nvCxnSpPr>
+        <p:spPr>
+          <a:xfrm flipV="1">
+            <a:off x="5896051.2" y="1637690.4"/>
+            <a:ext cx="69494.39999999944" cy="92354.40000000014"/>
+          </a:xfrm>
+          <a:prstGeom prst="line">
+            <a:avLst/>
+          </a:prstGeom>
+          <a:ln w="25400">
+            <a:solidFill>
+              <a:srgbClr val="00C8FF"/>
+            </a:solidFill>
+          </a:ln>
+        </p:spPr>
+        <p:style>
+          <a:lnRef idx="2">
+            <a:schemeClr val="accent1"/>
+          </a:lnRef>
+          <a:fillRef idx="0">
+            <a:schemeClr val="accent1"/>
+          </a:fillRef>
+          <a:effectRef idx="1">
+            <a:schemeClr val="accent1"/>
+          </a:effectRef>
+          <a:fontRef idx="minor">
+            <a:schemeClr val="tx1"/>
+          </a:fontRef>
+        </p:style>
+      </p:cxnSp>
+      <p:cxnSp>
+        <p:nvCxnSpPr>
+          <p:cNvPr id="34" name="Connector 33"/>
+          <p:cNvCxnSpPr/>
+          <p:nvPr/>
+        </p:nvCxnSpPr>
+        <p:spPr>
+          <a:xfrm flipV="1">
+            <a:off x="5965545.6" y="1588770.0"/>
+            <a:ext cx="92354.40000000037" cy="48920.39999999991"/>
+          </a:xfrm>
+          <a:prstGeom prst="line">
+            <a:avLst/>
+          </a:prstGeom>
+          <a:ln w="25400">
+            <a:solidFill>
+              <a:srgbClr val="00C8FF"/>
+            </a:solidFill>
+          </a:ln>
+        </p:spPr>
+        <p:style>
+          <a:lnRef idx="2">
+            <a:schemeClr val="accent1"/>
+          </a:lnRef>
+          <a:fillRef idx="0">
+            <a:schemeClr val="accent1"/>
+          </a:fillRef>
+          <a:effectRef idx="1">
+            <a:schemeClr val="accent1"/>
+          </a:effectRef>
+          <a:fontRef idx="minor">
+            <a:schemeClr val="tx1"/>
+          </a:fontRef>
+        </p:style>
+      </p:cxnSp>
+      <p:cxnSp>
+        <p:nvCxnSpPr>
+          <p:cNvPr id="35" name="Connector 34"/>
+          <p:cNvCxnSpPr/>
+          <p:nvPr/>
+        </p:nvCxnSpPr>
+        <p:spPr>
+          <a:xfrm flipV="1">
+            <a:off x="6057900.0" y="1557223.2000000002"/>
+            <a:ext cx="45720.0" cy="31546.799999999814"/>
+          </a:xfrm>
+          <a:prstGeom prst="line">
+            <a:avLst/>
+          </a:prstGeom>
+          <a:ln w="25400">
+            <a:solidFill>
+              <a:srgbClr val="00C8FF"/>
+            </a:solidFill>
+          </a:ln>
+        </p:spPr>
+        <p:style>
+          <a:lnRef idx="2">
+            <a:schemeClr val="accent1"/>
+          </a:lnRef>
+          <a:fillRef idx="0">
+            <a:schemeClr val="accent1"/>
+          </a:fillRef>
+          <a:effectRef idx="1">
+            <a:schemeClr val="accent1"/>
+          </a:effectRef>
+          <a:fontRef idx="minor">
+            <a:schemeClr val="tx1"/>
+          </a:fontRef>
+        </p:style>
+      </p:cxnSp>
+      <p:cxnSp>
+        <p:nvCxnSpPr>
+          <p:cNvPr id="36" name="Connector 35"/>
+          <p:cNvCxnSpPr/>
+          <p:nvPr/>
+        </p:nvCxnSpPr>
+        <p:spPr>
+          <a:xfrm flipV="1">
+            <a:off x="6103620.0" y="1525219.2"/>
+            <a:ext cx="45720.0" cy="32004.000000000233"/>
+          </a:xfrm>
+          <a:prstGeom prst="line">
+            <a:avLst/>
+          </a:prstGeom>
+          <a:ln w="25400">
+            <a:solidFill>
+              <a:srgbClr val="00C8FF"/>
+            </a:solidFill>
+          </a:ln>
+        </p:spPr>
+        <p:style>
+          <a:lnRef idx="2">
+            <a:schemeClr val="accent1"/>
+          </a:lnRef>
+          <a:fillRef idx="0">
+            <a:schemeClr val="accent1"/>
+          </a:fillRef>
+          <a:effectRef idx="1">
+            <a:schemeClr val="accent1"/>
+          </a:effectRef>
+          <a:fontRef idx="minor">
+            <a:schemeClr val="tx1"/>
+          </a:fontRef>
+        </p:style>
+      </p:cxnSp>
+      <p:cxnSp>
+        <p:nvCxnSpPr>
+          <p:cNvPr id="37" name="Connector 36"/>
+          <p:cNvCxnSpPr/>
+          <p:nvPr/>
+        </p:nvCxnSpPr>
+        <p:spPr>
+          <a:xfrm flipV="1">
+            <a:off x="6149340.0" y="1492758.0"/>
+            <a:ext cx="45720.0" cy="32461.199999999953"/>
+          </a:xfrm>
+          <a:prstGeom prst="line">
+            <a:avLst/>
+          </a:prstGeom>
+          <a:ln w="25400">
+            <a:solidFill>
+              <a:srgbClr val="00C8FF"/>
+            </a:solidFill>
+          </a:ln>
+        </p:spPr>
+        <p:style>
+          <a:lnRef idx="2">
+            <a:schemeClr val="accent1"/>
+          </a:lnRef>
+          <a:fillRef idx="0">
+            <a:schemeClr val="accent1"/>
+          </a:fillRef>
+          <a:effectRef idx="1">
+            <a:schemeClr val="accent1"/>
+          </a:effectRef>
+          <a:fontRef idx="minor">
+            <a:schemeClr val="tx1"/>
+          </a:fontRef>
+        </p:style>
+      </p:cxnSp>
+      <p:cxnSp>
+        <p:nvCxnSpPr>
+          <p:cNvPr id="38" name="Connector 37"/>
+          <p:cNvCxnSpPr/>
+          <p:nvPr/>
+        </p:nvCxnSpPr>
+        <p:spPr>
+          <a:xfrm flipV="1">
+            <a:off x="6195060.0" y="1459382.4000000001"/>
+            <a:ext cx="45720.0" cy="33375.59999999986"/>
+          </a:xfrm>
+          <a:prstGeom prst="line">
+            <a:avLst/>
+          </a:prstGeom>
+          <a:ln w="25400">
+            <a:solidFill>
+              <a:srgbClr val="00C8FF"/>
+            </a:solidFill>
+          </a:ln>
+        </p:spPr>
+        <p:style>
+          <a:lnRef idx="2">
+            <a:schemeClr val="accent1"/>
+          </a:lnRef>
+          <a:fillRef idx="0">
+            <a:schemeClr val="accent1"/>
+          </a:fillRef>
+          <a:effectRef idx="1">
+            <a:schemeClr val="accent1"/>
+          </a:effectRef>
+          <a:fontRef idx="minor">
+            <a:schemeClr val="tx1"/>
+          </a:fontRef>
+        </p:style>
+      </p:cxnSp>
+      <p:cxnSp>
+        <p:nvCxnSpPr>
+          <p:cNvPr id="39" name="Connector 38"/>
+          <p:cNvCxnSpPr/>
+          <p:nvPr/>
+        </p:nvCxnSpPr>
+        <p:spPr>
+          <a:xfrm flipV="1">
+            <a:off x="6240780.0" y="1425549.5999999999"/>
+            <a:ext cx="45720.0" cy="33832.80000000028"/>
+          </a:xfrm>
+          <a:prstGeom prst="line">
+            <a:avLst/>
+          </a:prstGeom>
+          <a:ln w="25400">
+            <a:solidFill>
+              <a:srgbClr val="00C8FF"/>
+            </a:solidFill>
+          </a:ln>
+        </p:spPr>
+        <p:style>
+          <a:lnRef idx="2">
+            <a:schemeClr val="accent1"/>
+          </a:lnRef>
+          <a:fillRef idx="0">
+            <a:schemeClr val="accent1"/>
+          </a:fillRef>
+          <a:effectRef idx="1">
+            <a:schemeClr val="accent1"/>
+          </a:effectRef>
+          <a:fontRef idx="minor">
+            <a:schemeClr val="tx1"/>
+          </a:fontRef>
+        </p:style>
+      </p:cxnSp>
+      <p:cxnSp>
+        <p:nvCxnSpPr>
+          <p:cNvPr id="40" name="Connector 39"/>
+          <p:cNvCxnSpPr/>
+          <p:nvPr/>
+        </p:nvCxnSpPr>
+        <p:spPr>
+          <a:xfrm flipV="1">
+            <a:off x="6286500.0" y="1390802.4"/>
+            <a:ext cx="45720.0" cy="34747.19999999995"/>
+          </a:xfrm>
+          <a:prstGeom prst="line">
+            <a:avLst/>
+          </a:prstGeom>
+          <a:ln w="25400">
+            <a:solidFill>
+              <a:srgbClr val="00C8FF"/>
+            </a:solidFill>
+          </a:ln>
+        </p:spPr>
+        <p:style>
+          <a:lnRef idx="2">
+            <a:schemeClr val="accent1"/>
+          </a:lnRef>
+          <a:fillRef idx="0">
+            <a:schemeClr val="accent1"/>
+          </a:fillRef>
+          <a:effectRef idx="1">
+            <a:schemeClr val="accent1"/>
+          </a:effectRef>
+          <a:fontRef idx="minor">
+            <a:schemeClr val="tx1"/>
+          </a:fontRef>
+        </p:style>
+      </p:cxnSp>
+      <p:cxnSp>
+        <p:nvCxnSpPr>
+          <p:cNvPr id="41" name="Connector 40"/>
+          <p:cNvCxnSpPr/>
+          <p:nvPr/>
+        </p:nvCxnSpPr>
+        <p:spPr>
+          <a:xfrm flipV="1">
+            <a:off x="6332220.0" y="1355140.8"/>
+            <a:ext cx="45720.0" cy="35661.59999999986"/>
+          </a:xfrm>
+          <a:prstGeom prst="line">
+            <a:avLst/>
+          </a:prstGeom>
+          <a:ln w="25400">
+            <a:solidFill>
+              <a:srgbClr val="00C8FF"/>
+            </a:solidFill>
+          </a:ln>
+        </p:spPr>
+        <p:style>
+          <a:lnRef idx="2">
+            <a:schemeClr val="accent1"/>
+          </a:lnRef>
+          <a:fillRef idx="0">
+            <a:schemeClr val="accent1"/>
+          </a:fillRef>
+          <a:effectRef idx="1">
+            <a:schemeClr val="accent1"/>
+          </a:effectRef>
+          <a:fontRef idx="minor">
+            <a:schemeClr val="tx1"/>
+          </a:fontRef>
+        </p:style>
+      </p:cxnSp>
+      <p:cxnSp>
+        <p:nvCxnSpPr>
+          <p:cNvPr id="42" name="Connector 41"/>
+          <p:cNvCxnSpPr/>
+          <p:nvPr/>
+        </p:nvCxnSpPr>
+        <p:spPr>
+          <a:xfrm flipV="1">
+            <a:off x="6377940.0" y="1318564.8"/>
+            <a:ext cx="45720.0" cy="36576.0"/>
+          </a:xfrm>
+          <a:prstGeom prst="line">
+            <a:avLst/>
+          </a:prstGeom>
+          <a:ln w="25400">
+            <a:solidFill>
+              <a:srgbClr val="00C8FF"/>
+            </a:solidFill>
+          </a:ln>
+        </p:spPr>
+        <p:style>
+          <a:lnRef idx="2">
+            <a:schemeClr val="accent1"/>
+          </a:lnRef>
+          <a:fillRef idx="0">
+            <a:schemeClr val="accent1"/>
+          </a:fillRef>
+          <a:effectRef idx="1">
+            <a:schemeClr val="accent1"/>
+          </a:effectRef>
+          <a:fontRef idx="minor">
+            <a:schemeClr val="tx1"/>
+          </a:fontRef>
+        </p:style>
+      </p:cxnSp>
+      <p:cxnSp>
+        <p:nvCxnSpPr>
+          <p:cNvPr id="43" name="Connector 42"/>
+          <p:cNvCxnSpPr/>
+          <p:nvPr/>
+        </p:nvCxnSpPr>
+        <p:spPr>
+          <a:xfrm flipV="1">
+            <a:off x="6423660.0" y="1280617.2000000002"/>
+            <a:ext cx="45720.0" cy="37947.59999999986"/>
+          </a:xfrm>
+          <a:prstGeom prst="line">
+            <a:avLst/>
+          </a:prstGeom>
+          <a:ln w="25400">
+            <a:solidFill>
+              <a:srgbClr val="00C8FF"/>
+            </a:solidFill>
+          </a:ln>
+        </p:spPr>
+        <p:style>
+          <a:lnRef idx="2">
+            <a:schemeClr val="accent1"/>
+          </a:lnRef>
+          <a:fillRef idx="0">
+            <a:schemeClr val="accent1"/>
+          </a:fillRef>
+          <a:effectRef idx="1">
+            <a:schemeClr val="accent1"/>
+          </a:effectRef>
+          <a:fontRef idx="minor">
+            <a:schemeClr val="tx1"/>
+          </a:fontRef>
+        </p:style>
+      </p:cxnSp>
+      <p:cxnSp>
+        <p:nvCxnSpPr>
+          <p:cNvPr id="44" name="Connector 43"/>
+          <p:cNvCxnSpPr/>
+          <p:nvPr/>
+        </p:nvCxnSpPr>
+        <p:spPr>
+          <a:xfrm flipV="1">
+            <a:off x="6469380.0" y="1241298.0"/>
+            <a:ext cx="45720.0" cy="39319.200000000186"/>
+          </a:xfrm>
+          <a:prstGeom prst="line">
+            <a:avLst/>
+          </a:prstGeom>
+          <a:ln w="25400">
+            <a:solidFill>
+              <a:srgbClr val="00C8FF"/>
+            </a:solidFill>
+          </a:ln>
+        </p:spPr>
+        <p:style>
+          <a:lnRef idx="2">
+            <a:schemeClr val="accent1"/>
+          </a:lnRef>
+          <a:fillRef idx="0">
+            <a:schemeClr val="accent1"/>
+          </a:fillRef>
+          <a:effectRef idx="1">
+            <a:schemeClr val="accent1"/>
+          </a:effectRef>
+          <a:fontRef idx="minor">
+            <a:schemeClr val="tx1"/>
+          </a:fontRef>
+        </p:style>
+      </p:cxnSp>
+      <p:cxnSp>
+        <p:nvCxnSpPr>
+          <p:cNvPr id="45" name="Connector 44"/>
+          <p:cNvCxnSpPr/>
+          <p:nvPr/>
+        </p:nvCxnSpPr>
+        <p:spPr>
+          <a:xfrm flipV="1">
+            <a:off x="6515100.0" y="1200607.2"/>
+            <a:ext cx="45720.0" cy="40690.80000000005"/>
+          </a:xfrm>
+          <a:prstGeom prst="line">
+            <a:avLst/>
+          </a:prstGeom>
+          <a:ln w="25400">
+            <a:solidFill>
+              <a:srgbClr val="00C8FF"/>
+            </a:solidFill>
+          </a:ln>
+        </p:spPr>
+        <p:style>
+          <a:lnRef idx="2">
+            <a:schemeClr val="accent1"/>
+          </a:lnRef>
+          <a:fillRef idx="0">
+            <a:schemeClr val="accent1"/>
+          </a:fillRef>
+          <a:effectRef idx="1">
+            <a:schemeClr val="accent1"/>
+          </a:effectRef>
+          <a:fontRef idx="minor">
+            <a:schemeClr val="tx1"/>
+          </a:fontRef>
+        </p:style>
+      </p:cxnSp>
+      <p:cxnSp>
+        <p:nvCxnSpPr>
+          <p:cNvPr id="46" name="Connector 45"/>
+          <p:cNvCxnSpPr/>
+          <p:nvPr/>
+        </p:nvCxnSpPr>
+        <p:spPr>
+          <a:xfrm flipV="1">
+            <a:off x="6560820.0" y="1158544.7999999998"/>
+            <a:ext cx="45720.0" cy="42062.40000000014"/>
+          </a:xfrm>
+          <a:prstGeom prst="line">
+            <a:avLst/>
+          </a:prstGeom>
+          <a:ln w="25400">
+            <a:solidFill>
+              <a:srgbClr val="00C8FF"/>
+            </a:solidFill>
+          </a:ln>
+        </p:spPr>
+        <p:style>
+          <a:lnRef idx="2">
+            <a:schemeClr val="accent1"/>
+          </a:lnRef>
+          <a:fillRef idx="0">
+            <a:schemeClr val="accent1"/>
+          </a:fillRef>
+          <a:effectRef idx="1">
+            <a:schemeClr val="accent1"/>
+          </a:effectRef>
+          <a:fontRef idx="minor">
+            <a:schemeClr val="tx1"/>
+          </a:fontRef>
+        </p:style>
+      </p:cxnSp>
+      <p:cxnSp>
+        <p:nvCxnSpPr>
+          <p:cNvPr id="47" name="Connector 46"/>
+          <p:cNvCxnSpPr/>
+          <p:nvPr/>
+        </p:nvCxnSpPr>
+        <p:spPr>
+          <a:xfrm flipV="1">
+            <a:off x="6606540.0" y="1136599.2000000002"/>
+            <a:ext cx="22860.0" cy="21945.599999999627"/>
+          </a:xfrm>
+          <a:prstGeom prst="line">
+            <a:avLst/>
+          </a:prstGeom>
+          <a:ln w="25400">
+            <a:solidFill>
+              <a:srgbClr val="00C8FF"/>
+            </a:solidFill>
+          </a:ln>
+        </p:spPr>
+        <p:style>
+          <a:lnRef idx="2">
+            <a:schemeClr val="accent1"/>
+          </a:lnRef>
+          <a:fillRef idx="0">
+            <a:schemeClr val="accent1"/>
+          </a:fillRef>
+          <a:effectRef idx="1">
+            <a:schemeClr val="accent1"/>
+          </a:effectRef>
+          <a:fontRef idx="minor">
+            <a:schemeClr val="tx1"/>
+          </a:fontRef>
+        </p:style>
+      </p:cxnSp>
+      <p:sp>
+        <p:nvSpPr>
+          <p:cNvPr id="48" name="Oval 47"/>
           <p:cNvSpPr/>
           <p:nvPr/>
         </p:nvSpPr>
         <p:spPr>
           <a:xfrm>
-            <a:off x="6134100" y="1390650"/>
+            <a:off x="5996940" y="1573530"/>
             <a:ext cx="76200" cy="76200"/>
           </a:xfrm>
           <a:prstGeom prst="ellipse">
@@ -3871,114 +4746,6 @@
           <a:lstStyle/>
           <a:p>
             <a:pPr algn="ctr"/>
-          </a:p>
-        </p:txBody>
-      </p:sp>
-      <p:sp>
-        <p:nvSpPr>
-          <p:cNvPr id="24" name="TextBox 23"/>
-          <p:cNvSpPr txBox="1"/>
-          <p:nvPr/>
-        </p:nvSpPr>
-        <p:spPr>
-          <a:xfrm>
-            <a:off x="5715000" y="1200150"/>
-            <a:ext cx="635000" cy="254000"/>
-          </a:xfrm>
-          <a:prstGeom prst="rect">
-            <a:avLst/>
-          </a:prstGeom>
-          <a:noFill/>
-        </p:spPr>
-        <p:txBody>
-          <a:bodyPr wrap="none">
-            <a:spAutoFit/>
-          </a:bodyPr>
-          <a:lstStyle/>
-          <a:p>
-            <a:pPr>
-              <a:defRPr sz="1200">
-                <a:solidFill>
-                  <a:srgbClr val="FFFFFF"/>
-                </a:solidFill>
-                <a:latin typeface="Inter"/>
-              </a:defRPr>
-            </a:pPr>
-            <a:r>
-              <a:t>y=f(x)</a:t>
-            </a:r>
-          </a:p>
-        </p:txBody>
-      </p:sp>
-      <p:sp>
-        <p:nvSpPr>
-          <p:cNvPr id="25" name="TextBox 24"/>
-          <p:cNvSpPr txBox="1"/>
-          <p:nvPr/>
-        </p:nvSpPr>
-        <p:spPr>
-          <a:xfrm>
-            <a:off x="6172200" y="2754630"/>
-            <a:ext cx="635000" cy="254000"/>
-          </a:xfrm>
-          <a:prstGeom prst="rect">
-            <a:avLst/>
-          </a:prstGeom>
-          <a:noFill/>
-        </p:spPr>
-        <p:txBody>
-          <a:bodyPr wrap="none">
-            <a:spAutoFit/>
-          </a:bodyPr>
-          <a:lstStyle/>
-          <a:p>
-            <a:pPr>
-              <a:defRPr sz="1200">
-                <a:solidFill>
-                  <a:srgbClr val="FFFFFF"/>
-                </a:solidFill>
-                <a:latin typeface="Inter"/>
-              </a:defRPr>
-            </a:pPr>
-            <a:r>
-              <a:t>a</a:t>
-            </a:r>
-          </a:p>
-        </p:txBody>
-      </p:sp>
-      <p:sp>
-        <p:nvSpPr>
-          <p:cNvPr id="26" name="TextBox 25"/>
-          <p:cNvSpPr txBox="1"/>
-          <p:nvPr/>
-        </p:nvSpPr>
-        <p:spPr>
-          <a:xfrm>
-            <a:off x="4434840" y="1428750"/>
-            <a:ext cx="635000" cy="254000"/>
-          </a:xfrm>
-          <a:prstGeom prst="rect">
-            <a:avLst/>
-          </a:prstGeom>
-          <a:noFill/>
-        </p:spPr>
-        <p:txBody>
-          <a:bodyPr wrap="none">
-            <a:spAutoFit/>
-          </a:bodyPr>
-          <a:lstStyle/>
-          <a:p>
-            <a:pPr>
-              <a:defRPr sz="1200">
-                <a:solidFill>
-                  <a:srgbClr val="FFFFFF"/>
-                </a:solidFill>
-                <a:latin typeface="Inter"/>
-              </a:defRPr>
-            </a:pPr>
-            <a:r>
-              <a:t>L</a:t>
-            </a:r>
           </a:p>
         </p:txBody>
       </p:sp>

--- a/output/1.pptx
+++ b/output/1.pptx
@@ -3174,8 +3174,8 @@
         </p:nvCxnSpPr>
         <p:spPr>
           <a:xfrm flipV="1">
-            <a:off x="3886200.0" y="2934309.6"/>
-            <a:ext cx="69494.3999999999" cy="94640.3999999999"/>
+            <a:off x="4251960.0" y="2800350.0"/>
+            <a:ext cx="45720.0" cy="91440.0"/>
           </a:xfrm>
           <a:prstGeom prst="line">
             <a:avLst/>
@@ -3209,8 +3209,8 @@
         </p:nvCxnSpPr>
         <p:spPr>
           <a:xfrm flipV="1">
-            <a:off x="3955694.4" y="2851556.4"/>
-            <a:ext cx="69037.20000000019" cy="82753.20000000019"/>
+            <a:off x="4297680.0" y="2731770.0"/>
+            <a:ext cx="45720.0" cy="68580.0"/>
           </a:xfrm>
           <a:prstGeom prst="line">
             <a:avLst/>
@@ -3244,8 +3244,8 @@
         </p:nvCxnSpPr>
         <p:spPr>
           <a:xfrm flipV="1">
-            <a:off x="4024731.6" y="2780690.4"/>
-            <a:ext cx="69494.3999999999" cy="70866.0"/>
+            <a:off x="4343400.0" y="2663190.0"/>
+            <a:ext cx="45720.0" cy="68580.0"/>
           </a:xfrm>
           <a:prstGeom prst="line">
             <a:avLst/>
@@ -3279,8 +3279,8 @@
         </p:nvCxnSpPr>
         <p:spPr>
           <a:xfrm flipV="1">
-            <a:off x="4094226.0" y="2719425.6"/>
-            <a:ext cx="69494.3999999999" cy="61264.799999999814"/>
+            <a:off x="4389120.0" y="2594610.0"/>
+            <a:ext cx="45720.0" cy="68580.0"/>
           </a:xfrm>
           <a:prstGeom prst="line">
             <a:avLst/>
@@ -3314,8 +3314,8 @@
         </p:nvCxnSpPr>
         <p:spPr>
           <a:xfrm flipV="1">
-            <a:off x="4163720.4" y="2666390.4"/>
-            <a:ext cx="69037.19999999972" cy="53035.200000000186"/>
+            <a:off x="4434840.0" y="2526030.0"/>
+            <a:ext cx="45720.0" cy="68580.0"/>
           </a:xfrm>
           <a:prstGeom prst="line">
             <a:avLst/>
@@ -3349,8 +3349,8 @@
         </p:nvCxnSpPr>
         <p:spPr>
           <a:xfrm flipV="1">
-            <a:off x="4232757.6" y="2620213.2"/>
-            <a:ext cx="69494.40000000037" cy="46177.19999999972"/>
+            <a:off x="4480560.0" y="2434590.0"/>
+            <a:ext cx="45720.0" cy="91440.0"/>
           </a:xfrm>
           <a:prstGeom prst="line">
             <a:avLst/>
@@ -3384,8 +3384,8 @@
         </p:nvCxnSpPr>
         <p:spPr>
           <a:xfrm flipV="1">
-            <a:off x="4302252.0" y="2580436.8"/>
-            <a:ext cx="69494.40000000037" cy="39776.40000000037"/>
+            <a:off x="4526280.0" y="2343150.0"/>
+            <a:ext cx="45720.0" cy="91440.0"/>
           </a:xfrm>
           <a:prstGeom prst="line">
             <a:avLst/>
@@ -3419,8 +3419,8 @@
         </p:nvCxnSpPr>
         <p:spPr>
           <a:xfrm flipV="1">
-            <a:off x="4371746.4" y="2547061.2"/>
-            <a:ext cx="69037.19999999925" cy="33375.59999999963"/>
+            <a:off x="4572000.0" y="2297430.0"/>
+            <a:ext cx="45720.0" cy="45720.0"/>
           </a:xfrm>
           <a:prstGeom prst="line">
             <a:avLst/>
@@ -3454,8 +3454,8 @@
         </p:nvCxnSpPr>
         <p:spPr>
           <a:xfrm flipV="1">
-            <a:off x="4440783.6" y="2518257.6"/>
-            <a:ext cx="69494.40000000037" cy="28803.600000000093"/>
+            <a:off x="4617720.0" y="2251710.0"/>
+            <a:ext cx="45720.0" cy="45720.0"/>
           </a:xfrm>
           <a:prstGeom prst="line">
             <a:avLst/>
@@ -3489,8 +3489,8 @@
         </p:nvCxnSpPr>
         <p:spPr>
           <a:xfrm flipV="1">
-            <a:off x="4510278.0" y="2494026.0"/>
-            <a:ext cx="69494.40000000037" cy="24231.600000000093"/>
+            <a:off x="4663440.0" y="2205990.0"/>
+            <a:ext cx="45720.0" cy="45720.0"/>
           </a:xfrm>
           <a:prstGeom prst="line">
             <a:avLst/>
@@ -3524,8 +3524,8 @@
         </p:nvCxnSpPr>
         <p:spPr>
           <a:xfrm flipV="1">
-            <a:off x="4579772.4" y="2472994.8"/>
-            <a:ext cx="69037.19999999925" cy="21031.200000000186"/>
+            <a:off x="4709160.0" y="2160270.0"/>
+            <a:ext cx="45720.0" cy="45720.0"/>
           </a:xfrm>
           <a:prstGeom prst="line">
             <a:avLst/>
@@ -3559,8 +3559,8 @@
         </p:nvCxnSpPr>
         <p:spPr>
           <a:xfrm flipV="1">
-            <a:off x="4648809.6" y="2453792.4"/>
-            <a:ext cx="69494.40000000037" cy="19202.399999999907"/>
+            <a:off x="4754880.0" y="2114550.0"/>
+            <a:ext cx="45720.0" cy="45720.0"/>
           </a:xfrm>
           <a:prstGeom prst="line">
             <a:avLst/>
@@ -3594,8 +3594,8 @@
         </p:nvCxnSpPr>
         <p:spPr>
           <a:xfrm flipV="1">
-            <a:off x="4718304.0" y="2435961.6"/>
-            <a:ext cx="69037.20000000019" cy="17830.799999999814"/>
+            <a:off x="4800600.0" y="2091690.0"/>
+            <a:ext cx="45720.0" cy="22860.0"/>
           </a:xfrm>
           <a:prstGeom prst="line">
             <a:avLst/>
@@ -3629,8 +3629,8 @@
         </p:nvCxnSpPr>
         <p:spPr>
           <a:xfrm flipV="1">
-            <a:off x="4787341.2" y="2418130.8"/>
-            <a:ext cx="69494.39999999944" cy="17830.80000000028"/>
+            <a:off x="4846320.0" y="2068830.0"/>
+            <a:ext cx="45720.0" cy="22860.0"/>
           </a:xfrm>
           <a:prstGeom prst="line">
             <a:avLst/>
@@ -3664,8 +3664,8 @@
         </p:nvCxnSpPr>
         <p:spPr>
           <a:xfrm flipV="1">
-            <a:off x="4856835.6" y="2399385.6"/>
-            <a:ext cx="69037.20000000019" cy="18745.19999999972"/>
+            <a:off x="4892040.0" y="2045970.0"/>
+            <a:ext cx="45720.0" cy="22860.0"/>
           </a:xfrm>
           <a:prstGeom prst="line">
             <a:avLst/>
@@ -3699,8 +3699,8 @@
         </p:nvCxnSpPr>
         <p:spPr>
           <a:xfrm flipV="1">
-            <a:off x="4925872.8" y="2378811.6"/>
-            <a:ext cx="69494.40000000037" cy="20574.0"/>
+            <a:off x="4937760.0" y="2023110.0"/>
+            <a:ext cx="45720.0" cy="22860.0"/>
           </a:xfrm>
           <a:prstGeom prst="line">
             <a:avLst/>
@@ -3734,8 +3734,8 @@
         </p:nvCxnSpPr>
         <p:spPr>
           <a:xfrm flipV="1">
-            <a:off x="4995367.2" y="2355951.6"/>
-            <a:ext cx="69037.20000000019" cy="22860.0"/>
+            <a:off x="4983480.0" y="2000250.0"/>
+            <a:ext cx="45720.0" cy="22860.0"/>
           </a:xfrm>
           <a:prstGeom prst="line">
             <a:avLst/>
@@ -3769,8 +3769,8 @@
         </p:nvCxnSpPr>
         <p:spPr>
           <a:xfrm flipV="1">
-            <a:off x="5064404.4" y="2330348.4"/>
-            <a:ext cx="69494.39999999944" cy="25603.200000000186"/>
+            <a:off x="5029200.0" y="1977390.0"/>
+            <a:ext cx="45720.0" cy="22860.0"/>
           </a:xfrm>
           <a:prstGeom prst="line">
             <a:avLst/>
@@ -3804,8 +3804,8 @@
         </p:nvCxnSpPr>
         <p:spPr>
           <a:xfrm flipV="1">
-            <a:off x="5133898.8" y="2301087.6"/>
-            <a:ext cx="69494.40000000037" cy="29260.799999999814"/>
+            <a:off x="5074920.0" y="1954530.0"/>
+            <a:ext cx="45720.0" cy="22860.0"/>
           </a:xfrm>
           <a:prstGeom prst="line">
             <a:avLst/>
@@ -3839,8 +3839,8 @@
         </p:nvCxnSpPr>
         <p:spPr>
           <a:xfrm flipV="1">
-            <a:off x="5203393.2" y="2268169.2"/>
-            <a:ext cx="69037.20000000019" cy="32918.39999999991"/>
+            <a:off x="5120640.0" y="1931670.0"/>
+            <a:ext cx="45720.0" cy="22860.0"/>
           </a:xfrm>
           <a:prstGeom prst="line">
             <a:avLst/>
@@ -3874,8 +3874,8 @@
         </p:nvCxnSpPr>
         <p:spPr>
           <a:xfrm flipV="1">
-            <a:off x="5272430.4" y="2231136.0"/>
-            <a:ext cx="69494.39999999944" cy="37033.200000000186"/>
+            <a:off x="5166360.0" y="1908810.0"/>
+            <a:ext cx="45720.0" cy="22860.0"/>
           </a:xfrm>
           <a:prstGeom prst="line">
             <a:avLst/>
@@ -3909,8 +3909,8 @@
         </p:nvCxnSpPr>
         <p:spPr>
           <a:xfrm flipV="1">
-            <a:off x="5341924.8" y="2189073.6"/>
-            <a:ext cx="69037.20000000019" cy="42062.39999999991"/>
+            <a:off x="5212080.0" y="1885950.0"/>
+            <a:ext cx="45720.0" cy="22860.0"/>
           </a:xfrm>
           <a:prstGeom prst="line">
             <a:avLst/>
@@ -3944,8 +3944,8 @@
         </p:nvCxnSpPr>
         <p:spPr>
           <a:xfrm flipV="1">
-            <a:off x="5410962.0" y="2141524.8"/>
-            <a:ext cx="69494.40000000037" cy="47548.80000000028"/>
+            <a:off x="5257800.0" y="1863090.0"/>
+            <a:ext cx="45720.0" cy="22860.0"/>
           </a:xfrm>
           <a:prstGeom prst="line">
             <a:avLst/>
@@ -3979,8 +3979,8 @@
         </p:nvCxnSpPr>
         <p:spPr>
           <a:xfrm flipV="1">
-            <a:off x="5480456.4" y="2088489.6"/>
-            <a:ext cx="69037.19999999925" cy="53035.19999999972"/>
+            <a:off x="5303520.0" y="1840230.0"/>
+            <a:ext cx="45720.0" cy="22860.0"/>
           </a:xfrm>
           <a:prstGeom prst="line">
             <a:avLst/>
@@ -4014,8 +4014,8 @@
         </p:nvCxnSpPr>
         <p:spPr>
           <a:xfrm flipV="1">
-            <a:off x="5549493.6" y="2029510.8"/>
-            <a:ext cx="69494.40000000037" cy="58978.80000000005"/>
+            <a:off x="5349240.0" y="1817370.0"/>
+            <a:ext cx="45720.0" cy="22860.0"/>
           </a:xfrm>
           <a:prstGeom prst="line">
             <a:avLst/>
@@ -4049,8 +4049,8 @@
         </p:nvCxnSpPr>
         <p:spPr>
           <a:xfrm flipV="1">
-            <a:off x="5618988.0" y="1964588.4"/>
-            <a:ext cx="69494.40000000037" cy="64922.40000000014"/>
+            <a:off x="5394960.0" y="1794510.0"/>
+            <a:ext cx="45720.0" cy="22860.0"/>
           </a:xfrm>
           <a:prstGeom prst="line">
             <a:avLst/>
@@ -4084,8 +4084,8 @@
         </p:nvCxnSpPr>
         <p:spPr>
           <a:xfrm flipV="1">
-            <a:off x="5688482.4" y="1893265.2"/>
-            <a:ext cx="69037.19999999925" cy="71323.19999999995"/>
+            <a:off x="5440680.0" y="1771650.0"/>
+            <a:ext cx="45720.0" cy="22860.0"/>
           </a:xfrm>
           <a:prstGeom prst="line">
             <a:avLst/>
@@ -4119,8 +4119,8 @@
         </p:nvCxnSpPr>
         <p:spPr>
           <a:xfrm flipV="1">
-            <a:off x="5757519.6" y="1815084.0"/>
-            <a:ext cx="69494.40000000037" cy="78181.19999999995"/>
+            <a:off x="5486400.0" y="1748790.0"/>
+            <a:ext cx="45720.0" cy="22860.0"/>
           </a:xfrm>
           <a:prstGeom prst="line">
             <a:avLst/>
@@ -4154,8 +4154,8 @@
         </p:nvCxnSpPr>
         <p:spPr>
           <a:xfrm flipV="1">
-            <a:off x="5827014.0" y="1730044.8"/>
-            <a:ext cx="69037.20000000019" cy="85039.19999999995"/>
+            <a:off x="5532120.0" y="1725930.0"/>
+            <a:ext cx="45720.0" cy="22860.0"/>
           </a:xfrm>
           <a:prstGeom prst="line">
             <a:avLst/>
@@ -4189,8 +4189,8 @@
         </p:nvCxnSpPr>
         <p:spPr>
           <a:xfrm flipV="1">
-            <a:off x="5896051.2" y="1637690.4"/>
-            <a:ext cx="69494.39999999944" cy="92354.40000000014"/>
+            <a:off x="5577840.0" y="1703070.0"/>
+            <a:ext cx="45720.0" cy="22860.0"/>
           </a:xfrm>
           <a:prstGeom prst="line">
             <a:avLst/>
@@ -4224,8 +4224,8 @@
         </p:nvCxnSpPr>
         <p:spPr>
           <a:xfrm flipV="1">
-            <a:off x="5965545.6" y="1588770.0"/>
-            <a:ext cx="92354.40000000037" cy="48920.39999999991"/>
+            <a:off x="5623560.0" y="1689354.0"/>
+            <a:ext cx="45720.0" cy="13716.0"/>
           </a:xfrm>
           <a:prstGeom prst="line">
             <a:avLst/>
@@ -4259,8 +4259,8 @@
         </p:nvCxnSpPr>
         <p:spPr>
           <a:xfrm flipV="1">
-            <a:off x="6057900.0" y="1557223.2000000002"/>
-            <a:ext cx="45720.0" cy="31546.799999999814"/>
+            <a:off x="5669280.0" y="1675638.0"/>
+            <a:ext cx="45720.0" cy="13716.0"/>
           </a:xfrm>
           <a:prstGeom prst="line">
             <a:avLst/>
@@ -4294,8 +4294,8 @@
         </p:nvCxnSpPr>
         <p:spPr>
           <a:xfrm flipV="1">
-            <a:off x="6103620.0" y="1525219.2"/>
-            <a:ext cx="45720.0" cy="32004.000000000233"/>
+            <a:off x="5715000.0" y="1661922.0"/>
+            <a:ext cx="45720.0" cy="13716.0"/>
           </a:xfrm>
           <a:prstGeom prst="line">
             <a:avLst/>
@@ -4329,8 +4329,8 @@
         </p:nvCxnSpPr>
         <p:spPr>
           <a:xfrm flipV="1">
-            <a:off x="6149340.0" y="1492758.0"/>
-            <a:ext cx="45720.0" cy="32461.199999999953"/>
+            <a:off x="5760720.0" y="1648206.0"/>
+            <a:ext cx="45720.0" cy="13716.0"/>
           </a:xfrm>
           <a:prstGeom prst="line">
             <a:avLst/>
@@ -4364,8 +4364,8 @@
         </p:nvCxnSpPr>
         <p:spPr>
           <a:xfrm flipV="1">
-            <a:off x="6195060.0" y="1459382.4000000001"/>
-            <a:ext cx="45720.0" cy="33375.59999999986"/>
+            <a:off x="5806440.0" y="1634490.0"/>
+            <a:ext cx="45720.0" cy="13716.0"/>
           </a:xfrm>
           <a:prstGeom prst="line">
             <a:avLst/>
@@ -4399,8 +4399,8 @@
         </p:nvCxnSpPr>
         <p:spPr>
           <a:xfrm flipV="1">
-            <a:off x="6240780.0" y="1425549.5999999999"/>
-            <a:ext cx="45720.0" cy="33832.80000000028"/>
+            <a:off x="5852160.0" y="1625346.0"/>
+            <a:ext cx="45720.0" cy="9144.0"/>
           </a:xfrm>
           <a:prstGeom prst="line">
             <a:avLst/>
@@ -4434,8 +4434,8 @@
         </p:nvCxnSpPr>
         <p:spPr>
           <a:xfrm flipV="1">
-            <a:off x="6286500.0" y="1390802.4"/>
-            <a:ext cx="45720.0" cy="34747.19999999995"/>
+            <a:off x="5897880.0" y="1616202.0"/>
+            <a:ext cx="45720.0" cy="9144.0"/>
           </a:xfrm>
           <a:prstGeom prst="line">
             <a:avLst/>
@@ -4469,8 +4469,8 @@
         </p:nvCxnSpPr>
         <p:spPr>
           <a:xfrm flipV="1">
-            <a:off x="6332220.0" y="1355140.8"/>
-            <a:ext cx="45720.0" cy="35661.59999999986"/>
+            <a:off x="5943600.0" y="1611630.0"/>
+            <a:ext cx="45720.0" cy="4572.0"/>
           </a:xfrm>
           <a:prstGeom prst="line">
             <a:avLst/>
@@ -4503,9 +4503,9 @@
           <p:nvPr/>
         </p:nvCxnSpPr>
         <p:spPr>
-          <a:xfrm flipV="1">
-            <a:off x="6377940.0" y="1318564.8"/>
-            <a:ext cx="45720.0" cy="36576.0"/>
+          <a:xfrm>
+            <a:off x="5989320.0" y="1611630.0"/>
+            <a:ext cx="45720.0" cy="0.0"/>
           </a:xfrm>
           <a:prstGeom prst="line">
             <a:avLst/>
@@ -4539,8 +4539,8 @@
         </p:nvCxnSpPr>
         <p:spPr>
           <a:xfrm flipV="1">
-            <a:off x="6423660.0" y="1280617.2000000002"/>
-            <a:ext cx="45720.0" cy="37947.59999999986"/>
+            <a:off x="6035040.0" y="1565910.0"/>
+            <a:ext cx="45720.0" cy="45720.0"/>
           </a:xfrm>
           <a:prstGeom prst="line">
             <a:avLst/>
@@ -4574,8 +4574,8 @@
         </p:nvCxnSpPr>
         <p:spPr>
           <a:xfrm flipV="1">
-            <a:off x="6469380.0" y="1241298.0"/>
-            <a:ext cx="45720.0" cy="39319.200000000186"/>
+            <a:off x="6080760.0" y="1520190.0"/>
+            <a:ext cx="45720.0" cy="45720.0"/>
           </a:xfrm>
           <a:prstGeom prst="line">
             <a:avLst/>
@@ -4609,8 +4609,8 @@
         </p:nvCxnSpPr>
         <p:spPr>
           <a:xfrm flipV="1">
-            <a:off x="6515100.0" y="1200607.2"/>
-            <a:ext cx="45720.0" cy="40690.80000000005"/>
+            <a:off x="6126480.0" y="1474470.0"/>
+            <a:ext cx="45720.0" cy="45720.0"/>
           </a:xfrm>
           <a:prstGeom prst="line">
             <a:avLst/>
@@ -4644,8 +4644,8 @@
         </p:nvCxnSpPr>
         <p:spPr>
           <a:xfrm flipV="1">
-            <a:off x="6560820.0" y="1158544.7999999998"/>
-            <a:ext cx="45720.0" cy="42062.40000000014"/>
+            <a:off x="6172200.0" y="1428750.0"/>
+            <a:ext cx="45720.0" cy="45720.0"/>
           </a:xfrm>
           <a:prstGeom prst="line">
             <a:avLst/>
@@ -4679,8 +4679,8 @@
         </p:nvCxnSpPr>
         <p:spPr>
           <a:xfrm flipV="1">
-            <a:off x="6606540.0" y="1136599.2000000002"/>
-            <a:ext cx="22860.0" cy="21945.599999999627"/>
+            <a:off x="6217920.0" y="1360170.0"/>
+            <a:ext cx="45720.0" cy="68580.0"/>
           </a:xfrm>
           <a:prstGeom prst="line">
             <a:avLst/>
@@ -4706,9 +4706,289 @@
           </a:fontRef>
         </p:style>
       </p:cxnSp>
-      <p:sp>
-        <p:nvSpPr>
-          <p:cNvPr id="48" name="Oval 47"/>
+      <p:cxnSp>
+        <p:nvCxnSpPr>
+          <p:cNvPr id="48" name="Connector 47"/>
+          <p:cNvCxnSpPr/>
+          <p:nvPr/>
+        </p:nvCxnSpPr>
+        <p:spPr>
+          <a:xfrm flipV="1">
+            <a:off x="6263640.0" y="1291590.0"/>
+            <a:ext cx="45720.0" cy="68580.0"/>
+          </a:xfrm>
+          <a:prstGeom prst="line">
+            <a:avLst/>
+          </a:prstGeom>
+          <a:ln w="25400">
+            <a:solidFill>
+              <a:srgbClr val="00C8FF"/>
+            </a:solidFill>
+          </a:ln>
+        </p:spPr>
+        <p:style>
+          <a:lnRef idx="2">
+            <a:schemeClr val="accent1"/>
+          </a:lnRef>
+          <a:fillRef idx="0">
+            <a:schemeClr val="accent1"/>
+          </a:fillRef>
+          <a:effectRef idx="1">
+            <a:schemeClr val="accent1"/>
+          </a:effectRef>
+          <a:fontRef idx="minor">
+            <a:schemeClr val="tx1"/>
+          </a:fontRef>
+        </p:style>
+      </p:cxnSp>
+      <p:cxnSp>
+        <p:nvCxnSpPr>
+          <p:cNvPr id="49" name="Connector 48"/>
+          <p:cNvCxnSpPr/>
+          <p:nvPr/>
+        </p:nvCxnSpPr>
+        <p:spPr>
+          <a:xfrm flipV="1">
+            <a:off x="6309360.0" y="1200150.0"/>
+            <a:ext cx="45720.0" cy="91440.0"/>
+          </a:xfrm>
+          <a:prstGeom prst="line">
+            <a:avLst/>
+          </a:prstGeom>
+          <a:ln w="25400">
+            <a:solidFill>
+              <a:srgbClr val="00C8FF"/>
+            </a:solidFill>
+          </a:ln>
+        </p:spPr>
+        <p:style>
+          <a:lnRef idx="2">
+            <a:schemeClr val="accent1"/>
+          </a:lnRef>
+          <a:fillRef idx="0">
+            <a:schemeClr val="accent1"/>
+          </a:fillRef>
+          <a:effectRef idx="1">
+            <a:schemeClr val="accent1"/>
+          </a:effectRef>
+          <a:fontRef idx="minor">
+            <a:schemeClr val="tx1"/>
+          </a:fontRef>
+        </p:style>
+      </p:cxnSp>
+      <p:cxnSp>
+        <p:nvCxnSpPr>
+          <p:cNvPr id="50" name="Connector 49"/>
+          <p:cNvCxnSpPr/>
+          <p:nvPr/>
+        </p:nvCxnSpPr>
+        <p:spPr>
+          <a:xfrm flipV="1">
+            <a:off x="6355080.0" y="1108710.0"/>
+            <a:ext cx="45720.0" cy="91440.0"/>
+          </a:xfrm>
+          <a:prstGeom prst="line">
+            <a:avLst/>
+          </a:prstGeom>
+          <a:ln w="25400">
+            <a:solidFill>
+              <a:srgbClr val="00C8FF"/>
+            </a:solidFill>
+          </a:ln>
+        </p:spPr>
+        <p:style>
+          <a:lnRef idx="2">
+            <a:schemeClr val="accent1"/>
+          </a:lnRef>
+          <a:fillRef idx="0">
+            <a:schemeClr val="accent1"/>
+          </a:fillRef>
+          <a:effectRef idx="1">
+            <a:schemeClr val="accent1"/>
+          </a:effectRef>
+          <a:fontRef idx="minor">
+            <a:schemeClr val="tx1"/>
+          </a:fontRef>
+        </p:style>
+      </p:cxnSp>
+      <p:cxnSp>
+        <p:nvCxnSpPr>
+          <p:cNvPr id="51" name="Connector 50"/>
+          <p:cNvCxnSpPr/>
+          <p:nvPr/>
+        </p:nvCxnSpPr>
+        <p:spPr>
+          <a:xfrm flipV="1">
+            <a:off x="6400800.0" y="1017270.0"/>
+            <a:ext cx="45720.0" cy="91440.0"/>
+          </a:xfrm>
+          <a:prstGeom prst="line">
+            <a:avLst/>
+          </a:prstGeom>
+          <a:ln w="25400">
+            <a:solidFill>
+              <a:srgbClr val="00C8FF"/>
+            </a:solidFill>
+          </a:ln>
+        </p:spPr>
+        <p:style>
+          <a:lnRef idx="2">
+            <a:schemeClr val="accent1"/>
+          </a:lnRef>
+          <a:fillRef idx="0">
+            <a:schemeClr val="accent1"/>
+          </a:fillRef>
+          <a:effectRef idx="1">
+            <a:schemeClr val="accent1"/>
+          </a:effectRef>
+          <a:fontRef idx="minor">
+            <a:schemeClr val="tx1"/>
+          </a:fontRef>
+        </p:style>
+      </p:cxnSp>
+      <p:cxnSp>
+        <p:nvCxnSpPr>
+          <p:cNvPr id="52" name="Connector 51"/>
+          <p:cNvCxnSpPr/>
+          <p:nvPr/>
+        </p:nvCxnSpPr>
+        <p:spPr>
+          <a:xfrm flipV="1">
+            <a:off x="6446520.0" y="925830.0"/>
+            <a:ext cx="45720.0" cy="91440.0"/>
+          </a:xfrm>
+          <a:prstGeom prst="line">
+            <a:avLst/>
+          </a:prstGeom>
+          <a:ln w="25400">
+            <a:solidFill>
+              <a:srgbClr val="00C8FF"/>
+            </a:solidFill>
+          </a:ln>
+        </p:spPr>
+        <p:style>
+          <a:lnRef idx="2">
+            <a:schemeClr val="accent1"/>
+          </a:lnRef>
+          <a:fillRef idx="0">
+            <a:schemeClr val="accent1"/>
+          </a:fillRef>
+          <a:effectRef idx="1">
+            <a:schemeClr val="accent1"/>
+          </a:effectRef>
+          <a:fontRef idx="minor">
+            <a:schemeClr val="tx1"/>
+          </a:fontRef>
+        </p:style>
+      </p:cxnSp>
+      <p:cxnSp>
+        <p:nvCxnSpPr>
+          <p:cNvPr id="53" name="Connector 52"/>
+          <p:cNvCxnSpPr/>
+          <p:nvPr/>
+        </p:nvCxnSpPr>
+        <p:spPr>
+          <a:xfrm flipV="1">
+            <a:off x="6492240.0" y="834390.0"/>
+            <a:ext cx="45720.0" cy="91440.0"/>
+          </a:xfrm>
+          <a:prstGeom prst="line">
+            <a:avLst/>
+          </a:prstGeom>
+          <a:ln w="25400">
+            <a:solidFill>
+              <a:srgbClr val="00C8FF"/>
+            </a:solidFill>
+          </a:ln>
+        </p:spPr>
+        <p:style>
+          <a:lnRef idx="2">
+            <a:schemeClr val="accent1"/>
+          </a:lnRef>
+          <a:fillRef idx="0">
+            <a:schemeClr val="accent1"/>
+          </a:fillRef>
+          <a:effectRef idx="1">
+            <a:schemeClr val="accent1"/>
+          </a:effectRef>
+          <a:fontRef idx="minor">
+            <a:schemeClr val="tx1"/>
+          </a:fontRef>
+        </p:style>
+      </p:cxnSp>
+      <p:cxnSp>
+        <p:nvCxnSpPr>
+          <p:cNvPr id="54" name="Connector 53"/>
+          <p:cNvCxnSpPr/>
+          <p:nvPr/>
+        </p:nvCxnSpPr>
+        <p:spPr>
+          <a:xfrm flipV="1">
+            <a:off x="6537960.0" y="742950.0"/>
+            <a:ext cx="45720.0" cy="91440.0"/>
+          </a:xfrm>
+          <a:prstGeom prst="line">
+            <a:avLst/>
+          </a:prstGeom>
+          <a:ln w="25400">
+            <a:solidFill>
+              <a:srgbClr val="00C8FF"/>
+            </a:solidFill>
+          </a:ln>
+        </p:spPr>
+        <p:style>
+          <a:lnRef idx="2">
+            <a:schemeClr val="accent1"/>
+          </a:lnRef>
+          <a:fillRef idx="0">
+            <a:schemeClr val="accent1"/>
+          </a:fillRef>
+          <a:effectRef idx="1">
+            <a:schemeClr val="accent1"/>
+          </a:effectRef>
+          <a:fontRef idx="minor">
+            <a:schemeClr val="tx1"/>
+          </a:fontRef>
+        </p:style>
+      </p:cxnSp>
+      <p:cxnSp>
+        <p:nvCxnSpPr>
+          <p:cNvPr id="55" name="Connector 54"/>
+          <p:cNvCxnSpPr/>
+          <p:nvPr/>
+        </p:nvCxnSpPr>
+        <p:spPr>
+          <a:xfrm flipV="1">
+            <a:off x="6583680.0" y="651510.0"/>
+            <a:ext cx="45720.0" cy="91440.0"/>
+          </a:xfrm>
+          <a:prstGeom prst="line">
+            <a:avLst/>
+          </a:prstGeom>
+          <a:ln w="25400">
+            <a:solidFill>
+              <a:srgbClr val="00C8FF"/>
+            </a:solidFill>
+          </a:ln>
+        </p:spPr>
+        <p:style>
+          <a:lnRef idx="2">
+            <a:schemeClr val="accent1"/>
+          </a:lnRef>
+          <a:fillRef idx="0">
+            <a:schemeClr val="accent1"/>
+          </a:fillRef>
+          <a:effectRef idx="1">
+            <a:schemeClr val="accent1"/>
+          </a:effectRef>
+          <a:fontRef idx="minor">
+            <a:schemeClr val="tx1"/>
+          </a:fontRef>
+        </p:style>
+      </p:cxnSp>
+      <p:sp>
+        <p:nvSpPr>
+          <p:cNvPr id="56" name="Oval 55"/>
           <p:cNvSpPr/>
           <p:nvPr/>
         </p:nvSpPr>
@@ -4746,6 +5026,42 @@
           <a:lstStyle/>
           <a:p>
             <a:pPr algn="ctr"/>
+          </a:p>
+        </p:txBody>
+      </p:sp>
+      <p:sp>
+        <p:nvSpPr>
+          <p:cNvPr id="57" name="TextBox 56"/>
+          <p:cNvSpPr txBox="1"/>
+          <p:nvPr/>
+        </p:nvSpPr>
+        <p:spPr>
+          <a:xfrm>
+            <a:off x="6309360" y="971550"/>
+            <a:ext cx="635000" cy="254000"/>
+          </a:xfrm>
+          <a:prstGeom prst="rect">
+            <a:avLst/>
+          </a:prstGeom>
+          <a:noFill/>
+        </p:spPr>
+        <p:txBody>
+          <a:bodyPr wrap="none">
+            <a:spAutoFit/>
+          </a:bodyPr>
+          <a:lstStyle/>
+          <a:p>
+            <a:pPr>
+              <a:defRPr sz="1200">
+                <a:solidFill>
+                  <a:srgbClr val="FFFFFF"/>
+                </a:solidFill>
+                <a:latin typeface="Inter"/>
+              </a:defRPr>
+            </a:pPr>
+            <a:r>
+              <a:t>$y=f(x)$</a:t>
+            </a:r>
           </a:p>
         </p:txBody>
       </p:sp>

--- a/output/1.pptx
+++ b/output/1.pptx
@@ -3104,8 +3104,8 @@
         </p:nvCxnSpPr>
         <p:spPr>
           <a:xfrm>
-            <a:off x="2286000.0" y="2571750.0"/>
-            <a:ext cx="4572000.0" cy="0.0"/>
+            <a:off x="3794760.0" y="2571750.0"/>
+            <a:ext cx="2423160.0" cy="0.0"/>
           </a:xfrm>
           <a:prstGeom prst="line">
             <a:avLst/>
@@ -3139,8 +3139,8 @@
         </p:nvCxnSpPr>
         <p:spPr>
           <a:xfrm flipV="1">
-            <a:off x="4572000.0" y="285750.0"/>
-            <a:ext cx="0.0" cy="4572000.0"/>
+            <a:off x="4572000.0" y="1428750.0"/>
+            <a:ext cx="0.0" cy="1691640.0"/>
           </a:xfrm>
           <a:prstGeom prst="line">
             <a:avLst/>
@@ -3166,41 +3166,1255 @@
           </a:fontRef>
         </p:style>
       </p:cxnSp>
-      <p:cxnSp>
-        <p:nvCxnSpPr>
-          <p:cNvPr id="4" name="Connector 3"/>
-          <p:cNvCxnSpPr/>
+      <p:sp>
+        <p:nvSpPr>
+          <p:cNvPr id="4" name="Freeform 3"/>
+          <p:cNvSpPr/>
           <p:nvPr/>
-        </p:nvCxnSpPr>
+        </p:nvSpPr>
         <p:spPr>
-          <a:xfrm flipV="1">
-            <a:off x="4251960.0" y="2800350.0"/>
-            <a:ext cx="45720.0" cy="91440.0"/>
+          <a:xfrm>
+            <a:off x="3886200" y="1698498"/>
+            <a:ext cx="2240280" cy="1330452"/>
           </a:xfrm>
-          <a:prstGeom prst="line">
+          <a:custGeom>
             <a:avLst/>
-          </a:prstGeom>
-          <a:ln w="25400">
+            <a:gdLst/>
+            <a:ahLst/>
+            <a:cxnLst/>
+            <a:rect l="l" t="t" r="r" b="b"/>
+            <a:pathLst>
+              <a:path w="2240280" h="1330452">
+                <a:moveTo>
+                  <a:pt x="0" y="1330452"/>
+                </a:moveTo>
+                <a:lnTo>
+                  <a:pt x="8639" y="1323540"/>
+                </a:lnTo>
+                <a:close/>
+                <a:lnTo>
+                  <a:pt x="17279" y="1316629"/>
+                </a:lnTo>
+                <a:close/>
+                <a:lnTo>
+                  <a:pt x="25918" y="1309717"/>
+                </a:lnTo>
+                <a:close/>
+                <a:lnTo>
+                  <a:pt x="34558" y="1302806"/>
+                </a:lnTo>
+                <a:close/>
+                <a:lnTo>
+                  <a:pt x="43197" y="1295894"/>
+                </a:lnTo>
+                <a:close/>
+                <a:lnTo>
+                  <a:pt x="51836" y="1288983"/>
+                </a:lnTo>
+                <a:close/>
+                <a:lnTo>
+                  <a:pt x="60476" y="1282071"/>
+                </a:lnTo>
+                <a:close/>
+                <a:lnTo>
+                  <a:pt x="69115" y="1275160"/>
+                </a:lnTo>
+                <a:close/>
+                <a:lnTo>
+                  <a:pt x="77755" y="1268248"/>
+                </a:lnTo>
+                <a:close/>
+                <a:lnTo>
+                  <a:pt x="86394" y="1261337"/>
+                </a:lnTo>
+                <a:close/>
+                <a:lnTo>
+                  <a:pt x="95033" y="1254425"/>
+                </a:lnTo>
+                <a:close/>
+                <a:lnTo>
+                  <a:pt x="103673" y="1247514"/>
+                </a:lnTo>
+                <a:close/>
+                <a:lnTo>
+                  <a:pt x="112312" y="1240602"/>
+                </a:lnTo>
+                <a:close/>
+                <a:lnTo>
+                  <a:pt x="120952" y="1233691"/>
+                </a:lnTo>
+                <a:close/>
+                <a:lnTo>
+                  <a:pt x="129591" y="1226779"/>
+                </a:lnTo>
+                <a:close/>
+                <a:lnTo>
+                  <a:pt x="138230" y="1219868"/>
+                </a:lnTo>
+                <a:close/>
+                <a:lnTo>
+                  <a:pt x="146870" y="1212956"/>
+                </a:lnTo>
+                <a:close/>
+                <a:lnTo>
+                  <a:pt x="155509" y="1206045"/>
+                </a:lnTo>
+                <a:close/>
+                <a:lnTo>
+                  <a:pt x="164149" y="1199133"/>
+                </a:lnTo>
+                <a:close/>
+                <a:lnTo>
+                  <a:pt x="172788" y="1192222"/>
+                </a:lnTo>
+                <a:close/>
+                <a:lnTo>
+                  <a:pt x="181427" y="1185310"/>
+                </a:lnTo>
+                <a:close/>
+                <a:lnTo>
+                  <a:pt x="190067" y="1178399"/>
+                </a:lnTo>
+                <a:close/>
+                <a:lnTo>
+                  <a:pt x="198706" y="1171487"/>
+                </a:lnTo>
+                <a:close/>
+                <a:lnTo>
+                  <a:pt x="207346" y="1164576"/>
+                </a:lnTo>
+                <a:close/>
+                <a:lnTo>
+                  <a:pt x="215985" y="1157664"/>
+                </a:lnTo>
+                <a:close/>
+                <a:lnTo>
+                  <a:pt x="224624" y="1150753"/>
+                </a:lnTo>
+                <a:close/>
+                <a:lnTo>
+                  <a:pt x="233264" y="1143841"/>
+                </a:lnTo>
+                <a:close/>
+                <a:lnTo>
+                  <a:pt x="241903" y="1136929"/>
+                </a:lnTo>
+                <a:close/>
+                <a:lnTo>
+                  <a:pt x="250543" y="1130018"/>
+                </a:lnTo>
+                <a:close/>
+                <a:lnTo>
+                  <a:pt x="259182" y="1123106"/>
+                </a:lnTo>
+                <a:close/>
+                <a:lnTo>
+                  <a:pt x="267821" y="1116195"/>
+                </a:lnTo>
+                <a:close/>
+                <a:lnTo>
+                  <a:pt x="276461" y="1109283"/>
+                </a:lnTo>
+                <a:close/>
+                <a:lnTo>
+                  <a:pt x="285100" y="1102372"/>
+                </a:lnTo>
+                <a:close/>
+                <a:lnTo>
+                  <a:pt x="293740" y="1095460"/>
+                </a:lnTo>
+                <a:close/>
+                <a:lnTo>
+                  <a:pt x="302379" y="1088549"/>
+                </a:lnTo>
+                <a:close/>
+                <a:lnTo>
+                  <a:pt x="311018" y="1081637"/>
+                </a:lnTo>
+                <a:close/>
+                <a:lnTo>
+                  <a:pt x="319658" y="1074726"/>
+                </a:lnTo>
+                <a:close/>
+                <a:lnTo>
+                  <a:pt x="328297" y="1067814"/>
+                </a:lnTo>
+                <a:close/>
+                <a:lnTo>
+                  <a:pt x="336937" y="1060902"/>
+                </a:lnTo>
+                <a:close/>
+                <a:lnTo>
+                  <a:pt x="345576" y="1053992"/>
+                </a:lnTo>
+                <a:close/>
+                <a:lnTo>
+                  <a:pt x="354215" y="1047082"/>
+                </a:lnTo>
+                <a:close/>
+                <a:lnTo>
+                  <a:pt x="362855" y="1040169"/>
+                </a:lnTo>
+                <a:close/>
+                <a:lnTo>
+                  <a:pt x="371494" y="1033253"/>
+                </a:lnTo>
+                <a:close/>
+                <a:lnTo>
+                  <a:pt x="380134" y="1026338"/>
+                </a:lnTo>
+                <a:close/>
+                <a:lnTo>
+                  <a:pt x="388773" y="1019434"/>
+                </a:lnTo>
+                <a:close/>
+                <a:lnTo>
+                  <a:pt x="397412" y="1012544"/>
+                </a:lnTo>
+                <a:close/>
+                <a:lnTo>
+                  <a:pt x="406052" y="1005635"/>
+                </a:lnTo>
+                <a:close/>
+                <a:lnTo>
+                  <a:pt x="414691" y="998672"/>
+                </a:lnTo>
+                <a:close/>
+                <a:lnTo>
+                  <a:pt x="423331" y="991688"/>
+                </a:lnTo>
+                <a:close/>
+                <a:lnTo>
+                  <a:pt x="431970" y="984823"/>
+                </a:lnTo>
+                <a:close/>
+                <a:lnTo>
+                  <a:pt x="440609" y="978178"/>
+                </a:lnTo>
+                <a:close/>
+                <a:lnTo>
+                  <a:pt x="449249" y="971440"/>
+                </a:lnTo>
+                <a:close/>
+                <a:lnTo>
+                  <a:pt x="457888" y="964069"/>
+                </a:lnTo>
+                <a:close/>
+                <a:lnTo>
+                  <a:pt x="466527" y="955750"/>
+                </a:lnTo>
+                <a:close/>
+                <a:lnTo>
+                  <a:pt x="475167" y="946887"/>
+                </a:lnTo>
+                <a:close/>
+                <a:lnTo>
+                  <a:pt x="483806" y="938014"/>
+                </a:lnTo>
+                <a:close/>
+                <a:lnTo>
+                  <a:pt x="492446" y="929360"/>
+                </a:lnTo>
+                <a:close/>
+                <a:lnTo>
+                  <a:pt x="501085" y="920795"/>
+                </a:lnTo>
+                <a:close/>
+                <a:lnTo>
+                  <a:pt x="509724" y="912181"/>
+                </a:lnTo>
+                <a:close/>
+                <a:lnTo>
+                  <a:pt x="518364" y="903524"/>
+                </a:lnTo>
+                <a:close/>
+                <a:lnTo>
+                  <a:pt x="527003" y="894894"/>
+                </a:lnTo>
+                <a:close/>
+                <a:lnTo>
+                  <a:pt x="535643" y="886313"/>
+                </a:lnTo>
+                <a:close/>
+                <a:lnTo>
+                  <a:pt x="544282" y="877673"/>
+                </a:lnTo>
+                <a:close/>
+                <a:lnTo>
+                  <a:pt x="552921" y="868858"/>
+                </a:lnTo>
+                <a:close/>
+                <a:lnTo>
+                  <a:pt x="561561" y="860022"/>
+                </a:lnTo>
+                <a:close/>
+                <a:lnTo>
+                  <a:pt x="570200" y="851596"/>
+                </a:lnTo>
+                <a:close/>
+                <a:lnTo>
+                  <a:pt x="578840" y="843812"/>
+                </a:lnTo>
+                <a:close/>
+                <a:lnTo>
+                  <a:pt x="587479" y="835550"/>
+                </a:lnTo>
+                <a:close/>
+                <a:lnTo>
+                  <a:pt x="596118" y="825172"/>
+                </a:lnTo>
+                <a:close/>
+                <a:lnTo>
+                  <a:pt x="604758" y="811987"/>
+                </a:lnTo>
+                <a:close/>
+                <a:lnTo>
+                  <a:pt x="613397" y="797411"/>
+                </a:lnTo>
+                <a:close/>
+                <a:lnTo>
+                  <a:pt x="622037" y="783065"/>
+                </a:lnTo>
+                <a:close/>
+                <a:lnTo>
+                  <a:pt x="630676" y="769353"/>
+                </a:lnTo>
+                <a:close/>
+                <a:lnTo>
+                  <a:pt x="639315" y="755619"/>
+                </a:lnTo>
+                <a:close/>
+                <a:lnTo>
+                  <a:pt x="647955" y="741398"/>
+                </a:lnTo>
+                <a:close/>
+                <a:lnTo>
+                  <a:pt x="656594" y="727371"/>
+                </a:lnTo>
+                <a:close/>
+                <a:lnTo>
+                  <a:pt x="665234" y="714588"/>
+                </a:lnTo>
+                <a:close/>
+                <a:lnTo>
+                  <a:pt x="673873" y="703569"/>
+                </a:lnTo>
+                <a:close/>
+                <a:lnTo>
+                  <a:pt x="682512" y="693849"/>
+                </a:lnTo>
+                <a:close/>
+                <a:lnTo>
+                  <a:pt x="691152" y="684868"/>
+                </a:lnTo>
+                <a:close/>
+                <a:lnTo>
+                  <a:pt x="699791" y="676246"/>
+                </a:lnTo>
+                <a:close/>
+                <a:lnTo>
+                  <a:pt x="708431" y="667739"/>
+                </a:lnTo>
+                <a:close/>
+                <a:lnTo>
+                  <a:pt x="717070" y="659149"/>
+                </a:lnTo>
+                <a:close/>
+                <a:lnTo>
+                  <a:pt x="725709" y="650486"/>
+                </a:lnTo>
+                <a:close/>
+                <a:lnTo>
+                  <a:pt x="734349" y="641816"/>
+                </a:lnTo>
+                <a:close/>
+                <a:lnTo>
+                  <a:pt x="742988" y="633172"/>
+                </a:lnTo>
+                <a:close/>
+                <a:lnTo>
+                  <a:pt x="751628" y="624542"/>
+                </a:lnTo>
+                <a:close/>
+                <a:lnTo>
+                  <a:pt x="760267" y="615908"/>
+                </a:lnTo>
+                <a:close/>
+                <a:lnTo>
+                  <a:pt x="768906" y="607268"/>
+                </a:lnTo>
+                <a:close/>
+                <a:lnTo>
+                  <a:pt x="777546" y="598626"/>
+                </a:lnTo>
+                <a:close/>
+                <a:lnTo>
+                  <a:pt x="786185" y="589986"/>
+                </a:lnTo>
+                <a:close/>
+                <a:lnTo>
+                  <a:pt x="794825" y="581347"/>
+                </a:lnTo>
+                <a:close/>
+                <a:lnTo>
+                  <a:pt x="803464" y="572708"/>
+                </a:lnTo>
+                <a:close/>
+                <a:lnTo>
+                  <a:pt x="812103" y="564067"/>
+                </a:lnTo>
+                <a:close/>
+                <a:lnTo>
+                  <a:pt x="820743" y="555428"/>
+                </a:lnTo>
+                <a:close/>
+                <a:lnTo>
+                  <a:pt x="829382" y="546794"/>
+                </a:lnTo>
+                <a:close/>
+                <a:lnTo>
+                  <a:pt x="838022" y="538158"/>
+                </a:lnTo>
+                <a:close/>
+                <a:lnTo>
+                  <a:pt x="846661" y="529509"/>
+                </a:lnTo>
+                <a:close/>
+                <a:lnTo>
+                  <a:pt x="855300" y="520849"/>
+                </a:lnTo>
+                <a:close/>
+                <a:lnTo>
+                  <a:pt x="863940" y="512209"/>
+                </a:lnTo>
+                <a:close/>
+                <a:lnTo>
+                  <a:pt x="872579" y="503627"/>
+                </a:lnTo>
+                <a:close/>
+                <a:lnTo>
+                  <a:pt x="881219" y="495055"/>
+                </a:lnTo>
+                <a:close/>
+                <a:lnTo>
+                  <a:pt x="889858" y="486354"/>
+                </a:lnTo>
+                <a:close/>
+                <a:lnTo>
+                  <a:pt x="898497" y="477437"/>
+                </a:lnTo>
+                <a:close/>
+                <a:lnTo>
+                  <a:pt x="907137" y="468655"/>
+                </a:lnTo>
+                <a:close/>
+                <a:lnTo>
+                  <a:pt x="915776" y="460547"/>
+                </a:lnTo>
+                <a:close/>
+                <a:lnTo>
+                  <a:pt x="924416" y="453377"/>
+                </a:lnTo>
+                <a:close/>
+                <a:lnTo>
+                  <a:pt x="933055" y="446710"/>
+                </a:lnTo>
+                <a:close/>
+                <a:lnTo>
+                  <a:pt x="941694" y="440019"/>
+                </a:lnTo>
+                <a:close/>
+                <a:lnTo>
+                  <a:pt x="950334" y="433112"/>
+                </a:lnTo>
+                <a:close/>
+                <a:lnTo>
+                  <a:pt x="958973" y="426122"/>
+                </a:lnTo>
+                <a:close/>
+                <a:lnTo>
+                  <a:pt x="967613" y="419174"/>
+                </a:lnTo>
+                <a:close/>
+                <a:lnTo>
+                  <a:pt x="976252" y="412274"/>
+                </a:lnTo>
+                <a:close/>
+                <a:lnTo>
+                  <a:pt x="984891" y="405382"/>
+                </a:lnTo>
+                <a:close/>
+                <a:lnTo>
+                  <a:pt x="993531" y="398474"/>
+                </a:lnTo>
+                <a:close/>
+                <a:lnTo>
+                  <a:pt x="1002170" y="391558"/>
+                </a:lnTo>
+                <a:close/>
+                <a:lnTo>
+                  <a:pt x="1010810" y="384643"/>
+                </a:lnTo>
+                <a:close/>
+                <a:lnTo>
+                  <a:pt x="1019449" y="377732"/>
+                </a:lnTo>
+                <a:close/>
+                <a:lnTo>
+                  <a:pt x="1028088" y="370821"/>
+                </a:lnTo>
+                <a:close/>
+                <a:lnTo>
+                  <a:pt x="1036728" y="363909"/>
+                </a:lnTo>
+                <a:close/>
+                <a:lnTo>
+                  <a:pt x="1045367" y="356997"/>
+                </a:lnTo>
+                <a:close/>
+                <a:lnTo>
+                  <a:pt x="1054007" y="350088"/>
+                </a:lnTo>
+                <a:close/>
+                <a:lnTo>
+                  <a:pt x="1062646" y="343182"/>
+                </a:lnTo>
+                <a:close/>
+                <a:lnTo>
+                  <a:pt x="1071285" y="336268"/>
+                </a:lnTo>
+                <a:close/>
+                <a:lnTo>
+                  <a:pt x="1079925" y="329339"/>
+                </a:lnTo>
+                <a:close/>
+                <a:lnTo>
+                  <a:pt x="1088564" y="322413"/>
+                </a:lnTo>
+                <a:close/>
+                <a:lnTo>
+                  <a:pt x="1097204" y="315529"/>
+                </a:lnTo>
+                <a:close/>
+                <a:lnTo>
+                  <a:pt x="1105843" y="308695"/>
+                </a:lnTo>
+                <a:close/>
+                <a:lnTo>
+                  <a:pt x="1114482" y="301800"/>
+                </a:lnTo>
+                <a:close/>
+                <a:lnTo>
+                  <a:pt x="1123122" y="294700"/>
+                </a:lnTo>
+                <a:close/>
+                <a:lnTo>
+                  <a:pt x="1131761" y="287517"/>
+                </a:lnTo>
+                <a:close/>
+                <a:lnTo>
+                  <a:pt x="1140401" y="280760"/>
+                </a:lnTo>
+                <a:close/>
+                <a:lnTo>
+                  <a:pt x="1149040" y="274910"/>
+                </a:lnTo>
+                <a:close/>
+                <a:lnTo>
+                  <a:pt x="1157679" y="269806"/>
+                </a:lnTo>
+                <a:close/>
+                <a:lnTo>
+                  <a:pt x="1166319" y="264913"/>
+                </a:lnTo>
+                <a:close/>
+                <a:lnTo>
+                  <a:pt x="1174958" y="259821"/>
+                </a:lnTo>
+                <a:close/>
+                <a:lnTo>
+                  <a:pt x="1183598" y="254579"/>
+                </a:lnTo>
+                <a:close/>
+                <a:lnTo>
+                  <a:pt x="1192237" y="249331"/>
+                </a:lnTo>
+                <a:close/>
+                <a:lnTo>
+                  <a:pt x="1200876" y="244141"/>
+                </a:lnTo>
+                <a:close/>
+                <a:lnTo>
+                  <a:pt x="1209516" y="238978"/>
+                </a:lnTo>
+                <a:close/>
+                <a:lnTo>
+                  <a:pt x="1218155" y="233806"/>
+                </a:lnTo>
+                <a:close/>
+                <a:lnTo>
+                  <a:pt x="1226795" y="228620"/>
+                </a:lnTo>
+                <a:close/>
+                <a:lnTo>
+                  <a:pt x="1235434" y="223431"/>
+                </a:lnTo>
+                <a:close/>
+                <a:lnTo>
+                  <a:pt x="1244073" y="218246"/>
+                </a:lnTo>
+                <a:close/>
+                <a:lnTo>
+                  <a:pt x="1252713" y="213064"/>
+                </a:lnTo>
+                <a:close/>
+                <a:lnTo>
+                  <a:pt x="1261352" y="207880"/>
+                </a:lnTo>
+                <a:close/>
+                <a:lnTo>
+                  <a:pt x="1269992" y="202696"/>
+                </a:lnTo>
+                <a:close/>
+                <a:lnTo>
+                  <a:pt x="1278631" y="197513"/>
+                </a:lnTo>
+                <a:close/>
+                <a:lnTo>
+                  <a:pt x="1287270" y="192334"/>
+                </a:lnTo>
+                <a:close/>
+                <a:lnTo>
+                  <a:pt x="1295910" y="187153"/>
+                </a:lnTo>
+                <a:close/>
+                <a:lnTo>
+                  <a:pt x="1304549" y="181959"/>
+                </a:lnTo>
+                <a:close/>
+                <a:lnTo>
+                  <a:pt x="1313188" y="176755"/>
+                </a:lnTo>
+                <a:close/>
+                <a:lnTo>
+                  <a:pt x="1321828" y="171574"/>
+                </a:lnTo>
+                <a:close/>
+                <a:lnTo>
+                  <a:pt x="1330467" y="166452"/>
+                </a:lnTo>
+                <a:close/>
+                <a:lnTo>
+                  <a:pt x="1339107" y="161331"/>
+                </a:lnTo>
+                <a:close/>
+                <a:lnTo>
+                  <a:pt x="1347746" y="156069"/>
+                </a:lnTo>
+                <a:close/>
+                <a:lnTo>
+                  <a:pt x="1356385" y="150600"/>
+                </a:lnTo>
+                <a:close/>
+                <a:lnTo>
+                  <a:pt x="1365025" y="145308"/>
+                </a:lnTo>
+                <a:close/>
+                <a:lnTo>
+                  <a:pt x="1373664" y="140731"/>
+                </a:lnTo>
+                <a:close/>
+                <a:lnTo>
+                  <a:pt x="1382304" y="137075"/>
+                </a:lnTo>
+                <a:close/>
+                <a:lnTo>
+                  <a:pt x="1390943" y="133881"/>
+                </a:lnTo>
+                <a:close/>
+                <a:lnTo>
+                  <a:pt x="1399582" y="130630"/>
+                </a:lnTo>
+                <a:close/>
+                <a:lnTo>
+                  <a:pt x="1408222" y="127169"/>
+                </a:lnTo>
+                <a:close/>
+                <a:lnTo>
+                  <a:pt x="1416861" y="123631"/>
+                </a:lnTo>
+                <a:close/>
+                <a:lnTo>
+                  <a:pt x="1425501" y="120133"/>
+                </a:lnTo>
+                <a:close/>
+                <a:lnTo>
+                  <a:pt x="1434140" y="116687"/>
+                </a:lnTo>
+                <a:close/>
+                <a:lnTo>
+                  <a:pt x="1442779" y="113276"/>
+                </a:lnTo>
+                <a:close/>
+                <a:lnTo>
+                  <a:pt x="1451419" y="109863"/>
+                </a:lnTo>
+                <a:close/>
+                <a:lnTo>
+                  <a:pt x="1460058" y="106384"/>
+                </a:lnTo>
+                <a:close/>
+                <a:lnTo>
+                  <a:pt x="1468698" y="102789"/>
+                </a:lnTo>
+                <a:close/>
+                <a:lnTo>
+                  <a:pt x="1477337" y="99228"/>
+                </a:lnTo>
+                <a:close/>
+                <a:lnTo>
+                  <a:pt x="1485976" y="95986"/>
+                </a:lnTo>
+                <a:close/>
+                <a:lnTo>
+                  <a:pt x="1494616" y="93242"/>
+                </a:lnTo>
+                <a:close/>
+                <a:lnTo>
+                  <a:pt x="1503255" y="90758"/>
+                </a:lnTo>
+                <a:close/>
+                <a:lnTo>
+                  <a:pt x="1511895" y="88197"/>
+                </a:lnTo>
+                <a:close/>
+                <a:lnTo>
+                  <a:pt x="1520534" y="85489"/>
+                </a:lnTo>
+                <a:close/>
+                <a:lnTo>
+                  <a:pt x="1529173" y="82941"/>
+                </a:lnTo>
+                <a:close/>
+                <a:lnTo>
+                  <a:pt x="1537813" y="80856"/>
+                </a:lnTo>
+                <a:close/>
+                <a:lnTo>
+                  <a:pt x="1546452" y="79169"/>
+                </a:lnTo>
+                <a:close/>
+                <a:lnTo>
+                  <a:pt x="1555092" y="77612"/>
+                </a:lnTo>
+                <a:close/>
+                <a:lnTo>
+                  <a:pt x="1563731" y="75971"/>
+                </a:lnTo>
+                <a:close/>
+                <a:lnTo>
+                  <a:pt x="1572370" y="74214"/>
+                </a:lnTo>
+                <a:close/>
+                <a:lnTo>
+                  <a:pt x="1581010" y="72348"/>
+                </a:lnTo>
+                <a:close/>
+                <a:lnTo>
+                  <a:pt x="1589649" y="70489"/>
+                </a:lnTo>
+                <a:close/>
+                <a:lnTo>
+                  <a:pt x="1598289" y="68878"/>
+                </a:lnTo>
+                <a:close/>
+                <a:lnTo>
+                  <a:pt x="1606928" y="67725"/>
+                </a:lnTo>
+                <a:close/>
+                <a:lnTo>
+                  <a:pt x="1615567" y="66918"/>
+                </a:lnTo>
+                <a:close/>
+                <a:lnTo>
+                  <a:pt x="1624207" y="66193"/>
+                </a:lnTo>
+                <a:close/>
+                <a:lnTo>
+                  <a:pt x="1632847" y="65365"/>
+                </a:lnTo>
+                <a:close/>
+                <a:lnTo>
+                  <a:pt x="1641486" y="64470"/>
+                </a:lnTo>
+                <a:close/>
+                <a:lnTo>
+                  <a:pt x="1650124" y="63578"/>
+                </a:lnTo>
+                <a:close/>
+                <a:lnTo>
+                  <a:pt x="1658762" y="62713"/>
+                </a:lnTo>
+                <a:close/>
+                <a:lnTo>
+                  <a:pt x="1667403" y="61859"/>
+                </a:lnTo>
+                <a:close/>
+                <a:lnTo>
+                  <a:pt x="1676048" y="60995"/>
+                </a:lnTo>
+                <a:close/>
+                <a:lnTo>
+                  <a:pt x="1684690" y="60128"/>
+                </a:lnTo>
+                <a:close/>
+                <a:lnTo>
+                  <a:pt x="1693318" y="59270"/>
+                </a:lnTo>
+                <a:close/>
+                <a:lnTo>
+                  <a:pt x="1701935" y="58422"/>
+                </a:lnTo>
+                <a:close/>
+                <a:lnTo>
+                  <a:pt x="1710579" y="57556"/>
+                </a:lnTo>
+                <a:close/>
+                <a:lnTo>
+                  <a:pt x="1719285" y="56642"/>
+                </a:lnTo>
+                <a:close/>
+                <a:lnTo>
+                  <a:pt x="1727991" y="55729"/>
+                </a:lnTo>
+                <a:close/>
+                <a:lnTo>
+                  <a:pt x="1736542" y="54931"/>
+                </a:lnTo>
+                <a:close/>
+                <a:lnTo>
+                  <a:pt x="1744873" y="54335"/>
+                </a:lnTo>
+                <a:close/>
+                <a:lnTo>
+                  <a:pt x="1753405" y="53856"/>
+                </a:lnTo>
+                <a:close/>
+                <a:lnTo>
+                  <a:pt x="1762709" y="53354"/>
+                </a:lnTo>
+                <a:close/>
+                <a:lnTo>
+                  <a:pt x="1772480" y="52784"/>
+                </a:lnTo>
+                <a:close/>
+                <a:lnTo>
+                  <a:pt x="1780740" y="52272"/>
+                </a:lnTo>
+                <a:close/>
+                <a:lnTo>
+                  <a:pt x="1785484" y="51957"/>
+                </a:lnTo>
+                <a:close/>
+                <a:lnTo>
+                  <a:pt x="1787070" y="51828"/>
+                </a:lnTo>
+                <a:close/>
+                <a:lnTo>
+                  <a:pt x="1787624" y="51758"/>
+                </a:lnTo>
+                <a:close/>
+                <a:lnTo>
+                  <a:pt x="1788903" y="51645"/>
+                </a:lnTo>
+                <a:close/>
+                <a:lnTo>
+                  <a:pt x="1790833" y="51495"/>
+                </a:lnTo>
+                <a:close/>
+                <a:lnTo>
+                  <a:pt x="1792838" y="51342"/>
+                </a:lnTo>
+                <a:close/>
+                <a:lnTo>
+                  <a:pt x="1794606" y="51204"/>
+                </a:lnTo>
+                <a:close/>
+                <a:lnTo>
+                  <a:pt x="1796256" y="51069"/>
+                </a:lnTo>
+                <a:close/>
+                <a:lnTo>
+                  <a:pt x="1797931" y="50925"/>
+                </a:lnTo>
+                <a:close/>
+                <a:lnTo>
+                  <a:pt x="1799665" y="50780"/>
+                </a:lnTo>
+                <a:close/>
+                <a:lnTo>
+                  <a:pt x="1801414" y="50655"/>
+                </a:lnTo>
+                <a:close/>
+                <a:lnTo>
+                  <a:pt x="1803148" y="50566"/>
+                </a:lnTo>
+                <a:close/>
+                <a:lnTo>
+                  <a:pt x="1804871" y="50504"/>
+                </a:lnTo>
+                <a:close/>
+                <a:lnTo>
+                  <a:pt x="1806599" y="50459"/>
+                </a:lnTo>
+                <a:close/>
+                <a:lnTo>
+                  <a:pt x="1808332" y="50421"/>
+                </a:lnTo>
+                <a:close/>
+                <a:lnTo>
+                  <a:pt x="1810058" y="50390"/>
+                </a:lnTo>
+                <a:close/>
+                <a:lnTo>
+                  <a:pt x="1811762" y="50367"/>
+                </a:lnTo>
+                <a:close/>
+                <a:lnTo>
+                  <a:pt x="1813474" y="50350"/>
+                </a:lnTo>
+                <a:close/>
+                <a:lnTo>
+                  <a:pt x="1815244" y="50337"/>
+                </a:lnTo>
+                <a:close/>
+                <a:lnTo>
+                  <a:pt x="1817072" y="50326"/>
+                </a:lnTo>
+                <a:close/>
+                <a:lnTo>
+                  <a:pt x="1818802" y="50318"/>
+                </a:lnTo>
+                <a:close/>
+                <a:lnTo>
+                  <a:pt x="1820263" y="50312"/>
+                </a:lnTo>
+                <a:close/>
+                <a:lnTo>
+                  <a:pt x="1821669" y="50308"/>
+                </a:lnTo>
+                <a:close/>
+                <a:lnTo>
+                  <a:pt x="1823682" y="50302"/>
+                </a:lnTo>
+                <a:close/>
+                <a:lnTo>
+                  <a:pt x="1826840" y="50296"/>
+                </a:lnTo>
+                <a:close/>
+                <a:lnTo>
+                  <a:pt x="1830567" y="50288"/>
+                </a:lnTo>
+                <a:close/>
+                <a:lnTo>
+                  <a:pt x="1833781" y="50282"/>
+                </a:lnTo>
+                <a:close/>
+                <a:lnTo>
+                  <a:pt x="1835845" y="50277"/>
+                </a:lnTo>
+                <a:close/>
+                <a:lnTo>
+                  <a:pt x="1837266" y="50272"/>
+                </a:lnTo>
+                <a:close/>
+                <a:lnTo>
+                  <a:pt x="1838713" y="50266"/>
+                </a:lnTo>
+                <a:close/>
+                <a:lnTo>
+                  <a:pt x="1840432" y="50257"/>
+                </a:lnTo>
+                <a:close/>
+                <a:lnTo>
+                  <a:pt x="1842259" y="50248"/>
+                </a:lnTo>
+                <a:close/>
+                <a:lnTo>
+                  <a:pt x="1844034" y="50238"/>
+                </a:lnTo>
+                <a:close/>
+                <a:lnTo>
+                  <a:pt x="1845748" y="50230"/>
+                </a:lnTo>
+                <a:close/>
+                <a:lnTo>
+                  <a:pt x="1847451" y="50222"/>
+                </a:lnTo>
+                <a:close/>
+                <a:lnTo>
+                  <a:pt x="1849176" y="50215"/>
+                </a:lnTo>
+                <a:close/>
+                <a:lnTo>
+                  <a:pt x="1850909" y="50206"/>
+                </a:lnTo>
+                <a:close/>
+                <a:lnTo>
+                  <a:pt x="1852637" y="50192"/>
+                </a:lnTo>
+                <a:close/>
+                <a:lnTo>
+                  <a:pt x="1854361" y="50175"/>
+                </a:lnTo>
+                <a:close/>
+                <a:lnTo>
+                  <a:pt x="1856093" y="50156"/>
+                </a:lnTo>
+                <a:close/>
+                <a:lnTo>
+                  <a:pt x="1857842" y="50138"/>
+                </a:lnTo>
+                <a:close/>
+                <a:lnTo>
+                  <a:pt x="1859578" y="50121"/>
+                </a:lnTo>
+                <a:close/>
+                <a:lnTo>
+                  <a:pt x="1861257" y="50105"/>
+                </a:lnTo>
+                <a:close/>
+                <a:lnTo>
+                  <a:pt x="1862904" y="50089"/>
+                </a:lnTo>
+                <a:close/>
+                <a:lnTo>
+                  <a:pt x="1864663" y="50071"/>
+                </a:lnTo>
+                <a:close/>
+                <a:lnTo>
+                  <a:pt x="1866658" y="50049"/>
+                </a:lnTo>
+                <a:close/>
+                <a:lnTo>
+                  <a:pt x="1868606" y="50028"/>
+                </a:lnTo>
+                <a:close/>
+                <a:lnTo>
+                  <a:pt x="1869934" y="50018"/>
+                </a:lnTo>
+                <a:close/>
+                <a:lnTo>
+                  <a:pt x="1870493" y="50020"/>
+                </a:lnTo>
+                <a:close/>
+                <a:lnTo>
+                  <a:pt x="1871970" y="50007"/>
+                </a:lnTo>
+                <a:close/>
+                <a:lnTo>
+                  <a:pt x="1876505" y="49942"/>
+                </a:lnTo>
+                <a:close/>
+                <a:lnTo>
+                  <a:pt x="1884624" y="49816"/>
+                </a:lnTo>
+                <a:close/>
+                <a:lnTo>
+                  <a:pt x="1894370" y="49657"/>
+                </a:lnTo>
+                <a:close/>
+                <a:lnTo>
+                  <a:pt x="1903726" y="49495"/>
+                </a:lnTo>
+                <a:close/>
+                <a:lnTo>
+                  <a:pt x="1912284" y="49329"/>
+                </a:lnTo>
+                <a:close/>
+                <a:lnTo>
+                  <a:pt x="1920612" y="49140"/>
+                </a:lnTo>
+                <a:close/>
+                <a:lnTo>
+                  <a:pt x="1929150" y="48911"/>
+                </a:lnTo>
+                <a:close/>
+                <a:lnTo>
+                  <a:pt x="1937851" y="48642"/>
+                </a:lnTo>
+                <a:close/>
+                <a:lnTo>
+                  <a:pt x="1946560" y="48338"/>
+                </a:lnTo>
+                <a:close/>
+                <a:lnTo>
+                  <a:pt x="1955207" y="48001"/>
+                </a:lnTo>
+                <a:close/>
+                <a:lnTo>
+                  <a:pt x="1963824" y="47641"/>
+                </a:lnTo>
+                <a:close/>
+                <a:lnTo>
+                  <a:pt x="1972451" y="47266"/>
+                </a:lnTo>
+                <a:close/>
+                <a:lnTo>
+                  <a:pt x="1981093" y="46907"/>
+                </a:lnTo>
+                <a:close/>
+                <a:lnTo>
+                  <a:pt x="1989738" y="46606"/>
+                </a:lnTo>
+                <a:close/>
+                <a:lnTo>
+                  <a:pt x="1998379" y="46356"/>
+                </a:lnTo>
+                <a:close/>
+                <a:lnTo>
+                  <a:pt x="2007017" y="46009"/>
+                </a:lnTo>
+                <a:close/>
+                <a:lnTo>
+                  <a:pt x="2015655" y="45398"/>
+                </a:lnTo>
+                <a:close/>
+                <a:lnTo>
+                  <a:pt x="2024295" y="44528"/>
+                </a:lnTo>
+                <a:close/>
+                <a:lnTo>
+                  <a:pt x="2032934" y="43597"/>
+                </a:lnTo>
+                <a:close/>
+                <a:lnTo>
+                  <a:pt x="2041574" y="42774"/>
+                </a:lnTo>
+                <a:close/>
+                <a:lnTo>
+                  <a:pt x="2050213" y="41963"/>
+                </a:lnTo>
+                <a:close/>
+                <a:lnTo>
+                  <a:pt x="2058853" y="40956"/>
+                </a:lnTo>
+                <a:close/>
+                <a:lnTo>
+                  <a:pt x="2067492" y="39647"/>
+                </a:lnTo>
+                <a:close/>
+                <a:lnTo>
+                  <a:pt x="2076131" y="38187"/>
+                </a:lnTo>
+                <a:close/>
+                <a:lnTo>
+                  <a:pt x="2084771" y="36757"/>
+                </a:lnTo>
+                <a:close/>
+                <a:lnTo>
+                  <a:pt x="2093410" y="35396"/>
+                </a:lnTo>
+                <a:close/>
+                <a:lnTo>
+                  <a:pt x="2102050" y="34011"/>
+                </a:lnTo>
+                <a:close/>
+                <a:lnTo>
+                  <a:pt x="2110689" y="32519"/>
+                </a:lnTo>
+                <a:close/>
+                <a:lnTo>
+                  <a:pt x="2119328" y="30946"/>
+                </a:lnTo>
+                <a:close/>
+                <a:lnTo>
+                  <a:pt x="2127968" y="29353"/>
+                </a:lnTo>
+                <a:close/>
+                <a:lnTo>
+                  <a:pt x="2136607" y="27738"/>
+                </a:lnTo>
+                <a:close/>
+                <a:lnTo>
+                  <a:pt x="2145247" y="25965"/>
+                </a:lnTo>
+                <a:close/>
+                <a:lnTo>
+                  <a:pt x="2153886" y="23898"/>
+                </a:lnTo>
+                <a:close/>
+                <a:lnTo>
+                  <a:pt x="2162525" y="21607"/>
+                </a:lnTo>
+                <a:close/>
+                <a:lnTo>
+                  <a:pt x="2171165" y="19337"/>
+                </a:lnTo>
+                <a:close/>
+                <a:lnTo>
+                  <a:pt x="2179804" y="17265"/>
+                </a:lnTo>
+                <a:close/>
+                <a:lnTo>
+                  <a:pt x="2188444" y="15247"/>
+                </a:lnTo>
+                <a:close/>
+                <a:lnTo>
+                  <a:pt x="2197083" y="13038"/>
+                </a:lnTo>
+                <a:close/>
+                <a:lnTo>
+                  <a:pt x="2205722" y="10528"/>
+                </a:lnTo>
+                <a:close/>
+                <a:lnTo>
+                  <a:pt x="2214362" y="7831"/>
+                </a:lnTo>
+                <a:close/>
+                <a:lnTo>
+                  <a:pt x="2223001" y="5086"/>
+                </a:lnTo>
+                <a:close/>
+                <a:lnTo>
+                  <a:pt x="2231641" y="2430"/>
+                </a:lnTo>
+                <a:close/>
+                <a:lnTo>
+                  <a:pt x="2240280" y="0"/>
+                </a:lnTo>
+                <a:close/>
+              </a:path>
+            </a:pathLst>
+          </a:custGeom>
+          <a:ln w="31750">
             <a:solidFill>
-              <a:srgbClr val="00C8FF"/>
+              <a:srgbClr val="00E5FF"/>
             </a:solidFill>
           </a:ln>
         </p:spPr>
         <p:style>
-          <a:lnRef idx="2">
+          <a:lnRef idx="1">
             <a:schemeClr val="accent1"/>
           </a:lnRef>
-          <a:fillRef idx="0">
+          <a:fillRef idx="3">
             <a:schemeClr val="accent1"/>
           </a:fillRef>
-          <a:effectRef idx="1">
+          <a:effectRef idx="2">
             <a:schemeClr val="accent1"/>
           </a:effectRef>
           <a:fontRef idx="minor">
-            <a:schemeClr val="tx1"/>
+            <a:schemeClr val="lt1"/>
           </a:fontRef>
         </p:style>
-      </p:cxnSp>
+        <p:txBody>
+          <a:bodyPr rtlCol="0" anchor="ctr"/>
+          <a:lstStyle/>
+          <a:p>
+            <a:pPr algn="ctr"/>
+          </a:p>
+        </p:txBody>
+      </p:sp>
       <p:cxnSp>
         <p:nvCxnSpPr>
           <p:cNvPr id="5" name="Connector 4"/>
@@ -3209,16 +4423,17 @@
         </p:nvCxnSpPr>
         <p:spPr>
           <a:xfrm flipV="1">
-            <a:off x="4297680.0" y="2731770.0"/>
-            <a:ext cx="45720.0" cy="68580.0"/>
+            <a:off x="5715000.0" y="1748790.0"/>
+            <a:ext cx="0.0" cy="822960.0"/>
           </a:xfrm>
           <a:prstGeom prst="line">
             <a:avLst/>
           </a:prstGeom>
-          <a:ln w="25400">
+          <a:ln w="12700">
             <a:solidFill>
-              <a:srgbClr val="00C8FF"/>
+              <a:srgbClr val="787878"/>
             </a:solidFill>
+            <a:prstDash val="sysDash"/>
           </a:ln>
         </p:spPr>
         <p:style>
@@ -3243,17 +4458,18 @@
           <p:nvPr/>
         </p:nvCxnSpPr>
         <p:spPr>
-          <a:xfrm flipV="1">
-            <a:off x="4343400.0" y="2663190.0"/>
-            <a:ext cx="45720.0" cy="68580.0"/>
+          <a:xfrm>
+            <a:off x="4572000.0" y="1748790.0"/>
+            <a:ext cx="1143000.0" cy="0.0"/>
           </a:xfrm>
           <a:prstGeom prst="line">
             <a:avLst/>
           </a:prstGeom>
-          <a:ln w="25400">
+          <a:ln w="12700">
             <a:solidFill>
-              <a:srgbClr val="00C8FF"/>
+              <a:srgbClr val="787878"/>
             </a:solidFill>
+            <a:prstDash val="sysDash"/>
           </a:ln>
         </p:spPr>
         <p:style>
@@ -3271,41 +4487,51 @@
           </a:fontRef>
         </p:style>
       </p:cxnSp>
-      <p:cxnSp>
-        <p:nvCxnSpPr>
-          <p:cNvPr id="7" name="Connector 6"/>
-          <p:cNvCxnSpPr/>
+      <p:sp>
+        <p:nvSpPr>
+          <p:cNvPr id="7" name="Oval 6"/>
+          <p:cNvSpPr/>
           <p:nvPr/>
-        </p:nvCxnSpPr>
+        </p:nvSpPr>
         <p:spPr>
-          <a:xfrm flipV="1">
-            <a:off x="4389120.0" y="2594610.0"/>
-            <a:ext cx="45720.0" cy="68580.0"/>
+          <a:xfrm>
+            <a:off x="5664200" y="1697990"/>
+            <a:ext cx="101600" cy="101600"/>
           </a:xfrm>
-          <a:prstGeom prst="line">
+          <a:prstGeom prst="ellipse">
             <a:avLst/>
           </a:prstGeom>
-          <a:ln w="25400">
+          <a:solidFill>
+            <a:srgbClr val="0A0A0A"/>
+          </a:solidFill>
+          <a:ln w="12700">
             <a:solidFill>
-              <a:srgbClr val="00C8FF"/>
+              <a:srgbClr val="FFFFFF"/>
             </a:solidFill>
           </a:ln>
         </p:spPr>
         <p:style>
-          <a:lnRef idx="2">
+          <a:lnRef idx="1">
             <a:schemeClr val="accent1"/>
           </a:lnRef>
-          <a:fillRef idx="0">
+          <a:fillRef idx="3">
             <a:schemeClr val="accent1"/>
           </a:fillRef>
-          <a:effectRef idx="1">
+          <a:effectRef idx="2">
             <a:schemeClr val="accent1"/>
           </a:effectRef>
           <a:fontRef idx="minor">
-            <a:schemeClr val="tx1"/>
+            <a:schemeClr val="lt1"/>
           </a:fontRef>
         </p:style>
-      </p:cxnSp>
+        <p:txBody>
+          <a:bodyPr rtlCol="0" anchor="ctr"/>
+          <a:lstStyle/>
+          <a:p>
+            <a:pPr algn="ctr"/>
+          </a:p>
+        </p:txBody>
+      </p:sp>
       <p:cxnSp>
         <p:nvCxnSpPr>
           <p:cNvPr id="8" name="Connector 7"/>
@@ -3313,16 +4539,16 @@
           <p:nvPr/>
         </p:nvCxnSpPr>
         <p:spPr>
-          <a:xfrm flipV="1">
-            <a:off x="4434840.0" y="2526030.0"/>
-            <a:ext cx="45720.0" cy="68580.0"/>
+          <a:xfrm>
+            <a:off x="5394960.0" y="2571750.0"/>
+            <a:ext cx="182880.0" cy="0.0"/>
           </a:xfrm>
           <a:prstGeom prst="line">
             <a:avLst/>
           </a:prstGeom>
-          <a:ln w="25400">
+          <a:ln w="15240">
             <a:solidFill>
-              <a:srgbClr val="00C8FF"/>
+              <a:srgbClr val="B4B4B4"/>
             </a:solidFill>
           </a:ln>
         </p:spPr>
@@ -3348,16 +4574,16 @@
           <p:nvPr/>
         </p:nvCxnSpPr>
         <p:spPr>
-          <a:xfrm flipV="1">
-            <a:off x="4480560.0" y="2434590.0"/>
-            <a:ext cx="45720.0" cy="91440.0"/>
+          <a:xfrm flipH="1">
+            <a:off x="5852160.0" y="2571750.0"/>
+            <a:ext cx="182880.0" cy="0.0"/>
           </a:xfrm>
           <a:prstGeom prst="line">
             <a:avLst/>
           </a:prstGeom>
-          <a:ln w="25400">
+          <a:ln w="15240">
             <a:solidFill>
-              <a:srgbClr val="00C8FF"/>
+              <a:srgbClr val="B4B4B4"/>
             </a:solidFill>
           </a:ln>
         </p:spPr>
@@ -3376,1634 +4602,430 @@
           </a:fontRef>
         </p:style>
       </p:cxnSp>
-      <p:cxnSp>
-        <p:nvCxnSpPr>
-          <p:cNvPr id="10" name="Connector 9"/>
-          <p:cNvCxnSpPr/>
+      <p:sp>
+        <p:nvSpPr>
+          <p:cNvPr id="10" name="Freeform 9"/>
+          <p:cNvSpPr/>
           <p:nvPr/>
-        </p:nvCxnSpPr>
-        <p:spPr>
-          <a:xfrm flipV="1">
-            <a:off x="4526280.0" y="2343150.0"/>
-            <a:ext cx="45720.0" cy="91440.0"/>
-          </a:xfrm>
-          <a:prstGeom prst="line">
-            <a:avLst/>
-          </a:prstGeom>
-          <a:ln w="25400">
-            <a:solidFill>
-              <a:srgbClr val="00C8FF"/>
-            </a:solidFill>
-          </a:ln>
-        </p:spPr>
-        <p:style>
-          <a:lnRef idx="2">
-            <a:schemeClr val="accent1"/>
-          </a:lnRef>
-          <a:fillRef idx="0">
-            <a:schemeClr val="accent1"/>
-          </a:fillRef>
-          <a:effectRef idx="1">
-            <a:schemeClr val="accent1"/>
-          </a:effectRef>
-          <a:fontRef idx="minor">
-            <a:schemeClr val="tx1"/>
-          </a:fontRef>
-        </p:style>
-      </p:cxnSp>
-      <p:cxnSp>
-        <p:nvCxnSpPr>
-          <p:cNvPr id="11" name="Connector 10"/>
-          <p:cNvCxnSpPr/>
-          <p:nvPr/>
-        </p:nvCxnSpPr>
-        <p:spPr>
-          <a:xfrm flipV="1">
-            <a:off x="4572000.0" y="2297430.0"/>
-            <a:ext cx="45720.0" cy="45720.0"/>
-          </a:xfrm>
-          <a:prstGeom prst="line">
-            <a:avLst/>
-          </a:prstGeom>
-          <a:ln w="25400">
-            <a:solidFill>
-              <a:srgbClr val="00C8FF"/>
-            </a:solidFill>
-          </a:ln>
-        </p:spPr>
-        <p:style>
-          <a:lnRef idx="2">
-            <a:schemeClr val="accent1"/>
-          </a:lnRef>
-          <a:fillRef idx="0">
-            <a:schemeClr val="accent1"/>
-          </a:fillRef>
-          <a:effectRef idx="1">
-            <a:schemeClr val="accent1"/>
-          </a:effectRef>
-          <a:fontRef idx="minor">
-            <a:schemeClr val="tx1"/>
-          </a:fontRef>
-        </p:style>
-      </p:cxnSp>
-      <p:cxnSp>
-        <p:nvCxnSpPr>
-          <p:cNvPr id="12" name="Connector 11"/>
-          <p:cNvCxnSpPr/>
-          <p:nvPr/>
-        </p:nvCxnSpPr>
-        <p:spPr>
-          <a:xfrm flipV="1">
-            <a:off x="4617720.0" y="2251710.0"/>
-            <a:ext cx="45720.0" cy="45720.0"/>
-          </a:xfrm>
-          <a:prstGeom prst="line">
-            <a:avLst/>
-          </a:prstGeom>
-          <a:ln w="25400">
-            <a:solidFill>
-              <a:srgbClr val="00C8FF"/>
-            </a:solidFill>
-          </a:ln>
-        </p:spPr>
-        <p:style>
-          <a:lnRef idx="2">
-            <a:schemeClr val="accent1"/>
-          </a:lnRef>
-          <a:fillRef idx="0">
-            <a:schemeClr val="accent1"/>
-          </a:fillRef>
-          <a:effectRef idx="1">
-            <a:schemeClr val="accent1"/>
-          </a:effectRef>
-          <a:fontRef idx="minor">
-            <a:schemeClr val="tx1"/>
-          </a:fontRef>
-        </p:style>
-      </p:cxnSp>
-      <p:cxnSp>
-        <p:nvCxnSpPr>
-          <p:cNvPr id="13" name="Connector 12"/>
-          <p:cNvCxnSpPr/>
-          <p:nvPr/>
-        </p:nvCxnSpPr>
-        <p:spPr>
-          <a:xfrm flipV="1">
-            <a:off x="4663440.0" y="2205990.0"/>
-            <a:ext cx="45720.0" cy="45720.0"/>
-          </a:xfrm>
-          <a:prstGeom prst="line">
-            <a:avLst/>
-          </a:prstGeom>
-          <a:ln w="25400">
-            <a:solidFill>
-              <a:srgbClr val="00C8FF"/>
-            </a:solidFill>
-          </a:ln>
-        </p:spPr>
-        <p:style>
-          <a:lnRef idx="2">
-            <a:schemeClr val="accent1"/>
-          </a:lnRef>
-          <a:fillRef idx="0">
-            <a:schemeClr val="accent1"/>
-          </a:fillRef>
-          <a:effectRef idx="1">
-            <a:schemeClr val="accent1"/>
-          </a:effectRef>
-          <a:fontRef idx="minor">
-            <a:schemeClr val="tx1"/>
-          </a:fontRef>
-        </p:style>
-      </p:cxnSp>
-      <p:cxnSp>
-        <p:nvCxnSpPr>
-          <p:cNvPr id="14" name="Connector 13"/>
-          <p:cNvCxnSpPr/>
-          <p:nvPr/>
-        </p:nvCxnSpPr>
-        <p:spPr>
-          <a:xfrm flipV="1">
-            <a:off x="4709160.0" y="2160270.0"/>
-            <a:ext cx="45720.0" cy="45720.0"/>
-          </a:xfrm>
-          <a:prstGeom prst="line">
-            <a:avLst/>
-          </a:prstGeom>
-          <a:ln w="25400">
-            <a:solidFill>
-              <a:srgbClr val="00C8FF"/>
-            </a:solidFill>
-          </a:ln>
-        </p:spPr>
-        <p:style>
-          <a:lnRef idx="2">
-            <a:schemeClr val="accent1"/>
-          </a:lnRef>
-          <a:fillRef idx="0">
-            <a:schemeClr val="accent1"/>
-          </a:fillRef>
-          <a:effectRef idx="1">
-            <a:schemeClr val="accent1"/>
-          </a:effectRef>
-          <a:fontRef idx="minor">
-            <a:schemeClr val="tx1"/>
-          </a:fontRef>
-        </p:style>
-      </p:cxnSp>
-      <p:cxnSp>
-        <p:nvCxnSpPr>
-          <p:cNvPr id="15" name="Connector 14"/>
-          <p:cNvCxnSpPr/>
-          <p:nvPr/>
-        </p:nvCxnSpPr>
-        <p:spPr>
-          <a:xfrm flipV="1">
-            <a:off x="4754880.0" y="2114550.0"/>
-            <a:ext cx="45720.0" cy="45720.0"/>
-          </a:xfrm>
-          <a:prstGeom prst="line">
-            <a:avLst/>
-          </a:prstGeom>
-          <a:ln w="25400">
-            <a:solidFill>
-              <a:srgbClr val="00C8FF"/>
-            </a:solidFill>
-          </a:ln>
-        </p:spPr>
-        <p:style>
-          <a:lnRef idx="2">
-            <a:schemeClr val="accent1"/>
-          </a:lnRef>
-          <a:fillRef idx="0">
-            <a:schemeClr val="accent1"/>
-          </a:fillRef>
-          <a:effectRef idx="1">
-            <a:schemeClr val="accent1"/>
-          </a:effectRef>
-          <a:fontRef idx="minor">
-            <a:schemeClr val="tx1"/>
-          </a:fontRef>
-        </p:style>
-      </p:cxnSp>
-      <p:cxnSp>
-        <p:nvCxnSpPr>
-          <p:cNvPr id="16" name="Connector 15"/>
-          <p:cNvCxnSpPr/>
-          <p:nvPr/>
-        </p:nvCxnSpPr>
-        <p:spPr>
-          <a:xfrm flipV="1">
-            <a:off x="4800600.0" y="2091690.0"/>
-            <a:ext cx="45720.0" cy="22860.0"/>
-          </a:xfrm>
-          <a:prstGeom prst="line">
-            <a:avLst/>
-          </a:prstGeom>
-          <a:ln w="25400">
-            <a:solidFill>
-              <a:srgbClr val="00C8FF"/>
-            </a:solidFill>
-          </a:ln>
-        </p:spPr>
-        <p:style>
-          <a:lnRef idx="2">
-            <a:schemeClr val="accent1"/>
-          </a:lnRef>
-          <a:fillRef idx="0">
-            <a:schemeClr val="accent1"/>
-          </a:fillRef>
-          <a:effectRef idx="1">
-            <a:schemeClr val="accent1"/>
-          </a:effectRef>
-          <a:fontRef idx="minor">
-            <a:schemeClr val="tx1"/>
-          </a:fontRef>
-        </p:style>
-      </p:cxnSp>
-      <p:cxnSp>
-        <p:nvCxnSpPr>
-          <p:cNvPr id="17" name="Connector 16"/>
-          <p:cNvCxnSpPr/>
-          <p:nvPr/>
-        </p:nvCxnSpPr>
-        <p:spPr>
-          <a:xfrm flipV="1">
-            <a:off x="4846320.0" y="2068830.0"/>
-            <a:ext cx="45720.0" cy="22860.0"/>
-          </a:xfrm>
-          <a:prstGeom prst="line">
-            <a:avLst/>
-          </a:prstGeom>
-          <a:ln w="25400">
-            <a:solidFill>
-              <a:srgbClr val="00C8FF"/>
-            </a:solidFill>
-          </a:ln>
-        </p:spPr>
-        <p:style>
-          <a:lnRef idx="2">
-            <a:schemeClr val="accent1"/>
-          </a:lnRef>
-          <a:fillRef idx="0">
-            <a:schemeClr val="accent1"/>
-          </a:fillRef>
-          <a:effectRef idx="1">
-            <a:schemeClr val="accent1"/>
-          </a:effectRef>
-          <a:fontRef idx="minor">
-            <a:schemeClr val="tx1"/>
-          </a:fontRef>
-        </p:style>
-      </p:cxnSp>
-      <p:cxnSp>
-        <p:nvCxnSpPr>
-          <p:cNvPr id="18" name="Connector 17"/>
-          <p:cNvCxnSpPr/>
-          <p:nvPr/>
-        </p:nvCxnSpPr>
-        <p:spPr>
-          <a:xfrm flipV="1">
-            <a:off x="4892040.0" y="2045970.0"/>
-            <a:ext cx="45720.0" cy="22860.0"/>
-          </a:xfrm>
-          <a:prstGeom prst="line">
-            <a:avLst/>
-          </a:prstGeom>
-          <a:ln w="25400">
-            <a:solidFill>
-              <a:srgbClr val="00C8FF"/>
-            </a:solidFill>
-          </a:ln>
-        </p:spPr>
-        <p:style>
-          <a:lnRef idx="2">
-            <a:schemeClr val="accent1"/>
-          </a:lnRef>
-          <a:fillRef idx="0">
-            <a:schemeClr val="accent1"/>
-          </a:fillRef>
-          <a:effectRef idx="1">
-            <a:schemeClr val="accent1"/>
-          </a:effectRef>
-          <a:fontRef idx="minor">
-            <a:schemeClr val="tx1"/>
-          </a:fontRef>
-        </p:style>
-      </p:cxnSp>
-      <p:cxnSp>
-        <p:nvCxnSpPr>
-          <p:cNvPr id="19" name="Connector 18"/>
-          <p:cNvCxnSpPr/>
-          <p:nvPr/>
-        </p:nvCxnSpPr>
-        <p:spPr>
-          <a:xfrm flipV="1">
-            <a:off x="4937760.0" y="2023110.0"/>
-            <a:ext cx="45720.0" cy="22860.0"/>
-          </a:xfrm>
-          <a:prstGeom prst="line">
-            <a:avLst/>
-          </a:prstGeom>
-          <a:ln w="25400">
-            <a:solidFill>
-              <a:srgbClr val="00C8FF"/>
-            </a:solidFill>
-          </a:ln>
-        </p:spPr>
-        <p:style>
-          <a:lnRef idx="2">
-            <a:schemeClr val="accent1"/>
-          </a:lnRef>
-          <a:fillRef idx="0">
-            <a:schemeClr val="accent1"/>
-          </a:fillRef>
-          <a:effectRef idx="1">
-            <a:schemeClr val="accent1"/>
-          </a:effectRef>
-          <a:fontRef idx="minor">
-            <a:schemeClr val="tx1"/>
-          </a:fontRef>
-        </p:style>
-      </p:cxnSp>
-      <p:cxnSp>
-        <p:nvCxnSpPr>
-          <p:cNvPr id="20" name="Connector 19"/>
-          <p:cNvCxnSpPr/>
-          <p:nvPr/>
-        </p:nvCxnSpPr>
-        <p:spPr>
-          <a:xfrm flipV="1">
-            <a:off x="4983480.0" y="2000250.0"/>
-            <a:ext cx="45720.0" cy="22860.0"/>
-          </a:xfrm>
-          <a:prstGeom prst="line">
-            <a:avLst/>
-          </a:prstGeom>
-          <a:ln w="25400">
-            <a:solidFill>
-              <a:srgbClr val="00C8FF"/>
-            </a:solidFill>
-          </a:ln>
-        </p:spPr>
-        <p:style>
-          <a:lnRef idx="2">
-            <a:schemeClr val="accent1"/>
-          </a:lnRef>
-          <a:fillRef idx="0">
-            <a:schemeClr val="accent1"/>
-          </a:fillRef>
-          <a:effectRef idx="1">
-            <a:schemeClr val="accent1"/>
-          </a:effectRef>
-          <a:fontRef idx="minor">
-            <a:schemeClr val="tx1"/>
-          </a:fontRef>
-        </p:style>
-      </p:cxnSp>
-      <p:cxnSp>
-        <p:nvCxnSpPr>
-          <p:cNvPr id="21" name="Connector 20"/>
-          <p:cNvCxnSpPr/>
-          <p:nvPr/>
-        </p:nvCxnSpPr>
-        <p:spPr>
-          <a:xfrm flipV="1">
-            <a:off x="5029200.0" y="1977390.0"/>
-            <a:ext cx="45720.0" cy="22860.0"/>
-          </a:xfrm>
-          <a:prstGeom prst="line">
-            <a:avLst/>
-          </a:prstGeom>
-          <a:ln w="25400">
-            <a:solidFill>
-              <a:srgbClr val="00C8FF"/>
-            </a:solidFill>
-          </a:ln>
-        </p:spPr>
-        <p:style>
-          <a:lnRef idx="2">
-            <a:schemeClr val="accent1"/>
-          </a:lnRef>
-          <a:fillRef idx="0">
-            <a:schemeClr val="accent1"/>
-          </a:fillRef>
-          <a:effectRef idx="1">
-            <a:schemeClr val="accent1"/>
-          </a:effectRef>
-          <a:fontRef idx="minor">
-            <a:schemeClr val="tx1"/>
-          </a:fontRef>
-        </p:style>
-      </p:cxnSp>
-      <p:cxnSp>
-        <p:nvCxnSpPr>
-          <p:cNvPr id="22" name="Connector 21"/>
-          <p:cNvCxnSpPr/>
-          <p:nvPr/>
-        </p:nvCxnSpPr>
-        <p:spPr>
-          <a:xfrm flipV="1">
-            <a:off x="5074920.0" y="1954530.0"/>
-            <a:ext cx="45720.0" cy="22860.0"/>
-          </a:xfrm>
-          <a:prstGeom prst="line">
-            <a:avLst/>
-          </a:prstGeom>
-          <a:ln w="25400">
-            <a:solidFill>
-              <a:srgbClr val="00C8FF"/>
-            </a:solidFill>
-          </a:ln>
-        </p:spPr>
-        <p:style>
-          <a:lnRef idx="2">
-            <a:schemeClr val="accent1"/>
-          </a:lnRef>
-          <a:fillRef idx="0">
-            <a:schemeClr val="accent1"/>
-          </a:fillRef>
-          <a:effectRef idx="1">
-            <a:schemeClr val="accent1"/>
-          </a:effectRef>
-          <a:fontRef idx="minor">
-            <a:schemeClr val="tx1"/>
-          </a:fontRef>
-        </p:style>
-      </p:cxnSp>
-      <p:cxnSp>
-        <p:nvCxnSpPr>
-          <p:cNvPr id="23" name="Connector 22"/>
-          <p:cNvCxnSpPr/>
-          <p:nvPr/>
-        </p:nvCxnSpPr>
-        <p:spPr>
-          <a:xfrm flipV="1">
-            <a:off x="5120640.0" y="1931670.0"/>
-            <a:ext cx="45720.0" cy="22860.0"/>
-          </a:xfrm>
-          <a:prstGeom prst="line">
-            <a:avLst/>
-          </a:prstGeom>
-          <a:ln w="25400">
-            <a:solidFill>
-              <a:srgbClr val="00C8FF"/>
-            </a:solidFill>
-          </a:ln>
-        </p:spPr>
-        <p:style>
-          <a:lnRef idx="2">
-            <a:schemeClr val="accent1"/>
-          </a:lnRef>
-          <a:fillRef idx="0">
-            <a:schemeClr val="accent1"/>
-          </a:fillRef>
-          <a:effectRef idx="1">
-            <a:schemeClr val="accent1"/>
-          </a:effectRef>
-          <a:fontRef idx="minor">
-            <a:schemeClr val="tx1"/>
-          </a:fontRef>
-        </p:style>
-      </p:cxnSp>
-      <p:cxnSp>
-        <p:nvCxnSpPr>
-          <p:cNvPr id="24" name="Connector 23"/>
-          <p:cNvCxnSpPr/>
-          <p:nvPr/>
-        </p:nvCxnSpPr>
-        <p:spPr>
-          <a:xfrm flipV="1">
-            <a:off x="5166360.0" y="1908810.0"/>
-            <a:ext cx="45720.0" cy="22860.0"/>
-          </a:xfrm>
-          <a:prstGeom prst="line">
-            <a:avLst/>
-          </a:prstGeom>
-          <a:ln w="25400">
-            <a:solidFill>
-              <a:srgbClr val="00C8FF"/>
-            </a:solidFill>
-          </a:ln>
-        </p:spPr>
-        <p:style>
-          <a:lnRef idx="2">
-            <a:schemeClr val="accent1"/>
-          </a:lnRef>
-          <a:fillRef idx="0">
-            <a:schemeClr val="accent1"/>
-          </a:fillRef>
-          <a:effectRef idx="1">
-            <a:schemeClr val="accent1"/>
-          </a:effectRef>
-          <a:fontRef idx="minor">
-            <a:schemeClr val="tx1"/>
-          </a:fontRef>
-        </p:style>
-      </p:cxnSp>
-      <p:cxnSp>
-        <p:nvCxnSpPr>
-          <p:cNvPr id="25" name="Connector 24"/>
-          <p:cNvCxnSpPr/>
-          <p:nvPr/>
-        </p:nvCxnSpPr>
-        <p:spPr>
-          <a:xfrm flipV="1">
-            <a:off x="5212080.0" y="1885950.0"/>
-            <a:ext cx="45720.0" cy="22860.0"/>
-          </a:xfrm>
-          <a:prstGeom prst="line">
-            <a:avLst/>
-          </a:prstGeom>
-          <a:ln w="25400">
-            <a:solidFill>
-              <a:srgbClr val="00C8FF"/>
-            </a:solidFill>
-          </a:ln>
-        </p:spPr>
-        <p:style>
-          <a:lnRef idx="2">
-            <a:schemeClr val="accent1"/>
-          </a:lnRef>
-          <a:fillRef idx="0">
-            <a:schemeClr val="accent1"/>
-          </a:fillRef>
-          <a:effectRef idx="1">
-            <a:schemeClr val="accent1"/>
-          </a:effectRef>
-          <a:fontRef idx="minor">
-            <a:schemeClr val="tx1"/>
-          </a:fontRef>
-        </p:style>
-      </p:cxnSp>
-      <p:cxnSp>
-        <p:nvCxnSpPr>
-          <p:cNvPr id="26" name="Connector 25"/>
-          <p:cNvCxnSpPr/>
-          <p:nvPr/>
-        </p:nvCxnSpPr>
-        <p:spPr>
-          <a:xfrm flipV="1">
-            <a:off x="5257800.0" y="1863090.0"/>
-            <a:ext cx="45720.0" cy="22860.0"/>
-          </a:xfrm>
-          <a:prstGeom prst="line">
-            <a:avLst/>
-          </a:prstGeom>
-          <a:ln w="25400">
-            <a:solidFill>
-              <a:srgbClr val="00C8FF"/>
-            </a:solidFill>
-          </a:ln>
-        </p:spPr>
-        <p:style>
-          <a:lnRef idx="2">
-            <a:schemeClr val="accent1"/>
-          </a:lnRef>
-          <a:fillRef idx="0">
-            <a:schemeClr val="accent1"/>
-          </a:fillRef>
-          <a:effectRef idx="1">
-            <a:schemeClr val="accent1"/>
-          </a:effectRef>
-          <a:fontRef idx="minor">
-            <a:schemeClr val="tx1"/>
-          </a:fontRef>
-        </p:style>
-      </p:cxnSp>
-      <p:cxnSp>
-        <p:nvCxnSpPr>
-          <p:cNvPr id="27" name="Connector 26"/>
-          <p:cNvCxnSpPr/>
-          <p:nvPr/>
-        </p:nvCxnSpPr>
-        <p:spPr>
-          <a:xfrm flipV="1">
-            <a:off x="5303520.0" y="1840230.0"/>
-            <a:ext cx="45720.0" cy="22860.0"/>
-          </a:xfrm>
-          <a:prstGeom prst="line">
-            <a:avLst/>
-          </a:prstGeom>
-          <a:ln w="25400">
-            <a:solidFill>
-              <a:srgbClr val="00C8FF"/>
-            </a:solidFill>
-          </a:ln>
-        </p:spPr>
-        <p:style>
-          <a:lnRef idx="2">
-            <a:schemeClr val="accent1"/>
-          </a:lnRef>
-          <a:fillRef idx="0">
-            <a:schemeClr val="accent1"/>
-          </a:fillRef>
-          <a:effectRef idx="1">
-            <a:schemeClr val="accent1"/>
-          </a:effectRef>
-          <a:fontRef idx="minor">
-            <a:schemeClr val="tx1"/>
-          </a:fontRef>
-        </p:style>
-      </p:cxnSp>
-      <p:cxnSp>
-        <p:nvCxnSpPr>
-          <p:cNvPr id="28" name="Connector 27"/>
-          <p:cNvCxnSpPr/>
-          <p:nvPr/>
-        </p:nvCxnSpPr>
-        <p:spPr>
-          <a:xfrm flipV="1">
-            <a:off x="5349240.0" y="1817370.0"/>
-            <a:ext cx="45720.0" cy="22860.0"/>
-          </a:xfrm>
-          <a:prstGeom prst="line">
-            <a:avLst/>
-          </a:prstGeom>
-          <a:ln w="25400">
-            <a:solidFill>
-              <a:srgbClr val="00C8FF"/>
-            </a:solidFill>
-          </a:ln>
-        </p:spPr>
-        <p:style>
-          <a:lnRef idx="2">
-            <a:schemeClr val="accent1"/>
-          </a:lnRef>
-          <a:fillRef idx="0">
-            <a:schemeClr val="accent1"/>
-          </a:fillRef>
-          <a:effectRef idx="1">
-            <a:schemeClr val="accent1"/>
-          </a:effectRef>
-          <a:fontRef idx="minor">
-            <a:schemeClr val="tx1"/>
-          </a:fontRef>
-        </p:style>
-      </p:cxnSp>
-      <p:cxnSp>
-        <p:nvCxnSpPr>
-          <p:cNvPr id="29" name="Connector 28"/>
-          <p:cNvCxnSpPr/>
-          <p:nvPr/>
-        </p:nvCxnSpPr>
-        <p:spPr>
-          <a:xfrm flipV="1">
-            <a:off x="5394960.0" y="1794510.0"/>
-            <a:ext cx="45720.0" cy="22860.0"/>
-          </a:xfrm>
-          <a:prstGeom prst="line">
-            <a:avLst/>
-          </a:prstGeom>
-          <a:ln w="25400">
-            <a:solidFill>
-              <a:srgbClr val="00C8FF"/>
-            </a:solidFill>
-          </a:ln>
-        </p:spPr>
-        <p:style>
-          <a:lnRef idx="2">
-            <a:schemeClr val="accent1"/>
-          </a:lnRef>
-          <a:fillRef idx="0">
-            <a:schemeClr val="accent1"/>
-          </a:fillRef>
-          <a:effectRef idx="1">
-            <a:schemeClr val="accent1"/>
-          </a:effectRef>
-          <a:fontRef idx="minor">
-            <a:schemeClr val="tx1"/>
-          </a:fontRef>
-        </p:style>
-      </p:cxnSp>
-      <p:cxnSp>
-        <p:nvCxnSpPr>
-          <p:cNvPr id="30" name="Connector 29"/>
-          <p:cNvCxnSpPr/>
-          <p:nvPr/>
-        </p:nvCxnSpPr>
-        <p:spPr>
-          <a:xfrm flipV="1">
-            <a:off x="5440680.0" y="1771650.0"/>
-            <a:ext cx="45720.0" cy="22860.0"/>
-          </a:xfrm>
-          <a:prstGeom prst="line">
-            <a:avLst/>
-          </a:prstGeom>
-          <a:ln w="25400">
-            <a:solidFill>
-              <a:srgbClr val="00C8FF"/>
-            </a:solidFill>
-          </a:ln>
-        </p:spPr>
-        <p:style>
-          <a:lnRef idx="2">
-            <a:schemeClr val="accent1"/>
-          </a:lnRef>
-          <a:fillRef idx="0">
-            <a:schemeClr val="accent1"/>
-          </a:fillRef>
-          <a:effectRef idx="1">
-            <a:schemeClr val="accent1"/>
-          </a:effectRef>
-          <a:fontRef idx="minor">
-            <a:schemeClr val="tx1"/>
-          </a:fontRef>
-        </p:style>
-      </p:cxnSp>
-      <p:cxnSp>
-        <p:nvCxnSpPr>
-          <p:cNvPr id="31" name="Connector 30"/>
-          <p:cNvCxnSpPr/>
-          <p:nvPr/>
-        </p:nvCxnSpPr>
-        <p:spPr>
-          <a:xfrm flipV="1">
-            <a:off x="5486400.0" y="1748790.0"/>
-            <a:ext cx="45720.0" cy="22860.0"/>
-          </a:xfrm>
-          <a:prstGeom prst="line">
-            <a:avLst/>
-          </a:prstGeom>
-          <a:ln w="25400">
-            <a:solidFill>
-              <a:srgbClr val="00C8FF"/>
-            </a:solidFill>
-          </a:ln>
-        </p:spPr>
-        <p:style>
-          <a:lnRef idx="2">
-            <a:schemeClr val="accent1"/>
-          </a:lnRef>
-          <a:fillRef idx="0">
-            <a:schemeClr val="accent1"/>
-          </a:fillRef>
-          <a:effectRef idx="1">
-            <a:schemeClr val="accent1"/>
-          </a:effectRef>
-          <a:fontRef idx="minor">
-            <a:schemeClr val="tx1"/>
-          </a:fontRef>
-        </p:style>
-      </p:cxnSp>
-      <p:cxnSp>
-        <p:nvCxnSpPr>
-          <p:cNvPr id="32" name="Connector 31"/>
-          <p:cNvCxnSpPr/>
-          <p:nvPr/>
-        </p:nvCxnSpPr>
-        <p:spPr>
-          <a:xfrm flipV="1">
-            <a:off x="5532120.0" y="1725930.0"/>
-            <a:ext cx="45720.0" cy="22860.0"/>
-          </a:xfrm>
-          <a:prstGeom prst="line">
-            <a:avLst/>
-          </a:prstGeom>
-          <a:ln w="25400">
-            <a:solidFill>
-              <a:srgbClr val="00C8FF"/>
-            </a:solidFill>
-          </a:ln>
-        </p:spPr>
-        <p:style>
-          <a:lnRef idx="2">
-            <a:schemeClr val="accent1"/>
-          </a:lnRef>
-          <a:fillRef idx="0">
-            <a:schemeClr val="accent1"/>
-          </a:fillRef>
-          <a:effectRef idx="1">
-            <a:schemeClr val="accent1"/>
-          </a:effectRef>
-          <a:fontRef idx="minor">
-            <a:schemeClr val="tx1"/>
-          </a:fontRef>
-        </p:style>
-      </p:cxnSp>
-      <p:cxnSp>
-        <p:nvCxnSpPr>
-          <p:cNvPr id="33" name="Connector 32"/>
-          <p:cNvCxnSpPr/>
-          <p:nvPr/>
-        </p:nvCxnSpPr>
-        <p:spPr>
-          <a:xfrm flipV="1">
-            <a:off x="5577840.0" y="1703070.0"/>
-            <a:ext cx="45720.0" cy="22860.0"/>
-          </a:xfrm>
-          <a:prstGeom prst="line">
-            <a:avLst/>
-          </a:prstGeom>
-          <a:ln w="25400">
-            <a:solidFill>
-              <a:srgbClr val="00C8FF"/>
-            </a:solidFill>
-          </a:ln>
-        </p:spPr>
-        <p:style>
-          <a:lnRef idx="2">
-            <a:schemeClr val="accent1"/>
-          </a:lnRef>
-          <a:fillRef idx="0">
-            <a:schemeClr val="accent1"/>
-          </a:fillRef>
-          <a:effectRef idx="1">
-            <a:schemeClr val="accent1"/>
-          </a:effectRef>
-          <a:fontRef idx="minor">
-            <a:schemeClr val="tx1"/>
-          </a:fontRef>
-        </p:style>
-      </p:cxnSp>
-      <p:cxnSp>
-        <p:nvCxnSpPr>
-          <p:cNvPr id="34" name="Connector 33"/>
-          <p:cNvCxnSpPr/>
-          <p:nvPr/>
-        </p:nvCxnSpPr>
-        <p:spPr>
-          <a:xfrm flipV="1">
-            <a:off x="5623560.0" y="1689354.0"/>
-            <a:ext cx="45720.0" cy="13716.0"/>
-          </a:xfrm>
-          <a:prstGeom prst="line">
-            <a:avLst/>
-          </a:prstGeom>
-          <a:ln w="25400">
-            <a:solidFill>
-              <a:srgbClr val="00C8FF"/>
-            </a:solidFill>
-          </a:ln>
-        </p:spPr>
-        <p:style>
-          <a:lnRef idx="2">
-            <a:schemeClr val="accent1"/>
-          </a:lnRef>
-          <a:fillRef idx="0">
-            <a:schemeClr val="accent1"/>
-          </a:fillRef>
-          <a:effectRef idx="1">
-            <a:schemeClr val="accent1"/>
-          </a:effectRef>
-          <a:fontRef idx="minor">
-            <a:schemeClr val="tx1"/>
-          </a:fontRef>
-        </p:style>
-      </p:cxnSp>
-      <p:cxnSp>
-        <p:nvCxnSpPr>
-          <p:cNvPr id="35" name="Connector 34"/>
-          <p:cNvCxnSpPr/>
-          <p:nvPr/>
-        </p:nvCxnSpPr>
-        <p:spPr>
-          <a:xfrm flipV="1">
-            <a:off x="5669280.0" y="1675638.0"/>
-            <a:ext cx="45720.0" cy="13716.0"/>
-          </a:xfrm>
-          <a:prstGeom prst="line">
-            <a:avLst/>
-          </a:prstGeom>
-          <a:ln w="25400">
-            <a:solidFill>
-              <a:srgbClr val="00C8FF"/>
-            </a:solidFill>
-          </a:ln>
-        </p:spPr>
-        <p:style>
-          <a:lnRef idx="2">
-            <a:schemeClr val="accent1"/>
-          </a:lnRef>
-          <a:fillRef idx="0">
-            <a:schemeClr val="accent1"/>
-          </a:fillRef>
-          <a:effectRef idx="1">
-            <a:schemeClr val="accent1"/>
-          </a:effectRef>
-          <a:fontRef idx="minor">
-            <a:schemeClr val="tx1"/>
-          </a:fontRef>
-        </p:style>
-      </p:cxnSp>
-      <p:cxnSp>
-        <p:nvCxnSpPr>
-          <p:cNvPr id="36" name="Connector 35"/>
-          <p:cNvCxnSpPr/>
-          <p:nvPr/>
-        </p:nvCxnSpPr>
-        <p:spPr>
-          <a:xfrm flipV="1">
-            <a:off x="5715000.0" y="1661922.0"/>
-            <a:ext cx="45720.0" cy="13716.0"/>
-          </a:xfrm>
-          <a:prstGeom prst="line">
-            <a:avLst/>
-          </a:prstGeom>
-          <a:ln w="25400">
-            <a:solidFill>
-              <a:srgbClr val="00C8FF"/>
-            </a:solidFill>
-          </a:ln>
-        </p:spPr>
-        <p:style>
-          <a:lnRef idx="2">
-            <a:schemeClr val="accent1"/>
-          </a:lnRef>
-          <a:fillRef idx="0">
-            <a:schemeClr val="accent1"/>
-          </a:fillRef>
-          <a:effectRef idx="1">
-            <a:schemeClr val="accent1"/>
-          </a:effectRef>
-          <a:fontRef idx="minor">
-            <a:schemeClr val="tx1"/>
-          </a:fontRef>
-        </p:style>
-      </p:cxnSp>
-      <p:cxnSp>
-        <p:nvCxnSpPr>
-          <p:cNvPr id="37" name="Connector 36"/>
-          <p:cNvCxnSpPr/>
-          <p:nvPr/>
-        </p:nvCxnSpPr>
-        <p:spPr>
-          <a:xfrm flipV="1">
-            <a:off x="5760720.0" y="1648206.0"/>
-            <a:ext cx="45720.0" cy="13716.0"/>
-          </a:xfrm>
-          <a:prstGeom prst="line">
-            <a:avLst/>
-          </a:prstGeom>
-          <a:ln w="25400">
-            <a:solidFill>
-              <a:srgbClr val="00C8FF"/>
-            </a:solidFill>
-          </a:ln>
-        </p:spPr>
-        <p:style>
-          <a:lnRef idx="2">
-            <a:schemeClr val="accent1"/>
-          </a:lnRef>
-          <a:fillRef idx="0">
-            <a:schemeClr val="accent1"/>
-          </a:fillRef>
-          <a:effectRef idx="1">
-            <a:schemeClr val="accent1"/>
-          </a:effectRef>
-          <a:fontRef idx="minor">
-            <a:schemeClr val="tx1"/>
-          </a:fontRef>
-        </p:style>
-      </p:cxnSp>
-      <p:cxnSp>
-        <p:nvCxnSpPr>
-          <p:cNvPr id="38" name="Connector 37"/>
-          <p:cNvCxnSpPr/>
-          <p:nvPr/>
-        </p:nvCxnSpPr>
-        <p:spPr>
-          <a:xfrm flipV="1">
-            <a:off x="5806440.0" y="1634490.0"/>
-            <a:ext cx="45720.0" cy="13716.0"/>
-          </a:xfrm>
-          <a:prstGeom prst="line">
-            <a:avLst/>
-          </a:prstGeom>
-          <a:ln w="25400">
-            <a:solidFill>
-              <a:srgbClr val="00C8FF"/>
-            </a:solidFill>
-          </a:ln>
-        </p:spPr>
-        <p:style>
-          <a:lnRef idx="2">
-            <a:schemeClr val="accent1"/>
-          </a:lnRef>
-          <a:fillRef idx="0">
-            <a:schemeClr val="accent1"/>
-          </a:fillRef>
-          <a:effectRef idx="1">
-            <a:schemeClr val="accent1"/>
-          </a:effectRef>
-          <a:fontRef idx="minor">
-            <a:schemeClr val="tx1"/>
-          </a:fontRef>
-        </p:style>
-      </p:cxnSp>
-      <p:cxnSp>
-        <p:nvCxnSpPr>
-          <p:cNvPr id="39" name="Connector 38"/>
-          <p:cNvCxnSpPr/>
-          <p:nvPr/>
-        </p:nvCxnSpPr>
-        <p:spPr>
-          <a:xfrm flipV="1">
-            <a:off x="5852160.0" y="1625346.0"/>
-            <a:ext cx="45720.0" cy="9144.0"/>
-          </a:xfrm>
-          <a:prstGeom prst="line">
-            <a:avLst/>
-          </a:prstGeom>
-          <a:ln w="25400">
-            <a:solidFill>
-              <a:srgbClr val="00C8FF"/>
-            </a:solidFill>
-          </a:ln>
-        </p:spPr>
-        <p:style>
-          <a:lnRef idx="2">
-            <a:schemeClr val="accent1"/>
-          </a:lnRef>
-          <a:fillRef idx="0">
-            <a:schemeClr val="accent1"/>
-          </a:fillRef>
-          <a:effectRef idx="1">
-            <a:schemeClr val="accent1"/>
-          </a:effectRef>
-          <a:fontRef idx="minor">
-            <a:schemeClr val="tx1"/>
-          </a:fontRef>
-        </p:style>
-      </p:cxnSp>
-      <p:cxnSp>
-        <p:nvCxnSpPr>
-          <p:cNvPr id="40" name="Connector 39"/>
-          <p:cNvCxnSpPr/>
-          <p:nvPr/>
-        </p:nvCxnSpPr>
-        <p:spPr>
-          <a:xfrm flipV="1">
-            <a:off x="5897880.0" y="1616202.0"/>
-            <a:ext cx="45720.0" cy="9144.0"/>
-          </a:xfrm>
-          <a:prstGeom prst="line">
-            <a:avLst/>
-          </a:prstGeom>
-          <a:ln w="25400">
-            <a:solidFill>
-              <a:srgbClr val="00C8FF"/>
-            </a:solidFill>
-          </a:ln>
-        </p:spPr>
-        <p:style>
-          <a:lnRef idx="2">
-            <a:schemeClr val="accent1"/>
-          </a:lnRef>
-          <a:fillRef idx="0">
-            <a:schemeClr val="accent1"/>
-          </a:fillRef>
-          <a:effectRef idx="1">
-            <a:schemeClr val="accent1"/>
-          </a:effectRef>
-          <a:fontRef idx="minor">
-            <a:schemeClr val="tx1"/>
-          </a:fontRef>
-        </p:style>
-      </p:cxnSp>
-      <p:cxnSp>
-        <p:nvCxnSpPr>
-          <p:cNvPr id="41" name="Connector 40"/>
-          <p:cNvCxnSpPr/>
-          <p:nvPr/>
-        </p:nvCxnSpPr>
-        <p:spPr>
-          <a:xfrm flipV="1">
-            <a:off x="5943600.0" y="1611630.0"/>
-            <a:ext cx="45720.0" cy="4572.0"/>
-          </a:xfrm>
-          <a:prstGeom prst="line">
-            <a:avLst/>
-          </a:prstGeom>
-          <a:ln w="25400">
-            <a:solidFill>
-              <a:srgbClr val="00C8FF"/>
-            </a:solidFill>
-          </a:ln>
-        </p:spPr>
-        <p:style>
-          <a:lnRef idx="2">
-            <a:schemeClr val="accent1"/>
-          </a:lnRef>
-          <a:fillRef idx="0">
-            <a:schemeClr val="accent1"/>
-          </a:fillRef>
-          <a:effectRef idx="1">
-            <a:schemeClr val="accent1"/>
-          </a:effectRef>
-          <a:fontRef idx="minor">
-            <a:schemeClr val="tx1"/>
-          </a:fontRef>
-        </p:style>
-      </p:cxnSp>
-      <p:cxnSp>
-        <p:nvCxnSpPr>
-          <p:cNvPr id="42" name="Connector 41"/>
-          <p:cNvCxnSpPr/>
-          <p:nvPr/>
-        </p:nvCxnSpPr>
+        </p:nvSpPr>
         <p:spPr>
           <a:xfrm>
-            <a:off x="5989320.0" y="1611630.0"/>
-            <a:ext cx="45720.0" cy="0.0"/>
+            <a:off x="5257800" y="1748799"/>
+            <a:ext cx="452628" cy="91431"/>
           </a:xfrm>
-          <a:prstGeom prst="line">
+          <a:custGeom>
             <a:avLst/>
-          </a:prstGeom>
-          <a:ln w="25400">
+            <a:gdLst/>
+            <a:ahLst/>
+            <a:cxnLst/>
+            <a:rect l="l" t="t" r="r" b="b"/>
+            <a:pathLst>
+              <a:path w="452628" h="91431">
+                <a:moveTo>
+                  <a:pt x="0" y="91431"/>
+                </a:moveTo>
+                <a:lnTo>
+                  <a:pt x="6235" y="88933"/>
+                </a:lnTo>
+                <a:close/>
+                <a:lnTo>
+                  <a:pt x="12469" y="86439"/>
+                </a:lnTo>
+                <a:close/>
+                <a:lnTo>
+                  <a:pt x="18704" y="83947"/>
+                </a:lnTo>
+                <a:close/>
+                <a:lnTo>
+                  <a:pt x="24938" y="81457"/>
+                </a:lnTo>
+                <a:close/>
+                <a:lnTo>
+                  <a:pt x="31173" y="78966"/>
+                </a:lnTo>
+                <a:close/>
+                <a:lnTo>
+                  <a:pt x="37407" y="76473"/>
+                </a:lnTo>
+                <a:close/>
+                <a:lnTo>
+                  <a:pt x="43642" y="73976"/>
+                </a:lnTo>
+                <a:close/>
+                <a:lnTo>
+                  <a:pt x="49876" y="71475"/>
+                </a:lnTo>
+                <a:close/>
+                <a:lnTo>
+                  <a:pt x="56111" y="68973"/>
+                </a:lnTo>
+                <a:close/>
+                <a:lnTo>
+                  <a:pt x="62345" y="66479"/>
+                </a:lnTo>
+                <a:close/>
+                <a:lnTo>
+                  <a:pt x="68580" y="63999"/>
+                </a:lnTo>
+                <a:close/>
+                <a:lnTo>
+                  <a:pt x="74815" y="61536"/>
+                </a:lnTo>
+                <a:close/>
+                <a:lnTo>
+                  <a:pt x="81049" y="59066"/>
+                </a:lnTo>
+                <a:close/>
+                <a:lnTo>
+                  <a:pt x="87284" y="56560"/>
+                </a:lnTo>
+                <a:close/>
+                <a:lnTo>
+                  <a:pt x="93518" y="53990"/>
+                </a:lnTo>
+                <a:close/>
+                <a:lnTo>
+                  <a:pt x="99753" y="51379"/>
+                </a:lnTo>
+                <a:close/>
+                <a:lnTo>
+                  <a:pt x="105987" y="48828"/>
+                </a:lnTo>
+                <a:close/>
+                <a:lnTo>
+                  <a:pt x="112222" y="46448"/>
+                </a:lnTo>
+                <a:close/>
+                <a:lnTo>
+                  <a:pt x="118456" y="44335"/>
+                </a:lnTo>
+                <a:close/>
+                <a:lnTo>
+                  <a:pt x="124691" y="42449"/>
+                </a:lnTo>
+                <a:close/>
+                <a:lnTo>
+                  <a:pt x="130925" y="40665"/>
+                </a:lnTo>
+                <a:close/>
+                <a:lnTo>
+                  <a:pt x="137160" y="38853"/>
+                </a:lnTo>
+                <a:close/>
+                <a:lnTo>
+                  <a:pt x="143395" y="36927"/>
+                </a:lnTo>
+                <a:close/>
+                <a:lnTo>
+                  <a:pt x="149629" y="34972"/>
+                </a:lnTo>
+                <a:close/>
+                <a:lnTo>
+                  <a:pt x="155864" y="33116"/>
+                </a:lnTo>
+                <a:close/>
+                <a:lnTo>
+                  <a:pt x="162098" y="31483"/>
+                </a:lnTo>
+                <a:close/>
+                <a:lnTo>
+                  <a:pt x="168333" y="30114"/>
+                </a:lnTo>
+                <a:close/>
+                <a:lnTo>
+                  <a:pt x="174567" y="28920"/>
+                </a:lnTo>
+                <a:close/>
+                <a:lnTo>
+                  <a:pt x="180802" y="27798"/>
+                </a:lnTo>
+                <a:close/>
+                <a:lnTo>
+                  <a:pt x="187036" y="26652"/>
+                </a:lnTo>
+                <a:close/>
+                <a:lnTo>
+                  <a:pt x="193271" y="25445"/>
+                </a:lnTo>
+                <a:close/>
+                <a:lnTo>
+                  <a:pt x="199505" y="24177"/>
+                </a:lnTo>
+                <a:close/>
+                <a:lnTo>
+                  <a:pt x="205740" y="22851"/>
+                </a:lnTo>
+                <a:close/>
+                <a:lnTo>
+                  <a:pt x="211975" y="21484"/>
+                </a:lnTo>
+                <a:close/>
+                <a:lnTo>
+                  <a:pt x="218209" y="20155"/>
+                </a:lnTo>
+                <a:close/>
+                <a:lnTo>
+                  <a:pt x="224444" y="18958"/>
+                </a:lnTo>
+                <a:close/>
+                <a:lnTo>
+                  <a:pt x="230678" y="17985"/>
+                </a:lnTo>
+                <a:close/>
+                <a:lnTo>
+                  <a:pt x="236913" y="17258"/>
+                </a:lnTo>
+                <a:close/>
+                <a:lnTo>
+                  <a:pt x="243147" y="16686"/>
+                </a:lnTo>
+                <a:close/>
+                <a:lnTo>
+                  <a:pt x="249382" y="16170"/>
+                </a:lnTo>
+                <a:close/>
+                <a:lnTo>
+                  <a:pt x="255617" y="15616"/>
+                </a:lnTo>
+                <a:close/>
+                <a:lnTo>
+                  <a:pt x="261851" y="15003"/>
+                </a:lnTo>
+                <a:close/>
+                <a:lnTo>
+                  <a:pt x="268086" y="14358"/>
+                </a:lnTo>
+                <a:close/>
+                <a:lnTo>
+                  <a:pt x="274320" y="13707"/>
+                </a:lnTo>
+                <a:close/>
+                <a:lnTo>
+                  <a:pt x="280553" y="13072"/>
+                </a:lnTo>
+                <a:close/>
+                <a:lnTo>
+                  <a:pt x="286787" y="12450"/>
+                </a:lnTo>
+                <a:close/>
+                <a:lnTo>
+                  <a:pt x="293022" y="11833"/>
+                </a:lnTo>
+                <a:close/>
+                <a:lnTo>
+                  <a:pt x="299259" y="11214"/>
+                </a:lnTo>
+                <a:close/>
+                <a:lnTo>
+                  <a:pt x="305499" y="10589"/>
+                </a:lnTo>
+                <a:close/>
+                <a:lnTo>
+                  <a:pt x="311735" y="9963"/>
+                </a:lnTo>
+                <a:close/>
+                <a:lnTo>
+                  <a:pt x="317965" y="9341"/>
+                </a:lnTo>
+                <a:close/>
+                <a:lnTo>
+                  <a:pt x="324186" y="8727"/>
+                </a:lnTo>
+                <a:close/>
+                <a:lnTo>
+                  <a:pt x="330405" y="8115"/>
+                </a:lnTo>
+                <a:close/>
+                <a:lnTo>
+                  <a:pt x="336638" y="7493"/>
+                </a:lnTo>
+                <a:close/>
+                <a:lnTo>
+                  <a:pt x="342900" y="6849"/>
+                </a:lnTo>
+                <a:close/>
+                <a:lnTo>
+                  <a:pt x="349195" y="6180"/>
+                </a:lnTo>
+                <a:close/>
+                <a:lnTo>
+                  <a:pt x="355478" y="5521"/>
+                </a:lnTo>
+                <a:close/>
+                <a:lnTo>
+                  <a:pt x="361688" y="4915"/>
+                </a:lnTo>
+                <a:close/>
+                <a:lnTo>
+                  <a:pt x="367770" y="4407"/>
+                </a:lnTo>
+                <a:close/>
+                <a:lnTo>
+                  <a:pt x="373770" y="4003"/>
+                </a:lnTo>
+                <a:close/>
+                <a:lnTo>
+                  <a:pt x="379891" y="3657"/>
+                </a:lnTo>
+                <a:close/>
+                <a:lnTo>
+                  <a:pt x="386353" y="3314"/>
+                </a:lnTo>
+                <a:close/>
+                <a:lnTo>
+                  <a:pt x="393322" y="2928"/>
+                </a:lnTo>
+                <a:close/>
+                <a:lnTo>
+                  <a:pt x="400373" y="2513"/>
+                </a:lnTo>
+                <a:close/>
+                <a:lnTo>
+                  <a:pt x="406697" y="2125"/>
+                </a:lnTo>
+                <a:close/>
+                <a:lnTo>
+                  <a:pt x="411480" y="1820"/>
+                </a:lnTo>
+                <a:close/>
+                <a:lnTo>
+                  <a:pt x="414178" y="1635"/>
+                </a:lnTo>
+                <a:close/>
+                <a:lnTo>
+                  <a:pt x="415336" y="1541"/>
+                </a:lnTo>
+                <a:close/>
+                <a:lnTo>
+                  <a:pt x="415766" y="1489"/>
+                </a:lnTo>
+                <a:close/>
+                <a:lnTo>
+                  <a:pt x="416279" y="1432"/>
+                </a:lnTo>
+                <a:close/>
+                <a:lnTo>
+                  <a:pt x="417299" y="1345"/>
+                </a:lnTo>
+                <a:close/>
+                <a:lnTo>
+                  <a:pt x="418659" y="1238"/>
+                </a:lnTo>
+                <a:close/>
+                <a:lnTo>
+                  <a:pt x="420141" y="1125"/>
+                </a:lnTo>
+                <a:close/>
+                <a:lnTo>
+                  <a:pt x="421540" y="1018"/>
+                </a:lnTo>
+                <a:close/>
+                <a:lnTo>
+                  <a:pt x="422811" y="919"/>
+                </a:lnTo>
+                <a:close/>
+                <a:lnTo>
+                  <a:pt x="424010" y="822"/>
+                </a:lnTo>
+                <a:close/>
+                <a:lnTo>
+                  <a:pt x="425196" y="723"/>
+                </a:lnTo>
+                <a:close/>
+                <a:lnTo>
+                  <a:pt x="426415" y="617"/>
+                </a:lnTo>
+                <a:close/>
+                <a:lnTo>
+                  <a:pt x="427664" y="511"/>
+                </a:lnTo>
+                <a:close/>
+                <a:lnTo>
+                  <a:pt x="428926" y="413"/>
+                </a:lnTo>
+                <a:close/>
+                <a:lnTo>
+                  <a:pt x="430187" y="332"/>
+                </a:lnTo>
+                <a:close/>
+                <a:lnTo>
+                  <a:pt x="431439" y="269"/>
+                </a:lnTo>
+                <a:close/>
+                <a:lnTo>
+                  <a:pt x="432683" y="222"/>
+                </a:lnTo>
+                <a:close/>
+                <a:lnTo>
+                  <a:pt x="433926" y="185"/>
+                </a:lnTo>
+                <a:close/>
+                <a:lnTo>
+                  <a:pt x="435170" y="153"/>
+                </a:lnTo>
+                <a:close/>
+                <a:lnTo>
+                  <a:pt x="436416" y="126"/>
+                </a:lnTo>
+                <a:close/>
+                <a:lnTo>
+                  <a:pt x="437664" y="102"/>
+                </a:lnTo>
+                <a:close/>
+                <a:lnTo>
+                  <a:pt x="438912" y="82"/>
+                </a:lnTo>
+                <a:close/>
+                <a:lnTo>
+                  <a:pt x="440159" y="66"/>
+                </a:lnTo>
+                <a:close/>
+                <a:lnTo>
+                  <a:pt x="441406" y="53"/>
+                </a:lnTo>
+                <a:close/>
+                <a:lnTo>
+                  <a:pt x="442653" y="43"/>
+                </a:lnTo>
+                <a:close/>
+                <a:lnTo>
+                  <a:pt x="443900" y="34"/>
+                </a:lnTo>
+                <a:close/>
+                <a:lnTo>
+                  <a:pt x="445146" y="27"/>
+                </a:lnTo>
+                <a:close/>
+                <a:lnTo>
+                  <a:pt x="446393" y="21"/>
+                </a:lnTo>
+                <a:close/>
+                <a:lnTo>
+                  <a:pt x="447640" y="15"/>
+                </a:lnTo>
+                <a:close/>
+                <a:lnTo>
+                  <a:pt x="448887" y="11"/>
+                </a:lnTo>
+                <a:close/>
+                <a:lnTo>
+                  <a:pt x="450134" y="7"/>
+                </a:lnTo>
+                <a:close/>
+                <a:lnTo>
+                  <a:pt x="451381" y="4"/>
+                </a:lnTo>
+                <a:close/>
+                <a:lnTo>
+                  <a:pt x="452628" y="0"/>
+                </a:lnTo>
+                <a:close/>
+              </a:path>
+            </a:pathLst>
+          </a:custGeom>
+          <a:ln w="19050">
             <a:solidFill>
-              <a:srgbClr val="00C8FF"/>
-            </a:solidFill>
-          </a:ln>
-        </p:spPr>
-        <p:style>
-          <a:lnRef idx="2">
-            <a:schemeClr val="accent1"/>
-          </a:lnRef>
-          <a:fillRef idx="0">
-            <a:schemeClr val="accent1"/>
-          </a:fillRef>
-          <a:effectRef idx="1">
-            <a:schemeClr val="accent1"/>
-          </a:effectRef>
-          <a:fontRef idx="minor">
-            <a:schemeClr val="tx1"/>
-          </a:fontRef>
-        </p:style>
-      </p:cxnSp>
-      <p:cxnSp>
-        <p:nvCxnSpPr>
-          <p:cNvPr id="43" name="Connector 42"/>
-          <p:cNvCxnSpPr/>
-          <p:nvPr/>
-        </p:nvCxnSpPr>
-        <p:spPr>
-          <a:xfrm flipV="1">
-            <a:off x="6035040.0" y="1565910.0"/>
-            <a:ext cx="45720.0" cy="45720.0"/>
-          </a:xfrm>
-          <a:prstGeom prst="line">
-            <a:avLst/>
-          </a:prstGeom>
-          <a:ln w="25400">
-            <a:solidFill>
-              <a:srgbClr val="00C8FF"/>
-            </a:solidFill>
-          </a:ln>
-        </p:spPr>
-        <p:style>
-          <a:lnRef idx="2">
-            <a:schemeClr val="accent1"/>
-          </a:lnRef>
-          <a:fillRef idx="0">
-            <a:schemeClr val="accent1"/>
-          </a:fillRef>
-          <a:effectRef idx="1">
-            <a:schemeClr val="accent1"/>
-          </a:effectRef>
-          <a:fontRef idx="minor">
-            <a:schemeClr val="tx1"/>
-          </a:fontRef>
-        </p:style>
-      </p:cxnSp>
-      <p:cxnSp>
-        <p:nvCxnSpPr>
-          <p:cNvPr id="44" name="Connector 43"/>
-          <p:cNvCxnSpPr/>
-          <p:nvPr/>
-        </p:nvCxnSpPr>
-        <p:spPr>
-          <a:xfrm flipV="1">
-            <a:off x="6080760.0" y="1520190.0"/>
-            <a:ext cx="45720.0" cy="45720.0"/>
-          </a:xfrm>
-          <a:prstGeom prst="line">
-            <a:avLst/>
-          </a:prstGeom>
-          <a:ln w="25400">
-            <a:solidFill>
-              <a:srgbClr val="00C8FF"/>
-            </a:solidFill>
-          </a:ln>
-        </p:spPr>
-        <p:style>
-          <a:lnRef idx="2">
-            <a:schemeClr val="accent1"/>
-          </a:lnRef>
-          <a:fillRef idx="0">
-            <a:schemeClr val="accent1"/>
-          </a:fillRef>
-          <a:effectRef idx="1">
-            <a:schemeClr val="accent1"/>
-          </a:effectRef>
-          <a:fontRef idx="minor">
-            <a:schemeClr val="tx1"/>
-          </a:fontRef>
-        </p:style>
-      </p:cxnSp>
-      <p:cxnSp>
-        <p:nvCxnSpPr>
-          <p:cNvPr id="45" name="Connector 44"/>
-          <p:cNvCxnSpPr/>
-          <p:nvPr/>
-        </p:nvCxnSpPr>
-        <p:spPr>
-          <a:xfrm flipV="1">
-            <a:off x="6126480.0" y="1474470.0"/>
-            <a:ext cx="45720.0" cy="45720.0"/>
-          </a:xfrm>
-          <a:prstGeom prst="line">
-            <a:avLst/>
-          </a:prstGeom>
-          <a:ln w="25400">
-            <a:solidFill>
-              <a:srgbClr val="00C8FF"/>
-            </a:solidFill>
-          </a:ln>
-        </p:spPr>
-        <p:style>
-          <a:lnRef idx="2">
-            <a:schemeClr val="accent1"/>
-          </a:lnRef>
-          <a:fillRef idx="0">
-            <a:schemeClr val="accent1"/>
-          </a:fillRef>
-          <a:effectRef idx="1">
-            <a:schemeClr val="accent1"/>
-          </a:effectRef>
-          <a:fontRef idx="minor">
-            <a:schemeClr val="tx1"/>
-          </a:fontRef>
-        </p:style>
-      </p:cxnSp>
-      <p:cxnSp>
-        <p:nvCxnSpPr>
-          <p:cNvPr id="46" name="Connector 45"/>
-          <p:cNvCxnSpPr/>
-          <p:nvPr/>
-        </p:nvCxnSpPr>
-        <p:spPr>
-          <a:xfrm flipV="1">
-            <a:off x="6172200.0" y="1428750.0"/>
-            <a:ext cx="45720.0" cy="45720.0"/>
-          </a:xfrm>
-          <a:prstGeom prst="line">
-            <a:avLst/>
-          </a:prstGeom>
-          <a:ln w="25400">
-            <a:solidFill>
-              <a:srgbClr val="00C8FF"/>
-            </a:solidFill>
-          </a:ln>
-        </p:spPr>
-        <p:style>
-          <a:lnRef idx="2">
-            <a:schemeClr val="accent1"/>
-          </a:lnRef>
-          <a:fillRef idx="0">
-            <a:schemeClr val="accent1"/>
-          </a:fillRef>
-          <a:effectRef idx="1">
-            <a:schemeClr val="accent1"/>
-          </a:effectRef>
-          <a:fontRef idx="minor">
-            <a:schemeClr val="tx1"/>
-          </a:fontRef>
-        </p:style>
-      </p:cxnSp>
-      <p:cxnSp>
-        <p:nvCxnSpPr>
-          <p:cNvPr id="47" name="Connector 46"/>
-          <p:cNvCxnSpPr/>
-          <p:nvPr/>
-        </p:nvCxnSpPr>
-        <p:spPr>
-          <a:xfrm flipV="1">
-            <a:off x="6217920.0" y="1360170.0"/>
-            <a:ext cx="45720.0" cy="68580.0"/>
-          </a:xfrm>
-          <a:prstGeom prst="line">
-            <a:avLst/>
-          </a:prstGeom>
-          <a:ln w="25400">
-            <a:solidFill>
-              <a:srgbClr val="00C8FF"/>
-            </a:solidFill>
-          </a:ln>
-        </p:spPr>
-        <p:style>
-          <a:lnRef idx="2">
-            <a:schemeClr val="accent1"/>
-          </a:lnRef>
-          <a:fillRef idx="0">
-            <a:schemeClr val="accent1"/>
-          </a:fillRef>
-          <a:effectRef idx="1">
-            <a:schemeClr val="accent1"/>
-          </a:effectRef>
-          <a:fontRef idx="minor">
-            <a:schemeClr val="tx1"/>
-          </a:fontRef>
-        </p:style>
-      </p:cxnSp>
-      <p:cxnSp>
-        <p:nvCxnSpPr>
-          <p:cNvPr id="48" name="Connector 47"/>
-          <p:cNvCxnSpPr/>
-          <p:nvPr/>
-        </p:nvCxnSpPr>
-        <p:spPr>
-          <a:xfrm flipV="1">
-            <a:off x="6263640.0" y="1291590.0"/>
-            <a:ext cx="45720.0" cy="68580.0"/>
-          </a:xfrm>
-          <a:prstGeom prst="line">
-            <a:avLst/>
-          </a:prstGeom>
-          <a:ln w="25400">
-            <a:solidFill>
-              <a:srgbClr val="00C8FF"/>
-            </a:solidFill>
-          </a:ln>
-        </p:spPr>
-        <p:style>
-          <a:lnRef idx="2">
-            <a:schemeClr val="accent1"/>
-          </a:lnRef>
-          <a:fillRef idx="0">
-            <a:schemeClr val="accent1"/>
-          </a:fillRef>
-          <a:effectRef idx="1">
-            <a:schemeClr val="accent1"/>
-          </a:effectRef>
-          <a:fontRef idx="minor">
-            <a:schemeClr val="tx1"/>
-          </a:fontRef>
-        </p:style>
-      </p:cxnSp>
-      <p:cxnSp>
-        <p:nvCxnSpPr>
-          <p:cNvPr id="49" name="Connector 48"/>
-          <p:cNvCxnSpPr/>
-          <p:nvPr/>
-        </p:nvCxnSpPr>
-        <p:spPr>
-          <a:xfrm flipV="1">
-            <a:off x="6309360.0" y="1200150.0"/>
-            <a:ext cx="45720.0" cy="91440.0"/>
-          </a:xfrm>
-          <a:prstGeom prst="line">
-            <a:avLst/>
-          </a:prstGeom>
-          <a:ln w="25400">
-            <a:solidFill>
-              <a:srgbClr val="00C8FF"/>
-            </a:solidFill>
-          </a:ln>
-        </p:spPr>
-        <p:style>
-          <a:lnRef idx="2">
-            <a:schemeClr val="accent1"/>
-          </a:lnRef>
-          <a:fillRef idx="0">
-            <a:schemeClr val="accent1"/>
-          </a:fillRef>
-          <a:effectRef idx="1">
-            <a:schemeClr val="accent1"/>
-          </a:effectRef>
-          <a:fontRef idx="minor">
-            <a:schemeClr val="tx1"/>
-          </a:fontRef>
-        </p:style>
-      </p:cxnSp>
-      <p:cxnSp>
-        <p:nvCxnSpPr>
-          <p:cNvPr id="50" name="Connector 49"/>
-          <p:cNvCxnSpPr/>
-          <p:nvPr/>
-        </p:nvCxnSpPr>
-        <p:spPr>
-          <a:xfrm flipV="1">
-            <a:off x="6355080.0" y="1108710.0"/>
-            <a:ext cx="45720.0" cy="91440.0"/>
-          </a:xfrm>
-          <a:prstGeom prst="line">
-            <a:avLst/>
-          </a:prstGeom>
-          <a:ln w="25400">
-            <a:solidFill>
-              <a:srgbClr val="00C8FF"/>
-            </a:solidFill>
-          </a:ln>
-        </p:spPr>
-        <p:style>
-          <a:lnRef idx="2">
-            <a:schemeClr val="accent1"/>
-          </a:lnRef>
-          <a:fillRef idx="0">
-            <a:schemeClr val="accent1"/>
-          </a:fillRef>
-          <a:effectRef idx="1">
-            <a:schemeClr val="accent1"/>
-          </a:effectRef>
-          <a:fontRef idx="minor">
-            <a:schemeClr val="tx1"/>
-          </a:fontRef>
-        </p:style>
-      </p:cxnSp>
-      <p:cxnSp>
-        <p:nvCxnSpPr>
-          <p:cNvPr id="51" name="Connector 50"/>
-          <p:cNvCxnSpPr/>
-          <p:nvPr/>
-        </p:nvCxnSpPr>
-        <p:spPr>
-          <a:xfrm flipV="1">
-            <a:off x="6400800.0" y="1017270.0"/>
-            <a:ext cx="45720.0" cy="91440.0"/>
-          </a:xfrm>
-          <a:prstGeom prst="line">
-            <a:avLst/>
-          </a:prstGeom>
-          <a:ln w="25400">
-            <a:solidFill>
-              <a:srgbClr val="00C8FF"/>
-            </a:solidFill>
-          </a:ln>
-        </p:spPr>
-        <p:style>
-          <a:lnRef idx="2">
-            <a:schemeClr val="accent1"/>
-          </a:lnRef>
-          <a:fillRef idx="0">
-            <a:schemeClr val="accent1"/>
-          </a:fillRef>
-          <a:effectRef idx="1">
-            <a:schemeClr val="accent1"/>
-          </a:effectRef>
-          <a:fontRef idx="minor">
-            <a:schemeClr val="tx1"/>
-          </a:fontRef>
-        </p:style>
-      </p:cxnSp>
-      <p:cxnSp>
-        <p:nvCxnSpPr>
-          <p:cNvPr id="52" name="Connector 51"/>
-          <p:cNvCxnSpPr/>
-          <p:nvPr/>
-        </p:nvCxnSpPr>
-        <p:spPr>
-          <a:xfrm flipV="1">
-            <a:off x="6446520.0" y="925830.0"/>
-            <a:ext cx="45720.0" cy="91440.0"/>
-          </a:xfrm>
-          <a:prstGeom prst="line">
-            <a:avLst/>
-          </a:prstGeom>
-          <a:ln w="25400">
-            <a:solidFill>
-              <a:srgbClr val="00C8FF"/>
-            </a:solidFill>
-          </a:ln>
-        </p:spPr>
-        <p:style>
-          <a:lnRef idx="2">
-            <a:schemeClr val="accent1"/>
-          </a:lnRef>
-          <a:fillRef idx="0">
-            <a:schemeClr val="accent1"/>
-          </a:fillRef>
-          <a:effectRef idx="1">
-            <a:schemeClr val="accent1"/>
-          </a:effectRef>
-          <a:fontRef idx="minor">
-            <a:schemeClr val="tx1"/>
-          </a:fontRef>
-        </p:style>
-      </p:cxnSp>
-      <p:cxnSp>
-        <p:nvCxnSpPr>
-          <p:cNvPr id="53" name="Connector 52"/>
-          <p:cNvCxnSpPr/>
-          <p:nvPr/>
-        </p:nvCxnSpPr>
-        <p:spPr>
-          <a:xfrm flipV="1">
-            <a:off x="6492240.0" y="834390.0"/>
-            <a:ext cx="45720.0" cy="91440.0"/>
-          </a:xfrm>
-          <a:prstGeom prst="line">
-            <a:avLst/>
-          </a:prstGeom>
-          <a:ln w="25400">
-            <a:solidFill>
-              <a:srgbClr val="00C8FF"/>
-            </a:solidFill>
-          </a:ln>
-        </p:spPr>
-        <p:style>
-          <a:lnRef idx="2">
-            <a:schemeClr val="accent1"/>
-          </a:lnRef>
-          <a:fillRef idx="0">
-            <a:schemeClr val="accent1"/>
-          </a:fillRef>
-          <a:effectRef idx="1">
-            <a:schemeClr val="accent1"/>
-          </a:effectRef>
-          <a:fontRef idx="minor">
-            <a:schemeClr val="tx1"/>
-          </a:fontRef>
-        </p:style>
-      </p:cxnSp>
-      <p:cxnSp>
-        <p:nvCxnSpPr>
-          <p:cNvPr id="54" name="Connector 53"/>
-          <p:cNvCxnSpPr/>
-          <p:nvPr/>
-        </p:nvCxnSpPr>
-        <p:spPr>
-          <a:xfrm flipV="1">
-            <a:off x="6537960.0" y="742950.0"/>
-            <a:ext cx="45720.0" cy="91440.0"/>
-          </a:xfrm>
-          <a:prstGeom prst="line">
-            <a:avLst/>
-          </a:prstGeom>
-          <a:ln w="25400">
-            <a:solidFill>
-              <a:srgbClr val="00C8FF"/>
-            </a:solidFill>
-          </a:ln>
-        </p:spPr>
-        <p:style>
-          <a:lnRef idx="2">
-            <a:schemeClr val="accent1"/>
-          </a:lnRef>
-          <a:fillRef idx="0">
-            <a:schemeClr val="accent1"/>
-          </a:fillRef>
-          <a:effectRef idx="1">
-            <a:schemeClr val="accent1"/>
-          </a:effectRef>
-          <a:fontRef idx="minor">
-            <a:schemeClr val="tx1"/>
-          </a:fontRef>
-        </p:style>
-      </p:cxnSp>
-      <p:cxnSp>
-        <p:nvCxnSpPr>
-          <p:cNvPr id="55" name="Connector 54"/>
-          <p:cNvCxnSpPr/>
-          <p:nvPr/>
-        </p:nvCxnSpPr>
-        <p:spPr>
-          <a:xfrm flipV="1">
-            <a:off x="6583680.0" y="651510.0"/>
-            <a:ext cx="45720.0" cy="91440.0"/>
-          </a:xfrm>
-          <a:prstGeom prst="line">
-            <a:avLst/>
-          </a:prstGeom>
-          <a:ln w="25400">
-            <a:solidFill>
-              <a:srgbClr val="00C8FF"/>
-            </a:solidFill>
-          </a:ln>
-        </p:spPr>
-        <p:style>
-          <a:lnRef idx="2">
-            <a:schemeClr val="accent1"/>
-          </a:lnRef>
-          <a:fillRef idx="0">
-            <a:schemeClr val="accent1"/>
-          </a:fillRef>
-          <a:effectRef idx="1">
-            <a:schemeClr val="accent1"/>
-          </a:effectRef>
-          <a:fontRef idx="minor">
-            <a:schemeClr val="tx1"/>
-          </a:fontRef>
-        </p:style>
-      </p:cxnSp>
-      <p:sp>
-        <p:nvSpPr>
-          <p:cNvPr id="56" name="Oval 55"/>
-          <p:cNvSpPr/>
-          <p:nvPr/>
-        </p:nvSpPr>
-        <p:spPr>
-          <a:xfrm>
-            <a:off x="5996940" y="1573530"/>
-            <a:ext cx="76200" cy="76200"/>
-          </a:xfrm>
-          <a:prstGeom prst="ellipse">
-            <a:avLst/>
-          </a:prstGeom>
-          <a:noFill/>
-          <a:ln>
-            <a:solidFill>
-              <a:srgbClr val="FFFFFF"/>
+              <a:srgbClr val="B4B4B4"/>
             </a:solidFill>
           </a:ln>
         </p:spPr>
@@ -5031,14 +5053,463 @@
       </p:sp>
       <p:sp>
         <p:nvSpPr>
-          <p:cNvPr id="57" name="TextBox 56"/>
+          <p:cNvPr id="11" name="Freeform 10"/>
+          <p:cNvSpPr/>
+          <p:nvPr/>
+        </p:nvSpPr>
+        <p:spPr>
+          <a:xfrm>
+            <a:off x="5719572" y="1698498"/>
+            <a:ext cx="406908" cy="50283"/>
+          </a:xfrm>
+          <a:custGeom>
+            <a:avLst/>
+            <a:gdLst/>
+            <a:ahLst/>
+            <a:cxnLst/>
+            <a:rect l="l" t="t" r="r" b="b"/>
+            <a:pathLst>
+              <a:path w="406908" h="50283">
+                <a:moveTo>
+                  <a:pt x="406908" y="0"/>
+                </a:moveTo>
+                <a:lnTo>
+                  <a:pt x="401135" y="1592"/>
+                </a:lnTo>
+                <a:close/>
+                <a:lnTo>
+                  <a:pt x="395363" y="3305"/>
+                </a:lnTo>
+                <a:close/>
+                <a:lnTo>
+                  <a:pt x="389590" y="5098"/>
+                </a:lnTo>
+                <a:close/>
+                <a:lnTo>
+                  <a:pt x="383817" y="6932"/>
+                </a:lnTo>
+                <a:close/>
+                <a:lnTo>
+                  <a:pt x="378044" y="8763"/>
+                </a:lnTo>
+                <a:close/>
+                <a:lnTo>
+                  <a:pt x="372272" y="10552"/>
+                </a:lnTo>
+                <a:close/>
+                <a:lnTo>
+                  <a:pt x="366499" y="12257"/>
+                </a:lnTo>
+                <a:close/>
+                <a:lnTo>
+                  <a:pt x="360726" y="13837"/>
+                </a:lnTo>
+                <a:close/>
+                <a:lnTo>
+                  <a:pt x="354953" y="15275"/>
+                </a:lnTo>
+                <a:close/>
+                <a:lnTo>
+                  <a:pt x="349181" y="16629"/>
+                </a:lnTo>
+                <a:close/>
+                <a:lnTo>
+                  <a:pt x="343408" y="17972"/>
+                </a:lnTo>
+                <a:close/>
+                <a:lnTo>
+                  <a:pt x="337635" y="19377"/>
+                </a:lnTo>
+                <a:close/>
+                <a:lnTo>
+                  <a:pt x="331863" y="20882"/>
+                </a:lnTo>
+                <a:close/>
+                <a:lnTo>
+                  <a:pt x="326090" y="22430"/>
+                </a:lnTo>
+                <a:close/>
+                <a:lnTo>
+                  <a:pt x="320317" y="23948"/>
+                </a:lnTo>
+                <a:close/>
+                <a:lnTo>
+                  <a:pt x="314544" y="25362"/>
+                </a:lnTo>
+                <a:close/>
+                <a:lnTo>
+                  <a:pt x="308772" y="26629"/>
+                </a:lnTo>
+                <a:close/>
+                <a:lnTo>
+                  <a:pt x="302999" y="27783"/>
+                </a:lnTo>
+                <a:close/>
+                <a:lnTo>
+                  <a:pt x="297226" y="28869"/>
+                </a:lnTo>
+                <a:close/>
+                <a:lnTo>
+                  <a:pt x="291453" y="29931"/>
+                </a:lnTo>
+                <a:close/>
+                <a:lnTo>
+                  <a:pt x="285681" y="30997"/>
+                </a:lnTo>
+                <a:close/>
+                <a:lnTo>
+                  <a:pt x="279908" y="32053"/>
+                </a:lnTo>
+                <a:close/>
+                <a:lnTo>
+                  <a:pt x="274135" y="33082"/>
+                </a:lnTo>
+                <a:close/>
+                <a:lnTo>
+                  <a:pt x="268363" y="34063"/>
+                </a:lnTo>
+                <a:close/>
+                <a:lnTo>
+                  <a:pt x="262590" y="34994"/>
+                </a:lnTo>
+                <a:close/>
+                <a:lnTo>
+                  <a:pt x="256817" y="35901"/>
+                </a:lnTo>
+                <a:close/>
+                <a:lnTo>
+                  <a:pt x="251044" y="36813"/>
+                </a:lnTo>
+                <a:close/>
+                <a:lnTo>
+                  <a:pt x="245272" y="37761"/>
+                </a:lnTo>
+                <a:close/>
+                <a:lnTo>
+                  <a:pt x="239499" y="38744"/>
+                </a:lnTo>
+                <a:close/>
+                <a:lnTo>
+                  <a:pt x="233726" y="39712"/>
+                </a:lnTo>
+                <a:close/>
+                <a:lnTo>
+                  <a:pt x="227953" y="40608"/>
+                </a:lnTo>
+                <a:close/>
+                <a:lnTo>
+                  <a:pt x="222181" y="41377"/>
+                </a:lnTo>
+                <a:close/>
+                <a:lnTo>
+                  <a:pt x="216408" y="42007"/>
+                </a:lnTo>
+                <a:close/>
+                <a:lnTo>
+                  <a:pt x="210635" y="42554"/>
+                </a:lnTo>
+                <a:close/>
+                <a:lnTo>
+                  <a:pt x="204863" y="43079"/>
+                </a:lnTo>
+                <a:close/>
+                <a:lnTo>
+                  <a:pt x="199090" y="43646"/>
+                </a:lnTo>
+                <a:close/>
+                <a:lnTo>
+                  <a:pt x="193317" y="44267"/>
+                </a:lnTo>
+                <a:close/>
+                <a:lnTo>
+                  <a:pt x="187544" y="44887"/>
+                </a:lnTo>
+                <a:close/>
+                <a:lnTo>
+                  <a:pt x="181771" y="45443"/>
+                </a:lnTo>
+                <a:close/>
+                <a:lnTo>
+                  <a:pt x="175999" y="45874"/>
+                </a:lnTo>
+                <a:close/>
+                <a:lnTo>
+                  <a:pt x="170228" y="46169"/>
+                </a:lnTo>
+                <a:close/>
+                <a:lnTo>
+                  <a:pt x="164456" y="46373"/>
+                </a:lnTo>
+                <a:close/>
+                <a:lnTo>
+                  <a:pt x="158682" y="46539"/>
+                </a:lnTo>
+                <a:close/>
+                <a:lnTo>
+                  <a:pt x="152906" y="46717"/>
+                </a:lnTo>
+                <a:close/>
+                <a:lnTo>
+                  <a:pt x="147129" y="46931"/>
+                </a:lnTo>
+                <a:close/>
+                <a:lnTo>
+                  <a:pt x="141355" y="47168"/>
+                </a:lnTo>
+                <a:close/>
+                <a:lnTo>
+                  <a:pt x="135585" y="47418"/>
+                </a:lnTo>
+                <a:close/>
+                <a:lnTo>
+                  <a:pt x="129824" y="47668"/>
+                </a:lnTo>
+                <a:close/>
+                <a:lnTo>
+                  <a:pt x="124067" y="47910"/>
+                </a:lnTo>
+                <a:close/>
+                <a:lnTo>
+                  <a:pt x="118302" y="48142"/>
+                </a:lnTo>
+                <a:close/>
+                <a:lnTo>
+                  <a:pt x="112516" y="48363"/>
+                </a:lnTo>
+                <a:close/>
+                <a:lnTo>
+                  <a:pt x="106699" y="48568"/>
+                </a:lnTo>
+                <a:close/>
+                <a:lnTo>
+                  <a:pt x="100868" y="48758"/>
+                </a:lnTo>
+                <a:close/>
+                <a:lnTo>
+                  <a:pt x="95069" y="48931"/>
+                </a:lnTo>
+                <a:close/>
+                <a:lnTo>
+                  <a:pt x="89348" y="49087"/>
+                </a:lnTo>
+                <a:close/>
+                <a:lnTo>
+                  <a:pt x="83746" y="49223"/>
+                </a:lnTo>
+                <a:close/>
+                <a:lnTo>
+                  <a:pt x="78188" y="49344"/>
+                </a:lnTo>
+                <a:close/>
+                <a:lnTo>
+                  <a:pt x="72505" y="49456"/>
+                </a:lnTo>
+                <a:close/>
+                <a:lnTo>
+                  <a:pt x="66523" y="49563"/>
+                </a:lnTo>
+                <a:close/>
+                <a:lnTo>
+                  <a:pt x="60099" y="49672"/>
+                </a:lnTo>
+                <a:close/>
+                <a:lnTo>
+                  <a:pt x="53530" y="49779"/>
+                </a:lnTo>
+                <a:close/>
+                <a:lnTo>
+                  <a:pt x="47455" y="49876"/>
+                </a:lnTo>
+                <a:close/>
+                <a:lnTo>
+                  <a:pt x="42521" y="49952"/>
+                </a:lnTo>
+                <a:close/>
+                <a:lnTo>
+                  <a:pt x="39317" y="49998"/>
+                </a:lnTo>
+                <a:close/>
+                <a:lnTo>
+                  <a:pt x="37709" y="50017"/>
+                </a:lnTo>
+                <a:close/>
+                <a:lnTo>
+                  <a:pt x="37060" y="50020"/>
+                </a:lnTo>
+                <a:close/>
+                <a:lnTo>
+                  <a:pt x="36723" y="50018"/>
+                </a:lnTo>
+                <a:close/>
+                <a:lnTo>
+                  <a:pt x="36096" y="50020"/>
+                </a:lnTo>
+                <a:close/>
+                <a:lnTo>
+                  <a:pt x="35049" y="50030"/>
+                </a:lnTo>
+                <a:close/>
+                <a:lnTo>
+                  <a:pt x="33752" y="50044"/>
+                </a:lnTo>
+                <a:close/>
+                <a:lnTo>
+                  <a:pt x="32379" y="50059"/>
+                </a:lnTo>
+                <a:close/>
+                <a:lnTo>
+                  <a:pt x="31088" y="50073"/>
+                </a:lnTo>
+                <a:close/>
+                <a:lnTo>
+                  <a:pt x="29908" y="50085"/>
+                </a:lnTo>
+                <a:close/>
+                <a:lnTo>
+                  <a:pt x="28793" y="50096"/>
+                </a:lnTo>
+                <a:close/>
+                <a:lnTo>
+                  <a:pt x="27697" y="50107"/>
+                </a:lnTo>
+                <a:close/>
+                <a:lnTo>
+                  <a:pt x="26578" y="50117"/>
+                </a:lnTo>
+                <a:close/>
+                <a:lnTo>
+                  <a:pt x="25429" y="50128"/>
+                </a:lnTo>
+                <a:close/>
+                <a:lnTo>
+                  <a:pt x="24264" y="50140"/>
+                </a:lnTo>
+                <a:close/>
+                <a:lnTo>
+                  <a:pt x="23093" y="50152"/>
+                </a:lnTo>
+                <a:close/>
+                <a:lnTo>
+                  <a:pt x="21930" y="50165"/>
+                </a:lnTo>
+                <a:close/>
+                <a:lnTo>
+                  <a:pt x="20774" y="50177"/>
+                </a:lnTo>
+                <a:close/>
+                <a:lnTo>
+                  <a:pt x="19623" y="50189"/>
+                </a:lnTo>
+                <a:close/>
+                <a:lnTo>
+                  <a:pt x="18472" y="50199"/>
+                </a:lnTo>
+                <a:close/>
+                <a:lnTo>
+                  <a:pt x="17320" y="50207"/>
+                </a:lnTo>
+                <a:close/>
+                <a:lnTo>
+                  <a:pt x="16166" y="50213"/>
+                </a:lnTo>
+                <a:close/>
+                <a:lnTo>
+                  <a:pt x="15010" y="50218"/>
+                </a:lnTo>
+                <a:close/>
+                <a:lnTo>
+                  <a:pt x="13855" y="50223"/>
+                </a:lnTo>
+                <a:close/>
+                <a:lnTo>
+                  <a:pt x="12700" y="50228"/>
+                </a:lnTo>
+                <a:close/>
+                <a:lnTo>
+                  <a:pt x="11545" y="50234"/>
+                </a:lnTo>
+                <a:close/>
+                <a:lnTo>
+                  <a:pt x="10391" y="50240"/>
+                </a:lnTo>
+                <a:close/>
+                <a:lnTo>
+                  <a:pt x="9236" y="50246"/>
+                </a:lnTo>
+                <a:close/>
+                <a:lnTo>
+                  <a:pt x="8082" y="50252"/>
+                </a:lnTo>
+                <a:close/>
+                <a:lnTo>
+                  <a:pt x="6927" y="50258"/>
+                </a:lnTo>
+                <a:close/>
+                <a:lnTo>
+                  <a:pt x="5773" y="50264"/>
+                </a:lnTo>
+                <a:close/>
+                <a:lnTo>
+                  <a:pt x="4618" y="50269"/>
+                </a:lnTo>
+                <a:close/>
+                <a:lnTo>
+                  <a:pt x="3464" y="50274"/>
+                </a:lnTo>
+                <a:close/>
+                <a:lnTo>
+                  <a:pt x="2309" y="50278"/>
+                </a:lnTo>
+                <a:close/>
+                <a:lnTo>
+                  <a:pt x="1154" y="50281"/>
+                </a:lnTo>
+                <a:close/>
+                <a:lnTo>
+                  <a:pt x="0" y="50283"/>
+                </a:lnTo>
+                <a:close/>
+              </a:path>
+            </a:pathLst>
+          </a:custGeom>
+          <a:ln w="19050">
+            <a:solidFill>
+              <a:srgbClr val="B4B4B4"/>
+            </a:solidFill>
+          </a:ln>
+        </p:spPr>
+        <p:style>
+          <a:lnRef idx="1">
+            <a:schemeClr val="accent1"/>
+          </a:lnRef>
+          <a:fillRef idx="3">
+            <a:schemeClr val="accent1"/>
+          </a:fillRef>
+          <a:effectRef idx="2">
+            <a:schemeClr val="accent1"/>
+          </a:effectRef>
+          <a:fontRef idx="minor">
+            <a:schemeClr val="lt1"/>
+          </a:fontRef>
+        </p:style>
+        <p:txBody>
+          <a:bodyPr rtlCol="0" anchor="ctr"/>
+          <a:lstStyle/>
+          <a:p>
+            <a:pPr algn="ctr"/>
+          </a:p>
+        </p:txBody>
+      </p:sp>
+      <p:sp>
+        <p:nvSpPr>
+          <p:cNvPr id="12" name="TextBox 11"/>
           <p:cNvSpPr txBox="1"/>
           <p:nvPr/>
         </p:nvSpPr>
         <p:spPr>
           <a:xfrm>
-            <a:off x="6309360" y="971550"/>
-            <a:ext cx="635000" cy="254000"/>
+            <a:off x="4226560" y="2345690"/>
+            <a:ext cx="1524000" cy="508000"/>
           </a:xfrm>
           <a:prstGeom prst="rect">
             <a:avLst/>
@@ -5052,7 +5523,7 @@
           <a:lstStyle/>
           <a:p>
             <a:pPr>
-              <a:defRPr sz="1200">
+              <a:defRPr sz="1400" b="1">
                 <a:solidFill>
                   <a:srgbClr val="FFFFFF"/>
                 </a:solidFill>
@@ -5060,7 +5531,151 @@
               </a:defRPr>
             </a:pPr>
             <a:r>
-              <a:t>$y=f(x)$</a:t>
+              <a:t>O</a:t>
+            </a:r>
+          </a:p>
+        </p:txBody>
+      </p:sp>
+      <p:sp>
+        <p:nvSpPr>
+          <p:cNvPr id="13" name="TextBox 12"/>
+          <p:cNvSpPr txBox="1"/>
+          <p:nvPr/>
+        </p:nvSpPr>
+        <p:spPr>
+          <a:xfrm>
+            <a:off x="5918200" y="2345690"/>
+            <a:ext cx="1524000" cy="508000"/>
+          </a:xfrm>
+          <a:prstGeom prst="rect">
+            <a:avLst/>
+          </a:prstGeom>
+          <a:noFill/>
+        </p:spPr>
+        <p:txBody>
+          <a:bodyPr wrap="none">
+            <a:spAutoFit/>
+          </a:bodyPr>
+          <a:lstStyle/>
+          <a:p>
+            <a:pPr>
+              <a:defRPr sz="1400" b="1">
+                <a:solidFill>
+                  <a:srgbClr val="FFFFFF"/>
+                </a:solidFill>
+                <a:latin typeface="Inter"/>
+              </a:defRPr>
+            </a:pPr>
+            <a:r>
+              <a:t>x</a:t>
+            </a:r>
+          </a:p>
+        </p:txBody>
+      </p:sp>
+      <p:sp>
+        <p:nvSpPr>
+          <p:cNvPr id="14" name="TextBox 13"/>
+          <p:cNvSpPr txBox="1"/>
+          <p:nvPr/>
+        </p:nvSpPr>
+        <p:spPr>
+          <a:xfrm>
+            <a:off x="4226560" y="1156970"/>
+            <a:ext cx="1524000" cy="508000"/>
+          </a:xfrm>
+          <a:prstGeom prst="rect">
+            <a:avLst/>
+          </a:prstGeom>
+          <a:noFill/>
+        </p:spPr>
+        <p:txBody>
+          <a:bodyPr wrap="none">
+            <a:spAutoFit/>
+          </a:bodyPr>
+          <a:lstStyle/>
+          <a:p>
+            <a:pPr>
+              <a:defRPr sz="1400" b="1">
+                <a:solidFill>
+                  <a:srgbClr val="FFFFFF"/>
+                </a:solidFill>
+                <a:latin typeface="Inter"/>
+              </a:defRPr>
+            </a:pPr>
+            <a:r>
+              <a:t>y</a:t>
+            </a:r>
+          </a:p>
+        </p:txBody>
+      </p:sp>
+      <p:sp>
+        <p:nvSpPr>
+          <p:cNvPr id="15" name="TextBox 14"/>
+          <p:cNvSpPr txBox="1"/>
+          <p:nvPr/>
+        </p:nvSpPr>
+        <p:spPr>
+          <a:xfrm>
+            <a:off x="5461000" y="2391410"/>
+            <a:ext cx="1524000" cy="508000"/>
+          </a:xfrm>
+          <a:prstGeom prst="rect">
+            <a:avLst/>
+          </a:prstGeom>
+          <a:noFill/>
+        </p:spPr>
+        <p:txBody>
+          <a:bodyPr wrap="none">
+            <a:spAutoFit/>
+          </a:bodyPr>
+          <a:lstStyle/>
+          <a:p>
+            <a:pPr>
+              <a:defRPr sz="1400" b="1">
+                <a:solidFill>
+                  <a:srgbClr val="FFFFFF"/>
+                </a:solidFill>
+                <a:latin typeface="Inter"/>
+              </a:defRPr>
+            </a:pPr>
+            <a:r>
+              <a:t>a</a:t>
+            </a:r>
+          </a:p>
+        </p:txBody>
+      </p:sp>
+      <p:sp>
+        <p:nvSpPr>
+          <p:cNvPr id="16" name="TextBox 15"/>
+          <p:cNvSpPr txBox="1"/>
+          <p:nvPr/>
+        </p:nvSpPr>
+        <p:spPr>
+          <a:xfrm>
+            <a:off x="4180840" y="1431290"/>
+            <a:ext cx="1524000" cy="508000"/>
+          </a:xfrm>
+          <a:prstGeom prst="rect">
+            <a:avLst/>
+          </a:prstGeom>
+          <a:noFill/>
+        </p:spPr>
+        <p:txBody>
+          <a:bodyPr wrap="none">
+            <a:spAutoFit/>
+          </a:bodyPr>
+          <a:lstStyle/>
+          <a:p>
+            <a:pPr>
+              <a:defRPr sz="1400" b="1">
+                <a:solidFill>
+                  <a:srgbClr val="FFFFFF"/>
+                </a:solidFill>
+                <a:latin typeface="Inter"/>
+              </a:defRPr>
+            </a:pPr>
+            <a:r>
+              <a:t>L</a:t>
             </a:r>
           </a:p>
         </p:txBody>

--- a/output/1.pptx
+++ b/output/1.pptx
@@ -3084,7 +3084,7 @@
     <p:bg>
       <p:bgPr>
         <a:solidFill>
-          <a:srgbClr val="1E1E23"/>
+          <a:srgbClr val="000000"/>
         </a:solidFill>
         <a:effectLst/>
       </p:bgPr>
@@ -3104,8 +3104,8 @@
         </p:nvCxnSpPr>
         <p:spPr>
           <a:xfrm>
-            <a:off x="3794760.0" y="2571750.0"/>
-            <a:ext cx="2423160.0" cy="0.0"/>
+            <a:off x="4297680.0" y="2571750.0"/>
+            <a:ext cx="1097280.0" cy="0.0"/>
           </a:xfrm>
           <a:prstGeom prst="line">
             <a:avLst/>
@@ -3139,8 +3139,8 @@
         </p:nvCxnSpPr>
         <p:spPr>
           <a:xfrm flipV="1">
-            <a:off x="4572000.0" y="1428750.0"/>
-            <a:ext cx="0.0" cy="1691640.0"/>
+            <a:off x="4572000.0" y="1840230.0"/>
+            <a:ext cx="0.0" cy="1188720.0"/>
           </a:xfrm>
           <a:prstGeom prst="line">
             <a:avLst/>
@@ -3174,8 +3174,8 @@
         </p:nvSpPr>
         <p:spPr>
           <a:xfrm>
-            <a:off x="3886200" y="1698498"/>
-            <a:ext cx="2240280" cy="1330452"/>
+            <a:off x="4347881" y="1537792"/>
+            <a:ext cx="679079" cy="1423904"/>
           </a:xfrm>
           <a:custGeom>
             <a:avLst/>
@@ -3184,1204 +3184,1204 @@
             <a:cxnLst/>
             <a:rect l="l" t="t" r="r" b="b"/>
             <a:pathLst>
-              <a:path w="2240280" h="1330452">
+              <a:path w="679079" h="1423904">
                 <a:moveTo>
-                  <a:pt x="0" y="1330452"/>
+                  <a:pt x="0" y="1423904"/>
                 </a:moveTo>
                 <a:lnTo>
-                  <a:pt x="8639" y="1323540"/>
-                </a:lnTo>
-                <a:close/>
-                <a:lnTo>
-                  <a:pt x="17279" y="1316629"/>
-                </a:lnTo>
-                <a:close/>
-                <a:lnTo>
-                  <a:pt x="25918" y="1309717"/>
-                </a:lnTo>
-                <a:close/>
-                <a:lnTo>
-                  <a:pt x="34558" y="1302806"/>
-                </a:lnTo>
-                <a:close/>
-                <a:lnTo>
-                  <a:pt x="43197" y="1295894"/>
-                </a:lnTo>
-                <a:close/>
-                <a:lnTo>
-                  <a:pt x="51836" y="1288983"/>
-                </a:lnTo>
-                <a:close/>
-                <a:lnTo>
-                  <a:pt x="60476" y="1282071"/>
-                </a:lnTo>
-                <a:close/>
-                <a:lnTo>
-                  <a:pt x="69115" y="1275160"/>
-                </a:lnTo>
-                <a:close/>
-                <a:lnTo>
-                  <a:pt x="77755" y="1268248"/>
-                </a:lnTo>
-                <a:close/>
-                <a:lnTo>
-                  <a:pt x="86394" y="1261337"/>
-                </a:lnTo>
-                <a:close/>
-                <a:lnTo>
-                  <a:pt x="95033" y="1254425"/>
-                </a:lnTo>
-                <a:close/>
-                <a:lnTo>
-                  <a:pt x="103673" y="1247514"/>
-                </a:lnTo>
-                <a:close/>
-                <a:lnTo>
-                  <a:pt x="112312" y="1240602"/>
-                </a:lnTo>
-                <a:close/>
-                <a:lnTo>
-                  <a:pt x="120952" y="1233691"/>
-                </a:lnTo>
-                <a:close/>
-                <a:lnTo>
-                  <a:pt x="129591" y="1226779"/>
-                </a:lnTo>
-                <a:close/>
-                <a:lnTo>
-                  <a:pt x="138230" y="1219868"/>
-                </a:lnTo>
-                <a:close/>
-                <a:lnTo>
-                  <a:pt x="146870" y="1212956"/>
-                </a:lnTo>
-                <a:close/>
-                <a:lnTo>
-                  <a:pt x="155509" y="1206045"/>
-                </a:lnTo>
-                <a:close/>
-                <a:lnTo>
-                  <a:pt x="164149" y="1199133"/>
-                </a:lnTo>
-                <a:close/>
-                <a:lnTo>
-                  <a:pt x="172788" y="1192222"/>
-                </a:lnTo>
-                <a:close/>
-                <a:lnTo>
-                  <a:pt x="181427" y="1185310"/>
-                </a:lnTo>
-                <a:close/>
-                <a:lnTo>
-                  <a:pt x="190067" y="1178399"/>
-                </a:lnTo>
-                <a:close/>
-                <a:lnTo>
-                  <a:pt x="198706" y="1171487"/>
-                </a:lnTo>
-                <a:close/>
-                <a:lnTo>
-                  <a:pt x="207346" y="1164576"/>
-                </a:lnTo>
-                <a:close/>
-                <a:lnTo>
-                  <a:pt x="215985" y="1157664"/>
-                </a:lnTo>
-                <a:close/>
-                <a:lnTo>
-                  <a:pt x="224624" y="1150753"/>
-                </a:lnTo>
-                <a:close/>
-                <a:lnTo>
-                  <a:pt x="233264" y="1143841"/>
-                </a:lnTo>
-                <a:close/>
-                <a:lnTo>
-                  <a:pt x="241903" y="1136929"/>
-                </a:lnTo>
-                <a:close/>
-                <a:lnTo>
-                  <a:pt x="250543" y="1130018"/>
-                </a:lnTo>
-                <a:close/>
-                <a:lnTo>
-                  <a:pt x="259182" y="1123106"/>
-                </a:lnTo>
-                <a:close/>
-                <a:lnTo>
-                  <a:pt x="267821" y="1116195"/>
-                </a:lnTo>
-                <a:close/>
-                <a:lnTo>
-                  <a:pt x="276461" y="1109283"/>
-                </a:lnTo>
-                <a:close/>
-                <a:lnTo>
-                  <a:pt x="285100" y="1102372"/>
-                </a:lnTo>
-                <a:close/>
-                <a:lnTo>
-                  <a:pt x="293740" y="1095460"/>
-                </a:lnTo>
-                <a:close/>
-                <a:lnTo>
-                  <a:pt x="302379" y="1088549"/>
-                </a:lnTo>
-                <a:close/>
-                <a:lnTo>
-                  <a:pt x="311018" y="1081637"/>
-                </a:lnTo>
-                <a:close/>
-                <a:lnTo>
-                  <a:pt x="319658" y="1074726"/>
-                </a:lnTo>
-                <a:close/>
-                <a:lnTo>
-                  <a:pt x="328297" y="1067814"/>
-                </a:lnTo>
-                <a:close/>
-                <a:lnTo>
-                  <a:pt x="336937" y="1060902"/>
-                </a:lnTo>
-                <a:close/>
-                <a:lnTo>
-                  <a:pt x="345576" y="1053992"/>
-                </a:lnTo>
-                <a:close/>
-                <a:lnTo>
-                  <a:pt x="354215" y="1047082"/>
-                </a:lnTo>
-                <a:close/>
-                <a:lnTo>
-                  <a:pt x="362855" y="1040169"/>
-                </a:lnTo>
-                <a:close/>
-                <a:lnTo>
-                  <a:pt x="371494" y="1033253"/>
-                </a:lnTo>
-                <a:close/>
-                <a:lnTo>
-                  <a:pt x="380134" y="1026338"/>
-                </a:lnTo>
-                <a:close/>
-                <a:lnTo>
-                  <a:pt x="388773" y="1019434"/>
-                </a:lnTo>
-                <a:close/>
-                <a:lnTo>
-                  <a:pt x="397412" y="1012544"/>
-                </a:lnTo>
-                <a:close/>
-                <a:lnTo>
-                  <a:pt x="406052" y="1005635"/>
-                </a:lnTo>
-                <a:close/>
-                <a:lnTo>
-                  <a:pt x="414691" y="998672"/>
-                </a:lnTo>
-                <a:close/>
-                <a:lnTo>
-                  <a:pt x="423331" y="991688"/>
-                </a:lnTo>
-                <a:close/>
-                <a:lnTo>
-                  <a:pt x="431970" y="984823"/>
-                </a:lnTo>
-                <a:close/>
-                <a:lnTo>
-                  <a:pt x="440609" y="978178"/>
-                </a:lnTo>
-                <a:close/>
-                <a:lnTo>
-                  <a:pt x="449249" y="971440"/>
-                </a:lnTo>
-                <a:close/>
-                <a:lnTo>
-                  <a:pt x="457888" y="964069"/>
-                </a:lnTo>
-                <a:close/>
-                <a:lnTo>
-                  <a:pt x="466527" y="955750"/>
-                </a:lnTo>
-                <a:close/>
-                <a:lnTo>
-                  <a:pt x="475167" y="946887"/>
-                </a:lnTo>
-                <a:close/>
-                <a:lnTo>
-                  <a:pt x="483806" y="938014"/>
-                </a:lnTo>
-                <a:close/>
-                <a:lnTo>
-                  <a:pt x="492446" y="929360"/>
-                </a:lnTo>
-                <a:close/>
-                <a:lnTo>
-                  <a:pt x="501085" y="920795"/>
-                </a:lnTo>
-                <a:close/>
-                <a:lnTo>
-                  <a:pt x="509724" y="912181"/>
-                </a:lnTo>
-                <a:close/>
-                <a:lnTo>
-                  <a:pt x="518364" y="903524"/>
-                </a:lnTo>
-                <a:close/>
-                <a:lnTo>
-                  <a:pt x="527003" y="894894"/>
-                </a:lnTo>
-                <a:close/>
-                <a:lnTo>
-                  <a:pt x="535643" y="886313"/>
-                </a:lnTo>
-                <a:close/>
-                <a:lnTo>
-                  <a:pt x="544282" y="877673"/>
-                </a:lnTo>
-                <a:close/>
-                <a:lnTo>
-                  <a:pt x="552921" y="868858"/>
-                </a:lnTo>
-                <a:close/>
-                <a:lnTo>
-                  <a:pt x="561561" y="860022"/>
-                </a:lnTo>
-                <a:close/>
-                <a:lnTo>
-                  <a:pt x="570200" y="851596"/>
-                </a:lnTo>
-                <a:close/>
-                <a:lnTo>
-                  <a:pt x="578840" y="843812"/>
-                </a:lnTo>
-                <a:close/>
-                <a:lnTo>
-                  <a:pt x="587479" y="835550"/>
-                </a:lnTo>
-                <a:close/>
-                <a:lnTo>
-                  <a:pt x="596118" y="825172"/>
-                </a:lnTo>
-                <a:close/>
-                <a:lnTo>
-                  <a:pt x="604758" y="811987"/>
-                </a:lnTo>
-                <a:close/>
-                <a:lnTo>
-                  <a:pt x="613397" y="797411"/>
-                </a:lnTo>
-                <a:close/>
-                <a:lnTo>
-                  <a:pt x="622037" y="783065"/>
-                </a:lnTo>
-                <a:close/>
-                <a:lnTo>
-                  <a:pt x="630676" y="769353"/>
-                </a:lnTo>
-                <a:close/>
-                <a:lnTo>
-                  <a:pt x="639315" y="755619"/>
-                </a:lnTo>
-                <a:close/>
-                <a:lnTo>
-                  <a:pt x="647955" y="741398"/>
-                </a:lnTo>
-                <a:close/>
-                <a:lnTo>
-                  <a:pt x="656594" y="727371"/>
-                </a:lnTo>
-                <a:close/>
-                <a:lnTo>
-                  <a:pt x="665234" y="714588"/>
-                </a:lnTo>
-                <a:close/>
-                <a:lnTo>
-                  <a:pt x="673873" y="703569"/>
-                </a:lnTo>
-                <a:close/>
-                <a:lnTo>
-                  <a:pt x="682512" y="693849"/>
-                </a:lnTo>
-                <a:close/>
-                <a:lnTo>
-                  <a:pt x="691152" y="684868"/>
-                </a:lnTo>
-                <a:close/>
-                <a:lnTo>
-                  <a:pt x="699791" y="676246"/>
-                </a:lnTo>
-                <a:close/>
-                <a:lnTo>
-                  <a:pt x="708431" y="667739"/>
-                </a:lnTo>
-                <a:close/>
-                <a:lnTo>
-                  <a:pt x="717070" y="659149"/>
-                </a:lnTo>
-                <a:close/>
-                <a:lnTo>
-                  <a:pt x="725709" y="650486"/>
-                </a:lnTo>
-                <a:close/>
-                <a:lnTo>
-                  <a:pt x="734349" y="641816"/>
-                </a:lnTo>
-                <a:close/>
-                <a:lnTo>
-                  <a:pt x="742988" y="633172"/>
-                </a:lnTo>
-                <a:close/>
-                <a:lnTo>
-                  <a:pt x="751628" y="624542"/>
-                </a:lnTo>
-                <a:close/>
-                <a:lnTo>
-                  <a:pt x="760267" y="615908"/>
-                </a:lnTo>
-                <a:close/>
-                <a:lnTo>
-                  <a:pt x="768906" y="607268"/>
-                </a:lnTo>
-                <a:close/>
-                <a:lnTo>
-                  <a:pt x="777546" y="598626"/>
-                </a:lnTo>
-                <a:close/>
-                <a:lnTo>
-                  <a:pt x="786185" y="589986"/>
-                </a:lnTo>
-                <a:close/>
-                <a:lnTo>
-                  <a:pt x="794825" y="581347"/>
-                </a:lnTo>
-                <a:close/>
-                <a:lnTo>
-                  <a:pt x="803464" y="572708"/>
-                </a:lnTo>
-                <a:close/>
-                <a:lnTo>
-                  <a:pt x="812103" y="564067"/>
-                </a:lnTo>
-                <a:close/>
-                <a:lnTo>
-                  <a:pt x="820743" y="555428"/>
-                </a:lnTo>
-                <a:close/>
-                <a:lnTo>
-                  <a:pt x="829382" y="546794"/>
-                </a:lnTo>
-                <a:close/>
-                <a:lnTo>
-                  <a:pt x="838022" y="538158"/>
-                </a:lnTo>
-                <a:close/>
-                <a:lnTo>
-                  <a:pt x="846661" y="529509"/>
-                </a:lnTo>
-                <a:close/>
-                <a:lnTo>
-                  <a:pt x="855300" y="520849"/>
-                </a:lnTo>
-                <a:close/>
-                <a:lnTo>
-                  <a:pt x="863940" y="512209"/>
-                </a:lnTo>
-                <a:close/>
-                <a:lnTo>
-                  <a:pt x="872579" y="503627"/>
-                </a:lnTo>
-                <a:close/>
-                <a:lnTo>
-                  <a:pt x="881219" y="495055"/>
-                </a:lnTo>
-                <a:close/>
-                <a:lnTo>
-                  <a:pt x="889858" y="486354"/>
-                </a:lnTo>
-                <a:close/>
-                <a:lnTo>
-                  <a:pt x="898497" y="477437"/>
-                </a:lnTo>
-                <a:close/>
-                <a:lnTo>
-                  <a:pt x="907137" y="468655"/>
-                </a:lnTo>
-                <a:close/>
-                <a:lnTo>
-                  <a:pt x="915776" y="460547"/>
-                </a:lnTo>
-                <a:close/>
-                <a:lnTo>
-                  <a:pt x="924416" y="453377"/>
-                </a:lnTo>
-                <a:close/>
-                <a:lnTo>
-                  <a:pt x="933055" y="446710"/>
-                </a:lnTo>
-                <a:close/>
-                <a:lnTo>
-                  <a:pt x="941694" y="440019"/>
-                </a:lnTo>
-                <a:close/>
-                <a:lnTo>
-                  <a:pt x="950334" y="433112"/>
-                </a:lnTo>
-                <a:close/>
-                <a:lnTo>
-                  <a:pt x="958973" y="426122"/>
-                </a:lnTo>
-                <a:close/>
-                <a:lnTo>
-                  <a:pt x="967613" y="419174"/>
-                </a:lnTo>
-                <a:close/>
-                <a:lnTo>
-                  <a:pt x="976252" y="412274"/>
-                </a:lnTo>
-                <a:close/>
-                <a:lnTo>
-                  <a:pt x="984891" y="405382"/>
-                </a:lnTo>
-                <a:close/>
-                <a:lnTo>
-                  <a:pt x="993531" y="398474"/>
-                </a:lnTo>
-                <a:close/>
-                <a:lnTo>
-                  <a:pt x="1002170" y="391558"/>
-                </a:lnTo>
-                <a:close/>
-                <a:lnTo>
-                  <a:pt x="1010810" y="384643"/>
-                </a:lnTo>
-                <a:close/>
-                <a:lnTo>
-                  <a:pt x="1019449" y="377732"/>
-                </a:lnTo>
-                <a:close/>
-                <a:lnTo>
-                  <a:pt x="1028088" y="370821"/>
-                </a:lnTo>
-                <a:close/>
-                <a:lnTo>
-                  <a:pt x="1036728" y="363909"/>
-                </a:lnTo>
-                <a:close/>
-                <a:lnTo>
-                  <a:pt x="1045367" y="356997"/>
-                </a:lnTo>
-                <a:close/>
-                <a:lnTo>
-                  <a:pt x="1054007" y="350088"/>
-                </a:lnTo>
-                <a:close/>
-                <a:lnTo>
-                  <a:pt x="1062646" y="343182"/>
-                </a:lnTo>
-                <a:close/>
-                <a:lnTo>
-                  <a:pt x="1071285" y="336268"/>
-                </a:lnTo>
-                <a:close/>
-                <a:lnTo>
-                  <a:pt x="1079925" y="329339"/>
-                </a:lnTo>
-                <a:close/>
-                <a:lnTo>
-                  <a:pt x="1088564" y="322413"/>
-                </a:lnTo>
-                <a:close/>
-                <a:lnTo>
-                  <a:pt x="1097204" y="315529"/>
-                </a:lnTo>
-                <a:close/>
-                <a:lnTo>
-                  <a:pt x="1105843" y="308695"/>
-                </a:lnTo>
-                <a:close/>
-                <a:lnTo>
-                  <a:pt x="1114482" y="301800"/>
-                </a:lnTo>
-                <a:close/>
-                <a:lnTo>
-                  <a:pt x="1123122" y="294700"/>
-                </a:lnTo>
-                <a:close/>
-                <a:lnTo>
-                  <a:pt x="1131761" y="287517"/>
-                </a:lnTo>
-                <a:close/>
-                <a:lnTo>
-                  <a:pt x="1140401" y="280760"/>
-                </a:lnTo>
-                <a:close/>
-                <a:lnTo>
-                  <a:pt x="1149040" y="274910"/>
-                </a:lnTo>
-                <a:close/>
-                <a:lnTo>
-                  <a:pt x="1157679" y="269806"/>
-                </a:lnTo>
-                <a:close/>
-                <a:lnTo>
-                  <a:pt x="1166319" y="264913"/>
-                </a:lnTo>
-                <a:close/>
-                <a:lnTo>
-                  <a:pt x="1174958" y="259821"/>
-                </a:lnTo>
-                <a:close/>
-                <a:lnTo>
-                  <a:pt x="1183598" y="254579"/>
-                </a:lnTo>
-                <a:close/>
-                <a:lnTo>
-                  <a:pt x="1192237" y="249331"/>
-                </a:lnTo>
-                <a:close/>
-                <a:lnTo>
-                  <a:pt x="1200876" y="244141"/>
-                </a:lnTo>
-                <a:close/>
-                <a:lnTo>
-                  <a:pt x="1209516" y="238978"/>
-                </a:lnTo>
-                <a:close/>
-                <a:lnTo>
-                  <a:pt x="1218155" y="233806"/>
-                </a:lnTo>
-                <a:close/>
-                <a:lnTo>
-                  <a:pt x="1226795" y="228620"/>
-                </a:lnTo>
-                <a:close/>
-                <a:lnTo>
-                  <a:pt x="1235434" y="223431"/>
-                </a:lnTo>
-                <a:close/>
-                <a:lnTo>
-                  <a:pt x="1244073" y="218246"/>
-                </a:lnTo>
-                <a:close/>
-                <a:lnTo>
-                  <a:pt x="1252713" y="213064"/>
-                </a:lnTo>
-                <a:close/>
-                <a:lnTo>
-                  <a:pt x="1261352" y="207880"/>
-                </a:lnTo>
-                <a:close/>
-                <a:lnTo>
-                  <a:pt x="1269992" y="202696"/>
-                </a:lnTo>
-                <a:close/>
-                <a:lnTo>
-                  <a:pt x="1278631" y="197513"/>
-                </a:lnTo>
-                <a:close/>
-                <a:lnTo>
-                  <a:pt x="1287270" y="192334"/>
-                </a:lnTo>
-                <a:close/>
-                <a:lnTo>
-                  <a:pt x="1295910" y="187153"/>
-                </a:lnTo>
-                <a:close/>
-                <a:lnTo>
-                  <a:pt x="1304549" y="181959"/>
-                </a:lnTo>
-                <a:close/>
-                <a:lnTo>
-                  <a:pt x="1313188" y="176755"/>
-                </a:lnTo>
-                <a:close/>
-                <a:lnTo>
-                  <a:pt x="1321828" y="171574"/>
-                </a:lnTo>
-                <a:close/>
-                <a:lnTo>
-                  <a:pt x="1330467" y="166452"/>
-                </a:lnTo>
-                <a:close/>
-                <a:lnTo>
-                  <a:pt x="1339107" y="161331"/>
-                </a:lnTo>
-                <a:close/>
-                <a:lnTo>
-                  <a:pt x="1347746" y="156069"/>
-                </a:lnTo>
-                <a:close/>
-                <a:lnTo>
-                  <a:pt x="1356385" y="150600"/>
-                </a:lnTo>
-                <a:close/>
-                <a:lnTo>
-                  <a:pt x="1365025" y="145308"/>
-                </a:lnTo>
-                <a:close/>
-                <a:lnTo>
-                  <a:pt x="1373664" y="140731"/>
-                </a:lnTo>
-                <a:close/>
-                <a:lnTo>
-                  <a:pt x="1382304" y="137075"/>
-                </a:lnTo>
-                <a:close/>
-                <a:lnTo>
-                  <a:pt x="1390943" y="133881"/>
-                </a:lnTo>
-                <a:close/>
-                <a:lnTo>
-                  <a:pt x="1399582" y="130630"/>
-                </a:lnTo>
-                <a:close/>
-                <a:lnTo>
-                  <a:pt x="1408222" y="127169"/>
-                </a:lnTo>
-                <a:close/>
-                <a:lnTo>
-                  <a:pt x="1416861" y="123631"/>
-                </a:lnTo>
-                <a:close/>
-                <a:lnTo>
-                  <a:pt x="1425501" y="120133"/>
-                </a:lnTo>
-                <a:close/>
-                <a:lnTo>
-                  <a:pt x="1434140" y="116687"/>
-                </a:lnTo>
-                <a:close/>
-                <a:lnTo>
-                  <a:pt x="1442779" y="113276"/>
-                </a:lnTo>
-                <a:close/>
-                <a:lnTo>
-                  <a:pt x="1451419" y="109863"/>
-                </a:lnTo>
-                <a:close/>
-                <a:lnTo>
-                  <a:pt x="1460058" y="106384"/>
-                </a:lnTo>
-                <a:close/>
-                <a:lnTo>
-                  <a:pt x="1468698" y="102789"/>
-                </a:lnTo>
-                <a:close/>
-                <a:lnTo>
-                  <a:pt x="1477337" y="99228"/>
-                </a:lnTo>
-                <a:close/>
-                <a:lnTo>
-                  <a:pt x="1485976" y="95986"/>
-                </a:lnTo>
-                <a:close/>
-                <a:lnTo>
-                  <a:pt x="1494616" y="93242"/>
-                </a:lnTo>
-                <a:close/>
-                <a:lnTo>
-                  <a:pt x="1503255" y="90758"/>
-                </a:lnTo>
-                <a:close/>
-                <a:lnTo>
-                  <a:pt x="1511895" y="88197"/>
-                </a:lnTo>
-                <a:close/>
-                <a:lnTo>
-                  <a:pt x="1520534" y="85489"/>
-                </a:lnTo>
-                <a:close/>
-                <a:lnTo>
-                  <a:pt x="1529173" y="82941"/>
-                </a:lnTo>
-                <a:close/>
-                <a:lnTo>
-                  <a:pt x="1537813" y="80856"/>
-                </a:lnTo>
-                <a:close/>
-                <a:lnTo>
-                  <a:pt x="1546452" y="79169"/>
-                </a:lnTo>
-                <a:close/>
-                <a:lnTo>
-                  <a:pt x="1555092" y="77612"/>
-                </a:lnTo>
-                <a:close/>
-                <a:lnTo>
-                  <a:pt x="1563731" y="75971"/>
-                </a:lnTo>
-                <a:close/>
-                <a:lnTo>
-                  <a:pt x="1572370" y="74214"/>
-                </a:lnTo>
-                <a:close/>
-                <a:lnTo>
-                  <a:pt x="1581010" y="72348"/>
-                </a:lnTo>
-                <a:close/>
-                <a:lnTo>
-                  <a:pt x="1589649" y="70489"/>
-                </a:lnTo>
-                <a:close/>
-                <a:lnTo>
-                  <a:pt x="1598289" y="68878"/>
-                </a:lnTo>
-                <a:close/>
-                <a:lnTo>
-                  <a:pt x="1606928" y="67725"/>
-                </a:lnTo>
-                <a:close/>
-                <a:lnTo>
-                  <a:pt x="1615567" y="66918"/>
-                </a:lnTo>
-                <a:close/>
-                <a:lnTo>
-                  <a:pt x="1624207" y="66193"/>
-                </a:lnTo>
-                <a:close/>
-                <a:lnTo>
-                  <a:pt x="1632847" y="65365"/>
-                </a:lnTo>
-                <a:close/>
-                <a:lnTo>
-                  <a:pt x="1641486" y="64470"/>
-                </a:lnTo>
-                <a:close/>
-                <a:lnTo>
-                  <a:pt x="1650124" y="63578"/>
-                </a:lnTo>
-                <a:close/>
-                <a:lnTo>
-                  <a:pt x="1658762" y="62713"/>
-                </a:lnTo>
-                <a:close/>
-                <a:lnTo>
-                  <a:pt x="1667403" y="61859"/>
-                </a:lnTo>
-                <a:close/>
-                <a:lnTo>
-                  <a:pt x="1676048" y="60995"/>
-                </a:lnTo>
-                <a:close/>
-                <a:lnTo>
-                  <a:pt x="1684690" y="60128"/>
-                </a:lnTo>
-                <a:close/>
-                <a:lnTo>
-                  <a:pt x="1693318" y="59270"/>
-                </a:lnTo>
-                <a:close/>
-                <a:lnTo>
-                  <a:pt x="1701935" y="58422"/>
-                </a:lnTo>
-                <a:close/>
-                <a:lnTo>
-                  <a:pt x="1710579" y="57556"/>
-                </a:lnTo>
-                <a:close/>
-                <a:lnTo>
-                  <a:pt x="1719285" y="56642"/>
-                </a:lnTo>
-                <a:close/>
-                <a:lnTo>
-                  <a:pt x="1727991" y="55729"/>
-                </a:lnTo>
-                <a:close/>
-                <a:lnTo>
-                  <a:pt x="1736542" y="54931"/>
-                </a:lnTo>
-                <a:close/>
-                <a:lnTo>
-                  <a:pt x="1744873" y="54335"/>
-                </a:lnTo>
-                <a:close/>
-                <a:lnTo>
-                  <a:pt x="1753405" y="53856"/>
-                </a:lnTo>
-                <a:close/>
-                <a:lnTo>
-                  <a:pt x="1762709" y="53354"/>
-                </a:lnTo>
-                <a:close/>
-                <a:lnTo>
-                  <a:pt x="1772480" y="52784"/>
-                </a:lnTo>
-                <a:close/>
-                <a:lnTo>
-                  <a:pt x="1780740" y="52272"/>
-                </a:lnTo>
-                <a:close/>
-                <a:lnTo>
-                  <a:pt x="1785484" y="51957"/>
-                </a:lnTo>
-                <a:close/>
-                <a:lnTo>
-                  <a:pt x="1787070" y="51828"/>
-                </a:lnTo>
-                <a:close/>
-                <a:lnTo>
-                  <a:pt x="1787624" y="51758"/>
-                </a:lnTo>
-                <a:close/>
-                <a:lnTo>
-                  <a:pt x="1788903" y="51645"/>
-                </a:lnTo>
-                <a:close/>
-                <a:lnTo>
-                  <a:pt x="1790833" y="51495"/>
-                </a:lnTo>
-                <a:close/>
-                <a:lnTo>
-                  <a:pt x="1792838" y="51342"/>
-                </a:lnTo>
-                <a:close/>
-                <a:lnTo>
-                  <a:pt x="1794606" y="51204"/>
-                </a:lnTo>
-                <a:close/>
-                <a:lnTo>
-                  <a:pt x="1796256" y="51069"/>
-                </a:lnTo>
-                <a:close/>
-                <a:lnTo>
-                  <a:pt x="1797931" y="50925"/>
-                </a:lnTo>
-                <a:close/>
-                <a:lnTo>
-                  <a:pt x="1799665" y="50780"/>
-                </a:lnTo>
-                <a:close/>
-                <a:lnTo>
-                  <a:pt x="1801414" y="50655"/>
-                </a:lnTo>
-                <a:close/>
-                <a:lnTo>
-                  <a:pt x="1803148" y="50566"/>
-                </a:lnTo>
-                <a:close/>
-                <a:lnTo>
-                  <a:pt x="1804871" y="50504"/>
-                </a:lnTo>
-                <a:close/>
-                <a:lnTo>
-                  <a:pt x="1806599" y="50459"/>
-                </a:lnTo>
-                <a:close/>
-                <a:lnTo>
-                  <a:pt x="1808332" y="50421"/>
-                </a:lnTo>
-                <a:close/>
-                <a:lnTo>
-                  <a:pt x="1810058" y="50390"/>
-                </a:lnTo>
-                <a:close/>
-                <a:lnTo>
-                  <a:pt x="1811762" y="50367"/>
-                </a:lnTo>
-                <a:close/>
-                <a:lnTo>
-                  <a:pt x="1813474" y="50350"/>
-                </a:lnTo>
-                <a:close/>
-                <a:lnTo>
-                  <a:pt x="1815244" y="50337"/>
-                </a:lnTo>
-                <a:close/>
-                <a:lnTo>
-                  <a:pt x="1817072" y="50326"/>
-                </a:lnTo>
-                <a:close/>
-                <a:lnTo>
-                  <a:pt x="1818802" y="50318"/>
-                </a:lnTo>
-                <a:close/>
-                <a:lnTo>
-                  <a:pt x="1820263" y="50312"/>
-                </a:lnTo>
-                <a:close/>
-                <a:lnTo>
-                  <a:pt x="1821669" y="50308"/>
-                </a:lnTo>
-                <a:close/>
-                <a:lnTo>
-                  <a:pt x="1823682" y="50302"/>
-                </a:lnTo>
-                <a:close/>
-                <a:lnTo>
-                  <a:pt x="1826840" y="50296"/>
-                </a:lnTo>
-                <a:close/>
-                <a:lnTo>
-                  <a:pt x="1830567" y="50288"/>
-                </a:lnTo>
-                <a:close/>
-                <a:lnTo>
-                  <a:pt x="1833781" y="50282"/>
-                </a:lnTo>
-                <a:close/>
-                <a:lnTo>
-                  <a:pt x="1835845" y="50277"/>
-                </a:lnTo>
-                <a:close/>
-                <a:lnTo>
-                  <a:pt x="1837266" y="50272"/>
-                </a:lnTo>
-                <a:close/>
-                <a:lnTo>
-                  <a:pt x="1838713" y="50266"/>
-                </a:lnTo>
-                <a:close/>
-                <a:lnTo>
-                  <a:pt x="1840432" y="50257"/>
-                </a:lnTo>
-                <a:close/>
-                <a:lnTo>
-                  <a:pt x="1842259" y="50248"/>
-                </a:lnTo>
-                <a:close/>
-                <a:lnTo>
-                  <a:pt x="1844034" y="50238"/>
-                </a:lnTo>
-                <a:close/>
-                <a:lnTo>
-                  <a:pt x="1845748" y="50230"/>
-                </a:lnTo>
-                <a:close/>
-                <a:lnTo>
-                  <a:pt x="1847451" y="50222"/>
-                </a:lnTo>
-                <a:close/>
-                <a:lnTo>
-                  <a:pt x="1849176" y="50215"/>
-                </a:lnTo>
-                <a:close/>
-                <a:lnTo>
-                  <a:pt x="1850909" y="50206"/>
-                </a:lnTo>
-                <a:close/>
-                <a:lnTo>
-                  <a:pt x="1852637" y="50192"/>
-                </a:lnTo>
-                <a:close/>
-                <a:lnTo>
-                  <a:pt x="1854361" y="50175"/>
-                </a:lnTo>
-                <a:close/>
-                <a:lnTo>
-                  <a:pt x="1856093" y="50156"/>
-                </a:lnTo>
-                <a:close/>
-                <a:lnTo>
-                  <a:pt x="1857842" y="50138"/>
-                </a:lnTo>
-                <a:close/>
-                <a:lnTo>
-                  <a:pt x="1859578" y="50121"/>
-                </a:lnTo>
-                <a:close/>
-                <a:lnTo>
-                  <a:pt x="1861257" y="50105"/>
-                </a:lnTo>
-                <a:close/>
-                <a:lnTo>
-                  <a:pt x="1862904" y="50089"/>
-                </a:lnTo>
-                <a:close/>
-                <a:lnTo>
-                  <a:pt x="1864663" y="50071"/>
-                </a:lnTo>
-                <a:close/>
-                <a:lnTo>
-                  <a:pt x="1866658" y="50049"/>
-                </a:lnTo>
-                <a:close/>
-                <a:lnTo>
-                  <a:pt x="1868606" y="50028"/>
-                </a:lnTo>
-                <a:close/>
-                <a:lnTo>
-                  <a:pt x="1869934" y="50018"/>
-                </a:lnTo>
-                <a:close/>
-                <a:lnTo>
-                  <a:pt x="1870493" y="50020"/>
-                </a:lnTo>
-                <a:close/>
-                <a:lnTo>
-                  <a:pt x="1871970" y="50007"/>
-                </a:lnTo>
-                <a:close/>
-                <a:lnTo>
-                  <a:pt x="1876505" y="49942"/>
-                </a:lnTo>
-                <a:close/>
-                <a:lnTo>
-                  <a:pt x="1884624" y="49816"/>
-                </a:lnTo>
-                <a:close/>
-                <a:lnTo>
-                  <a:pt x="1894370" y="49657"/>
-                </a:lnTo>
-                <a:close/>
-                <a:lnTo>
-                  <a:pt x="1903726" y="49495"/>
-                </a:lnTo>
-                <a:close/>
-                <a:lnTo>
-                  <a:pt x="1912284" y="49329"/>
-                </a:lnTo>
-                <a:close/>
-                <a:lnTo>
-                  <a:pt x="1920612" y="49140"/>
-                </a:lnTo>
-                <a:close/>
-                <a:lnTo>
-                  <a:pt x="1929150" y="48911"/>
-                </a:lnTo>
-                <a:close/>
-                <a:lnTo>
-                  <a:pt x="1937851" y="48642"/>
-                </a:lnTo>
-                <a:close/>
-                <a:lnTo>
-                  <a:pt x="1946560" y="48338"/>
-                </a:lnTo>
-                <a:close/>
-                <a:lnTo>
-                  <a:pt x="1955207" y="48001"/>
-                </a:lnTo>
-                <a:close/>
-                <a:lnTo>
-                  <a:pt x="1963824" y="47641"/>
-                </a:lnTo>
-                <a:close/>
-                <a:lnTo>
-                  <a:pt x="1972451" y="47266"/>
-                </a:lnTo>
-                <a:close/>
-                <a:lnTo>
-                  <a:pt x="1981093" y="46907"/>
-                </a:lnTo>
-                <a:close/>
-                <a:lnTo>
-                  <a:pt x="1989738" y="46606"/>
-                </a:lnTo>
-                <a:close/>
-                <a:lnTo>
-                  <a:pt x="1998379" y="46356"/>
-                </a:lnTo>
-                <a:close/>
-                <a:lnTo>
-                  <a:pt x="2007017" y="46009"/>
-                </a:lnTo>
-                <a:close/>
-                <a:lnTo>
-                  <a:pt x="2015655" y="45398"/>
-                </a:lnTo>
-                <a:close/>
-                <a:lnTo>
-                  <a:pt x="2024295" y="44528"/>
-                </a:lnTo>
-                <a:close/>
-                <a:lnTo>
-                  <a:pt x="2032934" y="43597"/>
-                </a:lnTo>
-                <a:close/>
-                <a:lnTo>
-                  <a:pt x="2041574" y="42774"/>
-                </a:lnTo>
-                <a:close/>
-                <a:lnTo>
-                  <a:pt x="2050213" y="41963"/>
-                </a:lnTo>
-                <a:close/>
-                <a:lnTo>
-                  <a:pt x="2058853" y="40956"/>
-                </a:lnTo>
-                <a:close/>
-                <a:lnTo>
-                  <a:pt x="2067492" y="39647"/>
-                </a:lnTo>
-                <a:close/>
-                <a:lnTo>
-                  <a:pt x="2076131" y="38187"/>
-                </a:lnTo>
-                <a:close/>
-                <a:lnTo>
-                  <a:pt x="2084771" y="36757"/>
-                </a:lnTo>
-                <a:close/>
-                <a:lnTo>
-                  <a:pt x="2093410" y="35396"/>
-                </a:lnTo>
-                <a:close/>
-                <a:lnTo>
-                  <a:pt x="2102050" y="34011"/>
-                </a:lnTo>
-                <a:close/>
-                <a:lnTo>
-                  <a:pt x="2110689" y="32519"/>
-                </a:lnTo>
-                <a:close/>
-                <a:lnTo>
-                  <a:pt x="2119328" y="30946"/>
-                </a:lnTo>
-                <a:close/>
-                <a:lnTo>
-                  <a:pt x="2127968" y="29353"/>
-                </a:lnTo>
-                <a:close/>
-                <a:lnTo>
-                  <a:pt x="2136607" y="27738"/>
-                </a:lnTo>
-                <a:close/>
-                <a:lnTo>
-                  <a:pt x="2145247" y="25965"/>
-                </a:lnTo>
-                <a:close/>
-                <a:lnTo>
-                  <a:pt x="2153886" y="23898"/>
-                </a:lnTo>
-                <a:close/>
-                <a:lnTo>
-                  <a:pt x="2162525" y="21607"/>
-                </a:lnTo>
-                <a:close/>
-                <a:lnTo>
-                  <a:pt x="2171165" y="19337"/>
-                </a:lnTo>
-                <a:close/>
-                <a:lnTo>
-                  <a:pt x="2179804" y="17265"/>
-                </a:lnTo>
-                <a:close/>
-                <a:lnTo>
-                  <a:pt x="2188444" y="15247"/>
-                </a:lnTo>
-                <a:close/>
-                <a:lnTo>
-                  <a:pt x="2197083" y="13038"/>
-                </a:lnTo>
-                <a:close/>
-                <a:lnTo>
-                  <a:pt x="2205722" y="10528"/>
-                </a:lnTo>
-                <a:close/>
-                <a:lnTo>
-                  <a:pt x="2214362" y="7831"/>
-                </a:lnTo>
-                <a:close/>
-                <a:lnTo>
-                  <a:pt x="2223001" y="5086"/>
-                </a:lnTo>
-                <a:close/>
-                <a:lnTo>
-                  <a:pt x="2231641" y="2430"/>
-                </a:lnTo>
-                <a:close/>
-                <a:lnTo>
-                  <a:pt x="2240280" y="0"/>
+                  <a:pt x="2270" y="1419177"/>
+                </a:lnTo>
+                <a:close/>
+                <a:lnTo>
+                  <a:pt x="4540" y="1414406"/>
+                </a:lnTo>
+                <a:close/>
+                <a:lnTo>
+                  <a:pt x="6810" y="1409680"/>
+                </a:lnTo>
+                <a:close/>
+                <a:lnTo>
+                  <a:pt x="9081" y="1404908"/>
+                </a:lnTo>
+                <a:close/>
+                <a:lnTo>
+                  <a:pt x="11351" y="1400184"/>
+                </a:lnTo>
+                <a:close/>
+                <a:lnTo>
+                  <a:pt x="13621" y="1395455"/>
+                </a:lnTo>
+                <a:close/>
+                <a:lnTo>
+                  <a:pt x="15891" y="1390683"/>
+                </a:lnTo>
+                <a:close/>
+                <a:lnTo>
+                  <a:pt x="18162" y="1385962"/>
+                </a:lnTo>
+                <a:close/>
+                <a:lnTo>
+                  <a:pt x="20432" y="1381230"/>
+                </a:lnTo>
+                <a:close/>
+                <a:lnTo>
+                  <a:pt x="22702" y="1376461"/>
+                </a:lnTo>
+                <a:close/>
+                <a:lnTo>
+                  <a:pt x="24972" y="1371732"/>
+                </a:lnTo>
+                <a:close/>
+                <a:lnTo>
+                  <a:pt x="27243" y="1366963"/>
+                </a:lnTo>
+                <a:close/>
+                <a:lnTo>
+                  <a:pt x="29513" y="1362234"/>
+                </a:lnTo>
+                <a:close/>
+                <a:lnTo>
+                  <a:pt x="31783" y="1357463"/>
+                </a:lnTo>
+                <a:close/>
+                <a:lnTo>
+                  <a:pt x="34053" y="1352745"/>
+                </a:lnTo>
+                <a:close/>
+                <a:lnTo>
+                  <a:pt x="36324" y="1348008"/>
+                </a:lnTo>
+                <a:close/>
+                <a:lnTo>
+                  <a:pt x="38594" y="1343240"/>
+                </a:lnTo>
+                <a:close/>
+                <a:lnTo>
+                  <a:pt x="40864" y="1338523"/>
+                </a:lnTo>
+                <a:close/>
+                <a:lnTo>
+                  <a:pt x="43134" y="1333782"/>
+                </a:lnTo>
+                <a:close/>
+                <a:lnTo>
+                  <a:pt x="45404" y="1329020"/>
+                </a:lnTo>
+                <a:close/>
+                <a:lnTo>
+                  <a:pt x="47676" y="1324286"/>
+                </a:lnTo>
+                <a:close/>
+                <a:lnTo>
+                  <a:pt x="49942" y="1319518"/>
+                </a:lnTo>
+                <a:close/>
+                <a:lnTo>
+                  <a:pt x="52228" y="1314803"/>
+                </a:lnTo>
+                <a:close/>
+                <a:lnTo>
+                  <a:pt x="54536" y="1310059"/>
+                </a:lnTo>
+                <a:close/>
+                <a:lnTo>
+                  <a:pt x="56800" y="1305295"/>
+                </a:lnTo>
+                <a:close/>
+                <a:lnTo>
+                  <a:pt x="59072" y="1300580"/>
+                </a:lnTo>
+                <a:close/>
+                <a:lnTo>
+                  <a:pt x="61342" y="1295833"/>
+                </a:lnTo>
+                <a:close/>
+                <a:lnTo>
+                  <a:pt x="63612" y="1291077"/>
+                </a:lnTo>
+                <a:close/>
+                <a:lnTo>
+                  <a:pt x="65883" y="1286337"/>
+                </a:lnTo>
+                <a:close/>
+                <a:lnTo>
+                  <a:pt x="68153" y="1281574"/>
+                </a:lnTo>
+                <a:close/>
+                <a:lnTo>
+                  <a:pt x="70423" y="1276860"/>
+                </a:lnTo>
+                <a:close/>
+                <a:lnTo>
+                  <a:pt x="72693" y="1272110"/>
+                </a:lnTo>
+                <a:close/>
+                <a:lnTo>
+                  <a:pt x="74964" y="1267351"/>
+                </a:lnTo>
+                <a:close/>
+                <a:lnTo>
+                  <a:pt x="77234" y="1262637"/>
+                </a:lnTo>
+                <a:close/>
+                <a:lnTo>
+                  <a:pt x="79504" y="1257883"/>
+                </a:lnTo>
+                <a:close/>
+                <a:lnTo>
+                  <a:pt x="81774" y="1253134"/>
+                </a:lnTo>
+                <a:close/>
+                <a:lnTo>
+                  <a:pt x="84045" y="1248387"/>
+                </a:lnTo>
+                <a:close/>
+                <a:lnTo>
+                  <a:pt x="86315" y="1243631"/>
+                </a:lnTo>
+                <a:close/>
+                <a:lnTo>
+                  <a:pt x="88585" y="1238917"/>
+                </a:lnTo>
+                <a:close/>
+                <a:lnTo>
+                  <a:pt x="90855" y="1234160"/>
+                </a:lnTo>
+                <a:close/>
+                <a:lnTo>
+                  <a:pt x="93126" y="1229408"/>
+                </a:lnTo>
+                <a:close/>
+                <a:lnTo>
+                  <a:pt x="95396" y="1224694"/>
+                </a:lnTo>
+                <a:close/>
+                <a:lnTo>
+                  <a:pt x="97666" y="1219933"/>
+                </a:lnTo>
+                <a:close/>
+                <a:lnTo>
+                  <a:pt x="99936" y="1215191"/>
+                </a:lnTo>
+                <a:close/>
+                <a:lnTo>
+                  <a:pt x="102207" y="1210437"/>
+                </a:lnTo>
+                <a:close/>
+                <a:lnTo>
+                  <a:pt x="104477" y="1205688"/>
+                </a:lnTo>
+                <a:close/>
+                <a:lnTo>
+                  <a:pt x="106747" y="1200973"/>
+                </a:lnTo>
+                <a:close/>
+                <a:lnTo>
+                  <a:pt x="109017" y="1196211"/>
+                </a:lnTo>
+                <a:close/>
+                <a:lnTo>
+                  <a:pt x="111288" y="1191465"/>
+                </a:lnTo>
+                <a:close/>
+                <a:lnTo>
+                  <a:pt x="113558" y="1186750"/>
+                </a:lnTo>
+                <a:close/>
+                <a:lnTo>
+                  <a:pt x="115828" y="1181984"/>
+                </a:lnTo>
+                <a:close/>
+                <a:lnTo>
+                  <a:pt x="118098" y="1177248"/>
+                </a:lnTo>
+                <a:close/>
+                <a:lnTo>
+                  <a:pt x="120369" y="1172488"/>
+                </a:lnTo>
+                <a:close/>
+                <a:lnTo>
+                  <a:pt x="122639" y="1167745"/>
+                </a:lnTo>
+                <a:close/>
+                <a:lnTo>
+                  <a:pt x="124909" y="1163029"/>
+                </a:lnTo>
+                <a:close/>
+                <a:lnTo>
+                  <a:pt x="127179" y="1158260"/>
+                </a:lnTo>
+                <a:close/>
+                <a:lnTo>
+                  <a:pt x="129450" y="1153528"/>
+                </a:lnTo>
+                <a:close/>
+                <a:lnTo>
+                  <a:pt x="131720" y="1148764"/>
+                </a:lnTo>
+                <a:close/>
+                <a:lnTo>
+                  <a:pt x="133990" y="1144025"/>
+                </a:lnTo>
+                <a:close/>
+                <a:lnTo>
+                  <a:pt x="136260" y="1139307"/>
+                </a:lnTo>
+                <a:close/>
+                <a:lnTo>
+                  <a:pt x="138531" y="1134537"/>
+                </a:lnTo>
+                <a:close/>
+                <a:lnTo>
+                  <a:pt x="140801" y="1129807"/>
+                </a:lnTo>
+                <a:close/>
+                <a:lnTo>
+                  <a:pt x="143071" y="1125040"/>
+                </a:lnTo>
+                <a:close/>
+                <a:lnTo>
+                  <a:pt x="145341" y="1120306"/>
+                </a:lnTo>
+                <a:close/>
+                <a:lnTo>
+                  <a:pt x="147612" y="1115585"/>
+                </a:lnTo>
+                <a:close/>
+                <a:lnTo>
+                  <a:pt x="149882" y="1110815"/>
+                </a:lnTo>
+                <a:close/>
+                <a:lnTo>
+                  <a:pt x="152152" y="1106083"/>
+                </a:lnTo>
+                <a:close/>
+                <a:lnTo>
+                  <a:pt x="154422" y="1101361"/>
+                </a:lnTo>
+                <a:close/>
+                <a:lnTo>
+                  <a:pt x="156693" y="1096590"/>
+                </a:lnTo>
+                <a:close/>
+                <a:lnTo>
+                  <a:pt x="158963" y="1091861"/>
+                </a:lnTo>
+                <a:close/>
+                <a:lnTo>
+                  <a:pt x="161233" y="1087137"/>
+                </a:lnTo>
+                <a:close/>
+                <a:lnTo>
+                  <a:pt x="163504" y="1082365"/>
+                </a:lnTo>
+                <a:close/>
+                <a:lnTo>
+                  <a:pt x="165773" y="1077638"/>
+                </a:lnTo>
+                <a:close/>
+                <a:lnTo>
+                  <a:pt x="168089" y="1072913"/>
+                </a:lnTo>
+                <a:close/>
+                <a:lnTo>
+                  <a:pt x="170360" y="1068141"/>
+                </a:lnTo>
+                <a:close/>
+                <a:lnTo>
+                  <a:pt x="172630" y="1063415"/>
+                </a:lnTo>
+                <a:close/>
+                <a:lnTo>
+                  <a:pt x="174900" y="1058643"/>
+                </a:lnTo>
+                <a:close/>
+                <a:lnTo>
+                  <a:pt x="177171" y="1053918"/>
+                </a:lnTo>
+                <a:close/>
+                <a:lnTo>
+                  <a:pt x="179441" y="1049190"/>
+                </a:lnTo>
+                <a:close/>
+                <a:lnTo>
+                  <a:pt x="181711" y="1044419"/>
+                </a:lnTo>
+                <a:close/>
+                <a:lnTo>
+                  <a:pt x="183981" y="1039696"/>
+                </a:lnTo>
+                <a:close/>
+                <a:lnTo>
+                  <a:pt x="186252" y="1034966"/>
+                </a:lnTo>
+                <a:close/>
+                <a:lnTo>
+                  <a:pt x="188522" y="1030191"/>
+                </a:lnTo>
+                <a:close/>
+                <a:lnTo>
+                  <a:pt x="190792" y="1025424"/>
+                </a:lnTo>
+                <a:close/>
+                <a:lnTo>
+                  <a:pt x="193062" y="1020697"/>
+                </a:lnTo>
+                <a:close/>
+                <a:lnTo>
+                  <a:pt x="195333" y="1015921"/>
+                </a:lnTo>
+                <a:close/>
+                <a:lnTo>
+                  <a:pt x="197603" y="1011149"/>
+                </a:lnTo>
+                <a:close/>
+                <a:lnTo>
+                  <a:pt x="199873" y="1006377"/>
+                </a:lnTo>
+                <a:close/>
+                <a:lnTo>
+                  <a:pt x="202143" y="1001605"/>
+                </a:lnTo>
+                <a:close/>
+                <a:lnTo>
+                  <a:pt x="204414" y="996833"/>
+                </a:lnTo>
+                <a:close/>
+                <a:lnTo>
+                  <a:pt x="206684" y="992061"/>
+                </a:lnTo>
+                <a:close/>
+                <a:lnTo>
+                  <a:pt x="208954" y="987288"/>
+                </a:lnTo>
+                <a:close/>
+                <a:lnTo>
+                  <a:pt x="211224" y="982516"/>
+                </a:lnTo>
+                <a:close/>
+                <a:lnTo>
+                  <a:pt x="213495" y="977744"/>
+                </a:lnTo>
+                <a:close/>
+                <a:lnTo>
+                  <a:pt x="215765" y="972972"/>
+                </a:lnTo>
+                <a:close/>
+                <a:lnTo>
+                  <a:pt x="218035" y="968200"/>
+                </a:lnTo>
+                <a:close/>
+                <a:lnTo>
+                  <a:pt x="220305" y="963428"/>
+                </a:lnTo>
+                <a:close/>
+                <a:lnTo>
+                  <a:pt x="222576" y="958655"/>
+                </a:lnTo>
+                <a:close/>
+                <a:lnTo>
+                  <a:pt x="224846" y="953884"/>
+                </a:lnTo>
+                <a:close/>
+                <a:lnTo>
+                  <a:pt x="227116" y="949108"/>
+                </a:lnTo>
+                <a:close/>
+                <a:lnTo>
+                  <a:pt x="229386" y="944354"/>
+                </a:lnTo>
+                <a:close/>
+                <a:lnTo>
+                  <a:pt x="231657" y="939617"/>
+                </a:lnTo>
+                <a:close/>
+                <a:lnTo>
+                  <a:pt x="233927" y="934839"/>
+                </a:lnTo>
+                <a:close/>
+                <a:lnTo>
+                  <a:pt x="236197" y="930069"/>
+                </a:lnTo>
+                <a:close/>
+                <a:lnTo>
+                  <a:pt x="238467" y="925296"/>
+                </a:lnTo>
+                <a:close/>
+                <a:lnTo>
+                  <a:pt x="240738" y="920524"/>
+                </a:lnTo>
+                <a:close/>
+                <a:lnTo>
+                  <a:pt x="243008" y="915752"/>
+                </a:lnTo>
+                <a:close/>
+                <a:lnTo>
+                  <a:pt x="245278" y="910980"/>
+                </a:lnTo>
+                <a:close/>
+                <a:lnTo>
+                  <a:pt x="247548" y="906207"/>
+                </a:lnTo>
+                <a:close/>
+                <a:lnTo>
+                  <a:pt x="249819" y="901435"/>
+                </a:lnTo>
+                <a:close/>
+                <a:lnTo>
+                  <a:pt x="252089" y="896663"/>
+                </a:lnTo>
+                <a:close/>
+                <a:lnTo>
+                  <a:pt x="254359" y="891891"/>
+                </a:lnTo>
+                <a:close/>
+                <a:lnTo>
+                  <a:pt x="256629" y="887119"/>
+                </a:lnTo>
+                <a:close/>
+                <a:lnTo>
+                  <a:pt x="258900" y="882347"/>
+                </a:lnTo>
+                <a:close/>
+                <a:lnTo>
+                  <a:pt x="261170" y="877574"/>
+                </a:lnTo>
+                <a:close/>
+                <a:lnTo>
+                  <a:pt x="263440" y="872804"/>
+                </a:lnTo>
+                <a:close/>
+                <a:lnTo>
+                  <a:pt x="265710" y="868025"/>
+                </a:lnTo>
+                <a:close/>
+                <a:lnTo>
+                  <a:pt x="267981" y="863285"/>
+                </a:lnTo>
+                <a:close/>
+                <a:lnTo>
+                  <a:pt x="270251" y="858536"/>
+                </a:lnTo>
+                <a:close/>
+                <a:lnTo>
+                  <a:pt x="272521" y="853758"/>
+                </a:lnTo>
+                <a:close/>
+                <a:lnTo>
+                  <a:pt x="274791" y="848988"/>
+                </a:lnTo>
+                <a:close/>
+                <a:lnTo>
+                  <a:pt x="277063" y="844215"/>
+                </a:lnTo>
+                <a:close/>
+                <a:lnTo>
+                  <a:pt x="279327" y="839443"/>
+                </a:lnTo>
+                <a:close/>
+                <a:lnTo>
+                  <a:pt x="281633" y="834671"/>
+                </a:lnTo>
+                <a:close/>
+                <a:lnTo>
+                  <a:pt x="283921" y="829899"/>
+                </a:lnTo>
+                <a:close/>
+                <a:lnTo>
+                  <a:pt x="286187" y="825126"/>
+                </a:lnTo>
+                <a:close/>
+                <a:lnTo>
+                  <a:pt x="288459" y="820354"/>
+                </a:lnTo>
+                <a:close/>
+                <a:lnTo>
+                  <a:pt x="290729" y="815582"/>
+                </a:lnTo>
+                <a:close/>
+                <a:lnTo>
+                  <a:pt x="292999" y="810810"/>
+                </a:lnTo>
+                <a:close/>
+                <a:lnTo>
+                  <a:pt x="295269" y="806038"/>
+                </a:lnTo>
+                <a:close/>
+                <a:lnTo>
+                  <a:pt x="297540" y="801266"/>
+                </a:lnTo>
+                <a:close/>
+                <a:lnTo>
+                  <a:pt x="299810" y="796493"/>
+                </a:lnTo>
+                <a:close/>
+                <a:lnTo>
+                  <a:pt x="302080" y="791722"/>
+                </a:lnTo>
+                <a:close/>
+                <a:lnTo>
+                  <a:pt x="304350" y="786945"/>
+                </a:lnTo>
+                <a:close/>
+                <a:lnTo>
+                  <a:pt x="306621" y="782215"/>
+                </a:lnTo>
+                <a:close/>
+                <a:lnTo>
+                  <a:pt x="308891" y="777452"/>
+                </a:lnTo>
+                <a:close/>
+                <a:lnTo>
+                  <a:pt x="311161" y="772678"/>
+                </a:lnTo>
+                <a:close/>
+                <a:lnTo>
+                  <a:pt x="313431" y="767906"/>
+                </a:lnTo>
+                <a:close/>
+                <a:lnTo>
+                  <a:pt x="315702" y="763134"/>
+                </a:lnTo>
+                <a:close/>
+                <a:lnTo>
+                  <a:pt x="317972" y="758362"/>
+                </a:lnTo>
+                <a:close/>
+                <a:lnTo>
+                  <a:pt x="320242" y="753590"/>
+                </a:lnTo>
+                <a:close/>
+                <a:lnTo>
+                  <a:pt x="322512" y="748818"/>
+                </a:lnTo>
+                <a:close/>
+                <a:lnTo>
+                  <a:pt x="324783" y="744045"/>
+                </a:lnTo>
+                <a:close/>
+                <a:lnTo>
+                  <a:pt x="327053" y="739273"/>
+                </a:lnTo>
+                <a:close/>
+                <a:lnTo>
+                  <a:pt x="329323" y="734501"/>
+                </a:lnTo>
+                <a:close/>
+                <a:lnTo>
+                  <a:pt x="331593" y="729729"/>
+                </a:lnTo>
+                <a:close/>
+                <a:lnTo>
+                  <a:pt x="333864" y="724957"/>
+                </a:lnTo>
+                <a:close/>
+                <a:lnTo>
+                  <a:pt x="336134" y="720185"/>
+                </a:lnTo>
+                <a:close/>
+                <a:lnTo>
+                  <a:pt x="338404" y="715413"/>
+                </a:lnTo>
+                <a:close/>
+                <a:lnTo>
+                  <a:pt x="340674" y="710640"/>
+                </a:lnTo>
+                <a:close/>
+                <a:lnTo>
+                  <a:pt x="342945" y="705869"/>
+                </a:lnTo>
+                <a:close/>
+                <a:lnTo>
+                  <a:pt x="345215" y="701143"/>
+                </a:lnTo>
+                <a:close/>
+                <a:lnTo>
+                  <a:pt x="347485" y="696369"/>
+                </a:lnTo>
+                <a:close/>
+                <a:lnTo>
+                  <a:pt x="349755" y="691598"/>
+                </a:lnTo>
+                <a:close/>
+                <a:lnTo>
+                  <a:pt x="352026" y="686825"/>
+                </a:lnTo>
+                <a:close/>
+                <a:lnTo>
+                  <a:pt x="354296" y="682053"/>
+                </a:lnTo>
+                <a:close/>
+                <a:lnTo>
+                  <a:pt x="356566" y="677281"/>
+                </a:lnTo>
+                <a:close/>
+                <a:lnTo>
+                  <a:pt x="358836" y="672509"/>
+                </a:lnTo>
+                <a:close/>
+                <a:lnTo>
+                  <a:pt x="361107" y="667737"/>
+                </a:lnTo>
+                <a:close/>
+                <a:lnTo>
+                  <a:pt x="363377" y="662965"/>
+                </a:lnTo>
+                <a:close/>
+                <a:lnTo>
+                  <a:pt x="365647" y="658192"/>
+                </a:lnTo>
+                <a:close/>
+                <a:lnTo>
+                  <a:pt x="367917" y="653420"/>
+                </a:lnTo>
+                <a:close/>
+                <a:lnTo>
+                  <a:pt x="370188" y="648648"/>
+                </a:lnTo>
+                <a:close/>
+                <a:lnTo>
+                  <a:pt x="372458" y="643876"/>
+                </a:lnTo>
+                <a:close/>
+                <a:lnTo>
+                  <a:pt x="374728" y="639104"/>
+                </a:lnTo>
+                <a:close/>
+                <a:lnTo>
+                  <a:pt x="376998" y="634332"/>
+                </a:lnTo>
+                <a:close/>
+                <a:lnTo>
+                  <a:pt x="379269" y="629557"/>
+                </a:lnTo>
+                <a:close/>
+                <a:lnTo>
+                  <a:pt x="381539" y="624797"/>
+                </a:lnTo>
+                <a:close/>
+                <a:lnTo>
+                  <a:pt x="383809" y="620065"/>
+                </a:lnTo>
+                <a:close/>
+                <a:lnTo>
+                  <a:pt x="386079" y="615287"/>
+                </a:lnTo>
+                <a:close/>
+                <a:lnTo>
+                  <a:pt x="388349" y="610517"/>
+                </a:lnTo>
+                <a:close/>
+                <a:lnTo>
+                  <a:pt x="390621" y="605744"/>
+                </a:lnTo>
+                <a:close/>
+                <a:lnTo>
+                  <a:pt x="392887" y="600972"/>
+                </a:lnTo>
+                <a:close/>
+                <a:lnTo>
+                  <a:pt x="395174" y="596200"/>
+                </a:lnTo>
+                <a:close/>
+                <a:lnTo>
+                  <a:pt x="397481" y="591428"/>
+                </a:lnTo>
+                <a:close/>
+                <a:lnTo>
+                  <a:pt x="399745" y="586656"/>
+                </a:lnTo>
+                <a:close/>
+                <a:lnTo>
+                  <a:pt x="402017" y="581884"/>
+                </a:lnTo>
+                <a:close/>
+                <a:lnTo>
+                  <a:pt x="404287" y="577111"/>
+                </a:lnTo>
+                <a:close/>
+                <a:lnTo>
+                  <a:pt x="406557" y="572339"/>
+                </a:lnTo>
+                <a:close/>
+                <a:lnTo>
+                  <a:pt x="408827" y="567567"/>
+                </a:lnTo>
+                <a:close/>
+                <a:lnTo>
+                  <a:pt x="411098" y="562795"/>
+                </a:lnTo>
+                <a:close/>
+                <a:lnTo>
+                  <a:pt x="413368" y="558022"/>
+                </a:lnTo>
+                <a:close/>
+                <a:lnTo>
+                  <a:pt x="415638" y="553252"/>
+                </a:lnTo>
+                <a:close/>
+                <a:lnTo>
+                  <a:pt x="417908" y="548474"/>
+                </a:lnTo>
+                <a:close/>
+                <a:lnTo>
+                  <a:pt x="420179" y="543728"/>
+                </a:lnTo>
+                <a:close/>
+                <a:lnTo>
+                  <a:pt x="422449" y="538984"/>
+                </a:lnTo>
+                <a:close/>
+                <a:lnTo>
+                  <a:pt x="424719" y="534206"/>
+                </a:lnTo>
+                <a:close/>
+                <a:lnTo>
+                  <a:pt x="426989" y="529436"/>
+                </a:lnTo>
+                <a:close/>
+                <a:lnTo>
+                  <a:pt x="429260" y="524663"/>
+                </a:lnTo>
+                <a:close/>
+                <a:lnTo>
+                  <a:pt x="431530" y="519891"/>
+                </a:lnTo>
+                <a:close/>
+                <a:lnTo>
+                  <a:pt x="433800" y="515119"/>
+                </a:lnTo>
+                <a:close/>
+                <a:lnTo>
+                  <a:pt x="436070" y="510347"/>
+                </a:lnTo>
+                <a:close/>
+                <a:lnTo>
+                  <a:pt x="438341" y="505575"/>
+                </a:lnTo>
+                <a:close/>
+                <a:lnTo>
+                  <a:pt x="440611" y="500803"/>
+                </a:lnTo>
+                <a:close/>
+                <a:lnTo>
+                  <a:pt x="442881" y="496030"/>
+                </a:lnTo>
+                <a:close/>
+                <a:lnTo>
+                  <a:pt x="445151" y="491258"/>
+                </a:lnTo>
+                <a:close/>
+                <a:lnTo>
+                  <a:pt x="447422" y="486486"/>
+                </a:lnTo>
+                <a:close/>
+                <a:lnTo>
+                  <a:pt x="449692" y="481714"/>
+                </a:lnTo>
+                <a:close/>
+                <a:lnTo>
+                  <a:pt x="451962" y="476941"/>
+                </a:lnTo>
+                <a:close/>
+                <a:lnTo>
+                  <a:pt x="454233" y="472171"/>
+                </a:lnTo>
+                <a:close/>
+                <a:lnTo>
+                  <a:pt x="456503" y="467393"/>
+                </a:lnTo>
+                <a:close/>
+                <a:lnTo>
+                  <a:pt x="458773" y="462659"/>
+                </a:lnTo>
+                <a:close/>
+                <a:lnTo>
+                  <a:pt x="461043" y="457902"/>
+                </a:lnTo>
+                <a:close/>
+                <a:lnTo>
+                  <a:pt x="463314" y="453126"/>
+                </a:lnTo>
+                <a:close/>
+                <a:lnTo>
+                  <a:pt x="465584" y="448355"/>
+                </a:lnTo>
+                <a:close/>
+                <a:lnTo>
+                  <a:pt x="467854" y="443582"/>
+                </a:lnTo>
+                <a:close/>
+                <a:lnTo>
+                  <a:pt x="470124" y="438810"/>
+                </a:lnTo>
+                <a:close/>
+                <a:lnTo>
+                  <a:pt x="472395" y="434038"/>
+                </a:lnTo>
+                <a:close/>
+                <a:lnTo>
+                  <a:pt x="474665" y="429266"/>
+                </a:lnTo>
+                <a:close/>
+                <a:lnTo>
+                  <a:pt x="476935" y="424494"/>
+                </a:lnTo>
+                <a:close/>
+                <a:lnTo>
+                  <a:pt x="479205" y="419722"/>
+                </a:lnTo>
+                <a:close/>
+                <a:lnTo>
+                  <a:pt x="481476" y="414949"/>
+                </a:lnTo>
+                <a:close/>
+                <a:lnTo>
+                  <a:pt x="483746" y="410177"/>
+                </a:lnTo>
+                <a:close/>
+                <a:lnTo>
+                  <a:pt x="486016" y="405405"/>
+                </a:lnTo>
+                <a:close/>
+                <a:lnTo>
+                  <a:pt x="488286" y="400633"/>
+                </a:lnTo>
+                <a:close/>
+                <a:lnTo>
+                  <a:pt x="490557" y="395861"/>
+                </a:lnTo>
+                <a:close/>
+                <a:lnTo>
+                  <a:pt x="492827" y="391089"/>
+                </a:lnTo>
+                <a:close/>
+                <a:lnTo>
+                  <a:pt x="495097" y="386314"/>
+                </a:lnTo>
+                <a:close/>
+                <a:lnTo>
+                  <a:pt x="497367" y="381588"/>
+                </a:lnTo>
+                <a:close/>
+                <a:lnTo>
+                  <a:pt x="499637" y="376818"/>
+                </a:lnTo>
+                <a:close/>
+                <a:lnTo>
+                  <a:pt x="501908" y="372046"/>
+                </a:lnTo>
+                <a:close/>
+                <a:lnTo>
+                  <a:pt x="504178" y="367274"/>
+                </a:lnTo>
+                <a:close/>
+                <a:lnTo>
+                  <a:pt x="506448" y="362501"/>
+                </a:lnTo>
+                <a:close/>
+                <a:lnTo>
+                  <a:pt x="508718" y="357729"/>
+                </a:lnTo>
+                <a:close/>
+                <a:lnTo>
+                  <a:pt x="511035" y="352957"/>
+                </a:lnTo>
+                <a:close/>
+                <a:lnTo>
+                  <a:pt x="513305" y="348185"/>
+                </a:lnTo>
+                <a:close/>
+                <a:lnTo>
+                  <a:pt x="515575" y="343413"/>
+                </a:lnTo>
+                <a:close/>
+                <a:lnTo>
+                  <a:pt x="517845" y="338641"/>
+                </a:lnTo>
+                <a:close/>
+                <a:lnTo>
+                  <a:pt x="520115" y="333868"/>
+                </a:lnTo>
+                <a:close/>
+                <a:lnTo>
+                  <a:pt x="522386" y="329096"/>
+                </a:lnTo>
+                <a:close/>
+                <a:lnTo>
+                  <a:pt x="524656" y="324324"/>
+                </a:lnTo>
+                <a:close/>
+                <a:lnTo>
+                  <a:pt x="526926" y="319552"/>
+                </a:lnTo>
+                <a:close/>
+                <a:lnTo>
+                  <a:pt x="529196" y="314780"/>
+                </a:lnTo>
+                <a:close/>
+                <a:lnTo>
+                  <a:pt x="531467" y="310006"/>
+                </a:lnTo>
+                <a:close/>
+                <a:lnTo>
+                  <a:pt x="533737" y="305241"/>
+                </a:lnTo>
+                <a:close/>
+                <a:lnTo>
+                  <a:pt x="536007" y="300512"/>
+                </a:lnTo>
+                <a:close/>
+                <a:lnTo>
+                  <a:pt x="538277" y="295736"/>
+                </a:lnTo>
+                <a:close/>
+                <a:lnTo>
+                  <a:pt x="540548" y="290965"/>
+                </a:lnTo>
+                <a:close/>
+                <a:lnTo>
+                  <a:pt x="542818" y="286192"/>
+                </a:lnTo>
+                <a:close/>
+                <a:lnTo>
+                  <a:pt x="545088" y="281420"/>
+                </a:lnTo>
+                <a:close/>
+                <a:lnTo>
+                  <a:pt x="547358" y="276648"/>
+                </a:lnTo>
+                <a:close/>
+                <a:lnTo>
+                  <a:pt x="549629" y="271876"/>
+                </a:lnTo>
+                <a:close/>
+                <a:lnTo>
+                  <a:pt x="551899" y="267104"/>
+                </a:lnTo>
+                <a:close/>
+                <a:lnTo>
+                  <a:pt x="554169" y="262332"/>
+                </a:lnTo>
+                <a:close/>
+                <a:lnTo>
+                  <a:pt x="556439" y="257560"/>
+                </a:lnTo>
+                <a:close/>
+                <a:lnTo>
+                  <a:pt x="558710" y="252787"/>
+                </a:lnTo>
+                <a:close/>
+                <a:lnTo>
+                  <a:pt x="560980" y="248015"/>
+                </a:lnTo>
+                <a:close/>
+                <a:lnTo>
+                  <a:pt x="563250" y="243243"/>
+                </a:lnTo>
+                <a:close/>
+                <a:lnTo>
+                  <a:pt x="565520" y="238471"/>
+                </a:lnTo>
+                <a:close/>
+                <a:lnTo>
+                  <a:pt x="567791" y="233700"/>
+                </a:lnTo>
+                <a:close/>
+                <a:lnTo>
+                  <a:pt x="570061" y="228923"/>
+                </a:lnTo>
+                <a:close/>
+                <a:lnTo>
+                  <a:pt x="572331" y="224170"/>
+                </a:lnTo>
+                <a:close/>
+                <a:lnTo>
+                  <a:pt x="574601" y="219433"/>
+                </a:lnTo>
+                <a:close/>
+                <a:lnTo>
+                  <a:pt x="576872" y="214655"/>
+                </a:lnTo>
+                <a:close/>
+                <a:lnTo>
+                  <a:pt x="579142" y="209884"/>
+                </a:lnTo>
+                <a:close/>
+                <a:lnTo>
+                  <a:pt x="581412" y="205111"/>
+                </a:lnTo>
+                <a:close/>
+                <a:lnTo>
+                  <a:pt x="583682" y="200339"/>
+                </a:lnTo>
+                <a:close/>
+                <a:lnTo>
+                  <a:pt x="585953" y="195567"/>
+                </a:lnTo>
+                <a:close/>
+                <a:lnTo>
+                  <a:pt x="588223" y="190795"/>
+                </a:lnTo>
+                <a:close/>
+                <a:lnTo>
+                  <a:pt x="590493" y="186023"/>
+                </a:lnTo>
+                <a:close/>
+                <a:lnTo>
+                  <a:pt x="592763" y="181251"/>
+                </a:lnTo>
+                <a:close/>
+                <a:lnTo>
+                  <a:pt x="595034" y="176479"/>
+                </a:lnTo>
+                <a:close/>
+                <a:lnTo>
+                  <a:pt x="597304" y="171706"/>
+                </a:lnTo>
+                <a:close/>
+                <a:lnTo>
+                  <a:pt x="599574" y="166934"/>
+                </a:lnTo>
+                <a:close/>
+                <a:lnTo>
+                  <a:pt x="601844" y="162162"/>
+                </a:lnTo>
+                <a:close/>
+                <a:lnTo>
+                  <a:pt x="604115" y="157390"/>
+                </a:lnTo>
+                <a:close/>
+                <a:lnTo>
+                  <a:pt x="606385" y="152619"/>
+                </a:lnTo>
+                <a:close/>
+                <a:lnTo>
+                  <a:pt x="608655" y="147841"/>
+                </a:lnTo>
+                <a:close/>
+                <a:lnTo>
+                  <a:pt x="610925" y="143102"/>
+                </a:lnTo>
+                <a:close/>
+                <a:lnTo>
+                  <a:pt x="613196" y="138351"/>
+                </a:lnTo>
+                <a:close/>
+                <a:lnTo>
+                  <a:pt x="615466" y="133574"/>
+                </a:lnTo>
+                <a:close/>
+                <a:lnTo>
+                  <a:pt x="617736" y="128803"/>
+                </a:lnTo>
+                <a:close/>
+                <a:lnTo>
+                  <a:pt x="620008" y="124031"/>
+                </a:lnTo>
+                <a:close/>
+                <a:lnTo>
+                  <a:pt x="622272" y="119258"/>
+                </a:lnTo>
+                <a:close/>
+                <a:lnTo>
+                  <a:pt x="624579" y="114486"/>
+                </a:lnTo>
+                <a:close/>
+                <a:lnTo>
+                  <a:pt x="626866" y="109714"/>
+                </a:lnTo>
+                <a:close/>
+                <a:lnTo>
+                  <a:pt x="629132" y="104942"/>
+                </a:lnTo>
+                <a:close/>
+                <a:lnTo>
+                  <a:pt x="631404" y="100170"/>
+                </a:lnTo>
+                <a:close/>
+                <a:lnTo>
+                  <a:pt x="633674" y="95398"/>
+                </a:lnTo>
+                <a:close/>
+                <a:lnTo>
+                  <a:pt x="635944" y="90626"/>
+                </a:lnTo>
+                <a:close/>
+                <a:lnTo>
+                  <a:pt x="638214" y="85853"/>
+                </a:lnTo>
+                <a:close/>
+                <a:lnTo>
+                  <a:pt x="640484" y="81081"/>
+                </a:lnTo>
+                <a:close/>
+                <a:lnTo>
+                  <a:pt x="642755" y="76309"/>
+                </a:lnTo>
+                <a:close/>
+                <a:lnTo>
+                  <a:pt x="645025" y="71538"/>
+                </a:lnTo>
+                <a:close/>
+                <a:lnTo>
+                  <a:pt x="647295" y="66761"/>
+                </a:lnTo>
+                <a:close/>
+                <a:lnTo>
+                  <a:pt x="649565" y="62032"/>
+                </a:lnTo>
+                <a:close/>
+                <a:lnTo>
+                  <a:pt x="651836" y="57268"/>
+                </a:lnTo>
+                <a:close/>
+                <a:lnTo>
+                  <a:pt x="654106" y="52494"/>
+                </a:lnTo>
+                <a:close/>
+                <a:lnTo>
+                  <a:pt x="656376" y="47722"/>
+                </a:lnTo>
+                <a:close/>
+                <a:lnTo>
+                  <a:pt x="658646" y="42950"/>
+                </a:lnTo>
+                <a:close/>
+                <a:lnTo>
+                  <a:pt x="660917" y="38177"/>
+                </a:lnTo>
+                <a:close/>
+                <a:lnTo>
+                  <a:pt x="663187" y="33405"/>
+                </a:lnTo>
+                <a:close/>
+                <a:lnTo>
+                  <a:pt x="665457" y="28633"/>
+                </a:lnTo>
+                <a:close/>
+                <a:lnTo>
+                  <a:pt x="667727" y="23861"/>
+                </a:lnTo>
+                <a:close/>
+                <a:lnTo>
+                  <a:pt x="669998" y="19089"/>
+                </a:lnTo>
+                <a:close/>
+                <a:lnTo>
+                  <a:pt x="672268" y="14317"/>
+                </a:lnTo>
+                <a:close/>
+                <a:lnTo>
+                  <a:pt x="674538" y="9545"/>
+                </a:lnTo>
+                <a:close/>
+                <a:lnTo>
+                  <a:pt x="676808" y="4772"/>
+                </a:lnTo>
+                <a:close/>
+                <a:lnTo>
+                  <a:pt x="679079" y="0"/>
                 </a:lnTo>
                 <a:close/>
               </a:path>
@@ -4389,7 +4389,7 @@
           </a:custGeom>
           <a:ln w="31750">
             <a:solidFill>
-              <a:srgbClr val="00E5FF"/>
+              <a:srgbClr val="FFFFFF"/>
             </a:solidFill>
           </a:ln>
         </p:spPr>
@@ -4415,16 +4415,1265 @@
           </a:p>
         </p:txBody>
       </p:sp>
+      <p:sp>
+        <p:nvSpPr>
+          <p:cNvPr id="5" name="Freeform 4"/>
+          <p:cNvSpPr/>
+          <p:nvPr/>
+        </p:nvSpPr>
+        <p:spPr>
+          <a:xfrm>
+            <a:off x="5038161" y="916549"/>
+            <a:ext cx="291374" cy="611825"/>
+          </a:xfrm>
+          <a:custGeom>
+            <a:avLst/>
+            <a:gdLst/>
+            <a:ahLst/>
+            <a:cxnLst/>
+            <a:rect l="l" t="t" r="r" b="b"/>
+            <a:pathLst>
+              <a:path w="291374" h="611825">
+                <a:moveTo>
+                  <a:pt x="0" y="611825"/>
+                </a:moveTo>
+                <a:lnTo>
+                  <a:pt x="974" y="609763"/>
+                </a:lnTo>
+                <a:close/>
+                <a:lnTo>
+                  <a:pt x="1948" y="607725"/>
+                </a:lnTo>
+                <a:close/>
+                <a:lnTo>
+                  <a:pt x="2922" y="605698"/>
+                </a:lnTo>
+                <a:close/>
+                <a:lnTo>
+                  <a:pt x="3896" y="603672"/>
+                </a:lnTo>
+                <a:close/>
+                <a:lnTo>
+                  <a:pt x="4870" y="601636"/>
+                </a:lnTo>
+                <a:close/>
+                <a:lnTo>
+                  <a:pt x="5844" y="599589"/>
+                </a:lnTo>
+                <a:close/>
+                <a:lnTo>
+                  <a:pt x="6818" y="597538"/>
+                </a:lnTo>
+                <a:close/>
+                <a:lnTo>
+                  <a:pt x="7792" y="595490"/>
+                </a:lnTo>
+                <a:close/>
+                <a:lnTo>
+                  <a:pt x="8766" y="593443"/>
+                </a:lnTo>
+                <a:close/>
+                <a:lnTo>
+                  <a:pt x="9740" y="591396"/>
+                </a:lnTo>
+                <a:close/>
+                <a:lnTo>
+                  <a:pt x="10715" y="589349"/>
+                </a:lnTo>
+                <a:close/>
+                <a:lnTo>
+                  <a:pt x="11689" y="587301"/>
+                </a:lnTo>
+                <a:close/>
+                <a:lnTo>
+                  <a:pt x="12663" y="585254"/>
+                </a:lnTo>
+                <a:close/>
+                <a:lnTo>
+                  <a:pt x="13637" y="583206"/>
+                </a:lnTo>
+                <a:close/>
+                <a:lnTo>
+                  <a:pt x="14611" y="581159"/>
+                </a:lnTo>
+                <a:close/>
+                <a:lnTo>
+                  <a:pt x="15585" y="579111"/>
+                </a:lnTo>
+                <a:close/>
+                <a:lnTo>
+                  <a:pt x="16559" y="577064"/>
+                </a:lnTo>
+                <a:close/>
+                <a:lnTo>
+                  <a:pt x="17533" y="575016"/>
+                </a:lnTo>
+                <a:close/>
+                <a:lnTo>
+                  <a:pt x="18507" y="572969"/>
+                </a:lnTo>
+                <a:close/>
+                <a:lnTo>
+                  <a:pt x="19481" y="570921"/>
+                </a:lnTo>
+                <a:close/>
+                <a:lnTo>
+                  <a:pt x="20455" y="568874"/>
+                </a:lnTo>
+                <a:close/>
+                <a:lnTo>
+                  <a:pt x="21429" y="566826"/>
+                </a:lnTo>
+                <a:close/>
+                <a:lnTo>
+                  <a:pt x="22403" y="564779"/>
+                </a:lnTo>
+                <a:close/>
+                <a:lnTo>
+                  <a:pt x="23377" y="562732"/>
+                </a:lnTo>
+                <a:close/>
+                <a:lnTo>
+                  <a:pt x="24351" y="560684"/>
+                </a:lnTo>
+                <a:close/>
+                <a:lnTo>
+                  <a:pt x="25325" y="558637"/>
+                </a:lnTo>
+                <a:close/>
+                <a:lnTo>
+                  <a:pt x="26299" y="556589"/>
+                </a:lnTo>
+                <a:close/>
+                <a:lnTo>
+                  <a:pt x="27273" y="554542"/>
+                </a:lnTo>
+                <a:close/>
+                <a:lnTo>
+                  <a:pt x="28247" y="552494"/>
+                </a:lnTo>
+                <a:close/>
+                <a:lnTo>
+                  <a:pt x="29221" y="550447"/>
+                </a:lnTo>
+                <a:close/>
+                <a:lnTo>
+                  <a:pt x="30195" y="548399"/>
+                </a:lnTo>
+                <a:close/>
+                <a:lnTo>
+                  <a:pt x="31169" y="546352"/>
+                </a:lnTo>
+                <a:close/>
+                <a:lnTo>
+                  <a:pt x="32143" y="544304"/>
+                </a:lnTo>
+                <a:close/>
+                <a:lnTo>
+                  <a:pt x="33117" y="542257"/>
+                </a:lnTo>
+                <a:close/>
+                <a:lnTo>
+                  <a:pt x="34091" y="540209"/>
+                </a:lnTo>
+                <a:close/>
+                <a:lnTo>
+                  <a:pt x="35065" y="538162"/>
+                </a:lnTo>
+                <a:close/>
+                <a:lnTo>
+                  <a:pt x="36039" y="536115"/>
+                </a:lnTo>
+                <a:close/>
+                <a:lnTo>
+                  <a:pt x="37013" y="534068"/>
+                </a:lnTo>
+                <a:close/>
+                <a:lnTo>
+                  <a:pt x="37987" y="532020"/>
+                </a:lnTo>
+                <a:close/>
+                <a:lnTo>
+                  <a:pt x="38962" y="529968"/>
+                </a:lnTo>
+                <a:close/>
+                <a:lnTo>
+                  <a:pt x="39936" y="527921"/>
+                </a:lnTo>
+                <a:close/>
+                <a:lnTo>
+                  <a:pt x="40909" y="525888"/>
+                </a:lnTo>
+                <a:close/>
+                <a:lnTo>
+                  <a:pt x="41883" y="523863"/>
+                </a:lnTo>
+                <a:close/>
+                <a:lnTo>
+                  <a:pt x="42858" y="521831"/>
+                </a:lnTo>
+                <a:close/>
+                <a:lnTo>
+                  <a:pt x="43833" y="519785"/>
+                </a:lnTo>
+                <a:close/>
+                <a:lnTo>
+                  <a:pt x="44806" y="517733"/>
+                </a:lnTo>
+                <a:close/>
+                <a:lnTo>
+                  <a:pt x="45776" y="515684"/>
+                </a:lnTo>
+                <a:close/>
+                <a:lnTo>
+                  <a:pt x="46751" y="513638"/>
+                </a:lnTo>
+                <a:close/>
+                <a:lnTo>
+                  <a:pt x="47740" y="511591"/>
+                </a:lnTo>
+                <a:close/>
+                <a:lnTo>
+                  <a:pt x="48737" y="509543"/>
+                </a:lnTo>
+                <a:close/>
+                <a:lnTo>
+                  <a:pt x="49725" y="507496"/>
+                </a:lnTo>
+                <a:close/>
+                <a:lnTo>
+                  <a:pt x="50699" y="505448"/>
+                </a:lnTo>
+                <a:close/>
+                <a:lnTo>
+                  <a:pt x="51669" y="503401"/>
+                </a:lnTo>
+                <a:close/>
+                <a:lnTo>
+                  <a:pt x="52642" y="501353"/>
+                </a:lnTo>
+                <a:close/>
+                <a:lnTo>
+                  <a:pt x="53618" y="499306"/>
+                </a:lnTo>
+                <a:close/>
+                <a:lnTo>
+                  <a:pt x="54592" y="497259"/>
+                </a:lnTo>
+                <a:close/>
+                <a:lnTo>
+                  <a:pt x="55566" y="495211"/>
+                </a:lnTo>
+                <a:close/>
+                <a:lnTo>
+                  <a:pt x="56540" y="493164"/>
+                </a:lnTo>
+                <a:close/>
+                <a:lnTo>
+                  <a:pt x="57514" y="491116"/>
+                </a:lnTo>
+                <a:close/>
+                <a:lnTo>
+                  <a:pt x="58488" y="489069"/>
+                </a:lnTo>
+                <a:close/>
+                <a:lnTo>
+                  <a:pt x="59462" y="487021"/>
+                </a:lnTo>
+                <a:close/>
+                <a:lnTo>
+                  <a:pt x="60436" y="484974"/>
+                </a:lnTo>
+                <a:close/>
+                <a:lnTo>
+                  <a:pt x="61410" y="482926"/>
+                </a:lnTo>
+                <a:close/>
+                <a:lnTo>
+                  <a:pt x="62384" y="480879"/>
+                </a:lnTo>
+                <a:close/>
+                <a:lnTo>
+                  <a:pt x="63358" y="478831"/>
+                </a:lnTo>
+                <a:close/>
+                <a:lnTo>
+                  <a:pt x="64332" y="476784"/>
+                </a:lnTo>
+                <a:close/>
+                <a:lnTo>
+                  <a:pt x="65306" y="474736"/>
+                </a:lnTo>
+                <a:close/>
+                <a:lnTo>
+                  <a:pt x="66280" y="472689"/>
+                </a:lnTo>
+                <a:close/>
+                <a:lnTo>
+                  <a:pt x="67254" y="470642"/>
+                </a:lnTo>
+                <a:close/>
+                <a:lnTo>
+                  <a:pt x="68228" y="468594"/>
+                </a:lnTo>
+                <a:close/>
+                <a:lnTo>
+                  <a:pt x="69202" y="466547"/>
+                </a:lnTo>
+                <a:close/>
+                <a:lnTo>
+                  <a:pt x="70176" y="464499"/>
+                </a:lnTo>
+                <a:close/>
+                <a:lnTo>
+                  <a:pt x="71150" y="462452"/>
+                </a:lnTo>
+                <a:close/>
+                <a:lnTo>
+                  <a:pt x="72124" y="460404"/>
+                </a:lnTo>
+                <a:close/>
+                <a:lnTo>
+                  <a:pt x="73098" y="458356"/>
+                </a:lnTo>
+                <a:close/>
+                <a:lnTo>
+                  <a:pt x="74072" y="456309"/>
+                </a:lnTo>
+                <a:close/>
+                <a:lnTo>
+                  <a:pt x="75047" y="454263"/>
+                </a:lnTo>
+                <a:close/>
+                <a:lnTo>
+                  <a:pt x="76021" y="452215"/>
+                </a:lnTo>
+                <a:close/>
+                <a:lnTo>
+                  <a:pt x="76995" y="450163"/>
+                </a:lnTo>
+                <a:close/>
+                <a:lnTo>
+                  <a:pt x="77969" y="448115"/>
+                </a:lnTo>
+                <a:close/>
+                <a:lnTo>
+                  <a:pt x="78943" y="446080"/>
+                </a:lnTo>
+                <a:close/>
+                <a:lnTo>
+                  <a:pt x="79917" y="444056"/>
+                </a:lnTo>
+                <a:close/>
+                <a:lnTo>
+                  <a:pt x="80891" y="442025"/>
+                </a:lnTo>
+                <a:close/>
+                <a:lnTo>
+                  <a:pt x="81865" y="439980"/>
+                </a:lnTo>
+                <a:close/>
+                <a:lnTo>
+                  <a:pt x="82839" y="437928"/>
+                </a:lnTo>
+                <a:close/>
+                <a:lnTo>
+                  <a:pt x="83813" y="435879"/>
+                </a:lnTo>
+                <a:close/>
+                <a:lnTo>
+                  <a:pt x="84787" y="433833"/>
+                </a:lnTo>
+                <a:close/>
+                <a:lnTo>
+                  <a:pt x="85761" y="431786"/>
+                </a:lnTo>
+                <a:close/>
+                <a:lnTo>
+                  <a:pt x="86735" y="429738"/>
+                </a:lnTo>
+                <a:close/>
+                <a:lnTo>
+                  <a:pt x="87709" y="427691"/>
+                </a:lnTo>
+                <a:close/>
+                <a:lnTo>
+                  <a:pt x="88683" y="425643"/>
+                </a:lnTo>
+                <a:close/>
+                <a:lnTo>
+                  <a:pt x="89657" y="423596"/>
+                </a:lnTo>
+                <a:close/>
+                <a:lnTo>
+                  <a:pt x="90631" y="421548"/>
+                </a:lnTo>
+                <a:close/>
+                <a:lnTo>
+                  <a:pt x="91605" y="419501"/>
+                </a:lnTo>
+                <a:close/>
+                <a:lnTo>
+                  <a:pt x="92579" y="417453"/>
+                </a:lnTo>
+                <a:close/>
+                <a:lnTo>
+                  <a:pt x="93553" y="415406"/>
+                </a:lnTo>
+                <a:close/>
+                <a:lnTo>
+                  <a:pt x="94527" y="413358"/>
+                </a:lnTo>
+                <a:close/>
+                <a:lnTo>
+                  <a:pt x="95501" y="411311"/>
+                </a:lnTo>
+                <a:close/>
+                <a:lnTo>
+                  <a:pt x="96475" y="409263"/>
+                </a:lnTo>
+                <a:close/>
+                <a:lnTo>
+                  <a:pt x="97449" y="407216"/>
+                </a:lnTo>
+                <a:close/>
+                <a:lnTo>
+                  <a:pt x="98423" y="405168"/>
+                </a:lnTo>
+                <a:close/>
+                <a:lnTo>
+                  <a:pt x="99397" y="403121"/>
+                </a:lnTo>
+                <a:close/>
+                <a:lnTo>
+                  <a:pt x="100371" y="401074"/>
+                </a:lnTo>
+                <a:close/>
+                <a:lnTo>
+                  <a:pt x="101345" y="399026"/>
+                </a:lnTo>
+                <a:close/>
+                <a:lnTo>
+                  <a:pt x="102319" y="396979"/>
+                </a:lnTo>
+                <a:close/>
+                <a:lnTo>
+                  <a:pt x="103294" y="394931"/>
+                </a:lnTo>
+                <a:close/>
+                <a:lnTo>
+                  <a:pt x="104268" y="392884"/>
+                </a:lnTo>
+                <a:close/>
+                <a:lnTo>
+                  <a:pt x="105242" y="390836"/>
+                </a:lnTo>
+                <a:close/>
+                <a:lnTo>
+                  <a:pt x="106216" y="388789"/>
+                </a:lnTo>
+                <a:close/>
+                <a:lnTo>
+                  <a:pt x="107190" y="386741"/>
+                </a:lnTo>
+                <a:close/>
+                <a:lnTo>
+                  <a:pt x="108164" y="384694"/>
+                </a:lnTo>
+                <a:close/>
+                <a:lnTo>
+                  <a:pt x="109138" y="382647"/>
+                </a:lnTo>
+                <a:close/>
+                <a:lnTo>
+                  <a:pt x="110112" y="380599"/>
+                </a:lnTo>
+                <a:close/>
+                <a:lnTo>
+                  <a:pt x="111086" y="378551"/>
+                </a:lnTo>
+                <a:close/>
+                <a:lnTo>
+                  <a:pt x="112060" y="376504"/>
+                </a:lnTo>
+                <a:close/>
+                <a:lnTo>
+                  <a:pt x="113034" y="374458"/>
+                </a:lnTo>
+                <a:close/>
+                <a:lnTo>
+                  <a:pt x="114008" y="372410"/>
+                </a:lnTo>
+                <a:close/>
+                <a:lnTo>
+                  <a:pt x="114982" y="370359"/>
+                </a:lnTo>
+                <a:close/>
+                <a:lnTo>
+                  <a:pt x="115956" y="368310"/>
+                </a:lnTo>
+                <a:close/>
+                <a:lnTo>
+                  <a:pt x="116930" y="366273"/>
+                </a:lnTo>
+                <a:close/>
+                <a:lnTo>
+                  <a:pt x="117904" y="364248"/>
+                </a:lnTo>
+                <a:close/>
+                <a:lnTo>
+                  <a:pt x="118878" y="362219"/>
+                </a:lnTo>
+                <a:close/>
+                <a:lnTo>
+                  <a:pt x="119852" y="360175"/>
+                </a:lnTo>
+                <a:close/>
+                <a:lnTo>
+                  <a:pt x="120826" y="358123"/>
+                </a:lnTo>
+                <a:close/>
+                <a:lnTo>
+                  <a:pt x="121800" y="356074"/>
+                </a:lnTo>
+                <a:close/>
+                <a:lnTo>
+                  <a:pt x="122774" y="354027"/>
+                </a:lnTo>
+                <a:close/>
+                <a:lnTo>
+                  <a:pt x="123748" y="351981"/>
+                </a:lnTo>
+                <a:close/>
+                <a:lnTo>
+                  <a:pt x="124722" y="349933"/>
+                </a:lnTo>
+                <a:close/>
+                <a:lnTo>
+                  <a:pt x="125696" y="347885"/>
+                </a:lnTo>
+                <a:close/>
+                <a:lnTo>
+                  <a:pt x="126670" y="345838"/>
+                </a:lnTo>
+                <a:close/>
+                <a:lnTo>
+                  <a:pt x="127644" y="343790"/>
+                </a:lnTo>
+                <a:close/>
+                <a:lnTo>
+                  <a:pt x="128618" y="341743"/>
+                </a:lnTo>
+                <a:close/>
+                <a:lnTo>
+                  <a:pt x="129592" y="339695"/>
+                </a:lnTo>
+                <a:close/>
+                <a:lnTo>
+                  <a:pt x="130567" y="337648"/>
+                </a:lnTo>
+                <a:close/>
+                <a:lnTo>
+                  <a:pt x="131541" y="335601"/>
+                </a:lnTo>
+                <a:close/>
+                <a:lnTo>
+                  <a:pt x="132515" y="333553"/>
+                </a:lnTo>
+                <a:close/>
+                <a:lnTo>
+                  <a:pt x="133489" y="331506"/>
+                </a:lnTo>
+                <a:close/>
+                <a:lnTo>
+                  <a:pt x="134463" y="329458"/>
+                </a:lnTo>
+                <a:close/>
+                <a:lnTo>
+                  <a:pt x="135437" y="327411"/>
+                </a:lnTo>
+                <a:close/>
+                <a:lnTo>
+                  <a:pt x="136411" y="325363"/>
+                </a:lnTo>
+                <a:close/>
+                <a:lnTo>
+                  <a:pt x="137385" y="323316"/>
+                </a:lnTo>
+                <a:close/>
+                <a:lnTo>
+                  <a:pt x="138359" y="321268"/>
+                </a:lnTo>
+                <a:close/>
+                <a:lnTo>
+                  <a:pt x="139333" y="319221"/>
+                </a:lnTo>
+                <a:close/>
+                <a:lnTo>
+                  <a:pt x="140307" y="317173"/>
+                </a:lnTo>
+                <a:close/>
+                <a:lnTo>
+                  <a:pt x="141281" y="315126"/>
+                </a:lnTo>
+                <a:close/>
+                <a:lnTo>
+                  <a:pt x="142255" y="313078"/>
+                </a:lnTo>
+                <a:close/>
+                <a:lnTo>
+                  <a:pt x="143229" y="311031"/>
+                </a:lnTo>
+                <a:close/>
+                <a:lnTo>
+                  <a:pt x="144203" y="308984"/>
+                </a:lnTo>
+                <a:close/>
+                <a:lnTo>
+                  <a:pt x="145177" y="306936"/>
+                </a:lnTo>
+                <a:close/>
+                <a:lnTo>
+                  <a:pt x="146151" y="304889"/>
+                </a:lnTo>
+                <a:close/>
+                <a:lnTo>
+                  <a:pt x="147125" y="302841"/>
+                </a:lnTo>
+                <a:close/>
+                <a:lnTo>
+                  <a:pt x="148099" y="300794"/>
+                </a:lnTo>
+                <a:close/>
+                <a:lnTo>
+                  <a:pt x="149073" y="298746"/>
+                </a:lnTo>
+                <a:close/>
+                <a:lnTo>
+                  <a:pt x="150047" y="296699"/>
+                </a:lnTo>
+                <a:close/>
+                <a:lnTo>
+                  <a:pt x="151021" y="294652"/>
+                </a:lnTo>
+                <a:close/>
+                <a:lnTo>
+                  <a:pt x="151995" y="292605"/>
+                </a:lnTo>
+                <a:close/>
+                <a:lnTo>
+                  <a:pt x="152969" y="290554"/>
+                </a:lnTo>
+                <a:close/>
+                <a:lnTo>
+                  <a:pt x="153943" y="288504"/>
+                </a:lnTo>
+                <a:close/>
+                <a:lnTo>
+                  <a:pt x="154917" y="286466"/>
+                </a:lnTo>
+                <a:close/>
+                <a:lnTo>
+                  <a:pt x="155891" y="284440"/>
+                </a:lnTo>
+                <a:close/>
+                <a:lnTo>
+                  <a:pt x="156865" y="282412"/>
+                </a:lnTo>
+                <a:close/>
+                <a:lnTo>
+                  <a:pt x="157841" y="280370"/>
+                </a:lnTo>
+                <a:close/>
+                <a:lnTo>
+                  <a:pt x="158814" y="278319"/>
+                </a:lnTo>
+                <a:close/>
+                <a:lnTo>
+                  <a:pt x="159785" y="276269"/>
+                </a:lnTo>
+                <a:close/>
+                <a:lnTo>
+                  <a:pt x="160757" y="274222"/>
+                </a:lnTo>
+                <a:close/>
+                <a:lnTo>
+                  <a:pt x="161742" y="272175"/>
+                </a:lnTo>
+                <a:close/>
+                <a:lnTo>
+                  <a:pt x="162738" y="270128"/>
+                </a:lnTo>
+                <a:close/>
+                <a:lnTo>
+                  <a:pt x="163731" y="268080"/>
+                </a:lnTo>
+                <a:close/>
+                <a:lnTo>
+                  <a:pt x="164708" y="266033"/>
+                </a:lnTo>
+                <a:close/>
+                <a:lnTo>
+                  <a:pt x="165678" y="263985"/>
+                </a:lnTo>
+                <a:close/>
+                <a:lnTo>
+                  <a:pt x="166650" y="261938"/>
+                </a:lnTo>
+                <a:close/>
+                <a:lnTo>
+                  <a:pt x="167625" y="259890"/>
+                </a:lnTo>
+                <a:close/>
+                <a:lnTo>
+                  <a:pt x="168600" y="257843"/>
+                </a:lnTo>
+                <a:close/>
+                <a:lnTo>
+                  <a:pt x="169574" y="255795"/>
+                </a:lnTo>
+                <a:close/>
+                <a:lnTo>
+                  <a:pt x="170548" y="253748"/>
+                </a:lnTo>
+                <a:close/>
+                <a:lnTo>
+                  <a:pt x="171522" y="251700"/>
+                </a:lnTo>
+                <a:close/>
+                <a:lnTo>
+                  <a:pt x="172496" y="249653"/>
+                </a:lnTo>
+                <a:close/>
+                <a:lnTo>
+                  <a:pt x="173470" y="247605"/>
+                </a:lnTo>
+                <a:close/>
+                <a:lnTo>
+                  <a:pt x="174444" y="245558"/>
+                </a:lnTo>
+                <a:close/>
+                <a:lnTo>
+                  <a:pt x="175418" y="243511"/>
+                </a:lnTo>
+                <a:close/>
+                <a:lnTo>
+                  <a:pt x="176392" y="241463"/>
+                </a:lnTo>
+                <a:close/>
+                <a:lnTo>
+                  <a:pt x="177366" y="239416"/>
+                </a:lnTo>
+                <a:close/>
+                <a:lnTo>
+                  <a:pt x="178340" y="237368"/>
+                </a:lnTo>
+                <a:close/>
+                <a:lnTo>
+                  <a:pt x="179314" y="235321"/>
+                </a:lnTo>
+                <a:close/>
+                <a:lnTo>
+                  <a:pt x="180288" y="233273"/>
+                </a:lnTo>
+                <a:close/>
+                <a:lnTo>
+                  <a:pt x="181262" y="231226"/>
+                </a:lnTo>
+                <a:close/>
+                <a:lnTo>
+                  <a:pt x="182236" y="229178"/>
+                </a:lnTo>
+                <a:close/>
+                <a:lnTo>
+                  <a:pt x="183210" y="227131"/>
+                </a:lnTo>
+                <a:close/>
+                <a:lnTo>
+                  <a:pt x="184184" y="225083"/>
+                </a:lnTo>
+                <a:close/>
+                <a:lnTo>
+                  <a:pt x="185158" y="223036"/>
+                </a:lnTo>
+                <a:close/>
+                <a:lnTo>
+                  <a:pt x="186132" y="220988"/>
+                </a:lnTo>
+                <a:close/>
+                <a:lnTo>
+                  <a:pt x="187106" y="218941"/>
+                </a:lnTo>
+                <a:close/>
+                <a:lnTo>
+                  <a:pt x="188080" y="216893"/>
+                </a:lnTo>
+                <a:close/>
+                <a:lnTo>
+                  <a:pt x="189054" y="214847"/>
+                </a:lnTo>
+                <a:close/>
+                <a:lnTo>
+                  <a:pt x="190028" y="212800"/>
+                </a:lnTo>
+                <a:close/>
+                <a:lnTo>
+                  <a:pt x="191002" y="210749"/>
+                </a:lnTo>
+                <a:close/>
+                <a:lnTo>
+                  <a:pt x="191976" y="208699"/>
+                </a:lnTo>
+                <a:close/>
+                <a:lnTo>
+                  <a:pt x="192950" y="206659"/>
+                </a:lnTo>
+                <a:close/>
+                <a:lnTo>
+                  <a:pt x="193924" y="204633"/>
+                </a:lnTo>
+                <a:close/>
+                <a:lnTo>
+                  <a:pt x="194899" y="202606"/>
+                </a:lnTo>
+                <a:close/>
+                <a:lnTo>
+                  <a:pt x="195873" y="200564"/>
+                </a:lnTo>
+                <a:close/>
+                <a:lnTo>
+                  <a:pt x="196847" y="198514"/>
+                </a:lnTo>
+                <a:close/>
+                <a:lnTo>
+                  <a:pt x="197821" y="196463"/>
+                </a:lnTo>
+                <a:close/>
+                <a:lnTo>
+                  <a:pt x="198795" y="194416"/>
+                </a:lnTo>
+                <a:close/>
+                <a:lnTo>
+                  <a:pt x="199769" y="192370"/>
+                </a:lnTo>
+                <a:close/>
+                <a:lnTo>
+                  <a:pt x="200743" y="190323"/>
+                </a:lnTo>
+                <a:close/>
+                <a:lnTo>
+                  <a:pt x="201717" y="188275"/>
+                </a:lnTo>
+                <a:close/>
+                <a:lnTo>
+                  <a:pt x="202691" y="186227"/>
+                </a:lnTo>
+                <a:close/>
+                <a:lnTo>
+                  <a:pt x="203665" y="184180"/>
+                </a:lnTo>
+                <a:close/>
+                <a:lnTo>
+                  <a:pt x="204639" y="182132"/>
+                </a:lnTo>
+                <a:close/>
+                <a:lnTo>
+                  <a:pt x="205613" y="180085"/>
+                </a:lnTo>
+                <a:close/>
+                <a:lnTo>
+                  <a:pt x="206587" y="178037"/>
+                </a:lnTo>
+                <a:close/>
+                <a:lnTo>
+                  <a:pt x="207561" y="175990"/>
+                </a:lnTo>
+                <a:close/>
+                <a:lnTo>
+                  <a:pt x="208535" y="173943"/>
+                </a:lnTo>
+                <a:close/>
+                <a:lnTo>
+                  <a:pt x="209509" y="171895"/>
+                </a:lnTo>
+                <a:close/>
+                <a:lnTo>
+                  <a:pt x="210483" y="169848"/>
+                </a:lnTo>
+                <a:close/>
+                <a:lnTo>
+                  <a:pt x="211457" y="167800"/>
+                </a:lnTo>
+                <a:close/>
+                <a:lnTo>
+                  <a:pt x="212431" y="165753"/>
+                </a:lnTo>
+                <a:close/>
+                <a:lnTo>
+                  <a:pt x="213405" y="163705"/>
+                </a:lnTo>
+                <a:close/>
+                <a:lnTo>
+                  <a:pt x="214379" y="161658"/>
+                </a:lnTo>
+                <a:close/>
+                <a:lnTo>
+                  <a:pt x="215353" y="159610"/>
+                </a:lnTo>
+                <a:close/>
+                <a:lnTo>
+                  <a:pt x="216327" y="157563"/>
+                </a:lnTo>
+                <a:close/>
+                <a:lnTo>
+                  <a:pt x="217301" y="155515"/>
+                </a:lnTo>
+                <a:close/>
+                <a:lnTo>
+                  <a:pt x="218275" y="153468"/>
+                </a:lnTo>
+                <a:close/>
+                <a:lnTo>
+                  <a:pt x="219249" y="151421"/>
+                </a:lnTo>
+                <a:close/>
+                <a:lnTo>
+                  <a:pt x="220223" y="149373"/>
+                </a:lnTo>
+                <a:close/>
+                <a:lnTo>
+                  <a:pt x="221197" y="147326"/>
+                </a:lnTo>
+                <a:close/>
+                <a:lnTo>
+                  <a:pt x="222171" y="145278"/>
+                </a:lnTo>
+                <a:close/>
+                <a:lnTo>
+                  <a:pt x="223146" y="143231"/>
+                </a:lnTo>
+                <a:close/>
+                <a:lnTo>
+                  <a:pt x="224120" y="141183"/>
+                </a:lnTo>
+                <a:close/>
+                <a:lnTo>
+                  <a:pt x="225094" y="139135"/>
+                </a:lnTo>
+                <a:close/>
+                <a:lnTo>
+                  <a:pt x="226068" y="137088"/>
+                </a:lnTo>
+                <a:close/>
+                <a:lnTo>
+                  <a:pt x="227042" y="135042"/>
+                </a:lnTo>
+                <a:close/>
+                <a:lnTo>
+                  <a:pt x="228016" y="132995"/>
+                </a:lnTo>
+                <a:close/>
+                <a:lnTo>
+                  <a:pt x="228990" y="130944"/>
+                </a:lnTo>
+                <a:close/>
+                <a:lnTo>
+                  <a:pt x="229964" y="128894"/>
+                </a:lnTo>
+                <a:close/>
+                <a:lnTo>
+                  <a:pt x="230938" y="126852"/>
+                </a:lnTo>
+                <a:close/>
+                <a:lnTo>
+                  <a:pt x="231912" y="124825"/>
+                </a:lnTo>
+                <a:close/>
+                <a:lnTo>
+                  <a:pt x="232886" y="122799"/>
+                </a:lnTo>
+                <a:close/>
+                <a:lnTo>
+                  <a:pt x="233860" y="120759"/>
+                </a:lnTo>
+                <a:close/>
+                <a:lnTo>
+                  <a:pt x="234834" y="118709"/>
+                </a:lnTo>
+                <a:close/>
+                <a:lnTo>
+                  <a:pt x="235808" y="116658"/>
+                </a:lnTo>
+                <a:close/>
+                <a:lnTo>
+                  <a:pt x="236782" y="114611"/>
+                </a:lnTo>
+                <a:close/>
+                <a:lnTo>
+                  <a:pt x="237756" y="112565"/>
+                </a:lnTo>
+                <a:close/>
+                <a:lnTo>
+                  <a:pt x="238730" y="110517"/>
+                </a:lnTo>
+                <a:close/>
+                <a:lnTo>
+                  <a:pt x="239704" y="108470"/>
+                </a:lnTo>
+                <a:close/>
+                <a:lnTo>
+                  <a:pt x="240678" y="106422"/>
+                </a:lnTo>
+                <a:close/>
+                <a:lnTo>
+                  <a:pt x="241652" y="104375"/>
+                </a:lnTo>
+                <a:close/>
+                <a:lnTo>
+                  <a:pt x="242626" y="102327"/>
+                </a:lnTo>
+                <a:close/>
+                <a:lnTo>
+                  <a:pt x="243600" y="100280"/>
+                </a:lnTo>
+                <a:close/>
+                <a:lnTo>
+                  <a:pt x="244574" y="98232"/>
+                </a:lnTo>
+                <a:close/>
+                <a:lnTo>
+                  <a:pt x="245548" y="96185"/>
+                </a:lnTo>
+                <a:close/>
+                <a:lnTo>
+                  <a:pt x="246522" y="94137"/>
+                </a:lnTo>
+                <a:close/>
+                <a:lnTo>
+                  <a:pt x="247496" y="92090"/>
+                </a:lnTo>
+                <a:close/>
+                <a:lnTo>
+                  <a:pt x="248470" y="90042"/>
+                </a:lnTo>
+                <a:close/>
+                <a:lnTo>
+                  <a:pt x="249444" y="87995"/>
+                </a:lnTo>
+                <a:close/>
+                <a:lnTo>
+                  <a:pt x="250418" y="85947"/>
+                </a:lnTo>
+                <a:close/>
+                <a:lnTo>
+                  <a:pt x="251393" y="83900"/>
+                </a:lnTo>
+                <a:close/>
+                <a:lnTo>
+                  <a:pt x="252367" y="81853"/>
+                </a:lnTo>
+                <a:close/>
+                <a:lnTo>
+                  <a:pt x="253341" y="79805"/>
+                </a:lnTo>
+                <a:close/>
+                <a:lnTo>
+                  <a:pt x="254315" y="77758"/>
+                </a:lnTo>
+                <a:close/>
+                <a:lnTo>
+                  <a:pt x="255289" y="75710"/>
+                </a:lnTo>
+                <a:close/>
+                <a:lnTo>
+                  <a:pt x="256263" y="73663"/>
+                </a:lnTo>
+                <a:close/>
+                <a:lnTo>
+                  <a:pt x="257237" y="71615"/>
+                </a:lnTo>
+                <a:close/>
+                <a:lnTo>
+                  <a:pt x="258211" y="69568"/>
+                </a:lnTo>
+                <a:close/>
+                <a:lnTo>
+                  <a:pt x="259185" y="67520"/>
+                </a:lnTo>
+                <a:close/>
+                <a:lnTo>
+                  <a:pt x="260159" y="65473"/>
+                </a:lnTo>
+                <a:close/>
+                <a:lnTo>
+                  <a:pt x="261133" y="63425"/>
+                </a:lnTo>
+                <a:close/>
+                <a:lnTo>
+                  <a:pt x="262107" y="61378"/>
+                </a:lnTo>
+                <a:close/>
+                <a:lnTo>
+                  <a:pt x="263081" y="59330"/>
+                </a:lnTo>
+                <a:close/>
+                <a:lnTo>
+                  <a:pt x="264055" y="57283"/>
+                </a:lnTo>
+                <a:close/>
+                <a:lnTo>
+                  <a:pt x="265029" y="55236"/>
+                </a:lnTo>
+                <a:close/>
+                <a:lnTo>
+                  <a:pt x="266003" y="53189"/>
+                </a:lnTo>
+                <a:close/>
+                <a:lnTo>
+                  <a:pt x="266977" y="51139"/>
+                </a:lnTo>
+                <a:close/>
+                <a:lnTo>
+                  <a:pt x="267951" y="49088"/>
+                </a:lnTo>
+                <a:close/>
+                <a:lnTo>
+                  <a:pt x="268925" y="47046"/>
+                </a:lnTo>
+                <a:close/>
+                <a:lnTo>
+                  <a:pt x="269899" y="45018"/>
+                </a:lnTo>
+                <a:close/>
+                <a:lnTo>
+                  <a:pt x="270873" y="42992"/>
+                </a:lnTo>
+                <a:close/>
+                <a:lnTo>
+                  <a:pt x="271848" y="40954"/>
+                </a:lnTo>
+                <a:close/>
+                <a:lnTo>
+                  <a:pt x="272823" y="38904"/>
+                </a:lnTo>
+                <a:close/>
+                <a:lnTo>
+                  <a:pt x="273794" y="36853"/>
+                </a:lnTo>
+                <a:close/>
+                <a:lnTo>
+                  <a:pt x="274764" y="34806"/>
+                </a:lnTo>
+                <a:close/>
+                <a:lnTo>
+                  <a:pt x="275745" y="32759"/>
+                </a:lnTo>
+                <a:close/>
+                <a:lnTo>
+                  <a:pt x="276739" y="30712"/>
+                </a:lnTo>
+                <a:close/>
+                <a:lnTo>
+                  <a:pt x="277734" y="28664"/>
+                </a:lnTo>
+                <a:close/>
+                <a:lnTo>
+                  <a:pt x="278716" y="26617"/>
+                </a:lnTo>
+                <a:close/>
+                <a:lnTo>
+                  <a:pt x="279687" y="24569"/>
+                </a:lnTo>
+                <a:close/>
+                <a:lnTo>
+                  <a:pt x="280658" y="22522"/>
+                </a:lnTo>
+                <a:close/>
+                <a:lnTo>
+                  <a:pt x="281632" y="20474"/>
+                </a:lnTo>
+                <a:close/>
+                <a:lnTo>
+                  <a:pt x="282608" y="18427"/>
+                </a:lnTo>
+                <a:close/>
+                <a:lnTo>
+                  <a:pt x="283582" y="16380"/>
+                </a:lnTo>
+                <a:close/>
+                <a:lnTo>
+                  <a:pt x="284555" y="14332"/>
+                </a:lnTo>
+                <a:close/>
+                <a:lnTo>
+                  <a:pt x="285529" y="12285"/>
+                </a:lnTo>
+                <a:close/>
+                <a:lnTo>
+                  <a:pt x="286503" y="10237"/>
+                </a:lnTo>
+                <a:close/>
+                <a:lnTo>
+                  <a:pt x="287478" y="8190"/>
+                </a:lnTo>
+                <a:close/>
+                <a:lnTo>
+                  <a:pt x="288452" y="6142"/>
+                </a:lnTo>
+                <a:close/>
+                <a:lnTo>
+                  <a:pt x="289426" y="4095"/>
+                </a:lnTo>
+                <a:close/>
+                <a:lnTo>
+                  <a:pt x="290400" y="2047"/>
+                </a:lnTo>
+                <a:close/>
+                <a:lnTo>
+                  <a:pt x="291374" y="0"/>
+                </a:lnTo>
+                <a:close/>
+              </a:path>
+            </a:pathLst>
+          </a:custGeom>
+          <a:ln w="31750">
+            <a:solidFill>
+              <a:srgbClr val="FFFFFF"/>
+            </a:solidFill>
+          </a:ln>
+        </p:spPr>
+        <p:style>
+          <a:lnRef idx="1">
+            <a:schemeClr val="accent1"/>
+          </a:lnRef>
+          <a:fillRef idx="3">
+            <a:schemeClr val="accent1"/>
+          </a:fillRef>
+          <a:effectRef idx="2">
+            <a:schemeClr val="accent1"/>
+          </a:effectRef>
+          <a:fontRef idx="minor">
+            <a:schemeClr val="lt1"/>
+          </a:fontRef>
+        </p:style>
+        <p:txBody>
+          <a:bodyPr rtlCol="0" anchor="ctr"/>
+          <a:lstStyle/>
+          <a:p>
+            <a:pPr algn="ctr"/>
+          </a:p>
+        </p:txBody>
+      </p:sp>
       <p:cxnSp>
         <p:nvCxnSpPr>
-          <p:cNvPr id="5" name="Connector 4"/>
+          <p:cNvPr id="6" name="Connector 5"/>
           <p:cNvCxnSpPr/>
           <p:nvPr/>
         </p:nvCxnSpPr>
         <p:spPr>
           <a:xfrm flipV="1">
-            <a:off x="5715000.0" y="1748790.0"/>
-            <a:ext cx="0.0" cy="822960.0"/>
+            <a:off x="5029200.0" y="2114550.0"/>
+            <a:ext cx="0.0" cy="457200.0"/>
           </a:xfrm>
           <a:prstGeom prst="line">
             <a:avLst/>
@@ -4453,14 +5702,14 @@
       </p:cxnSp>
       <p:cxnSp>
         <p:nvCxnSpPr>
-          <p:cNvPr id="6" name="Connector 5"/>
+          <p:cNvPr id="7" name="Connector 6"/>
           <p:cNvCxnSpPr/>
           <p:nvPr/>
         </p:nvCxnSpPr>
         <p:spPr>
           <a:xfrm>
-            <a:off x="4572000.0" y="1748790.0"/>
-            <a:ext cx="1143000.0" cy="0.0"/>
+            <a:off x="4572000.0" y="2114550.0"/>
+            <a:ext cx="457200.0" cy="0.0"/>
           </a:xfrm>
           <a:prstGeom prst="line">
             <a:avLst/>
@@ -4489,20 +5738,20 @@
       </p:cxnSp>
       <p:sp>
         <p:nvSpPr>
-          <p:cNvPr id="7" name="Oval 6"/>
+          <p:cNvPr id="8" name="Oval 7"/>
           <p:cNvSpPr/>
           <p:nvPr/>
         </p:nvSpPr>
         <p:spPr>
           <a:xfrm>
-            <a:off x="5664200" y="1697990"/>
+            <a:off x="4978400" y="2063750"/>
             <a:ext cx="101600" cy="101600"/>
           </a:xfrm>
           <a:prstGeom prst="ellipse">
             <a:avLst/>
           </a:prstGeom>
           <a:solidFill>
-            <a:srgbClr val="0A0A0A"/>
+            <a:srgbClr val="000000"/>
           </a:solidFill>
           <a:ln w="12700">
             <a:solidFill>
@@ -4534,14 +5783,14 @@
       </p:sp>
       <p:cxnSp>
         <p:nvCxnSpPr>
-          <p:cNvPr id="8" name="Connector 7"/>
+          <p:cNvPr id="9" name="Connector 8"/>
           <p:cNvCxnSpPr/>
           <p:nvPr/>
         </p:nvCxnSpPr>
         <p:spPr>
           <a:xfrm>
-            <a:off x="5394960.0" y="2571750.0"/>
-            <a:ext cx="182880.0" cy="0.0"/>
+            <a:off x="4905756.0" y="2571750.0"/>
+            <a:ext cx="91440.0" cy="0.0"/>
           </a:xfrm>
           <a:prstGeom prst="line">
             <a:avLst/>
@@ -4569,14 +5818,14 @@
       </p:cxnSp>
       <p:cxnSp>
         <p:nvCxnSpPr>
-          <p:cNvPr id="9" name="Connector 8"/>
+          <p:cNvPr id="10" name="Connector 9"/>
           <p:cNvCxnSpPr/>
           <p:nvPr/>
         </p:nvCxnSpPr>
         <p:spPr>
           <a:xfrm flipH="1">
-            <a:off x="5852160.0" y="2571750.0"/>
-            <a:ext cx="182880.0" cy="0.0"/>
+            <a:off x="5061204.0" y="2571750.0"/>
+            <a:ext cx="91440.0" cy="0.0"/>
           </a:xfrm>
           <a:prstGeom prst="line">
             <a:avLst/>
@@ -4604,14 +5853,14 @@
       </p:cxnSp>
       <p:sp>
         <p:nvSpPr>
-          <p:cNvPr id="10" name="Freeform 9"/>
+          <p:cNvPr id="11" name="Freeform 10"/>
           <p:cNvSpPr/>
           <p:nvPr/>
         </p:nvSpPr>
         <p:spPr>
           <a:xfrm>
-            <a:off x="5257800" y="1748799"/>
-            <a:ext cx="452628" cy="91431"/>
+            <a:off x="4805081" y="1547211"/>
+            <a:ext cx="217398" cy="456514"/>
           </a:xfrm>
           <a:custGeom>
             <a:avLst/>
@@ -4620,404 +5869,404 @@
             <a:cxnLst/>
             <a:rect l="l" t="t" r="r" b="b"/>
             <a:pathLst>
-              <a:path w="452628" h="91431">
+              <a:path w="217398" h="456514">
                 <a:moveTo>
-                  <a:pt x="0" y="91431"/>
+                  <a:pt x="0" y="456514"/>
                 </a:moveTo>
                 <a:lnTo>
-                  <a:pt x="6235" y="88933"/>
-                </a:lnTo>
-                <a:close/>
-                <a:lnTo>
-                  <a:pt x="12469" y="86439"/>
-                </a:lnTo>
-                <a:close/>
-                <a:lnTo>
-                  <a:pt x="18704" y="83947"/>
-                </a:lnTo>
-                <a:close/>
-                <a:lnTo>
-                  <a:pt x="24938" y="81457"/>
-                </a:lnTo>
-                <a:close/>
-                <a:lnTo>
-                  <a:pt x="31173" y="78966"/>
-                </a:lnTo>
-                <a:close/>
-                <a:lnTo>
-                  <a:pt x="37407" y="76473"/>
-                </a:lnTo>
-                <a:close/>
-                <a:lnTo>
-                  <a:pt x="43642" y="73976"/>
-                </a:lnTo>
-                <a:close/>
-                <a:lnTo>
-                  <a:pt x="49876" y="71475"/>
-                </a:lnTo>
-                <a:close/>
-                <a:lnTo>
-                  <a:pt x="56111" y="68973"/>
-                </a:lnTo>
-                <a:close/>
-                <a:lnTo>
-                  <a:pt x="62345" y="66479"/>
-                </a:lnTo>
-                <a:close/>
-                <a:lnTo>
-                  <a:pt x="68580" y="63999"/>
-                </a:lnTo>
-                <a:close/>
-                <a:lnTo>
-                  <a:pt x="74815" y="61536"/>
-                </a:lnTo>
-                <a:close/>
-                <a:lnTo>
-                  <a:pt x="81049" y="59066"/>
-                </a:lnTo>
-                <a:close/>
-                <a:lnTo>
-                  <a:pt x="87284" y="56560"/>
-                </a:lnTo>
-                <a:close/>
-                <a:lnTo>
-                  <a:pt x="93518" y="53990"/>
-                </a:lnTo>
-                <a:close/>
-                <a:lnTo>
-                  <a:pt x="99753" y="51379"/>
-                </a:lnTo>
-                <a:close/>
-                <a:lnTo>
-                  <a:pt x="105987" y="48828"/>
-                </a:lnTo>
-                <a:close/>
-                <a:lnTo>
-                  <a:pt x="112222" y="46448"/>
-                </a:lnTo>
-                <a:close/>
-                <a:lnTo>
-                  <a:pt x="118456" y="44335"/>
-                </a:lnTo>
-                <a:close/>
-                <a:lnTo>
-                  <a:pt x="124691" y="42449"/>
-                </a:lnTo>
-                <a:close/>
-                <a:lnTo>
-                  <a:pt x="130925" y="40665"/>
-                </a:lnTo>
-                <a:close/>
-                <a:lnTo>
-                  <a:pt x="137160" y="38853"/>
-                </a:lnTo>
-                <a:close/>
-                <a:lnTo>
-                  <a:pt x="143395" y="36927"/>
-                </a:lnTo>
-                <a:close/>
-                <a:lnTo>
-                  <a:pt x="149629" y="34972"/>
-                </a:lnTo>
-                <a:close/>
-                <a:lnTo>
-                  <a:pt x="155864" y="33116"/>
-                </a:lnTo>
-                <a:close/>
-                <a:lnTo>
-                  <a:pt x="162098" y="31483"/>
-                </a:lnTo>
-                <a:close/>
-                <a:lnTo>
-                  <a:pt x="168333" y="30114"/>
-                </a:lnTo>
-                <a:close/>
-                <a:lnTo>
-                  <a:pt x="174567" y="28920"/>
-                </a:lnTo>
-                <a:close/>
-                <a:lnTo>
-                  <a:pt x="180802" y="27798"/>
-                </a:lnTo>
-                <a:close/>
-                <a:lnTo>
-                  <a:pt x="187036" y="26652"/>
-                </a:lnTo>
-                <a:close/>
-                <a:lnTo>
-                  <a:pt x="193271" y="25445"/>
-                </a:lnTo>
-                <a:close/>
-                <a:lnTo>
-                  <a:pt x="199505" y="24177"/>
-                </a:lnTo>
-                <a:close/>
-                <a:lnTo>
-                  <a:pt x="205740" y="22851"/>
-                </a:lnTo>
-                <a:close/>
-                <a:lnTo>
-                  <a:pt x="211975" y="21484"/>
-                </a:lnTo>
-                <a:close/>
-                <a:lnTo>
-                  <a:pt x="218209" y="20155"/>
-                </a:lnTo>
-                <a:close/>
-                <a:lnTo>
-                  <a:pt x="224444" y="18958"/>
-                </a:lnTo>
-                <a:close/>
-                <a:lnTo>
-                  <a:pt x="230678" y="17985"/>
-                </a:lnTo>
-                <a:close/>
-                <a:lnTo>
-                  <a:pt x="236913" y="17258"/>
-                </a:lnTo>
-                <a:close/>
-                <a:lnTo>
-                  <a:pt x="243147" y="16686"/>
-                </a:lnTo>
-                <a:close/>
-                <a:lnTo>
-                  <a:pt x="249382" y="16170"/>
-                </a:lnTo>
-                <a:close/>
-                <a:lnTo>
-                  <a:pt x="255617" y="15616"/>
-                </a:lnTo>
-                <a:close/>
-                <a:lnTo>
-                  <a:pt x="261851" y="15003"/>
-                </a:lnTo>
-                <a:close/>
-                <a:lnTo>
-                  <a:pt x="268086" y="14358"/>
-                </a:lnTo>
-                <a:close/>
-                <a:lnTo>
-                  <a:pt x="274320" y="13707"/>
-                </a:lnTo>
-                <a:close/>
-                <a:lnTo>
-                  <a:pt x="280553" y="13072"/>
-                </a:lnTo>
-                <a:close/>
-                <a:lnTo>
-                  <a:pt x="286787" y="12450"/>
-                </a:lnTo>
-                <a:close/>
-                <a:lnTo>
-                  <a:pt x="293022" y="11833"/>
-                </a:lnTo>
-                <a:close/>
-                <a:lnTo>
-                  <a:pt x="299259" y="11214"/>
-                </a:lnTo>
-                <a:close/>
-                <a:lnTo>
-                  <a:pt x="305499" y="10589"/>
-                </a:lnTo>
-                <a:close/>
-                <a:lnTo>
-                  <a:pt x="311735" y="9963"/>
-                </a:lnTo>
-                <a:close/>
-                <a:lnTo>
-                  <a:pt x="317965" y="9341"/>
-                </a:lnTo>
-                <a:close/>
-                <a:lnTo>
-                  <a:pt x="324186" y="8727"/>
-                </a:lnTo>
-                <a:close/>
-                <a:lnTo>
-                  <a:pt x="330405" y="8115"/>
-                </a:lnTo>
-                <a:close/>
-                <a:lnTo>
-                  <a:pt x="336638" y="7493"/>
-                </a:lnTo>
-                <a:close/>
-                <a:lnTo>
-                  <a:pt x="342900" y="6849"/>
-                </a:lnTo>
-                <a:close/>
-                <a:lnTo>
-                  <a:pt x="349195" y="6180"/>
-                </a:lnTo>
-                <a:close/>
-                <a:lnTo>
-                  <a:pt x="355478" y="5521"/>
-                </a:lnTo>
-                <a:close/>
-                <a:lnTo>
-                  <a:pt x="361688" y="4915"/>
-                </a:lnTo>
-                <a:close/>
-                <a:lnTo>
-                  <a:pt x="367770" y="4407"/>
-                </a:lnTo>
-                <a:close/>
-                <a:lnTo>
-                  <a:pt x="373770" y="4003"/>
-                </a:lnTo>
-                <a:close/>
-                <a:lnTo>
-                  <a:pt x="379891" y="3657"/>
-                </a:lnTo>
-                <a:close/>
-                <a:lnTo>
-                  <a:pt x="386353" y="3314"/>
-                </a:lnTo>
-                <a:close/>
-                <a:lnTo>
-                  <a:pt x="393322" y="2928"/>
-                </a:lnTo>
-                <a:close/>
-                <a:lnTo>
-                  <a:pt x="400373" y="2513"/>
-                </a:lnTo>
-                <a:close/>
-                <a:lnTo>
-                  <a:pt x="406697" y="2125"/>
-                </a:lnTo>
-                <a:close/>
-                <a:lnTo>
-                  <a:pt x="411480" y="1820"/>
-                </a:lnTo>
-                <a:close/>
-                <a:lnTo>
-                  <a:pt x="414178" y="1635"/>
-                </a:lnTo>
-                <a:close/>
-                <a:lnTo>
-                  <a:pt x="415336" y="1541"/>
-                </a:lnTo>
-                <a:close/>
-                <a:lnTo>
-                  <a:pt x="415766" y="1489"/>
-                </a:lnTo>
-                <a:close/>
-                <a:lnTo>
-                  <a:pt x="416279" y="1432"/>
-                </a:lnTo>
-                <a:close/>
-                <a:lnTo>
-                  <a:pt x="417299" y="1345"/>
-                </a:lnTo>
-                <a:close/>
-                <a:lnTo>
-                  <a:pt x="418659" y="1238"/>
-                </a:lnTo>
-                <a:close/>
-                <a:lnTo>
-                  <a:pt x="420141" y="1125"/>
-                </a:lnTo>
-                <a:close/>
-                <a:lnTo>
-                  <a:pt x="421540" y="1018"/>
-                </a:lnTo>
-                <a:close/>
-                <a:lnTo>
-                  <a:pt x="422811" y="919"/>
-                </a:lnTo>
-                <a:close/>
-                <a:lnTo>
-                  <a:pt x="424010" y="822"/>
-                </a:lnTo>
-                <a:close/>
-                <a:lnTo>
-                  <a:pt x="425196" y="723"/>
-                </a:lnTo>
-                <a:close/>
-                <a:lnTo>
-                  <a:pt x="426415" y="617"/>
-                </a:lnTo>
-                <a:close/>
-                <a:lnTo>
-                  <a:pt x="427664" y="511"/>
-                </a:lnTo>
-                <a:close/>
-                <a:lnTo>
-                  <a:pt x="428926" y="413"/>
-                </a:lnTo>
-                <a:close/>
-                <a:lnTo>
-                  <a:pt x="430187" y="332"/>
-                </a:lnTo>
-                <a:close/>
-                <a:lnTo>
-                  <a:pt x="431439" y="269"/>
-                </a:lnTo>
-                <a:close/>
-                <a:lnTo>
-                  <a:pt x="432683" y="222"/>
-                </a:lnTo>
-                <a:close/>
-                <a:lnTo>
-                  <a:pt x="433926" y="185"/>
-                </a:lnTo>
-                <a:close/>
-                <a:lnTo>
-                  <a:pt x="435170" y="153"/>
-                </a:lnTo>
-                <a:close/>
-                <a:lnTo>
-                  <a:pt x="436416" y="126"/>
-                </a:lnTo>
-                <a:close/>
-                <a:lnTo>
-                  <a:pt x="437664" y="102"/>
-                </a:lnTo>
-                <a:close/>
-                <a:lnTo>
-                  <a:pt x="438912" y="82"/>
-                </a:lnTo>
-                <a:close/>
-                <a:lnTo>
-                  <a:pt x="440159" y="66"/>
-                </a:lnTo>
-                <a:close/>
-                <a:lnTo>
-                  <a:pt x="441406" y="53"/>
-                </a:lnTo>
-                <a:close/>
-                <a:lnTo>
-                  <a:pt x="442653" y="43"/>
-                </a:lnTo>
-                <a:close/>
-                <a:lnTo>
-                  <a:pt x="443900" y="34"/>
-                </a:lnTo>
-                <a:close/>
-                <a:lnTo>
-                  <a:pt x="445146" y="27"/>
-                </a:lnTo>
-                <a:close/>
-                <a:lnTo>
-                  <a:pt x="446393" y="21"/>
-                </a:lnTo>
-                <a:close/>
-                <a:lnTo>
-                  <a:pt x="447640" y="15"/>
-                </a:lnTo>
-                <a:close/>
-                <a:lnTo>
-                  <a:pt x="448887" y="11"/>
-                </a:lnTo>
-                <a:close/>
-                <a:lnTo>
-                  <a:pt x="450134" y="7"/>
-                </a:lnTo>
-                <a:close/>
-                <a:lnTo>
-                  <a:pt x="451381" y="4"/>
-                </a:lnTo>
-                <a:close/>
-                <a:lnTo>
-                  <a:pt x="452628" y="0"/>
+                  <a:pt x="2195" y="451945"/>
+                </a:lnTo>
+                <a:close/>
+                <a:lnTo>
+                  <a:pt x="4390" y="447332"/>
+                </a:lnTo>
+                <a:close/>
+                <a:lnTo>
+                  <a:pt x="6585" y="442717"/>
+                </a:lnTo>
+                <a:close/>
+                <a:lnTo>
+                  <a:pt x="8780" y="438103"/>
+                </a:lnTo>
+                <a:close/>
+                <a:lnTo>
+                  <a:pt x="10975" y="433489"/>
+                </a:lnTo>
+                <a:close/>
+                <a:lnTo>
+                  <a:pt x="13170" y="428875"/>
+                </a:lnTo>
+                <a:close/>
+                <a:lnTo>
+                  <a:pt x="15365" y="424261"/>
+                </a:lnTo>
+                <a:close/>
+                <a:lnTo>
+                  <a:pt x="17560" y="419647"/>
+                </a:lnTo>
+                <a:close/>
+                <a:lnTo>
+                  <a:pt x="19755" y="415033"/>
+                </a:lnTo>
+                <a:close/>
+                <a:lnTo>
+                  <a:pt x="21950" y="410419"/>
+                </a:lnTo>
+                <a:close/>
+                <a:lnTo>
+                  <a:pt x="24145" y="405805"/>
+                </a:lnTo>
+                <a:close/>
+                <a:lnTo>
+                  <a:pt x="26340" y="401191"/>
+                </a:lnTo>
+                <a:close/>
+                <a:lnTo>
+                  <a:pt x="28535" y="396577"/>
+                </a:lnTo>
+                <a:close/>
+                <a:lnTo>
+                  <a:pt x="30730" y="391963"/>
+                </a:lnTo>
+                <a:close/>
+                <a:lnTo>
+                  <a:pt x="32925" y="387349"/>
+                </a:lnTo>
+                <a:close/>
+                <a:lnTo>
+                  <a:pt x="35120" y="382736"/>
+                </a:lnTo>
+                <a:close/>
+                <a:lnTo>
+                  <a:pt x="37315" y="378116"/>
+                </a:lnTo>
+                <a:close/>
+                <a:lnTo>
+                  <a:pt x="39510" y="373537"/>
+                </a:lnTo>
+                <a:close/>
+                <a:lnTo>
+                  <a:pt x="41705" y="368942"/>
+                </a:lnTo>
+                <a:close/>
+                <a:lnTo>
+                  <a:pt x="43900" y="364324"/>
+                </a:lnTo>
+                <a:close/>
+                <a:lnTo>
+                  <a:pt x="46095" y="359711"/>
+                </a:lnTo>
+                <a:close/>
+                <a:lnTo>
+                  <a:pt x="48291" y="355097"/>
+                </a:lnTo>
+                <a:close/>
+                <a:lnTo>
+                  <a:pt x="50480" y="350483"/>
+                </a:lnTo>
+                <a:close/>
+                <a:lnTo>
+                  <a:pt x="52704" y="345869"/>
+                </a:lnTo>
+                <a:close/>
+                <a:lnTo>
+                  <a:pt x="54925" y="341255"/>
+                </a:lnTo>
+                <a:close/>
+                <a:lnTo>
+                  <a:pt x="57115" y="336640"/>
+                </a:lnTo>
+                <a:close/>
+                <a:lnTo>
+                  <a:pt x="59311" y="332026"/>
+                </a:lnTo>
+                <a:close/>
+                <a:lnTo>
+                  <a:pt x="61506" y="327412"/>
+                </a:lnTo>
+                <a:close/>
+                <a:lnTo>
+                  <a:pt x="63701" y="322798"/>
+                </a:lnTo>
+                <a:close/>
+                <a:lnTo>
+                  <a:pt x="65896" y="318184"/>
+                </a:lnTo>
+                <a:close/>
+                <a:lnTo>
+                  <a:pt x="68091" y="313570"/>
+                </a:lnTo>
+                <a:close/>
+                <a:lnTo>
+                  <a:pt x="70286" y="308956"/>
+                </a:lnTo>
+                <a:close/>
+                <a:lnTo>
+                  <a:pt x="72481" y="304343"/>
+                </a:lnTo>
+                <a:close/>
+                <a:lnTo>
+                  <a:pt x="74676" y="299725"/>
+                </a:lnTo>
+                <a:close/>
+                <a:lnTo>
+                  <a:pt x="76871" y="295126"/>
+                </a:lnTo>
+                <a:close/>
+                <a:lnTo>
+                  <a:pt x="79066" y="290551"/>
+                </a:lnTo>
+                <a:close/>
+                <a:lnTo>
+                  <a:pt x="81261" y="285931"/>
+                </a:lnTo>
+                <a:close/>
+                <a:lnTo>
+                  <a:pt x="83456" y="281318"/>
+                </a:lnTo>
+                <a:close/>
+                <a:lnTo>
+                  <a:pt x="85651" y="276704"/>
+                </a:lnTo>
+                <a:close/>
+                <a:lnTo>
+                  <a:pt x="87846" y="272090"/>
+                </a:lnTo>
+                <a:close/>
+                <a:lnTo>
+                  <a:pt x="90041" y="267476"/>
+                </a:lnTo>
+                <a:close/>
+                <a:lnTo>
+                  <a:pt x="92236" y="262862"/>
+                </a:lnTo>
+                <a:close/>
+                <a:lnTo>
+                  <a:pt x="94431" y="258248"/>
+                </a:lnTo>
+                <a:close/>
+                <a:lnTo>
+                  <a:pt x="96626" y="253634"/>
+                </a:lnTo>
+                <a:close/>
+                <a:lnTo>
+                  <a:pt x="98821" y="249020"/>
+                </a:lnTo>
+                <a:close/>
+                <a:lnTo>
+                  <a:pt x="101016" y="244406"/>
+                </a:lnTo>
+                <a:close/>
+                <a:lnTo>
+                  <a:pt x="103211" y="239792"/>
+                </a:lnTo>
+                <a:close/>
+                <a:lnTo>
+                  <a:pt x="105406" y="235178"/>
+                </a:lnTo>
+                <a:close/>
+                <a:lnTo>
+                  <a:pt x="107601" y="230564"/>
+                </a:lnTo>
+                <a:close/>
+                <a:lnTo>
+                  <a:pt x="109796" y="225950"/>
+                </a:lnTo>
+                <a:close/>
+                <a:lnTo>
+                  <a:pt x="111991" y="221336"/>
+                </a:lnTo>
+                <a:close/>
+                <a:lnTo>
+                  <a:pt x="114186" y="216720"/>
+                </a:lnTo>
+                <a:close/>
+                <a:lnTo>
+                  <a:pt x="116381" y="212151"/>
+                </a:lnTo>
+                <a:close/>
+                <a:lnTo>
+                  <a:pt x="118576" y="207540"/>
+                </a:lnTo>
+                <a:close/>
+                <a:lnTo>
+                  <a:pt x="120771" y="202925"/>
+                </a:lnTo>
+                <a:close/>
+                <a:lnTo>
+                  <a:pt x="122967" y="198311"/>
+                </a:lnTo>
+                <a:close/>
+                <a:lnTo>
+                  <a:pt x="125162" y="193697"/>
+                </a:lnTo>
+                <a:close/>
+                <a:lnTo>
+                  <a:pt x="127357" y="189083"/>
+                </a:lnTo>
+                <a:close/>
+                <a:lnTo>
+                  <a:pt x="129552" y="184469"/>
+                </a:lnTo>
+                <a:close/>
+                <a:lnTo>
+                  <a:pt x="131747" y="179855"/>
+                </a:lnTo>
+                <a:close/>
+                <a:lnTo>
+                  <a:pt x="133942" y="175241"/>
+                </a:lnTo>
+                <a:close/>
+                <a:lnTo>
+                  <a:pt x="136137" y="170627"/>
+                </a:lnTo>
+                <a:close/>
+                <a:lnTo>
+                  <a:pt x="138332" y="166013"/>
+                </a:lnTo>
+                <a:close/>
+                <a:lnTo>
+                  <a:pt x="140527" y="161399"/>
+                </a:lnTo>
+                <a:close/>
+                <a:lnTo>
+                  <a:pt x="142722" y="156785"/>
+                </a:lnTo>
+                <a:close/>
+                <a:lnTo>
+                  <a:pt x="144917" y="152171"/>
+                </a:lnTo>
+                <a:close/>
+                <a:lnTo>
+                  <a:pt x="147112" y="147557"/>
+                </a:lnTo>
+                <a:close/>
+                <a:lnTo>
+                  <a:pt x="149307" y="142944"/>
+                </a:lnTo>
+                <a:close/>
+                <a:lnTo>
+                  <a:pt x="151502" y="138324"/>
+                </a:lnTo>
+                <a:close/>
+                <a:lnTo>
+                  <a:pt x="153697" y="133742"/>
+                </a:lnTo>
+                <a:close/>
+                <a:lnTo>
+                  <a:pt x="155892" y="129151"/>
+                </a:lnTo>
+                <a:close/>
+                <a:lnTo>
+                  <a:pt x="158087" y="124531"/>
+                </a:lnTo>
+                <a:close/>
+                <a:lnTo>
+                  <a:pt x="160282" y="119919"/>
+                </a:lnTo>
+                <a:close/>
+                <a:lnTo>
+                  <a:pt x="162478" y="115304"/>
+                </a:lnTo>
+                <a:close/>
+                <a:lnTo>
+                  <a:pt x="164667" y="110690"/>
+                </a:lnTo>
+                <a:close/>
+                <a:lnTo>
+                  <a:pt x="166888" y="106076"/>
+                </a:lnTo>
+                <a:close/>
+                <a:lnTo>
+                  <a:pt x="169113" y="101462"/>
+                </a:lnTo>
+                <a:close/>
+                <a:lnTo>
+                  <a:pt x="171301" y="96848"/>
+                </a:lnTo>
+                <a:close/>
+                <a:lnTo>
+                  <a:pt x="173498" y="92234"/>
+                </a:lnTo>
+                <a:close/>
+                <a:lnTo>
+                  <a:pt x="175693" y="87620"/>
+                </a:lnTo>
+                <a:close/>
+                <a:lnTo>
+                  <a:pt x="177888" y="83006"/>
+                </a:lnTo>
+                <a:close/>
+                <a:lnTo>
+                  <a:pt x="180083" y="78392"/>
+                </a:lnTo>
+                <a:close/>
+                <a:lnTo>
+                  <a:pt x="182278" y="73778"/>
+                </a:lnTo>
+                <a:close/>
+                <a:lnTo>
+                  <a:pt x="184473" y="69164"/>
+                </a:lnTo>
+                <a:close/>
+                <a:lnTo>
+                  <a:pt x="186668" y="64551"/>
+                </a:lnTo>
+                <a:close/>
+                <a:lnTo>
+                  <a:pt x="188863" y="59934"/>
+                </a:lnTo>
+                <a:close/>
+                <a:lnTo>
+                  <a:pt x="191058" y="55332"/>
+                </a:lnTo>
+                <a:close/>
+                <a:lnTo>
+                  <a:pt x="193253" y="50758"/>
+                </a:lnTo>
+                <a:close/>
+                <a:lnTo>
+                  <a:pt x="195448" y="46139"/>
+                </a:lnTo>
+                <a:close/>
+                <a:lnTo>
+                  <a:pt x="197643" y="41526"/>
+                </a:lnTo>
+                <a:close/>
+                <a:lnTo>
+                  <a:pt x="199838" y="36912"/>
+                </a:lnTo>
+                <a:close/>
+                <a:lnTo>
+                  <a:pt x="202033" y="32298"/>
+                </a:lnTo>
+                <a:close/>
+                <a:lnTo>
+                  <a:pt x="204228" y="27684"/>
+                </a:lnTo>
+                <a:close/>
+                <a:lnTo>
+                  <a:pt x="206423" y="23070"/>
+                </a:lnTo>
+                <a:close/>
+                <a:lnTo>
+                  <a:pt x="208618" y="18456"/>
+                </a:lnTo>
+                <a:close/>
+                <a:lnTo>
+                  <a:pt x="210813" y="13842"/>
+                </a:lnTo>
+                <a:close/>
+                <a:lnTo>
+                  <a:pt x="213008" y="9228"/>
+                </a:lnTo>
+                <a:close/>
+                <a:lnTo>
+                  <a:pt x="215203" y="4614"/>
+                </a:lnTo>
+                <a:close/>
+                <a:lnTo>
+                  <a:pt x="217398" y="0"/>
                 </a:lnTo>
                 <a:close/>
               </a:path>
@@ -5053,14 +6302,14 @@
       </p:sp>
       <p:sp>
         <p:nvSpPr>
-          <p:cNvPr id="11" name="Freeform 10"/>
+          <p:cNvPr id="12" name="Freeform 11"/>
           <p:cNvSpPr/>
           <p:nvPr/>
         </p:nvSpPr>
         <p:spPr>
           <a:xfrm>
-            <a:off x="5719572" y="1698498"/>
-            <a:ext cx="406908" cy="50283"/>
+            <a:off x="5069525" y="1260135"/>
+            <a:ext cx="96378" cy="202356"/>
           </a:xfrm>
           <a:custGeom>
             <a:avLst/>
@@ -5069,404 +6318,404 @@
             <a:cxnLst/>
             <a:rect l="l" t="t" r="r" b="b"/>
             <a:pathLst>
-              <a:path w="406908" h="50283">
+              <a:path w="96378" h="202356">
                 <a:moveTo>
-                  <a:pt x="406908" y="0"/>
+                  <a:pt x="96378" y="0"/>
                 </a:moveTo>
                 <a:lnTo>
-                  <a:pt x="401135" y="1592"/>
-                </a:lnTo>
-                <a:close/>
-                <a:lnTo>
-                  <a:pt x="395363" y="3305"/>
-                </a:lnTo>
-                <a:close/>
-                <a:lnTo>
-                  <a:pt x="389590" y="5098"/>
-                </a:lnTo>
-                <a:close/>
-                <a:lnTo>
-                  <a:pt x="383817" y="6932"/>
-                </a:lnTo>
-                <a:close/>
-                <a:lnTo>
-                  <a:pt x="378044" y="8763"/>
-                </a:lnTo>
-                <a:close/>
-                <a:lnTo>
-                  <a:pt x="372272" y="10552"/>
-                </a:lnTo>
-                <a:close/>
-                <a:lnTo>
-                  <a:pt x="366499" y="12257"/>
-                </a:lnTo>
-                <a:close/>
-                <a:lnTo>
-                  <a:pt x="360726" y="13837"/>
-                </a:lnTo>
-                <a:close/>
-                <a:lnTo>
-                  <a:pt x="354953" y="15275"/>
-                </a:lnTo>
-                <a:close/>
-                <a:lnTo>
-                  <a:pt x="349181" y="16629"/>
-                </a:lnTo>
-                <a:close/>
-                <a:lnTo>
-                  <a:pt x="343408" y="17972"/>
-                </a:lnTo>
-                <a:close/>
-                <a:lnTo>
-                  <a:pt x="337635" y="19377"/>
-                </a:lnTo>
-                <a:close/>
-                <a:lnTo>
-                  <a:pt x="331863" y="20882"/>
-                </a:lnTo>
-                <a:close/>
-                <a:lnTo>
-                  <a:pt x="326090" y="22430"/>
-                </a:lnTo>
-                <a:close/>
-                <a:lnTo>
-                  <a:pt x="320317" y="23948"/>
-                </a:lnTo>
-                <a:close/>
-                <a:lnTo>
-                  <a:pt x="314544" y="25362"/>
-                </a:lnTo>
-                <a:close/>
-                <a:lnTo>
-                  <a:pt x="308772" y="26629"/>
-                </a:lnTo>
-                <a:close/>
-                <a:lnTo>
-                  <a:pt x="302999" y="27783"/>
-                </a:lnTo>
-                <a:close/>
-                <a:lnTo>
-                  <a:pt x="297226" y="28869"/>
-                </a:lnTo>
-                <a:close/>
-                <a:lnTo>
-                  <a:pt x="291453" y="29931"/>
-                </a:lnTo>
-                <a:close/>
-                <a:lnTo>
-                  <a:pt x="285681" y="30997"/>
-                </a:lnTo>
-                <a:close/>
-                <a:lnTo>
-                  <a:pt x="279908" y="32053"/>
-                </a:lnTo>
-                <a:close/>
-                <a:lnTo>
-                  <a:pt x="274135" y="33082"/>
-                </a:lnTo>
-                <a:close/>
-                <a:lnTo>
-                  <a:pt x="268363" y="34063"/>
-                </a:lnTo>
-                <a:close/>
-                <a:lnTo>
-                  <a:pt x="262590" y="34994"/>
-                </a:lnTo>
-                <a:close/>
-                <a:lnTo>
-                  <a:pt x="256817" y="35901"/>
-                </a:lnTo>
-                <a:close/>
-                <a:lnTo>
-                  <a:pt x="251044" y="36813"/>
-                </a:lnTo>
-                <a:close/>
-                <a:lnTo>
-                  <a:pt x="245272" y="37761"/>
-                </a:lnTo>
-                <a:close/>
-                <a:lnTo>
-                  <a:pt x="239499" y="38744"/>
-                </a:lnTo>
-                <a:close/>
-                <a:lnTo>
-                  <a:pt x="233726" y="39712"/>
-                </a:lnTo>
-                <a:close/>
-                <a:lnTo>
-                  <a:pt x="227953" y="40608"/>
-                </a:lnTo>
-                <a:close/>
-                <a:lnTo>
-                  <a:pt x="222181" y="41377"/>
-                </a:lnTo>
-                <a:close/>
-                <a:lnTo>
-                  <a:pt x="216408" y="42007"/>
-                </a:lnTo>
-                <a:close/>
-                <a:lnTo>
-                  <a:pt x="210635" y="42554"/>
-                </a:lnTo>
-                <a:close/>
-                <a:lnTo>
-                  <a:pt x="204863" y="43079"/>
-                </a:lnTo>
-                <a:close/>
-                <a:lnTo>
-                  <a:pt x="199090" y="43646"/>
-                </a:lnTo>
-                <a:close/>
-                <a:lnTo>
-                  <a:pt x="193317" y="44267"/>
-                </a:lnTo>
-                <a:close/>
-                <a:lnTo>
-                  <a:pt x="187544" y="44887"/>
-                </a:lnTo>
-                <a:close/>
-                <a:lnTo>
-                  <a:pt x="181771" y="45443"/>
-                </a:lnTo>
-                <a:close/>
-                <a:lnTo>
-                  <a:pt x="175999" y="45874"/>
-                </a:lnTo>
-                <a:close/>
-                <a:lnTo>
-                  <a:pt x="170228" y="46169"/>
-                </a:lnTo>
-                <a:close/>
-                <a:lnTo>
-                  <a:pt x="164456" y="46373"/>
-                </a:lnTo>
-                <a:close/>
-                <a:lnTo>
-                  <a:pt x="158682" y="46539"/>
-                </a:lnTo>
-                <a:close/>
-                <a:lnTo>
-                  <a:pt x="152906" y="46717"/>
-                </a:lnTo>
-                <a:close/>
-                <a:lnTo>
-                  <a:pt x="147129" y="46931"/>
-                </a:lnTo>
-                <a:close/>
-                <a:lnTo>
-                  <a:pt x="141355" y="47168"/>
-                </a:lnTo>
-                <a:close/>
-                <a:lnTo>
-                  <a:pt x="135585" y="47418"/>
-                </a:lnTo>
-                <a:close/>
-                <a:lnTo>
-                  <a:pt x="129824" y="47668"/>
-                </a:lnTo>
-                <a:close/>
-                <a:lnTo>
-                  <a:pt x="124067" y="47910"/>
-                </a:lnTo>
-                <a:close/>
-                <a:lnTo>
-                  <a:pt x="118302" y="48142"/>
-                </a:lnTo>
-                <a:close/>
-                <a:lnTo>
-                  <a:pt x="112516" y="48363"/>
-                </a:lnTo>
-                <a:close/>
-                <a:lnTo>
-                  <a:pt x="106699" y="48568"/>
-                </a:lnTo>
-                <a:close/>
-                <a:lnTo>
-                  <a:pt x="100868" y="48758"/>
-                </a:lnTo>
-                <a:close/>
-                <a:lnTo>
-                  <a:pt x="95069" y="48931"/>
-                </a:lnTo>
-                <a:close/>
-                <a:lnTo>
-                  <a:pt x="89348" y="49087"/>
-                </a:lnTo>
-                <a:close/>
-                <a:lnTo>
-                  <a:pt x="83746" y="49223"/>
-                </a:lnTo>
-                <a:close/>
-                <a:lnTo>
-                  <a:pt x="78188" y="49344"/>
-                </a:lnTo>
-                <a:close/>
-                <a:lnTo>
-                  <a:pt x="72505" y="49456"/>
-                </a:lnTo>
-                <a:close/>
-                <a:lnTo>
-                  <a:pt x="66523" y="49563"/>
-                </a:lnTo>
-                <a:close/>
-                <a:lnTo>
-                  <a:pt x="60099" y="49672"/>
-                </a:lnTo>
-                <a:close/>
-                <a:lnTo>
-                  <a:pt x="53530" y="49779"/>
-                </a:lnTo>
-                <a:close/>
-                <a:lnTo>
-                  <a:pt x="47455" y="49876"/>
-                </a:lnTo>
-                <a:close/>
-                <a:lnTo>
-                  <a:pt x="42521" y="49952"/>
-                </a:lnTo>
-                <a:close/>
-                <a:lnTo>
-                  <a:pt x="39317" y="49998"/>
-                </a:lnTo>
-                <a:close/>
-                <a:lnTo>
-                  <a:pt x="37709" y="50017"/>
-                </a:lnTo>
-                <a:close/>
-                <a:lnTo>
-                  <a:pt x="37060" y="50020"/>
-                </a:lnTo>
-                <a:close/>
-                <a:lnTo>
-                  <a:pt x="36723" y="50018"/>
-                </a:lnTo>
-                <a:close/>
-                <a:lnTo>
-                  <a:pt x="36096" y="50020"/>
-                </a:lnTo>
-                <a:close/>
-                <a:lnTo>
-                  <a:pt x="35049" y="50030"/>
-                </a:lnTo>
-                <a:close/>
-                <a:lnTo>
-                  <a:pt x="33752" y="50044"/>
-                </a:lnTo>
-                <a:close/>
-                <a:lnTo>
-                  <a:pt x="32379" y="50059"/>
-                </a:lnTo>
-                <a:close/>
-                <a:lnTo>
-                  <a:pt x="31088" y="50073"/>
-                </a:lnTo>
-                <a:close/>
-                <a:lnTo>
-                  <a:pt x="29908" y="50085"/>
-                </a:lnTo>
-                <a:close/>
-                <a:lnTo>
-                  <a:pt x="28793" y="50096"/>
-                </a:lnTo>
-                <a:close/>
-                <a:lnTo>
-                  <a:pt x="27697" y="50107"/>
-                </a:lnTo>
-                <a:close/>
-                <a:lnTo>
-                  <a:pt x="26578" y="50117"/>
-                </a:lnTo>
-                <a:close/>
-                <a:lnTo>
-                  <a:pt x="25429" y="50128"/>
-                </a:lnTo>
-                <a:close/>
-                <a:lnTo>
-                  <a:pt x="24264" y="50140"/>
-                </a:lnTo>
-                <a:close/>
-                <a:lnTo>
-                  <a:pt x="23093" y="50152"/>
-                </a:lnTo>
-                <a:close/>
-                <a:lnTo>
-                  <a:pt x="21930" y="50165"/>
-                </a:lnTo>
-                <a:close/>
-                <a:lnTo>
-                  <a:pt x="20774" y="50177"/>
-                </a:lnTo>
-                <a:close/>
-                <a:lnTo>
-                  <a:pt x="19623" y="50189"/>
-                </a:lnTo>
-                <a:close/>
-                <a:lnTo>
-                  <a:pt x="18472" y="50199"/>
-                </a:lnTo>
-                <a:close/>
-                <a:lnTo>
-                  <a:pt x="17320" y="50207"/>
-                </a:lnTo>
-                <a:close/>
-                <a:lnTo>
-                  <a:pt x="16166" y="50213"/>
-                </a:lnTo>
-                <a:close/>
-                <a:lnTo>
-                  <a:pt x="15010" y="50218"/>
-                </a:lnTo>
-                <a:close/>
-                <a:lnTo>
-                  <a:pt x="13855" y="50223"/>
-                </a:lnTo>
-                <a:close/>
-                <a:lnTo>
-                  <a:pt x="12700" y="50228"/>
-                </a:lnTo>
-                <a:close/>
-                <a:lnTo>
-                  <a:pt x="11545" y="50234"/>
-                </a:lnTo>
-                <a:close/>
-                <a:lnTo>
-                  <a:pt x="10391" y="50240"/>
-                </a:lnTo>
-                <a:close/>
-                <a:lnTo>
-                  <a:pt x="9236" y="50246"/>
-                </a:lnTo>
-                <a:close/>
-                <a:lnTo>
-                  <a:pt x="8082" y="50252"/>
-                </a:lnTo>
-                <a:close/>
-                <a:lnTo>
-                  <a:pt x="6927" y="50258"/>
-                </a:lnTo>
-                <a:close/>
-                <a:lnTo>
-                  <a:pt x="5773" y="50264"/>
-                </a:lnTo>
-                <a:close/>
-                <a:lnTo>
-                  <a:pt x="4618" y="50269"/>
-                </a:lnTo>
-                <a:close/>
-                <a:lnTo>
-                  <a:pt x="3464" y="50274"/>
-                </a:lnTo>
-                <a:close/>
-                <a:lnTo>
-                  <a:pt x="2309" y="50278"/>
-                </a:lnTo>
-                <a:close/>
-                <a:lnTo>
-                  <a:pt x="1154" y="50281"/>
-                </a:lnTo>
-                <a:close/>
-                <a:lnTo>
-                  <a:pt x="0" y="50283"/>
+                  <a:pt x="95405" y="2045"/>
+                </a:lnTo>
+                <a:close/>
+                <a:lnTo>
+                  <a:pt x="94432" y="4090"/>
+                </a:lnTo>
+                <a:close/>
+                <a:lnTo>
+                  <a:pt x="93459" y="6136"/>
+                </a:lnTo>
+                <a:close/>
+                <a:lnTo>
+                  <a:pt x="92486" y="8182"/>
+                </a:lnTo>
+                <a:close/>
+                <a:lnTo>
+                  <a:pt x="91513" y="10226"/>
+                </a:lnTo>
+                <a:close/>
+                <a:lnTo>
+                  <a:pt x="90539" y="12271"/>
+                </a:lnTo>
+                <a:close/>
+                <a:lnTo>
+                  <a:pt x="89566" y="14318"/>
+                </a:lnTo>
+                <a:close/>
+                <a:lnTo>
+                  <a:pt x="88593" y="16367"/>
+                </a:lnTo>
+                <a:close/>
+                <a:lnTo>
+                  <a:pt x="87620" y="18410"/>
+                </a:lnTo>
+                <a:close/>
+                <a:lnTo>
+                  <a:pt x="86647" y="20439"/>
+                </a:lnTo>
+                <a:close/>
+                <a:lnTo>
+                  <a:pt x="85674" y="22462"/>
+                </a:lnTo>
+                <a:close/>
+                <a:lnTo>
+                  <a:pt x="84701" y="24495"/>
+                </a:lnTo>
+                <a:close/>
+                <a:lnTo>
+                  <a:pt x="83728" y="26541"/>
+                </a:lnTo>
+                <a:close/>
+                <a:lnTo>
+                  <a:pt x="82755" y="28590"/>
+                </a:lnTo>
+                <a:close/>
+                <a:lnTo>
+                  <a:pt x="81782" y="30636"/>
+                </a:lnTo>
+                <a:close/>
+                <a:lnTo>
+                  <a:pt x="80809" y="32680"/>
+                </a:lnTo>
+                <a:close/>
+                <a:lnTo>
+                  <a:pt x="79836" y="34725"/>
+                </a:lnTo>
+                <a:close/>
+                <a:lnTo>
+                  <a:pt x="78863" y="36771"/>
+                </a:lnTo>
+                <a:close/>
+                <a:lnTo>
+                  <a:pt x="77890" y="38816"/>
+                </a:lnTo>
+                <a:close/>
+                <a:lnTo>
+                  <a:pt x="76917" y="40862"/>
+                </a:lnTo>
+                <a:close/>
+                <a:lnTo>
+                  <a:pt x="75944" y="42907"/>
+                </a:lnTo>
+                <a:close/>
+                <a:lnTo>
+                  <a:pt x="74971" y="44953"/>
+                </a:lnTo>
+                <a:close/>
+                <a:lnTo>
+                  <a:pt x="73998" y="46998"/>
+                </a:lnTo>
+                <a:close/>
+                <a:lnTo>
+                  <a:pt x="73025" y="49043"/>
+                </a:lnTo>
+                <a:close/>
+                <a:lnTo>
+                  <a:pt x="72052" y="51089"/>
+                </a:lnTo>
+                <a:close/>
+                <a:lnTo>
+                  <a:pt x="71078" y="53134"/>
+                </a:lnTo>
+                <a:close/>
+                <a:lnTo>
+                  <a:pt x="70105" y="55180"/>
+                </a:lnTo>
+                <a:close/>
+                <a:lnTo>
+                  <a:pt x="69132" y="57225"/>
+                </a:lnTo>
+                <a:close/>
+                <a:lnTo>
+                  <a:pt x="68159" y="59270"/>
+                </a:lnTo>
+                <a:close/>
+                <a:lnTo>
+                  <a:pt x="67186" y="61316"/>
+                </a:lnTo>
+                <a:close/>
+                <a:lnTo>
+                  <a:pt x="66213" y="63361"/>
+                </a:lnTo>
+                <a:close/>
+                <a:lnTo>
+                  <a:pt x="65240" y="65406"/>
+                </a:lnTo>
+                <a:close/>
+                <a:lnTo>
+                  <a:pt x="64267" y="67452"/>
+                </a:lnTo>
+                <a:close/>
+                <a:lnTo>
+                  <a:pt x="63294" y="69497"/>
+                </a:lnTo>
+                <a:close/>
+                <a:lnTo>
+                  <a:pt x="62321" y="71543"/>
+                </a:lnTo>
+                <a:close/>
+                <a:lnTo>
+                  <a:pt x="61348" y="73588"/>
+                </a:lnTo>
+                <a:close/>
+                <a:lnTo>
+                  <a:pt x="60375" y="75633"/>
+                </a:lnTo>
+                <a:close/>
+                <a:lnTo>
+                  <a:pt x="59402" y="77679"/>
+                </a:lnTo>
+                <a:close/>
+                <a:lnTo>
+                  <a:pt x="58429" y="79724"/>
+                </a:lnTo>
+                <a:close/>
+                <a:lnTo>
+                  <a:pt x="57456" y="81770"/>
+                </a:lnTo>
+                <a:close/>
+                <a:lnTo>
+                  <a:pt x="56483" y="83815"/>
+                </a:lnTo>
+                <a:close/>
+                <a:lnTo>
+                  <a:pt x="55510" y="85861"/>
+                </a:lnTo>
+                <a:close/>
+                <a:lnTo>
+                  <a:pt x="54537" y="87906"/>
+                </a:lnTo>
+                <a:close/>
+                <a:lnTo>
+                  <a:pt x="53564" y="89951"/>
+                </a:lnTo>
+                <a:close/>
+                <a:lnTo>
+                  <a:pt x="52591" y="91995"/>
+                </a:lnTo>
+                <a:close/>
+                <a:lnTo>
+                  <a:pt x="51617" y="94042"/>
+                </a:lnTo>
+                <a:close/>
+                <a:lnTo>
+                  <a:pt x="50644" y="96091"/>
+                </a:lnTo>
+                <a:close/>
+                <a:lnTo>
+                  <a:pt x="49671" y="98136"/>
+                </a:lnTo>
+                <a:close/>
+                <a:lnTo>
+                  <a:pt x="48698" y="100167"/>
+                </a:lnTo>
+                <a:close/>
+                <a:lnTo>
+                  <a:pt x="47725" y="102189"/>
+                </a:lnTo>
+                <a:close/>
+                <a:lnTo>
+                  <a:pt x="46752" y="104220"/>
+                </a:lnTo>
+                <a:close/>
+                <a:lnTo>
+                  <a:pt x="45779" y="106265"/>
+                </a:lnTo>
+                <a:close/>
+                <a:lnTo>
+                  <a:pt x="44806" y="108314"/>
+                </a:lnTo>
+                <a:close/>
+                <a:lnTo>
+                  <a:pt x="43833" y="110361"/>
+                </a:lnTo>
+                <a:close/>
+                <a:lnTo>
+                  <a:pt x="42860" y="112405"/>
+                </a:lnTo>
+                <a:close/>
+                <a:lnTo>
+                  <a:pt x="41887" y="114450"/>
+                </a:lnTo>
+                <a:close/>
+                <a:lnTo>
+                  <a:pt x="40914" y="116495"/>
+                </a:lnTo>
+                <a:close/>
+                <a:lnTo>
+                  <a:pt x="39941" y="118541"/>
+                </a:lnTo>
+                <a:close/>
+                <a:lnTo>
+                  <a:pt x="38968" y="120586"/>
+                </a:lnTo>
+                <a:close/>
+                <a:lnTo>
+                  <a:pt x="37995" y="122632"/>
+                </a:lnTo>
+                <a:close/>
+                <a:lnTo>
+                  <a:pt x="37022" y="124677"/>
+                </a:lnTo>
+                <a:close/>
+                <a:lnTo>
+                  <a:pt x="36049" y="126723"/>
+                </a:lnTo>
+                <a:close/>
+                <a:lnTo>
+                  <a:pt x="35076" y="128768"/>
+                </a:lnTo>
+                <a:close/>
+                <a:lnTo>
+                  <a:pt x="34103" y="130813"/>
+                </a:lnTo>
+                <a:close/>
+                <a:lnTo>
+                  <a:pt x="33129" y="132859"/>
+                </a:lnTo>
+                <a:close/>
+                <a:lnTo>
+                  <a:pt x="32156" y="134904"/>
+                </a:lnTo>
+                <a:close/>
+                <a:lnTo>
+                  <a:pt x="31183" y="136950"/>
+                </a:lnTo>
+                <a:close/>
+                <a:lnTo>
+                  <a:pt x="30210" y="138995"/>
+                </a:lnTo>
+                <a:close/>
+                <a:lnTo>
+                  <a:pt x="29237" y="141040"/>
+                </a:lnTo>
+                <a:close/>
+                <a:lnTo>
+                  <a:pt x="28264" y="143086"/>
+                </a:lnTo>
+                <a:close/>
+                <a:lnTo>
+                  <a:pt x="27291" y="145131"/>
+                </a:lnTo>
+                <a:close/>
+                <a:lnTo>
+                  <a:pt x="26318" y="147176"/>
+                </a:lnTo>
+                <a:close/>
+                <a:lnTo>
+                  <a:pt x="25345" y="149222"/>
+                </a:lnTo>
+                <a:close/>
+                <a:lnTo>
+                  <a:pt x="24372" y="151267"/>
+                </a:lnTo>
+                <a:close/>
+                <a:lnTo>
+                  <a:pt x="23399" y="153313"/>
+                </a:lnTo>
+                <a:close/>
+                <a:lnTo>
+                  <a:pt x="22426" y="155358"/>
+                </a:lnTo>
+                <a:close/>
+                <a:lnTo>
+                  <a:pt x="21452" y="157403"/>
+                </a:lnTo>
+                <a:close/>
+                <a:lnTo>
+                  <a:pt x="20479" y="159449"/>
+                </a:lnTo>
+                <a:close/>
+                <a:lnTo>
+                  <a:pt x="19510" y="161494"/>
+                </a:lnTo>
+                <a:close/>
+                <a:lnTo>
+                  <a:pt x="18538" y="163540"/>
+                </a:lnTo>
+                <a:close/>
+                <a:lnTo>
+                  <a:pt x="17554" y="165585"/>
+                </a:lnTo>
+                <a:close/>
+                <a:lnTo>
+                  <a:pt x="16559" y="167631"/>
+                </a:lnTo>
+                <a:close/>
+                <a:lnTo>
+                  <a:pt x="15568" y="169676"/>
+                </a:lnTo>
+                <a:close/>
+                <a:lnTo>
+                  <a:pt x="14591" y="171720"/>
+                </a:lnTo>
+                <a:close/>
+                <a:lnTo>
+                  <a:pt x="13622" y="173766"/>
+                </a:lnTo>
+                <a:close/>
+                <a:lnTo>
+                  <a:pt x="12651" y="175815"/>
+                </a:lnTo>
+                <a:close/>
+                <a:lnTo>
+                  <a:pt x="11677" y="177861"/>
+                </a:lnTo>
+                <a:close/>
+                <a:lnTo>
+                  <a:pt x="10703" y="179894"/>
+                </a:lnTo>
+                <a:close/>
+                <a:lnTo>
+                  <a:pt x="9730" y="181917"/>
+                </a:lnTo>
+                <a:close/>
+                <a:lnTo>
+                  <a:pt x="8758" y="183946"/>
+                </a:lnTo>
+                <a:close/>
+                <a:lnTo>
+                  <a:pt x="7785" y="185989"/>
+                </a:lnTo>
+                <a:close/>
+                <a:lnTo>
+                  <a:pt x="6811" y="188038"/>
+                </a:lnTo>
+                <a:close/>
+                <a:lnTo>
+                  <a:pt x="5838" y="190085"/>
+                </a:lnTo>
+                <a:close/>
+                <a:lnTo>
+                  <a:pt x="4865" y="192130"/>
+                </a:lnTo>
+                <a:close/>
+                <a:lnTo>
+                  <a:pt x="3892" y="194174"/>
+                </a:lnTo>
+                <a:close/>
+                <a:lnTo>
+                  <a:pt x="2919" y="196220"/>
+                </a:lnTo>
+                <a:close/>
+                <a:lnTo>
+                  <a:pt x="1946" y="198266"/>
+                </a:lnTo>
+                <a:close/>
+                <a:lnTo>
+                  <a:pt x="973" y="200311"/>
+                </a:lnTo>
+                <a:close/>
+                <a:lnTo>
+                  <a:pt x="0" y="202356"/>
                 </a:lnTo>
                 <a:close/>
               </a:path>
@@ -5502,13 +6751,13 @@
       </p:sp>
       <p:sp>
         <p:nvSpPr>
-          <p:cNvPr id="12" name="TextBox 11"/>
+          <p:cNvPr id="13" name="TextBox 12"/>
           <p:cNvSpPr txBox="1"/>
           <p:nvPr/>
         </p:nvSpPr>
         <p:spPr>
           <a:xfrm>
-            <a:off x="4226560" y="2345690"/>
+            <a:off x="4249420" y="1797050"/>
             <a:ext cx="1524000" cy="508000"/>
           </a:xfrm>
           <a:prstGeom prst="rect">
@@ -5531,20 +6780,20 @@
               </a:defRPr>
             </a:pPr>
             <a:r>
-              <a:t>O</a:t>
+              <a:t>L</a:t>
             </a:r>
           </a:p>
         </p:txBody>
       </p:sp>
       <p:sp>
         <p:nvSpPr>
-          <p:cNvPr id="13" name="TextBox 12"/>
+          <p:cNvPr id="14" name="TextBox 13"/>
           <p:cNvSpPr txBox="1"/>
           <p:nvPr/>
         </p:nvSpPr>
         <p:spPr>
           <a:xfrm>
-            <a:off x="5918200" y="2345690"/>
+            <a:off x="4775200" y="2322830"/>
             <a:ext cx="1524000" cy="508000"/>
           </a:xfrm>
           <a:prstGeom prst="rect">
@@ -5567,115 +6816,7 @@
               </a:defRPr>
             </a:pPr>
             <a:r>
-              <a:t>x</a:t>
-            </a:r>
-          </a:p>
-        </p:txBody>
-      </p:sp>
-      <p:sp>
-        <p:nvSpPr>
-          <p:cNvPr id="14" name="TextBox 13"/>
-          <p:cNvSpPr txBox="1"/>
-          <p:nvPr/>
-        </p:nvSpPr>
-        <p:spPr>
-          <a:xfrm>
-            <a:off x="4226560" y="1156970"/>
-            <a:ext cx="1524000" cy="508000"/>
-          </a:xfrm>
-          <a:prstGeom prst="rect">
-            <a:avLst/>
-          </a:prstGeom>
-          <a:noFill/>
-        </p:spPr>
-        <p:txBody>
-          <a:bodyPr wrap="none">
-            <a:spAutoFit/>
-          </a:bodyPr>
-          <a:lstStyle/>
-          <a:p>
-            <a:pPr>
-              <a:defRPr sz="1400" b="1">
-                <a:solidFill>
-                  <a:srgbClr val="FFFFFF"/>
-                </a:solidFill>
-                <a:latin typeface="Inter"/>
-              </a:defRPr>
-            </a:pPr>
-            <a:r>
-              <a:t>y</a:t>
-            </a:r>
-          </a:p>
-        </p:txBody>
-      </p:sp>
-      <p:sp>
-        <p:nvSpPr>
-          <p:cNvPr id="15" name="TextBox 14"/>
-          <p:cNvSpPr txBox="1"/>
-          <p:nvPr/>
-        </p:nvSpPr>
-        <p:spPr>
-          <a:xfrm>
-            <a:off x="5461000" y="2391410"/>
-            <a:ext cx="1524000" cy="508000"/>
-          </a:xfrm>
-          <a:prstGeom prst="rect">
-            <a:avLst/>
-          </a:prstGeom>
-          <a:noFill/>
-        </p:spPr>
-        <p:txBody>
-          <a:bodyPr wrap="none">
-            <a:spAutoFit/>
-          </a:bodyPr>
-          <a:lstStyle/>
-          <a:p>
-            <a:pPr>
-              <a:defRPr sz="1400" b="1">
-                <a:solidFill>
-                  <a:srgbClr val="FFFFFF"/>
-                </a:solidFill>
-                <a:latin typeface="Inter"/>
-              </a:defRPr>
-            </a:pPr>
-            <a:r>
               <a:t>a</a:t>
-            </a:r>
-          </a:p>
-        </p:txBody>
-      </p:sp>
-      <p:sp>
-        <p:nvSpPr>
-          <p:cNvPr id="16" name="TextBox 15"/>
-          <p:cNvSpPr txBox="1"/>
-          <p:nvPr/>
-        </p:nvSpPr>
-        <p:spPr>
-          <a:xfrm>
-            <a:off x="4180840" y="1431290"/>
-            <a:ext cx="1524000" cy="508000"/>
-          </a:xfrm>
-          <a:prstGeom prst="rect">
-            <a:avLst/>
-          </a:prstGeom>
-          <a:noFill/>
-        </p:spPr>
-        <p:txBody>
-          <a:bodyPr wrap="none">
-            <a:spAutoFit/>
-          </a:bodyPr>
-          <a:lstStyle/>
-          <a:p>
-            <a:pPr>
-              <a:defRPr sz="1400" b="1">
-                <a:solidFill>
-                  <a:srgbClr val="FFFFFF"/>
-                </a:solidFill>
-                <a:latin typeface="Inter"/>
-              </a:defRPr>
-            </a:pPr>
-            <a:r>
-              <a:t>L</a:t>
             </a:r>
           </a:p>
         </p:txBody>

--- a/output/1.pptx
+++ b/output/1.pptx
@@ -3104,8 +3104,8 @@
         </p:nvCxnSpPr>
         <p:spPr>
           <a:xfrm>
-            <a:off x="4297680.0" y="2571750.0"/>
-            <a:ext cx="1097280.0" cy="0.0"/>
+            <a:off x="3657600.0" y="2571750.0"/>
+            <a:ext cx="2743200.0" cy="0.0"/>
           </a:xfrm>
           <a:prstGeom prst="line">
             <a:avLst/>
@@ -3139,8 +3139,8 @@
         </p:nvCxnSpPr>
         <p:spPr>
           <a:xfrm flipV="1">
-            <a:off x="4572000.0" y="1840230.0"/>
-            <a:ext cx="0.0" cy="1188720.0"/>
+            <a:off x="4572000.0" y="971550.0"/>
+            <a:ext cx="0.0" cy="2286000.0"/>
           </a:xfrm>
           <a:prstGeom prst="line">
             <a:avLst/>
@@ -3174,8 +3174,8 @@
         </p:nvSpPr>
         <p:spPr>
           <a:xfrm>
-            <a:off x="4347881" y="1537792"/>
-            <a:ext cx="679079" cy="1423904"/>
+            <a:off x="3886200" y="971550"/>
+            <a:ext cx="2057400" cy="2148840"/>
           </a:xfrm>
           <a:custGeom>
             <a:avLst/>
@@ -3184,1204 +3184,1204 @@
             <a:cxnLst/>
             <a:rect l="l" t="t" r="r" b="b"/>
             <a:pathLst>
-              <a:path w="679079" h="1423904">
+              <a:path w="2057400" h="2148840">
                 <a:moveTo>
-                  <a:pt x="0" y="1423904"/>
+                  <a:pt x="0" y="2148840"/>
                 </a:moveTo>
                 <a:lnTo>
-                  <a:pt x="2270" y="1419177"/>
-                </a:lnTo>
-                <a:close/>
-                <a:lnTo>
-                  <a:pt x="4540" y="1414406"/>
-                </a:lnTo>
-                <a:close/>
-                <a:lnTo>
-                  <a:pt x="6810" y="1409680"/>
-                </a:lnTo>
-                <a:close/>
-                <a:lnTo>
-                  <a:pt x="9081" y="1404908"/>
-                </a:lnTo>
-                <a:close/>
-                <a:lnTo>
-                  <a:pt x="11351" y="1400184"/>
-                </a:lnTo>
-                <a:close/>
-                <a:lnTo>
-                  <a:pt x="13621" y="1395455"/>
-                </a:lnTo>
-                <a:close/>
-                <a:lnTo>
-                  <a:pt x="15891" y="1390683"/>
-                </a:lnTo>
-                <a:close/>
-                <a:lnTo>
-                  <a:pt x="18162" y="1385962"/>
-                </a:lnTo>
-                <a:close/>
-                <a:lnTo>
-                  <a:pt x="20432" y="1381230"/>
-                </a:lnTo>
-                <a:close/>
-                <a:lnTo>
-                  <a:pt x="22702" y="1376461"/>
-                </a:lnTo>
-                <a:close/>
-                <a:lnTo>
-                  <a:pt x="24972" y="1371732"/>
-                </a:lnTo>
-                <a:close/>
-                <a:lnTo>
-                  <a:pt x="27243" y="1366963"/>
-                </a:lnTo>
-                <a:close/>
-                <a:lnTo>
-                  <a:pt x="29513" y="1362234"/>
-                </a:lnTo>
-                <a:close/>
-                <a:lnTo>
-                  <a:pt x="31783" y="1357463"/>
-                </a:lnTo>
-                <a:close/>
-                <a:lnTo>
-                  <a:pt x="34053" y="1352745"/>
-                </a:lnTo>
-                <a:close/>
-                <a:lnTo>
-                  <a:pt x="36324" y="1348008"/>
-                </a:lnTo>
-                <a:close/>
-                <a:lnTo>
-                  <a:pt x="38594" y="1343240"/>
-                </a:lnTo>
-                <a:close/>
-                <a:lnTo>
-                  <a:pt x="40864" y="1338523"/>
-                </a:lnTo>
-                <a:close/>
-                <a:lnTo>
-                  <a:pt x="43134" y="1333782"/>
-                </a:lnTo>
-                <a:close/>
-                <a:lnTo>
-                  <a:pt x="45404" y="1329020"/>
-                </a:lnTo>
-                <a:close/>
-                <a:lnTo>
-                  <a:pt x="47676" y="1324286"/>
-                </a:lnTo>
-                <a:close/>
-                <a:lnTo>
-                  <a:pt x="49942" y="1319518"/>
-                </a:lnTo>
-                <a:close/>
-                <a:lnTo>
-                  <a:pt x="52228" y="1314803"/>
-                </a:lnTo>
-                <a:close/>
-                <a:lnTo>
-                  <a:pt x="54536" y="1310059"/>
-                </a:lnTo>
-                <a:close/>
-                <a:lnTo>
-                  <a:pt x="56800" y="1305295"/>
-                </a:lnTo>
-                <a:close/>
-                <a:lnTo>
-                  <a:pt x="59072" y="1300580"/>
-                </a:lnTo>
-                <a:close/>
-                <a:lnTo>
-                  <a:pt x="61342" y="1295833"/>
-                </a:lnTo>
-                <a:close/>
-                <a:lnTo>
-                  <a:pt x="63612" y="1291077"/>
-                </a:lnTo>
-                <a:close/>
-                <a:lnTo>
-                  <a:pt x="65883" y="1286337"/>
-                </a:lnTo>
-                <a:close/>
-                <a:lnTo>
-                  <a:pt x="68153" y="1281574"/>
-                </a:lnTo>
-                <a:close/>
-                <a:lnTo>
-                  <a:pt x="70423" y="1276860"/>
-                </a:lnTo>
-                <a:close/>
-                <a:lnTo>
-                  <a:pt x="72693" y="1272110"/>
-                </a:lnTo>
-                <a:close/>
-                <a:lnTo>
-                  <a:pt x="74964" y="1267351"/>
-                </a:lnTo>
-                <a:close/>
-                <a:lnTo>
-                  <a:pt x="77234" y="1262637"/>
-                </a:lnTo>
-                <a:close/>
-                <a:lnTo>
-                  <a:pt x="79504" y="1257883"/>
-                </a:lnTo>
-                <a:close/>
-                <a:lnTo>
-                  <a:pt x="81774" y="1253134"/>
-                </a:lnTo>
-                <a:close/>
-                <a:lnTo>
-                  <a:pt x="84045" y="1248387"/>
-                </a:lnTo>
-                <a:close/>
-                <a:lnTo>
-                  <a:pt x="86315" y="1243631"/>
-                </a:lnTo>
-                <a:close/>
-                <a:lnTo>
-                  <a:pt x="88585" y="1238917"/>
-                </a:lnTo>
-                <a:close/>
-                <a:lnTo>
-                  <a:pt x="90855" y="1234160"/>
-                </a:lnTo>
-                <a:close/>
-                <a:lnTo>
-                  <a:pt x="93126" y="1229408"/>
-                </a:lnTo>
-                <a:close/>
-                <a:lnTo>
-                  <a:pt x="95396" y="1224694"/>
-                </a:lnTo>
-                <a:close/>
-                <a:lnTo>
-                  <a:pt x="97666" y="1219933"/>
-                </a:lnTo>
-                <a:close/>
-                <a:lnTo>
-                  <a:pt x="99936" y="1215191"/>
-                </a:lnTo>
-                <a:close/>
-                <a:lnTo>
-                  <a:pt x="102207" y="1210437"/>
-                </a:lnTo>
-                <a:close/>
-                <a:lnTo>
-                  <a:pt x="104477" y="1205688"/>
-                </a:lnTo>
-                <a:close/>
-                <a:lnTo>
-                  <a:pt x="106747" y="1200973"/>
-                </a:lnTo>
-                <a:close/>
-                <a:lnTo>
-                  <a:pt x="109017" y="1196211"/>
-                </a:lnTo>
-                <a:close/>
-                <a:lnTo>
-                  <a:pt x="111288" y="1191465"/>
-                </a:lnTo>
-                <a:close/>
-                <a:lnTo>
-                  <a:pt x="113558" y="1186750"/>
-                </a:lnTo>
-                <a:close/>
-                <a:lnTo>
-                  <a:pt x="115828" y="1181984"/>
-                </a:lnTo>
-                <a:close/>
-                <a:lnTo>
-                  <a:pt x="118098" y="1177248"/>
-                </a:lnTo>
-                <a:close/>
-                <a:lnTo>
-                  <a:pt x="120369" y="1172488"/>
-                </a:lnTo>
-                <a:close/>
-                <a:lnTo>
-                  <a:pt x="122639" y="1167745"/>
-                </a:lnTo>
-                <a:close/>
-                <a:lnTo>
-                  <a:pt x="124909" y="1163029"/>
-                </a:lnTo>
-                <a:close/>
-                <a:lnTo>
-                  <a:pt x="127179" y="1158260"/>
-                </a:lnTo>
-                <a:close/>
-                <a:lnTo>
-                  <a:pt x="129450" y="1153528"/>
-                </a:lnTo>
-                <a:close/>
-                <a:lnTo>
-                  <a:pt x="131720" y="1148764"/>
-                </a:lnTo>
-                <a:close/>
-                <a:lnTo>
-                  <a:pt x="133990" y="1144025"/>
-                </a:lnTo>
-                <a:close/>
-                <a:lnTo>
-                  <a:pt x="136260" y="1139307"/>
-                </a:lnTo>
-                <a:close/>
-                <a:lnTo>
-                  <a:pt x="138531" y="1134537"/>
-                </a:lnTo>
-                <a:close/>
-                <a:lnTo>
-                  <a:pt x="140801" y="1129807"/>
-                </a:lnTo>
-                <a:close/>
-                <a:lnTo>
-                  <a:pt x="143071" y="1125040"/>
-                </a:lnTo>
-                <a:close/>
-                <a:lnTo>
-                  <a:pt x="145341" y="1120306"/>
-                </a:lnTo>
-                <a:close/>
-                <a:lnTo>
-                  <a:pt x="147612" y="1115585"/>
-                </a:lnTo>
-                <a:close/>
-                <a:lnTo>
-                  <a:pt x="149882" y="1110815"/>
-                </a:lnTo>
-                <a:close/>
-                <a:lnTo>
-                  <a:pt x="152152" y="1106083"/>
-                </a:lnTo>
-                <a:close/>
-                <a:lnTo>
-                  <a:pt x="154422" y="1101361"/>
-                </a:lnTo>
-                <a:close/>
-                <a:lnTo>
-                  <a:pt x="156693" y="1096590"/>
-                </a:lnTo>
-                <a:close/>
-                <a:lnTo>
-                  <a:pt x="158963" y="1091861"/>
-                </a:lnTo>
-                <a:close/>
-                <a:lnTo>
-                  <a:pt x="161233" y="1087137"/>
-                </a:lnTo>
-                <a:close/>
-                <a:lnTo>
-                  <a:pt x="163504" y="1082365"/>
-                </a:lnTo>
-                <a:close/>
-                <a:lnTo>
-                  <a:pt x="165773" y="1077638"/>
-                </a:lnTo>
-                <a:close/>
-                <a:lnTo>
-                  <a:pt x="168089" y="1072913"/>
-                </a:lnTo>
-                <a:close/>
-                <a:lnTo>
-                  <a:pt x="170360" y="1068141"/>
-                </a:lnTo>
-                <a:close/>
-                <a:lnTo>
-                  <a:pt x="172630" y="1063415"/>
-                </a:lnTo>
-                <a:close/>
-                <a:lnTo>
-                  <a:pt x="174900" y="1058643"/>
-                </a:lnTo>
-                <a:close/>
-                <a:lnTo>
-                  <a:pt x="177171" y="1053918"/>
-                </a:lnTo>
-                <a:close/>
-                <a:lnTo>
-                  <a:pt x="179441" y="1049190"/>
-                </a:lnTo>
-                <a:close/>
-                <a:lnTo>
-                  <a:pt x="181711" y="1044419"/>
-                </a:lnTo>
-                <a:close/>
-                <a:lnTo>
-                  <a:pt x="183981" y="1039696"/>
-                </a:lnTo>
-                <a:close/>
-                <a:lnTo>
-                  <a:pt x="186252" y="1034966"/>
-                </a:lnTo>
-                <a:close/>
-                <a:lnTo>
-                  <a:pt x="188522" y="1030191"/>
-                </a:lnTo>
-                <a:close/>
-                <a:lnTo>
-                  <a:pt x="190792" y="1025424"/>
-                </a:lnTo>
-                <a:close/>
-                <a:lnTo>
-                  <a:pt x="193062" y="1020697"/>
-                </a:lnTo>
-                <a:close/>
-                <a:lnTo>
-                  <a:pt x="195333" y="1015921"/>
-                </a:lnTo>
-                <a:close/>
-                <a:lnTo>
-                  <a:pt x="197603" y="1011149"/>
-                </a:lnTo>
-                <a:close/>
-                <a:lnTo>
-                  <a:pt x="199873" y="1006377"/>
-                </a:lnTo>
-                <a:close/>
-                <a:lnTo>
-                  <a:pt x="202143" y="1001605"/>
-                </a:lnTo>
-                <a:close/>
-                <a:lnTo>
-                  <a:pt x="204414" y="996833"/>
-                </a:lnTo>
-                <a:close/>
-                <a:lnTo>
-                  <a:pt x="206684" y="992061"/>
-                </a:lnTo>
-                <a:close/>
-                <a:lnTo>
-                  <a:pt x="208954" y="987288"/>
-                </a:lnTo>
-                <a:close/>
-                <a:lnTo>
-                  <a:pt x="211224" y="982516"/>
-                </a:lnTo>
-                <a:close/>
-                <a:lnTo>
-                  <a:pt x="213495" y="977744"/>
-                </a:lnTo>
-                <a:close/>
-                <a:lnTo>
-                  <a:pt x="215765" y="972972"/>
-                </a:lnTo>
-                <a:close/>
-                <a:lnTo>
-                  <a:pt x="218035" y="968200"/>
-                </a:lnTo>
-                <a:close/>
-                <a:lnTo>
-                  <a:pt x="220305" y="963428"/>
-                </a:lnTo>
-                <a:close/>
-                <a:lnTo>
-                  <a:pt x="222576" y="958655"/>
-                </a:lnTo>
-                <a:close/>
-                <a:lnTo>
-                  <a:pt x="224846" y="953884"/>
-                </a:lnTo>
-                <a:close/>
-                <a:lnTo>
-                  <a:pt x="227116" y="949108"/>
-                </a:lnTo>
-                <a:close/>
-                <a:lnTo>
-                  <a:pt x="229386" y="944354"/>
-                </a:lnTo>
-                <a:close/>
-                <a:lnTo>
-                  <a:pt x="231657" y="939617"/>
-                </a:lnTo>
-                <a:close/>
-                <a:lnTo>
-                  <a:pt x="233927" y="934839"/>
-                </a:lnTo>
-                <a:close/>
-                <a:lnTo>
-                  <a:pt x="236197" y="930069"/>
-                </a:lnTo>
-                <a:close/>
-                <a:lnTo>
-                  <a:pt x="238467" y="925296"/>
-                </a:lnTo>
-                <a:close/>
-                <a:lnTo>
-                  <a:pt x="240738" y="920524"/>
-                </a:lnTo>
-                <a:close/>
-                <a:lnTo>
-                  <a:pt x="243008" y="915752"/>
-                </a:lnTo>
-                <a:close/>
-                <a:lnTo>
-                  <a:pt x="245278" y="910980"/>
-                </a:lnTo>
-                <a:close/>
-                <a:lnTo>
-                  <a:pt x="247548" y="906207"/>
-                </a:lnTo>
-                <a:close/>
-                <a:lnTo>
-                  <a:pt x="249819" y="901435"/>
-                </a:lnTo>
-                <a:close/>
-                <a:lnTo>
-                  <a:pt x="252089" y="896663"/>
-                </a:lnTo>
-                <a:close/>
-                <a:lnTo>
-                  <a:pt x="254359" y="891891"/>
-                </a:lnTo>
-                <a:close/>
-                <a:lnTo>
-                  <a:pt x="256629" y="887119"/>
-                </a:lnTo>
-                <a:close/>
-                <a:lnTo>
-                  <a:pt x="258900" y="882347"/>
-                </a:lnTo>
-                <a:close/>
-                <a:lnTo>
-                  <a:pt x="261170" y="877574"/>
-                </a:lnTo>
-                <a:close/>
-                <a:lnTo>
-                  <a:pt x="263440" y="872804"/>
-                </a:lnTo>
-                <a:close/>
-                <a:lnTo>
-                  <a:pt x="265710" y="868025"/>
-                </a:lnTo>
-                <a:close/>
-                <a:lnTo>
-                  <a:pt x="267981" y="863285"/>
-                </a:lnTo>
-                <a:close/>
-                <a:lnTo>
-                  <a:pt x="270251" y="858536"/>
-                </a:lnTo>
-                <a:close/>
-                <a:lnTo>
-                  <a:pt x="272521" y="853758"/>
-                </a:lnTo>
-                <a:close/>
-                <a:lnTo>
-                  <a:pt x="274791" y="848988"/>
-                </a:lnTo>
-                <a:close/>
-                <a:lnTo>
-                  <a:pt x="277063" y="844215"/>
-                </a:lnTo>
-                <a:close/>
-                <a:lnTo>
-                  <a:pt x="279327" y="839443"/>
-                </a:lnTo>
-                <a:close/>
-                <a:lnTo>
-                  <a:pt x="281633" y="834671"/>
-                </a:lnTo>
-                <a:close/>
-                <a:lnTo>
-                  <a:pt x="283921" y="829899"/>
-                </a:lnTo>
-                <a:close/>
-                <a:lnTo>
-                  <a:pt x="286187" y="825126"/>
-                </a:lnTo>
-                <a:close/>
-                <a:lnTo>
-                  <a:pt x="288459" y="820354"/>
-                </a:lnTo>
-                <a:close/>
-                <a:lnTo>
-                  <a:pt x="290729" y="815582"/>
-                </a:lnTo>
-                <a:close/>
-                <a:lnTo>
-                  <a:pt x="292999" y="810810"/>
-                </a:lnTo>
-                <a:close/>
-                <a:lnTo>
-                  <a:pt x="295269" y="806038"/>
-                </a:lnTo>
-                <a:close/>
-                <a:lnTo>
-                  <a:pt x="297540" y="801266"/>
-                </a:lnTo>
-                <a:close/>
-                <a:lnTo>
-                  <a:pt x="299810" y="796493"/>
-                </a:lnTo>
-                <a:close/>
-                <a:lnTo>
-                  <a:pt x="302080" y="791722"/>
-                </a:lnTo>
-                <a:close/>
-                <a:lnTo>
-                  <a:pt x="304350" y="786945"/>
-                </a:lnTo>
-                <a:close/>
-                <a:lnTo>
-                  <a:pt x="306621" y="782215"/>
-                </a:lnTo>
-                <a:close/>
-                <a:lnTo>
-                  <a:pt x="308891" y="777452"/>
-                </a:lnTo>
-                <a:close/>
-                <a:lnTo>
-                  <a:pt x="311161" y="772678"/>
-                </a:lnTo>
-                <a:close/>
-                <a:lnTo>
-                  <a:pt x="313431" y="767906"/>
-                </a:lnTo>
-                <a:close/>
-                <a:lnTo>
-                  <a:pt x="315702" y="763134"/>
-                </a:lnTo>
-                <a:close/>
-                <a:lnTo>
-                  <a:pt x="317972" y="758362"/>
-                </a:lnTo>
-                <a:close/>
-                <a:lnTo>
-                  <a:pt x="320242" y="753590"/>
-                </a:lnTo>
-                <a:close/>
-                <a:lnTo>
-                  <a:pt x="322512" y="748818"/>
-                </a:lnTo>
-                <a:close/>
-                <a:lnTo>
-                  <a:pt x="324783" y="744045"/>
-                </a:lnTo>
-                <a:close/>
-                <a:lnTo>
-                  <a:pt x="327053" y="739273"/>
-                </a:lnTo>
-                <a:close/>
-                <a:lnTo>
-                  <a:pt x="329323" y="734501"/>
-                </a:lnTo>
-                <a:close/>
-                <a:lnTo>
-                  <a:pt x="331593" y="729729"/>
-                </a:lnTo>
-                <a:close/>
-                <a:lnTo>
-                  <a:pt x="333864" y="724957"/>
-                </a:lnTo>
-                <a:close/>
-                <a:lnTo>
-                  <a:pt x="336134" y="720185"/>
-                </a:lnTo>
-                <a:close/>
-                <a:lnTo>
-                  <a:pt x="338404" y="715413"/>
-                </a:lnTo>
-                <a:close/>
-                <a:lnTo>
-                  <a:pt x="340674" y="710640"/>
-                </a:lnTo>
-                <a:close/>
-                <a:lnTo>
-                  <a:pt x="342945" y="705869"/>
-                </a:lnTo>
-                <a:close/>
-                <a:lnTo>
-                  <a:pt x="345215" y="701143"/>
-                </a:lnTo>
-                <a:close/>
-                <a:lnTo>
-                  <a:pt x="347485" y="696369"/>
-                </a:lnTo>
-                <a:close/>
-                <a:lnTo>
-                  <a:pt x="349755" y="691598"/>
-                </a:lnTo>
-                <a:close/>
-                <a:lnTo>
-                  <a:pt x="352026" y="686825"/>
-                </a:lnTo>
-                <a:close/>
-                <a:lnTo>
-                  <a:pt x="354296" y="682053"/>
-                </a:lnTo>
-                <a:close/>
-                <a:lnTo>
-                  <a:pt x="356566" y="677281"/>
-                </a:lnTo>
-                <a:close/>
-                <a:lnTo>
-                  <a:pt x="358836" y="672509"/>
-                </a:lnTo>
-                <a:close/>
-                <a:lnTo>
-                  <a:pt x="361107" y="667737"/>
-                </a:lnTo>
-                <a:close/>
-                <a:lnTo>
-                  <a:pt x="363377" y="662965"/>
-                </a:lnTo>
-                <a:close/>
-                <a:lnTo>
-                  <a:pt x="365647" y="658192"/>
-                </a:lnTo>
-                <a:close/>
-                <a:lnTo>
-                  <a:pt x="367917" y="653420"/>
-                </a:lnTo>
-                <a:close/>
-                <a:lnTo>
-                  <a:pt x="370188" y="648648"/>
-                </a:lnTo>
-                <a:close/>
-                <a:lnTo>
-                  <a:pt x="372458" y="643876"/>
-                </a:lnTo>
-                <a:close/>
-                <a:lnTo>
-                  <a:pt x="374728" y="639104"/>
-                </a:lnTo>
-                <a:close/>
-                <a:lnTo>
-                  <a:pt x="376998" y="634332"/>
-                </a:lnTo>
-                <a:close/>
-                <a:lnTo>
-                  <a:pt x="379269" y="629557"/>
-                </a:lnTo>
-                <a:close/>
-                <a:lnTo>
-                  <a:pt x="381539" y="624797"/>
-                </a:lnTo>
-                <a:close/>
-                <a:lnTo>
-                  <a:pt x="383809" y="620065"/>
-                </a:lnTo>
-                <a:close/>
-                <a:lnTo>
-                  <a:pt x="386079" y="615287"/>
-                </a:lnTo>
-                <a:close/>
-                <a:lnTo>
-                  <a:pt x="388349" y="610517"/>
-                </a:lnTo>
-                <a:close/>
-                <a:lnTo>
-                  <a:pt x="390621" y="605744"/>
-                </a:lnTo>
-                <a:close/>
-                <a:lnTo>
-                  <a:pt x="392887" y="600972"/>
-                </a:lnTo>
-                <a:close/>
-                <a:lnTo>
-                  <a:pt x="395174" y="596200"/>
-                </a:lnTo>
-                <a:close/>
-                <a:lnTo>
-                  <a:pt x="397481" y="591428"/>
-                </a:lnTo>
-                <a:close/>
-                <a:lnTo>
-                  <a:pt x="399745" y="586656"/>
-                </a:lnTo>
-                <a:close/>
-                <a:lnTo>
-                  <a:pt x="402017" y="581884"/>
-                </a:lnTo>
-                <a:close/>
-                <a:lnTo>
-                  <a:pt x="404287" y="577111"/>
-                </a:lnTo>
-                <a:close/>
-                <a:lnTo>
-                  <a:pt x="406557" y="572339"/>
-                </a:lnTo>
-                <a:close/>
-                <a:lnTo>
-                  <a:pt x="408827" y="567567"/>
-                </a:lnTo>
-                <a:close/>
-                <a:lnTo>
-                  <a:pt x="411098" y="562795"/>
-                </a:lnTo>
-                <a:close/>
-                <a:lnTo>
-                  <a:pt x="413368" y="558022"/>
-                </a:lnTo>
-                <a:close/>
-                <a:lnTo>
-                  <a:pt x="415638" y="553252"/>
-                </a:lnTo>
-                <a:close/>
-                <a:lnTo>
-                  <a:pt x="417908" y="548474"/>
-                </a:lnTo>
-                <a:close/>
-                <a:lnTo>
-                  <a:pt x="420179" y="543728"/>
-                </a:lnTo>
-                <a:close/>
-                <a:lnTo>
-                  <a:pt x="422449" y="538984"/>
-                </a:lnTo>
-                <a:close/>
-                <a:lnTo>
-                  <a:pt x="424719" y="534206"/>
-                </a:lnTo>
-                <a:close/>
-                <a:lnTo>
-                  <a:pt x="426989" y="529436"/>
-                </a:lnTo>
-                <a:close/>
-                <a:lnTo>
-                  <a:pt x="429260" y="524663"/>
-                </a:lnTo>
-                <a:close/>
-                <a:lnTo>
-                  <a:pt x="431530" y="519891"/>
-                </a:lnTo>
-                <a:close/>
-                <a:lnTo>
-                  <a:pt x="433800" y="515119"/>
-                </a:lnTo>
-                <a:close/>
-                <a:lnTo>
-                  <a:pt x="436070" y="510347"/>
-                </a:lnTo>
-                <a:close/>
-                <a:lnTo>
-                  <a:pt x="438341" y="505575"/>
-                </a:lnTo>
-                <a:close/>
-                <a:lnTo>
-                  <a:pt x="440611" y="500803"/>
-                </a:lnTo>
-                <a:close/>
-                <a:lnTo>
-                  <a:pt x="442881" y="496030"/>
-                </a:lnTo>
-                <a:close/>
-                <a:lnTo>
-                  <a:pt x="445151" y="491258"/>
-                </a:lnTo>
-                <a:close/>
-                <a:lnTo>
-                  <a:pt x="447422" y="486486"/>
-                </a:lnTo>
-                <a:close/>
-                <a:lnTo>
-                  <a:pt x="449692" y="481714"/>
-                </a:lnTo>
-                <a:close/>
-                <a:lnTo>
-                  <a:pt x="451962" y="476941"/>
-                </a:lnTo>
-                <a:close/>
-                <a:lnTo>
-                  <a:pt x="454233" y="472171"/>
-                </a:lnTo>
-                <a:close/>
-                <a:lnTo>
-                  <a:pt x="456503" y="467393"/>
-                </a:lnTo>
-                <a:close/>
-                <a:lnTo>
-                  <a:pt x="458773" y="462659"/>
-                </a:lnTo>
-                <a:close/>
-                <a:lnTo>
-                  <a:pt x="461043" y="457902"/>
-                </a:lnTo>
-                <a:close/>
-                <a:lnTo>
-                  <a:pt x="463314" y="453126"/>
-                </a:lnTo>
-                <a:close/>
-                <a:lnTo>
-                  <a:pt x="465584" y="448355"/>
-                </a:lnTo>
-                <a:close/>
-                <a:lnTo>
-                  <a:pt x="467854" y="443582"/>
-                </a:lnTo>
-                <a:close/>
-                <a:lnTo>
-                  <a:pt x="470124" y="438810"/>
-                </a:lnTo>
-                <a:close/>
-                <a:lnTo>
-                  <a:pt x="472395" y="434038"/>
-                </a:lnTo>
-                <a:close/>
-                <a:lnTo>
-                  <a:pt x="474665" y="429266"/>
-                </a:lnTo>
-                <a:close/>
-                <a:lnTo>
-                  <a:pt x="476935" y="424494"/>
-                </a:lnTo>
-                <a:close/>
-                <a:lnTo>
-                  <a:pt x="479205" y="419722"/>
-                </a:lnTo>
-                <a:close/>
-                <a:lnTo>
-                  <a:pt x="481476" y="414949"/>
-                </a:lnTo>
-                <a:close/>
-                <a:lnTo>
-                  <a:pt x="483746" y="410177"/>
-                </a:lnTo>
-                <a:close/>
-                <a:lnTo>
-                  <a:pt x="486016" y="405405"/>
-                </a:lnTo>
-                <a:close/>
-                <a:lnTo>
-                  <a:pt x="488286" y="400633"/>
-                </a:lnTo>
-                <a:close/>
-                <a:lnTo>
-                  <a:pt x="490557" y="395861"/>
-                </a:lnTo>
-                <a:close/>
-                <a:lnTo>
-                  <a:pt x="492827" y="391089"/>
-                </a:lnTo>
-                <a:close/>
-                <a:lnTo>
-                  <a:pt x="495097" y="386314"/>
-                </a:lnTo>
-                <a:close/>
-                <a:lnTo>
-                  <a:pt x="497367" y="381588"/>
-                </a:lnTo>
-                <a:close/>
-                <a:lnTo>
-                  <a:pt x="499637" y="376818"/>
-                </a:lnTo>
-                <a:close/>
-                <a:lnTo>
-                  <a:pt x="501908" y="372046"/>
-                </a:lnTo>
-                <a:close/>
-                <a:lnTo>
-                  <a:pt x="504178" y="367274"/>
-                </a:lnTo>
-                <a:close/>
-                <a:lnTo>
-                  <a:pt x="506448" y="362501"/>
-                </a:lnTo>
-                <a:close/>
-                <a:lnTo>
-                  <a:pt x="508718" y="357729"/>
-                </a:lnTo>
-                <a:close/>
-                <a:lnTo>
-                  <a:pt x="511035" y="352957"/>
-                </a:lnTo>
-                <a:close/>
-                <a:lnTo>
-                  <a:pt x="513305" y="348185"/>
-                </a:lnTo>
-                <a:close/>
-                <a:lnTo>
-                  <a:pt x="515575" y="343413"/>
-                </a:lnTo>
-                <a:close/>
-                <a:lnTo>
-                  <a:pt x="517845" y="338641"/>
-                </a:lnTo>
-                <a:close/>
-                <a:lnTo>
-                  <a:pt x="520115" y="333868"/>
-                </a:lnTo>
-                <a:close/>
-                <a:lnTo>
-                  <a:pt x="522386" y="329096"/>
-                </a:lnTo>
-                <a:close/>
-                <a:lnTo>
-                  <a:pt x="524656" y="324324"/>
-                </a:lnTo>
-                <a:close/>
-                <a:lnTo>
-                  <a:pt x="526926" y="319552"/>
-                </a:lnTo>
-                <a:close/>
-                <a:lnTo>
-                  <a:pt x="529196" y="314780"/>
-                </a:lnTo>
-                <a:close/>
-                <a:lnTo>
-                  <a:pt x="531467" y="310006"/>
-                </a:lnTo>
-                <a:close/>
-                <a:lnTo>
-                  <a:pt x="533737" y="305241"/>
-                </a:lnTo>
-                <a:close/>
-                <a:lnTo>
-                  <a:pt x="536007" y="300512"/>
-                </a:lnTo>
-                <a:close/>
-                <a:lnTo>
-                  <a:pt x="538277" y="295736"/>
-                </a:lnTo>
-                <a:close/>
-                <a:lnTo>
-                  <a:pt x="540548" y="290965"/>
-                </a:lnTo>
-                <a:close/>
-                <a:lnTo>
-                  <a:pt x="542818" y="286192"/>
-                </a:lnTo>
-                <a:close/>
-                <a:lnTo>
-                  <a:pt x="545088" y="281420"/>
-                </a:lnTo>
-                <a:close/>
-                <a:lnTo>
-                  <a:pt x="547358" y="276648"/>
-                </a:lnTo>
-                <a:close/>
-                <a:lnTo>
-                  <a:pt x="549629" y="271876"/>
-                </a:lnTo>
-                <a:close/>
-                <a:lnTo>
-                  <a:pt x="551899" y="267104"/>
-                </a:lnTo>
-                <a:close/>
-                <a:lnTo>
-                  <a:pt x="554169" y="262332"/>
-                </a:lnTo>
-                <a:close/>
-                <a:lnTo>
-                  <a:pt x="556439" y="257560"/>
-                </a:lnTo>
-                <a:close/>
-                <a:lnTo>
-                  <a:pt x="558710" y="252787"/>
-                </a:lnTo>
-                <a:close/>
-                <a:lnTo>
-                  <a:pt x="560980" y="248015"/>
-                </a:lnTo>
-                <a:close/>
-                <a:lnTo>
-                  <a:pt x="563250" y="243243"/>
-                </a:lnTo>
-                <a:close/>
-                <a:lnTo>
-                  <a:pt x="565520" y="238471"/>
-                </a:lnTo>
-                <a:close/>
-                <a:lnTo>
-                  <a:pt x="567791" y="233700"/>
-                </a:lnTo>
-                <a:close/>
-                <a:lnTo>
-                  <a:pt x="570061" y="228923"/>
-                </a:lnTo>
-                <a:close/>
-                <a:lnTo>
-                  <a:pt x="572331" y="224170"/>
-                </a:lnTo>
-                <a:close/>
-                <a:lnTo>
-                  <a:pt x="574601" y="219433"/>
-                </a:lnTo>
-                <a:close/>
-                <a:lnTo>
-                  <a:pt x="576872" y="214655"/>
-                </a:lnTo>
-                <a:close/>
-                <a:lnTo>
-                  <a:pt x="579142" y="209884"/>
-                </a:lnTo>
-                <a:close/>
-                <a:lnTo>
-                  <a:pt x="581412" y="205111"/>
-                </a:lnTo>
-                <a:close/>
-                <a:lnTo>
-                  <a:pt x="583682" y="200339"/>
-                </a:lnTo>
-                <a:close/>
-                <a:lnTo>
-                  <a:pt x="585953" y="195567"/>
-                </a:lnTo>
-                <a:close/>
-                <a:lnTo>
-                  <a:pt x="588223" y="190795"/>
-                </a:lnTo>
-                <a:close/>
-                <a:lnTo>
-                  <a:pt x="590493" y="186023"/>
-                </a:lnTo>
-                <a:close/>
-                <a:lnTo>
-                  <a:pt x="592763" y="181251"/>
-                </a:lnTo>
-                <a:close/>
-                <a:lnTo>
-                  <a:pt x="595034" y="176479"/>
-                </a:lnTo>
-                <a:close/>
-                <a:lnTo>
-                  <a:pt x="597304" y="171706"/>
-                </a:lnTo>
-                <a:close/>
-                <a:lnTo>
-                  <a:pt x="599574" y="166934"/>
-                </a:lnTo>
-                <a:close/>
-                <a:lnTo>
-                  <a:pt x="601844" y="162162"/>
-                </a:lnTo>
-                <a:close/>
-                <a:lnTo>
-                  <a:pt x="604115" y="157390"/>
-                </a:lnTo>
-                <a:close/>
-                <a:lnTo>
-                  <a:pt x="606385" y="152619"/>
-                </a:lnTo>
-                <a:close/>
-                <a:lnTo>
-                  <a:pt x="608655" y="147841"/>
-                </a:lnTo>
-                <a:close/>
-                <a:lnTo>
-                  <a:pt x="610925" y="143102"/>
-                </a:lnTo>
-                <a:close/>
-                <a:lnTo>
-                  <a:pt x="613196" y="138351"/>
-                </a:lnTo>
-                <a:close/>
-                <a:lnTo>
-                  <a:pt x="615466" y="133574"/>
-                </a:lnTo>
-                <a:close/>
-                <a:lnTo>
-                  <a:pt x="617736" y="128803"/>
-                </a:lnTo>
-                <a:close/>
-                <a:lnTo>
-                  <a:pt x="620008" y="124031"/>
-                </a:lnTo>
-                <a:close/>
-                <a:lnTo>
-                  <a:pt x="622272" y="119258"/>
-                </a:lnTo>
-                <a:close/>
-                <a:lnTo>
-                  <a:pt x="624579" y="114486"/>
-                </a:lnTo>
-                <a:close/>
-                <a:lnTo>
-                  <a:pt x="626866" y="109714"/>
-                </a:lnTo>
-                <a:close/>
-                <a:lnTo>
-                  <a:pt x="629132" y="104942"/>
-                </a:lnTo>
-                <a:close/>
-                <a:lnTo>
-                  <a:pt x="631404" y="100170"/>
-                </a:lnTo>
-                <a:close/>
-                <a:lnTo>
-                  <a:pt x="633674" y="95398"/>
-                </a:lnTo>
-                <a:close/>
-                <a:lnTo>
-                  <a:pt x="635944" y="90626"/>
-                </a:lnTo>
-                <a:close/>
-                <a:lnTo>
-                  <a:pt x="638214" y="85853"/>
-                </a:lnTo>
-                <a:close/>
-                <a:lnTo>
-                  <a:pt x="640484" y="81081"/>
-                </a:lnTo>
-                <a:close/>
-                <a:lnTo>
-                  <a:pt x="642755" y="76309"/>
-                </a:lnTo>
-                <a:close/>
-                <a:lnTo>
-                  <a:pt x="645025" y="71538"/>
-                </a:lnTo>
-                <a:close/>
-                <a:lnTo>
-                  <a:pt x="647295" y="66761"/>
-                </a:lnTo>
-                <a:close/>
-                <a:lnTo>
-                  <a:pt x="649565" y="62032"/>
-                </a:lnTo>
-                <a:close/>
-                <a:lnTo>
-                  <a:pt x="651836" y="57268"/>
-                </a:lnTo>
-                <a:close/>
-                <a:lnTo>
-                  <a:pt x="654106" y="52494"/>
-                </a:lnTo>
-                <a:close/>
-                <a:lnTo>
-                  <a:pt x="656376" y="47722"/>
-                </a:lnTo>
-                <a:close/>
-                <a:lnTo>
-                  <a:pt x="658646" y="42950"/>
-                </a:lnTo>
-                <a:close/>
-                <a:lnTo>
-                  <a:pt x="660917" y="38177"/>
-                </a:lnTo>
-                <a:close/>
-                <a:lnTo>
-                  <a:pt x="663187" y="33405"/>
-                </a:lnTo>
-                <a:close/>
-                <a:lnTo>
-                  <a:pt x="665457" y="28633"/>
-                </a:lnTo>
-                <a:close/>
-                <a:lnTo>
-                  <a:pt x="667727" y="23861"/>
-                </a:lnTo>
-                <a:close/>
-                <a:lnTo>
-                  <a:pt x="669998" y="19089"/>
-                </a:lnTo>
-                <a:close/>
-                <a:lnTo>
-                  <a:pt x="672268" y="14317"/>
-                </a:lnTo>
-                <a:close/>
-                <a:lnTo>
-                  <a:pt x="674538" y="9545"/>
-                </a:lnTo>
-                <a:close/>
-                <a:lnTo>
-                  <a:pt x="676808" y="4772"/>
-                </a:lnTo>
-                <a:close/>
-                <a:lnTo>
-                  <a:pt x="679079" y="0"/>
+                  <a:pt x="9633" y="2129065"/>
+                </a:lnTo>
+                <a:close/>
+                <a:lnTo>
+                  <a:pt x="19267" y="2109601"/>
+                </a:lnTo>
+                <a:close/>
+                <a:lnTo>
+                  <a:pt x="28900" y="2090450"/>
+                </a:lnTo>
+                <a:close/>
+                <a:lnTo>
+                  <a:pt x="38533" y="2071614"/>
+                </a:lnTo>
+                <a:close/>
+                <a:lnTo>
+                  <a:pt x="48166" y="2053095"/>
+                </a:lnTo>
+                <a:close/>
+                <a:lnTo>
+                  <a:pt x="57800" y="2034895"/>
+                </a:lnTo>
+                <a:close/>
+                <a:lnTo>
+                  <a:pt x="67433" y="2017017"/>
+                </a:lnTo>
+                <a:close/>
+                <a:lnTo>
+                  <a:pt x="77066" y="1999462"/>
+                </a:lnTo>
+                <a:close/>
+                <a:lnTo>
+                  <a:pt x="86700" y="1982232"/>
+                </a:lnTo>
+                <a:close/>
+                <a:lnTo>
+                  <a:pt x="96333" y="1965330"/>
+                </a:lnTo>
+                <a:close/>
+                <a:lnTo>
+                  <a:pt x="105966" y="1948758"/>
+                </a:lnTo>
+                <a:close/>
+                <a:lnTo>
+                  <a:pt x="115600" y="1932517"/>
+                </a:lnTo>
+                <a:close/>
+                <a:lnTo>
+                  <a:pt x="125233" y="1916609"/>
+                </a:lnTo>
+                <a:close/>
+                <a:lnTo>
+                  <a:pt x="134866" y="1901038"/>
+                </a:lnTo>
+                <a:close/>
+                <a:lnTo>
+                  <a:pt x="144500" y="1885804"/>
+                </a:lnTo>
+                <a:close/>
+                <a:lnTo>
+                  <a:pt x="154133" y="1870910"/>
+                </a:lnTo>
+                <a:close/>
+                <a:lnTo>
+                  <a:pt x="163766" y="1856358"/>
+                </a:lnTo>
+                <a:close/>
+                <a:lnTo>
+                  <a:pt x="173400" y="1842150"/>
+                </a:lnTo>
+                <a:close/>
+                <a:lnTo>
+                  <a:pt x="183033" y="1828288"/>
+                </a:lnTo>
+                <a:close/>
+                <a:lnTo>
+                  <a:pt x="192666" y="1814775"/>
+                </a:lnTo>
+                <a:close/>
+                <a:lnTo>
+                  <a:pt x="202300" y="1801611"/>
+                </a:lnTo>
+                <a:close/>
+                <a:lnTo>
+                  <a:pt x="211933" y="1788800"/>
+                </a:lnTo>
+                <a:close/>
+                <a:lnTo>
+                  <a:pt x="221566" y="1776343"/>
+                </a:lnTo>
+                <a:close/>
+                <a:lnTo>
+                  <a:pt x="231200" y="1764242"/>
+                </a:lnTo>
+                <a:close/>
+                <a:lnTo>
+                  <a:pt x="240833" y="1752500"/>
+                </a:lnTo>
+                <a:close/>
+                <a:lnTo>
+                  <a:pt x="250466" y="1741118"/>
+                </a:lnTo>
+                <a:close/>
+                <a:lnTo>
+                  <a:pt x="260099" y="1730099"/>
+                </a:lnTo>
+                <a:close/>
+                <a:lnTo>
+                  <a:pt x="269733" y="1719445"/>
+                </a:lnTo>
+                <a:close/>
+                <a:lnTo>
+                  <a:pt x="279366" y="1709157"/>
+                </a:lnTo>
+                <a:close/>
+                <a:lnTo>
+                  <a:pt x="288999" y="1699231"/>
+                </a:lnTo>
+                <a:close/>
+                <a:lnTo>
+                  <a:pt x="298633" y="1689657"/>
+                </a:lnTo>
+                <a:close/>
+                <a:lnTo>
+                  <a:pt x="308266" y="1680425"/>
+                </a:lnTo>
+                <a:close/>
+                <a:lnTo>
+                  <a:pt x="317899" y="1671524"/>
+                </a:lnTo>
+                <a:close/>
+                <a:lnTo>
+                  <a:pt x="327532" y="1662944"/>
+                </a:lnTo>
+                <a:close/>
+                <a:lnTo>
+                  <a:pt x="337166" y="1654674"/>
+                </a:lnTo>
+                <a:close/>
+                <a:lnTo>
+                  <a:pt x="346799" y="1646705"/>
+                </a:lnTo>
+                <a:close/>
+                <a:lnTo>
+                  <a:pt x="356432" y="1639026"/>
+                </a:lnTo>
+                <a:close/>
+                <a:lnTo>
+                  <a:pt x="366065" y="1631627"/>
+                </a:lnTo>
+                <a:close/>
+                <a:lnTo>
+                  <a:pt x="375699" y="1624497"/>
+                </a:lnTo>
+                <a:close/>
+                <a:lnTo>
+                  <a:pt x="385332" y="1617626"/>
+                </a:lnTo>
+                <a:close/>
+                <a:lnTo>
+                  <a:pt x="394966" y="1611004"/>
+                </a:lnTo>
+                <a:close/>
+                <a:lnTo>
+                  <a:pt x="404599" y="1604620"/>
+                </a:lnTo>
+                <a:close/>
+                <a:lnTo>
+                  <a:pt x="414232" y="1598464"/>
+                </a:lnTo>
+                <a:close/>
+                <a:lnTo>
+                  <a:pt x="423866" y="1592526"/>
+                </a:lnTo>
+                <a:close/>
+                <a:lnTo>
+                  <a:pt x="433499" y="1586799"/>
+                </a:lnTo>
+                <a:close/>
+                <a:lnTo>
+                  <a:pt x="443133" y="1581273"/>
+                </a:lnTo>
+                <a:close/>
+                <a:lnTo>
+                  <a:pt x="452766" y="1575941"/>
+                </a:lnTo>
+                <a:close/>
+                <a:lnTo>
+                  <a:pt x="462400" y="1570794"/>
+                </a:lnTo>
+                <a:close/>
+                <a:lnTo>
+                  <a:pt x="472033" y="1565824"/>
+                </a:lnTo>
+                <a:close/>
+                <a:lnTo>
+                  <a:pt x="481667" y="1561023"/>
+                </a:lnTo>
+                <a:close/>
+                <a:lnTo>
+                  <a:pt x="491300" y="1556382"/>
+                </a:lnTo>
+                <a:close/>
+                <a:lnTo>
+                  <a:pt x="500934" y="1551893"/>
+                </a:lnTo>
+                <a:close/>
+                <a:lnTo>
+                  <a:pt x="510567" y="1547547"/>
+                </a:lnTo>
+                <a:close/>
+                <a:lnTo>
+                  <a:pt x="520200" y="1543338"/>
+                </a:lnTo>
+                <a:close/>
+                <a:lnTo>
+                  <a:pt x="529833" y="1539255"/>
+                </a:lnTo>
+                <a:close/>
+                <a:lnTo>
+                  <a:pt x="539466" y="1535292"/>
+                </a:lnTo>
+                <a:close/>
+                <a:lnTo>
+                  <a:pt x="549099" y="1531439"/>
+                </a:lnTo>
+                <a:close/>
+                <a:lnTo>
+                  <a:pt x="558731" y="1527689"/>
+                </a:lnTo>
+                <a:close/>
+                <a:lnTo>
+                  <a:pt x="568364" y="1524038"/>
+                </a:lnTo>
+                <a:close/>
+                <a:lnTo>
+                  <a:pt x="577996" y="1520482"/>
+                </a:lnTo>
+                <a:close/>
+                <a:lnTo>
+                  <a:pt x="587629" y="1517015"/>
+                </a:lnTo>
+                <a:close/>
+                <a:lnTo>
+                  <a:pt x="597261" y="1513635"/>
+                </a:lnTo>
+                <a:close/>
+                <a:lnTo>
+                  <a:pt x="606894" y="1510338"/>
+                </a:lnTo>
+                <a:close/>
+                <a:lnTo>
+                  <a:pt x="616527" y="1507118"/>
+                </a:lnTo>
+                <a:close/>
+                <a:lnTo>
+                  <a:pt x="626160" y="1503972"/>
+                </a:lnTo>
+                <a:close/>
+                <a:lnTo>
+                  <a:pt x="635793" y="1500897"/>
+                </a:lnTo>
+                <a:close/>
+                <a:lnTo>
+                  <a:pt x="645427" y="1497887"/>
+                </a:lnTo>
+                <a:close/>
+                <a:lnTo>
+                  <a:pt x="655061" y="1494939"/>
+                </a:lnTo>
+                <a:close/>
+                <a:lnTo>
+                  <a:pt x="664695" y="1492049"/>
+                </a:lnTo>
+                <a:close/>
+                <a:lnTo>
+                  <a:pt x="674329" y="1489212"/>
+                </a:lnTo>
+                <a:close/>
+                <a:lnTo>
+                  <a:pt x="683965" y="1486426"/>
+                </a:lnTo>
+                <a:close/>
+                <a:lnTo>
+                  <a:pt x="693600" y="1483684"/>
+                </a:lnTo>
+                <a:close/>
+                <a:lnTo>
+                  <a:pt x="703236" y="1480984"/>
+                </a:lnTo>
+                <a:close/>
+                <a:lnTo>
+                  <a:pt x="712873" y="1478322"/>
+                </a:lnTo>
+                <a:close/>
+                <a:lnTo>
+                  <a:pt x="722509" y="1475694"/>
+                </a:lnTo>
+                <a:close/>
+                <a:lnTo>
+                  <a:pt x="732145" y="1473095"/>
+                </a:lnTo>
+                <a:close/>
+                <a:lnTo>
+                  <a:pt x="741781" y="1470522"/>
+                </a:lnTo>
+                <a:close/>
+                <a:lnTo>
+                  <a:pt x="751417" y="1467971"/>
+                </a:lnTo>
+                <a:close/>
+                <a:lnTo>
+                  <a:pt x="761051" y="1465439"/>
+                </a:lnTo>
+                <a:close/>
+                <a:lnTo>
+                  <a:pt x="770685" y="1462920"/>
+                </a:lnTo>
+                <a:close/>
+                <a:lnTo>
+                  <a:pt x="780318" y="1460411"/>
+                </a:lnTo>
+                <a:close/>
+                <a:lnTo>
+                  <a:pt x="789949" y="1457909"/>
+                </a:lnTo>
+                <a:close/>
+                <a:lnTo>
+                  <a:pt x="799579" y="1455409"/>
+                </a:lnTo>
+                <a:close/>
+                <a:lnTo>
+                  <a:pt x="809208" y="1452908"/>
+                </a:lnTo>
+                <a:close/>
+                <a:lnTo>
+                  <a:pt x="818835" y="1450401"/>
+                </a:lnTo>
+                <a:close/>
+                <a:lnTo>
+                  <a:pt x="828460" y="1447885"/>
+                </a:lnTo>
+                <a:close/>
+                <a:lnTo>
+                  <a:pt x="838083" y="1445352"/>
+                </a:lnTo>
+                <a:close/>
+                <a:lnTo>
+                  <a:pt x="847705" y="1442795"/>
+                </a:lnTo>
+                <a:close/>
+                <a:lnTo>
+                  <a:pt x="857327" y="1440204"/>
+                </a:lnTo>
+                <a:close/>
+                <a:lnTo>
+                  <a:pt x="866950" y="1437570"/>
+                </a:lnTo>
+                <a:close/>
+                <a:lnTo>
+                  <a:pt x="876573" y="1434886"/>
+                </a:lnTo>
+                <a:close/>
+                <a:lnTo>
+                  <a:pt x="886198" y="1432142"/>
+                </a:lnTo>
+                <a:close/>
+                <a:lnTo>
+                  <a:pt x="895826" y="1429329"/>
+                </a:lnTo>
+                <a:close/>
+                <a:lnTo>
+                  <a:pt x="905456" y="1426438"/>
+                </a:lnTo>
+                <a:close/>
+                <a:lnTo>
+                  <a:pt x="915091" y="1423462"/>
+                </a:lnTo>
+                <a:close/>
+                <a:lnTo>
+                  <a:pt x="924729" y="1420391"/>
+                </a:lnTo>
+                <a:close/>
+                <a:lnTo>
+                  <a:pt x="934373" y="1417216"/>
+                </a:lnTo>
+                <a:close/>
+                <a:lnTo>
+                  <a:pt x="944023" y="1413928"/>
+                </a:lnTo>
+                <a:close/>
+                <a:lnTo>
+                  <a:pt x="953679" y="1410520"/>
+                </a:lnTo>
+                <a:close/>
+                <a:lnTo>
+                  <a:pt x="963342" y="1406982"/>
+                </a:lnTo>
+                <a:close/>
+                <a:lnTo>
+                  <a:pt x="973012" y="1403312"/>
+                </a:lnTo>
+                <a:close/>
+                <a:lnTo>
+                  <a:pt x="982685" y="1399521"/>
+                </a:lnTo>
+                <a:close/>
+                <a:lnTo>
+                  <a:pt x="992361" y="1395618"/>
+                </a:lnTo>
+                <a:close/>
+                <a:lnTo>
+                  <a:pt x="1002036" y="1391614"/>
+                </a:lnTo>
+                <a:close/>
+                <a:lnTo>
+                  <a:pt x="1011707" y="1387520"/>
+                </a:lnTo>
+                <a:close/>
+                <a:lnTo>
+                  <a:pt x="1021373" y="1383345"/>
+                </a:lnTo>
+                <a:close/>
+                <a:lnTo>
+                  <a:pt x="1031030" y="1379101"/>
+                </a:lnTo>
+                <a:close/>
+                <a:lnTo>
+                  <a:pt x="1040676" y="1374798"/>
+                </a:lnTo>
+                <a:close/>
+                <a:lnTo>
+                  <a:pt x="1050309" y="1370445"/>
+                </a:lnTo>
+                <a:close/>
+                <a:lnTo>
+                  <a:pt x="1059927" y="1366055"/>
+                </a:lnTo>
+                <a:close/>
+                <a:lnTo>
+                  <a:pt x="1069525" y="1361636"/>
+                </a:lnTo>
+                <a:close/>
+                <a:lnTo>
+                  <a:pt x="1079103" y="1357200"/>
+                </a:lnTo>
+                <a:close/>
+                <a:lnTo>
+                  <a:pt x="1088658" y="1352757"/>
+                </a:lnTo>
+                <a:close/>
+                <a:lnTo>
+                  <a:pt x="1098186" y="1348318"/>
+                </a:lnTo>
+                <a:close/>
+                <a:lnTo>
+                  <a:pt x="1107689" y="1343886"/>
+                </a:lnTo>
+                <a:close/>
+                <a:lnTo>
+                  <a:pt x="1117174" y="1339453"/>
+                </a:lnTo>
+                <a:close/>
+                <a:lnTo>
+                  <a:pt x="1126650" y="1335002"/>
+                </a:lnTo>
+                <a:close/>
+                <a:lnTo>
+                  <a:pt x="1136127" y="1330522"/>
+                </a:lnTo>
+                <a:close/>
+                <a:lnTo>
+                  <a:pt x="1145614" y="1325997"/>
+                </a:lnTo>
+                <a:close/>
+                <a:lnTo>
+                  <a:pt x="1155121" y="1321413"/>
+                </a:lnTo>
+                <a:close/>
+                <a:lnTo>
+                  <a:pt x="1164657" y="1316757"/>
+                </a:lnTo>
+                <a:close/>
+                <a:lnTo>
+                  <a:pt x="1174231" y="1312015"/>
+                </a:lnTo>
+                <a:close/>
+                <a:lnTo>
+                  <a:pt x="1183852" y="1307173"/>
+                </a:lnTo>
+                <a:close/>
+                <a:lnTo>
+                  <a:pt x="1193531" y="1302216"/>
+                </a:lnTo>
+                <a:close/>
+                <a:lnTo>
+                  <a:pt x="1203276" y="1297131"/>
+                </a:lnTo>
+                <a:close/>
+                <a:lnTo>
+                  <a:pt x="1213097" y="1291904"/>
+                </a:lnTo>
+                <a:close/>
+                <a:lnTo>
+                  <a:pt x="1223003" y="1286521"/>
+                </a:lnTo>
+                <a:close/>
+                <a:lnTo>
+                  <a:pt x="1233003" y="1280968"/>
+                </a:lnTo>
+                <a:close/>
+                <a:lnTo>
+                  <a:pt x="1243103" y="1275234"/>
+                </a:lnTo>
+                <a:close/>
+                <a:lnTo>
+                  <a:pt x="1253278" y="1269328"/>
+                </a:lnTo>
+                <a:close/>
+                <a:lnTo>
+                  <a:pt x="1263493" y="1263268"/>
+                </a:lnTo>
+                <a:close/>
+                <a:lnTo>
+                  <a:pt x="1273713" y="1257070"/>
+                </a:lnTo>
+                <a:close/>
+                <a:lnTo>
+                  <a:pt x="1283904" y="1250751"/>
+                </a:lnTo>
+                <a:close/>
+                <a:lnTo>
+                  <a:pt x="1294030" y="1244328"/>
+                </a:lnTo>
+                <a:close/>
+                <a:lnTo>
+                  <a:pt x="1304057" y="1237819"/>
+                </a:lnTo>
+                <a:close/>
+                <a:lnTo>
+                  <a:pt x="1313949" y="1231239"/>
+                </a:lnTo>
+                <a:close/>
+                <a:lnTo>
+                  <a:pt x="1323671" y="1224607"/>
+                </a:lnTo>
+                <a:close/>
+                <a:lnTo>
+                  <a:pt x="1333189" y="1217938"/>
+                </a:lnTo>
+                <a:close/>
+                <a:lnTo>
+                  <a:pt x="1342468" y="1211250"/>
+                </a:lnTo>
+                <a:close/>
+                <a:lnTo>
+                  <a:pt x="1351472" y="1204559"/>
+                </a:lnTo>
+                <a:close/>
+                <a:lnTo>
+                  <a:pt x="1360166" y="1197883"/>
+                </a:lnTo>
+                <a:close/>
+                <a:lnTo>
+                  <a:pt x="1368517" y="1191239"/>
+                </a:lnTo>
+                <a:close/>
+                <a:lnTo>
+                  <a:pt x="1376491" y="1184643"/>
+                </a:lnTo>
+                <a:close/>
+                <a:lnTo>
+                  <a:pt x="1384094" y="1178097"/>
+                </a:lnTo>
+                <a:close/>
+                <a:lnTo>
+                  <a:pt x="1391363" y="1171596"/>
+                </a:lnTo>
+                <a:close/>
+                <a:lnTo>
+                  <a:pt x="1398332" y="1165134"/>
+                </a:lnTo>
+                <a:close/>
+                <a:lnTo>
+                  <a:pt x="1405036" y="1158704"/>
+                </a:lnTo>
+                <a:close/>
+                <a:lnTo>
+                  <a:pt x="1411512" y="1152300"/>
+                </a:lnTo>
+                <a:close/>
+                <a:lnTo>
+                  <a:pt x="1417794" y="1145917"/>
+                </a:lnTo>
+                <a:close/>
+                <a:lnTo>
+                  <a:pt x="1423918" y="1139547"/>
+                </a:lnTo>
+                <a:close/>
+                <a:lnTo>
+                  <a:pt x="1429920" y="1133184"/>
+                </a:lnTo>
+                <a:close/>
+                <a:lnTo>
+                  <a:pt x="1435834" y="1126823"/>
+                </a:lnTo>
+                <a:close/>
+                <a:lnTo>
+                  <a:pt x="1441697" y="1120457"/>
+                </a:lnTo>
+                <a:close/>
+                <a:lnTo>
+                  <a:pt x="1447544" y="1114080"/>
+                </a:lnTo>
+                <a:close/>
+                <a:lnTo>
+                  <a:pt x="1453411" y="1107686"/>
+                </a:lnTo>
+                <a:close/>
+                <a:lnTo>
+                  <a:pt x="1459332" y="1101268"/>
+                </a:lnTo>
+                <a:close/>
+                <a:lnTo>
+                  <a:pt x="1465342" y="1094820"/>
+                </a:lnTo>
+                <a:close/>
+                <a:lnTo>
+                  <a:pt x="1471459" y="1088342"/>
+                </a:lnTo>
+                <a:close/>
+                <a:lnTo>
+                  <a:pt x="1477672" y="1081842"/>
+                </a:lnTo>
+                <a:close/>
+                <a:lnTo>
+                  <a:pt x="1483968" y="1075327"/>
+                </a:lnTo>
+                <a:close/>
+                <a:lnTo>
+                  <a:pt x="1490337" y="1068805"/>
+                </a:lnTo>
+                <a:close/>
+                <a:lnTo>
+                  <a:pt x="1496766" y="1062284"/>
+                </a:lnTo>
+                <a:close/>
+                <a:lnTo>
+                  <a:pt x="1503244" y="1055772"/>
+                </a:lnTo>
+                <a:close/>
+                <a:lnTo>
+                  <a:pt x="1509758" y="1049278"/>
+                </a:lnTo>
+                <a:close/>
+                <a:lnTo>
+                  <a:pt x="1516298" y="1042809"/>
+                </a:lnTo>
+                <a:close/>
+                <a:lnTo>
+                  <a:pt x="1522850" y="1036373"/>
+                </a:lnTo>
+                <a:close/>
+                <a:lnTo>
+                  <a:pt x="1529404" y="1029977"/>
+                </a:lnTo>
+                <a:close/>
+                <a:lnTo>
+                  <a:pt x="1535948" y="1023631"/>
+                </a:lnTo>
+                <a:close/>
+                <a:lnTo>
+                  <a:pt x="1542469" y="1017342"/>
+                </a:lnTo>
+                <a:close/>
+                <a:lnTo>
+                  <a:pt x="1548956" y="1011118"/>
+                </a:lnTo>
+                <a:close/>
+                <a:lnTo>
+                  <a:pt x="1555397" y="1004966"/>
+                </a:lnTo>
+                <a:close/>
+                <a:lnTo>
+                  <a:pt x="1561786" y="998887"/>
+                </a:lnTo>
+                <a:close/>
+                <a:lnTo>
+                  <a:pt x="1568132" y="992858"/>
+                </a:lnTo>
+                <a:close/>
+                <a:lnTo>
+                  <a:pt x="1574448" y="986854"/>
+                </a:lnTo>
+                <a:close/>
+                <a:lnTo>
+                  <a:pt x="1580745" y="980850"/>
+                </a:lnTo>
+                <a:close/>
+                <a:lnTo>
+                  <a:pt x="1587035" y="974818"/>
+                </a:lnTo>
+                <a:close/>
+                <a:lnTo>
+                  <a:pt x="1593329" y="968735"/>
+                </a:lnTo>
+                <a:close/>
+                <a:lnTo>
+                  <a:pt x="1599640" y="962574"/>
+                </a:lnTo>
+                <a:close/>
+                <a:lnTo>
+                  <a:pt x="1605979" y="956310"/>
+                </a:lnTo>
+                <a:close/>
+                <a:lnTo>
+                  <a:pt x="1612358" y="949917"/>
+                </a:lnTo>
+                <a:close/>
+                <a:lnTo>
+                  <a:pt x="1618790" y="943369"/>
+                </a:lnTo>
+                <a:close/>
+                <a:lnTo>
+                  <a:pt x="1625285" y="936641"/>
+                </a:lnTo>
+                <a:close/>
+                <a:lnTo>
+                  <a:pt x="1631855" y="929708"/>
+                </a:lnTo>
+                <a:close/>
+                <a:lnTo>
+                  <a:pt x="1638514" y="922543"/>
+                </a:lnTo>
+                <a:close/>
+                <a:lnTo>
+                  <a:pt x="1645271" y="915121"/>
+                </a:lnTo>
+                <a:close/>
+                <a:lnTo>
+                  <a:pt x="1652133" y="907426"/>
+                </a:lnTo>
+                <a:close/>
+                <a:lnTo>
+                  <a:pt x="1659076" y="899488"/>
+                </a:lnTo>
+                <a:close/>
+                <a:lnTo>
+                  <a:pt x="1666063" y="891354"/>
+                </a:lnTo>
+                <a:close/>
+                <a:lnTo>
+                  <a:pt x="1673060" y="883072"/>
+                </a:lnTo>
+                <a:close/>
+                <a:lnTo>
+                  <a:pt x="1680030" y="874688"/>
+                </a:lnTo>
+                <a:close/>
+                <a:lnTo>
+                  <a:pt x="1686939" y="866250"/>
+                </a:lnTo>
+                <a:close/>
+                <a:lnTo>
+                  <a:pt x="1693750" y="857804"/>
+                </a:lnTo>
+                <a:close/>
+                <a:lnTo>
+                  <a:pt x="1700429" y="849397"/>
+                </a:lnTo>
+                <a:close/>
+                <a:lnTo>
+                  <a:pt x="1706939" y="841077"/>
+                </a:lnTo>
+                <a:close/>
+                <a:lnTo>
+                  <a:pt x="1713246" y="832890"/>
+                </a:lnTo>
+                <a:close/>
+                <a:lnTo>
+                  <a:pt x="1719314" y="824884"/>
+                </a:lnTo>
+                <a:close/>
+                <a:lnTo>
+                  <a:pt x="1725108" y="817104"/>
+                </a:lnTo>
+                <a:close/>
+                <a:lnTo>
+                  <a:pt x="1730592" y="809599"/>
+                </a:lnTo>
+                <a:close/>
+                <a:lnTo>
+                  <a:pt x="1735730" y="802415"/>
+                </a:lnTo>
+                <a:close/>
+                <a:lnTo>
+                  <a:pt x="1740491" y="795596"/>
+                </a:lnTo>
+                <a:close/>
+                <a:lnTo>
+                  <a:pt x="1744883" y="789147"/>
+                </a:lnTo>
+                <a:close/>
+                <a:lnTo>
+                  <a:pt x="1748941" y="783050"/>
+                </a:lnTo>
+                <a:close/>
+                <a:lnTo>
+                  <a:pt x="1752699" y="777283"/>
+                </a:lnTo>
+                <a:close/>
+                <a:lnTo>
+                  <a:pt x="1756193" y="771828"/>
+                </a:lnTo>
+                <a:close/>
+                <a:lnTo>
+                  <a:pt x="1759458" y="766665"/>
+                </a:lnTo>
+                <a:close/>
+                <a:lnTo>
+                  <a:pt x="1762528" y="761773"/>
+                </a:lnTo>
+                <a:close/>
+                <a:lnTo>
+                  <a:pt x="1765438" y="757134"/>
+                </a:lnTo>
+                <a:close/>
+                <a:lnTo>
+                  <a:pt x="1768224" y="752728"/>
+                </a:lnTo>
+                <a:close/>
+                <a:lnTo>
+                  <a:pt x="1770920" y="748534"/>
+                </a:lnTo>
+                <a:close/>
+                <a:lnTo>
+                  <a:pt x="1773562" y="744533"/>
+                </a:lnTo>
+                <a:close/>
+                <a:lnTo>
+                  <a:pt x="1776184" y="740705"/>
+                </a:lnTo>
+                <a:close/>
+                <a:lnTo>
+                  <a:pt x="1778821" y="737031"/>
+                </a:lnTo>
+                <a:close/>
+                <a:lnTo>
+                  <a:pt x="1781508" y="733491"/>
+                </a:lnTo>
+                <a:close/>
+                <a:lnTo>
+                  <a:pt x="1784280" y="730064"/>
+                </a:lnTo>
+                <a:close/>
+                <a:lnTo>
+                  <a:pt x="1787152" y="726734"/>
+                </a:lnTo>
+                <a:close/>
+                <a:lnTo>
+                  <a:pt x="1790116" y="723485"/>
+                </a:lnTo>
+                <a:close/>
+                <a:lnTo>
+                  <a:pt x="1793162" y="720300"/>
+                </a:lnTo>
+                <a:close/>
+                <a:lnTo>
+                  <a:pt x="1796282" y="717165"/>
+                </a:lnTo>
+                <a:close/>
+                <a:lnTo>
+                  <a:pt x="1799465" y="714064"/>
+                </a:lnTo>
+                <a:close/>
+                <a:lnTo>
+                  <a:pt x="1802702" y="710981"/>
+                </a:lnTo>
+                <a:close/>
+                <a:lnTo>
+                  <a:pt x="1805984" y="707902"/>
+                </a:lnTo>
+                <a:close/>
+                <a:lnTo>
+                  <a:pt x="1809302" y="704810"/>
+                </a:lnTo>
+                <a:close/>
+                <a:lnTo>
+                  <a:pt x="1812647" y="701690"/>
+                </a:lnTo>
+                <a:close/>
+                <a:lnTo>
+                  <a:pt x="1816008" y="698526"/>
+                </a:lnTo>
+                <a:close/>
+                <a:lnTo>
+                  <a:pt x="1819376" y="695303"/>
+                </a:lnTo>
+                <a:close/>
+                <a:lnTo>
+                  <a:pt x="1822743" y="692006"/>
+                </a:lnTo>
+                <a:close/>
+                <a:lnTo>
+                  <a:pt x="1826098" y="688619"/>
+                </a:lnTo>
+                <a:close/>
+                <a:lnTo>
+                  <a:pt x="1829433" y="685126"/>
+                </a:lnTo>
+                <a:close/>
+                <a:lnTo>
+                  <a:pt x="1832741" y="681512"/>
+                </a:lnTo>
+                <a:close/>
+                <a:lnTo>
+                  <a:pt x="1836024" y="677765"/>
+                </a:lnTo>
+                <a:close/>
+                <a:lnTo>
+                  <a:pt x="1839285" y="673870"/>
+                </a:lnTo>
+                <a:close/>
+                <a:lnTo>
+                  <a:pt x="1842525" y="669815"/>
+                </a:lnTo>
+                <a:close/>
+                <a:lnTo>
+                  <a:pt x="1845747" y="665587"/>
+                </a:lnTo>
+                <a:close/>
+                <a:lnTo>
+                  <a:pt x="1848955" y="661171"/>
+                </a:lnTo>
+                <a:close/>
+                <a:lnTo>
+                  <a:pt x="1852149" y="656556"/>
+                </a:lnTo>
+                <a:close/>
+                <a:lnTo>
+                  <a:pt x="1855334" y="651727"/>
+                </a:lnTo>
+                <a:close/>
+                <a:lnTo>
+                  <a:pt x="1858511" y="646671"/>
+                </a:lnTo>
+                <a:close/>
+                <a:lnTo>
+                  <a:pt x="1861682" y="641376"/>
+                </a:lnTo>
+                <a:close/>
+                <a:lnTo>
+                  <a:pt x="1864852" y="635828"/>
+                </a:lnTo>
+                <a:close/>
+                <a:lnTo>
+                  <a:pt x="1868021" y="630013"/>
+                </a:lnTo>
+                <a:close/>
+                <a:lnTo>
+                  <a:pt x="1871192" y="623919"/>
+                </a:lnTo>
+                <a:close/>
+                <a:lnTo>
+                  <a:pt x="1874369" y="617532"/>
+                </a:lnTo>
+                <a:close/>
+                <a:lnTo>
+                  <a:pt x="1877552" y="610844"/>
+                </a:lnTo>
+                <a:close/>
+                <a:lnTo>
+                  <a:pt x="1880742" y="603869"/>
+                </a:lnTo>
+                <a:close/>
+                <a:lnTo>
+                  <a:pt x="1883939" y="596628"/>
+                </a:lnTo>
+                <a:close/>
+                <a:lnTo>
+                  <a:pt x="1887141" y="589143"/>
+                </a:lnTo>
+                <a:close/>
+                <a:lnTo>
+                  <a:pt x="1890348" y="581434"/>
+                </a:lnTo>
+                <a:close/>
+                <a:lnTo>
+                  <a:pt x="1893559" y="573522"/>
+                </a:lnTo>
+                <a:close/>
+                <a:lnTo>
+                  <a:pt x="1896774" y="565427"/>
+                </a:lnTo>
+                <a:close/>
+                <a:lnTo>
+                  <a:pt x="1899991" y="557172"/>
+                </a:lnTo>
+                <a:close/>
+                <a:lnTo>
+                  <a:pt x="1903211" y="548777"/>
+                </a:lnTo>
+                <a:close/>
+                <a:lnTo>
+                  <a:pt x="1906433" y="540263"/>
+                </a:lnTo>
+                <a:close/>
+                <a:lnTo>
+                  <a:pt x="1909655" y="531650"/>
+                </a:lnTo>
+                <a:close/>
+                <a:lnTo>
+                  <a:pt x="1912877" y="522960"/>
+                </a:lnTo>
+                <a:close/>
+                <a:lnTo>
+                  <a:pt x="1916099" y="514214"/>
+                </a:lnTo>
+                <a:close/>
+                <a:lnTo>
+                  <a:pt x="1919320" y="505433"/>
+                </a:lnTo>
+                <a:close/>
+                <a:lnTo>
+                  <a:pt x="1922539" y="496634"/>
+                </a:lnTo>
+                <a:close/>
+                <a:lnTo>
+                  <a:pt x="1925756" y="487810"/>
+                </a:lnTo>
+                <a:close/>
+                <a:lnTo>
+                  <a:pt x="1928972" y="478939"/>
+                </a:lnTo>
+                <a:close/>
+                <a:lnTo>
+                  <a:pt x="1932186" y="469996"/>
+                </a:lnTo>
+                <a:close/>
+                <a:lnTo>
+                  <a:pt x="1935398" y="460960"/>
+                </a:lnTo>
+                <a:close/>
+                <a:lnTo>
+                  <a:pt x="1938610" y="451806"/>
+                </a:lnTo>
+                <a:close/>
+                <a:lnTo>
+                  <a:pt x="1941820" y="442513"/>
+                </a:lnTo>
+                <a:close/>
+                <a:lnTo>
+                  <a:pt x="1945029" y="433057"/>
+                </a:lnTo>
+                <a:close/>
+                <a:lnTo>
+                  <a:pt x="1948238" y="423414"/>
+                </a:lnTo>
+                <a:close/>
+                <a:lnTo>
+                  <a:pt x="1951447" y="413563"/>
+                </a:lnTo>
+                <a:close/>
+                <a:lnTo>
+                  <a:pt x="1954655" y="403480"/>
+                </a:lnTo>
+                <a:close/>
+                <a:lnTo>
+                  <a:pt x="1957863" y="393141"/>
+                </a:lnTo>
+                <a:close/>
+                <a:lnTo>
+                  <a:pt x="1961071" y="382524"/>
+                </a:lnTo>
+                <a:close/>
+                <a:lnTo>
+                  <a:pt x="1964279" y="371607"/>
+                </a:lnTo>
+                <a:close/>
+                <a:lnTo>
+                  <a:pt x="1967488" y="360366"/>
+                </a:lnTo>
+                <a:close/>
+                <a:lnTo>
+                  <a:pt x="1970697" y="348801"/>
+                </a:lnTo>
+                <a:close/>
+                <a:lnTo>
+                  <a:pt x="1973907" y="336935"/>
+                </a:lnTo>
+                <a:close/>
+                <a:lnTo>
+                  <a:pt x="1977117" y="324791"/>
+                </a:lnTo>
+                <a:close/>
+                <a:lnTo>
+                  <a:pt x="1980327" y="312393"/>
+                </a:lnTo>
+                <a:close/>
+                <a:lnTo>
+                  <a:pt x="1983538" y="299764"/>
+                </a:lnTo>
+                <a:close/>
+                <a:lnTo>
+                  <a:pt x="1986749" y="286929"/>
+                </a:lnTo>
+                <a:close/>
+                <a:lnTo>
+                  <a:pt x="1989961" y="273910"/>
+                </a:lnTo>
+                <a:close/>
+                <a:lnTo>
+                  <a:pt x="1993172" y="260732"/>
+                </a:lnTo>
+                <a:close/>
+                <a:lnTo>
+                  <a:pt x="1996384" y="247418"/>
+                </a:lnTo>
+                <a:close/>
+                <a:lnTo>
+                  <a:pt x="1999596" y="233991"/>
+                </a:lnTo>
+                <a:close/>
+                <a:lnTo>
+                  <a:pt x="2002808" y="220476"/>
+                </a:lnTo>
+                <a:close/>
+                <a:lnTo>
+                  <a:pt x="2006020" y="206895"/>
+                </a:lnTo>
+                <a:close/>
+                <a:lnTo>
+                  <a:pt x="2009233" y="193272"/>
+                </a:lnTo>
+                <a:close/>
+                <a:lnTo>
+                  <a:pt x="2012445" y="179632"/>
+                </a:lnTo>
+                <a:close/>
+                <a:lnTo>
+                  <a:pt x="2015657" y="165997"/>
+                </a:lnTo>
+                <a:close/>
+                <a:lnTo>
+                  <a:pt x="2018869" y="152392"/>
+                </a:lnTo>
+                <a:close/>
+                <a:lnTo>
+                  <a:pt x="2022082" y="138839"/>
+                </a:lnTo>
+                <a:close/>
+                <a:lnTo>
+                  <a:pt x="2025294" y="125363"/>
+                </a:lnTo>
+                <a:close/>
+                <a:lnTo>
+                  <a:pt x="2028505" y="111987"/>
+                </a:lnTo>
+                <a:close/>
+                <a:lnTo>
+                  <a:pt x="2031717" y="98734"/>
+                </a:lnTo>
+                <a:close/>
+                <a:lnTo>
+                  <a:pt x="2034929" y="85629"/>
+                </a:lnTo>
+                <a:close/>
+                <a:lnTo>
+                  <a:pt x="2038140" y="72695"/>
+                </a:lnTo>
+                <a:close/>
+                <a:lnTo>
+                  <a:pt x="2041351" y="59955"/>
+                </a:lnTo>
+                <a:close/>
+                <a:lnTo>
+                  <a:pt x="2044561" y="47433"/>
+                </a:lnTo>
+                <a:close/>
+                <a:lnTo>
+                  <a:pt x="2047772" y="35153"/>
+                </a:lnTo>
+                <a:close/>
+                <a:lnTo>
+                  <a:pt x="2050982" y="23139"/>
+                </a:lnTo>
+                <a:close/>
+                <a:lnTo>
+                  <a:pt x="2054191" y="11413"/>
+                </a:lnTo>
+                <a:close/>
+                <a:lnTo>
+                  <a:pt x="2057400" y="0"/>
                 </a:lnTo>
                 <a:close/>
               </a:path>
@@ -4389,7 +4389,7 @@
           </a:custGeom>
           <a:ln w="31750">
             <a:solidFill>
-              <a:srgbClr val="FFFFFF"/>
+              <a:srgbClr val="000000"/>
             </a:solidFill>
           </a:ln>
         </p:spPr>
@@ -4415,1265 +4415,16 @@
           </a:p>
         </p:txBody>
       </p:sp>
-      <p:sp>
-        <p:nvSpPr>
-          <p:cNvPr id="5" name="Freeform 4"/>
-          <p:cNvSpPr/>
-          <p:nvPr/>
-        </p:nvSpPr>
-        <p:spPr>
-          <a:xfrm>
-            <a:off x="5038161" y="916549"/>
-            <a:ext cx="291374" cy="611825"/>
-          </a:xfrm>
-          <a:custGeom>
-            <a:avLst/>
-            <a:gdLst/>
-            <a:ahLst/>
-            <a:cxnLst/>
-            <a:rect l="l" t="t" r="r" b="b"/>
-            <a:pathLst>
-              <a:path w="291374" h="611825">
-                <a:moveTo>
-                  <a:pt x="0" y="611825"/>
-                </a:moveTo>
-                <a:lnTo>
-                  <a:pt x="974" y="609763"/>
-                </a:lnTo>
-                <a:close/>
-                <a:lnTo>
-                  <a:pt x="1948" y="607725"/>
-                </a:lnTo>
-                <a:close/>
-                <a:lnTo>
-                  <a:pt x="2922" y="605698"/>
-                </a:lnTo>
-                <a:close/>
-                <a:lnTo>
-                  <a:pt x="3896" y="603672"/>
-                </a:lnTo>
-                <a:close/>
-                <a:lnTo>
-                  <a:pt x="4870" y="601636"/>
-                </a:lnTo>
-                <a:close/>
-                <a:lnTo>
-                  <a:pt x="5844" y="599589"/>
-                </a:lnTo>
-                <a:close/>
-                <a:lnTo>
-                  <a:pt x="6818" y="597538"/>
-                </a:lnTo>
-                <a:close/>
-                <a:lnTo>
-                  <a:pt x="7792" y="595490"/>
-                </a:lnTo>
-                <a:close/>
-                <a:lnTo>
-                  <a:pt x="8766" y="593443"/>
-                </a:lnTo>
-                <a:close/>
-                <a:lnTo>
-                  <a:pt x="9740" y="591396"/>
-                </a:lnTo>
-                <a:close/>
-                <a:lnTo>
-                  <a:pt x="10715" y="589349"/>
-                </a:lnTo>
-                <a:close/>
-                <a:lnTo>
-                  <a:pt x="11689" y="587301"/>
-                </a:lnTo>
-                <a:close/>
-                <a:lnTo>
-                  <a:pt x="12663" y="585254"/>
-                </a:lnTo>
-                <a:close/>
-                <a:lnTo>
-                  <a:pt x="13637" y="583206"/>
-                </a:lnTo>
-                <a:close/>
-                <a:lnTo>
-                  <a:pt x="14611" y="581159"/>
-                </a:lnTo>
-                <a:close/>
-                <a:lnTo>
-                  <a:pt x="15585" y="579111"/>
-                </a:lnTo>
-                <a:close/>
-                <a:lnTo>
-                  <a:pt x="16559" y="577064"/>
-                </a:lnTo>
-                <a:close/>
-                <a:lnTo>
-                  <a:pt x="17533" y="575016"/>
-                </a:lnTo>
-                <a:close/>
-                <a:lnTo>
-                  <a:pt x="18507" y="572969"/>
-                </a:lnTo>
-                <a:close/>
-                <a:lnTo>
-                  <a:pt x="19481" y="570921"/>
-                </a:lnTo>
-                <a:close/>
-                <a:lnTo>
-                  <a:pt x="20455" y="568874"/>
-                </a:lnTo>
-                <a:close/>
-                <a:lnTo>
-                  <a:pt x="21429" y="566826"/>
-                </a:lnTo>
-                <a:close/>
-                <a:lnTo>
-                  <a:pt x="22403" y="564779"/>
-                </a:lnTo>
-                <a:close/>
-                <a:lnTo>
-                  <a:pt x="23377" y="562732"/>
-                </a:lnTo>
-                <a:close/>
-                <a:lnTo>
-                  <a:pt x="24351" y="560684"/>
-                </a:lnTo>
-                <a:close/>
-                <a:lnTo>
-                  <a:pt x="25325" y="558637"/>
-                </a:lnTo>
-                <a:close/>
-                <a:lnTo>
-                  <a:pt x="26299" y="556589"/>
-                </a:lnTo>
-                <a:close/>
-                <a:lnTo>
-                  <a:pt x="27273" y="554542"/>
-                </a:lnTo>
-                <a:close/>
-                <a:lnTo>
-                  <a:pt x="28247" y="552494"/>
-                </a:lnTo>
-                <a:close/>
-                <a:lnTo>
-                  <a:pt x="29221" y="550447"/>
-                </a:lnTo>
-                <a:close/>
-                <a:lnTo>
-                  <a:pt x="30195" y="548399"/>
-                </a:lnTo>
-                <a:close/>
-                <a:lnTo>
-                  <a:pt x="31169" y="546352"/>
-                </a:lnTo>
-                <a:close/>
-                <a:lnTo>
-                  <a:pt x="32143" y="544304"/>
-                </a:lnTo>
-                <a:close/>
-                <a:lnTo>
-                  <a:pt x="33117" y="542257"/>
-                </a:lnTo>
-                <a:close/>
-                <a:lnTo>
-                  <a:pt x="34091" y="540209"/>
-                </a:lnTo>
-                <a:close/>
-                <a:lnTo>
-                  <a:pt x="35065" y="538162"/>
-                </a:lnTo>
-                <a:close/>
-                <a:lnTo>
-                  <a:pt x="36039" y="536115"/>
-                </a:lnTo>
-                <a:close/>
-                <a:lnTo>
-                  <a:pt x="37013" y="534068"/>
-                </a:lnTo>
-                <a:close/>
-                <a:lnTo>
-                  <a:pt x="37987" y="532020"/>
-                </a:lnTo>
-                <a:close/>
-                <a:lnTo>
-                  <a:pt x="38962" y="529968"/>
-                </a:lnTo>
-                <a:close/>
-                <a:lnTo>
-                  <a:pt x="39936" y="527921"/>
-                </a:lnTo>
-                <a:close/>
-                <a:lnTo>
-                  <a:pt x="40909" y="525888"/>
-                </a:lnTo>
-                <a:close/>
-                <a:lnTo>
-                  <a:pt x="41883" y="523863"/>
-                </a:lnTo>
-                <a:close/>
-                <a:lnTo>
-                  <a:pt x="42858" y="521831"/>
-                </a:lnTo>
-                <a:close/>
-                <a:lnTo>
-                  <a:pt x="43833" y="519785"/>
-                </a:lnTo>
-                <a:close/>
-                <a:lnTo>
-                  <a:pt x="44806" y="517733"/>
-                </a:lnTo>
-                <a:close/>
-                <a:lnTo>
-                  <a:pt x="45776" y="515684"/>
-                </a:lnTo>
-                <a:close/>
-                <a:lnTo>
-                  <a:pt x="46751" y="513638"/>
-                </a:lnTo>
-                <a:close/>
-                <a:lnTo>
-                  <a:pt x="47740" y="511591"/>
-                </a:lnTo>
-                <a:close/>
-                <a:lnTo>
-                  <a:pt x="48737" y="509543"/>
-                </a:lnTo>
-                <a:close/>
-                <a:lnTo>
-                  <a:pt x="49725" y="507496"/>
-                </a:lnTo>
-                <a:close/>
-                <a:lnTo>
-                  <a:pt x="50699" y="505448"/>
-                </a:lnTo>
-                <a:close/>
-                <a:lnTo>
-                  <a:pt x="51669" y="503401"/>
-                </a:lnTo>
-                <a:close/>
-                <a:lnTo>
-                  <a:pt x="52642" y="501353"/>
-                </a:lnTo>
-                <a:close/>
-                <a:lnTo>
-                  <a:pt x="53618" y="499306"/>
-                </a:lnTo>
-                <a:close/>
-                <a:lnTo>
-                  <a:pt x="54592" y="497259"/>
-                </a:lnTo>
-                <a:close/>
-                <a:lnTo>
-                  <a:pt x="55566" y="495211"/>
-                </a:lnTo>
-                <a:close/>
-                <a:lnTo>
-                  <a:pt x="56540" y="493164"/>
-                </a:lnTo>
-                <a:close/>
-                <a:lnTo>
-                  <a:pt x="57514" y="491116"/>
-                </a:lnTo>
-                <a:close/>
-                <a:lnTo>
-                  <a:pt x="58488" y="489069"/>
-                </a:lnTo>
-                <a:close/>
-                <a:lnTo>
-                  <a:pt x="59462" y="487021"/>
-                </a:lnTo>
-                <a:close/>
-                <a:lnTo>
-                  <a:pt x="60436" y="484974"/>
-                </a:lnTo>
-                <a:close/>
-                <a:lnTo>
-                  <a:pt x="61410" y="482926"/>
-                </a:lnTo>
-                <a:close/>
-                <a:lnTo>
-                  <a:pt x="62384" y="480879"/>
-                </a:lnTo>
-                <a:close/>
-                <a:lnTo>
-                  <a:pt x="63358" y="478831"/>
-                </a:lnTo>
-                <a:close/>
-                <a:lnTo>
-                  <a:pt x="64332" y="476784"/>
-                </a:lnTo>
-                <a:close/>
-                <a:lnTo>
-                  <a:pt x="65306" y="474736"/>
-                </a:lnTo>
-                <a:close/>
-                <a:lnTo>
-                  <a:pt x="66280" y="472689"/>
-                </a:lnTo>
-                <a:close/>
-                <a:lnTo>
-                  <a:pt x="67254" y="470642"/>
-                </a:lnTo>
-                <a:close/>
-                <a:lnTo>
-                  <a:pt x="68228" y="468594"/>
-                </a:lnTo>
-                <a:close/>
-                <a:lnTo>
-                  <a:pt x="69202" y="466547"/>
-                </a:lnTo>
-                <a:close/>
-                <a:lnTo>
-                  <a:pt x="70176" y="464499"/>
-                </a:lnTo>
-                <a:close/>
-                <a:lnTo>
-                  <a:pt x="71150" y="462452"/>
-                </a:lnTo>
-                <a:close/>
-                <a:lnTo>
-                  <a:pt x="72124" y="460404"/>
-                </a:lnTo>
-                <a:close/>
-                <a:lnTo>
-                  <a:pt x="73098" y="458356"/>
-                </a:lnTo>
-                <a:close/>
-                <a:lnTo>
-                  <a:pt x="74072" y="456309"/>
-                </a:lnTo>
-                <a:close/>
-                <a:lnTo>
-                  <a:pt x="75047" y="454263"/>
-                </a:lnTo>
-                <a:close/>
-                <a:lnTo>
-                  <a:pt x="76021" y="452215"/>
-                </a:lnTo>
-                <a:close/>
-                <a:lnTo>
-                  <a:pt x="76995" y="450163"/>
-                </a:lnTo>
-                <a:close/>
-                <a:lnTo>
-                  <a:pt x="77969" y="448115"/>
-                </a:lnTo>
-                <a:close/>
-                <a:lnTo>
-                  <a:pt x="78943" y="446080"/>
-                </a:lnTo>
-                <a:close/>
-                <a:lnTo>
-                  <a:pt x="79917" y="444056"/>
-                </a:lnTo>
-                <a:close/>
-                <a:lnTo>
-                  <a:pt x="80891" y="442025"/>
-                </a:lnTo>
-                <a:close/>
-                <a:lnTo>
-                  <a:pt x="81865" y="439980"/>
-                </a:lnTo>
-                <a:close/>
-                <a:lnTo>
-                  <a:pt x="82839" y="437928"/>
-                </a:lnTo>
-                <a:close/>
-                <a:lnTo>
-                  <a:pt x="83813" y="435879"/>
-                </a:lnTo>
-                <a:close/>
-                <a:lnTo>
-                  <a:pt x="84787" y="433833"/>
-                </a:lnTo>
-                <a:close/>
-                <a:lnTo>
-                  <a:pt x="85761" y="431786"/>
-                </a:lnTo>
-                <a:close/>
-                <a:lnTo>
-                  <a:pt x="86735" y="429738"/>
-                </a:lnTo>
-                <a:close/>
-                <a:lnTo>
-                  <a:pt x="87709" y="427691"/>
-                </a:lnTo>
-                <a:close/>
-                <a:lnTo>
-                  <a:pt x="88683" y="425643"/>
-                </a:lnTo>
-                <a:close/>
-                <a:lnTo>
-                  <a:pt x="89657" y="423596"/>
-                </a:lnTo>
-                <a:close/>
-                <a:lnTo>
-                  <a:pt x="90631" y="421548"/>
-                </a:lnTo>
-                <a:close/>
-                <a:lnTo>
-                  <a:pt x="91605" y="419501"/>
-                </a:lnTo>
-                <a:close/>
-                <a:lnTo>
-                  <a:pt x="92579" y="417453"/>
-                </a:lnTo>
-                <a:close/>
-                <a:lnTo>
-                  <a:pt x="93553" y="415406"/>
-                </a:lnTo>
-                <a:close/>
-                <a:lnTo>
-                  <a:pt x="94527" y="413358"/>
-                </a:lnTo>
-                <a:close/>
-                <a:lnTo>
-                  <a:pt x="95501" y="411311"/>
-                </a:lnTo>
-                <a:close/>
-                <a:lnTo>
-                  <a:pt x="96475" y="409263"/>
-                </a:lnTo>
-                <a:close/>
-                <a:lnTo>
-                  <a:pt x="97449" y="407216"/>
-                </a:lnTo>
-                <a:close/>
-                <a:lnTo>
-                  <a:pt x="98423" y="405168"/>
-                </a:lnTo>
-                <a:close/>
-                <a:lnTo>
-                  <a:pt x="99397" y="403121"/>
-                </a:lnTo>
-                <a:close/>
-                <a:lnTo>
-                  <a:pt x="100371" y="401074"/>
-                </a:lnTo>
-                <a:close/>
-                <a:lnTo>
-                  <a:pt x="101345" y="399026"/>
-                </a:lnTo>
-                <a:close/>
-                <a:lnTo>
-                  <a:pt x="102319" y="396979"/>
-                </a:lnTo>
-                <a:close/>
-                <a:lnTo>
-                  <a:pt x="103294" y="394931"/>
-                </a:lnTo>
-                <a:close/>
-                <a:lnTo>
-                  <a:pt x="104268" y="392884"/>
-                </a:lnTo>
-                <a:close/>
-                <a:lnTo>
-                  <a:pt x="105242" y="390836"/>
-                </a:lnTo>
-                <a:close/>
-                <a:lnTo>
-                  <a:pt x="106216" y="388789"/>
-                </a:lnTo>
-                <a:close/>
-                <a:lnTo>
-                  <a:pt x="107190" y="386741"/>
-                </a:lnTo>
-                <a:close/>
-                <a:lnTo>
-                  <a:pt x="108164" y="384694"/>
-                </a:lnTo>
-                <a:close/>
-                <a:lnTo>
-                  <a:pt x="109138" y="382647"/>
-                </a:lnTo>
-                <a:close/>
-                <a:lnTo>
-                  <a:pt x="110112" y="380599"/>
-                </a:lnTo>
-                <a:close/>
-                <a:lnTo>
-                  <a:pt x="111086" y="378551"/>
-                </a:lnTo>
-                <a:close/>
-                <a:lnTo>
-                  <a:pt x="112060" y="376504"/>
-                </a:lnTo>
-                <a:close/>
-                <a:lnTo>
-                  <a:pt x="113034" y="374458"/>
-                </a:lnTo>
-                <a:close/>
-                <a:lnTo>
-                  <a:pt x="114008" y="372410"/>
-                </a:lnTo>
-                <a:close/>
-                <a:lnTo>
-                  <a:pt x="114982" y="370359"/>
-                </a:lnTo>
-                <a:close/>
-                <a:lnTo>
-                  <a:pt x="115956" y="368310"/>
-                </a:lnTo>
-                <a:close/>
-                <a:lnTo>
-                  <a:pt x="116930" y="366273"/>
-                </a:lnTo>
-                <a:close/>
-                <a:lnTo>
-                  <a:pt x="117904" y="364248"/>
-                </a:lnTo>
-                <a:close/>
-                <a:lnTo>
-                  <a:pt x="118878" y="362219"/>
-                </a:lnTo>
-                <a:close/>
-                <a:lnTo>
-                  <a:pt x="119852" y="360175"/>
-                </a:lnTo>
-                <a:close/>
-                <a:lnTo>
-                  <a:pt x="120826" y="358123"/>
-                </a:lnTo>
-                <a:close/>
-                <a:lnTo>
-                  <a:pt x="121800" y="356074"/>
-                </a:lnTo>
-                <a:close/>
-                <a:lnTo>
-                  <a:pt x="122774" y="354027"/>
-                </a:lnTo>
-                <a:close/>
-                <a:lnTo>
-                  <a:pt x="123748" y="351981"/>
-                </a:lnTo>
-                <a:close/>
-                <a:lnTo>
-                  <a:pt x="124722" y="349933"/>
-                </a:lnTo>
-                <a:close/>
-                <a:lnTo>
-                  <a:pt x="125696" y="347885"/>
-                </a:lnTo>
-                <a:close/>
-                <a:lnTo>
-                  <a:pt x="126670" y="345838"/>
-                </a:lnTo>
-                <a:close/>
-                <a:lnTo>
-                  <a:pt x="127644" y="343790"/>
-                </a:lnTo>
-                <a:close/>
-                <a:lnTo>
-                  <a:pt x="128618" y="341743"/>
-                </a:lnTo>
-                <a:close/>
-                <a:lnTo>
-                  <a:pt x="129592" y="339695"/>
-                </a:lnTo>
-                <a:close/>
-                <a:lnTo>
-                  <a:pt x="130567" y="337648"/>
-                </a:lnTo>
-                <a:close/>
-                <a:lnTo>
-                  <a:pt x="131541" y="335601"/>
-                </a:lnTo>
-                <a:close/>
-                <a:lnTo>
-                  <a:pt x="132515" y="333553"/>
-                </a:lnTo>
-                <a:close/>
-                <a:lnTo>
-                  <a:pt x="133489" y="331506"/>
-                </a:lnTo>
-                <a:close/>
-                <a:lnTo>
-                  <a:pt x="134463" y="329458"/>
-                </a:lnTo>
-                <a:close/>
-                <a:lnTo>
-                  <a:pt x="135437" y="327411"/>
-                </a:lnTo>
-                <a:close/>
-                <a:lnTo>
-                  <a:pt x="136411" y="325363"/>
-                </a:lnTo>
-                <a:close/>
-                <a:lnTo>
-                  <a:pt x="137385" y="323316"/>
-                </a:lnTo>
-                <a:close/>
-                <a:lnTo>
-                  <a:pt x="138359" y="321268"/>
-                </a:lnTo>
-                <a:close/>
-                <a:lnTo>
-                  <a:pt x="139333" y="319221"/>
-                </a:lnTo>
-                <a:close/>
-                <a:lnTo>
-                  <a:pt x="140307" y="317173"/>
-                </a:lnTo>
-                <a:close/>
-                <a:lnTo>
-                  <a:pt x="141281" y="315126"/>
-                </a:lnTo>
-                <a:close/>
-                <a:lnTo>
-                  <a:pt x="142255" y="313078"/>
-                </a:lnTo>
-                <a:close/>
-                <a:lnTo>
-                  <a:pt x="143229" y="311031"/>
-                </a:lnTo>
-                <a:close/>
-                <a:lnTo>
-                  <a:pt x="144203" y="308984"/>
-                </a:lnTo>
-                <a:close/>
-                <a:lnTo>
-                  <a:pt x="145177" y="306936"/>
-                </a:lnTo>
-                <a:close/>
-                <a:lnTo>
-                  <a:pt x="146151" y="304889"/>
-                </a:lnTo>
-                <a:close/>
-                <a:lnTo>
-                  <a:pt x="147125" y="302841"/>
-                </a:lnTo>
-                <a:close/>
-                <a:lnTo>
-                  <a:pt x="148099" y="300794"/>
-                </a:lnTo>
-                <a:close/>
-                <a:lnTo>
-                  <a:pt x="149073" y="298746"/>
-                </a:lnTo>
-                <a:close/>
-                <a:lnTo>
-                  <a:pt x="150047" y="296699"/>
-                </a:lnTo>
-                <a:close/>
-                <a:lnTo>
-                  <a:pt x="151021" y="294652"/>
-                </a:lnTo>
-                <a:close/>
-                <a:lnTo>
-                  <a:pt x="151995" y="292605"/>
-                </a:lnTo>
-                <a:close/>
-                <a:lnTo>
-                  <a:pt x="152969" y="290554"/>
-                </a:lnTo>
-                <a:close/>
-                <a:lnTo>
-                  <a:pt x="153943" y="288504"/>
-                </a:lnTo>
-                <a:close/>
-                <a:lnTo>
-                  <a:pt x="154917" y="286466"/>
-                </a:lnTo>
-                <a:close/>
-                <a:lnTo>
-                  <a:pt x="155891" y="284440"/>
-                </a:lnTo>
-                <a:close/>
-                <a:lnTo>
-                  <a:pt x="156865" y="282412"/>
-                </a:lnTo>
-                <a:close/>
-                <a:lnTo>
-                  <a:pt x="157841" y="280370"/>
-                </a:lnTo>
-                <a:close/>
-                <a:lnTo>
-                  <a:pt x="158814" y="278319"/>
-                </a:lnTo>
-                <a:close/>
-                <a:lnTo>
-                  <a:pt x="159785" y="276269"/>
-                </a:lnTo>
-                <a:close/>
-                <a:lnTo>
-                  <a:pt x="160757" y="274222"/>
-                </a:lnTo>
-                <a:close/>
-                <a:lnTo>
-                  <a:pt x="161742" y="272175"/>
-                </a:lnTo>
-                <a:close/>
-                <a:lnTo>
-                  <a:pt x="162738" y="270128"/>
-                </a:lnTo>
-                <a:close/>
-                <a:lnTo>
-                  <a:pt x="163731" y="268080"/>
-                </a:lnTo>
-                <a:close/>
-                <a:lnTo>
-                  <a:pt x="164708" y="266033"/>
-                </a:lnTo>
-                <a:close/>
-                <a:lnTo>
-                  <a:pt x="165678" y="263985"/>
-                </a:lnTo>
-                <a:close/>
-                <a:lnTo>
-                  <a:pt x="166650" y="261938"/>
-                </a:lnTo>
-                <a:close/>
-                <a:lnTo>
-                  <a:pt x="167625" y="259890"/>
-                </a:lnTo>
-                <a:close/>
-                <a:lnTo>
-                  <a:pt x="168600" y="257843"/>
-                </a:lnTo>
-                <a:close/>
-                <a:lnTo>
-                  <a:pt x="169574" y="255795"/>
-                </a:lnTo>
-                <a:close/>
-                <a:lnTo>
-                  <a:pt x="170548" y="253748"/>
-                </a:lnTo>
-                <a:close/>
-                <a:lnTo>
-                  <a:pt x="171522" y="251700"/>
-                </a:lnTo>
-                <a:close/>
-                <a:lnTo>
-                  <a:pt x="172496" y="249653"/>
-                </a:lnTo>
-                <a:close/>
-                <a:lnTo>
-                  <a:pt x="173470" y="247605"/>
-                </a:lnTo>
-                <a:close/>
-                <a:lnTo>
-                  <a:pt x="174444" y="245558"/>
-                </a:lnTo>
-                <a:close/>
-                <a:lnTo>
-                  <a:pt x="175418" y="243511"/>
-                </a:lnTo>
-                <a:close/>
-                <a:lnTo>
-                  <a:pt x="176392" y="241463"/>
-                </a:lnTo>
-                <a:close/>
-                <a:lnTo>
-                  <a:pt x="177366" y="239416"/>
-                </a:lnTo>
-                <a:close/>
-                <a:lnTo>
-                  <a:pt x="178340" y="237368"/>
-                </a:lnTo>
-                <a:close/>
-                <a:lnTo>
-                  <a:pt x="179314" y="235321"/>
-                </a:lnTo>
-                <a:close/>
-                <a:lnTo>
-                  <a:pt x="180288" y="233273"/>
-                </a:lnTo>
-                <a:close/>
-                <a:lnTo>
-                  <a:pt x="181262" y="231226"/>
-                </a:lnTo>
-                <a:close/>
-                <a:lnTo>
-                  <a:pt x="182236" y="229178"/>
-                </a:lnTo>
-                <a:close/>
-                <a:lnTo>
-                  <a:pt x="183210" y="227131"/>
-                </a:lnTo>
-                <a:close/>
-                <a:lnTo>
-                  <a:pt x="184184" y="225083"/>
-                </a:lnTo>
-                <a:close/>
-                <a:lnTo>
-                  <a:pt x="185158" y="223036"/>
-                </a:lnTo>
-                <a:close/>
-                <a:lnTo>
-                  <a:pt x="186132" y="220988"/>
-                </a:lnTo>
-                <a:close/>
-                <a:lnTo>
-                  <a:pt x="187106" y="218941"/>
-                </a:lnTo>
-                <a:close/>
-                <a:lnTo>
-                  <a:pt x="188080" y="216893"/>
-                </a:lnTo>
-                <a:close/>
-                <a:lnTo>
-                  <a:pt x="189054" y="214847"/>
-                </a:lnTo>
-                <a:close/>
-                <a:lnTo>
-                  <a:pt x="190028" y="212800"/>
-                </a:lnTo>
-                <a:close/>
-                <a:lnTo>
-                  <a:pt x="191002" y="210749"/>
-                </a:lnTo>
-                <a:close/>
-                <a:lnTo>
-                  <a:pt x="191976" y="208699"/>
-                </a:lnTo>
-                <a:close/>
-                <a:lnTo>
-                  <a:pt x="192950" y="206659"/>
-                </a:lnTo>
-                <a:close/>
-                <a:lnTo>
-                  <a:pt x="193924" y="204633"/>
-                </a:lnTo>
-                <a:close/>
-                <a:lnTo>
-                  <a:pt x="194899" y="202606"/>
-                </a:lnTo>
-                <a:close/>
-                <a:lnTo>
-                  <a:pt x="195873" y="200564"/>
-                </a:lnTo>
-                <a:close/>
-                <a:lnTo>
-                  <a:pt x="196847" y="198514"/>
-                </a:lnTo>
-                <a:close/>
-                <a:lnTo>
-                  <a:pt x="197821" y="196463"/>
-                </a:lnTo>
-                <a:close/>
-                <a:lnTo>
-                  <a:pt x="198795" y="194416"/>
-                </a:lnTo>
-                <a:close/>
-                <a:lnTo>
-                  <a:pt x="199769" y="192370"/>
-                </a:lnTo>
-                <a:close/>
-                <a:lnTo>
-                  <a:pt x="200743" y="190323"/>
-                </a:lnTo>
-                <a:close/>
-                <a:lnTo>
-                  <a:pt x="201717" y="188275"/>
-                </a:lnTo>
-                <a:close/>
-                <a:lnTo>
-                  <a:pt x="202691" y="186227"/>
-                </a:lnTo>
-                <a:close/>
-                <a:lnTo>
-                  <a:pt x="203665" y="184180"/>
-                </a:lnTo>
-                <a:close/>
-                <a:lnTo>
-                  <a:pt x="204639" y="182132"/>
-                </a:lnTo>
-                <a:close/>
-                <a:lnTo>
-                  <a:pt x="205613" y="180085"/>
-                </a:lnTo>
-                <a:close/>
-                <a:lnTo>
-                  <a:pt x="206587" y="178037"/>
-                </a:lnTo>
-                <a:close/>
-                <a:lnTo>
-                  <a:pt x="207561" y="175990"/>
-                </a:lnTo>
-                <a:close/>
-                <a:lnTo>
-                  <a:pt x="208535" y="173943"/>
-                </a:lnTo>
-                <a:close/>
-                <a:lnTo>
-                  <a:pt x="209509" y="171895"/>
-                </a:lnTo>
-                <a:close/>
-                <a:lnTo>
-                  <a:pt x="210483" y="169848"/>
-                </a:lnTo>
-                <a:close/>
-                <a:lnTo>
-                  <a:pt x="211457" y="167800"/>
-                </a:lnTo>
-                <a:close/>
-                <a:lnTo>
-                  <a:pt x="212431" y="165753"/>
-                </a:lnTo>
-                <a:close/>
-                <a:lnTo>
-                  <a:pt x="213405" y="163705"/>
-                </a:lnTo>
-                <a:close/>
-                <a:lnTo>
-                  <a:pt x="214379" y="161658"/>
-                </a:lnTo>
-                <a:close/>
-                <a:lnTo>
-                  <a:pt x="215353" y="159610"/>
-                </a:lnTo>
-                <a:close/>
-                <a:lnTo>
-                  <a:pt x="216327" y="157563"/>
-                </a:lnTo>
-                <a:close/>
-                <a:lnTo>
-                  <a:pt x="217301" y="155515"/>
-                </a:lnTo>
-                <a:close/>
-                <a:lnTo>
-                  <a:pt x="218275" y="153468"/>
-                </a:lnTo>
-                <a:close/>
-                <a:lnTo>
-                  <a:pt x="219249" y="151421"/>
-                </a:lnTo>
-                <a:close/>
-                <a:lnTo>
-                  <a:pt x="220223" y="149373"/>
-                </a:lnTo>
-                <a:close/>
-                <a:lnTo>
-                  <a:pt x="221197" y="147326"/>
-                </a:lnTo>
-                <a:close/>
-                <a:lnTo>
-                  <a:pt x="222171" y="145278"/>
-                </a:lnTo>
-                <a:close/>
-                <a:lnTo>
-                  <a:pt x="223146" y="143231"/>
-                </a:lnTo>
-                <a:close/>
-                <a:lnTo>
-                  <a:pt x="224120" y="141183"/>
-                </a:lnTo>
-                <a:close/>
-                <a:lnTo>
-                  <a:pt x="225094" y="139135"/>
-                </a:lnTo>
-                <a:close/>
-                <a:lnTo>
-                  <a:pt x="226068" y="137088"/>
-                </a:lnTo>
-                <a:close/>
-                <a:lnTo>
-                  <a:pt x="227042" y="135042"/>
-                </a:lnTo>
-                <a:close/>
-                <a:lnTo>
-                  <a:pt x="228016" y="132995"/>
-                </a:lnTo>
-                <a:close/>
-                <a:lnTo>
-                  <a:pt x="228990" y="130944"/>
-                </a:lnTo>
-                <a:close/>
-                <a:lnTo>
-                  <a:pt x="229964" y="128894"/>
-                </a:lnTo>
-                <a:close/>
-                <a:lnTo>
-                  <a:pt x="230938" y="126852"/>
-                </a:lnTo>
-                <a:close/>
-                <a:lnTo>
-                  <a:pt x="231912" y="124825"/>
-                </a:lnTo>
-                <a:close/>
-                <a:lnTo>
-                  <a:pt x="232886" y="122799"/>
-                </a:lnTo>
-                <a:close/>
-                <a:lnTo>
-                  <a:pt x="233860" y="120759"/>
-                </a:lnTo>
-                <a:close/>
-                <a:lnTo>
-                  <a:pt x="234834" y="118709"/>
-                </a:lnTo>
-                <a:close/>
-                <a:lnTo>
-                  <a:pt x="235808" y="116658"/>
-                </a:lnTo>
-                <a:close/>
-                <a:lnTo>
-                  <a:pt x="236782" y="114611"/>
-                </a:lnTo>
-                <a:close/>
-                <a:lnTo>
-                  <a:pt x="237756" y="112565"/>
-                </a:lnTo>
-                <a:close/>
-                <a:lnTo>
-                  <a:pt x="238730" y="110517"/>
-                </a:lnTo>
-                <a:close/>
-                <a:lnTo>
-                  <a:pt x="239704" y="108470"/>
-                </a:lnTo>
-                <a:close/>
-                <a:lnTo>
-                  <a:pt x="240678" y="106422"/>
-                </a:lnTo>
-                <a:close/>
-                <a:lnTo>
-                  <a:pt x="241652" y="104375"/>
-                </a:lnTo>
-                <a:close/>
-                <a:lnTo>
-                  <a:pt x="242626" y="102327"/>
-                </a:lnTo>
-                <a:close/>
-                <a:lnTo>
-                  <a:pt x="243600" y="100280"/>
-                </a:lnTo>
-                <a:close/>
-                <a:lnTo>
-                  <a:pt x="244574" y="98232"/>
-                </a:lnTo>
-                <a:close/>
-                <a:lnTo>
-                  <a:pt x="245548" y="96185"/>
-                </a:lnTo>
-                <a:close/>
-                <a:lnTo>
-                  <a:pt x="246522" y="94137"/>
-                </a:lnTo>
-                <a:close/>
-                <a:lnTo>
-                  <a:pt x="247496" y="92090"/>
-                </a:lnTo>
-                <a:close/>
-                <a:lnTo>
-                  <a:pt x="248470" y="90042"/>
-                </a:lnTo>
-                <a:close/>
-                <a:lnTo>
-                  <a:pt x="249444" y="87995"/>
-                </a:lnTo>
-                <a:close/>
-                <a:lnTo>
-                  <a:pt x="250418" y="85947"/>
-                </a:lnTo>
-                <a:close/>
-                <a:lnTo>
-                  <a:pt x="251393" y="83900"/>
-                </a:lnTo>
-                <a:close/>
-                <a:lnTo>
-                  <a:pt x="252367" y="81853"/>
-                </a:lnTo>
-                <a:close/>
-                <a:lnTo>
-                  <a:pt x="253341" y="79805"/>
-                </a:lnTo>
-                <a:close/>
-                <a:lnTo>
-                  <a:pt x="254315" y="77758"/>
-                </a:lnTo>
-                <a:close/>
-                <a:lnTo>
-                  <a:pt x="255289" y="75710"/>
-                </a:lnTo>
-                <a:close/>
-                <a:lnTo>
-                  <a:pt x="256263" y="73663"/>
-                </a:lnTo>
-                <a:close/>
-                <a:lnTo>
-                  <a:pt x="257237" y="71615"/>
-                </a:lnTo>
-                <a:close/>
-                <a:lnTo>
-                  <a:pt x="258211" y="69568"/>
-                </a:lnTo>
-                <a:close/>
-                <a:lnTo>
-                  <a:pt x="259185" y="67520"/>
-                </a:lnTo>
-                <a:close/>
-                <a:lnTo>
-                  <a:pt x="260159" y="65473"/>
-                </a:lnTo>
-                <a:close/>
-                <a:lnTo>
-                  <a:pt x="261133" y="63425"/>
-                </a:lnTo>
-                <a:close/>
-                <a:lnTo>
-                  <a:pt x="262107" y="61378"/>
-                </a:lnTo>
-                <a:close/>
-                <a:lnTo>
-                  <a:pt x="263081" y="59330"/>
-                </a:lnTo>
-                <a:close/>
-                <a:lnTo>
-                  <a:pt x="264055" y="57283"/>
-                </a:lnTo>
-                <a:close/>
-                <a:lnTo>
-                  <a:pt x="265029" y="55236"/>
-                </a:lnTo>
-                <a:close/>
-                <a:lnTo>
-                  <a:pt x="266003" y="53189"/>
-                </a:lnTo>
-                <a:close/>
-                <a:lnTo>
-                  <a:pt x="266977" y="51139"/>
-                </a:lnTo>
-                <a:close/>
-                <a:lnTo>
-                  <a:pt x="267951" y="49088"/>
-                </a:lnTo>
-                <a:close/>
-                <a:lnTo>
-                  <a:pt x="268925" y="47046"/>
-                </a:lnTo>
-                <a:close/>
-                <a:lnTo>
-                  <a:pt x="269899" y="45018"/>
-                </a:lnTo>
-                <a:close/>
-                <a:lnTo>
-                  <a:pt x="270873" y="42992"/>
-                </a:lnTo>
-                <a:close/>
-                <a:lnTo>
-                  <a:pt x="271848" y="40954"/>
-                </a:lnTo>
-                <a:close/>
-                <a:lnTo>
-                  <a:pt x="272823" y="38904"/>
-                </a:lnTo>
-                <a:close/>
-                <a:lnTo>
-                  <a:pt x="273794" y="36853"/>
-                </a:lnTo>
-                <a:close/>
-                <a:lnTo>
-                  <a:pt x="274764" y="34806"/>
-                </a:lnTo>
-                <a:close/>
-                <a:lnTo>
-                  <a:pt x="275745" y="32759"/>
-                </a:lnTo>
-                <a:close/>
-                <a:lnTo>
-                  <a:pt x="276739" y="30712"/>
-                </a:lnTo>
-                <a:close/>
-                <a:lnTo>
-                  <a:pt x="277734" y="28664"/>
-                </a:lnTo>
-                <a:close/>
-                <a:lnTo>
-                  <a:pt x="278716" y="26617"/>
-                </a:lnTo>
-                <a:close/>
-                <a:lnTo>
-                  <a:pt x="279687" y="24569"/>
-                </a:lnTo>
-                <a:close/>
-                <a:lnTo>
-                  <a:pt x="280658" y="22522"/>
-                </a:lnTo>
-                <a:close/>
-                <a:lnTo>
-                  <a:pt x="281632" y="20474"/>
-                </a:lnTo>
-                <a:close/>
-                <a:lnTo>
-                  <a:pt x="282608" y="18427"/>
-                </a:lnTo>
-                <a:close/>
-                <a:lnTo>
-                  <a:pt x="283582" y="16380"/>
-                </a:lnTo>
-                <a:close/>
-                <a:lnTo>
-                  <a:pt x="284555" y="14332"/>
-                </a:lnTo>
-                <a:close/>
-                <a:lnTo>
-                  <a:pt x="285529" y="12285"/>
-                </a:lnTo>
-                <a:close/>
-                <a:lnTo>
-                  <a:pt x="286503" y="10237"/>
-                </a:lnTo>
-                <a:close/>
-                <a:lnTo>
-                  <a:pt x="287478" y="8190"/>
-                </a:lnTo>
-                <a:close/>
-                <a:lnTo>
-                  <a:pt x="288452" y="6142"/>
-                </a:lnTo>
-                <a:close/>
-                <a:lnTo>
-                  <a:pt x="289426" y="4095"/>
-                </a:lnTo>
-                <a:close/>
-                <a:lnTo>
-                  <a:pt x="290400" y="2047"/>
-                </a:lnTo>
-                <a:close/>
-                <a:lnTo>
-                  <a:pt x="291374" y="0"/>
-                </a:lnTo>
-                <a:close/>
-              </a:path>
-            </a:pathLst>
-          </a:custGeom>
-          <a:ln w="31750">
-            <a:solidFill>
-              <a:srgbClr val="FFFFFF"/>
-            </a:solidFill>
-          </a:ln>
-        </p:spPr>
-        <p:style>
-          <a:lnRef idx="1">
-            <a:schemeClr val="accent1"/>
-          </a:lnRef>
-          <a:fillRef idx="3">
-            <a:schemeClr val="accent1"/>
-          </a:fillRef>
-          <a:effectRef idx="2">
-            <a:schemeClr val="accent1"/>
-          </a:effectRef>
-          <a:fontRef idx="minor">
-            <a:schemeClr val="lt1"/>
-          </a:fontRef>
-        </p:style>
-        <p:txBody>
-          <a:bodyPr rtlCol="0" anchor="ctr"/>
-          <a:lstStyle/>
-          <a:p>
-            <a:pPr algn="ctr"/>
-          </a:p>
-        </p:txBody>
-      </p:sp>
       <p:cxnSp>
         <p:nvCxnSpPr>
-          <p:cNvPr id="6" name="Connector 5"/>
+          <p:cNvPr id="5" name="Connector 4"/>
           <p:cNvCxnSpPr/>
           <p:nvPr/>
         </p:nvCxnSpPr>
         <p:spPr>
           <a:xfrm flipV="1">
-            <a:off x="5029200.0" y="2114550.0"/>
-            <a:ext cx="0.0" cy="457200.0"/>
+            <a:off x="5715000.0" y="1657350.0"/>
+            <a:ext cx="0.0" cy="914400.0"/>
           </a:xfrm>
           <a:prstGeom prst="line">
             <a:avLst/>
@@ -5702,14 +4453,14 @@
       </p:cxnSp>
       <p:cxnSp>
         <p:nvCxnSpPr>
-          <p:cNvPr id="7" name="Connector 6"/>
+          <p:cNvPr id="6" name="Connector 5"/>
           <p:cNvCxnSpPr/>
           <p:nvPr/>
         </p:nvCxnSpPr>
         <p:spPr>
           <a:xfrm>
-            <a:off x="4572000.0" y="2114550.0"/>
-            <a:ext cx="457200.0" cy="0.0"/>
+            <a:off x="4572000.0" y="1657350.0"/>
+            <a:ext cx="1143000.0" cy="0.0"/>
           </a:xfrm>
           <a:prstGeom prst="line">
             <a:avLst/>
@@ -5738,14 +4489,14 @@
       </p:cxnSp>
       <p:sp>
         <p:nvSpPr>
-          <p:cNvPr id="8" name="Oval 7"/>
+          <p:cNvPr id="7" name="Oval 6"/>
           <p:cNvSpPr/>
           <p:nvPr/>
         </p:nvSpPr>
         <p:spPr>
           <a:xfrm>
-            <a:off x="4978400" y="2063750"/>
-            <a:ext cx="101600" cy="101600"/>
+            <a:off x="5638800" y="1581150"/>
+            <a:ext cx="152400" cy="152400"/>
           </a:xfrm>
           <a:prstGeom prst="ellipse">
             <a:avLst/>
@@ -5781,23 +4532,921 @@
           </a:p>
         </p:txBody>
       </p:sp>
+      <p:sp>
+        <p:nvSpPr>
+          <p:cNvPr id="8" name="Freeform 7"/>
+          <p:cNvSpPr/>
+          <p:nvPr/>
+        </p:nvSpPr>
+        <p:spPr>
+          <a:xfrm>
+            <a:off x="5349240" y="1794510"/>
+            <a:ext cx="251460" cy="274320"/>
+          </a:xfrm>
+          <a:custGeom>
+            <a:avLst/>
+            <a:gdLst/>
+            <a:ahLst/>
+            <a:cxnLst/>
+            <a:rect l="l" t="t" r="r" b="b"/>
+            <a:pathLst>
+              <a:path w="251460" h="274320">
+                <a:moveTo>
+                  <a:pt x="0" y="274320"/>
+                </a:moveTo>
+                <a:lnTo>
+                  <a:pt x="2550" y="271549"/>
+                </a:lnTo>
+                <a:close/>
+                <a:lnTo>
+                  <a:pt x="5121" y="268778"/>
+                </a:lnTo>
+                <a:close/>
+                <a:lnTo>
+                  <a:pt x="7712" y="266007"/>
+                </a:lnTo>
+                <a:close/>
+                <a:lnTo>
+                  <a:pt x="10321" y="263236"/>
+                </a:lnTo>
+                <a:close/>
+                <a:lnTo>
+                  <a:pt x="12949" y="260465"/>
+                </a:lnTo>
+                <a:close/>
+                <a:lnTo>
+                  <a:pt x="15595" y="257695"/>
+                </a:lnTo>
+                <a:close/>
+                <a:lnTo>
+                  <a:pt x="18258" y="254924"/>
+                </a:lnTo>
+                <a:close/>
+                <a:lnTo>
+                  <a:pt x="20937" y="252153"/>
+                </a:lnTo>
+                <a:close/>
+                <a:lnTo>
+                  <a:pt x="23633" y="249382"/>
+                </a:lnTo>
+                <a:close/>
+                <a:lnTo>
+                  <a:pt x="26344" y="246611"/>
+                </a:lnTo>
+                <a:close/>
+                <a:lnTo>
+                  <a:pt x="29069" y="243840"/>
+                </a:lnTo>
+                <a:close/>
+                <a:lnTo>
+                  <a:pt x="31808" y="241069"/>
+                </a:lnTo>
+                <a:close/>
+                <a:lnTo>
+                  <a:pt x="34561" y="238298"/>
+                </a:lnTo>
+                <a:close/>
+                <a:lnTo>
+                  <a:pt x="37326" y="235527"/>
+                </a:lnTo>
+                <a:close/>
+                <a:lnTo>
+                  <a:pt x="40104" y="232756"/>
+                </a:lnTo>
+                <a:close/>
+                <a:lnTo>
+                  <a:pt x="42893" y="229985"/>
+                </a:lnTo>
+                <a:close/>
+                <a:lnTo>
+                  <a:pt x="45692" y="227215"/>
+                </a:lnTo>
+                <a:close/>
+                <a:lnTo>
+                  <a:pt x="48502" y="224444"/>
+                </a:lnTo>
+                <a:close/>
+                <a:lnTo>
+                  <a:pt x="51322" y="221673"/>
+                </a:lnTo>
+                <a:close/>
+                <a:lnTo>
+                  <a:pt x="54150" y="218902"/>
+                </a:lnTo>
+                <a:close/>
+                <a:lnTo>
+                  <a:pt x="56987" y="216131"/>
+                </a:lnTo>
+                <a:close/>
+                <a:lnTo>
+                  <a:pt x="59831" y="213360"/>
+                </a:lnTo>
+                <a:close/>
+                <a:lnTo>
+                  <a:pt x="62682" y="210589"/>
+                </a:lnTo>
+                <a:close/>
+                <a:lnTo>
+                  <a:pt x="65540" y="207818"/>
+                </a:lnTo>
+                <a:close/>
+                <a:lnTo>
+                  <a:pt x="68403" y="205047"/>
+                </a:lnTo>
+                <a:close/>
+                <a:lnTo>
+                  <a:pt x="71272" y="202276"/>
+                </a:lnTo>
+                <a:close/>
+                <a:lnTo>
+                  <a:pt x="74145" y="199505"/>
+                </a:lnTo>
+                <a:close/>
+                <a:lnTo>
+                  <a:pt x="77021" y="196735"/>
+                </a:lnTo>
+                <a:close/>
+                <a:lnTo>
+                  <a:pt x="79901" y="193964"/>
+                </a:lnTo>
+                <a:close/>
+                <a:lnTo>
+                  <a:pt x="82784" y="191193"/>
+                </a:lnTo>
+                <a:close/>
+                <a:lnTo>
+                  <a:pt x="85668" y="188422"/>
+                </a:lnTo>
+                <a:close/>
+                <a:lnTo>
+                  <a:pt x="88554" y="185651"/>
+                </a:lnTo>
+                <a:close/>
+                <a:lnTo>
+                  <a:pt x="91440" y="182880"/>
+                </a:lnTo>
+                <a:close/>
+                <a:lnTo>
+                  <a:pt x="94326" y="180109"/>
+                </a:lnTo>
+                <a:close/>
+                <a:lnTo>
+                  <a:pt x="97212" y="177338"/>
+                </a:lnTo>
+                <a:close/>
+                <a:lnTo>
+                  <a:pt x="100096" y="174567"/>
+                </a:lnTo>
+                <a:close/>
+                <a:lnTo>
+                  <a:pt x="102979" y="171796"/>
+                </a:lnTo>
+                <a:close/>
+                <a:lnTo>
+                  <a:pt x="105859" y="169025"/>
+                </a:lnTo>
+                <a:close/>
+                <a:lnTo>
+                  <a:pt x="108735" y="166255"/>
+                </a:lnTo>
+                <a:close/>
+                <a:lnTo>
+                  <a:pt x="111608" y="163484"/>
+                </a:lnTo>
+                <a:close/>
+                <a:lnTo>
+                  <a:pt x="114477" y="160713"/>
+                </a:lnTo>
+                <a:close/>
+                <a:lnTo>
+                  <a:pt x="117340" y="157942"/>
+                </a:lnTo>
+                <a:close/>
+                <a:lnTo>
+                  <a:pt x="120198" y="155171"/>
+                </a:lnTo>
+                <a:close/>
+                <a:lnTo>
+                  <a:pt x="123049" y="152400"/>
+                </a:lnTo>
+                <a:close/>
+                <a:lnTo>
+                  <a:pt x="125893" y="149629"/>
+                </a:lnTo>
+                <a:close/>
+                <a:lnTo>
+                  <a:pt x="128730" y="146858"/>
+                </a:lnTo>
+                <a:close/>
+                <a:lnTo>
+                  <a:pt x="131558" y="144087"/>
+                </a:lnTo>
+                <a:close/>
+                <a:lnTo>
+                  <a:pt x="134378" y="141316"/>
+                </a:lnTo>
+                <a:close/>
+                <a:lnTo>
+                  <a:pt x="137188" y="138545"/>
+                </a:lnTo>
+                <a:close/>
+                <a:lnTo>
+                  <a:pt x="139987" y="135775"/>
+                </a:lnTo>
+                <a:close/>
+                <a:lnTo>
+                  <a:pt x="142776" y="133004"/>
+                </a:lnTo>
+                <a:close/>
+                <a:lnTo>
+                  <a:pt x="145554" y="130233"/>
+                </a:lnTo>
+                <a:close/>
+                <a:lnTo>
+                  <a:pt x="148319" y="127462"/>
+                </a:lnTo>
+                <a:close/>
+                <a:lnTo>
+                  <a:pt x="151072" y="124691"/>
+                </a:lnTo>
+                <a:close/>
+                <a:lnTo>
+                  <a:pt x="153811" y="121920"/>
+                </a:lnTo>
+                <a:close/>
+                <a:lnTo>
+                  <a:pt x="156536" y="119149"/>
+                </a:lnTo>
+                <a:close/>
+                <a:lnTo>
+                  <a:pt x="159247" y="116378"/>
+                </a:lnTo>
+                <a:close/>
+                <a:lnTo>
+                  <a:pt x="161943" y="113607"/>
+                </a:lnTo>
+                <a:close/>
+                <a:lnTo>
+                  <a:pt x="164622" y="110836"/>
+                </a:lnTo>
+                <a:close/>
+                <a:lnTo>
+                  <a:pt x="167285" y="108065"/>
+                </a:lnTo>
+                <a:close/>
+                <a:lnTo>
+                  <a:pt x="169931" y="105295"/>
+                </a:lnTo>
+                <a:close/>
+                <a:lnTo>
+                  <a:pt x="172559" y="102524"/>
+                </a:lnTo>
+                <a:close/>
+                <a:lnTo>
+                  <a:pt x="175168" y="99753"/>
+                </a:lnTo>
+                <a:close/>
+                <a:lnTo>
+                  <a:pt x="177759" y="96982"/>
+                </a:lnTo>
+                <a:close/>
+                <a:lnTo>
+                  <a:pt x="180330" y="94211"/>
+                </a:lnTo>
+                <a:close/>
+                <a:lnTo>
+                  <a:pt x="182880" y="91440"/>
+                </a:lnTo>
+                <a:close/>
+                <a:lnTo>
+                  <a:pt x="185409" y="88669"/>
+                </a:lnTo>
+                <a:close/>
+                <a:lnTo>
+                  <a:pt x="187917" y="85898"/>
+                </a:lnTo>
+                <a:close/>
+                <a:lnTo>
+                  <a:pt x="190403" y="83127"/>
+                </a:lnTo>
+                <a:close/>
+                <a:lnTo>
+                  <a:pt x="192865" y="80356"/>
+                </a:lnTo>
+                <a:close/>
+                <a:lnTo>
+                  <a:pt x="195304" y="77585"/>
+                </a:lnTo>
+                <a:close/>
+                <a:lnTo>
+                  <a:pt x="197719" y="74815"/>
+                </a:lnTo>
+                <a:close/>
+                <a:lnTo>
+                  <a:pt x="200109" y="72044"/>
+                </a:lnTo>
+                <a:close/>
+                <a:lnTo>
+                  <a:pt x="202474" y="69273"/>
+                </a:lnTo>
+                <a:close/>
+                <a:lnTo>
+                  <a:pt x="204813" y="66502"/>
+                </a:lnTo>
+                <a:close/>
+                <a:lnTo>
+                  <a:pt x="207124" y="63731"/>
+                </a:lnTo>
+                <a:close/>
+                <a:lnTo>
+                  <a:pt x="209409" y="60960"/>
+                </a:lnTo>
+                <a:close/>
+                <a:lnTo>
+                  <a:pt x="211665" y="58189"/>
+                </a:lnTo>
+                <a:close/>
+                <a:lnTo>
+                  <a:pt x="213893" y="55418"/>
+                </a:lnTo>
+                <a:close/>
+                <a:lnTo>
+                  <a:pt x="216092" y="52647"/>
+                </a:lnTo>
+                <a:close/>
+                <a:lnTo>
+                  <a:pt x="218261" y="49876"/>
+                </a:lnTo>
+                <a:close/>
+                <a:lnTo>
+                  <a:pt x="220399" y="47105"/>
+                </a:lnTo>
+                <a:close/>
+                <a:lnTo>
+                  <a:pt x="222506" y="44335"/>
+                </a:lnTo>
+                <a:close/>
+                <a:lnTo>
+                  <a:pt x="224581" y="41564"/>
+                </a:lnTo>
+                <a:close/>
+                <a:lnTo>
+                  <a:pt x="226624" y="38793"/>
+                </a:lnTo>
+                <a:close/>
+                <a:lnTo>
+                  <a:pt x="228634" y="36022"/>
+                </a:lnTo>
+                <a:close/>
+                <a:lnTo>
+                  <a:pt x="230609" y="33251"/>
+                </a:lnTo>
+                <a:close/>
+                <a:lnTo>
+                  <a:pt x="232551" y="30480"/>
+                </a:lnTo>
+                <a:close/>
+                <a:lnTo>
+                  <a:pt x="234458" y="27709"/>
+                </a:lnTo>
+                <a:close/>
+                <a:lnTo>
+                  <a:pt x="236329" y="24938"/>
+                </a:lnTo>
+                <a:close/>
+                <a:lnTo>
+                  <a:pt x="238164" y="22167"/>
+                </a:lnTo>
+                <a:close/>
+                <a:lnTo>
+                  <a:pt x="239961" y="19396"/>
+                </a:lnTo>
+                <a:close/>
+                <a:lnTo>
+                  <a:pt x="241722" y="16625"/>
+                </a:lnTo>
+                <a:close/>
+                <a:lnTo>
+                  <a:pt x="243444" y="13855"/>
+                </a:lnTo>
+                <a:close/>
+                <a:lnTo>
+                  <a:pt x="245127" y="11084"/>
+                </a:lnTo>
+                <a:close/>
+                <a:lnTo>
+                  <a:pt x="246771" y="8313"/>
+                </a:lnTo>
+                <a:close/>
+                <a:lnTo>
+                  <a:pt x="248375" y="5542"/>
+                </a:lnTo>
+                <a:close/>
+                <a:lnTo>
+                  <a:pt x="249938" y="2771"/>
+                </a:lnTo>
+                <a:close/>
+                <a:lnTo>
+                  <a:pt x="251460" y="0"/>
+                </a:lnTo>
+                <a:close/>
+              </a:path>
+            </a:pathLst>
+          </a:custGeom>
+          <a:ln w="19050">
+            <a:solidFill>
+              <a:srgbClr val="FFFFFF"/>
+            </a:solidFill>
+          </a:ln>
+        </p:spPr>
+        <p:style>
+          <a:lnRef idx="1">
+            <a:schemeClr val="accent1"/>
+          </a:lnRef>
+          <a:fillRef idx="3">
+            <a:schemeClr val="accent1"/>
+          </a:fillRef>
+          <a:effectRef idx="2">
+            <a:schemeClr val="accent1"/>
+          </a:effectRef>
+          <a:fontRef idx="minor">
+            <a:schemeClr val="lt1"/>
+          </a:fontRef>
+        </p:style>
+        <p:txBody>
+          <a:bodyPr rtlCol="0" anchor="ctr"/>
+          <a:lstStyle/>
+          <a:p>
+            <a:pPr algn="ctr"/>
+          </a:p>
+        </p:txBody>
+      </p:sp>
+      <p:sp>
+        <p:nvSpPr>
+          <p:cNvPr id="9" name="Freeform 8"/>
+          <p:cNvSpPr/>
+          <p:nvPr/>
+        </p:nvSpPr>
+        <p:spPr>
+          <a:xfrm>
+            <a:off x="5760720" y="1337310"/>
+            <a:ext cx="91440" cy="251460"/>
+          </a:xfrm>
+          <a:custGeom>
+            <a:avLst/>
+            <a:gdLst/>
+            <a:ahLst/>
+            <a:cxnLst/>
+            <a:rect l="l" t="t" r="r" b="b"/>
+            <a:pathLst>
+              <a:path w="91440" h="251460">
+                <a:moveTo>
+                  <a:pt x="91440" y="0"/>
+                </a:moveTo>
+                <a:lnTo>
+                  <a:pt x="90516" y="2997"/>
+                </a:lnTo>
+                <a:close/>
+                <a:lnTo>
+                  <a:pt x="89593" y="5985"/>
+                </a:lnTo>
+                <a:close/>
+                <a:lnTo>
+                  <a:pt x="88669" y="8963"/>
+                </a:lnTo>
+                <a:close/>
+                <a:lnTo>
+                  <a:pt x="87745" y="11933"/>
+                </a:lnTo>
+                <a:close/>
+                <a:lnTo>
+                  <a:pt x="86822" y="14892"/>
+                </a:lnTo>
+                <a:close/>
+                <a:lnTo>
+                  <a:pt x="85898" y="17843"/>
+                </a:lnTo>
+                <a:close/>
+                <a:lnTo>
+                  <a:pt x="84975" y="20784"/>
+                </a:lnTo>
+                <a:close/>
+                <a:lnTo>
+                  <a:pt x="84051" y="23716"/>
+                </a:lnTo>
+                <a:close/>
+                <a:lnTo>
+                  <a:pt x="83127" y="26639"/>
+                </a:lnTo>
+                <a:close/>
+                <a:lnTo>
+                  <a:pt x="82204" y="29552"/>
+                </a:lnTo>
+                <a:close/>
+                <a:lnTo>
+                  <a:pt x="81280" y="32456"/>
+                </a:lnTo>
+                <a:close/>
+                <a:lnTo>
+                  <a:pt x="80356" y="35350"/>
+                </a:lnTo>
+                <a:close/>
+                <a:lnTo>
+                  <a:pt x="79433" y="38235"/>
+                </a:lnTo>
+                <a:close/>
+                <a:lnTo>
+                  <a:pt x="78509" y="41111"/>
+                </a:lnTo>
+                <a:close/>
+                <a:lnTo>
+                  <a:pt x="77585" y="43978"/>
+                </a:lnTo>
+                <a:close/>
+                <a:lnTo>
+                  <a:pt x="76662" y="46835"/>
+                </a:lnTo>
+                <a:close/>
+                <a:lnTo>
+                  <a:pt x="75738" y="49683"/>
+                </a:lnTo>
+                <a:close/>
+                <a:lnTo>
+                  <a:pt x="74815" y="52521"/>
+                </a:lnTo>
+                <a:close/>
+                <a:lnTo>
+                  <a:pt x="73891" y="55351"/>
+                </a:lnTo>
+                <a:close/>
+                <a:lnTo>
+                  <a:pt x="72967" y="58170"/>
+                </a:lnTo>
+                <a:close/>
+                <a:lnTo>
+                  <a:pt x="72044" y="60981"/>
+                </a:lnTo>
+                <a:close/>
+                <a:lnTo>
+                  <a:pt x="71120" y="63782"/>
+                </a:lnTo>
+                <a:close/>
+                <a:lnTo>
+                  <a:pt x="70196" y="66574"/>
+                </a:lnTo>
+                <a:close/>
+                <a:lnTo>
+                  <a:pt x="69273" y="69357"/>
+                </a:lnTo>
+                <a:close/>
+                <a:lnTo>
+                  <a:pt x="68349" y="72130"/>
+                </a:lnTo>
+                <a:close/>
+                <a:lnTo>
+                  <a:pt x="67425" y="74894"/>
+                </a:lnTo>
+                <a:close/>
+                <a:lnTo>
+                  <a:pt x="66502" y="77648"/>
+                </a:lnTo>
+                <a:close/>
+                <a:lnTo>
+                  <a:pt x="65578" y="80394"/>
+                </a:lnTo>
+                <a:close/>
+                <a:lnTo>
+                  <a:pt x="64655" y="83130"/>
+                </a:lnTo>
+                <a:close/>
+                <a:lnTo>
+                  <a:pt x="63731" y="85856"/>
+                </a:lnTo>
+                <a:close/>
+                <a:lnTo>
+                  <a:pt x="62807" y="88573"/>
+                </a:lnTo>
+                <a:close/>
+                <a:lnTo>
+                  <a:pt x="61884" y="91281"/>
+                </a:lnTo>
+                <a:close/>
+                <a:lnTo>
+                  <a:pt x="60960" y="93980"/>
+                </a:lnTo>
+                <a:close/>
+                <a:lnTo>
+                  <a:pt x="60036" y="96669"/>
+                </a:lnTo>
+                <a:close/>
+                <a:lnTo>
+                  <a:pt x="59113" y="99349"/>
+                </a:lnTo>
+                <a:close/>
+                <a:lnTo>
+                  <a:pt x="58189" y="102020"/>
+                </a:lnTo>
+                <a:close/>
+                <a:lnTo>
+                  <a:pt x="57265" y="104681"/>
+                </a:lnTo>
+                <a:close/>
+                <a:lnTo>
+                  <a:pt x="56342" y="107333"/>
+                </a:lnTo>
+                <a:close/>
+                <a:lnTo>
+                  <a:pt x="55418" y="109976"/>
+                </a:lnTo>
+                <a:close/>
+                <a:lnTo>
+                  <a:pt x="54495" y="112609"/>
+                </a:lnTo>
+                <a:close/>
+                <a:lnTo>
+                  <a:pt x="53571" y="115233"/>
+                </a:lnTo>
+                <a:close/>
+                <a:lnTo>
+                  <a:pt x="52647" y="117848"/>
+                </a:lnTo>
+                <a:close/>
+                <a:lnTo>
+                  <a:pt x="51724" y="120453"/>
+                </a:lnTo>
+                <a:close/>
+                <a:lnTo>
+                  <a:pt x="50800" y="123049"/>
+                </a:lnTo>
+                <a:close/>
+                <a:lnTo>
+                  <a:pt x="49876" y="125636"/>
+                </a:lnTo>
+                <a:close/>
+                <a:lnTo>
+                  <a:pt x="48953" y="128213"/>
+                </a:lnTo>
+                <a:close/>
+                <a:lnTo>
+                  <a:pt x="48029" y="130781"/>
+                </a:lnTo>
+                <a:close/>
+                <a:lnTo>
+                  <a:pt x="47105" y="133340"/>
+                </a:lnTo>
+                <a:close/>
+                <a:lnTo>
+                  <a:pt x="46182" y="135889"/>
+                </a:lnTo>
+                <a:close/>
+                <a:lnTo>
+                  <a:pt x="45258" y="138429"/>
+                </a:lnTo>
+                <a:close/>
+                <a:lnTo>
+                  <a:pt x="44335" y="140960"/>
+                </a:lnTo>
+                <a:close/>
+                <a:lnTo>
+                  <a:pt x="43411" y="143481"/>
+                </a:lnTo>
+                <a:close/>
+                <a:lnTo>
+                  <a:pt x="42487" y="145993"/>
+                </a:lnTo>
+                <a:close/>
+                <a:lnTo>
+                  <a:pt x="41564" y="148496"/>
+                </a:lnTo>
+                <a:close/>
+                <a:lnTo>
+                  <a:pt x="40640" y="150989"/>
+                </a:lnTo>
+                <a:close/>
+                <a:lnTo>
+                  <a:pt x="39716" y="153473"/>
+                </a:lnTo>
+                <a:close/>
+                <a:lnTo>
+                  <a:pt x="38793" y="155948"/>
+                </a:lnTo>
+                <a:close/>
+                <a:lnTo>
+                  <a:pt x="37869" y="158413"/>
+                </a:lnTo>
+                <a:close/>
+                <a:lnTo>
+                  <a:pt x="36945" y="160869"/>
+                </a:lnTo>
+                <a:close/>
+                <a:lnTo>
+                  <a:pt x="36022" y="163316"/>
+                </a:lnTo>
+                <a:close/>
+                <a:lnTo>
+                  <a:pt x="35098" y="165753"/>
+                </a:lnTo>
+                <a:close/>
+                <a:lnTo>
+                  <a:pt x="34175" y="168181"/>
+                </a:lnTo>
+                <a:close/>
+                <a:lnTo>
+                  <a:pt x="33251" y="170600"/>
+                </a:lnTo>
+                <a:close/>
+                <a:lnTo>
+                  <a:pt x="32327" y="173009"/>
+                </a:lnTo>
+                <a:close/>
+                <a:lnTo>
+                  <a:pt x="31404" y="175409"/>
+                </a:lnTo>
+                <a:close/>
+                <a:lnTo>
+                  <a:pt x="30480" y="177800"/>
+                </a:lnTo>
+                <a:close/>
+                <a:lnTo>
+                  <a:pt x="29556" y="180181"/>
+                </a:lnTo>
+                <a:close/>
+                <a:lnTo>
+                  <a:pt x="28633" y="182553"/>
+                </a:lnTo>
+                <a:close/>
+                <a:lnTo>
+                  <a:pt x="27709" y="184916"/>
+                </a:lnTo>
+                <a:close/>
+                <a:lnTo>
+                  <a:pt x="26785" y="187270"/>
+                </a:lnTo>
+                <a:close/>
+                <a:lnTo>
+                  <a:pt x="25862" y="189614"/>
+                </a:lnTo>
+                <a:close/>
+                <a:lnTo>
+                  <a:pt x="24938" y="191948"/>
+                </a:lnTo>
+                <a:close/>
+                <a:lnTo>
+                  <a:pt x="24015" y="194274"/>
+                </a:lnTo>
+                <a:close/>
+                <a:lnTo>
+                  <a:pt x="23091" y="196590"/>
+                </a:lnTo>
+                <a:close/>
+                <a:lnTo>
+                  <a:pt x="22167" y="198897"/>
+                </a:lnTo>
+                <a:close/>
+                <a:lnTo>
+                  <a:pt x="21244" y="201194"/>
+                </a:lnTo>
+                <a:close/>
+                <a:lnTo>
+                  <a:pt x="20320" y="203482"/>
+                </a:lnTo>
+                <a:close/>
+                <a:lnTo>
+                  <a:pt x="19396" y="205761"/>
+                </a:lnTo>
+                <a:close/>
+                <a:lnTo>
+                  <a:pt x="18473" y="208030"/>
+                </a:lnTo>
+                <a:close/>
+                <a:lnTo>
+                  <a:pt x="17549" y="210291"/>
+                </a:lnTo>
+                <a:close/>
+                <a:lnTo>
+                  <a:pt x="16625" y="212541"/>
+                </a:lnTo>
+                <a:close/>
+                <a:lnTo>
+                  <a:pt x="15702" y="214783"/>
+                </a:lnTo>
+                <a:close/>
+                <a:lnTo>
+                  <a:pt x="14778" y="217015"/>
+                </a:lnTo>
+                <a:close/>
+                <a:lnTo>
+                  <a:pt x="13855" y="219238"/>
+                </a:lnTo>
+                <a:close/>
+                <a:lnTo>
+                  <a:pt x="12931" y="221451"/>
+                </a:lnTo>
+                <a:close/>
+                <a:lnTo>
+                  <a:pt x="12007" y="223655"/>
+                </a:lnTo>
+                <a:close/>
+                <a:lnTo>
+                  <a:pt x="11084" y="225850"/>
+                </a:lnTo>
+                <a:close/>
+                <a:lnTo>
+                  <a:pt x="10160" y="228036"/>
+                </a:lnTo>
+                <a:close/>
+                <a:lnTo>
+                  <a:pt x="9236" y="230212"/>
+                </a:lnTo>
+                <a:close/>
+                <a:lnTo>
+                  <a:pt x="8313" y="232379"/>
+                </a:lnTo>
+                <a:close/>
+                <a:lnTo>
+                  <a:pt x="7389" y="234536"/>
+                </a:lnTo>
+                <a:close/>
+                <a:lnTo>
+                  <a:pt x="6465" y="236684"/>
+                </a:lnTo>
+                <a:close/>
+                <a:lnTo>
+                  <a:pt x="5542" y="238823"/>
+                </a:lnTo>
+                <a:close/>
+                <a:lnTo>
+                  <a:pt x="4618" y="240952"/>
+                </a:lnTo>
+                <a:close/>
+                <a:lnTo>
+                  <a:pt x="3695" y="243073"/>
+                </a:lnTo>
+                <a:close/>
+                <a:lnTo>
+                  <a:pt x="2771" y="245183"/>
+                </a:lnTo>
+                <a:close/>
+                <a:lnTo>
+                  <a:pt x="1847" y="247285"/>
+                </a:lnTo>
+                <a:close/>
+                <a:lnTo>
+                  <a:pt x="924" y="249377"/>
+                </a:lnTo>
+                <a:close/>
+                <a:lnTo>
+                  <a:pt x="0" y="251460"/>
+                </a:lnTo>
+                <a:close/>
+              </a:path>
+            </a:pathLst>
+          </a:custGeom>
+          <a:ln w="19050">
+            <a:solidFill>
+              <a:srgbClr val="FFFFFF"/>
+            </a:solidFill>
+          </a:ln>
+        </p:spPr>
+        <p:style>
+          <a:lnRef idx="1">
+            <a:schemeClr val="accent1"/>
+          </a:lnRef>
+          <a:fillRef idx="3">
+            <a:schemeClr val="accent1"/>
+          </a:fillRef>
+          <a:effectRef idx="2">
+            <a:schemeClr val="accent1"/>
+          </a:effectRef>
+          <a:fontRef idx="minor">
+            <a:schemeClr val="lt1"/>
+          </a:fontRef>
+        </p:style>
+        <p:txBody>
+          <a:bodyPr rtlCol="0" anchor="ctr"/>
+          <a:lstStyle/>
+          <a:p>
+            <a:pPr algn="ctr"/>
+          </a:p>
+        </p:txBody>
+      </p:sp>
       <p:cxnSp>
         <p:nvCxnSpPr>
-          <p:cNvPr id="9" name="Connector 8"/>
+          <p:cNvPr id="10" name="Connector 9"/>
           <p:cNvCxnSpPr/>
           <p:nvPr/>
         </p:nvCxnSpPr>
         <p:spPr>
           <a:xfrm>
-            <a:off x="4905756.0" y="2571750.0"/>
-            <a:ext cx="91440.0" cy="0.0"/>
+            <a:off x="4572000.0" y="2571750.0"/>
+            <a:ext cx="0.0" cy="0.0"/>
           </a:xfrm>
           <a:prstGeom prst="line">
             <a:avLst/>
           </a:prstGeom>
           <a:ln w="15240">
             <a:solidFill>
-              <a:srgbClr val="B4B4B4"/>
+              <a:srgbClr val="FFFFFF"/>
             </a:solidFill>
           </a:ln>
         </p:spPr>
@@ -5818,21 +5467,21 @@
       </p:cxnSp>
       <p:cxnSp>
         <p:nvCxnSpPr>
-          <p:cNvPr id="10" name="Connector 9"/>
+          <p:cNvPr id="11" name="Connector 10"/>
           <p:cNvCxnSpPr/>
           <p:nvPr/>
         </p:nvCxnSpPr>
         <p:spPr>
-          <a:xfrm flipH="1">
-            <a:off x="5061204.0" y="2571750.0"/>
-            <a:ext cx="91440.0" cy="0.0"/>
+          <a:xfrm>
+            <a:off x="4572000.0" y="2571750.0"/>
+            <a:ext cx="0.0" cy="0.0"/>
           </a:xfrm>
           <a:prstGeom prst="line">
             <a:avLst/>
           </a:prstGeom>
           <a:ln w="15240">
             <a:solidFill>
-              <a:srgbClr val="B4B4B4"/>
+              <a:srgbClr val="FFFFFF"/>
             </a:solidFill>
           </a:ln>
         </p:spPr>
@@ -5853,911 +5502,13 @@
       </p:cxnSp>
       <p:sp>
         <p:nvSpPr>
-          <p:cNvPr id="11" name="Freeform 10"/>
-          <p:cNvSpPr/>
+          <p:cNvPr id="12" name="TextBox 11"/>
+          <p:cNvSpPr txBox="1"/>
           <p:nvPr/>
         </p:nvSpPr>
         <p:spPr>
           <a:xfrm>
-            <a:off x="4805081" y="1547211"/>
-            <a:ext cx="217398" cy="456514"/>
-          </a:xfrm>
-          <a:custGeom>
-            <a:avLst/>
-            <a:gdLst/>
-            <a:ahLst/>
-            <a:cxnLst/>
-            <a:rect l="l" t="t" r="r" b="b"/>
-            <a:pathLst>
-              <a:path w="217398" h="456514">
-                <a:moveTo>
-                  <a:pt x="0" y="456514"/>
-                </a:moveTo>
-                <a:lnTo>
-                  <a:pt x="2195" y="451945"/>
-                </a:lnTo>
-                <a:close/>
-                <a:lnTo>
-                  <a:pt x="4390" y="447332"/>
-                </a:lnTo>
-                <a:close/>
-                <a:lnTo>
-                  <a:pt x="6585" y="442717"/>
-                </a:lnTo>
-                <a:close/>
-                <a:lnTo>
-                  <a:pt x="8780" y="438103"/>
-                </a:lnTo>
-                <a:close/>
-                <a:lnTo>
-                  <a:pt x="10975" y="433489"/>
-                </a:lnTo>
-                <a:close/>
-                <a:lnTo>
-                  <a:pt x="13170" y="428875"/>
-                </a:lnTo>
-                <a:close/>
-                <a:lnTo>
-                  <a:pt x="15365" y="424261"/>
-                </a:lnTo>
-                <a:close/>
-                <a:lnTo>
-                  <a:pt x="17560" y="419647"/>
-                </a:lnTo>
-                <a:close/>
-                <a:lnTo>
-                  <a:pt x="19755" y="415033"/>
-                </a:lnTo>
-                <a:close/>
-                <a:lnTo>
-                  <a:pt x="21950" y="410419"/>
-                </a:lnTo>
-                <a:close/>
-                <a:lnTo>
-                  <a:pt x="24145" y="405805"/>
-                </a:lnTo>
-                <a:close/>
-                <a:lnTo>
-                  <a:pt x="26340" y="401191"/>
-                </a:lnTo>
-                <a:close/>
-                <a:lnTo>
-                  <a:pt x="28535" y="396577"/>
-                </a:lnTo>
-                <a:close/>
-                <a:lnTo>
-                  <a:pt x="30730" y="391963"/>
-                </a:lnTo>
-                <a:close/>
-                <a:lnTo>
-                  <a:pt x="32925" y="387349"/>
-                </a:lnTo>
-                <a:close/>
-                <a:lnTo>
-                  <a:pt x="35120" y="382736"/>
-                </a:lnTo>
-                <a:close/>
-                <a:lnTo>
-                  <a:pt x="37315" y="378116"/>
-                </a:lnTo>
-                <a:close/>
-                <a:lnTo>
-                  <a:pt x="39510" y="373537"/>
-                </a:lnTo>
-                <a:close/>
-                <a:lnTo>
-                  <a:pt x="41705" y="368942"/>
-                </a:lnTo>
-                <a:close/>
-                <a:lnTo>
-                  <a:pt x="43900" y="364324"/>
-                </a:lnTo>
-                <a:close/>
-                <a:lnTo>
-                  <a:pt x="46095" y="359711"/>
-                </a:lnTo>
-                <a:close/>
-                <a:lnTo>
-                  <a:pt x="48291" y="355097"/>
-                </a:lnTo>
-                <a:close/>
-                <a:lnTo>
-                  <a:pt x="50480" y="350483"/>
-                </a:lnTo>
-                <a:close/>
-                <a:lnTo>
-                  <a:pt x="52704" y="345869"/>
-                </a:lnTo>
-                <a:close/>
-                <a:lnTo>
-                  <a:pt x="54925" y="341255"/>
-                </a:lnTo>
-                <a:close/>
-                <a:lnTo>
-                  <a:pt x="57115" y="336640"/>
-                </a:lnTo>
-                <a:close/>
-                <a:lnTo>
-                  <a:pt x="59311" y="332026"/>
-                </a:lnTo>
-                <a:close/>
-                <a:lnTo>
-                  <a:pt x="61506" y="327412"/>
-                </a:lnTo>
-                <a:close/>
-                <a:lnTo>
-                  <a:pt x="63701" y="322798"/>
-                </a:lnTo>
-                <a:close/>
-                <a:lnTo>
-                  <a:pt x="65896" y="318184"/>
-                </a:lnTo>
-                <a:close/>
-                <a:lnTo>
-                  <a:pt x="68091" y="313570"/>
-                </a:lnTo>
-                <a:close/>
-                <a:lnTo>
-                  <a:pt x="70286" y="308956"/>
-                </a:lnTo>
-                <a:close/>
-                <a:lnTo>
-                  <a:pt x="72481" y="304343"/>
-                </a:lnTo>
-                <a:close/>
-                <a:lnTo>
-                  <a:pt x="74676" y="299725"/>
-                </a:lnTo>
-                <a:close/>
-                <a:lnTo>
-                  <a:pt x="76871" y="295126"/>
-                </a:lnTo>
-                <a:close/>
-                <a:lnTo>
-                  <a:pt x="79066" y="290551"/>
-                </a:lnTo>
-                <a:close/>
-                <a:lnTo>
-                  <a:pt x="81261" y="285931"/>
-                </a:lnTo>
-                <a:close/>
-                <a:lnTo>
-                  <a:pt x="83456" y="281318"/>
-                </a:lnTo>
-                <a:close/>
-                <a:lnTo>
-                  <a:pt x="85651" y="276704"/>
-                </a:lnTo>
-                <a:close/>
-                <a:lnTo>
-                  <a:pt x="87846" y="272090"/>
-                </a:lnTo>
-                <a:close/>
-                <a:lnTo>
-                  <a:pt x="90041" y="267476"/>
-                </a:lnTo>
-                <a:close/>
-                <a:lnTo>
-                  <a:pt x="92236" y="262862"/>
-                </a:lnTo>
-                <a:close/>
-                <a:lnTo>
-                  <a:pt x="94431" y="258248"/>
-                </a:lnTo>
-                <a:close/>
-                <a:lnTo>
-                  <a:pt x="96626" y="253634"/>
-                </a:lnTo>
-                <a:close/>
-                <a:lnTo>
-                  <a:pt x="98821" y="249020"/>
-                </a:lnTo>
-                <a:close/>
-                <a:lnTo>
-                  <a:pt x="101016" y="244406"/>
-                </a:lnTo>
-                <a:close/>
-                <a:lnTo>
-                  <a:pt x="103211" y="239792"/>
-                </a:lnTo>
-                <a:close/>
-                <a:lnTo>
-                  <a:pt x="105406" y="235178"/>
-                </a:lnTo>
-                <a:close/>
-                <a:lnTo>
-                  <a:pt x="107601" y="230564"/>
-                </a:lnTo>
-                <a:close/>
-                <a:lnTo>
-                  <a:pt x="109796" y="225950"/>
-                </a:lnTo>
-                <a:close/>
-                <a:lnTo>
-                  <a:pt x="111991" y="221336"/>
-                </a:lnTo>
-                <a:close/>
-                <a:lnTo>
-                  <a:pt x="114186" y="216720"/>
-                </a:lnTo>
-                <a:close/>
-                <a:lnTo>
-                  <a:pt x="116381" y="212151"/>
-                </a:lnTo>
-                <a:close/>
-                <a:lnTo>
-                  <a:pt x="118576" y="207540"/>
-                </a:lnTo>
-                <a:close/>
-                <a:lnTo>
-                  <a:pt x="120771" y="202925"/>
-                </a:lnTo>
-                <a:close/>
-                <a:lnTo>
-                  <a:pt x="122967" y="198311"/>
-                </a:lnTo>
-                <a:close/>
-                <a:lnTo>
-                  <a:pt x="125162" y="193697"/>
-                </a:lnTo>
-                <a:close/>
-                <a:lnTo>
-                  <a:pt x="127357" y="189083"/>
-                </a:lnTo>
-                <a:close/>
-                <a:lnTo>
-                  <a:pt x="129552" y="184469"/>
-                </a:lnTo>
-                <a:close/>
-                <a:lnTo>
-                  <a:pt x="131747" y="179855"/>
-                </a:lnTo>
-                <a:close/>
-                <a:lnTo>
-                  <a:pt x="133942" y="175241"/>
-                </a:lnTo>
-                <a:close/>
-                <a:lnTo>
-                  <a:pt x="136137" y="170627"/>
-                </a:lnTo>
-                <a:close/>
-                <a:lnTo>
-                  <a:pt x="138332" y="166013"/>
-                </a:lnTo>
-                <a:close/>
-                <a:lnTo>
-                  <a:pt x="140527" y="161399"/>
-                </a:lnTo>
-                <a:close/>
-                <a:lnTo>
-                  <a:pt x="142722" y="156785"/>
-                </a:lnTo>
-                <a:close/>
-                <a:lnTo>
-                  <a:pt x="144917" y="152171"/>
-                </a:lnTo>
-                <a:close/>
-                <a:lnTo>
-                  <a:pt x="147112" y="147557"/>
-                </a:lnTo>
-                <a:close/>
-                <a:lnTo>
-                  <a:pt x="149307" y="142944"/>
-                </a:lnTo>
-                <a:close/>
-                <a:lnTo>
-                  <a:pt x="151502" y="138324"/>
-                </a:lnTo>
-                <a:close/>
-                <a:lnTo>
-                  <a:pt x="153697" y="133742"/>
-                </a:lnTo>
-                <a:close/>
-                <a:lnTo>
-                  <a:pt x="155892" y="129151"/>
-                </a:lnTo>
-                <a:close/>
-                <a:lnTo>
-                  <a:pt x="158087" y="124531"/>
-                </a:lnTo>
-                <a:close/>
-                <a:lnTo>
-                  <a:pt x="160282" y="119919"/>
-                </a:lnTo>
-                <a:close/>
-                <a:lnTo>
-                  <a:pt x="162478" y="115304"/>
-                </a:lnTo>
-                <a:close/>
-                <a:lnTo>
-                  <a:pt x="164667" y="110690"/>
-                </a:lnTo>
-                <a:close/>
-                <a:lnTo>
-                  <a:pt x="166888" y="106076"/>
-                </a:lnTo>
-                <a:close/>
-                <a:lnTo>
-                  <a:pt x="169113" y="101462"/>
-                </a:lnTo>
-                <a:close/>
-                <a:lnTo>
-                  <a:pt x="171301" y="96848"/>
-                </a:lnTo>
-                <a:close/>
-                <a:lnTo>
-                  <a:pt x="173498" y="92234"/>
-                </a:lnTo>
-                <a:close/>
-                <a:lnTo>
-                  <a:pt x="175693" y="87620"/>
-                </a:lnTo>
-                <a:close/>
-                <a:lnTo>
-                  <a:pt x="177888" y="83006"/>
-                </a:lnTo>
-                <a:close/>
-                <a:lnTo>
-                  <a:pt x="180083" y="78392"/>
-                </a:lnTo>
-                <a:close/>
-                <a:lnTo>
-                  <a:pt x="182278" y="73778"/>
-                </a:lnTo>
-                <a:close/>
-                <a:lnTo>
-                  <a:pt x="184473" y="69164"/>
-                </a:lnTo>
-                <a:close/>
-                <a:lnTo>
-                  <a:pt x="186668" y="64551"/>
-                </a:lnTo>
-                <a:close/>
-                <a:lnTo>
-                  <a:pt x="188863" y="59934"/>
-                </a:lnTo>
-                <a:close/>
-                <a:lnTo>
-                  <a:pt x="191058" y="55332"/>
-                </a:lnTo>
-                <a:close/>
-                <a:lnTo>
-                  <a:pt x="193253" y="50758"/>
-                </a:lnTo>
-                <a:close/>
-                <a:lnTo>
-                  <a:pt x="195448" y="46139"/>
-                </a:lnTo>
-                <a:close/>
-                <a:lnTo>
-                  <a:pt x="197643" y="41526"/>
-                </a:lnTo>
-                <a:close/>
-                <a:lnTo>
-                  <a:pt x="199838" y="36912"/>
-                </a:lnTo>
-                <a:close/>
-                <a:lnTo>
-                  <a:pt x="202033" y="32298"/>
-                </a:lnTo>
-                <a:close/>
-                <a:lnTo>
-                  <a:pt x="204228" y="27684"/>
-                </a:lnTo>
-                <a:close/>
-                <a:lnTo>
-                  <a:pt x="206423" y="23070"/>
-                </a:lnTo>
-                <a:close/>
-                <a:lnTo>
-                  <a:pt x="208618" y="18456"/>
-                </a:lnTo>
-                <a:close/>
-                <a:lnTo>
-                  <a:pt x="210813" y="13842"/>
-                </a:lnTo>
-                <a:close/>
-                <a:lnTo>
-                  <a:pt x="213008" y="9228"/>
-                </a:lnTo>
-                <a:close/>
-                <a:lnTo>
-                  <a:pt x="215203" y="4614"/>
-                </a:lnTo>
-                <a:close/>
-                <a:lnTo>
-                  <a:pt x="217398" y="0"/>
-                </a:lnTo>
-                <a:close/>
-              </a:path>
-            </a:pathLst>
-          </a:custGeom>
-          <a:ln w="19050">
-            <a:solidFill>
-              <a:srgbClr val="B4B4B4"/>
-            </a:solidFill>
-          </a:ln>
-        </p:spPr>
-        <p:style>
-          <a:lnRef idx="1">
-            <a:schemeClr val="accent1"/>
-          </a:lnRef>
-          <a:fillRef idx="3">
-            <a:schemeClr val="accent1"/>
-          </a:fillRef>
-          <a:effectRef idx="2">
-            <a:schemeClr val="accent1"/>
-          </a:effectRef>
-          <a:fontRef idx="minor">
-            <a:schemeClr val="lt1"/>
-          </a:fontRef>
-        </p:style>
-        <p:txBody>
-          <a:bodyPr rtlCol="0" anchor="ctr"/>
-          <a:lstStyle/>
-          <a:p>
-            <a:pPr algn="ctr"/>
-          </a:p>
-        </p:txBody>
-      </p:sp>
-      <p:sp>
-        <p:nvSpPr>
-          <p:cNvPr id="12" name="Freeform 11"/>
-          <p:cNvSpPr/>
-          <p:nvPr/>
-        </p:nvSpPr>
-        <p:spPr>
-          <a:xfrm>
-            <a:off x="5069525" y="1260135"/>
-            <a:ext cx="96378" cy="202356"/>
-          </a:xfrm>
-          <a:custGeom>
-            <a:avLst/>
-            <a:gdLst/>
-            <a:ahLst/>
-            <a:cxnLst/>
-            <a:rect l="l" t="t" r="r" b="b"/>
-            <a:pathLst>
-              <a:path w="96378" h="202356">
-                <a:moveTo>
-                  <a:pt x="96378" y="0"/>
-                </a:moveTo>
-                <a:lnTo>
-                  <a:pt x="95405" y="2045"/>
-                </a:lnTo>
-                <a:close/>
-                <a:lnTo>
-                  <a:pt x="94432" y="4090"/>
-                </a:lnTo>
-                <a:close/>
-                <a:lnTo>
-                  <a:pt x="93459" y="6136"/>
-                </a:lnTo>
-                <a:close/>
-                <a:lnTo>
-                  <a:pt x="92486" y="8182"/>
-                </a:lnTo>
-                <a:close/>
-                <a:lnTo>
-                  <a:pt x="91513" y="10226"/>
-                </a:lnTo>
-                <a:close/>
-                <a:lnTo>
-                  <a:pt x="90539" y="12271"/>
-                </a:lnTo>
-                <a:close/>
-                <a:lnTo>
-                  <a:pt x="89566" y="14318"/>
-                </a:lnTo>
-                <a:close/>
-                <a:lnTo>
-                  <a:pt x="88593" y="16367"/>
-                </a:lnTo>
-                <a:close/>
-                <a:lnTo>
-                  <a:pt x="87620" y="18410"/>
-                </a:lnTo>
-                <a:close/>
-                <a:lnTo>
-                  <a:pt x="86647" y="20439"/>
-                </a:lnTo>
-                <a:close/>
-                <a:lnTo>
-                  <a:pt x="85674" y="22462"/>
-                </a:lnTo>
-                <a:close/>
-                <a:lnTo>
-                  <a:pt x="84701" y="24495"/>
-                </a:lnTo>
-                <a:close/>
-                <a:lnTo>
-                  <a:pt x="83728" y="26541"/>
-                </a:lnTo>
-                <a:close/>
-                <a:lnTo>
-                  <a:pt x="82755" y="28590"/>
-                </a:lnTo>
-                <a:close/>
-                <a:lnTo>
-                  <a:pt x="81782" y="30636"/>
-                </a:lnTo>
-                <a:close/>
-                <a:lnTo>
-                  <a:pt x="80809" y="32680"/>
-                </a:lnTo>
-                <a:close/>
-                <a:lnTo>
-                  <a:pt x="79836" y="34725"/>
-                </a:lnTo>
-                <a:close/>
-                <a:lnTo>
-                  <a:pt x="78863" y="36771"/>
-                </a:lnTo>
-                <a:close/>
-                <a:lnTo>
-                  <a:pt x="77890" y="38816"/>
-                </a:lnTo>
-                <a:close/>
-                <a:lnTo>
-                  <a:pt x="76917" y="40862"/>
-                </a:lnTo>
-                <a:close/>
-                <a:lnTo>
-                  <a:pt x="75944" y="42907"/>
-                </a:lnTo>
-                <a:close/>
-                <a:lnTo>
-                  <a:pt x="74971" y="44953"/>
-                </a:lnTo>
-                <a:close/>
-                <a:lnTo>
-                  <a:pt x="73998" y="46998"/>
-                </a:lnTo>
-                <a:close/>
-                <a:lnTo>
-                  <a:pt x="73025" y="49043"/>
-                </a:lnTo>
-                <a:close/>
-                <a:lnTo>
-                  <a:pt x="72052" y="51089"/>
-                </a:lnTo>
-                <a:close/>
-                <a:lnTo>
-                  <a:pt x="71078" y="53134"/>
-                </a:lnTo>
-                <a:close/>
-                <a:lnTo>
-                  <a:pt x="70105" y="55180"/>
-                </a:lnTo>
-                <a:close/>
-                <a:lnTo>
-                  <a:pt x="69132" y="57225"/>
-                </a:lnTo>
-                <a:close/>
-                <a:lnTo>
-                  <a:pt x="68159" y="59270"/>
-                </a:lnTo>
-                <a:close/>
-                <a:lnTo>
-                  <a:pt x="67186" y="61316"/>
-                </a:lnTo>
-                <a:close/>
-                <a:lnTo>
-                  <a:pt x="66213" y="63361"/>
-                </a:lnTo>
-                <a:close/>
-                <a:lnTo>
-                  <a:pt x="65240" y="65406"/>
-                </a:lnTo>
-                <a:close/>
-                <a:lnTo>
-                  <a:pt x="64267" y="67452"/>
-                </a:lnTo>
-                <a:close/>
-                <a:lnTo>
-                  <a:pt x="63294" y="69497"/>
-                </a:lnTo>
-                <a:close/>
-                <a:lnTo>
-                  <a:pt x="62321" y="71543"/>
-                </a:lnTo>
-                <a:close/>
-                <a:lnTo>
-                  <a:pt x="61348" y="73588"/>
-                </a:lnTo>
-                <a:close/>
-                <a:lnTo>
-                  <a:pt x="60375" y="75633"/>
-                </a:lnTo>
-                <a:close/>
-                <a:lnTo>
-                  <a:pt x="59402" y="77679"/>
-                </a:lnTo>
-                <a:close/>
-                <a:lnTo>
-                  <a:pt x="58429" y="79724"/>
-                </a:lnTo>
-                <a:close/>
-                <a:lnTo>
-                  <a:pt x="57456" y="81770"/>
-                </a:lnTo>
-                <a:close/>
-                <a:lnTo>
-                  <a:pt x="56483" y="83815"/>
-                </a:lnTo>
-                <a:close/>
-                <a:lnTo>
-                  <a:pt x="55510" y="85861"/>
-                </a:lnTo>
-                <a:close/>
-                <a:lnTo>
-                  <a:pt x="54537" y="87906"/>
-                </a:lnTo>
-                <a:close/>
-                <a:lnTo>
-                  <a:pt x="53564" y="89951"/>
-                </a:lnTo>
-                <a:close/>
-                <a:lnTo>
-                  <a:pt x="52591" y="91995"/>
-                </a:lnTo>
-                <a:close/>
-                <a:lnTo>
-                  <a:pt x="51617" y="94042"/>
-                </a:lnTo>
-                <a:close/>
-                <a:lnTo>
-                  <a:pt x="50644" y="96091"/>
-                </a:lnTo>
-                <a:close/>
-                <a:lnTo>
-                  <a:pt x="49671" y="98136"/>
-                </a:lnTo>
-                <a:close/>
-                <a:lnTo>
-                  <a:pt x="48698" y="100167"/>
-                </a:lnTo>
-                <a:close/>
-                <a:lnTo>
-                  <a:pt x="47725" y="102189"/>
-                </a:lnTo>
-                <a:close/>
-                <a:lnTo>
-                  <a:pt x="46752" y="104220"/>
-                </a:lnTo>
-                <a:close/>
-                <a:lnTo>
-                  <a:pt x="45779" y="106265"/>
-                </a:lnTo>
-                <a:close/>
-                <a:lnTo>
-                  <a:pt x="44806" y="108314"/>
-                </a:lnTo>
-                <a:close/>
-                <a:lnTo>
-                  <a:pt x="43833" y="110361"/>
-                </a:lnTo>
-                <a:close/>
-                <a:lnTo>
-                  <a:pt x="42860" y="112405"/>
-                </a:lnTo>
-                <a:close/>
-                <a:lnTo>
-                  <a:pt x="41887" y="114450"/>
-                </a:lnTo>
-                <a:close/>
-                <a:lnTo>
-                  <a:pt x="40914" y="116495"/>
-                </a:lnTo>
-                <a:close/>
-                <a:lnTo>
-                  <a:pt x="39941" y="118541"/>
-                </a:lnTo>
-                <a:close/>
-                <a:lnTo>
-                  <a:pt x="38968" y="120586"/>
-                </a:lnTo>
-                <a:close/>
-                <a:lnTo>
-                  <a:pt x="37995" y="122632"/>
-                </a:lnTo>
-                <a:close/>
-                <a:lnTo>
-                  <a:pt x="37022" y="124677"/>
-                </a:lnTo>
-                <a:close/>
-                <a:lnTo>
-                  <a:pt x="36049" y="126723"/>
-                </a:lnTo>
-                <a:close/>
-                <a:lnTo>
-                  <a:pt x="35076" y="128768"/>
-                </a:lnTo>
-                <a:close/>
-                <a:lnTo>
-                  <a:pt x="34103" y="130813"/>
-                </a:lnTo>
-                <a:close/>
-                <a:lnTo>
-                  <a:pt x="33129" y="132859"/>
-                </a:lnTo>
-                <a:close/>
-                <a:lnTo>
-                  <a:pt x="32156" y="134904"/>
-                </a:lnTo>
-                <a:close/>
-                <a:lnTo>
-                  <a:pt x="31183" y="136950"/>
-                </a:lnTo>
-                <a:close/>
-                <a:lnTo>
-                  <a:pt x="30210" y="138995"/>
-                </a:lnTo>
-                <a:close/>
-                <a:lnTo>
-                  <a:pt x="29237" y="141040"/>
-                </a:lnTo>
-                <a:close/>
-                <a:lnTo>
-                  <a:pt x="28264" y="143086"/>
-                </a:lnTo>
-                <a:close/>
-                <a:lnTo>
-                  <a:pt x="27291" y="145131"/>
-                </a:lnTo>
-                <a:close/>
-                <a:lnTo>
-                  <a:pt x="26318" y="147176"/>
-                </a:lnTo>
-                <a:close/>
-                <a:lnTo>
-                  <a:pt x="25345" y="149222"/>
-                </a:lnTo>
-                <a:close/>
-                <a:lnTo>
-                  <a:pt x="24372" y="151267"/>
-                </a:lnTo>
-                <a:close/>
-                <a:lnTo>
-                  <a:pt x="23399" y="153313"/>
-                </a:lnTo>
-                <a:close/>
-                <a:lnTo>
-                  <a:pt x="22426" y="155358"/>
-                </a:lnTo>
-                <a:close/>
-                <a:lnTo>
-                  <a:pt x="21452" y="157403"/>
-                </a:lnTo>
-                <a:close/>
-                <a:lnTo>
-                  <a:pt x="20479" y="159449"/>
-                </a:lnTo>
-                <a:close/>
-                <a:lnTo>
-                  <a:pt x="19510" y="161494"/>
-                </a:lnTo>
-                <a:close/>
-                <a:lnTo>
-                  <a:pt x="18538" y="163540"/>
-                </a:lnTo>
-                <a:close/>
-                <a:lnTo>
-                  <a:pt x="17554" y="165585"/>
-                </a:lnTo>
-                <a:close/>
-                <a:lnTo>
-                  <a:pt x="16559" y="167631"/>
-                </a:lnTo>
-                <a:close/>
-                <a:lnTo>
-                  <a:pt x="15568" y="169676"/>
-                </a:lnTo>
-                <a:close/>
-                <a:lnTo>
-                  <a:pt x="14591" y="171720"/>
-                </a:lnTo>
-                <a:close/>
-                <a:lnTo>
-                  <a:pt x="13622" y="173766"/>
-                </a:lnTo>
-                <a:close/>
-                <a:lnTo>
-                  <a:pt x="12651" y="175815"/>
-                </a:lnTo>
-                <a:close/>
-                <a:lnTo>
-                  <a:pt x="11677" y="177861"/>
-                </a:lnTo>
-                <a:close/>
-                <a:lnTo>
-                  <a:pt x="10703" y="179894"/>
-                </a:lnTo>
-                <a:close/>
-                <a:lnTo>
-                  <a:pt x="9730" y="181917"/>
-                </a:lnTo>
-                <a:close/>
-                <a:lnTo>
-                  <a:pt x="8758" y="183946"/>
-                </a:lnTo>
-                <a:close/>
-                <a:lnTo>
-                  <a:pt x="7785" y="185989"/>
-                </a:lnTo>
-                <a:close/>
-                <a:lnTo>
-                  <a:pt x="6811" y="188038"/>
-                </a:lnTo>
-                <a:close/>
-                <a:lnTo>
-                  <a:pt x="5838" y="190085"/>
-                </a:lnTo>
-                <a:close/>
-                <a:lnTo>
-                  <a:pt x="4865" y="192130"/>
-                </a:lnTo>
-                <a:close/>
-                <a:lnTo>
-                  <a:pt x="3892" y="194174"/>
-                </a:lnTo>
-                <a:close/>
-                <a:lnTo>
-                  <a:pt x="2919" y="196220"/>
-                </a:lnTo>
-                <a:close/>
-                <a:lnTo>
-                  <a:pt x="1946" y="198266"/>
-                </a:lnTo>
-                <a:close/>
-                <a:lnTo>
-                  <a:pt x="973" y="200311"/>
-                </a:lnTo>
-                <a:close/>
-                <a:lnTo>
-                  <a:pt x="0" y="202356"/>
-                </a:lnTo>
-                <a:close/>
-              </a:path>
-            </a:pathLst>
-          </a:custGeom>
-          <a:ln w="19050">
-            <a:solidFill>
-              <a:srgbClr val="B4B4B4"/>
-            </a:solidFill>
-          </a:ln>
-        </p:spPr>
-        <p:style>
-          <a:lnRef idx="1">
-            <a:schemeClr val="accent1"/>
-          </a:lnRef>
-          <a:fillRef idx="3">
-            <a:schemeClr val="accent1"/>
-          </a:fillRef>
-          <a:effectRef idx="2">
-            <a:schemeClr val="accent1"/>
-          </a:effectRef>
-          <a:fontRef idx="minor">
-            <a:schemeClr val="lt1"/>
-          </a:fontRef>
-        </p:style>
-        <p:txBody>
-          <a:bodyPr rtlCol="0" anchor="ctr"/>
-          <a:lstStyle/>
-          <a:p>
-            <a:pPr algn="ctr"/>
-          </a:p>
-        </p:txBody>
-      </p:sp>
-      <p:sp>
-        <p:nvSpPr>
-          <p:cNvPr id="13" name="TextBox 12"/>
-          <p:cNvSpPr txBox="1"/>
-          <p:nvPr/>
-        </p:nvSpPr>
-        <p:spPr>
-          <a:xfrm>
-            <a:off x="4249420" y="1797050"/>
+            <a:off x="5461000" y="2391410"/>
             <a:ext cx="1524000" cy="508000"/>
           </a:xfrm>
           <a:prstGeom prst="rect">
@@ -6772,7 +5523,7 @@
           <a:lstStyle/>
           <a:p>
             <a:pPr>
-              <a:defRPr sz="1400" b="1">
+              <a:defRPr sz="1800" b="1">
                 <a:solidFill>
                   <a:srgbClr val="FFFFFF"/>
                 </a:solidFill>
@@ -6780,20 +5531,20 @@
               </a:defRPr>
             </a:pPr>
             <a:r>
-              <a:t>L</a:t>
-            </a:r>
-          </a:p>
-        </p:txBody>
-      </p:sp>
-      <p:sp>
-        <p:nvSpPr>
-          <p:cNvPr id="14" name="TextBox 13"/>
+              <a:t>a</a:t>
+            </a:r>
+          </a:p>
+        </p:txBody>
+      </p:sp>
+      <p:sp>
+        <p:nvSpPr>
+          <p:cNvPr id="13" name="TextBox 12"/>
           <p:cNvSpPr txBox="1"/>
           <p:nvPr/>
         </p:nvSpPr>
         <p:spPr>
           <a:xfrm>
-            <a:off x="4775200" y="2322830"/>
+            <a:off x="4135120" y="1339850"/>
             <a:ext cx="1524000" cy="508000"/>
           </a:xfrm>
           <a:prstGeom prst="rect">
@@ -6808,7 +5559,7 @@
           <a:lstStyle/>
           <a:p>
             <a:pPr>
-              <a:defRPr sz="1400" b="1">
+              <a:defRPr sz="1800" b="1">
                 <a:solidFill>
                   <a:srgbClr val="FFFFFF"/>
                 </a:solidFill>
@@ -6816,7 +5567,7 @@
               </a:defRPr>
             </a:pPr>
             <a:r>
-              <a:t>a</a:t>
+              <a:t>L</a:t>
             </a:r>
           </a:p>
         </p:txBody>

--- a/output/1.pptx
+++ b/output/1.pptx
@@ -3104,8 +3104,8 @@
         </p:nvCxnSpPr>
         <p:spPr>
           <a:xfrm>
-            <a:off x="3657600.0" y="2571750.0"/>
-            <a:ext cx="2743200.0" cy="0.0"/>
+            <a:off x="3200400.0" y="2571750.0"/>
+            <a:ext cx="4114800.0" cy="0.0"/>
           </a:xfrm>
           <a:prstGeom prst="line">
             <a:avLst/>
@@ -3139,8 +3139,8 @@
         </p:nvCxnSpPr>
         <p:spPr>
           <a:xfrm flipV="1">
-            <a:off x="4572000.0" y="971550.0"/>
-            <a:ext cx="0.0" cy="2286000.0"/>
+            <a:off x="4572000.0" y="285750.0"/>
+            <a:ext cx="0.0" cy="3200400.0"/>
           </a:xfrm>
           <a:prstGeom prst="line">
             <a:avLst/>
@@ -3174,8 +3174,8 @@
         </p:nvSpPr>
         <p:spPr>
           <a:xfrm>
-            <a:off x="3886200" y="971550"/>
-            <a:ext cx="2057400" cy="2148840"/>
+            <a:off x="3429000" y="368046"/>
+            <a:ext cx="3291840" cy="2807208"/>
           </a:xfrm>
           <a:custGeom>
             <a:avLst/>
@@ -3184,1210 +3184,2410 @@
             <a:cxnLst/>
             <a:rect l="l" t="t" r="r" b="b"/>
             <a:pathLst>
-              <a:path w="2057400" h="2148840">
+              <a:path w="3291840" h="2807208">
                 <a:moveTo>
-                  <a:pt x="0" y="2148840"/>
+                  <a:pt x="0" y="2807208"/>
                 </a:moveTo>
                 <a:lnTo>
-                  <a:pt x="9633" y="2129065"/>
-                </a:lnTo>
-                <a:close/>
-                <a:lnTo>
-                  <a:pt x="19267" y="2109601"/>
-                </a:lnTo>
-                <a:close/>
-                <a:lnTo>
-                  <a:pt x="28900" y="2090450"/>
-                </a:lnTo>
-                <a:close/>
-                <a:lnTo>
-                  <a:pt x="38533" y="2071614"/>
-                </a:lnTo>
-                <a:close/>
-                <a:lnTo>
-                  <a:pt x="48166" y="2053095"/>
-                </a:lnTo>
-                <a:close/>
-                <a:lnTo>
-                  <a:pt x="57800" y="2034895"/>
-                </a:lnTo>
-                <a:close/>
-                <a:lnTo>
-                  <a:pt x="67433" y="2017017"/>
-                </a:lnTo>
-                <a:close/>
-                <a:lnTo>
-                  <a:pt x="77066" y="1999462"/>
-                </a:lnTo>
-                <a:close/>
-                <a:lnTo>
-                  <a:pt x="86700" y="1982232"/>
-                </a:lnTo>
-                <a:close/>
-                <a:lnTo>
-                  <a:pt x="96333" y="1965330"/>
-                </a:lnTo>
-                <a:close/>
-                <a:lnTo>
-                  <a:pt x="105966" y="1948758"/>
-                </a:lnTo>
-                <a:close/>
-                <a:lnTo>
-                  <a:pt x="115600" y="1932517"/>
-                </a:lnTo>
-                <a:close/>
-                <a:lnTo>
-                  <a:pt x="125233" y="1916609"/>
-                </a:lnTo>
-                <a:close/>
-                <a:lnTo>
-                  <a:pt x="134866" y="1901038"/>
-                </a:lnTo>
-                <a:close/>
-                <a:lnTo>
-                  <a:pt x="144500" y="1885804"/>
-                </a:lnTo>
-                <a:close/>
-                <a:lnTo>
-                  <a:pt x="154133" y="1870910"/>
-                </a:lnTo>
-                <a:close/>
-                <a:lnTo>
-                  <a:pt x="163766" y="1856358"/>
-                </a:lnTo>
-                <a:close/>
-                <a:lnTo>
-                  <a:pt x="173400" y="1842150"/>
-                </a:lnTo>
-                <a:close/>
-                <a:lnTo>
-                  <a:pt x="183033" y="1828288"/>
-                </a:lnTo>
-                <a:close/>
-                <a:lnTo>
-                  <a:pt x="192666" y="1814775"/>
-                </a:lnTo>
-                <a:close/>
-                <a:lnTo>
-                  <a:pt x="202300" y="1801611"/>
-                </a:lnTo>
-                <a:close/>
-                <a:lnTo>
-                  <a:pt x="211933" y="1788800"/>
-                </a:lnTo>
-                <a:close/>
-                <a:lnTo>
-                  <a:pt x="221566" y="1776343"/>
-                </a:lnTo>
-                <a:close/>
-                <a:lnTo>
-                  <a:pt x="231200" y="1764242"/>
-                </a:lnTo>
-                <a:close/>
-                <a:lnTo>
-                  <a:pt x="240833" y="1752500"/>
-                </a:lnTo>
-                <a:close/>
-                <a:lnTo>
-                  <a:pt x="250466" y="1741118"/>
-                </a:lnTo>
-                <a:close/>
-                <a:lnTo>
-                  <a:pt x="260099" y="1730099"/>
-                </a:lnTo>
-                <a:close/>
-                <a:lnTo>
-                  <a:pt x="269733" y="1719445"/>
-                </a:lnTo>
-                <a:close/>
-                <a:lnTo>
-                  <a:pt x="279366" y="1709157"/>
-                </a:lnTo>
-                <a:close/>
-                <a:lnTo>
-                  <a:pt x="288999" y="1699231"/>
-                </a:lnTo>
-                <a:close/>
-                <a:lnTo>
-                  <a:pt x="298633" y="1689657"/>
-                </a:lnTo>
-                <a:close/>
-                <a:lnTo>
-                  <a:pt x="308266" y="1680425"/>
-                </a:lnTo>
-                <a:close/>
-                <a:lnTo>
-                  <a:pt x="317899" y="1671524"/>
-                </a:lnTo>
-                <a:close/>
-                <a:lnTo>
-                  <a:pt x="327532" y="1662944"/>
-                </a:lnTo>
-                <a:close/>
-                <a:lnTo>
-                  <a:pt x="337166" y="1654674"/>
-                </a:lnTo>
-                <a:close/>
-                <a:lnTo>
-                  <a:pt x="346799" y="1646705"/>
-                </a:lnTo>
-                <a:close/>
-                <a:lnTo>
-                  <a:pt x="356432" y="1639026"/>
-                </a:lnTo>
-                <a:close/>
-                <a:lnTo>
-                  <a:pt x="366065" y="1631627"/>
-                </a:lnTo>
-                <a:close/>
-                <a:lnTo>
-                  <a:pt x="375699" y="1624497"/>
-                </a:lnTo>
-                <a:close/>
-                <a:lnTo>
-                  <a:pt x="385332" y="1617626"/>
-                </a:lnTo>
-                <a:close/>
-                <a:lnTo>
-                  <a:pt x="394966" y="1611004"/>
-                </a:lnTo>
-                <a:close/>
-                <a:lnTo>
-                  <a:pt x="404599" y="1604620"/>
-                </a:lnTo>
-                <a:close/>
-                <a:lnTo>
-                  <a:pt x="414232" y="1598464"/>
-                </a:lnTo>
-                <a:close/>
-                <a:lnTo>
-                  <a:pt x="423866" y="1592526"/>
-                </a:lnTo>
-                <a:close/>
-                <a:lnTo>
-                  <a:pt x="433499" y="1586799"/>
-                </a:lnTo>
-                <a:close/>
-                <a:lnTo>
-                  <a:pt x="443133" y="1581273"/>
-                </a:lnTo>
-                <a:close/>
-                <a:lnTo>
-                  <a:pt x="452766" y="1575941"/>
-                </a:lnTo>
-                <a:close/>
-                <a:lnTo>
-                  <a:pt x="462400" y="1570794"/>
-                </a:lnTo>
-                <a:close/>
-                <a:lnTo>
-                  <a:pt x="472033" y="1565824"/>
-                </a:lnTo>
-                <a:close/>
-                <a:lnTo>
-                  <a:pt x="481667" y="1561023"/>
-                </a:lnTo>
-                <a:close/>
-                <a:lnTo>
-                  <a:pt x="491300" y="1556382"/>
-                </a:lnTo>
-                <a:close/>
-                <a:lnTo>
-                  <a:pt x="500934" y="1551893"/>
-                </a:lnTo>
-                <a:close/>
-                <a:lnTo>
-                  <a:pt x="510567" y="1547547"/>
-                </a:lnTo>
-                <a:close/>
-                <a:lnTo>
-                  <a:pt x="520200" y="1543338"/>
-                </a:lnTo>
-                <a:close/>
-                <a:lnTo>
-                  <a:pt x="529833" y="1539255"/>
-                </a:lnTo>
-                <a:close/>
-                <a:lnTo>
-                  <a:pt x="539466" y="1535292"/>
-                </a:lnTo>
-                <a:close/>
-                <a:lnTo>
-                  <a:pt x="549099" y="1531439"/>
-                </a:lnTo>
-                <a:close/>
-                <a:lnTo>
-                  <a:pt x="558731" y="1527689"/>
-                </a:lnTo>
-                <a:close/>
-                <a:lnTo>
-                  <a:pt x="568364" y="1524038"/>
-                </a:lnTo>
-                <a:close/>
-                <a:lnTo>
-                  <a:pt x="577996" y="1520482"/>
-                </a:lnTo>
-                <a:close/>
-                <a:lnTo>
-                  <a:pt x="587629" y="1517015"/>
-                </a:lnTo>
-                <a:close/>
-                <a:lnTo>
-                  <a:pt x="597261" y="1513635"/>
-                </a:lnTo>
-                <a:close/>
-                <a:lnTo>
-                  <a:pt x="606894" y="1510338"/>
-                </a:lnTo>
-                <a:close/>
-                <a:lnTo>
-                  <a:pt x="616527" y="1507118"/>
-                </a:lnTo>
-                <a:close/>
-                <a:lnTo>
-                  <a:pt x="626160" y="1503972"/>
-                </a:lnTo>
-                <a:close/>
-                <a:lnTo>
-                  <a:pt x="635793" y="1500897"/>
-                </a:lnTo>
-                <a:close/>
-                <a:lnTo>
-                  <a:pt x="645427" y="1497887"/>
-                </a:lnTo>
-                <a:close/>
-                <a:lnTo>
-                  <a:pt x="655061" y="1494939"/>
-                </a:lnTo>
-                <a:close/>
-                <a:lnTo>
-                  <a:pt x="664695" y="1492049"/>
-                </a:lnTo>
-                <a:close/>
-                <a:lnTo>
-                  <a:pt x="674329" y="1489212"/>
-                </a:lnTo>
-                <a:close/>
-                <a:lnTo>
-                  <a:pt x="683965" y="1486426"/>
-                </a:lnTo>
-                <a:close/>
-                <a:lnTo>
-                  <a:pt x="693600" y="1483684"/>
-                </a:lnTo>
-                <a:close/>
-                <a:lnTo>
-                  <a:pt x="703236" y="1480984"/>
-                </a:lnTo>
-                <a:close/>
-                <a:lnTo>
-                  <a:pt x="712873" y="1478322"/>
-                </a:lnTo>
-                <a:close/>
-                <a:lnTo>
-                  <a:pt x="722509" y="1475694"/>
-                </a:lnTo>
-                <a:close/>
-                <a:lnTo>
-                  <a:pt x="732145" y="1473095"/>
-                </a:lnTo>
-                <a:close/>
-                <a:lnTo>
-                  <a:pt x="741781" y="1470522"/>
-                </a:lnTo>
-                <a:close/>
-                <a:lnTo>
-                  <a:pt x="751417" y="1467971"/>
-                </a:lnTo>
-                <a:close/>
-                <a:lnTo>
-                  <a:pt x="761051" y="1465439"/>
-                </a:lnTo>
-                <a:close/>
-                <a:lnTo>
-                  <a:pt x="770685" y="1462920"/>
-                </a:lnTo>
-                <a:close/>
-                <a:lnTo>
-                  <a:pt x="780318" y="1460411"/>
-                </a:lnTo>
-                <a:close/>
-                <a:lnTo>
-                  <a:pt x="789949" y="1457909"/>
-                </a:lnTo>
-                <a:close/>
-                <a:lnTo>
-                  <a:pt x="799579" y="1455409"/>
-                </a:lnTo>
-                <a:close/>
-                <a:lnTo>
-                  <a:pt x="809208" y="1452908"/>
-                </a:lnTo>
-                <a:close/>
-                <a:lnTo>
-                  <a:pt x="818835" y="1450401"/>
-                </a:lnTo>
-                <a:close/>
-                <a:lnTo>
-                  <a:pt x="828460" y="1447885"/>
-                </a:lnTo>
-                <a:close/>
-                <a:lnTo>
-                  <a:pt x="838083" y="1445352"/>
-                </a:lnTo>
-                <a:close/>
-                <a:lnTo>
-                  <a:pt x="847705" y="1442795"/>
-                </a:lnTo>
-                <a:close/>
-                <a:lnTo>
-                  <a:pt x="857327" y="1440204"/>
-                </a:lnTo>
-                <a:close/>
-                <a:lnTo>
-                  <a:pt x="866950" y="1437570"/>
-                </a:lnTo>
-                <a:close/>
-                <a:lnTo>
-                  <a:pt x="876573" y="1434886"/>
-                </a:lnTo>
-                <a:close/>
-                <a:lnTo>
-                  <a:pt x="886198" y="1432142"/>
-                </a:lnTo>
-                <a:close/>
-                <a:lnTo>
-                  <a:pt x="895826" y="1429329"/>
-                </a:lnTo>
-                <a:close/>
-                <a:lnTo>
-                  <a:pt x="905456" y="1426438"/>
-                </a:lnTo>
-                <a:close/>
-                <a:lnTo>
-                  <a:pt x="915091" y="1423462"/>
-                </a:lnTo>
-                <a:close/>
-                <a:lnTo>
-                  <a:pt x="924729" y="1420391"/>
-                </a:lnTo>
-                <a:close/>
-                <a:lnTo>
-                  <a:pt x="934373" y="1417216"/>
-                </a:lnTo>
-                <a:close/>
-                <a:lnTo>
-                  <a:pt x="944023" y="1413928"/>
-                </a:lnTo>
-                <a:close/>
-                <a:lnTo>
-                  <a:pt x="953679" y="1410520"/>
-                </a:lnTo>
-                <a:close/>
-                <a:lnTo>
-                  <a:pt x="963342" y="1406982"/>
-                </a:lnTo>
-                <a:close/>
-                <a:lnTo>
-                  <a:pt x="973012" y="1403312"/>
-                </a:lnTo>
-                <a:close/>
-                <a:lnTo>
-                  <a:pt x="982685" y="1399521"/>
-                </a:lnTo>
-                <a:close/>
-                <a:lnTo>
-                  <a:pt x="992361" y="1395618"/>
-                </a:lnTo>
-                <a:close/>
-                <a:lnTo>
-                  <a:pt x="1002036" y="1391614"/>
-                </a:lnTo>
-                <a:close/>
-                <a:lnTo>
-                  <a:pt x="1011707" y="1387520"/>
-                </a:lnTo>
-                <a:close/>
-                <a:lnTo>
-                  <a:pt x="1021373" y="1383345"/>
-                </a:lnTo>
-                <a:close/>
-                <a:lnTo>
-                  <a:pt x="1031030" y="1379101"/>
-                </a:lnTo>
-                <a:close/>
-                <a:lnTo>
-                  <a:pt x="1040676" y="1374798"/>
-                </a:lnTo>
-                <a:close/>
-                <a:lnTo>
-                  <a:pt x="1050309" y="1370445"/>
-                </a:lnTo>
-                <a:close/>
-                <a:lnTo>
-                  <a:pt x="1059927" y="1366055"/>
-                </a:lnTo>
-                <a:close/>
-                <a:lnTo>
-                  <a:pt x="1069525" y="1361636"/>
-                </a:lnTo>
-                <a:close/>
-                <a:lnTo>
-                  <a:pt x="1079103" y="1357200"/>
-                </a:lnTo>
-                <a:close/>
-                <a:lnTo>
-                  <a:pt x="1088658" y="1352757"/>
-                </a:lnTo>
-                <a:close/>
-                <a:lnTo>
-                  <a:pt x="1098186" y="1348318"/>
-                </a:lnTo>
-                <a:close/>
-                <a:lnTo>
-                  <a:pt x="1107689" y="1343886"/>
-                </a:lnTo>
-                <a:close/>
-                <a:lnTo>
-                  <a:pt x="1117174" y="1339453"/>
-                </a:lnTo>
-                <a:close/>
-                <a:lnTo>
-                  <a:pt x="1126650" y="1335002"/>
-                </a:lnTo>
-                <a:close/>
-                <a:lnTo>
-                  <a:pt x="1136127" y="1330522"/>
-                </a:lnTo>
-                <a:close/>
-                <a:lnTo>
-                  <a:pt x="1145614" y="1325997"/>
-                </a:lnTo>
-                <a:close/>
-                <a:lnTo>
-                  <a:pt x="1155121" y="1321413"/>
-                </a:lnTo>
-                <a:close/>
-                <a:lnTo>
-                  <a:pt x="1164657" y="1316757"/>
-                </a:lnTo>
-                <a:close/>
-                <a:lnTo>
-                  <a:pt x="1174231" y="1312015"/>
-                </a:lnTo>
-                <a:close/>
-                <a:lnTo>
-                  <a:pt x="1183852" y="1307173"/>
-                </a:lnTo>
-                <a:close/>
-                <a:lnTo>
-                  <a:pt x="1193531" y="1302216"/>
-                </a:lnTo>
-                <a:close/>
-                <a:lnTo>
-                  <a:pt x="1203276" y="1297131"/>
-                </a:lnTo>
-                <a:close/>
-                <a:lnTo>
-                  <a:pt x="1213097" y="1291904"/>
-                </a:lnTo>
-                <a:close/>
-                <a:lnTo>
-                  <a:pt x="1223003" y="1286521"/>
-                </a:lnTo>
-                <a:close/>
-                <a:lnTo>
-                  <a:pt x="1233003" y="1280968"/>
-                </a:lnTo>
-                <a:close/>
-                <a:lnTo>
-                  <a:pt x="1243103" y="1275234"/>
-                </a:lnTo>
-                <a:close/>
-                <a:lnTo>
-                  <a:pt x="1253278" y="1269328"/>
-                </a:lnTo>
-                <a:close/>
-                <a:lnTo>
-                  <a:pt x="1263493" y="1263268"/>
-                </a:lnTo>
-                <a:close/>
-                <a:lnTo>
-                  <a:pt x="1273713" y="1257070"/>
-                </a:lnTo>
-                <a:close/>
-                <a:lnTo>
-                  <a:pt x="1283904" y="1250751"/>
-                </a:lnTo>
-                <a:close/>
-                <a:lnTo>
-                  <a:pt x="1294030" y="1244328"/>
-                </a:lnTo>
-                <a:close/>
-                <a:lnTo>
-                  <a:pt x="1304057" y="1237819"/>
-                </a:lnTo>
-                <a:close/>
-                <a:lnTo>
-                  <a:pt x="1313949" y="1231239"/>
-                </a:lnTo>
-                <a:close/>
-                <a:lnTo>
-                  <a:pt x="1323671" y="1224607"/>
-                </a:lnTo>
-                <a:close/>
-                <a:lnTo>
-                  <a:pt x="1333189" y="1217938"/>
-                </a:lnTo>
-                <a:close/>
-                <a:lnTo>
-                  <a:pt x="1342468" y="1211250"/>
-                </a:lnTo>
-                <a:close/>
-                <a:lnTo>
-                  <a:pt x="1351472" y="1204559"/>
-                </a:lnTo>
-                <a:close/>
-                <a:lnTo>
-                  <a:pt x="1360166" y="1197883"/>
-                </a:lnTo>
-                <a:close/>
-                <a:lnTo>
-                  <a:pt x="1368517" y="1191239"/>
-                </a:lnTo>
-                <a:close/>
-                <a:lnTo>
-                  <a:pt x="1376491" y="1184643"/>
-                </a:lnTo>
-                <a:close/>
-                <a:lnTo>
-                  <a:pt x="1384094" y="1178097"/>
-                </a:lnTo>
-                <a:close/>
-                <a:lnTo>
-                  <a:pt x="1391363" y="1171596"/>
-                </a:lnTo>
-                <a:close/>
-                <a:lnTo>
-                  <a:pt x="1398332" y="1165134"/>
-                </a:lnTo>
-                <a:close/>
-                <a:lnTo>
-                  <a:pt x="1405036" y="1158704"/>
-                </a:lnTo>
-                <a:close/>
-                <a:lnTo>
-                  <a:pt x="1411512" y="1152300"/>
-                </a:lnTo>
-                <a:close/>
-                <a:lnTo>
-                  <a:pt x="1417794" y="1145917"/>
-                </a:lnTo>
-                <a:close/>
-                <a:lnTo>
-                  <a:pt x="1423918" y="1139547"/>
-                </a:lnTo>
-                <a:close/>
-                <a:lnTo>
-                  <a:pt x="1429920" y="1133184"/>
-                </a:lnTo>
-                <a:close/>
-                <a:lnTo>
-                  <a:pt x="1435834" y="1126823"/>
-                </a:lnTo>
-                <a:close/>
-                <a:lnTo>
-                  <a:pt x="1441697" y="1120457"/>
-                </a:lnTo>
-                <a:close/>
-                <a:lnTo>
-                  <a:pt x="1447544" y="1114080"/>
-                </a:lnTo>
-                <a:close/>
-                <a:lnTo>
-                  <a:pt x="1453411" y="1107686"/>
-                </a:lnTo>
-                <a:close/>
-                <a:lnTo>
-                  <a:pt x="1459332" y="1101268"/>
-                </a:lnTo>
-                <a:close/>
-                <a:lnTo>
-                  <a:pt x="1465342" y="1094820"/>
-                </a:lnTo>
-                <a:close/>
-                <a:lnTo>
-                  <a:pt x="1471459" y="1088342"/>
-                </a:lnTo>
-                <a:close/>
-                <a:lnTo>
-                  <a:pt x="1477672" y="1081842"/>
-                </a:lnTo>
-                <a:close/>
-                <a:lnTo>
-                  <a:pt x="1483968" y="1075327"/>
-                </a:lnTo>
-                <a:close/>
-                <a:lnTo>
-                  <a:pt x="1490337" y="1068805"/>
-                </a:lnTo>
-                <a:close/>
-                <a:lnTo>
-                  <a:pt x="1496766" y="1062284"/>
-                </a:lnTo>
-                <a:close/>
-                <a:lnTo>
-                  <a:pt x="1503244" y="1055772"/>
-                </a:lnTo>
-                <a:close/>
-                <a:lnTo>
-                  <a:pt x="1509758" y="1049278"/>
-                </a:lnTo>
-                <a:close/>
-                <a:lnTo>
-                  <a:pt x="1516298" y="1042809"/>
-                </a:lnTo>
-                <a:close/>
-                <a:lnTo>
-                  <a:pt x="1522850" y="1036373"/>
-                </a:lnTo>
-                <a:close/>
-                <a:lnTo>
-                  <a:pt x="1529404" y="1029977"/>
-                </a:lnTo>
-                <a:close/>
-                <a:lnTo>
-                  <a:pt x="1535948" y="1023631"/>
-                </a:lnTo>
-                <a:close/>
-                <a:lnTo>
-                  <a:pt x="1542469" y="1017342"/>
-                </a:lnTo>
-                <a:close/>
-                <a:lnTo>
-                  <a:pt x="1548956" y="1011118"/>
-                </a:lnTo>
-                <a:close/>
-                <a:lnTo>
-                  <a:pt x="1555397" y="1004966"/>
-                </a:lnTo>
-                <a:close/>
-                <a:lnTo>
-                  <a:pt x="1561786" y="998887"/>
-                </a:lnTo>
-                <a:close/>
-                <a:lnTo>
-                  <a:pt x="1568132" y="992858"/>
-                </a:lnTo>
-                <a:close/>
-                <a:lnTo>
-                  <a:pt x="1574448" y="986854"/>
-                </a:lnTo>
-                <a:close/>
-                <a:lnTo>
-                  <a:pt x="1580745" y="980850"/>
-                </a:lnTo>
-                <a:close/>
-                <a:lnTo>
-                  <a:pt x="1587035" y="974818"/>
-                </a:lnTo>
-                <a:close/>
-                <a:lnTo>
-                  <a:pt x="1593329" y="968735"/>
-                </a:lnTo>
-                <a:close/>
-                <a:lnTo>
-                  <a:pt x="1599640" y="962574"/>
-                </a:lnTo>
-                <a:close/>
-                <a:lnTo>
-                  <a:pt x="1605979" y="956310"/>
-                </a:lnTo>
-                <a:close/>
-                <a:lnTo>
-                  <a:pt x="1612358" y="949917"/>
-                </a:lnTo>
-                <a:close/>
-                <a:lnTo>
-                  <a:pt x="1618790" y="943369"/>
-                </a:lnTo>
-                <a:close/>
-                <a:lnTo>
-                  <a:pt x="1625285" y="936641"/>
-                </a:lnTo>
-                <a:close/>
-                <a:lnTo>
-                  <a:pt x="1631855" y="929708"/>
-                </a:lnTo>
-                <a:close/>
-                <a:lnTo>
-                  <a:pt x="1638514" y="922543"/>
-                </a:lnTo>
-                <a:close/>
-                <a:lnTo>
-                  <a:pt x="1645271" y="915121"/>
-                </a:lnTo>
-                <a:close/>
-                <a:lnTo>
-                  <a:pt x="1652133" y="907426"/>
-                </a:lnTo>
-                <a:close/>
-                <a:lnTo>
-                  <a:pt x="1659076" y="899488"/>
-                </a:lnTo>
-                <a:close/>
-                <a:lnTo>
-                  <a:pt x="1666063" y="891354"/>
-                </a:lnTo>
-                <a:close/>
-                <a:lnTo>
-                  <a:pt x="1673060" y="883072"/>
-                </a:lnTo>
-                <a:close/>
-                <a:lnTo>
-                  <a:pt x="1680030" y="874688"/>
-                </a:lnTo>
-                <a:close/>
-                <a:lnTo>
-                  <a:pt x="1686939" y="866250"/>
-                </a:lnTo>
-                <a:close/>
-                <a:lnTo>
-                  <a:pt x="1693750" y="857804"/>
-                </a:lnTo>
-                <a:close/>
-                <a:lnTo>
-                  <a:pt x="1700429" y="849397"/>
-                </a:lnTo>
-                <a:close/>
-                <a:lnTo>
-                  <a:pt x="1706939" y="841077"/>
-                </a:lnTo>
-                <a:close/>
-                <a:lnTo>
-                  <a:pt x="1713246" y="832890"/>
-                </a:lnTo>
-                <a:close/>
-                <a:lnTo>
-                  <a:pt x="1719314" y="824884"/>
-                </a:lnTo>
-                <a:close/>
-                <a:lnTo>
-                  <a:pt x="1725108" y="817104"/>
-                </a:lnTo>
-                <a:close/>
-                <a:lnTo>
-                  <a:pt x="1730592" y="809599"/>
-                </a:lnTo>
-                <a:close/>
-                <a:lnTo>
-                  <a:pt x="1735730" y="802415"/>
-                </a:lnTo>
-                <a:close/>
-                <a:lnTo>
-                  <a:pt x="1740491" y="795596"/>
-                </a:lnTo>
-                <a:close/>
-                <a:lnTo>
-                  <a:pt x="1744883" y="789147"/>
-                </a:lnTo>
-                <a:close/>
-                <a:lnTo>
-                  <a:pt x="1748941" y="783050"/>
-                </a:lnTo>
-                <a:close/>
-                <a:lnTo>
-                  <a:pt x="1752699" y="777283"/>
-                </a:lnTo>
-                <a:close/>
-                <a:lnTo>
-                  <a:pt x="1756193" y="771828"/>
-                </a:lnTo>
-                <a:close/>
-                <a:lnTo>
-                  <a:pt x="1759458" y="766665"/>
-                </a:lnTo>
-                <a:close/>
-                <a:lnTo>
-                  <a:pt x="1762528" y="761773"/>
-                </a:lnTo>
-                <a:close/>
-                <a:lnTo>
-                  <a:pt x="1765438" y="757134"/>
-                </a:lnTo>
-                <a:close/>
-                <a:lnTo>
-                  <a:pt x="1768224" y="752728"/>
-                </a:lnTo>
-                <a:close/>
-                <a:lnTo>
-                  <a:pt x="1770920" y="748534"/>
-                </a:lnTo>
-                <a:close/>
-                <a:lnTo>
-                  <a:pt x="1773562" y="744533"/>
-                </a:lnTo>
-                <a:close/>
-                <a:lnTo>
-                  <a:pt x="1776184" y="740705"/>
-                </a:lnTo>
-                <a:close/>
-                <a:lnTo>
-                  <a:pt x="1778821" y="737031"/>
-                </a:lnTo>
-                <a:close/>
-                <a:lnTo>
-                  <a:pt x="1781508" y="733491"/>
-                </a:lnTo>
-                <a:close/>
-                <a:lnTo>
-                  <a:pt x="1784280" y="730064"/>
-                </a:lnTo>
-                <a:close/>
-                <a:lnTo>
-                  <a:pt x="1787152" y="726734"/>
-                </a:lnTo>
-                <a:close/>
-                <a:lnTo>
-                  <a:pt x="1790116" y="723485"/>
-                </a:lnTo>
-                <a:close/>
-                <a:lnTo>
-                  <a:pt x="1793162" y="720300"/>
-                </a:lnTo>
-                <a:close/>
-                <a:lnTo>
-                  <a:pt x="1796282" y="717165"/>
-                </a:lnTo>
-                <a:close/>
-                <a:lnTo>
-                  <a:pt x="1799465" y="714064"/>
-                </a:lnTo>
-                <a:close/>
-                <a:lnTo>
-                  <a:pt x="1802702" y="710981"/>
-                </a:lnTo>
-                <a:close/>
-                <a:lnTo>
-                  <a:pt x="1805984" y="707902"/>
-                </a:lnTo>
-                <a:close/>
-                <a:lnTo>
-                  <a:pt x="1809302" y="704810"/>
-                </a:lnTo>
-                <a:close/>
-                <a:lnTo>
-                  <a:pt x="1812647" y="701690"/>
-                </a:lnTo>
-                <a:close/>
-                <a:lnTo>
-                  <a:pt x="1816008" y="698526"/>
-                </a:lnTo>
-                <a:close/>
-                <a:lnTo>
-                  <a:pt x="1819376" y="695303"/>
-                </a:lnTo>
-                <a:close/>
-                <a:lnTo>
-                  <a:pt x="1822743" y="692006"/>
-                </a:lnTo>
-                <a:close/>
-                <a:lnTo>
-                  <a:pt x="1826098" y="688619"/>
-                </a:lnTo>
-                <a:close/>
-                <a:lnTo>
-                  <a:pt x="1829433" y="685126"/>
-                </a:lnTo>
-                <a:close/>
-                <a:lnTo>
-                  <a:pt x="1832741" y="681512"/>
-                </a:lnTo>
-                <a:close/>
-                <a:lnTo>
-                  <a:pt x="1836024" y="677765"/>
-                </a:lnTo>
-                <a:close/>
-                <a:lnTo>
-                  <a:pt x="1839285" y="673870"/>
-                </a:lnTo>
-                <a:close/>
-                <a:lnTo>
-                  <a:pt x="1842525" y="669815"/>
-                </a:lnTo>
-                <a:close/>
-                <a:lnTo>
-                  <a:pt x="1845747" y="665587"/>
-                </a:lnTo>
-                <a:close/>
-                <a:lnTo>
-                  <a:pt x="1848955" y="661171"/>
-                </a:lnTo>
-                <a:close/>
-                <a:lnTo>
-                  <a:pt x="1852149" y="656556"/>
-                </a:lnTo>
-                <a:close/>
-                <a:lnTo>
-                  <a:pt x="1855334" y="651727"/>
-                </a:lnTo>
-                <a:close/>
-                <a:lnTo>
-                  <a:pt x="1858511" y="646671"/>
-                </a:lnTo>
-                <a:close/>
-                <a:lnTo>
-                  <a:pt x="1861682" y="641376"/>
-                </a:lnTo>
-                <a:close/>
-                <a:lnTo>
-                  <a:pt x="1864852" y="635828"/>
-                </a:lnTo>
-                <a:close/>
-                <a:lnTo>
-                  <a:pt x="1868021" y="630013"/>
-                </a:lnTo>
-                <a:close/>
-                <a:lnTo>
-                  <a:pt x="1871192" y="623919"/>
-                </a:lnTo>
-                <a:close/>
-                <a:lnTo>
-                  <a:pt x="1874369" y="617532"/>
-                </a:lnTo>
-                <a:close/>
-                <a:lnTo>
-                  <a:pt x="1877552" y="610844"/>
-                </a:lnTo>
-                <a:close/>
-                <a:lnTo>
-                  <a:pt x="1880742" y="603869"/>
-                </a:lnTo>
-                <a:close/>
-                <a:lnTo>
-                  <a:pt x="1883939" y="596628"/>
-                </a:lnTo>
-                <a:close/>
-                <a:lnTo>
-                  <a:pt x="1887141" y="589143"/>
-                </a:lnTo>
-                <a:close/>
-                <a:lnTo>
-                  <a:pt x="1890348" y="581434"/>
-                </a:lnTo>
-                <a:close/>
-                <a:lnTo>
-                  <a:pt x="1893559" y="573522"/>
-                </a:lnTo>
-                <a:close/>
-                <a:lnTo>
-                  <a:pt x="1896774" y="565427"/>
-                </a:lnTo>
-                <a:close/>
-                <a:lnTo>
-                  <a:pt x="1899991" y="557172"/>
-                </a:lnTo>
-                <a:close/>
-                <a:lnTo>
-                  <a:pt x="1903211" y="548777"/>
-                </a:lnTo>
-                <a:close/>
-                <a:lnTo>
-                  <a:pt x="1906433" y="540263"/>
-                </a:lnTo>
-                <a:close/>
-                <a:lnTo>
-                  <a:pt x="1909655" y="531650"/>
-                </a:lnTo>
-                <a:close/>
-                <a:lnTo>
-                  <a:pt x="1912877" y="522960"/>
-                </a:lnTo>
-                <a:close/>
-                <a:lnTo>
-                  <a:pt x="1916099" y="514214"/>
-                </a:lnTo>
-                <a:close/>
-                <a:lnTo>
-                  <a:pt x="1919320" y="505433"/>
-                </a:lnTo>
-                <a:close/>
-                <a:lnTo>
-                  <a:pt x="1922539" y="496634"/>
-                </a:lnTo>
-                <a:close/>
-                <a:lnTo>
-                  <a:pt x="1925756" y="487810"/>
-                </a:lnTo>
-                <a:close/>
-                <a:lnTo>
-                  <a:pt x="1928972" y="478939"/>
-                </a:lnTo>
-                <a:close/>
-                <a:lnTo>
-                  <a:pt x="1932186" y="469996"/>
-                </a:lnTo>
-                <a:close/>
-                <a:lnTo>
-                  <a:pt x="1935398" y="460960"/>
-                </a:lnTo>
-                <a:close/>
-                <a:lnTo>
-                  <a:pt x="1938610" y="451806"/>
-                </a:lnTo>
-                <a:close/>
-                <a:lnTo>
-                  <a:pt x="1941820" y="442513"/>
-                </a:lnTo>
-                <a:close/>
-                <a:lnTo>
-                  <a:pt x="1945029" y="433057"/>
-                </a:lnTo>
-                <a:close/>
-                <a:lnTo>
-                  <a:pt x="1948238" y="423414"/>
-                </a:lnTo>
-                <a:close/>
-                <a:lnTo>
-                  <a:pt x="1951447" y="413563"/>
-                </a:lnTo>
-                <a:close/>
-                <a:lnTo>
-                  <a:pt x="1954655" y="403480"/>
-                </a:lnTo>
-                <a:close/>
-                <a:lnTo>
-                  <a:pt x="1957863" y="393141"/>
-                </a:lnTo>
-                <a:close/>
-                <a:lnTo>
-                  <a:pt x="1961071" y="382524"/>
-                </a:lnTo>
-                <a:close/>
-                <a:lnTo>
-                  <a:pt x="1964279" y="371607"/>
-                </a:lnTo>
-                <a:close/>
-                <a:lnTo>
-                  <a:pt x="1967488" y="360366"/>
-                </a:lnTo>
-                <a:close/>
-                <a:lnTo>
-                  <a:pt x="1970697" y="348801"/>
-                </a:lnTo>
-                <a:close/>
-                <a:lnTo>
-                  <a:pt x="1973907" y="336935"/>
-                </a:lnTo>
-                <a:close/>
-                <a:lnTo>
-                  <a:pt x="1977117" y="324791"/>
-                </a:lnTo>
-                <a:close/>
-                <a:lnTo>
-                  <a:pt x="1980327" y="312393"/>
-                </a:lnTo>
-                <a:close/>
-                <a:lnTo>
-                  <a:pt x="1983538" y="299764"/>
-                </a:lnTo>
-                <a:close/>
-                <a:lnTo>
-                  <a:pt x="1986749" y="286929"/>
-                </a:lnTo>
-                <a:close/>
-                <a:lnTo>
-                  <a:pt x="1989961" y="273910"/>
-                </a:lnTo>
-                <a:close/>
-                <a:lnTo>
-                  <a:pt x="1993172" y="260732"/>
-                </a:lnTo>
-                <a:close/>
-                <a:lnTo>
-                  <a:pt x="1996384" y="247418"/>
-                </a:lnTo>
-                <a:close/>
-                <a:lnTo>
-                  <a:pt x="1999596" y="233991"/>
-                </a:lnTo>
-                <a:close/>
-                <a:lnTo>
-                  <a:pt x="2002808" y="220476"/>
-                </a:lnTo>
-                <a:close/>
-                <a:lnTo>
-                  <a:pt x="2006020" y="206895"/>
-                </a:lnTo>
-                <a:close/>
-                <a:lnTo>
-                  <a:pt x="2009233" y="193272"/>
-                </a:lnTo>
-                <a:close/>
-                <a:lnTo>
-                  <a:pt x="2012445" y="179632"/>
-                </a:lnTo>
-                <a:close/>
-                <a:lnTo>
-                  <a:pt x="2015657" y="165997"/>
-                </a:lnTo>
-                <a:close/>
-                <a:lnTo>
-                  <a:pt x="2018869" y="152392"/>
-                </a:lnTo>
-                <a:close/>
-                <a:lnTo>
-                  <a:pt x="2022082" y="138839"/>
-                </a:lnTo>
-                <a:close/>
-                <a:lnTo>
-                  <a:pt x="2025294" y="125363"/>
-                </a:lnTo>
-                <a:close/>
-                <a:lnTo>
-                  <a:pt x="2028505" y="111987"/>
-                </a:lnTo>
-                <a:close/>
-                <a:lnTo>
-                  <a:pt x="2031717" y="98734"/>
-                </a:lnTo>
-                <a:close/>
-                <a:lnTo>
-                  <a:pt x="2034929" y="85629"/>
-                </a:lnTo>
-                <a:close/>
-                <a:lnTo>
-                  <a:pt x="2038140" y="72695"/>
-                </a:lnTo>
-                <a:close/>
-                <a:lnTo>
-                  <a:pt x="2041351" y="59955"/>
-                </a:lnTo>
-                <a:close/>
-                <a:lnTo>
-                  <a:pt x="2044561" y="47433"/>
-                </a:lnTo>
-                <a:close/>
-                <a:lnTo>
-                  <a:pt x="2047772" y="35153"/>
-                </a:lnTo>
-                <a:close/>
-                <a:lnTo>
-                  <a:pt x="2050982" y="23139"/>
-                </a:lnTo>
-                <a:close/>
-                <a:lnTo>
-                  <a:pt x="2054191" y="11413"/>
-                </a:lnTo>
-                <a:close/>
-                <a:lnTo>
-                  <a:pt x="2057400" y="0"/>
+                  <a:pt x="6755" y="2799101"/>
+                </a:lnTo>
+                <a:close/>
+                <a:lnTo>
+                  <a:pt x="13510" y="2791238"/>
+                </a:lnTo>
+                <a:close/>
+                <a:lnTo>
+                  <a:pt x="20265" y="2783599"/>
+                </a:lnTo>
+                <a:close/>
+                <a:lnTo>
+                  <a:pt x="27020" y="2776170"/>
+                </a:lnTo>
+                <a:close/>
+                <a:lnTo>
+                  <a:pt x="33775" y="2768934"/>
+                </a:lnTo>
+                <a:close/>
+                <a:lnTo>
+                  <a:pt x="40530" y="2761872"/>
+                </a:lnTo>
+                <a:close/>
+                <a:lnTo>
+                  <a:pt x="47285" y="2754969"/>
+                </a:lnTo>
+                <a:close/>
+                <a:lnTo>
+                  <a:pt x="54040" y="2748208"/>
+                </a:lnTo>
+                <a:close/>
+                <a:lnTo>
+                  <a:pt x="60795" y="2741572"/>
+                </a:lnTo>
+                <a:close/>
+                <a:lnTo>
+                  <a:pt x="67550" y="2735043"/>
+                </a:lnTo>
+                <a:close/>
+                <a:lnTo>
+                  <a:pt x="74305" y="2728606"/>
+                </a:lnTo>
+                <a:close/>
+                <a:lnTo>
+                  <a:pt x="81059" y="2722244"/>
+                </a:lnTo>
+                <a:close/>
+                <a:lnTo>
+                  <a:pt x="87814" y="2715939"/>
+                </a:lnTo>
+                <a:close/>
+                <a:lnTo>
+                  <a:pt x="94569" y="2709675"/>
+                </a:lnTo>
+                <a:close/>
+                <a:lnTo>
+                  <a:pt x="101324" y="2703435"/>
+                </a:lnTo>
+                <a:close/>
+                <a:lnTo>
+                  <a:pt x="108079" y="2697202"/>
+                </a:lnTo>
+                <a:close/>
+                <a:lnTo>
+                  <a:pt x="114834" y="2690960"/>
+                </a:lnTo>
+                <a:close/>
+                <a:lnTo>
+                  <a:pt x="121589" y="2684691"/>
+                </a:lnTo>
+                <a:close/>
+                <a:lnTo>
+                  <a:pt x="128344" y="2678379"/>
+                </a:lnTo>
+                <a:close/>
+                <a:lnTo>
+                  <a:pt x="135099" y="2672007"/>
+                </a:lnTo>
+                <a:close/>
+                <a:lnTo>
+                  <a:pt x="141854" y="2665560"/>
+                </a:lnTo>
+                <a:close/>
+                <a:lnTo>
+                  <a:pt x="148609" y="2659054"/>
+                </a:lnTo>
+                <a:close/>
+                <a:lnTo>
+                  <a:pt x="155364" y="2652519"/>
+                </a:lnTo>
+                <a:close/>
+                <a:lnTo>
+                  <a:pt x="162119" y="2645988"/>
+                </a:lnTo>
+                <a:close/>
+                <a:lnTo>
+                  <a:pt x="168874" y="2639491"/>
+                </a:lnTo>
+                <a:close/>
+                <a:lnTo>
+                  <a:pt x="175629" y="2633062"/>
+                </a:lnTo>
+                <a:close/>
+                <a:lnTo>
+                  <a:pt x="182384" y="2626730"/>
+                </a:lnTo>
+                <a:close/>
+                <a:lnTo>
+                  <a:pt x="189139" y="2620529"/>
+                </a:lnTo>
+                <a:close/>
+                <a:lnTo>
+                  <a:pt x="195894" y="2614489"/>
+                </a:lnTo>
+                <a:close/>
+                <a:lnTo>
+                  <a:pt x="202649" y="2608642"/>
+                </a:lnTo>
+                <a:close/>
+                <a:lnTo>
+                  <a:pt x="209404" y="2603019"/>
+                </a:lnTo>
+                <a:close/>
+                <a:lnTo>
+                  <a:pt x="216159" y="2597617"/>
+                </a:lnTo>
+                <a:close/>
+                <a:lnTo>
+                  <a:pt x="222914" y="2592407"/>
+                </a:lnTo>
+                <a:close/>
+                <a:lnTo>
+                  <a:pt x="229669" y="2587357"/>
+                </a:lnTo>
+                <a:close/>
+                <a:lnTo>
+                  <a:pt x="236424" y="2582435"/>
+                </a:lnTo>
+                <a:close/>
+                <a:lnTo>
+                  <a:pt x="243178" y="2577612"/>
+                </a:lnTo>
+                <a:close/>
+                <a:lnTo>
+                  <a:pt x="249933" y="2572855"/>
+                </a:lnTo>
+                <a:close/>
+                <a:lnTo>
+                  <a:pt x="256688" y="2568133"/>
+                </a:lnTo>
+                <a:close/>
+                <a:lnTo>
+                  <a:pt x="263443" y="2563415"/>
+                </a:lnTo>
+                <a:close/>
+                <a:lnTo>
+                  <a:pt x="270198" y="2558670"/>
+                </a:lnTo>
+                <a:close/>
+                <a:lnTo>
+                  <a:pt x="276953" y="2553867"/>
+                </a:lnTo>
+                <a:close/>
+                <a:lnTo>
+                  <a:pt x="283708" y="2548994"/>
+                </a:lnTo>
+                <a:close/>
+                <a:lnTo>
+                  <a:pt x="290463" y="2544064"/>
+                </a:lnTo>
+                <a:close/>
+                <a:lnTo>
+                  <a:pt x="297218" y="2539091"/>
+                </a:lnTo>
+                <a:close/>
+                <a:lnTo>
+                  <a:pt x="303973" y="2534090"/>
+                </a:lnTo>
+                <a:close/>
+                <a:lnTo>
+                  <a:pt x="310728" y="2529076"/>
+                </a:lnTo>
+                <a:close/>
+                <a:lnTo>
+                  <a:pt x="317483" y="2524062"/>
+                </a:lnTo>
+                <a:close/>
+                <a:lnTo>
+                  <a:pt x="324238" y="2519064"/>
+                </a:lnTo>
+                <a:close/>
+                <a:lnTo>
+                  <a:pt x="330993" y="2514096"/>
+                </a:lnTo>
+                <a:close/>
+                <a:lnTo>
+                  <a:pt x="337748" y="2509172"/>
+                </a:lnTo>
+                <a:close/>
+                <a:lnTo>
+                  <a:pt x="344503" y="2504308"/>
+                </a:lnTo>
+                <a:close/>
+                <a:lnTo>
+                  <a:pt x="351258" y="2499512"/>
+                </a:lnTo>
+                <a:close/>
+                <a:lnTo>
+                  <a:pt x="358013" y="2494785"/>
+                </a:lnTo>
+                <a:close/>
+                <a:lnTo>
+                  <a:pt x="364768" y="2490128"/>
+                </a:lnTo>
+                <a:close/>
+                <a:lnTo>
+                  <a:pt x="371523" y="2485537"/>
+                </a:lnTo>
+                <a:close/>
+                <a:lnTo>
+                  <a:pt x="378278" y="2481015"/>
+                </a:lnTo>
+                <a:close/>
+                <a:lnTo>
+                  <a:pt x="385033" y="2476558"/>
+                </a:lnTo>
+                <a:close/>
+                <a:lnTo>
+                  <a:pt x="391788" y="2472167"/>
+                </a:lnTo>
+                <a:close/>
+                <a:lnTo>
+                  <a:pt x="398543" y="2467842"/>
+                </a:lnTo>
+                <a:close/>
+                <a:lnTo>
+                  <a:pt x="405297" y="2463580"/>
+                </a:lnTo>
+                <a:close/>
+                <a:lnTo>
+                  <a:pt x="412052" y="2459383"/>
+                </a:lnTo>
+                <a:close/>
+                <a:lnTo>
+                  <a:pt x="418807" y="2455246"/>
+                </a:lnTo>
+                <a:close/>
+                <a:lnTo>
+                  <a:pt x="425562" y="2451159"/>
+                </a:lnTo>
+                <a:close/>
+                <a:lnTo>
+                  <a:pt x="432317" y="2447111"/>
+                </a:lnTo>
+                <a:close/>
+                <a:lnTo>
+                  <a:pt x="439072" y="2443089"/>
+                </a:lnTo>
+                <a:close/>
+                <a:lnTo>
+                  <a:pt x="445827" y="2439083"/>
+                </a:lnTo>
+                <a:close/>
+                <a:lnTo>
+                  <a:pt x="452582" y="2435080"/>
+                </a:lnTo>
+                <a:close/>
+                <a:lnTo>
+                  <a:pt x="459337" y="2431069"/>
+                </a:lnTo>
+                <a:close/>
+                <a:lnTo>
+                  <a:pt x="466092" y="2427038"/>
+                </a:lnTo>
+                <a:close/>
+                <a:lnTo>
+                  <a:pt x="472847" y="2422975"/>
+                </a:lnTo>
+                <a:close/>
+                <a:lnTo>
+                  <a:pt x="479602" y="2418868"/>
+                </a:lnTo>
+                <a:close/>
+                <a:lnTo>
+                  <a:pt x="486357" y="2414711"/>
+                </a:lnTo>
+                <a:close/>
+                <a:lnTo>
+                  <a:pt x="493112" y="2410517"/>
+                </a:lnTo>
+                <a:close/>
+                <a:lnTo>
+                  <a:pt x="499867" y="2406309"/>
+                </a:lnTo>
+                <a:close/>
+                <a:lnTo>
+                  <a:pt x="506622" y="2402108"/>
+                </a:lnTo>
+                <a:close/>
+                <a:lnTo>
+                  <a:pt x="513377" y="2397934"/>
+                </a:lnTo>
+                <a:close/>
+                <a:lnTo>
+                  <a:pt x="520132" y="2393811"/>
+                </a:lnTo>
+                <a:close/>
+                <a:lnTo>
+                  <a:pt x="526887" y="2389757"/>
+                </a:lnTo>
+                <a:close/>
+                <a:lnTo>
+                  <a:pt x="533642" y="2385797"/>
+                </a:lnTo>
+                <a:close/>
+                <a:lnTo>
+                  <a:pt x="540397" y="2381950"/>
+                </a:lnTo>
+                <a:close/>
+                <a:lnTo>
+                  <a:pt x="547152" y="2378238"/>
+                </a:lnTo>
+                <a:close/>
+                <a:lnTo>
+                  <a:pt x="553907" y="2374679"/>
+                </a:lnTo>
+                <a:close/>
+                <a:lnTo>
+                  <a:pt x="560662" y="2371264"/>
+                </a:lnTo>
+                <a:close/>
+                <a:lnTo>
+                  <a:pt x="567416" y="2367973"/>
+                </a:lnTo>
+                <a:close/>
+                <a:lnTo>
+                  <a:pt x="574171" y="2364783"/>
+                </a:lnTo>
+                <a:close/>
+                <a:lnTo>
+                  <a:pt x="580926" y="2361673"/>
+                </a:lnTo>
+                <a:close/>
+                <a:lnTo>
+                  <a:pt x="587681" y="2358622"/>
+                </a:lnTo>
+                <a:close/>
+                <a:lnTo>
+                  <a:pt x="594436" y="2355608"/>
+                </a:lnTo>
+                <a:close/>
+                <a:lnTo>
+                  <a:pt x="601191" y="2352611"/>
+                </a:lnTo>
+                <a:close/>
+                <a:lnTo>
+                  <a:pt x="607946" y="2349607"/>
+                </a:lnTo>
+                <a:close/>
+                <a:lnTo>
+                  <a:pt x="614701" y="2346577"/>
+                </a:lnTo>
+                <a:close/>
+                <a:lnTo>
+                  <a:pt x="621456" y="2343500"/>
+                </a:lnTo>
+                <a:close/>
+                <a:lnTo>
+                  <a:pt x="628211" y="2340374"/>
+                </a:lnTo>
+                <a:close/>
+                <a:lnTo>
+                  <a:pt x="634966" y="2337211"/>
+                </a:lnTo>
+                <a:close/>
+                <a:lnTo>
+                  <a:pt x="641721" y="2334023"/>
+                </a:lnTo>
+                <a:close/>
+                <a:lnTo>
+                  <a:pt x="648476" y="2330822"/>
+                </a:lnTo>
+                <a:close/>
+                <a:lnTo>
+                  <a:pt x="655231" y="2327619"/>
+                </a:lnTo>
+                <a:close/>
+                <a:lnTo>
+                  <a:pt x="661986" y="2324427"/>
+                </a:lnTo>
+                <a:close/>
+                <a:lnTo>
+                  <a:pt x="668741" y="2321257"/>
+                </a:lnTo>
+                <a:close/>
+                <a:lnTo>
+                  <a:pt x="675496" y="2318122"/>
+                </a:lnTo>
+                <a:close/>
+                <a:lnTo>
+                  <a:pt x="682251" y="2315033"/>
+                </a:lnTo>
+                <a:close/>
+                <a:lnTo>
+                  <a:pt x="689006" y="2312001"/>
+                </a:lnTo>
+                <a:close/>
+                <a:lnTo>
+                  <a:pt x="695761" y="2309034"/>
+                </a:lnTo>
+                <a:close/>
+                <a:lnTo>
+                  <a:pt x="702516" y="2306132"/>
+                </a:lnTo>
+                <a:close/>
+                <a:lnTo>
+                  <a:pt x="709271" y="2303294"/>
+                </a:lnTo>
+                <a:close/>
+                <a:lnTo>
+                  <a:pt x="716026" y="2300520"/>
+                </a:lnTo>
+                <a:close/>
+                <a:lnTo>
+                  <a:pt x="722781" y="2297811"/>
+                </a:lnTo>
+                <a:close/>
+                <a:lnTo>
+                  <a:pt x="729535" y="2295167"/>
+                </a:lnTo>
+                <a:close/>
+                <a:lnTo>
+                  <a:pt x="736290" y="2292588"/>
+                </a:lnTo>
+                <a:close/>
+                <a:lnTo>
+                  <a:pt x="743045" y="2290073"/>
+                </a:lnTo>
+                <a:close/>
+                <a:lnTo>
+                  <a:pt x="749800" y="2287624"/>
+                </a:lnTo>
+                <a:close/>
+                <a:lnTo>
+                  <a:pt x="756555" y="2285239"/>
+                </a:lnTo>
+                <a:close/>
+                <a:lnTo>
+                  <a:pt x="763310" y="2282915"/>
+                </a:lnTo>
+                <a:close/>
+                <a:lnTo>
+                  <a:pt x="770065" y="2280640"/>
+                </a:lnTo>
+                <a:close/>
+                <a:lnTo>
+                  <a:pt x="776820" y="2278401"/>
+                </a:lnTo>
+                <a:close/>
+                <a:lnTo>
+                  <a:pt x="783575" y="2276188"/>
+                </a:lnTo>
+                <a:close/>
+                <a:lnTo>
+                  <a:pt x="790330" y="2273986"/>
+                </a:lnTo>
+                <a:close/>
+                <a:lnTo>
+                  <a:pt x="797085" y="2271785"/>
+                </a:lnTo>
+                <a:close/>
+                <a:lnTo>
+                  <a:pt x="803840" y="2269573"/>
+                </a:lnTo>
+                <a:close/>
+                <a:lnTo>
+                  <a:pt x="810595" y="2267336"/>
+                </a:lnTo>
+                <a:close/>
+                <a:lnTo>
+                  <a:pt x="817350" y="2265064"/>
+                </a:lnTo>
+                <a:close/>
+                <a:lnTo>
+                  <a:pt x="824105" y="2262743"/>
+                </a:lnTo>
+                <a:close/>
+                <a:lnTo>
+                  <a:pt x="830860" y="2260371"/>
+                </a:lnTo>
+                <a:close/>
+                <a:lnTo>
+                  <a:pt x="837615" y="2257966"/>
+                </a:lnTo>
+                <a:close/>
+                <a:lnTo>
+                  <a:pt x="844370" y="2255552"/>
+                </a:lnTo>
+                <a:close/>
+                <a:lnTo>
+                  <a:pt x="851125" y="2253150"/>
+                </a:lnTo>
+                <a:close/>
+                <a:lnTo>
+                  <a:pt x="857880" y="2250783"/>
+                </a:lnTo>
+                <a:close/>
+                <a:lnTo>
+                  <a:pt x="864635" y="2248473"/>
+                </a:lnTo>
+                <a:close/>
+                <a:lnTo>
+                  <a:pt x="871390" y="2246243"/>
+                </a:lnTo>
+                <a:close/>
+                <a:lnTo>
+                  <a:pt x="878145" y="2244114"/>
+                </a:lnTo>
+                <a:close/>
+                <a:lnTo>
+                  <a:pt x="884900" y="2242109"/>
+                </a:lnTo>
+                <a:close/>
+                <a:lnTo>
+                  <a:pt x="891654" y="2240250"/>
+                </a:lnTo>
+                <a:close/>
+                <a:lnTo>
+                  <a:pt x="898409" y="2238551"/>
+                </a:lnTo>
+                <a:close/>
+                <a:lnTo>
+                  <a:pt x="905164" y="2236996"/>
+                </a:lnTo>
+                <a:close/>
+                <a:lnTo>
+                  <a:pt x="911919" y="2235559"/>
+                </a:lnTo>
+                <a:close/>
+                <a:lnTo>
+                  <a:pt x="918674" y="2234216"/>
+                </a:lnTo>
+                <a:close/>
+                <a:lnTo>
+                  <a:pt x="925429" y="2232942"/>
+                </a:lnTo>
+                <a:close/>
+                <a:lnTo>
+                  <a:pt x="932184" y="2231713"/>
+                </a:lnTo>
+                <a:close/>
+                <a:lnTo>
+                  <a:pt x="938939" y="2230503"/>
+                </a:lnTo>
+                <a:close/>
+                <a:lnTo>
+                  <a:pt x="945694" y="2229289"/>
+                </a:lnTo>
+                <a:close/>
+                <a:lnTo>
+                  <a:pt x="952449" y="2228044"/>
+                </a:lnTo>
+                <a:close/>
+                <a:lnTo>
+                  <a:pt x="959204" y="2226746"/>
+                </a:lnTo>
+                <a:close/>
+                <a:lnTo>
+                  <a:pt x="965959" y="2225373"/>
+                </a:lnTo>
+                <a:close/>
+                <a:lnTo>
+                  <a:pt x="972714" y="2223939"/>
+                </a:lnTo>
+                <a:close/>
+                <a:lnTo>
+                  <a:pt x="979469" y="2222468"/>
+                </a:lnTo>
+                <a:close/>
+                <a:lnTo>
+                  <a:pt x="986224" y="2220983"/>
+                </a:lnTo>
+                <a:close/>
+                <a:lnTo>
+                  <a:pt x="992979" y="2219508"/>
+                </a:lnTo>
+                <a:close/>
+                <a:lnTo>
+                  <a:pt x="999734" y="2218067"/>
+                </a:lnTo>
+                <a:close/>
+                <a:lnTo>
+                  <a:pt x="1006489" y="2216685"/>
+                </a:lnTo>
+                <a:close/>
+                <a:lnTo>
+                  <a:pt x="1013244" y="2215385"/>
+                </a:lnTo>
+                <a:close/>
+                <a:lnTo>
+                  <a:pt x="1019999" y="2214191"/>
+                </a:lnTo>
+                <a:close/>
+                <a:lnTo>
+                  <a:pt x="1026754" y="2213127"/>
+                </a:lnTo>
+                <a:close/>
+                <a:lnTo>
+                  <a:pt x="1033509" y="2212215"/>
+                </a:lnTo>
+                <a:close/>
+                <a:lnTo>
+                  <a:pt x="1040264" y="2211450"/>
+                </a:lnTo>
+                <a:close/>
+                <a:lnTo>
+                  <a:pt x="1047019" y="2210814"/>
+                </a:lnTo>
+                <a:close/>
+                <a:lnTo>
+                  <a:pt x="1053773" y="2210289"/>
+                </a:lnTo>
+                <a:close/>
+                <a:lnTo>
+                  <a:pt x="1060528" y="2209854"/>
+                </a:lnTo>
+                <a:close/>
+                <a:lnTo>
+                  <a:pt x="1067283" y="2209492"/>
+                </a:lnTo>
+                <a:close/>
+                <a:lnTo>
+                  <a:pt x="1074038" y="2209185"/>
+                </a:lnTo>
+                <a:close/>
+                <a:lnTo>
+                  <a:pt x="1080793" y="2208912"/>
+                </a:lnTo>
+                <a:close/>
+                <a:lnTo>
+                  <a:pt x="1087548" y="2208655"/>
+                </a:lnTo>
+                <a:close/>
+                <a:lnTo>
+                  <a:pt x="1094303" y="2208396"/>
+                </a:lnTo>
+                <a:close/>
+                <a:lnTo>
+                  <a:pt x="1101058" y="2208116"/>
+                </a:lnTo>
+                <a:close/>
+                <a:lnTo>
+                  <a:pt x="1107813" y="2207806"/>
+                </a:lnTo>
+                <a:close/>
+                <a:lnTo>
+                  <a:pt x="1114568" y="2207464"/>
+                </a:lnTo>
+                <a:close/>
+                <a:lnTo>
+                  <a:pt x="1121323" y="2207090"/>
+                </a:lnTo>
+                <a:close/>
+                <a:lnTo>
+                  <a:pt x="1128078" y="2206681"/>
+                </a:lnTo>
+                <a:close/>
+                <a:lnTo>
+                  <a:pt x="1134833" y="2206237"/>
+                </a:lnTo>
+                <a:close/>
+                <a:lnTo>
+                  <a:pt x="1141588" y="2205756"/>
+                </a:lnTo>
+                <a:close/>
+                <a:lnTo>
+                  <a:pt x="1148343" y="2205237"/>
+                </a:lnTo>
+                <a:close/>
+                <a:lnTo>
+                  <a:pt x="1155098" y="2204679"/>
+                </a:lnTo>
+                <a:close/>
+                <a:lnTo>
+                  <a:pt x="1161853" y="2204079"/>
+                </a:lnTo>
+                <a:close/>
+                <a:lnTo>
+                  <a:pt x="1168608" y="2203438"/>
+                </a:lnTo>
+                <a:close/>
+                <a:lnTo>
+                  <a:pt x="1175363" y="2202753"/>
+                </a:lnTo>
+                <a:close/>
+                <a:lnTo>
+                  <a:pt x="1182118" y="2202022"/>
+                </a:lnTo>
+                <a:close/>
+                <a:lnTo>
+                  <a:pt x="1188873" y="2201243"/>
+                </a:lnTo>
+                <a:close/>
+                <a:lnTo>
+                  <a:pt x="1195628" y="2200413"/>
+                </a:lnTo>
+                <a:close/>
+                <a:lnTo>
+                  <a:pt x="1202383" y="2199531"/>
+                </a:lnTo>
+                <a:close/>
+                <a:lnTo>
+                  <a:pt x="1209138" y="2198594"/>
+                </a:lnTo>
+                <a:close/>
+                <a:lnTo>
+                  <a:pt x="1215892" y="2197600"/>
+                </a:lnTo>
+                <a:close/>
+                <a:lnTo>
+                  <a:pt x="1222647" y="2196547"/>
+                </a:lnTo>
+                <a:close/>
+                <a:lnTo>
+                  <a:pt x="1229402" y="2195432"/>
+                </a:lnTo>
+                <a:close/>
+                <a:lnTo>
+                  <a:pt x="1236157" y="2194254"/>
+                </a:lnTo>
+                <a:close/>
+                <a:lnTo>
+                  <a:pt x="1242912" y="2193014"/>
+                </a:lnTo>
+                <a:close/>
+                <a:lnTo>
+                  <a:pt x="1249667" y="2191722"/>
+                </a:lnTo>
+                <a:close/>
+                <a:lnTo>
+                  <a:pt x="1256422" y="2190387"/>
+                </a:lnTo>
+                <a:close/>
+                <a:lnTo>
+                  <a:pt x="1263177" y="2189020"/>
+                </a:lnTo>
+                <a:close/>
+                <a:lnTo>
+                  <a:pt x="1269932" y="2187631"/>
+                </a:lnTo>
+                <a:close/>
+                <a:lnTo>
+                  <a:pt x="1276687" y="2186230"/>
+                </a:lnTo>
+                <a:close/>
+                <a:lnTo>
+                  <a:pt x="1283442" y="2184827"/>
+                </a:lnTo>
+                <a:close/>
+                <a:lnTo>
+                  <a:pt x="1290197" y="2183432"/>
+                </a:lnTo>
+                <a:close/>
+                <a:lnTo>
+                  <a:pt x="1296952" y="2182056"/>
+                </a:lnTo>
+                <a:close/>
+                <a:lnTo>
+                  <a:pt x="1303707" y="2180709"/>
+                </a:lnTo>
+                <a:close/>
+                <a:lnTo>
+                  <a:pt x="1310462" y="2179395"/>
+                </a:lnTo>
+                <a:close/>
+                <a:lnTo>
+                  <a:pt x="1317217" y="2178105"/>
+                </a:lnTo>
+                <a:close/>
+                <a:lnTo>
+                  <a:pt x="1323972" y="2176828"/>
+                </a:lnTo>
+                <a:close/>
+                <a:lnTo>
+                  <a:pt x="1330727" y="2175551"/>
+                </a:lnTo>
+                <a:close/>
+                <a:lnTo>
+                  <a:pt x="1337482" y="2174261"/>
+                </a:lnTo>
+                <a:close/>
+                <a:lnTo>
+                  <a:pt x="1344237" y="2172948"/>
+                </a:lnTo>
+                <a:close/>
+                <a:lnTo>
+                  <a:pt x="1350992" y="2171598"/>
+                </a:lnTo>
+                <a:close/>
+                <a:lnTo>
+                  <a:pt x="1357747" y="2170199"/>
+                </a:lnTo>
+                <a:close/>
+                <a:lnTo>
+                  <a:pt x="1364502" y="2168740"/>
+                </a:lnTo>
+                <a:close/>
+                <a:lnTo>
+                  <a:pt x="1371257" y="2167208"/>
+                </a:lnTo>
+                <a:close/>
+                <a:lnTo>
+                  <a:pt x="1378011" y="2165595"/>
+                </a:lnTo>
+                <a:close/>
+                <a:lnTo>
+                  <a:pt x="1384766" y="2163907"/>
+                </a:lnTo>
+                <a:close/>
+                <a:lnTo>
+                  <a:pt x="1391521" y="2162158"/>
+                </a:lnTo>
+                <a:close/>
+                <a:lnTo>
+                  <a:pt x="1398276" y="2160359"/>
+                </a:lnTo>
+                <a:close/>
+                <a:lnTo>
+                  <a:pt x="1405031" y="2158523"/>
+                </a:lnTo>
+                <a:close/>
+                <a:lnTo>
+                  <a:pt x="1411786" y="2156662"/>
+                </a:lnTo>
+                <a:close/>
+                <a:lnTo>
+                  <a:pt x="1418541" y="2154788"/>
+                </a:lnTo>
+                <a:close/>
+                <a:lnTo>
+                  <a:pt x="1425296" y="2152913"/>
+                </a:lnTo>
+                <a:close/>
+                <a:lnTo>
+                  <a:pt x="1432051" y="2151050"/>
+                </a:lnTo>
+                <a:close/>
+                <a:lnTo>
+                  <a:pt x="1438806" y="2149210"/>
+                </a:lnTo>
+                <a:close/>
+                <a:lnTo>
+                  <a:pt x="1445561" y="2147404"/>
+                </a:lnTo>
+                <a:close/>
+                <a:lnTo>
+                  <a:pt x="1452316" y="2145629"/>
+                </a:lnTo>
+                <a:close/>
+                <a:lnTo>
+                  <a:pt x="1459071" y="2143873"/>
+                </a:lnTo>
+                <a:close/>
+                <a:lnTo>
+                  <a:pt x="1465826" y="2142125"/>
+                </a:lnTo>
+                <a:close/>
+                <a:lnTo>
+                  <a:pt x="1472581" y="2140377"/>
+                </a:lnTo>
+                <a:close/>
+                <a:lnTo>
+                  <a:pt x="1479336" y="2138617"/>
+                </a:lnTo>
+                <a:close/>
+                <a:lnTo>
+                  <a:pt x="1486091" y="2136834"/>
+                </a:lnTo>
+                <a:close/>
+                <a:lnTo>
+                  <a:pt x="1492846" y="2135019"/>
+                </a:lnTo>
+                <a:close/>
+                <a:lnTo>
+                  <a:pt x="1499601" y="2133160"/>
+                </a:lnTo>
+                <a:close/>
+                <a:lnTo>
+                  <a:pt x="1506356" y="2131248"/>
+                </a:lnTo>
+                <a:close/>
+                <a:lnTo>
+                  <a:pt x="1513111" y="2129272"/>
+                </a:lnTo>
+                <a:close/>
+                <a:lnTo>
+                  <a:pt x="1519866" y="2127230"/>
+                </a:lnTo>
+                <a:close/>
+                <a:lnTo>
+                  <a:pt x="1526621" y="2125127"/>
+                </a:lnTo>
+                <a:close/>
+                <a:lnTo>
+                  <a:pt x="1533376" y="2122964"/>
+                </a:lnTo>
+                <a:close/>
+                <a:lnTo>
+                  <a:pt x="1540130" y="2120746"/>
+                </a:lnTo>
+                <a:close/>
+                <a:lnTo>
+                  <a:pt x="1546885" y="2118476"/>
+                </a:lnTo>
+                <a:close/>
+                <a:lnTo>
+                  <a:pt x="1553640" y="2116158"/>
+                </a:lnTo>
+                <a:close/>
+                <a:lnTo>
+                  <a:pt x="1560395" y="2113795"/>
+                </a:lnTo>
+                <a:close/>
+                <a:lnTo>
+                  <a:pt x="1567150" y="2111390"/>
+                </a:lnTo>
+                <a:close/>
+                <a:lnTo>
+                  <a:pt x="1573905" y="2108948"/>
+                </a:lnTo>
+                <a:close/>
+                <a:lnTo>
+                  <a:pt x="1580660" y="2106470"/>
+                </a:lnTo>
+                <a:close/>
+                <a:lnTo>
+                  <a:pt x="1587415" y="2103958"/>
+                </a:lnTo>
+                <a:close/>
+                <a:lnTo>
+                  <a:pt x="1594170" y="2101408"/>
+                </a:lnTo>
+                <a:close/>
+                <a:lnTo>
+                  <a:pt x="1600925" y="2098816"/>
+                </a:lnTo>
+                <a:close/>
+                <a:lnTo>
+                  <a:pt x="1607680" y="2096180"/>
+                </a:lnTo>
+                <a:close/>
+                <a:lnTo>
+                  <a:pt x="1614435" y="2093497"/>
+                </a:lnTo>
+                <a:close/>
+                <a:lnTo>
+                  <a:pt x="1621190" y="2090762"/>
+                </a:lnTo>
+                <a:close/>
+                <a:lnTo>
+                  <a:pt x="1627945" y="2087973"/>
+                </a:lnTo>
+                <a:close/>
+                <a:lnTo>
+                  <a:pt x="1634700" y="2085126"/>
+                </a:lnTo>
+                <a:close/>
+                <a:lnTo>
+                  <a:pt x="1641455" y="2082218"/>
+                </a:lnTo>
+                <a:close/>
+                <a:lnTo>
+                  <a:pt x="1648210" y="2079245"/>
+                </a:lnTo>
+                <a:close/>
+                <a:lnTo>
+                  <a:pt x="1654965" y="2076210"/>
+                </a:lnTo>
+                <a:close/>
+                <a:lnTo>
+                  <a:pt x="1661720" y="2073121"/>
+                </a:lnTo>
+                <a:close/>
+                <a:lnTo>
+                  <a:pt x="1668475" y="2069989"/>
+                </a:lnTo>
+                <a:close/>
+                <a:lnTo>
+                  <a:pt x="1675230" y="2066823"/>
+                </a:lnTo>
+                <a:close/>
+                <a:lnTo>
+                  <a:pt x="1681985" y="2063633"/>
+                </a:lnTo>
+                <a:close/>
+                <a:lnTo>
+                  <a:pt x="1688740" y="2060429"/>
+                </a:lnTo>
+                <a:close/>
+                <a:lnTo>
+                  <a:pt x="1695495" y="2057221"/>
+                </a:lnTo>
+                <a:close/>
+                <a:lnTo>
+                  <a:pt x="1702249" y="2054018"/>
+                </a:lnTo>
+                <a:close/>
+                <a:lnTo>
+                  <a:pt x="1709004" y="2050831"/>
+                </a:lnTo>
+                <a:close/>
+                <a:lnTo>
+                  <a:pt x="1715759" y="2047669"/>
+                </a:lnTo>
+                <a:close/>
+                <a:lnTo>
+                  <a:pt x="1722514" y="2044537"/>
+                </a:lnTo>
+                <a:close/>
+                <a:lnTo>
+                  <a:pt x="1729269" y="2041426"/>
+                </a:lnTo>
+                <a:close/>
+                <a:lnTo>
+                  <a:pt x="1736024" y="2038327"/>
+                </a:lnTo>
+                <a:close/>
+                <a:lnTo>
+                  <a:pt x="1742779" y="2035230"/>
+                </a:lnTo>
+                <a:close/>
+                <a:lnTo>
+                  <a:pt x="1749534" y="2032125"/>
+                </a:lnTo>
+                <a:close/>
+                <a:lnTo>
+                  <a:pt x="1756289" y="2029003"/>
+                </a:lnTo>
+                <a:close/>
+                <a:lnTo>
+                  <a:pt x="1763044" y="2025853"/>
+                </a:lnTo>
+                <a:close/>
+                <a:lnTo>
+                  <a:pt x="1769799" y="2022666"/>
+                </a:lnTo>
+                <a:close/>
+                <a:lnTo>
+                  <a:pt x="1776554" y="2019431"/>
+                </a:lnTo>
+                <a:close/>
+                <a:lnTo>
+                  <a:pt x="1783309" y="2016139"/>
+                </a:lnTo>
+                <a:close/>
+                <a:lnTo>
+                  <a:pt x="1790064" y="2012783"/>
+                </a:lnTo>
+                <a:close/>
+                <a:lnTo>
+                  <a:pt x="1796819" y="2009364"/>
+                </a:lnTo>
+                <a:close/>
+                <a:lnTo>
+                  <a:pt x="1803574" y="2005885"/>
+                </a:lnTo>
+                <a:close/>
+                <a:lnTo>
+                  <a:pt x="1810329" y="2002349"/>
+                </a:lnTo>
+                <a:close/>
+                <a:lnTo>
+                  <a:pt x="1817084" y="1998760"/>
+                </a:lnTo>
+                <a:close/>
+                <a:lnTo>
+                  <a:pt x="1823839" y="1995121"/>
+                </a:lnTo>
+                <a:close/>
+                <a:lnTo>
+                  <a:pt x="1830594" y="1991435"/>
+                </a:lnTo>
+                <a:close/>
+                <a:lnTo>
+                  <a:pt x="1837349" y="1987706"/>
+                </a:lnTo>
+                <a:close/>
+                <a:lnTo>
+                  <a:pt x="1844104" y="1983936"/>
+                </a:lnTo>
+                <a:close/>
+                <a:lnTo>
+                  <a:pt x="1850859" y="1980130"/>
+                </a:lnTo>
+                <a:close/>
+                <a:lnTo>
+                  <a:pt x="1857614" y="1976289"/>
+                </a:lnTo>
+                <a:close/>
+                <a:lnTo>
+                  <a:pt x="1864368" y="1972412"/>
+                </a:lnTo>
+                <a:close/>
+                <a:lnTo>
+                  <a:pt x="1871123" y="1968495"/>
+                </a:lnTo>
+                <a:close/>
+                <a:lnTo>
+                  <a:pt x="1877878" y="1964536"/>
+                </a:lnTo>
+                <a:close/>
+                <a:lnTo>
+                  <a:pt x="1884633" y="1960531"/>
+                </a:lnTo>
+                <a:close/>
+                <a:lnTo>
+                  <a:pt x="1891388" y="1956476"/>
+                </a:lnTo>
+                <a:close/>
+                <a:lnTo>
+                  <a:pt x="1898143" y="1952369"/>
+                </a:lnTo>
+                <a:close/>
+                <a:lnTo>
+                  <a:pt x="1904898" y="1948207"/>
+                </a:lnTo>
+                <a:close/>
+                <a:lnTo>
+                  <a:pt x="1911653" y="1943985"/>
+                </a:lnTo>
+                <a:close/>
+                <a:lnTo>
+                  <a:pt x="1918408" y="1939701"/>
+                </a:lnTo>
+                <a:close/>
+                <a:lnTo>
+                  <a:pt x="1925163" y="1935352"/>
+                </a:lnTo>
+                <a:close/>
+                <a:lnTo>
+                  <a:pt x="1931918" y="1930944"/>
+                </a:lnTo>
+                <a:close/>
+                <a:lnTo>
+                  <a:pt x="1938673" y="1926487"/>
+                </a:lnTo>
+                <a:close/>
+                <a:lnTo>
+                  <a:pt x="1945428" y="1921989"/>
+                </a:lnTo>
+                <a:close/>
+                <a:lnTo>
+                  <a:pt x="1952183" y="1917462"/>
+                </a:lnTo>
+                <a:close/>
+                <a:lnTo>
+                  <a:pt x="1958938" y="1912915"/>
+                </a:lnTo>
+                <a:close/>
+                <a:lnTo>
+                  <a:pt x="1965693" y="1908357"/>
+                </a:lnTo>
+                <a:close/>
+                <a:lnTo>
+                  <a:pt x="1972448" y="1903799"/>
+                </a:lnTo>
+                <a:close/>
+                <a:lnTo>
+                  <a:pt x="1979203" y="1899250"/>
+                </a:lnTo>
+                <a:close/>
+                <a:lnTo>
+                  <a:pt x="1985958" y="1894719"/>
+                </a:lnTo>
+                <a:close/>
+                <a:lnTo>
+                  <a:pt x="1992713" y="1890217"/>
+                </a:lnTo>
+                <a:close/>
+                <a:lnTo>
+                  <a:pt x="1999468" y="1885742"/>
+                </a:lnTo>
+                <a:close/>
+                <a:lnTo>
+                  <a:pt x="2006223" y="1881285"/>
+                </a:lnTo>
+                <a:close/>
+                <a:lnTo>
+                  <a:pt x="2012978" y="1876836"/>
+                </a:lnTo>
+                <a:close/>
+                <a:lnTo>
+                  <a:pt x="2019733" y="1872385"/>
+                </a:lnTo>
+                <a:close/>
+                <a:lnTo>
+                  <a:pt x="2026487" y="1867923"/>
+                </a:lnTo>
+                <a:close/>
+                <a:lnTo>
+                  <a:pt x="2033242" y="1863439"/>
+                </a:lnTo>
+                <a:close/>
+                <a:lnTo>
+                  <a:pt x="2039997" y="1858926"/>
+                </a:lnTo>
+                <a:close/>
+                <a:lnTo>
+                  <a:pt x="2046752" y="1854372"/>
+                </a:lnTo>
+                <a:close/>
+                <a:lnTo>
+                  <a:pt x="2053507" y="1849768"/>
+                </a:lnTo>
+                <a:close/>
+                <a:lnTo>
+                  <a:pt x="2060262" y="1845104"/>
+                </a:lnTo>
+                <a:close/>
+                <a:lnTo>
+                  <a:pt x="2067017" y="1840377"/>
+                </a:lnTo>
+                <a:close/>
+                <a:lnTo>
+                  <a:pt x="2073772" y="1835589"/>
+                </a:lnTo>
+                <a:close/>
+                <a:lnTo>
+                  <a:pt x="2080527" y="1830741"/>
+                </a:lnTo>
+                <a:close/>
+                <a:lnTo>
+                  <a:pt x="2087282" y="1825838"/>
+                </a:lnTo>
+                <a:close/>
+                <a:lnTo>
+                  <a:pt x="2094037" y="1820881"/>
+                </a:lnTo>
+                <a:close/>
+                <a:lnTo>
+                  <a:pt x="2100792" y="1815873"/>
+                </a:lnTo>
+                <a:close/>
+                <a:lnTo>
+                  <a:pt x="2107547" y="1810817"/>
+                </a:lnTo>
+                <a:close/>
+                <a:lnTo>
+                  <a:pt x="2114302" y="1805716"/>
+                </a:lnTo>
+                <a:close/>
+                <a:lnTo>
+                  <a:pt x="2121057" y="1800571"/>
+                </a:lnTo>
+                <a:close/>
+                <a:lnTo>
+                  <a:pt x="2127812" y="1795386"/>
+                </a:lnTo>
+                <a:close/>
+                <a:lnTo>
+                  <a:pt x="2134567" y="1790162"/>
+                </a:lnTo>
+                <a:close/>
+                <a:lnTo>
+                  <a:pt x="2141322" y="1784899"/>
+                </a:lnTo>
+                <a:close/>
+                <a:lnTo>
+                  <a:pt x="2148077" y="1779595"/>
+                </a:lnTo>
+                <a:close/>
+                <a:lnTo>
+                  <a:pt x="2154832" y="1774250"/>
+                </a:lnTo>
+                <a:close/>
+                <a:lnTo>
+                  <a:pt x="2161587" y="1768863"/>
+                </a:lnTo>
+                <a:close/>
+                <a:lnTo>
+                  <a:pt x="2168342" y="1763433"/>
+                </a:lnTo>
+                <a:close/>
+                <a:lnTo>
+                  <a:pt x="2175097" y="1757958"/>
+                </a:lnTo>
+                <a:close/>
+                <a:lnTo>
+                  <a:pt x="2181852" y="1752440"/>
+                </a:lnTo>
+                <a:close/>
+                <a:lnTo>
+                  <a:pt x="2188606" y="1746875"/>
+                </a:lnTo>
+                <a:close/>
+                <a:lnTo>
+                  <a:pt x="2195361" y="1741264"/>
+                </a:lnTo>
+                <a:close/>
+                <a:lnTo>
+                  <a:pt x="2202116" y="1735606"/>
+                </a:lnTo>
+                <a:close/>
+                <a:lnTo>
+                  <a:pt x="2208871" y="1729901"/>
+                </a:lnTo>
+                <a:close/>
+                <a:lnTo>
+                  <a:pt x="2215626" y="1724151"/>
+                </a:lnTo>
+                <a:close/>
+                <a:lnTo>
+                  <a:pt x="2222381" y="1718357"/>
+                </a:lnTo>
+                <a:close/>
+                <a:lnTo>
+                  <a:pt x="2229136" y="1712518"/>
+                </a:lnTo>
+                <a:close/>
+                <a:lnTo>
+                  <a:pt x="2235891" y="1706637"/>
+                </a:lnTo>
+                <a:close/>
+                <a:lnTo>
+                  <a:pt x="2242646" y="1700714"/>
+                </a:lnTo>
+                <a:close/>
+                <a:lnTo>
+                  <a:pt x="2249401" y="1694750"/>
+                </a:lnTo>
+                <a:close/>
+                <a:lnTo>
+                  <a:pt x="2256156" y="1688745"/>
+                </a:lnTo>
+                <a:close/>
+                <a:lnTo>
+                  <a:pt x="2262911" y="1682702"/>
+                </a:lnTo>
+                <a:close/>
+                <a:lnTo>
+                  <a:pt x="2269666" y="1676619"/>
+                </a:lnTo>
+                <a:close/>
+                <a:lnTo>
+                  <a:pt x="2276421" y="1670495"/>
+                </a:lnTo>
+                <a:close/>
+                <a:lnTo>
+                  <a:pt x="2283176" y="1664327"/>
+                </a:lnTo>
+                <a:close/>
+                <a:lnTo>
+                  <a:pt x="2289931" y="1658114"/>
+                </a:lnTo>
+                <a:close/>
+                <a:lnTo>
+                  <a:pt x="2296686" y="1651851"/>
+                </a:lnTo>
+                <a:close/>
+                <a:lnTo>
+                  <a:pt x="2303441" y="1645537"/>
+                </a:lnTo>
+                <a:close/>
+                <a:lnTo>
+                  <a:pt x="2310196" y="1639169"/>
+                </a:lnTo>
+                <a:close/>
+                <a:lnTo>
+                  <a:pt x="2316951" y="1632745"/>
+                </a:lnTo>
+                <a:close/>
+                <a:lnTo>
+                  <a:pt x="2323706" y="1626261"/>
+                </a:lnTo>
+                <a:close/>
+                <a:lnTo>
+                  <a:pt x="2330461" y="1619715"/>
+                </a:lnTo>
+                <a:close/>
+                <a:lnTo>
+                  <a:pt x="2337215" y="1613107"/>
+                </a:lnTo>
+                <a:close/>
+                <a:lnTo>
+                  <a:pt x="2343970" y="1606441"/>
+                </a:lnTo>
+                <a:close/>
+                <a:lnTo>
+                  <a:pt x="2350724" y="1599727"/>
+                </a:lnTo>
+                <a:close/>
+                <a:lnTo>
+                  <a:pt x="2357478" y="1592975"/>
+                </a:lnTo>
+                <a:close/>
+                <a:lnTo>
+                  <a:pt x="2364233" y="1586195"/>
+                </a:lnTo>
+                <a:close/>
+                <a:lnTo>
+                  <a:pt x="2370988" y="1579396"/>
+                </a:lnTo>
+                <a:close/>
+                <a:lnTo>
+                  <a:pt x="2377743" y="1572587"/>
+                </a:lnTo>
+                <a:close/>
+                <a:lnTo>
+                  <a:pt x="2384498" y="1565779"/>
+                </a:lnTo>
+                <a:close/>
+                <a:lnTo>
+                  <a:pt x="2391254" y="1558980"/>
+                </a:lnTo>
+                <a:close/>
+                <a:lnTo>
+                  <a:pt x="2398010" y="1552200"/>
+                </a:lnTo>
+                <a:close/>
+                <a:lnTo>
+                  <a:pt x="2404766" y="1545448"/>
+                </a:lnTo>
+                <a:close/>
+                <a:lnTo>
+                  <a:pt x="2411523" y="1538722"/>
+                </a:lnTo>
+                <a:close/>
+                <a:lnTo>
+                  <a:pt x="2418280" y="1532012"/>
+                </a:lnTo>
+                <a:close/>
+                <a:lnTo>
+                  <a:pt x="2425037" y="1525309"/>
+                </a:lnTo>
+                <a:close/>
+                <a:lnTo>
+                  <a:pt x="2431794" y="1518604"/>
+                </a:lnTo>
+                <a:close/>
+                <a:lnTo>
+                  <a:pt x="2438550" y="1511887"/>
+                </a:lnTo>
+                <a:close/>
+                <a:lnTo>
+                  <a:pt x="2445305" y="1505150"/>
+                </a:lnTo>
+                <a:close/>
+                <a:lnTo>
+                  <a:pt x="2452059" y="1498382"/>
+                </a:lnTo>
+                <a:close/>
+                <a:lnTo>
+                  <a:pt x="2458811" y="1491575"/>
+                </a:lnTo>
+                <a:close/>
+                <a:lnTo>
+                  <a:pt x="2465562" y="1484719"/>
+                </a:lnTo>
+                <a:close/>
+                <a:lnTo>
+                  <a:pt x="2472312" y="1477805"/>
+                </a:lnTo>
+                <a:close/>
+                <a:lnTo>
+                  <a:pt x="2479059" y="1470829"/>
+                </a:lnTo>
+                <a:close/>
+                <a:lnTo>
+                  <a:pt x="2485806" y="1463793"/>
+                </a:lnTo>
+                <a:close/>
+                <a:lnTo>
+                  <a:pt x="2492554" y="1456698"/>
+                </a:lnTo>
+                <a:close/>
+                <a:lnTo>
+                  <a:pt x="2499302" y="1449545"/>
+                </a:lnTo>
+                <a:close/>
+                <a:lnTo>
+                  <a:pt x="2506053" y="1442337"/>
+                </a:lnTo>
+                <a:close/>
+                <a:lnTo>
+                  <a:pt x="2512807" y="1435075"/>
+                </a:lnTo>
+                <a:close/>
+                <a:lnTo>
+                  <a:pt x="2519565" y="1427760"/>
+                </a:lnTo>
+                <a:close/>
+                <a:lnTo>
+                  <a:pt x="2526328" y="1420394"/>
+                </a:lnTo>
+                <a:close/>
+                <a:lnTo>
+                  <a:pt x="2533097" y="1412978"/>
+                </a:lnTo>
+                <a:close/>
+                <a:lnTo>
+                  <a:pt x="2539872" y="1405514"/>
+                </a:lnTo>
+                <a:close/>
+                <a:lnTo>
+                  <a:pt x="2546654" y="1398004"/>
+                </a:lnTo>
+                <a:close/>
+                <a:lnTo>
+                  <a:pt x="2553438" y="1390452"/>
+                </a:lnTo>
+                <a:close/>
+                <a:lnTo>
+                  <a:pt x="2560222" y="1382859"/>
+                </a:lnTo>
+                <a:close/>
+                <a:lnTo>
+                  <a:pt x="2567001" y="1375231"/>
+                </a:lnTo>
+                <a:close/>
+                <a:lnTo>
+                  <a:pt x="2573773" y="1367569"/>
+                </a:lnTo>
+                <a:close/>
+                <a:lnTo>
+                  <a:pt x="2580533" y="1359876"/>
+                </a:lnTo>
+                <a:close/>
+                <a:lnTo>
+                  <a:pt x="2587280" y="1352157"/>
+                </a:lnTo>
+                <a:close/>
+                <a:lnTo>
+                  <a:pt x="2594008" y="1344414"/>
+                </a:lnTo>
+                <a:close/>
+                <a:lnTo>
+                  <a:pt x="2600715" y="1336650"/>
+                </a:lnTo>
+                <a:close/>
+                <a:lnTo>
+                  <a:pt x="2607397" y="1328868"/>
+                </a:lnTo>
+                <a:close/>
+                <a:lnTo>
+                  <a:pt x="2614055" y="1321067"/>
+                </a:lnTo>
+                <a:close/>
+                <a:lnTo>
+                  <a:pt x="2620702" y="1313234"/>
+                </a:lnTo>
+                <a:close/>
+                <a:lnTo>
+                  <a:pt x="2627349" y="1305354"/>
+                </a:lnTo>
+                <a:close/>
+                <a:lnTo>
+                  <a:pt x="2634010" y="1297415"/>
+                </a:lnTo>
+                <a:close/>
+                <a:lnTo>
+                  <a:pt x="2640697" y="1289400"/>
+                </a:lnTo>
+                <a:close/>
+                <a:lnTo>
+                  <a:pt x="2647424" y="1281297"/>
+                </a:lnTo>
+                <a:close/>
+                <a:lnTo>
+                  <a:pt x="2654202" y="1273091"/>
+                </a:lnTo>
+                <a:close/>
+                <a:lnTo>
+                  <a:pt x="2661046" y="1264768"/>
+                </a:lnTo>
+                <a:close/>
+                <a:lnTo>
+                  <a:pt x="2667967" y="1256314"/>
+                </a:lnTo>
+                <a:close/>
+                <a:lnTo>
+                  <a:pt x="2674979" y="1247715"/>
+                </a:lnTo>
+                <a:close/>
+                <a:lnTo>
+                  <a:pt x="2682082" y="1238969"/>
+                </a:lnTo>
+                <a:close/>
+                <a:lnTo>
+                  <a:pt x="2689238" y="1230121"/>
+                </a:lnTo>
+                <a:close/>
+                <a:lnTo>
+                  <a:pt x="2696399" y="1221224"/>
+                </a:lnTo>
+                <a:close/>
+                <a:lnTo>
+                  <a:pt x="2703516" y="1212331"/>
+                </a:lnTo>
+                <a:close/>
+                <a:lnTo>
+                  <a:pt x="2710542" y="1203496"/>
+                </a:lnTo>
+                <a:close/>
+                <a:lnTo>
+                  <a:pt x="2717429" y="1194772"/>
+                </a:lnTo>
+                <a:close/>
+                <a:lnTo>
+                  <a:pt x="2724128" y="1186212"/>
+                </a:lnTo>
+                <a:close/>
+                <a:lnTo>
+                  <a:pt x="2730593" y="1177871"/>
+                </a:lnTo>
+                <a:close/>
+                <a:lnTo>
+                  <a:pt x="2736775" y="1169801"/>
+                </a:lnTo>
+                <a:close/>
+                <a:lnTo>
+                  <a:pt x="2742625" y="1162055"/>
+                </a:lnTo>
+                <a:close/>
+                <a:lnTo>
+                  <a:pt x="2748109" y="1154677"/>
+                </a:lnTo>
+                <a:close/>
+                <a:lnTo>
+                  <a:pt x="2753252" y="1147644"/>
+                </a:lnTo>
+                <a:close/>
+                <a:lnTo>
+                  <a:pt x="2758102" y="1140915"/>
+                </a:lnTo>
+                <a:close/>
+                <a:lnTo>
+                  <a:pt x="2762707" y="1134447"/>
+                </a:lnTo>
+                <a:close/>
+                <a:lnTo>
+                  <a:pt x="2767114" y="1128198"/>
+                </a:lnTo>
+                <a:close/>
+                <a:lnTo>
+                  <a:pt x="2771371" y="1122125"/>
+                </a:lnTo>
+                <a:close/>
+                <a:lnTo>
+                  <a:pt x="2775526" y="1116187"/>
+                </a:lnTo>
+                <a:close/>
+                <a:lnTo>
+                  <a:pt x="2779627" y="1110341"/>
+                </a:lnTo>
+                <a:close/>
+                <a:lnTo>
+                  <a:pt x="2783721" y="1104544"/>
+                </a:lnTo>
+                <a:close/>
+                <a:lnTo>
+                  <a:pt x="2787856" y="1098756"/>
+                </a:lnTo>
+                <a:close/>
+                <a:lnTo>
+                  <a:pt x="2792076" y="1092936"/>
+                </a:lnTo>
+                <a:close/>
+                <a:lnTo>
+                  <a:pt x="2796388" y="1087078"/>
+                </a:lnTo>
+                <a:close/>
+                <a:lnTo>
+                  <a:pt x="2800780" y="1081195"/>
+                </a:lnTo>
+                <a:close/>
+                <a:lnTo>
+                  <a:pt x="2805240" y="1075295"/>
+                </a:lnTo>
+                <a:close/>
+                <a:lnTo>
+                  <a:pt x="2809757" y="1069390"/>
+                </a:lnTo>
+                <a:close/>
+                <a:lnTo>
+                  <a:pt x="2814317" y="1063492"/>
+                </a:lnTo>
+                <a:close/>
+                <a:lnTo>
+                  <a:pt x="2818911" y="1057610"/>
+                </a:lnTo>
+                <a:close/>
+                <a:lnTo>
+                  <a:pt x="2823524" y="1051756"/>
+                </a:lnTo>
+                <a:close/>
+                <a:lnTo>
+                  <a:pt x="2828146" y="1045940"/>
+                </a:lnTo>
+                <a:close/>
+                <a:lnTo>
+                  <a:pt x="2832765" y="1040173"/>
+                </a:lnTo>
+                <a:close/>
+                <a:lnTo>
+                  <a:pt x="2837369" y="1034465"/>
+                </a:lnTo>
+                <a:close/>
+                <a:lnTo>
+                  <a:pt x="2841952" y="1028805"/>
+                </a:lnTo>
+                <a:close/>
+                <a:lnTo>
+                  <a:pt x="2846516" y="1023166"/>
+                </a:lnTo>
+                <a:close/>
+                <a:lnTo>
+                  <a:pt x="2851059" y="1017521"/>
+                </a:lnTo>
+                <a:close/>
+                <a:lnTo>
+                  <a:pt x="2855582" y="1011843"/>
+                </a:lnTo>
+                <a:close/>
+                <a:lnTo>
+                  <a:pt x="2860085" y="1006103"/>
+                </a:lnTo>
+                <a:close/>
+                <a:lnTo>
+                  <a:pt x="2864568" y="1000276"/>
+                </a:lnTo>
+                <a:close/>
+                <a:lnTo>
+                  <a:pt x="2869031" y="994333"/>
+                </a:lnTo>
+                <a:close/>
+                <a:lnTo>
+                  <a:pt x="2873473" y="988247"/>
+                </a:lnTo>
+                <a:close/>
+                <a:lnTo>
+                  <a:pt x="2877895" y="981991"/>
+                </a:lnTo>
+                <a:close/>
+                <a:lnTo>
+                  <a:pt x="2882298" y="975539"/>
+                </a:lnTo>
+                <a:close/>
+                <a:lnTo>
+                  <a:pt x="2886685" y="968884"/>
+                </a:lnTo>
+                <a:close/>
+                <a:lnTo>
+                  <a:pt x="2891070" y="962045"/>
+                </a:lnTo>
+                <a:close/>
+                <a:lnTo>
+                  <a:pt x="2895463" y="955042"/>
+                </a:lnTo>
+                <a:close/>
+                <a:lnTo>
+                  <a:pt x="2899878" y="947894"/>
+                </a:lnTo>
+                <a:close/>
+                <a:lnTo>
+                  <a:pt x="2904325" y="940620"/>
+                </a:lnTo>
+                <a:close/>
+                <a:lnTo>
+                  <a:pt x="2908817" y="933241"/>
+                </a:lnTo>
+                <a:close/>
+                <a:lnTo>
+                  <a:pt x="2913365" y="925776"/>
+                </a:lnTo>
+                <a:close/>
+                <a:lnTo>
+                  <a:pt x="2917983" y="918245"/>
+                </a:lnTo>
+                <a:close/>
+                <a:lnTo>
+                  <a:pt x="2922680" y="910668"/>
+                </a:lnTo>
+                <a:close/>
+                <a:lnTo>
+                  <a:pt x="2927470" y="903063"/>
+                </a:lnTo>
+                <a:close/>
+                <a:lnTo>
+                  <a:pt x="2932344" y="895454"/>
+                </a:lnTo>
+                <a:close/>
+                <a:lnTo>
+                  <a:pt x="2937257" y="887868"/>
+                </a:lnTo>
+                <a:close/>
+                <a:lnTo>
+                  <a:pt x="2942161" y="880331"/>
+                </a:lnTo>
+                <a:close/>
+                <a:lnTo>
+                  <a:pt x="2947010" y="872870"/>
+                </a:lnTo>
+                <a:close/>
+                <a:lnTo>
+                  <a:pt x="2951755" y="865514"/>
+                </a:lnTo>
+                <a:close/>
+                <a:lnTo>
+                  <a:pt x="2956349" y="858289"/>
+                </a:lnTo>
+                <a:close/>
+                <a:lnTo>
+                  <a:pt x="2960743" y="851222"/>
+                </a:lnTo>
+                <a:close/>
+                <a:lnTo>
+                  <a:pt x="2964891" y="844342"/>
+                </a:lnTo>
+                <a:close/>
+                <a:lnTo>
+                  <a:pt x="2968744" y="837675"/>
+                </a:lnTo>
+                <a:close/>
+                <a:lnTo>
+                  <a:pt x="2972254" y="831248"/>
+                </a:lnTo>
+                <a:close/>
+                <a:lnTo>
+                  <a:pt x="2975398" y="825076"/>
+                </a:lnTo>
+                <a:close/>
+                <a:lnTo>
+                  <a:pt x="2978213" y="819141"/>
+                </a:lnTo>
+                <a:close/>
+                <a:lnTo>
+                  <a:pt x="2980746" y="813419"/>
+                </a:lnTo>
+                <a:close/>
+                <a:lnTo>
+                  <a:pt x="2983046" y="807886"/>
+                </a:lnTo>
+                <a:close/>
+                <a:lnTo>
+                  <a:pt x="2985160" y="802518"/>
+                </a:lnTo>
+                <a:close/>
+                <a:lnTo>
+                  <a:pt x="2987137" y="797292"/>
+                </a:lnTo>
+                <a:close/>
+                <a:lnTo>
+                  <a:pt x="2989024" y="792183"/>
+                </a:lnTo>
+                <a:close/>
+                <a:lnTo>
+                  <a:pt x="2990870" y="787168"/>
+                </a:lnTo>
+                <a:close/>
+                <a:lnTo>
+                  <a:pt x="2992721" y="782223"/>
+                </a:lnTo>
+                <a:close/>
+                <a:lnTo>
+                  <a:pt x="2994627" y="777323"/>
+                </a:lnTo>
+                <a:close/>
+                <a:lnTo>
+                  <a:pt x="2996625" y="772447"/>
+                </a:lnTo>
+                <a:close/>
+                <a:lnTo>
+                  <a:pt x="2998713" y="767583"/>
+                </a:lnTo>
+                <a:close/>
+                <a:lnTo>
+                  <a:pt x="3000879" y="762719"/>
+                </a:lnTo>
+                <a:close/>
+                <a:lnTo>
+                  <a:pt x="3003109" y="757846"/>
+                </a:lnTo>
+                <a:close/>
+                <a:lnTo>
+                  <a:pt x="3005390" y="752954"/>
+                </a:lnTo>
+                <a:close/>
+                <a:lnTo>
+                  <a:pt x="3007711" y="748031"/>
+                </a:lnTo>
+                <a:close/>
+                <a:lnTo>
+                  <a:pt x="3010057" y="743067"/>
+                </a:lnTo>
+                <a:close/>
+                <a:lnTo>
+                  <a:pt x="3012417" y="738052"/>
+                </a:lnTo>
+                <a:close/>
+                <a:lnTo>
+                  <a:pt x="3014777" y="732976"/>
+                </a:lnTo>
+                <a:close/>
+                <a:lnTo>
+                  <a:pt x="3017124" y="727828"/>
+                </a:lnTo>
+                <a:close/>
+                <a:lnTo>
+                  <a:pt x="3019448" y="722600"/>
+                </a:lnTo>
+                <a:close/>
+                <a:lnTo>
+                  <a:pt x="3021747" y="717299"/>
+                </a:lnTo>
+                <a:close/>
+                <a:lnTo>
+                  <a:pt x="3024024" y="711938"/>
+                </a:lnTo>
+                <a:close/>
+                <a:lnTo>
+                  <a:pt x="3026284" y="706530"/>
+                </a:lnTo>
+                <a:close/>
+                <a:lnTo>
+                  <a:pt x="3028530" y="701088"/>
+                </a:lnTo>
+                <a:close/>
+                <a:lnTo>
+                  <a:pt x="3030764" y="695624"/>
+                </a:lnTo>
+                <a:close/>
+                <a:lnTo>
+                  <a:pt x="3032991" y="690153"/>
+                </a:lnTo>
+                <a:close/>
+                <a:lnTo>
+                  <a:pt x="3035215" y="684686"/>
+                </a:lnTo>
+                <a:close/>
+                <a:lnTo>
+                  <a:pt x="3037437" y="679237"/>
+                </a:lnTo>
+                <a:close/>
+                <a:lnTo>
+                  <a:pt x="3039662" y="673820"/>
+                </a:lnTo>
+                <a:close/>
+                <a:lnTo>
+                  <a:pt x="3041894" y="668445"/>
+                </a:lnTo>
+                <a:close/>
+                <a:lnTo>
+                  <a:pt x="3044132" y="663107"/>
+                </a:lnTo>
+                <a:close/>
+                <a:lnTo>
+                  <a:pt x="3046375" y="657792"/>
+                </a:lnTo>
+                <a:close/>
+                <a:lnTo>
+                  <a:pt x="3048624" y="652484"/>
+                </a:lnTo>
+                <a:close/>
+                <a:lnTo>
+                  <a:pt x="3050877" y="647167"/>
+                </a:lnTo>
+                <a:close/>
+                <a:lnTo>
+                  <a:pt x="3053133" y="641826"/>
+                </a:lnTo>
+                <a:close/>
+                <a:lnTo>
+                  <a:pt x="3055391" y="636445"/>
+                </a:lnTo>
+                <a:close/>
+                <a:lnTo>
+                  <a:pt x="3057650" y="631009"/>
+                </a:lnTo>
+                <a:close/>
+                <a:lnTo>
+                  <a:pt x="3059910" y="625502"/>
+                </a:lnTo>
+                <a:close/>
+                <a:lnTo>
+                  <a:pt x="3062168" y="619909"/>
+                </a:lnTo>
+                <a:close/>
+                <a:lnTo>
+                  <a:pt x="3064426" y="614215"/>
+                </a:lnTo>
+                <a:close/>
+                <a:lnTo>
+                  <a:pt x="3066681" y="608425"/>
+                </a:lnTo>
+                <a:close/>
+                <a:lnTo>
+                  <a:pt x="3068935" y="602561"/>
+                </a:lnTo>
+                <a:close/>
+                <a:lnTo>
+                  <a:pt x="3071188" y="596645"/>
+                </a:lnTo>
+                <a:close/>
+                <a:lnTo>
+                  <a:pt x="3073439" y="590700"/>
+                </a:lnTo>
+                <a:close/>
+                <a:lnTo>
+                  <a:pt x="3075690" y="584749"/>
+                </a:lnTo>
+                <a:close/>
+                <a:lnTo>
+                  <a:pt x="3077940" y="578815"/>
+                </a:lnTo>
+                <a:close/>
+                <a:lnTo>
+                  <a:pt x="3080190" y="572919"/>
+                </a:lnTo>
+                <a:close/>
+                <a:lnTo>
+                  <a:pt x="3082439" y="567085"/>
+                </a:lnTo>
+                <a:close/>
+                <a:lnTo>
+                  <a:pt x="3084689" y="561336"/>
+                </a:lnTo>
+                <a:close/>
+                <a:lnTo>
+                  <a:pt x="3086939" y="555694"/>
+                </a:lnTo>
+                <a:close/>
+                <a:lnTo>
+                  <a:pt x="3089190" y="550163"/>
+                </a:lnTo>
+                <a:close/>
+                <a:lnTo>
+                  <a:pt x="3091441" y="544721"/>
+                </a:lnTo>
+                <a:close/>
+                <a:lnTo>
+                  <a:pt x="3093692" y="539347"/>
+                </a:lnTo>
+                <a:close/>
+                <a:lnTo>
+                  <a:pt x="3095944" y="534017"/>
+                </a:lnTo>
+                <a:close/>
+                <a:lnTo>
+                  <a:pt x="3098195" y="528709"/>
+                </a:lnTo>
+                <a:close/>
+                <a:lnTo>
+                  <a:pt x="3100448" y="523400"/>
+                </a:lnTo>
+                <a:close/>
+                <a:lnTo>
+                  <a:pt x="3102700" y="518066"/>
+                </a:lnTo>
+                <a:close/>
+                <a:lnTo>
+                  <a:pt x="3104952" y="512684"/>
+                </a:lnTo>
+                <a:close/>
+                <a:lnTo>
+                  <a:pt x="3107204" y="507233"/>
+                </a:lnTo>
+                <a:close/>
+                <a:lnTo>
+                  <a:pt x="3109456" y="501689"/>
+                </a:lnTo>
+                <a:close/>
+                <a:lnTo>
+                  <a:pt x="3111708" y="496041"/>
+                </a:lnTo>
+                <a:close/>
+                <a:lnTo>
+                  <a:pt x="3113960" y="490303"/>
+                </a:lnTo>
+                <a:close/>
+                <a:lnTo>
+                  <a:pt x="3116212" y="484490"/>
+                </a:lnTo>
+                <a:close/>
+                <a:lnTo>
+                  <a:pt x="3118463" y="478618"/>
+                </a:lnTo>
+                <a:close/>
+                <a:lnTo>
+                  <a:pt x="3120715" y="472705"/>
+                </a:lnTo>
+                <a:close/>
+                <a:lnTo>
+                  <a:pt x="3122967" y="466767"/>
+                </a:lnTo>
+                <a:close/>
+                <a:lnTo>
+                  <a:pt x="3125218" y="460820"/>
+                </a:lnTo>
+                <a:close/>
+                <a:lnTo>
+                  <a:pt x="3127470" y="454880"/>
+                </a:lnTo>
+                <a:close/>
+                <a:lnTo>
+                  <a:pt x="3129721" y="448964"/>
+                </a:lnTo>
+                <a:close/>
+                <a:lnTo>
+                  <a:pt x="3131973" y="443087"/>
+                </a:lnTo>
+                <a:close/>
+                <a:lnTo>
+                  <a:pt x="3134224" y="437261"/>
+                </a:lnTo>
+                <a:close/>
+                <a:lnTo>
+                  <a:pt x="3136476" y="431472"/>
+                </a:lnTo>
+                <a:close/>
+                <a:lnTo>
+                  <a:pt x="3138727" y="425705"/>
+                </a:lnTo>
+                <a:close/>
+                <a:lnTo>
+                  <a:pt x="3140979" y="419943"/>
+                </a:lnTo>
+                <a:close/>
+                <a:lnTo>
+                  <a:pt x="3143231" y="414170"/>
+                </a:lnTo>
+                <a:close/>
+                <a:lnTo>
+                  <a:pt x="3145482" y="408369"/>
+                </a:lnTo>
+                <a:close/>
+                <a:lnTo>
+                  <a:pt x="3147734" y="402525"/>
+                </a:lnTo>
+                <a:close/>
+                <a:lnTo>
+                  <a:pt x="3149986" y="396621"/>
+                </a:lnTo>
+                <a:close/>
+                <a:lnTo>
+                  <a:pt x="3152237" y="390640"/>
+                </a:lnTo>
+                <a:close/>
+                <a:lnTo>
+                  <a:pt x="3154489" y="384567"/>
+                </a:lnTo>
+                <a:close/>
+                <a:lnTo>
+                  <a:pt x="3156741" y="378391"/>
+                </a:lnTo>
+                <a:close/>
+                <a:lnTo>
+                  <a:pt x="3158993" y="372124"/>
+                </a:lnTo>
+                <a:close/>
+                <a:lnTo>
+                  <a:pt x="3161244" y="365791"/>
+                </a:lnTo>
+                <a:close/>
+                <a:lnTo>
+                  <a:pt x="3163496" y="359413"/>
+                </a:lnTo>
+                <a:close/>
+                <a:lnTo>
+                  <a:pt x="3165747" y="353014"/>
+                </a:lnTo>
+                <a:close/>
+                <a:lnTo>
+                  <a:pt x="3167999" y="346616"/>
+                </a:lnTo>
+                <a:close/>
+                <a:lnTo>
+                  <a:pt x="3170251" y="340241"/>
+                </a:lnTo>
+                <a:close/>
+                <a:lnTo>
+                  <a:pt x="3172502" y="333914"/>
+                </a:lnTo>
+                <a:close/>
+                <a:lnTo>
+                  <a:pt x="3174754" y="327655"/>
+                </a:lnTo>
+                <a:close/>
+                <a:lnTo>
+                  <a:pt x="3177006" y="321487"/>
+                </a:lnTo>
+                <a:close/>
+                <a:lnTo>
+                  <a:pt x="3179257" y="315431"/>
+                </a:lnTo>
+                <a:close/>
+                <a:lnTo>
+                  <a:pt x="3181509" y="309478"/>
+                </a:lnTo>
+                <a:close/>
+                <a:lnTo>
+                  <a:pt x="3183761" y="303606"/>
+                </a:lnTo>
+                <a:close/>
+                <a:lnTo>
+                  <a:pt x="3186012" y="297793"/>
+                </a:lnTo>
+                <a:close/>
+                <a:lnTo>
+                  <a:pt x="3188264" y="292018"/>
+                </a:lnTo>
+                <a:close/>
+                <a:lnTo>
+                  <a:pt x="3190516" y="286258"/>
+                </a:lnTo>
+                <a:close/>
+                <a:lnTo>
+                  <a:pt x="3192767" y="280492"/>
+                </a:lnTo>
+                <a:close/>
+                <a:lnTo>
+                  <a:pt x="3195019" y="274697"/>
+                </a:lnTo>
+                <a:close/>
+                <a:lnTo>
+                  <a:pt x="3197271" y="268852"/>
+                </a:lnTo>
+                <a:close/>
+                <a:lnTo>
+                  <a:pt x="3199522" y="262935"/>
+                </a:lnTo>
+                <a:close/>
+                <a:lnTo>
+                  <a:pt x="3201774" y="256925"/>
+                </a:lnTo>
+                <a:close/>
+                <a:lnTo>
+                  <a:pt x="3204026" y="250821"/>
+                </a:lnTo>
+                <a:close/>
+                <a:lnTo>
+                  <a:pt x="3206277" y="244634"/>
+                </a:lnTo>
+                <a:close/>
+                <a:lnTo>
+                  <a:pt x="3208529" y="238377"/>
+                </a:lnTo>
+                <a:close/>
+                <a:lnTo>
+                  <a:pt x="3210781" y="232063"/>
+                </a:lnTo>
+                <a:close/>
+                <a:lnTo>
+                  <a:pt x="3213032" y="225704"/>
+                </a:lnTo>
+                <a:close/>
+                <a:lnTo>
+                  <a:pt x="3215284" y="219312"/>
+                </a:lnTo>
+                <a:close/>
+                <a:lnTo>
+                  <a:pt x="3217535" y="212901"/>
+                </a:lnTo>
+                <a:close/>
+                <a:lnTo>
+                  <a:pt x="3219787" y="206482"/>
+                </a:lnTo>
+                <a:close/>
+                <a:lnTo>
+                  <a:pt x="3222039" y="200068"/>
+                </a:lnTo>
+                <a:close/>
+                <a:lnTo>
+                  <a:pt x="3224290" y="193672"/>
+                </a:lnTo>
+                <a:close/>
+                <a:lnTo>
+                  <a:pt x="3226542" y="187298"/>
+                </a:lnTo>
+                <a:close/>
+                <a:lnTo>
+                  <a:pt x="3228794" y="180947"/>
+                </a:lnTo>
+                <a:close/>
+                <a:lnTo>
+                  <a:pt x="3231045" y="174615"/>
+                </a:lnTo>
+                <a:close/>
+                <a:lnTo>
+                  <a:pt x="3233297" y="168301"/>
+                </a:lnTo>
+                <a:close/>
+                <a:lnTo>
+                  <a:pt x="3235549" y="162003"/>
+                </a:lnTo>
+                <a:close/>
+                <a:lnTo>
+                  <a:pt x="3237800" y="155718"/>
+                </a:lnTo>
+                <a:close/>
+                <a:lnTo>
+                  <a:pt x="3240052" y="149446"/>
+                </a:lnTo>
+                <a:close/>
+                <a:lnTo>
+                  <a:pt x="3242304" y="143184"/>
+                </a:lnTo>
+                <a:close/>
+                <a:lnTo>
+                  <a:pt x="3244555" y="136930"/>
+                </a:lnTo>
+                <a:close/>
+                <a:lnTo>
+                  <a:pt x="3246807" y="130683"/>
+                </a:lnTo>
+                <a:close/>
+                <a:lnTo>
+                  <a:pt x="3249059" y="124438"/>
+                </a:lnTo>
+                <a:close/>
+                <a:lnTo>
+                  <a:pt x="3251310" y="118193"/>
+                </a:lnTo>
+                <a:close/>
+                <a:lnTo>
+                  <a:pt x="3253562" y="111941"/>
+                </a:lnTo>
+                <a:close/>
+                <a:lnTo>
+                  <a:pt x="3255814" y="105678"/>
+                </a:lnTo>
+                <a:close/>
+                <a:lnTo>
+                  <a:pt x="3258065" y="99399"/>
+                </a:lnTo>
+                <a:close/>
+                <a:lnTo>
+                  <a:pt x="3260317" y="93100"/>
+                </a:lnTo>
+                <a:close/>
+                <a:lnTo>
+                  <a:pt x="3262569" y="86774"/>
+                </a:lnTo>
+                <a:close/>
+                <a:lnTo>
+                  <a:pt x="3264820" y="80419"/>
+                </a:lnTo>
+                <a:close/>
+                <a:lnTo>
+                  <a:pt x="3267072" y="74028"/>
+                </a:lnTo>
+                <a:close/>
+                <a:lnTo>
+                  <a:pt x="3269323" y="67596"/>
+                </a:lnTo>
+                <a:close/>
+                <a:lnTo>
+                  <a:pt x="3271575" y="61120"/>
+                </a:lnTo>
+                <a:close/>
+                <a:lnTo>
+                  <a:pt x="3273827" y="54593"/>
+                </a:lnTo>
+                <a:close/>
+                <a:lnTo>
+                  <a:pt x="3276078" y="48012"/>
+                </a:lnTo>
+                <a:close/>
+                <a:lnTo>
+                  <a:pt x="3278330" y="41371"/>
+                </a:lnTo>
+                <a:close/>
+                <a:lnTo>
+                  <a:pt x="3280582" y="34666"/>
+                </a:lnTo>
+                <a:close/>
+                <a:lnTo>
+                  <a:pt x="3282833" y="27891"/>
+                </a:lnTo>
+                <a:close/>
+                <a:lnTo>
+                  <a:pt x="3285085" y="21042"/>
+                </a:lnTo>
+                <a:close/>
+                <a:lnTo>
+                  <a:pt x="3287337" y="14113"/>
+                </a:lnTo>
+                <a:close/>
+                <a:lnTo>
+                  <a:pt x="3289588" y="7101"/>
+                </a:lnTo>
+                <a:close/>
+                <a:lnTo>
+                  <a:pt x="3291840" y="0"/>
                 </a:lnTo>
                 <a:close/>
               </a:path>
             </a:pathLst>
           </a:custGeom>
-          <a:ln w="31750">
+          <a:ln w="38100">
             <a:solidFill>
               <a:srgbClr val="000000"/>
             </a:solidFill>
@@ -4423,8 +5623,8 @@
         </p:nvCxnSpPr>
         <p:spPr>
           <a:xfrm flipV="1">
-            <a:off x="5715000.0" y="1657350.0"/>
-            <a:ext cx="0.0" cy="914400.0"/>
+            <a:off x="6400800.0" y="1200150.0"/>
+            <a:ext cx="0.0" cy="1371600.0"/>
           </a:xfrm>
           <a:prstGeom prst="line">
             <a:avLst/>
@@ -4459,8 +5659,8 @@
         </p:nvCxnSpPr>
         <p:spPr>
           <a:xfrm>
-            <a:off x="4572000.0" y="1657350.0"/>
-            <a:ext cx="1143000.0" cy="0.0"/>
+            <a:off x="4572000.0" y="1200150.0"/>
+            <a:ext cx="1828800.0" cy="0.0"/>
           </a:xfrm>
           <a:prstGeom prst="line">
             <a:avLst/>
@@ -4495,8 +5695,8 @@
         </p:nvSpPr>
         <p:spPr>
           <a:xfrm>
-            <a:off x="5638800" y="1581150"/>
-            <a:ext cx="152400" cy="152400"/>
+            <a:off x="6311900" y="1111250"/>
+            <a:ext cx="177800" cy="177800"/>
           </a:xfrm>
           <a:prstGeom prst="ellipse">
             <a:avLst/>
@@ -4504,455 +5704,6 @@
           <a:solidFill>
             <a:srgbClr val="000000"/>
           </a:solidFill>
-          <a:ln w="12700">
-            <a:solidFill>
-              <a:srgbClr val="FFFFFF"/>
-            </a:solidFill>
-          </a:ln>
-        </p:spPr>
-        <p:style>
-          <a:lnRef idx="1">
-            <a:schemeClr val="accent1"/>
-          </a:lnRef>
-          <a:fillRef idx="3">
-            <a:schemeClr val="accent1"/>
-          </a:fillRef>
-          <a:effectRef idx="2">
-            <a:schemeClr val="accent1"/>
-          </a:effectRef>
-          <a:fontRef idx="minor">
-            <a:schemeClr val="lt1"/>
-          </a:fontRef>
-        </p:style>
-        <p:txBody>
-          <a:bodyPr rtlCol="0" anchor="ctr"/>
-          <a:lstStyle/>
-          <a:p>
-            <a:pPr algn="ctr"/>
-          </a:p>
-        </p:txBody>
-      </p:sp>
-      <p:sp>
-        <p:nvSpPr>
-          <p:cNvPr id="8" name="Freeform 7"/>
-          <p:cNvSpPr/>
-          <p:nvPr/>
-        </p:nvSpPr>
-        <p:spPr>
-          <a:xfrm>
-            <a:off x="5349240" y="1794510"/>
-            <a:ext cx="251460" cy="274320"/>
-          </a:xfrm>
-          <a:custGeom>
-            <a:avLst/>
-            <a:gdLst/>
-            <a:ahLst/>
-            <a:cxnLst/>
-            <a:rect l="l" t="t" r="r" b="b"/>
-            <a:pathLst>
-              <a:path w="251460" h="274320">
-                <a:moveTo>
-                  <a:pt x="0" y="274320"/>
-                </a:moveTo>
-                <a:lnTo>
-                  <a:pt x="2550" y="271549"/>
-                </a:lnTo>
-                <a:close/>
-                <a:lnTo>
-                  <a:pt x="5121" y="268778"/>
-                </a:lnTo>
-                <a:close/>
-                <a:lnTo>
-                  <a:pt x="7712" y="266007"/>
-                </a:lnTo>
-                <a:close/>
-                <a:lnTo>
-                  <a:pt x="10321" y="263236"/>
-                </a:lnTo>
-                <a:close/>
-                <a:lnTo>
-                  <a:pt x="12949" y="260465"/>
-                </a:lnTo>
-                <a:close/>
-                <a:lnTo>
-                  <a:pt x="15595" y="257695"/>
-                </a:lnTo>
-                <a:close/>
-                <a:lnTo>
-                  <a:pt x="18258" y="254924"/>
-                </a:lnTo>
-                <a:close/>
-                <a:lnTo>
-                  <a:pt x="20937" y="252153"/>
-                </a:lnTo>
-                <a:close/>
-                <a:lnTo>
-                  <a:pt x="23633" y="249382"/>
-                </a:lnTo>
-                <a:close/>
-                <a:lnTo>
-                  <a:pt x="26344" y="246611"/>
-                </a:lnTo>
-                <a:close/>
-                <a:lnTo>
-                  <a:pt x="29069" y="243840"/>
-                </a:lnTo>
-                <a:close/>
-                <a:lnTo>
-                  <a:pt x="31808" y="241069"/>
-                </a:lnTo>
-                <a:close/>
-                <a:lnTo>
-                  <a:pt x="34561" y="238298"/>
-                </a:lnTo>
-                <a:close/>
-                <a:lnTo>
-                  <a:pt x="37326" y="235527"/>
-                </a:lnTo>
-                <a:close/>
-                <a:lnTo>
-                  <a:pt x="40104" y="232756"/>
-                </a:lnTo>
-                <a:close/>
-                <a:lnTo>
-                  <a:pt x="42893" y="229985"/>
-                </a:lnTo>
-                <a:close/>
-                <a:lnTo>
-                  <a:pt x="45692" y="227215"/>
-                </a:lnTo>
-                <a:close/>
-                <a:lnTo>
-                  <a:pt x="48502" y="224444"/>
-                </a:lnTo>
-                <a:close/>
-                <a:lnTo>
-                  <a:pt x="51322" y="221673"/>
-                </a:lnTo>
-                <a:close/>
-                <a:lnTo>
-                  <a:pt x="54150" y="218902"/>
-                </a:lnTo>
-                <a:close/>
-                <a:lnTo>
-                  <a:pt x="56987" y="216131"/>
-                </a:lnTo>
-                <a:close/>
-                <a:lnTo>
-                  <a:pt x="59831" y="213360"/>
-                </a:lnTo>
-                <a:close/>
-                <a:lnTo>
-                  <a:pt x="62682" y="210589"/>
-                </a:lnTo>
-                <a:close/>
-                <a:lnTo>
-                  <a:pt x="65540" y="207818"/>
-                </a:lnTo>
-                <a:close/>
-                <a:lnTo>
-                  <a:pt x="68403" y="205047"/>
-                </a:lnTo>
-                <a:close/>
-                <a:lnTo>
-                  <a:pt x="71272" y="202276"/>
-                </a:lnTo>
-                <a:close/>
-                <a:lnTo>
-                  <a:pt x="74145" y="199505"/>
-                </a:lnTo>
-                <a:close/>
-                <a:lnTo>
-                  <a:pt x="77021" y="196735"/>
-                </a:lnTo>
-                <a:close/>
-                <a:lnTo>
-                  <a:pt x="79901" y="193964"/>
-                </a:lnTo>
-                <a:close/>
-                <a:lnTo>
-                  <a:pt x="82784" y="191193"/>
-                </a:lnTo>
-                <a:close/>
-                <a:lnTo>
-                  <a:pt x="85668" y="188422"/>
-                </a:lnTo>
-                <a:close/>
-                <a:lnTo>
-                  <a:pt x="88554" y="185651"/>
-                </a:lnTo>
-                <a:close/>
-                <a:lnTo>
-                  <a:pt x="91440" y="182880"/>
-                </a:lnTo>
-                <a:close/>
-                <a:lnTo>
-                  <a:pt x="94326" y="180109"/>
-                </a:lnTo>
-                <a:close/>
-                <a:lnTo>
-                  <a:pt x="97212" y="177338"/>
-                </a:lnTo>
-                <a:close/>
-                <a:lnTo>
-                  <a:pt x="100096" y="174567"/>
-                </a:lnTo>
-                <a:close/>
-                <a:lnTo>
-                  <a:pt x="102979" y="171796"/>
-                </a:lnTo>
-                <a:close/>
-                <a:lnTo>
-                  <a:pt x="105859" y="169025"/>
-                </a:lnTo>
-                <a:close/>
-                <a:lnTo>
-                  <a:pt x="108735" y="166255"/>
-                </a:lnTo>
-                <a:close/>
-                <a:lnTo>
-                  <a:pt x="111608" y="163484"/>
-                </a:lnTo>
-                <a:close/>
-                <a:lnTo>
-                  <a:pt x="114477" y="160713"/>
-                </a:lnTo>
-                <a:close/>
-                <a:lnTo>
-                  <a:pt x="117340" y="157942"/>
-                </a:lnTo>
-                <a:close/>
-                <a:lnTo>
-                  <a:pt x="120198" y="155171"/>
-                </a:lnTo>
-                <a:close/>
-                <a:lnTo>
-                  <a:pt x="123049" y="152400"/>
-                </a:lnTo>
-                <a:close/>
-                <a:lnTo>
-                  <a:pt x="125893" y="149629"/>
-                </a:lnTo>
-                <a:close/>
-                <a:lnTo>
-                  <a:pt x="128730" y="146858"/>
-                </a:lnTo>
-                <a:close/>
-                <a:lnTo>
-                  <a:pt x="131558" y="144087"/>
-                </a:lnTo>
-                <a:close/>
-                <a:lnTo>
-                  <a:pt x="134378" y="141316"/>
-                </a:lnTo>
-                <a:close/>
-                <a:lnTo>
-                  <a:pt x="137188" y="138545"/>
-                </a:lnTo>
-                <a:close/>
-                <a:lnTo>
-                  <a:pt x="139987" y="135775"/>
-                </a:lnTo>
-                <a:close/>
-                <a:lnTo>
-                  <a:pt x="142776" y="133004"/>
-                </a:lnTo>
-                <a:close/>
-                <a:lnTo>
-                  <a:pt x="145554" y="130233"/>
-                </a:lnTo>
-                <a:close/>
-                <a:lnTo>
-                  <a:pt x="148319" y="127462"/>
-                </a:lnTo>
-                <a:close/>
-                <a:lnTo>
-                  <a:pt x="151072" y="124691"/>
-                </a:lnTo>
-                <a:close/>
-                <a:lnTo>
-                  <a:pt x="153811" y="121920"/>
-                </a:lnTo>
-                <a:close/>
-                <a:lnTo>
-                  <a:pt x="156536" y="119149"/>
-                </a:lnTo>
-                <a:close/>
-                <a:lnTo>
-                  <a:pt x="159247" y="116378"/>
-                </a:lnTo>
-                <a:close/>
-                <a:lnTo>
-                  <a:pt x="161943" y="113607"/>
-                </a:lnTo>
-                <a:close/>
-                <a:lnTo>
-                  <a:pt x="164622" y="110836"/>
-                </a:lnTo>
-                <a:close/>
-                <a:lnTo>
-                  <a:pt x="167285" y="108065"/>
-                </a:lnTo>
-                <a:close/>
-                <a:lnTo>
-                  <a:pt x="169931" y="105295"/>
-                </a:lnTo>
-                <a:close/>
-                <a:lnTo>
-                  <a:pt x="172559" y="102524"/>
-                </a:lnTo>
-                <a:close/>
-                <a:lnTo>
-                  <a:pt x="175168" y="99753"/>
-                </a:lnTo>
-                <a:close/>
-                <a:lnTo>
-                  <a:pt x="177759" y="96982"/>
-                </a:lnTo>
-                <a:close/>
-                <a:lnTo>
-                  <a:pt x="180330" y="94211"/>
-                </a:lnTo>
-                <a:close/>
-                <a:lnTo>
-                  <a:pt x="182880" y="91440"/>
-                </a:lnTo>
-                <a:close/>
-                <a:lnTo>
-                  <a:pt x="185409" y="88669"/>
-                </a:lnTo>
-                <a:close/>
-                <a:lnTo>
-                  <a:pt x="187917" y="85898"/>
-                </a:lnTo>
-                <a:close/>
-                <a:lnTo>
-                  <a:pt x="190403" y="83127"/>
-                </a:lnTo>
-                <a:close/>
-                <a:lnTo>
-                  <a:pt x="192865" y="80356"/>
-                </a:lnTo>
-                <a:close/>
-                <a:lnTo>
-                  <a:pt x="195304" y="77585"/>
-                </a:lnTo>
-                <a:close/>
-                <a:lnTo>
-                  <a:pt x="197719" y="74815"/>
-                </a:lnTo>
-                <a:close/>
-                <a:lnTo>
-                  <a:pt x="200109" y="72044"/>
-                </a:lnTo>
-                <a:close/>
-                <a:lnTo>
-                  <a:pt x="202474" y="69273"/>
-                </a:lnTo>
-                <a:close/>
-                <a:lnTo>
-                  <a:pt x="204813" y="66502"/>
-                </a:lnTo>
-                <a:close/>
-                <a:lnTo>
-                  <a:pt x="207124" y="63731"/>
-                </a:lnTo>
-                <a:close/>
-                <a:lnTo>
-                  <a:pt x="209409" y="60960"/>
-                </a:lnTo>
-                <a:close/>
-                <a:lnTo>
-                  <a:pt x="211665" y="58189"/>
-                </a:lnTo>
-                <a:close/>
-                <a:lnTo>
-                  <a:pt x="213893" y="55418"/>
-                </a:lnTo>
-                <a:close/>
-                <a:lnTo>
-                  <a:pt x="216092" y="52647"/>
-                </a:lnTo>
-                <a:close/>
-                <a:lnTo>
-                  <a:pt x="218261" y="49876"/>
-                </a:lnTo>
-                <a:close/>
-                <a:lnTo>
-                  <a:pt x="220399" y="47105"/>
-                </a:lnTo>
-                <a:close/>
-                <a:lnTo>
-                  <a:pt x="222506" y="44335"/>
-                </a:lnTo>
-                <a:close/>
-                <a:lnTo>
-                  <a:pt x="224581" y="41564"/>
-                </a:lnTo>
-                <a:close/>
-                <a:lnTo>
-                  <a:pt x="226624" y="38793"/>
-                </a:lnTo>
-                <a:close/>
-                <a:lnTo>
-                  <a:pt x="228634" y="36022"/>
-                </a:lnTo>
-                <a:close/>
-                <a:lnTo>
-                  <a:pt x="230609" y="33251"/>
-                </a:lnTo>
-                <a:close/>
-                <a:lnTo>
-                  <a:pt x="232551" y="30480"/>
-                </a:lnTo>
-                <a:close/>
-                <a:lnTo>
-                  <a:pt x="234458" y="27709"/>
-                </a:lnTo>
-                <a:close/>
-                <a:lnTo>
-                  <a:pt x="236329" y="24938"/>
-                </a:lnTo>
-                <a:close/>
-                <a:lnTo>
-                  <a:pt x="238164" y="22167"/>
-                </a:lnTo>
-                <a:close/>
-                <a:lnTo>
-                  <a:pt x="239961" y="19396"/>
-                </a:lnTo>
-                <a:close/>
-                <a:lnTo>
-                  <a:pt x="241722" y="16625"/>
-                </a:lnTo>
-                <a:close/>
-                <a:lnTo>
-                  <a:pt x="243444" y="13855"/>
-                </a:lnTo>
-                <a:close/>
-                <a:lnTo>
-                  <a:pt x="245127" y="11084"/>
-                </a:lnTo>
-                <a:close/>
-                <a:lnTo>
-                  <a:pt x="246771" y="8313"/>
-                </a:lnTo>
-                <a:close/>
-                <a:lnTo>
-                  <a:pt x="248375" y="5542"/>
-                </a:lnTo>
-                <a:close/>
-                <a:lnTo>
-                  <a:pt x="249938" y="2771"/>
-                </a:lnTo>
-                <a:close/>
-                <a:lnTo>
-                  <a:pt x="251460" y="0"/>
-                </a:lnTo>
-                <a:close/>
-              </a:path>
-            </a:pathLst>
-          </a:custGeom>
           <a:ln w="19050">
             <a:solidFill>
               <a:srgbClr val="FFFFFF"/>
@@ -4981,455 +5732,76 @@
           </a:p>
         </p:txBody>
       </p:sp>
-      <p:sp>
-        <p:nvSpPr>
-          <p:cNvPr id="9" name="Freeform 8"/>
-          <p:cNvSpPr/>
+      <p:cxnSp>
+        <p:nvCxnSpPr>
+          <p:cNvPr id="8" name="Connector 7"/>
+          <p:cNvCxnSpPr/>
           <p:nvPr/>
-        </p:nvSpPr>
+        </p:nvCxnSpPr>
         <p:spPr>
           <a:xfrm>
-            <a:off x="5760720" y="1337310"/>
-            <a:ext cx="91440" cy="251460"/>
+            <a:off x="5852160.0" y="2571750.0"/>
+            <a:ext cx="480060.0" cy="0.0"/>
           </a:xfrm>
-          <a:custGeom>
+          <a:prstGeom prst="line">
             <a:avLst/>
-            <a:gdLst/>
-            <a:ahLst/>
-            <a:cxnLst/>
-            <a:rect l="l" t="t" r="r" b="b"/>
-            <a:pathLst>
-              <a:path w="91440" h="251460">
-                <a:moveTo>
-                  <a:pt x="91440" y="0"/>
-                </a:moveTo>
-                <a:lnTo>
-                  <a:pt x="90516" y="2997"/>
-                </a:lnTo>
-                <a:close/>
-                <a:lnTo>
-                  <a:pt x="89593" y="5985"/>
-                </a:lnTo>
-                <a:close/>
-                <a:lnTo>
-                  <a:pt x="88669" y="8963"/>
-                </a:lnTo>
-                <a:close/>
-                <a:lnTo>
-                  <a:pt x="87745" y="11933"/>
-                </a:lnTo>
-                <a:close/>
-                <a:lnTo>
-                  <a:pt x="86822" y="14892"/>
-                </a:lnTo>
-                <a:close/>
-                <a:lnTo>
-                  <a:pt x="85898" y="17843"/>
-                </a:lnTo>
-                <a:close/>
-                <a:lnTo>
-                  <a:pt x="84975" y="20784"/>
-                </a:lnTo>
-                <a:close/>
-                <a:lnTo>
-                  <a:pt x="84051" y="23716"/>
-                </a:lnTo>
-                <a:close/>
-                <a:lnTo>
-                  <a:pt x="83127" y="26639"/>
-                </a:lnTo>
-                <a:close/>
-                <a:lnTo>
-                  <a:pt x="82204" y="29552"/>
-                </a:lnTo>
-                <a:close/>
-                <a:lnTo>
-                  <a:pt x="81280" y="32456"/>
-                </a:lnTo>
-                <a:close/>
-                <a:lnTo>
-                  <a:pt x="80356" y="35350"/>
-                </a:lnTo>
-                <a:close/>
-                <a:lnTo>
-                  <a:pt x="79433" y="38235"/>
-                </a:lnTo>
-                <a:close/>
-                <a:lnTo>
-                  <a:pt x="78509" y="41111"/>
-                </a:lnTo>
-                <a:close/>
-                <a:lnTo>
-                  <a:pt x="77585" y="43978"/>
-                </a:lnTo>
-                <a:close/>
-                <a:lnTo>
-                  <a:pt x="76662" y="46835"/>
-                </a:lnTo>
-                <a:close/>
-                <a:lnTo>
-                  <a:pt x="75738" y="49683"/>
-                </a:lnTo>
-                <a:close/>
-                <a:lnTo>
-                  <a:pt x="74815" y="52521"/>
-                </a:lnTo>
-                <a:close/>
-                <a:lnTo>
-                  <a:pt x="73891" y="55351"/>
-                </a:lnTo>
-                <a:close/>
-                <a:lnTo>
-                  <a:pt x="72967" y="58170"/>
-                </a:lnTo>
-                <a:close/>
-                <a:lnTo>
-                  <a:pt x="72044" y="60981"/>
-                </a:lnTo>
-                <a:close/>
-                <a:lnTo>
-                  <a:pt x="71120" y="63782"/>
-                </a:lnTo>
-                <a:close/>
-                <a:lnTo>
-                  <a:pt x="70196" y="66574"/>
-                </a:lnTo>
-                <a:close/>
-                <a:lnTo>
-                  <a:pt x="69273" y="69357"/>
-                </a:lnTo>
-                <a:close/>
-                <a:lnTo>
-                  <a:pt x="68349" y="72130"/>
-                </a:lnTo>
-                <a:close/>
-                <a:lnTo>
-                  <a:pt x="67425" y="74894"/>
-                </a:lnTo>
-                <a:close/>
-                <a:lnTo>
-                  <a:pt x="66502" y="77648"/>
-                </a:lnTo>
-                <a:close/>
-                <a:lnTo>
-                  <a:pt x="65578" y="80394"/>
-                </a:lnTo>
-                <a:close/>
-                <a:lnTo>
-                  <a:pt x="64655" y="83130"/>
-                </a:lnTo>
-                <a:close/>
-                <a:lnTo>
-                  <a:pt x="63731" y="85856"/>
-                </a:lnTo>
-                <a:close/>
-                <a:lnTo>
-                  <a:pt x="62807" y="88573"/>
-                </a:lnTo>
-                <a:close/>
-                <a:lnTo>
-                  <a:pt x="61884" y="91281"/>
-                </a:lnTo>
-                <a:close/>
-                <a:lnTo>
-                  <a:pt x="60960" y="93980"/>
-                </a:lnTo>
-                <a:close/>
-                <a:lnTo>
-                  <a:pt x="60036" y="96669"/>
-                </a:lnTo>
-                <a:close/>
-                <a:lnTo>
-                  <a:pt x="59113" y="99349"/>
-                </a:lnTo>
-                <a:close/>
-                <a:lnTo>
-                  <a:pt x="58189" y="102020"/>
-                </a:lnTo>
-                <a:close/>
-                <a:lnTo>
-                  <a:pt x="57265" y="104681"/>
-                </a:lnTo>
-                <a:close/>
-                <a:lnTo>
-                  <a:pt x="56342" y="107333"/>
-                </a:lnTo>
-                <a:close/>
-                <a:lnTo>
-                  <a:pt x="55418" y="109976"/>
-                </a:lnTo>
-                <a:close/>
-                <a:lnTo>
-                  <a:pt x="54495" y="112609"/>
-                </a:lnTo>
-                <a:close/>
-                <a:lnTo>
-                  <a:pt x="53571" y="115233"/>
-                </a:lnTo>
-                <a:close/>
-                <a:lnTo>
-                  <a:pt x="52647" y="117848"/>
-                </a:lnTo>
-                <a:close/>
-                <a:lnTo>
-                  <a:pt x="51724" y="120453"/>
-                </a:lnTo>
-                <a:close/>
-                <a:lnTo>
-                  <a:pt x="50800" y="123049"/>
-                </a:lnTo>
-                <a:close/>
-                <a:lnTo>
-                  <a:pt x="49876" y="125636"/>
-                </a:lnTo>
-                <a:close/>
-                <a:lnTo>
-                  <a:pt x="48953" y="128213"/>
-                </a:lnTo>
-                <a:close/>
-                <a:lnTo>
-                  <a:pt x="48029" y="130781"/>
-                </a:lnTo>
-                <a:close/>
-                <a:lnTo>
-                  <a:pt x="47105" y="133340"/>
-                </a:lnTo>
-                <a:close/>
-                <a:lnTo>
-                  <a:pt x="46182" y="135889"/>
-                </a:lnTo>
-                <a:close/>
-                <a:lnTo>
-                  <a:pt x="45258" y="138429"/>
-                </a:lnTo>
-                <a:close/>
-                <a:lnTo>
-                  <a:pt x="44335" y="140960"/>
-                </a:lnTo>
-                <a:close/>
-                <a:lnTo>
-                  <a:pt x="43411" y="143481"/>
-                </a:lnTo>
-                <a:close/>
-                <a:lnTo>
-                  <a:pt x="42487" y="145993"/>
-                </a:lnTo>
-                <a:close/>
-                <a:lnTo>
-                  <a:pt x="41564" y="148496"/>
-                </a:lnTo>
-                <a:close/>
-                <a:lnTo>
-                  <a:pt x="40640" y="150989"/>
-                </a:lnTo>
-                <a:close/>
-                <a:lnTo>
-                  <a:pt x="39716" y="153473"/>
-                </a:lnTo>
-                <a:close/>
-                <a:lnTo>
-                  <a:pt x="38793" y="155948"/>
-                </a:lnTo>
-                <a:close/>
-                <a:lnTo>
-                  <a:pt x="37869" y="158413"/>
-                </a:lnTo>
-                <a:close/>
-                <a:lnTo>
-                  <a:pt x="36945" y="160869"/>
-                </a:lnTo>
-                <a:close/>
-                <a:lnTo>
-                  <a:pt x="36022" y="163316"/>
-                </a:lnTo>
-                <a:close/>
-                <a:lnTo>
-                  <a:pt x="35098" y="165753"/>
-                </a:lnTo>
-                <a:close/>
-                <a:lnTo>
-                  <a:pt x="34175" y="168181"/>
-                </a:lnTo>
-                <a:close/>
-                <a:lnTo>
-                  <a:pt x="33251" y="170600"/>
-                </a:lnTo>
-                <a:close/>
-                <a:lnTo>
-                  <a:pt x="32327" y="173009"/>
-                </a:lnTo>
-                <a:close/>
-                <a:lnTo>
-                  <a:pt x="31404" y="175409"/>
-                </a:lnTo>
-                <a:close/>
-                <a:lnTo>
-                  <a:pt x="30480" y="177800"/>
-                </a:lnTo>
-                <a:close/>
-                <a:lnTo>
-                  <a:pt x="29556" y="180181"/>
-                </a:lnTo>
-                <a:close/>
-                <a:lnTo>
-                  <a:pt x="28633" y="182553"/>
-                </a:lnTo>
-                <a:close/>
-                <a:lnTo>
-                  <a:pt x="27709" y="184916"/>
-                </a:lnTo>
-                <a:close/>
-                <a:lnTo>
-                  <a:pt x="26785" y="187270"/>
-                </a:lnTo>
-                <a:close/>
-                <a:lnTo>
-                  <a:pt x="25862" y="189614"/>
-                </a:lnTo>
-                <a:close/>
-                <a:lnTo>
-                  <a:pt x="24938" y="191948"/>
-                </a:lnTo>
-                <a:close/>
-                <a:lnTo>
-                  <a:pt x="24015" y="194274"/>
-                </a:lnTo>
-                <a:close/>
-                <a:lnTo>
-                  <a:pt x="23091" y="196590"/>
-                </a:lnTo>
-                <a:close/>
-                <a:lnTo>
-                  <a:pt x="22167" y="198897"/>
-                </a:lnTo>
-                <a:close/>
-                <a:lnTo>
-                  <a:pt x="21244" y="201194"/>
-                </a:lnTo>
-                <a:close/>
-                <a:lnTo>
-                  <a:pt x="20320" y="203482"/>
-                </a:lnTo>
-                <a:close/>
-                <a:lnTo>
-                  <a:pt x="19396" y="205761"/>
-                </a:lnTo>
-                <a:close/>
-                <a:lnTo>
-                  <a:pt x="18473" y="208030"/>
-                </a:lnTo>
-                <a:close/>
-                <a:lnTo>
-                  <a:pt x="17549" y="210291"/>
-                </a:lnTo>
-                <a:close/>
-                <a:lnTo>
-                  <a:pt x="16625" y="212541"/>
-                </a:lnTo>
-                <a:close/>
-                <a:lnTo>
-                  <a:pt x="15702" y="214783"/>
-                </a:lnTo>
-                <a:close/>
-                <a:lnTo>
-                  <a:pt x="14778" y="217015"/>
-                </a:lnTo>
-                <a:close/>
-                <a:lnTo>
-                  <a:pt x="13855" y="219238"/>
-                </a:lnTo>
-                <a:close/>
-                <a:lnTo>
-                  <a:pt x="12931" y="221451"/>
-                </a:lnTo>
-                <a:close/>
-                <a:lnTo>
-                  <a:pt x="12007" y="223655"/>
-                </a:lnTo>
-                <a:close/>
-                <a:lnTo>
-                  <a:pt x="11084" y="225850"/>
-                </a:lnTo>
-                <a:close/>
-                <a:lnTo>
-                  <a:pt x="10160" y="228036"/>
-                </a:lnTo>
-                <a:close/>
-                <a:lnTo>
-                  <a:pt x="9236" y="230212"/>
-                </a:lnTo>
-                <a:close/>
-                <a:lnTo>
-                  <a:pt x="8313" y="232379"/>
-                </a:lnTo>
-                <a:close/>
-                <a:lnTo>
-                  <a:pt x="7389" y="234536"/>
-                </a:lnTo>
-                <a:close/>
-                <a:lnTo>
-                  <a:pt x="6465" y="236684"/>
-                </a:lnTo>
-                <a:close/>
-                <a:lnTo>
-                  <a:pt x="5542" y="238823"/>
-                </a:lnTo>
-                <a:close/>
-                <a:lnTo>
-                  <a:pt x="4618" y="240952"/>
-                </a:lnTo>
-                <a:close/>
-                <a:lnTo>
-                  <a:pt x="3695" y="243073"/>
-                </a:lnTo>
-                <a:close/>
-                <a:lnTo>
-                  <a:pt x="2771" y="245183"/>
-                </a:lnTo>
-                <a:close/>
-                <a:lnTo>
-                  <a:pt x="1847" y="247285"/>
-                </a:lnTo>
-                <a:close/>
-                <a:lnTo>
-                  <a:pt x="924" y="249377"/>
-                </a:lnTo>
-                <a:close/>
-                <a:lnTo>
-                  <a:pt x="0" y="251460"/>
-                </a:lnTo>
-                <a:close/>
-              </a:path>
-            </a:pathLst>
-          </a:custGeom>
-          <a:ln w="19050">
+          </a:prstGeom>
+          <a:ln w="15240">
             <a:solidFill>
               <a:srgbClr val="FFFFFF"/>
             </a:solidFill>
           </a:ln>
         </p:spPr>
         <p:style>
-          <a:lnRef idx="1">
+          <a:lnRef idx="2">
             <a:schemeClr val="accent1"/>
           </a:lnRef>
-          <a:fillRef idx="3">
+          <a:fillRef idx="0">
             <a:schemeClr val="accent1"/>
           </a:fillRef>
-          <a:effectRef idx="2">
+          <a:effectRef idx="1">
             <a:schemeClr val="accent1"/>
           </a:effectRef>
           <a:fontRef idx="minor">
-            <a:schemeClr val="lt1"/>
+            <a:schemeClr val="tx1"/>
           </a:fontRef>
         </p:style>
-        <p:txBody>
-          <a:bodyPr rtlCol="0" anchor="ctr"/>
-          <a:lstStyle/>
-          <a:p>
-            <a:pPr algn="ctr"/>
-          </a:p>
-        </p:txBody>
-      </p:sp>
+      </p:cxnSp>
+      <p:cxnSp>
+        <p:nvCxnSpPr>
+          <p:cNvPr id="9" name="Connector 8"/>
+          <p:cNvCxnSpPr/>
+          <p:nvPr/>
+        </p:nvCxnSpPr>
+        <p:spPr>
+          <a:xfrm flipH="1">
+            <a:off x="6469380.0" y="2571750.0"/>
+            <a:ext cx="480060.0" cy="0.0"/>
+          </a:xfrm>
+          <a:prstGeom prst="line">
+            <a:avLst/>
+          </a:prstGeom>
+          <a:ln w="15240">
+            <a:solidFill>
+              <a:srgbClr val="FFFFFF"/>
+            </a:solidFill>
+          </a:ln>
+        </p:spPr>
+        <p:style>
+          <a:lnRef idx="2">
+            <a:schemeClr val="accent1"/>
+          </a:lnRef>
+          <a:fillRef idx="0">
+            <a:schemeClr val="accent1"/>
+          </a:fillRef>
+          <a:effectRef idx="1">
+            <a:schemeClr val="accent1"/>
+          </a:effectRef>
+          <a:fontRef idx="minor">
+            <a:schemeClr val="tx1"/>
+          </a:fontRef>
+        </p:style>
+      </p:cxnSp>
       <p:cxnSp>
         <p:nvCxnSpPr>
           <p:cNvPr id="10" name="Connector 9"/>
@@ -5437,9 +5809,9 @@
           <p:nvPr/>
         </p:nvCxnSpPr>
         <p:spPr>
-          <a:xfrm>
-            <a:off x="4572000.0" y="2571750.0"/>
-            <a:ext cx="0.0" cy="0.0"/>
+          <a:xfrm flipV="1">
+            <a:off x="6080760.0" y="1346454.0"/>
+            <a:ext cx="228600.0" cy="306324.0"/>
           </a:xfrm>
           <a:prstGeom prst="line">
             <a:avLst/>
@@ -5472,9 +5844,9 @@
           <p:nvPr/>
         </p:nvCxnSpPr>
         <p:spPr>
-          <a:xfrm>
-            <a:off x="4572000.0" y="2571750.0"/>
-            <a:ext cx="0.0" cy="0.0"/>
+          <a:xfrm flipH="1">
+            <a:off x="6446520.0" y="752094.0"/>
+            <a:ext cx="137160.0" cy="342900.0"/>
           </a:xfrm>
           <a:prstGeom prst="line">
             <a:avLst/>
@@ -5508,7 +5880,7 @@
         </p:nvSpPr>
         <p:spPr>
           <a:xfrm>
-            <a:off x="5461000" y="2391410"/>
+            <a:off x="5232400" y="196850"/>
             <a:ext cx="1524000" cy="508000"/>
           </a:xfrm>
           <a:prstGeom prst="rect">
@@ -5523,15 +5895,15 @@
           <a:lstStyle/>
           <a:p>
             <a:pPr>
-              <a:defRPr sz="1800" b="1">
+              <a:defRPr sz="2200" b="1">
                 <a:solidFill>
                   <a:srgbClr val="FFFFFF"/>
                 </a:solidFill>
-                <a:latin typeface="Inter"/>
+                <a:latin typeface="Arial"/>
               </a:defRPr>
             </a:pPr>
             <a:r>
-              <a:t>a</a:t>
+              <a:t>y=f(x)</a:t>
             </a:r>
           </a:p>
         </p:txBody>
@@ -5544,7 +5916,7 @@
         </p:nvSpPr>
         <p:spPr>
           <a:xfrm>
-            <a:off x="4135120" y="1339850"/>
+            <a:off x="6146800" y="2437130"/>
             <a:ext cx="1524000" cy="508000"/>
           </a:xfrm>
           <a:prstGeom prst="rect">
@@ -5559,15 +5931,87 @@
           <a:lstStyle/>
           <a:p>
             <a:pPr>
-              <a:defRPr sz="1800" b="1">
+              <a:defRPr sz="2200" b="1">
                 <a:solidFill>
                   <a:srgbClr val="FFFFFF"/>
                 </a:solidFill>
-                <a:latin typeface="Inter"/>
+                <a:latin typeface="Arial"/>
               </a:defRPr>
             </a:pPr>
             <a:r>
+              <a:t>a</a:t>
+            </a:r>
+          </a:p>
+        </p:txBody>
+      </p:sp>
+      <p:sp>
+        <p:nvSpPr>
+          <p:cNvPr id="14" name="TextBox 13"/>
+          <p:cNvSpPr txBox="1"/>
+          <p:nvPr/>
+        </p:nvSpPr>
+        <p:spPr>
+          <a:xfrm>
+            <a:off x="4089400" y="882650"/>
+            <a:ext cx="1524000" cy="508000"/>
+          </a:xfrm>
+          <a:prstGeom prst="rect">
+            <a:avLst/>
+          </a:prstGeom>
+          <a:noFill/>
+        </p:spPr>
+        <p:txBody>
+          <a:bodyPr wrap="none">
+            <a:spAutoFit/>
+          </a:bodyPr>
+          <a:lstStyle/>
+          <a:p>
+            <a:pPr>
+              <a:defRPr sz="2200" b="1">
+                <a:solidFill>
+                  <a:srgbClr val="FFFFFF"/>
+                </a:solidFill>
+                <a:latin typeface="Arial"/>
+              </a:defRPr>
+            </a:pPr>
+            <a:r>
               <a:t>L</a:t>
+            </a:r>
+          </a:p>
+        </p:txBody>
+      </p:sp>
+      <p:sp>
+        <p:nvSpPr>
+          <p:cNvPr id="15" name="TextBox 14"/>
+          <p:cNvSpPr txBox="1"/>
+          <p:nvPr/>
+        </p:nvSpPr>
+        <p:spPr>
+          <a:xfrm>
+            <a:off x="4135120" y="2437130"/>
+            <a:ext cx="1524000" cy="508000"/>
+          </a:xfrm>
+          <a:prstGeom prst="rect">
+            <a:avLst/>
+          </a:prstGeom>
+          <a:noFill/>
+        </p:spPr>
+        <p:txBody>
+          <a:bodyPr wrap="none">
+            <a:spAutoFit/>
+          </a:bodyPr>
+          <a:lstStyle/>
+          <a:p>
+            <a:pPr>
+              <a:defRPr sz="2200" b="1">
+                <a:solidFill>
+                  <a:srgbClr val="FFFFFF"/>
+                </a:solidFill>
+                <a:latin typeface="Arial"/>
+              </a:defRPr>
+            </a:pPr>
+            <a:r>
+              <a:t>O</a:t>
             </a:r>
           </a:p>
         </p:txBody>

--- a/output/1.pptx
+++ b/output/1.pptx
@@ -3104,8 +3104,8 @@
         </p:nvCxnSpPr>
         <p:spPr>
           <a:xfrm>
-            <a:off x="3200400.0" y="2571750.0"/>
-            <a:ext cx="4114800.0" cy="0.0"/>
+            <a:off x="3429000.0" y="2571750.0"/>
+            <a:ext cx="2971800.0" cy="0.0"/>
           </a:xfrm>
           <a:prstGeom prst="line">
             <a:avLst/>
@@ -3139,8 +3139,8 @@
         </p:nvCxnSpPr>
         <p:spPr>
           <a:xfrm flipV="1">
-            <a:off x="4572000.0" y="285750.0"/>
-            <a:ext cx="0.0" cy="3200400.0"/>
+            <a:off x="4572000.0" y="57150.0"/>
+            <a:ext cx="0.0" cy="4800600.0"/>
           </a:xfrm>
           <a:prstGeom prst="line">
             <a:avLst/>
@@ -3174,8 +3174,8 @@
         </p:nvSpPr>
         <p:spPr>
           <a:xfrm>
-            <a:off x="3429000" y="368046"/>
-            <a:ext cx="3291840" cy="2807208"/>
+            <a:off x="4105656" y="523494"/>
+            <a:ext cx="1668780" cy="4206240"/>
           </a:xfrm>
           <a:custGeom>
             <a:avLst/>
@@ -3184,2404 +3184,2404 @@
             <a:cxnLst/>
             <a:rect l="l" t="t" r="r" b="b"/>
             <a:pathLst>
-              <a:path w="3291840" h="2807208">
+              <a:path w="1668780" h="4206240">
                 <a:moveTo>
-                  <a:pt x="0" y="2807208"/>
+                  <a:pt x="0" y="4206240"/>
                 </a:moveTo>
                 <a:lnTo>
-                  <a:pt x="6755" y="2799101"/>
-                </a:lnTo>
-                <a:close/>
-                <a:lnTo>
-                  <a:pt x="13510" y="2791238"/>
-                </a:lnTo>
-                <a:close/>
-                <a:lnTo>
-                  <a:pt x="20265" y="2783599"/>
-                </a:lnTo>
-                <a:close/>
-                <a:lnTo>
-                  <a:pt x="27020" y="2776170"/>
-                </a:lnTo>
-                <a:close/>
-                <a:lnTo>
-                  <a:pt x="33775" y="2768934"/>
-                </a:lnTo>
-                <a:close/>
-                <a:lnTo>
-                  <a:pt x="40530" y="2761872"/>
-                </a:lnTo>
-                <a:close/>
-                <a:lnTo>
-                  <a:pt x="47285" y="2754969"/>
-                </a:lnTo>
-                <a:close/>
-                <a:lnTo>
-                  <a:pt x="54040" y="2748208"/>
-                </a:lnTo>
-                <a:close/>
-                <a:lnTo>
-                  <a:pt x="60795" y="2741572"/>
-                </a:lnTo>
-                <a:close/>
-                <a:lnTo>
-                  <a:pt x="67550" y="2735043"/>
-                </a:lnTo>
-                <a:close/>
-                <a:lnTo>
-                  <a:pt x="74305" y="2728606"/>
-                </a:lnTo>
-                <a:close/>
-                <a:lnTo>
-                  <a:pt x="81059" y="2722244"/>
-                </a:lnTo>
-                <a:close/>
-                <a:lnTo>
-                  <a:pt x="87814" y="2715939"/>
-                </a:lnTo>
-                <a:close/>
-                <a:lnTo>
-                  <a:pt x="94569" y="2709675"/>
-                </a:lnTo>
-                <a:close/>
-                <a:lnTo>
-                  <a:pt x="101324" y="2703435"/>
-                </a:lnTo>
-                <a:close/>
-                <a:lnTo>
-                  <a:pt x="108079" y="2697202"/>
-                </a:lnTo>
-                <a:close/>
-                <a:lnTo>
-                  <a:pt x="114834" y="2690960"/>
-                </a:lnTo>
-                <a:close/>
-                <a:lnTo>
-                  <a:pt x="121589" y="2684691"/>
-                </a:lnTo>
-                <a:close/>
-                <a:lnTo>
-                  <a:pt x="128344" y="2678379"/>
-                </a:lnTo>
-                <a:close/>
-                <a:lnTo>
-                  <a:pt x="135099" y="2672007"/>
-                </a:lnTo>
-                <a:close/>
-                <a:lnTo>
-                  <a:pt x="141854" y="2665560"/>
-                </a:lnTo>
-                <a:close/>
-                <a:lnTo>
-                  <a:pt x="148609" y="2659054"/>
-                </a:lnTo>
-                <a:close/>
-                <a:lnTo>
-                  <a:pt x="155364" y="2652519"/>
-                </a:lnTo>
-                <a:close/>
-                <a:lnTo>
-                  <a:pt x="162119" y="2645988"/>
-                </a:lnTo>
-                <a:close/>
-                <a:lnTo>
-                  <a:pt x="168874" y="2639491"/>
-                </a:lnTo>
-                <a:close/>
-                <a:lnTo>
-                  <a:pt x="175629" y="2633062"/>
-                </a:lnTo>
-                <a:close/>
-                <a:lnTo>
-                  <a:pt x="182384" y="2626730"/>
-                </a:lnTo>
-                <a:close/>
-                <a:lnTo>
-                  <a:pt x="189139" y="2620529"/>
-                </a:lnTo>
-                <a:close/>
-                <a:lnTo>
-                  <a:pt x="195894" y="2614489"/>
-                </a:lnTo>
-                <a:close/>
-                <a:lnTo>
-                  <a:pt x="202649" y="2608642"/>
-                </a:lnTo>
-                <a:close/>
-                <a:lnTo>
-                  <a:pt x="209404" y="2603019"/>
-                </a:lnTo>
-                <a:close/>
-                <a:lnTo>
-                  <a:pt x="216159" y="2597617"/>
-                </a:lnTo>
-                <a:close/>
-                <a:lnTo>
-                  <a:pt x="222914" y="2592407"/>
-                </a:lnTo>
-                <a:close/>
-                <a:lnTo>
-                  <a:pt x="229669" y="2587357"/>
-                </a:lnTo>
-                <a:close/>
-                <a:lnTo>
-                  <a:pt x="236424" y="2582435"/>
-                </a:lnTo>
-                <a:close/>
-                <a:lnTo>
-                  <a:pt x="243178" y="2577612"/>
-                </a:lnTo>
-                <a:close/>
-                <a:lnTo>
-                  <a:pt x="249933" y="2572855"/>
-                </a:lnTo>
-                <a:close/>
-                <a:lnTo>
-                  <a:pt x="256688" y="2568133"/>
-                </a:lnTo>
-                <a:close/>
-                <a:lnTo>
-                  <a:pt x="263443" y="2563415"/>
-                </a:lnTo>
-                <a:close/>
-                <a:lnTo>
-                  <a:pt x="270198" y="2558670"/>
-                </a:lnTo>
-                <a:close/>
-                <a:lnTo>
-                  <a:pt x="276953" y="2553867"/>
-                </a:lnTo>
-                <a:close/>
-                <a:lnTo>
-                  <a:pt x="283708" y="2548994"/>
-                </a:lnTo>
-                <a:close/>
-                <a:lnTo>
-                  <a:pt x="290463" y="2544064"/>
-                </a:lnTo>
-                <a:close/>
-                <a:lnTo>
-                  <a:pt x="297218" y="2539091"/>
-                </a:lnTo>
-                <a:close/>
-                <a:lnTo>
-                  <a:pt x="303973" y="2534090"/>
-                </a:lnTo>
-                <a:close/>
-                <a:lnTo>
-                  <a:pt x="310728" y="2529076"/>
-                </a:lnTo>
-                <a:close/>
-                <a:lnTo>
-                  <a:pt x="317483" y="2524062"/>
-                </a:lnTo>
-                <a:close/>
-                <a:lnTo>
-                  <a:pt x="324238" y="2519064"/>
-                </a:lnTo>
-                <a:close/>
-                <a:lnTo>
-                  <a:pt x="330993" y="2514096"/>
-                </a:lnTo>
-                <a:close/>
-                <a:lnTo>
-                  <a:pt x="337748" y="2509172"/>
-                </a:lnTo>
-                <a:close/>
-                <a:lnTo>
-                  <a:pt x="344503" y="2504308"/>
-                </a:lnTo>
-                <a:close/>
-                <a:lnTo>
-                  <a:pt x="351258" y="2499512"/>
-                </a:lnTo>
-                <a:close/>
-                <a:lnTo>
-                  <a:pt x="358013" y="2494785"/>
-                </a:lnTo>
-                <a:close/>
-                <a:lnTo>
-                  <a:pt x="364768" y="2490128"/>
-                </a:lnTo>
-                <a:close/>
-                <a:lnTo>
-                  <a:pt x="371523" y="2485537"/>
-                </a:lnTo>
-                <a:close/>
-                <a:lnTo>
-                  <a:pt x="378278" y="2481015"/>
-                </a:lnTo>
-                <a:close/>
-                <a:lnTo>
-                  <a:pt x="385033" y="2476558"/>
-                </a:lnTo>
-                <a:close/>
-                <a:lnTo>
-                  <a:pt x="391788" y="2472167"/>
-                </a:lnTo>
-                <a:close/>
-                <a:lnTo>
-                  <a:pt x="398543" y="2467842"/>
-                </a:lnTo>
-                <a:close/>
-                <a:lnTo>
-                  <a:pt x="405297" y="2463580"/>
-                </a:lnTo>
-                <a:close/>
-                <a:lnTo>
-                  <a:pt x="412052" y="2459383"/>
-                </a:lnTo>
-                <a:close/>
-                <a:lnTo>
-                  <a:pt x="418807" y="2455246"/>
-                </a:lnTo>
-                <a:close/>
-                <a:lnTo>
-                  <a:pt x="425562" y="2451159"/>
-                </a:lnTo>
-                <a:close/>
-                <a:lnTo>
-                  <a:pt x="432317" y="2447111"/>
-                </a:lnTo>
-                <a:close/>
-                <a:lnTo>
-                  <a:pt x="439072" y="2443089"/>
-                </a:lnTo>
-                <a:close/>
-                <a:lnTo>
-                  <a:pt x="445827" y="2439083"/>
-                </a:lnTo>
-                <a:close/>
-                <a:lnTo>
-                  <a:pt x="452582" y="2435080"/>
-                </a:lnTo>
-                <a:close/>
-                <a:lnTo>
-                  <a:pt x="459337" y="2431069"/>
-                </a:lnTo>
-                <a:close/>
-                <a:lnTo>
-                  <a:pt x="466092" y="2427038"/>
-                </a:lnTo>
-                <a:close/>
-                <a:lnTo>
-                  <a:pt x="472847" y="2422975"/>
-                </a:lnTo>
-                <a:close/>
-                <a:lnTo>
-                  <a:pt x="479602" y="2418868"/>
-                </a:lnTo>
-                <a:close/>
-                <a:lnTo>
-                  <a:pt x="486357" y="2414711"/>
-                </a:lnTo>
-                <a:close/>
-                <a:lnTo>
-                  <a:pt x="493112" y="2410517"/>
-                </a:lnTo>
-                <a:close/>
-                <a:lnTo>
-                  <a:pt x="499867" y="2406309"/>
-                </a:lnTo>
-                <a:close/>
-                <a:lnTo>
-                  <a:pt x="506622" y="2402108"/>
-                </a:lnTo>
-                <a:close/>
-                <a:lnTo>
-                  <a:pt x="513377" y="2397934"/>
-                </a:lnTo>
-                <a:close/>
-                <a:lnTo>
-                  <a:pt x="520132" y="2393811"/>
-                </a:lnTo>
-                <a:close/>
-                <a:lnTo>
-                  <a:pt x="526887" y="2389757"/>
-                </a:lnTo>
-                <a:close/>
-                <a:lnTo>
-                  <a:pt x="533642" y="2385797"/>
-                </a:lnTo>
-                <a:close/>
-                <a:lnTo>
-                  <a:pt x="540397" y="2381950"/>
-                </a:lnTo>
-                <a:close/>
-                <a:lnTo>
-                  <a:pt x="547152" y="2378238"/>
-                </a:lnTo>
-                <a:close/>
-                <a:lnTo>
-                  <a:pt x="553907" y="2374679"/>
-                </a:lnTo>
-                <a:close/>
-                <a:lnTo>
-                  <a:pt x="560662" y="2371264"/>
-                </a:lnTo>
-                <a:close/>
-                <a:lnTo>
-                  <a:pt x="567416" y="2367973"/>
-                </a:lnTo>
-                <a:close/>
-                <a:lnTo>
-                  <a:pt x="574171" y="2364783"/>
-                </a:lnTo>
-                <a:close/>
-                <a:lnTo>
-                  <a:pt x="580926" y="2361673"/>
-                </a:lnTo>
-                <a:close/>
-                <a:lnTo>
-                  <a:pt x="587681" y="2358622"/>
-                </a:lnTo>
-                <a:close/>
-                <a:lnTo>
-                  <a:pt x="594436" y="2355608"/>
-                </a:lnTo>
-                <a:close/>
-                <a:lnTo>
-                  <a:pt x="601191" y="2352611"/>
-                </a:lnTo>
-                <a:close/>
-                <a:lnTo>
-                  <a:pt x="607946" y="2349607"/>
-                </a:lnTo>
-                <a:close/>
-                <a:lnTo>
-                  <a:pt x="614701" y="2346577"/>
-                </a:lnTo>
-                <a:close/>
-                <a:lnTo>
-                  <a:pt x="621456" y="2343500"/>
-                </a:lnTo>
-                <a:close/>
-                <a:lnTo>
-                  <a:pt x="628211" y="2340374"/>
-                </a:lnTo>
-                <a:close/>
-                <a:lnTo>
-                  <a:pt x="634966" y="2337211"/>
-                </a:lnTo>
-                <a:close/>
-                <a:lnTo>
-                  <a:pt x="641721" y="2334023"/>
-                </a:lnTo>
-                <a:close/>
-                <a:lnTo>
-                  <a:pt x="648476" y="2330822"/>
-                </a:lnTo>
-                <a:close/>
-                <a:lnTo>
-                  <a:pt x="655231" y="2327619"/>
-                </a:lnTo>
-                <a:close/>
-                <a:lnTo>
-                  <a:pt x="661986" y="2324427"/>
-                </a:lnTo>
-                <a:close/>
-                <a:lnTo>
-                  <a:pt x="668741" y="2321257"/>
-                </a:lnTo>
-                <a:close/>
-                <a:lnTo>
-                  <a:pt x="675496" y="2318122"/>
-                </a:lnTo>
-                <a:close/>
-                <a:lnTo>
-                  <a:pt x="682251" y="2315033"/>
-                </a:lnTo>
-                <a:close/>
-                <a:lnTo>
-                  <a:pt x="689006" y="2312001"/>
-                </a:lnTo>
-                <a:close/>
-                <a:lnTo>
-                  <a:pt x="695761" y="2309034"/>
-                </a:lnTo>
-                <a:close/>
-                <a:lnTo>
-                  <a:pt x="702516" y="2306132"/>
-                </a:lnTo>
-                <a:close/>
-                <a:lnTo>
-                  <a:pt x="709271" y="2303294"/>
-                </a:lnTo>
-                <a:close/>
-                <a:lnTo>
-                  <a:pt x="716026" y="2300520"/>
-                </a:lnTo>
-                <a:close/>
-                <a:lnTo>
-                  <a:pt x="722781" y="2297811"/>
-                </a:lnTo>
-                <a:close/>
-                <a:lnTo>
-                  <a:pt x="729535" y="2295167"/>
-                </a:lnTo>
-                <a:close/>
-                <a:lnTo>
-                  <a:pt x="736290" y="2292588"/>
-                </a:lnTo>
-                <a:close/>
-                <a:lnTo>
-                  <a:pt x="743045" y="2290073"/>
-                </a:lnTo>
-                <a:close/>
-                <a:lnTo>
-                  <a:pt x="749800" y="2287624"/>
-                </a:lnTo>
-                <a:close/>
-                <a:lnTo>
-                  <a:pt x="756555" y="2285239"/>
-                </a:lnTo>
-                <a:close/>
-                <a:lnTo>
-                  <a:pt x="763310" y="2282915"/>
-                </a:lnTo>
-                <a:close/>
-                <a:lnTo>
-                  <a:pt x="770065" y="2280640"/>
-                </a:lnTo>
-                <a:close/>
-                <a:lnTo>
-                  <a:pt x="776820" y="2278401"/>
-                </a:lnTo>
-                <a:close/>
-                <a:lnTo>
-                  <a:pt x="783575" y="2276188"/>
-                </a:lnTo>
-                <a:close/>
-                <a:lnTo>
-                  <a:pt x="790330" y="2273986"/>
-                </a:lnTo>
-                <a:close/>
-                <a:lnTo>
-                  <a:pt x="797085" y="2271785"/>
-                </a:lnTo>
-                <a:close/>
-                <a:lnTo>
-                  <a:pt x="803840" y="2269573"/>
-                </a:lnTo>
-                <a:close/>
-                <a:lnTo>
-                  <a:pt x="810595" y="2267336"/>
-                </a:lnTo>
-                <a:close/>
-                <a:lnTo>
-                  <a:pt x="817350" y="2265064"/>
-                </a:lnTo>
-                <a:close/>
-                <a:lnTo>
-                  <a:pt x="824105" y="2262743"/>
-                </a:lnTo>
-                <a:close/>
-                <a:lnTo>
-                  <a:pt x="830860" y="2260371"/>
-                </a:lnTo>
-                <a:close/>
-                <a:lnTo>
-                  <a:pt x="837615" y="2257966"/>
-                </a:lnTo>
-                <a:close/>
-                <a:lnTo>
-                  <a:pt x="844370" y="2255552"/>
-                </a:lnTo>
-                <a:close/>
-                <a:lnTo>
-                  <a:pt x="851125" y="2253150"/>
-                </a:lnTo>
-                <a:close/>
-                <a:lnTo>
-                  <a:pt x="857880" y="2250783"/>
-                </a:lnTo>
-                <a:close/>
-                <a:lnTo>
-                  <a:pt x="864635" y="2248473"/>
-                </a:lnTo>
-                <a:close/>
-                <a:lnTo>
-                  <a:pt x="871390" y="2246243"/>
-                </a:lnTo>
-                <a:close/>
-                <a:lnTo>
-                  <a:pt x="878145" y="2244114"/>
-                </a:lnTo>
-                <a:close/>
-                <a:lnTo>
-                  <a:pt x="884900" y="2242109"/>
-                </a:lnTo>
-                <a:close/>
-                <a:lnTo>
-                  <a:pt x="891654" y="2240250"/>
-                </a:lnTo>
-                <a:close/>
-                <a:lnTo>
-                  <a:pt x="898409" y="2238551"/>
-                </a:lnTo>
-                <a:close/>
-                <a:lnTo>
-                  <a:pt x="905164" y="2236996"/>
-                </a:lnTo>
-                <a:close/>
-                <a:lnTo>
-                  <a:pt x="911919" y="2235559"/>
-                </a:lnTo>
-                <a:close/>
-                <a:lnTo>
-                  <a:pt x="918674" y="2234216"/>
-                </a:lnTo>
-                <a:close/>
-                <a:lnTo>
-                  <a:pt x="925429" y="2232942"/>
-                </a:lnTo>
-                <a:close/>
-                <a:lnTo>
-                  <a:pt x="932184" y="2231713"/>
-                </a:lnTo>
-                <a:close/>
-                <a:lnTo>
-                  <a:pt x="938939" y="2230503"/>
-                </a:lnTo>
-                <a:close/>
-                <a:lnTo>
-                  <a:pt x="945694" y="2229289"/>
-                </a:lnTo>
-                <a:close/>
-                <a:lnTo>
-                  <a:pt x="952449" y="2228044"/>
-                </a:lnTo>
-                <a:close/>
-                <a:lnTo>
-                  <a:pt x="959204" y="2226746"/>
-                </a:lnTo>
-                <a:close/>
-                <a:lnTo>
-                  <a:pt x="965959" y="2225373"/>
-                </a:lnTo>
-                <a:close/>
-                <a:lnTo>
-                  <a:pt x="972714" y="2223939"/>
-                </a:lnTo>
-                <a:close/>
-                <a:lnTo>
-                  <a:pt x="979469" y="2222468"/>
-                </a:lnTo>
-                <a:close/>
-                <a:lnTo>
-                  <a:pt x="986224" y="2220983"/>
-                </a:lnTo>
-                <a:close/>
-                <a:lnTo>
-                  <a:pt x="992979" y="2219508"/>
-                </a:lnTo>
-                <a:close/>
-                <a:lnTo>
-                  <a:pt x="999734" y="2218067"/>
-                </a:lnTo>
-                <a:close/>
-                <a:lnTo>
-                  <a:pt x="1006489" y="2216685"/>
-                </a:lnTo>
-                <a:close/>
-                <a:lnTo>
-                  <a:pt x="1013244" y="2215385"/>
-                </a:lnTo>
-                <a:close/>
-                <a:lnTo>
-                  <a:pt x="1019999" y="2214191"/>
-                </a:lnTo>
-                <a:close/>
-                <a:lnTo>
-                  <a:pt x="1026754" y="2213127"/>
-                </a:lnTo>
-                <a:close/>
-                <a:lnTo>
-                  <a:pt x="1033509" y="2212215"/>
-                </a:lnTo>
-                <a:close/>
-                <a:lnTo>
-                  <a:pt x="1040264" y="2211450"/>
-                </a:lnTo>
-                <a:close/>
-                <a:lnTo>
-                  <a:pt x="1047019" y="2210814"/>
-                </a:lnTo>
-                <a:close/>
-                <a:lnTo>
-                  <a:pt x="1053773" y="2210289"/>
-                </a:lnTo>
-                <a:close/>
-                <a:lnTo>
-                  <a:pt x="1060528" y="2209854"/>
-                </a:lnTo>
-                <a:close/>
-                <a:lnTo>
-                  <a:pt x="1067283" y="2209492"/>
-                </a:lnTo>
-                <a:close/>
-                <a:lnTo>
-                  <a:pt x="1074038" y="2209185"/>
-                </a:lnTo>
-                <a:close/>
-                <a:lnTo>
-                  <a:pt x="1080793" y="2208912"/>
-                </a:lnTo>
-                <a:close/>
-                <a:lnTo>
-                  <a:pt x="1087548" y="2208655"/>
-                </a:lnTo>
-                <a:close/>
-                <a:lnTo>
-                  <a:pt x="1094303" y="2208396"/>
-                </a:lnTo>
-                <a:close/>
-                <a:lnTo>
-                  <a:pt x="1101058" y="2208116"/>
-                </a:lnTo>
-                <a:close/>
-                <a:lnTo>
-                  <a:pt x="1107813" y="2207806"/>
-                </a:lnTo>
-                <a:close/>
-                <a:lnTo>
-                  <a:pt x="1114568" y="2207464"/>
-                </a:lnTo>
-                <a:close/>
-                <a:lnTo>
-                  <a:pt x="1121323" y="2207090"/>
-                </a:lnTo>
-                <a:close/>
-                <a:lnTo>
-                  <a:pt x="1128078" y="2206681"/>
-                </a:lnTo>
-                <a:close/>
-                <a:lnTo>
-                  <a:pt x="1134833" y="2206237"/>
-                </a:lnTo>
-                <a:close/>
-                <a:lnTo>
-                  <a:pt x="1141588" y="2205756"/>
-                </a:lnTo>
-                <a:close/>
-                <a:lnTo>
-                  <a:pt x="1148343" y="2205237"/>
-                </a:lnTo>
-                <a:close/>
-                <a:lnTo>
-                  <a:pt x="1155098" y="2204679"/>
-                </a:lnTo>
-                <a:close/>
-                <a:lnTo>
-                  <a:pt x="1161853" y="2204079"/>
-                </a:lnTo>
-                <a:close/>
-                <a:lnTo>
-                  <a:pt x="1168608" y="2203438"/>
-                </a:lnTo>
-                <a:close/>
-                <a:lnTo>
-                  <a:pt x="1175363" y="2202753"/>
-                </a:lnTo>
-                <a:close/>
-                <a:lnTo>
-                  <a:pt x="1182118" y="2202022"/>
-                </a:lnTo>
-                <a:close/>
-                <a:lnTo>
-                  <a:pt x="1188873" y="2201243"/>
-                </a:lnTo>
-                <a:close/>
-                <a:lnTo>
-                  <a:pt x="1195628" y="2200413"/>
-                </a:lnTo>
-                <a:close/>
-                <a:lnTo>
-                  <a:pt x="1202383" y="2199531"/>
-                </a:lnTo>
-                <a:close/>
-                <a:lnTo>
-                  <a:pt x="1209138" y="2198594"/>
-                </a:lnTo>
-                <a:close/>
-                <a:lnTo>
-                  <a:pt x="1215892" y="2197600"/>
-                </a:lnTo>
-                <a:close/>
-                <a:lnTo>
-                  <a:pt x="1222647" y="2196547"/>
-                </a:lnTo>
-                <a:close/>
-                <a:lnTo>
-                  <a:pt x="1229402" y="2195432"/>
-                </a:lnTo>
-                <a:close/>
-                <a:lnTo>
-                  <a:pt x="1236157" y="2194254"/>
-                </a:lnTo>
-                <a:close/>
-                <a:lnTo>
-                  <a:pt x="1242912" y="2193014"/>
-                </a:lnTo>
-                <a:close/>
-                <a:lnTo>
-                  <a:pt x="1249667" y="2191722"/>
-                </a:lnTo>
-                <a:close/>
-                <a:lnTo>
-                  <a:pt x="1256422" y="2190387"/>
-                </a:lnTo>
-                <a:close/>
-                <a:lnTo>
-                  <a:pt x="1263177" y="2189020"/>
-                </a:lnTo>
-                <a:close/>
-                <a:lnTo>
-                  <a:pt x="1269932" y="2187631"/>
-                </a:lnTo>
-                <a:close/>
-                <a:lnTo>
-                  <a:pt x="1276687" y="2186230"/>
-                </a:lnTo>
-                <a:close/>
-                <a:lnTo>
-                  <a:pt x="1283442" y="2184827"/>
-                </a:lnTo>
-                <a:close/>
-                <a:lnTo>
-                  <a:pt x="1290197" y="2183432"/>
-                </a:lnTo>
-                <a:close/>
-                <a:lnTo>
-                  <a:pt x="1296952" y="2182056"/>
-                </a:lnTo>
-                <a:close/>
-                <a:lnTo>
-                  <a:pt x="1303707" y="2180709"/>
-                </a:lnTo>
-                <a:close/>
-                <a:lnTo>
-                  <a:pt x="1310462" y="2179395"/>
-                </a:lnTo>
-                <a:close/>
-                <a:lnTo>
-                  <a:pt x="1317217" y="2178105"/>
-                </a:lnTo>
-                <a:close/>
-                <a:lnTo>
-                  <a:pt x="1323972" y="2176828"/>
-                </a:lnTo>
-                <a:close/>
-                <a:lnTo>
-                  <a:pt x="1330727" y="2175551"/>
-                </a:lnTo>
-                <a:close/>
-                <a:lnTo>
-                  <a:pt x="1337482" y="2174261"/>
-                </a:lnTo>
-                <a:close/>
-                <a:lnTo>
-                  <a:pt x="1344237" y="2172948"/>
-                </a:lnTo>
-                <a:close/>
-                <a:lnTo>
-                  <a:pt x="1350992" y="2171598"/>
-                </a:lnTo>
-                <a:close/>
-                <a:lnTo>
-                  <a:pt x="1357747" y="2170199"/>
-                </a:lnTo>
-                <a:close/>
-                <a:lnTo>
-                  <a:pt x="1364502" y="2168740"/>
-                </a:lnTo>
-                <a:close/>
-                <a:lnTo>
-                  <a:pt x="1371257" y="2167208"/>
-                </a:lnTo>
-                <a:close/>
-                <a:lnTo>
-                  <a:pt x="1378011" y="2165595"/>
-                </a:lnTo>
-                <a:close/>
-                <a:lnTo>
-                  <a:pt x="1384766" y="2163907"/>
-                </a:lnTo>
-                <a:close/>
-                <a:lnTo>
-                  <a:pt x="1391521" y="2162158"/>
-                </a:lnTo>
-                <a:close/>
-                <a:lnTo>
-                  <a:pt x="1398276" y="2160359"/>
-                </a:lnTo>
-                <a:close/>
-                <a:lnTo>
-                  <a:pt x="1405031" y="2158523"/>
-                </a:lnTo>
-                <a:close/>
-                <a:lnTo>
-                  <a:pt x="1411786" y="2156662"/>
-                </a:lnTo>
-                <a:close/>
-                <a:lnTo>
-                  <a:pt x="1418541" y="2154788"/>
-                </a:lnTo>
-                <a:close/>
-                <a:lnTo>
-                  <a:pt x="1425296" y="2152913"/>
-                </a:lnTo>
-                <a:close/>
-                <a:lnTo>
-                  <a:pt x="1432051" y="2151050"/>
-                </a:lnTo>
-                <a:close/>
-                <a:lnTo>
-                  <a:pt x="1438806" y="2149210"/>
-                </a:lnTo>
-                <a:close/>
-                <a:lnTo>
-                  <a:pt x="1445561" y="2147404"/>
-                </a:lnTo>
-                <a:close/>
-                <a:lnTo>
-                  <a:pt x="1452316" y="2145629"/>
-                </a:lnTo>
-                <a:close/>
-                <a:lnTo>
-                  <a:pt x="1459071" y="2143873"/>
-                </a:lnTo>
-                <a:close/>
-                <a:lnTo>
-                  <a:pt x="1465826" y="2142125"/>
-                </a:lnTo>
-                <a:close/>
-                <a:lnTo>
-                  <a:pt x="1472581" y="2140377"/>
-                </a:lnTo>
-                <a:close/>
-                <a:lnTo>
-                  <a:pt x="1479336" y="2138617"/>
-                </a:lnTo>
-                <a:close/>
-                <a:lnTo>
-                  <a:pt x="1486091" y="2136834"/>
-                </a:lnTo>
-                <a:close/>
-                <a:lnTo>
-                  <a:pt x="1492846" y="2135019"/>
-                </a:lnTo>
-                <a:close/>
-                <a:lnTo>
-                  <a:pt x="1499601" y="2133160"/>
-                </a:lnTo>
-                <a:close/>
-                <a:lnTo>
-                  <a:pt x="1506356" y="2131248"/>
-                </a:lnTo>
-                <a:close/>
-                <a:lnTo>
-                  <a:pt x="1513111" y="2129272"/>
-                </a:lnTo>
-                <a:close/>
-                <a:lnTo>
-                  <a:pt x="1519866" y="2127230"/>
-                </a:lnTo>
-                <a:close/>
-                <a:lnTo>
-                  <a:pt x="1526621" y="2125127"/>
-                </a:lnTo>
-                <a:close/>
-                <a:lnTo>
-                  <a:pt x="1533376" y="2122964"/>
-                </a:lnTo>
-                <a:close/>
-                <a:lnTo>
-                  <a:pt x="1540130" y="2120746"/>
-                </a:lnTo>
-                <a:close/>
-                <a:lnTo>
-                  <a:pt x="1546885" y="2118476"/>
-                </a:lnTo>
-                <a:close/>
-                <a:lnTo>
-                  <a:pt x="1553640" y="2116158"/>
-                </a:lnTo>
-                <a:close/>
-                <a:lnTo>
-                  <a:pt x="1560395" y="2113795"/>
-                </a:lnTo>
-                <a:close/>
-                <a:lnTo>
-                  <a:pt x="1567150" y="2111390"/>
-                </a:lnTo>
-                <a:close/>
-                <a:lnTo>
-                  <a:pt x="1573905" y="2108948"/>
-                </a:lnTo>
-                <a:close/>
-                <a:lnTo>
-                  <a:pt x="1580660" y="2106470"/>
-                </a:lnTo>
-                <a:close/>
-                <a:lnTo>
-                  <a:pt x="1587415" y="2103958"/>
-                </a:lnTo>
-                <a:close/>
-                <a:lnTo>
-                  <a:pt x="1594170" y="2101408"/>
-                </a:lnTo>
-                <a:close/>
-                <a:lnTo>
-                  <a:pt x="1600925" y="2098816"/>
-                </a:lnTo>
-                <a:close/>
-                <a:lnTo>
-                  <a:pt x="1607680" y="2096180"/>
-                </a:lnTo>
-                <a:close/>
-                <a:lnTo>
-                  <a:pt x="1614435" y="2093497"/>
-                </a:lnTo>
-                <a:close/>
-                <a:lnTo>
-                  <a:pt x="1621190" y="2090762"/>
-                </a:lnTo>
-                <a:close/>
-                <a:lnTo>
-                  <a:pt x="1627945" y="2087973"/>
-                </a:lnTo>
-                <a:close/>
-                <a:lnTo>
-                  <a:pt x="1634700" y="2085126"/>
-                </a:lnTo>
-                <a:close/>
-                <a:lnTo>
-                  <a:pt x="1641455" y="2082218"/>
-                </a:lnTo>
-                <a:close/>
-                <a:lnTo>
-                  <a:pt x="1648210" y="2079245"/>
-                </a:lnTo>
-                <a:close/>
-                <a:lnTo>
-                  <a:pt x="1654965" y="2076210"/>
-                </a:lnTo>
-                <a:close/>
-                <a:lnTo>
-                  <a:pt x="1661720" y="2073121"/>
-                </a:lnTo>
-                <a:close/>
-                <a:lnTo>
-                  <a:pt x="1668475" y="2069989"/>
-                </a:lnTo>
-                <a:close/>
-                <a:lnTo>
-                  <a:pt x="1675230" y="2066823"/>
-                </a:lnTo>
-                <a:close/>
-                <a:lnTo>
-                  <a:pt x="1681985" y="2063633"/>
-                </a:lnTo>
-                <a:close/>
-                <a:lnTo>
-                  <a:pt x="1688740" y="2060429"/>
-                </a:lnTo>
-                <a:close/>
-                <a:lnTo>
-                  <a:pt x="1695495" y="2057221"/>
-                </a:lnTo>
-                <a:close/>
-                <a:lnTo>
-                  <a:pt x="1702249" y="2054018"/>
-                </a:lnTo>
-                <a:close/>
-                <a:lnTo>
-                  <a:pt x="1709004" y="2050831"/>
-                </a:lnTo>
-                <a:close/>
-                <a:lnTo>
-                  <a:pt x="1715759" y="2047669"/>
-                </a:lnTo>
-                <a:close/>
-                <a:lnTo>
-                  <a:pt x="1722514" y="2044537"/>
-                </a:lnTo>
-                <a:close/>
-                <a:lnTo>
-                  <a:pt x="1729269" y="2041426"/>
-                </a:lnTo>
-                <a:close/>
-                <a:lnTo>
-                  <a:pt x="1736024" y="2038327"/>
-                </a:lnTo>
-                <a:close/>
-                <a:lnTo>
-                  <a:pt x="1742779" y="2035230"/>
-                </a:lnTo>
-                <a:close/>
-                <a:lnTo>
-                  <a:pt x="1749534" y="2032125"/>
-                </a:lnTo>
-                <a:close/>
-                <a:lnTo>
-                  <a:pt x="1756289" y="2029003"/>
-                </a:lnTo>
-                <a:close/>
-                <a:lnTo>
-                  <a:pt x="1763044" y="2025853"/>
-                </a:lnTo>
-                <a:close/>
-                <a:lnTo>
-                  <a:pt x="1769799" y="2022666"/>
-                </a:lnTo>
-                <a:close/>
-                <a:lnTo>
-                  <a:pt x="1776554" y="2019431"/>
-                </a:lnTo>
-                <a:close/>
-                <a:lnTo>
-                  <a:pt x="1783309" y="2016139"/>
-                </a:lnTo>
-                <a:close/>
-                <a:lnTo>
-                  <a:pt x="1790064" y="2012783"/>
-                </a:lnTo>
-                <a:close/>
-                <a:lnTo>
-                  <a:pt x="1796819" y="2009364"/>
-                </a:lnTo>
-                <a:close/>
-                <a:lnTo>
-                  <a:pt x="1803574" y="2005885"/>
-                </a:lnTo>
-                <a:close/>
-                <a:lnTo>
-                  <a:pt x="1810329" y="2002349"/>
-                </a:lnTo>
-                <a:close/>
-                <a:lnTo>
-                  <a:pt x="1817084" y="1998760"/>
-                </a:lnTo>
-                <a:close/>
-                <a:lnTo>
-                  <a:pt x="1823839" y="1995121"/>
-                </a:lnTo>
-                <a:close/>
-                <a:lnTo>
-                  <a:pt x="1830594" y="1991435"/>
-                </a:lnTo>
-                <a:close/>
-                <a:lnTo>
-                  <a:pt x="1837349" y="1987706"/>
-                </a:lnTo>
-                <a:close/>
-                <a:lnTo>
-                  <a:pt x="1844104" y="1983936"/>
-                </a:lnTo>
-                <a:close/>
-                <a:lnTo>
-                  <a:pt x="1850859" y="1980130"/>
-                </a:lnTo>
-                <a:close/>
-                <a:lnTo>
-                  <a:pt x="1857614" y="1976289"/>
-                </a:lnTo>
-                <a:close/>
-                <a:lnTo>
-                  <a:pt x="1864368" y="1972412"/>
-                </a:lnTo>
-                <a:close/>
-                <a:lnTo>
-                  <a:pt x="1871123" y="1968495"/>
-                </a:lnTo>
-                <a:close/>
-                <a:lnTo>
-                  <a:pt x="1877878" y="1964536"/>
-                </a:lnTo>
-                <a:close/>
-                <a:lnTo>
-                  <a:pt x="1884633" y="1960531"/>
-                </a:lnTo>
-                <a:close/>
-                <a:lnTo>
-                  <a:pt x="1891388" y="1956476"/>
-                </a:lnTo>
-                <a:close/>
-                <a:lnTo>
-                  <a:pt x="1898143" y="1952369"/>
-                </a:lnTo>
-                <a:close/>
-                <a:lnTo>
-                  <a:pt x="1904898" y="1948207"/>
-                </a:lnTo>
-                <a:close/>
-                <a:lnTo>
-                  <a:pt x="1911653" y="1943985"/>
-                </a:lnTo>
-                <a:close/>
-                <a:lnTo>
-                  <a:pt x="1918408" y="1939701"/>
-                </a:lnTo>
-                <a:close/>
-                <a:lnTo>
-                  <a:pt x="1925163" y="1935352"/>
-                </a:lnTo>
-                <a:close/>
-                <a:lnTo>
-                  <a:pt x="1931918" y="1930944"/>
-                </a:lnTo>
-                <a:close/>
-                <a:lnTo>
-                  <a:pt x="1938673" y="1926487"/>
-                </a:lnTo>
-                <a:close/>
-                <a:lnTo>
-                  <a:pt x="1945428" y="1921989"/>
-                </a:lnTo>
-                <a:close/>
-                <a:lnTo>
-                  <a:pt x="1952183" y="1917462"/>
-                </a:lnTo>
-                <a:close/>
-                <a:lnTo>
-                  <a:pt x="1958938" y="1912915"/>
-                </a:lnTo>
-                <a:close/>
-                <a:lnTo>
-                  <a:pt x="1965693" y="1908357"/>
-                </a:lnTo>
-                <a:close/>
-                <a:lnTo>
-                  <a:pt x="1972448" y="1903799"/>
-                </a:lnTo>
-                <a:close/>
-                <a:lnTo>
-                  <a:pt x="1979203" y="1899250"/>
-                </a:lnTo>
-                <a:close/>
-                <a:lnTo>
-                  <a:pt x="1985958" y="1894719"/>
-                </a:lnTo>
-                <a:close/>
-                <a:lnTo>
-                  <a:pt x="1992713" y="1890217"/>
-                </a:lnTo>
-                <a:close/>
-                <a:lnTo>
-                  <a:pt x="1999468" y="1885742"/>
-                </a:lnTo>
-                <a:close/>
-                <a:lnTo>
-                  <a:pt x="2006223" y="1881285"/>
-                </a:lnTo>
-                <a:close/>
-                <a:lnTo>
-                  <a:pt x="2012978" y="1876836"/>
-                </a:lnTo>
-                <a:close/>
-                <a:lnTo>
-                  <a:pt x="2019733" y="1872385"/>
-                </a:lnTo>
-                <a:close/>
-                <a:lnTo>
-                  <a:pt x="2026487" y="1867923"/>
-                </a:lnTo>
-                <a:close/>
-                <a:lnTo>
-                  <a:pt x="2033242" y="1863439"/>
-                </a:lnTo>
-                <a:close/>
-                <a:lnTo>
-                  <a:pt x="2039997" y="1858926"/>
-                </a:lnTo>
-                <a:close/>
-                <a:lnTo>
-                  <a:pt x="2046752" y="1854372"/>
-                </a:lnTo>
-                <a:close/>
-                <a:lnTo>
-                  <a:pt x="2053507" y="1849768"/>
-                </a:lnTo>
-                <a:close/>
-                <a:lnTo>
-                  <a:pt x="2060262" y="1845104"/>
-                </a:lnTo>
-                <a:close/>
-                <a:lnTo>
-                  <a:pt x="2067017" y="1840377"/>
-                </a:lnTo>
-                <a:close/>
-                <a:lnTo>
-                  <a:pt x="2073772" y="1835589"/>
-                </a:lnTo>
-                <a:close/>
-                <a:lnTo>
-                  <a:pt x="2080527" y="1830741"/>
-                </a:lnTo>
-                <a:close/>
-                <a:lnTo>
-                  <a:pt x="2087282" y="1825838"/>
-                </a:lnTo>
-                <a:close/>
-                <a:lnTo>
-                  <a:pt x="2094037" y="1820881"/>
-                </a:lnTo>
-                <a:close/>
-                <a:lnTo>
-                  <a:pt x="2100792" y="1815873"/>
-                </a:lnTo>
-                <a:close/>
-                <a:lnTo>
-                  <a:pt x="2107547" y="1810817"/>
-                </a:lnTo>
-                <a:close/>
-                <a:lnTo>
-                  <a:pt x="2114302" y="1805716"/>
-                </a:lnTo>
-                <a:close/>
-                <a:lnTo>
-                  <a:pt x="2121057" y="1800571"/>
-                </a:lnTo>
-                <a:close/>
-                <a:lnTo>
-                  <a:pt x="2127812" y="1795386"/>
-                </a:lnTo>
-                <a:close/>
-                <a:lnTo>
-                  <a:pt x="2134567" y="1790162"/>
-                </a:lnTo>
-                <a:close/>
-                <a:lnTo>
-                  <a:pt x="2141322" y="1784899"/>
-                </a:lnTo>
-                <a:close/>
-                <a:lnTo>
-                  <a:pt x="2148077" y="1779595"/>
-                </a:lnTo>
-                <a:close/>
-                <a:lnTo>
-                  <a:pt x="2154832" y="1774250"/>
-                </a:lnTo>
-                <a:close/>
-                <a:lnTo>
-                  <a:pt x="2161587" y="1768863"/>
-                </a:lnTo>
-                <a:close/>
-                <a:lnTo>
-                  <a:pt x="2168342" y="1763433"/>
-                </a:lnTo>
-                <a:close/>
-                <a:lnTo>
-                  <a:pt x="2175097" y="1757958"/>
-                </a:lnTo>
-                <a:close/>
-                <a:lnTo>
-                  <a:pt x="2181852" y="1752440"/>
-                </a:lnTo>
-                <a:close/>
-                <a:lnTo>
-                  <a:pt x="2188606" y="1746875"/>
-                </a:lnTo>
-                <a:close/>
-                <a:lnTo>
-                  <a:pt x="2195361" y="1741264"/>
-                </a:lnTo>
-                <a:close/>
-                <a:lnTo>
-                  <a:pt x="2202116" y="1735606"/>
-                </a:lnTo>
-                <a:close/>
-                <a:lnTo>
-                  <a:pt x="2208871" y="1729901"/>
-                </a:lnTo>
-                <a:close/>
-                <a:lnTo>
-                  <a:pt x="2215626" y="1724151"/>
-                </a:lnTo>
-                <a:close/>
-                <a:lnTo>
-                  <a:pt x="2222381" y="1718357"/>
-                </a:lnTo>
-                <a:close/>
-                <a:lnTo>
-                  <a:pt x="2229136" y="1712518"/>
-                </a:lnTo>
-                <a:close/>
-                <a:lnTo>
-                  <a:pt x="2235891" y="1706637"/>
-                </a:lnTo>
-                <a:close/>
-                <a:lnTo>
-                  <a:pt x="2242646" y="1700714"/>
-                </a:lnTo>
-                <a:close/>
-                <a:lnTo>
-                  <a:pt x="2249401" y="1694750"/>
-                </a:lnTo>
-                <a:close/>
-                <a:lnTo>
-                  <a:pt x="2256156" y="1688745"/>
-                </a:lnTo>
-                <a:close/>
-                <a:lnTo>
-                  <a:pt x="2262911" y="1682702"/>
-                </a:lnTo>
-                <a:close/>
-                <a:lnTo>
-                  <a:pt x="2269666" y="1676619"/>
-                </a:lnTo>
-                <a:close/>
-                <a:lnTo>
-                  <a:pt x="2276421" y="1670495"/>
-                </a:lnTo>
-                <a:close/>
-                <a:lnTo>
-                  <a:pt x="2283176" y="1664327"/>
-                </a:lnTo>
-                <a:close/>
-                <a:lnTo>
-                  <a:pt x="2289931" y="1658114"/>
-                </a:lnTo>
-                <a:close/>
-                <a:lnTo>
-                  <a:pt x="2296686" y="1651851"/>
-                </a:lnTo>
-                <a:close/>
-                <a:lnTo>
-                  <a:pt x="2303441" y="1645537"/>
-                </a:lnTo>
-                <a:close/>
-                <a:lnTo>
-                  <a:pt x="2310196" y="1639169"/>
-                </a:lnTo>
-                <a:close/>
-                <a:lnTo>
-                  <a:pt x="2316951" y="1632745"/>
-                </a:lnTo>
-                <a:close/>
-                <a:lnTo>
-                  <a:pt x="2323706" y="1626261"/>
-                </a:lnTo>
-                <a:close/>
-                <a:lnTo>
-                  <a:pt x="2330461" y="1619715"/>
-                </a:lnTo>
-                <a:close/>
-                <a:lnTo>
-                  <a:pt x="2337215" y="1613107"/>
-                </a:lnTo>
-                <a:close/>
-                <a:lnTo>
-                  <a:pt x="2343970" y="1606441"/>
-                </a:lnTo>
-                <a:close/>
-                <a:lnTo>
-                  <a:pt x="2350724" y="1599727"/>
-                </a:lnTo>
-                <a:close/>
-                <a:lnTo>
-                  <a:pt x="2357478" y="1592975"/>
-                </a:lnTo>
-                <a:close/>
-                <a:lnTo>
-                  <a:pt x="2364233" y="1586195"/>
-                </a:lnTo>
-                <a:close/>
-                <a:lnTo>
-                  <a:pt x="2370988" y="1579396"/>
-                </a:lnTo>
-                <a:close/>
-                <a:lnTo>
-                  <a:pt x="2377743" y="1572587"/>
-                </a:lnTo>
-                <a:close/>
-                <a:lnTo>
-                  <a:pt x="2384498" y="1565779"/>
-                </a:lnTo>
-                <a:close/>
-                <a:lnTo>
-                  <a:pt x="2391254" y="1558980"/>
-                </a:lnTo>
-                <a:close/>
-                <a:lnTo>
-                  <a:pt x="2398010" y="1552200"/>
-                </a:lnTo>
-                <a:close/>
-                <a:lnTo>
-                  <a:pt x="2404766" y="1545448"/>
-                </a:lnTo>
-                <a:close/>
-                <a:lnTo>
-                  <a:pt x="2411523" y="1538722"/>
-                </a:lnTo>
-                <a:close/>
-                <a:lnTo>
-                  <a:pt x="2418280" y="1532012"/>
-                </a:lnTo>
-                <a:close/>
-                <a:lnTo>
-                  <a:pt x="2425037" y="1525309"/>
-                </a:lnTo>
-                <a:close/>
-                <a:lnTo>
-                  <a:pt x="2431794" y="1518604"/>
-                </a:lnTo>
-                <a:close/>
-                <a:lnTo>
-                  <a:pt x="2438550" y="1511887"/>
-                </a:lnTo>
-                <a:close/>
-                <a:lnTo>
-                  <a:pt x="2445305" y="1505150"/>
-                </a:lnTo>
-                <a:close/>
-                <a:lnTo>
-                  <a:pt x="2452059" y="1498382"/>
-                </a:lnTo>
-                <a:close/>
-                <a:lnTo>
-                  <a:pt x="2458811" y="1491575"/>
-                </a:lnTo>
-                <a:close/>
-                <a:lnTo>
-                  <a:pt x="2465562" y="1484719"/>
-                </a:lnTo>
-                <a:close/>
-                <a:lnTo>
-                  <a:pt x="2472312" y="1477805"/>
-                </a:lnTo>
-                <a:close/>
-                <a:lnTo>
-                  <a:pt x="2479059" y="1470829"/>
-                </a:lnTo>
-                <a:close/>
-                <a:lnTo>
-                  <a:pt x="2485806" y="1463793"/>
-                </a:lnTo>
-                <a:close/>
-                <a:lnTo>
-                  <a:pt x="2492554" y="1456698"/>
-                </a:lnTo>
-                <a:close/>
-                <a:lnTo>
-                  <a:pt x="2499302" y="1449545"/>
-                </a:lnTo>
-                <a:close/>
-                <a:lnTo>
-                  <a:pt x="2506053" y="1442337"/>
-                </a:lnTo>
-                <a:close/>
-                <a:lnTo>
-                  <a:pt x="2512807" y="1435075"/>
-                </a:lnTo>
-                <a:close/>
-                <a:lnTo>
-                  <a:pt x="2519565" y="1427760"/>
-                </a:lnTo>
-                <a:close/>
-                <a:lnTo>
-                  <a:pt x="2526328" y="1420394"/>
-                </a:lnTo>
-                <a:close/>
-                <a:lnTo>
-                  <a:pt x="2533097" y="1412978"/>
-                </a:lnTo>
-                <a:close/>
-                <a:lnTo>
-                  <a:pt x="2539872" y="1405514"/>
-                </a:lnTo>
-                <a:close/>
-                <a:lnTo>
-                  <a:pt x="2546654" y="1398004"/>
-                </a:lnTo>
-                <a:close/>
-                <a:lnTo>
-                  <a:pt x="2553438" y="1390452"/>
-                </a:lnTo>
-                <a:close/>
-                <a:lnTo>
-                  <a:pt x="2560222" y="1382859"/>
-                </a:lnTo>
-                <a:close/>
-                <a:lnTo>
-                  <a:pt x="2567001" y="1375231"/>
-                </a:lnTo>
-                <a:close/>
-                <a:lnTo>
-                  <a:pt x="2573773" y="1367569"/>
-                </a:lnTo>
-                <a:close/>
-                <a:lnTo>
-                  <a:pt x="2580533" y="1359876"/>
-                </a:lnTo>
-                <a:close/>
-                <a:lnTo>
-                  <a:pt x="2587280" y="1352157"/>
-                </a:lnTo>
-                <a:close/>
-                <a:lnTo>
-                  <a:pt x="2594008" y="1344414"/>
-                </a:lnTo>
-                <a:close/>
-                <a:lnTo>
-                  <a:pt x="2600715" y="1336650"/>
-                </a:lnTo>
-                <a:close/>
-                <a:lnTo>
-                  <a:pt x="2607397" y="1328868"/>
-                </a:lnTo>
-                <a:close/>
-                <a:lnTo>
-                  <a:pt x="2614055" y="1321067"/>
-                </a:lnTo>
-                <a:close/>
-                <a:lnTo>
-                  <a:pt x="2620702" y="1313234"/>
-                </a:lnTo>
-                <a:close/>
-                <a:lnTo>
-                  <a:pt x="2627349" y="1305354"/>
-                </a:lnTo>
-                <a:close/>
-                <a:lnTo>
-                  <a:pt x="2634010" y="1297415"/>
-                </a:lnTo>
-                <a:close/>
-                <a:lnTo>
-                  <a:pt x="2640697" y="1289400"/>
-                </a:lnTo>
-                <a:close/>
-                <a:lnTo>
-                  <a:pt x="2647424" y="1281297"/>
-                </a:lnTo>
-                <a:close/>
-                <a:lnTo>
-                  <a:pt x="2654202" y="1273091"/>
-                </a:lnTo>
-                <a:close/>
-                <a:lnTo>
-                  <a:pt x="2661046" y="1264768"/>
-                </a:lnTo>
-                <a:close/>
-                <a:lnTo>
-                  <a:pt x="2667967" y="1256314"/>
-                </a:lnTo>
-                <a:close/>
-                <a:lnTo>
-                  <a:pt x="2674979" y="1247715"/>
-                </a:lnTo>
-                <a:close/>
-                <a:lnTo>
-                  <a:pt x="2682082" y="1238969"/>
-                </a:lnTo>
-                <a:close/>
-                <a:lnTo>
-                  <a:pt x="2689238" y="1230121"/>
-                </a:lnTo>
-                <a:close/>
-                <a:lnTo>
-                  <a:pt x="2696399" y="1221224"/>
-                </a:lnTo>
-                <a:close/>
-                <a:lnTo>
-                  <a:pt x="2703516" y="1212331"/>
-                </a:lnTo>
-                <a:close/>
-                <a:lnTo>
-                  <a:pt x="2710542" y="1203496"/>
-                </a:lnTo>
-                <a:close/>
-                <a:lnTo>
-                  <a:pt x="2717429" y="1194772"/>
-                </a:lnTo>
-                <a:close/>
-                <a:lnTo>
-                  <a:pt x="2724128" y="1186212"/>
-                </a:lnTo>
-                <a:close/>
-                <a:lnTo>
-                  <a:pt x="2730593" y="1177871"/>
-                </a:lnTo>
-                <a:close/>
-                <a:lnTo>
-                  <a:pt x="2736775" y="1169801"/>
-                </a:lnTo>
-                <a:close/>
-                <a:lnTo>
-                  <a:pt x="2742625" y="1162055"/>
-                </a:lnTo>
-                <a:close/>
-                <a:lnTo>
-                  <a:pt x="2748109" y="1154677"/>
-                </a:lnTo>
-                <a:close/>
-                <a:lnTo>
-                  <a:pt x="2753252" y="1147644"/>
-                </a:lnTo>
-                <a:close/>
-                <a:lnTo>
-                  <a:pt x="2758102" y="1140915"/>
-                </a:lnTo>
-                <a:close/>
-                <a:lnTo>
-                  <a:pt x="2762707" y="1134447"/>
-                </a:lnTo>
-                <a:close/>
-                <a:lnTo>
-                  <a:pt x="2767114" y="1128198"/>
-                </a:lnTo>
-                <a:close/>
-                <a:lnTo>
-                  <a:pt x="2771371" y="1122125"/>
-                </a:lnTo>
-                <a:close/>
-                <a:lnTo>
-                  <a:pt x="2775526" y="1116187"/>
-                </a:lnTo>
-                <a:close/>
-                <a:lnTo>
-                  <a:pt x="2779627" y="1110341"/>
-                </a:lnTo>
-                <a:close/>
-                <a:lnTo>
-                  <a:pt x="2783721" y="1104544"/>
-                </a:lnTo>
-                <a:close/>
-                <a:lnTo>
-                  <a:pt x="2787856" y="1098756"/>
-                </a:lnTo>
-                <a:close/>
-                <a:lnTo>
-                  <a:pt x="2792076" y="1092936"/>
-                </a:lnTo>
-                <a:close/>
-                <a:lnTo>
-                  <a:pt x="2796388" y="1087078"/>
-                </a:lnTo>
-                <a:close/>
-                <a:lnTo>
-                  <a:pt x="2800780" y="1081195"/>
-                </a:lnTo>
-                <a:close/>
-                <a:lnTo>
-                  <a:pt x="2805240" y="1075295"/>
-                </a:lnTo>
-                <a:close/>
-                <a:lnTo>
-                  <a:pt x="2809757" y="1069390"/>
-                </a:lnTo>
-                <a:close/>
-                <a:lnTo>
-                  <a:pt x="2814317" y="1063492"/>
-                </a:lnTo>
-                <a:close/>
-                <a:lnTo>
-                  <a:pt x="2818911" y="1057610"/>
-                </a:lnTo>
-                <a:close/>
-                <a:lnTo>
-                  <a:pt x="2823524" y="1051756"/>
-                </a:lnTo>
-                <a:close/>
-                <a:lnTo>
-                  <a:pt x="2828146" y="1045940"/>
-                </a:lnTo>
-                <a:close/>
-                <a:lnTo>
-                  <a:pt x="2832765" y="1040173"/>
-                </a:lnTo>
-                <a:close/>
-                <a:lnTo>
-                  <a:pt x="2837369" y="1034465"/>
-                </a:lnTo>
-                <a:close/>
-                <a:lnTo>
-                  <a:pt x="2841952" y="1028805"/>
-                </a:lnTo>
-                <a:close/>
-                <a:lnTo>
-                  <a:pt x="2846516" y="1023166"/>
-                </a:lnTo>
-                <a:close/>
-                <a:lnTo>
-                  <a:pt x="2851059" y="1017521"/>
-                </a:lnTo>
-                <a:close/>
-                <a:lnTo>
-                  <a:pt x="2855582" y="1011843"/>
-                </a:lnTo>
-                <a:close/>
-                <a:lnTo>
-                  <a:pt x="2860085" y="1006103"/>
-                </a:lnTo>
-                <a:close/>
-                <a:lnTo>
-                  <a:pt x="2864568" y="1000276"/>
-                </a:lnTo>
-                <a:close/>
-                <a:lnTo>
-                  <a:pt x="2869031" y="994333"/>
-                </a:lnTo>
-                <a:close/>
-                <a:lnTo>
-                  <a:pt x="2873473" y="988247"/>
-                </a:lnTo>
-                <a:close/>
-                <a:lnTo>
-                  <a:pt x="2877895" y="981991"/>
-                </a:lnTo>
-                <a:close/>
-                <a:lnTo>
-                  <a:pt x="2882298" y="975539"/>
-                </a:lnTo>
-                <a:close/>
-                <a:lnTo>
-                  <a:pt x="2886685" y="968884"/>
-                </a:lnTo>
-                <a:close/>
-                <a:lnTo>
-                  <a:pt x="2891070" y="962045"/>
-                </a:lnTo>
-                <a:close/>
-                <a:lnTo>
-                  <a:pt x="2895463" y="955042"/>
-                </a:lnTo>
-                <a:close/>
-                <a:lnTo>
-                  <a:pt x="2899878" y="947894"/>
-                </a:lnTo>
-                <a:close/>
-                <a:lnTo>
-                  <a:pt x="2904325" y="940620"/>
-                </a:lnTo>
-                <a:close/>
-                <a:lnTo>
-                  <a:pt x="2908817" y="933241"/>
-                </a:lnTo>
-                <a:close/>
-                <a:lnTo>
-                  <a:pt x="2913365" y="925776"/>
-                </a:lnTo>
-                <a:close/>
-                <a:lnTo>
-                  <a:pt x="2917983" y="918245"/>
-                </a:lnTo>
-                <a:close/>
-                <a:lnTo>
-                  <a:pt x="2922680" y="910668"/>
-                </a:lnTo>
-                <a:close/>
-                <a:lnTo>
-                  <a:pt x="2927470" y="903063"/>
-                </a:lnTo>
-                <a:close/>
-                <a:lnTo>
-                  <a:pt x="2932344" y="895454"/>
-                </a:lnTo>
-                <a:close/>
-                <a:lnTo>
-                  <a:pt x="2937257" y="887868"/>
-                </a:lnTo>
-                <a:close/>
-                <a:lnTo>
-                  <a:pt x="2942161" y="880331"/>
-                </a:lnTo>
-                <a:close/>
-                <a:lnTo>
-                  <a:pt x="2947010" y="872870"/>
-                </a:lnTo>
-                <a:close/>
-                <a:lnTo>
-                  <a:pt x="2951755" y="865514"/>
-                </a:lnTo>
-                <a:close/>
-                <a:lnTo>
-                  <a:pt x="2956349" y="858289"/>
-                </a:lnTo>
-                <a:close/>
-                <a:lnTo>
-                  <a:pt x="2960743" y="851222"/>
-                </a:lnTo>
-                <a:close/>
-                <a:lnTo>
-                  <a:pt x="2964891" y="844342"/>
-                </a:lnTo>
-                <a:close/>
-                <a:lnTo>
-                  <a:pt x="2968744" y="837675"/>
-                </a:lnTo>
-                <a:close/>
-                <a:lnTo>
-                  <a:pt x="2972254" y="831248"/>
-                </a:lnTo>
-                <a:close/>
-                <a:lnTo>
-                  <a:pt x="2975398" y="825076"/>
-                </a:lnTo>
-                <a:close/>
-                <a:lnTo>
-                  <a:pt x="2978213" y="819141"/>
-                </a:lnTo>
-                <a:close/>
-                <a:lnTo>
-                  <a:pt x="2980746" y="813419"/>
-                </a:lnTo>
-                <a:close/>
-                <a:lnTo>
-                  <a:pt x="2983046" y="807886"/>
-                </a:lnTo>
-                <a:close/>
-                <a:lnTo>
-                  <a:pt x="2985160" y="802518"/>
-                </a:lnTo>
-                <a:close/>
-                <a:lnTo>
-                  <a:pt x="2987137" y="797292"/>
-                </a:lnTo>
-                <a:close/>
-                <a:lnTo>
-                  <a:pt x="2989024" y="792183"/>
-                </a:lnTo>
-                <a:close/>
-                <a:lnTo>
-                  <a:pt x="2990870" y="787168"/>
-                </a:lnTo>
-                <a:close/>
-                <a:lnTo>
-                  <a:pt x="2992721" y="782223"/>
-                </a:lnTo>
-                <a:close/>
-                <a:lnTo>
-                  <a:pt x="2994627" y="777323"/>
-                </a:lnTo>
-                <a:close/>
-                <a:lnTo>
-                  <a:pt x="2996625" y="772447"/>
-                </a:lnTo>
-                <a:close/>
-                <a:lnTo>
-                  <a:pt x="2998713" y="767583"/>
-                </a:lnTo>
-                <a:close/>
-                <a:lnTo>
-                  <a:pt x="3000879" y="762719"/>
-                </a:lnTo>
-                <a:close/>
-                <a:lnTo>
-                  <a:pt x="3003109" y="757846"/>
-                </a:lnTo>
-                <a:close/>
-                <a:lnTo>
-                  <a:pt x="3005390" y="752954"/>
-                </a:lnTo>
-                <a:close/>
-                <a:lnTo>
-                  <a:pt x="3007711" y="748031"/>
-                </a:lnTo>
-                <a:close/>
-                <a:lnTo>
-                  <a:pt x="3010057" y="743067"/>
-                </a:lnTo>
-                <a:close/>
-                <a:lnTo>
-                  <a:pt x="3012417" y="738052"/>
-                </a:lnTo>
-                <a:close/>
-                <a:lnTo>
-                  <a:pt x="3014777" y="732976"/>
-                </a:lnTo>
-                <a:close/>
-                <a:lnTo>
-                  <a:pt x="3017124" y="727828"/>
-                </a:lnTo>
-                <a:close/>
-                <a:lnTo>
-                  <a:pt x="3019448" y="722600"/>
-                </a:lnTo>
-                <a:close/>
-                <a:lnTo>
-                  <a:pt x="3021747" y="717299"/>
-                </a:lnTo>
-                <a:close/>
-                <a:lnTo>
-                  <a:pt x="3024024" y="711938"/>
-                </a:lnTo>
-                <a:close/>
-                <a:lnTo>
-                  <a:pt x="3026284" y="706530"/>
-                </a:lnTo>
-                <a:close/>
-                <a:lnTo>
-                  <a:pt x="3028530" y="701088"/>
-                </a:lnTo>
-                <a:close/>
-                <a:lnTo>
-                  <a:pt x="3030764" y="695624"/>
-                </a:lnTo>
-                <a:close/>
-                <a:lnTo>
-                  <a:pt x="3032991" y="690153"/>
-                </a:lnTo>
-                <a:close/>
-                <a:lnTo>
-                  <a:pt x="3035215" y="684686"/>
-                </a:lnTo>
-                <a:close/>
-                <a:lnTo>
-                  <a:pt x="3037437" y="679237"/>
-                </a:lnTo>
-                <a:close/>
-                <a:lnTo>
-                  <a:pt x="3039662" y="673820"/>
-                </a:lnTo>
-                <a:close/>
-                <a:lnTo>
-                  <a:pt x="3041894" y="668445"/>
-                </a:lnTo>
-                <a:close/>
-                <a:lnTo>
-                  <a:pt x="3044132" y="663107"/>
-                </a:lnTo>
-                <a:close/>
-                <a:lnTo>
-                  <a:pt x="3046375" y="657792"/>
-                </a:lnTo>
-                <a:close/>
-                <a:lnTo>
-                  <a:pt x="3048624" y="652484"/>
-                </a:lnTo>
-                <a:close/>
-                <a:lnTo>
-                  <a:pt x="3050877" y="647167"/>
-                </a:lnTo>
-                <a:close/>
-                <a:lnTo>
-                  <a:pt x="3053133" y="641826"/>
-                </a:lnTo>
-                <a:close/>
-                <a:lnTo>
-                  <a:pt x="3055391" y="636445"/>
-                </a:lnTo>
-                <a:close/>
-                <a:lnTo>
-                  <a:pt x="3057650" y="631009"/>
-                </a:lnTo>
-                <a:close/>
-                <a:lnTo>
-                  <a:pt x="3059910" y="625502"/>
-                </a:lnTo>
-                <a:close/>
-                <a:lnTo>
-                  <a:pt x="3062168" y="619909"/>
-                </a:lnTo>
-                <a:close/>
-                <a:lnTo>
-                  <a:pt x="3064426" y="614215"/>
-                </a:lnTo>
-                <a:close/>
-                <a:lnTo>
-                  <a:pt x="3066681" y="608425"/>
-                </a:lnTo>
-                <a:close/>
-                <a:lnTo>
-                  <a:pt x="3068935" y="602561"/>
-                </a:lnTo>
-                <a:close/>
-                <a:lnTo>
-                  <a:pt x="3071188" y="596645"/>
-                </a:lnTo>
-                <a:close/>
-                <a:lnTo>
-                  <a:pt x="3073439" y="590700"/>
-                </a:lnTo>
-                <a:close/>
-                <a:lnTo>
-                  <a:pt x="3075690" y="584749"/>
-                </a:lnTo>
-                <a:close/>
-                <a:lnTo>
-                  <a:pt x="3077940" y="578815"/>
-                </a:lnTo>
-                <a:close/>
-                <a:lnTo>
-                  <a:pt x="3080190" y="572919"/>
-                </a:lnTo>
-                <a:close/>
-                <a:lnTo>
-                  <a:pt x="3082439" y="567085"/>
-                </a:lnTo>
-                <a:close/>
-                <a:lnTo>
-                  <a:pt x="3084689" y="561336"/>
-                </a:lnTo>
-                <a:close/>
-                <a:lnTo>
-                  <a:pt x="3086939" y="555694"/>
-                </a:lnTo>
-                <a:close/>
-                <a:lnTo>
-                  <a:pt x="3089190" y="550163"/>
-                </a:lnTo>
-                <a:close/>
-                <a:lnTo>
-                  <a:pt x="3091441" y="544721"/>
-                </a:lnTo>
-                <a:close/>
-                <a:lnTo>
-                  <a:pt x="3093692" y="539347"/>
-                </a:lnTo>
-                <a:close/>
-                <a:lnTo>
-                  <a:pt x="3095944" y="534017"/>
-                </a:lnTo>
-                <a:close/>
-                <a:lnTo>
-                  <a:pt x="3098195" y="528709"/>
-                </a:lnTo>
-                <a:close/>
-                <a:lnTo>
-                  <a:pt x="3100448" y="523400"/>
-                </a:lnTo>
-                <a:close/>
-                <a:lnTo>
-                  <a:pt x="3102700" y="518066"/>
-                </a:lnTo>
-                <a:close/>
-                <a:lnTo>
-                  <a:pt x="3104952" y="512684"/>
-                </a:lnTo>
-                <a:close/>
-                <a:lnTo>
-                  <a:pt x="3107204" y="507233"/>
-                </a:lnTo>
-                <a:close/>
-                <a:lnTo>
-                  <a:pt x="3109456" y="501689"/>
-                </a:lnTo>
-                <a:close/>
-                <a:lnTo>
-                  <a:pt x="3111708" y="496041"/>
-                </a:lnTo>
-                <a:close/>
-                <a:lnTo>
-                  <a:pt x="3113960" y="490303"/>
-                </a:lnTo>
-                <a:close/>
-                <a:lnTo>
-                  <a:pt x="3116212" y="484490"/>
-                </a:lnTo>
-                <a:close/>
-                <a:lnTo>
-                  <a:pt x="3118463" y="478618"/>
-                </a:lnTo>
-                <a:close/>
-                <a:lnTo>
-                  <a:pt x="3120715" y="472705"/>
-                </a:lnTo>
-                <a:close/>
-                <a:lnTo>
-                  <a:pt x="3122967" y="466767"/>
-                </a:lnTo>
-                <a:close/>
-                <a:lnTo>
-                  <a:pt x="3125218" y="460820"/>
-                </a:lnTo>
-                <a:close/>
-                <a:lnTo>
-                  <a:pt x="3127470" y="454880"/>
-                </a:lnTo>
-                <a:close/>
-                <a:lnTo>
-                  <a:pt x="3129721" y="448964"/>
-                </a:lnTo>
-                <a:close/>
-                <a:lnTo>
-                  <a:pt x="3131973" y="443087"/>
-                </a:lnTo>
-                <a:close/>
-                <a:lnTo>
-                  <a:pt x="3134224" y="437261"/>
-                </a:lnTo>
-                <a:close/>
-                <a:lnTo>
-                  <a:pt x="3136476" y="431472"/>
-                </a:lnTo>
-                <a:close/>
-                <a:lnTo>
-                  <a:pt x="3138727" y="425705"/>
-                </a:lnTo>
-                <a:close/>
-                <a:lnTo>
-                  <a:pt x="3140979" y="419943"/>
-                </a:lnTo>
-                <a:close/>
-                <a:lnTo>
-                  <a:pt x="3143231" y="414170"/>
-                </a:lnTo>
-                <a:close/>
-                <a:lnTo>
-                  <a:pt x="3145482" y="408369"/>
-                </a:lnTo>
-                <a:close/>
-                <a:lnTo>
-                  <a:pt x="3147734" y="402525"/>
-                </a:lnTo>
-                <a:close/>
-                <a:lnTo>
-                  <a:pt x="3149986" y="396621"/>
-                </a:lnTo>
-                <a:close/>
-                <a:lnTo>
-                  <a:pt x="3152237" y="390640"/>
-                </a:lnTo>
-                <a:close/>
-                <a:lnTo>
-                  <a:pt x="3154489" y="384567"/>
-                </a:lnTo>
-                <a:close/>
-                <a:lnTo>
-                  <a:pt x="3156741" y="378391"/>
-                </a:lnTo>
-                <a:close/>
-                <a:lnTo>
-                  <a:pt x="3158993" y="372124"/>
-                </a:lnTo>
-                <a:close/>
-                <a:lnTo>
-                  <a:pt x="3161244" y="365791"/>
-                </a:lnTo>
-                <a:close/>
-                <a:lnTo>
-                  <a:pt x="3163496" y="359413"/>
-                </a:lnTo>
-                <a:close/>
-                <a:lnTo>
-                  <a:pt x="3165747" y="353014"/>
-                </a:lnTo>
-                <a:close/>
-                <a:lnTo>
-                  <a:pt x="3167999" y="346616"/>
-                </a:lnTo>
-                <a:close/>
-                <a:lnTo>
-                  <a:pt x="3170251" y="340241"/>
-                </a:lnTo>
-                <a:close/>
-                <a:lnTo>
-                  <a:pt x="3172502" y="333914"/>
-                </a:lnTo>
-                <a:close/>
-                <a:lnTo>
-                  <a:pt x="3174754" y="327655"/>
-                </a:lnTo>
-                <a:close/>
-                <a:lnTo>
-                  <a:pt x="3177006" y="321487"/>
-                </a:lnTo>
-                <a:close/>
-                <a:lnTo>
-                  <a:pt x="3179257" y="315431"/>
-                </a:lnTo>
-                <a:close/>
-                <a:lnTo>
-                  <a:pt x="3181509" y="309478"/>
-                </a:lnTo>
-                <a:close/>
-                <a:lnTo>
-                  <a:pt x="3183761" y="303606"/>
-                </a:lnTo>
-                <a:close/>
-                <a:lnTo>
-                  <a:pt x="3186012" y="297793"/>
-                </a:lnTo>
-                <a:close/>
-                <a:lnTo>
-                  <a:pt x="3188264" y="292018"/>
-                </a:lnTo>
-                <a:close/>
-                <a:lnTo>
-                  <a:pt x="3190516" y="286258"/>
-                </a:lnTo>
-                <a:close/>
-                <a:lnTo>
-                  <a:pt x="3192767" y="280492"/>
-                </a:lnTo>
-                <a:close/>
-                <a:lnTo>
-                  <a:pt x="3195019" y="274697"/>
-                </a:lnTo>
-                <a:close/>
-                <a:lnTo>
-                  <a:pt x="3197271" y="268852"/>
-                </a:lnTo>
-                <a:close/>
-                <a:lnTo>
-                  <a:pt x="3199522" y="262935"/>
-                </a:lnTo>
-                <a:close/>
-                <a:lnTo>
-                  <a:pt x="3201774" y="256925"/>
-                </a:lnTo>
-                <a:close/>
-                <a:lnTo>
-                  <a:pt x="3204026" y="250821"/>
-                </a:lnTo>
-                <a:close/>
-                <a:lnTo>
-                  <a:pt x="3206277" y="244634"/>
-                </a:lnTo>
-                <a:close/>
-                <a:lnTo>
-                  <a:pt x="3208529" y="238377"/>
-                </a:lnTo>
-                <a:close/>
-                <a:lnTo>
-                  <a:pt x="3210781" y="232063"/>
-                </a:lnTo>
-                <a:close/>
-                <a:lnTo>
-                  <a:pt x="3213032" y="225704"/>
-                </a:lnTo>
-                <a:close/>
-                <a:lnTo>
-                  <a:pt x="3215284" y="219312"/>
-                </a:lnTo>
-                <a:close/>
-                <a:lnTo>
-                  <a:pt x="3217535" y="212901"/>
-                </a:lnTo>
-                <a:close/>
-                <a:lnTo>
-                  <a:pt x="3219787" y="206482"/>
-                </a:lnTo>
-                <a:close/>
-                <a:lnTo>
-                  <a:pt x="3222039" y="200068"/>
-                </a:lnTo>
-                <a:close/>
-                <a:lnTo>
-                  <a:pt x="3224290" y="193672"/>
-                </a:lnTo>
-                <a:close/>
-                <a:lnTo>
-                  <a:pt x="3226542" y="187298"/>
-                </a:lnTo>
-                <a:close/>
-                <a:lnTo>
-                  <a:pt x="3228794" y="180947"/>
-                </a:lnTo>
-                <a:close/>
-                <a:lnTo>
-                  <a:pt x="3231045" y="174615"/>
-                </a:lnTo>
-                <a:close/>
-                <a:lnTo>
-                  <a:pt x="3233297" y="168301"/>
-                </a:lnTo>
-                <a:close/>
-                <a:lnTo>
-                  <a:pt x="3235549" y="162003"/>
-                </a:lnTo>
-                <a:close/>
-                <a:lnTo>
-                  <a:pt x="3237800" y="155718"/>
-                </a:lnTo>
-                <a:close/>
-                <a:lnTo>
-                  <a:pt x="3240052" y="149446"/>
-                </a:lnTo>
-                <a:close/>
-                <a:lnTo>
-                  <a:pt x="3242304" y="143184"/>
-                </a:lnTo>
-                <a:close/>
-                <a:lnTo>
-                  <a:pt x="3244555" y="136930"/>
-                </a:lnTo>
-                <a:close/>
-                <a:lnTo>
-                  <a:pt x="3246807" y="130683"/>
-                </a:lnTo>
-                <a:close/>
-                <a:lnTo>
-                  <a:pt x="3249059" y="124438"/>
-                </a:lnTo>
-                <a:close/>
-                <a:lnTo>
-                  <a:pt x="3251310" y="118193"/>
-                </a:lnTo>
-                <a:close/>
-                <a:lnTo>
-                  <a:pt x="3253562" y="111941"/>
-                </a:lnTo>
-                <a:close/>
-                <a:lnTo>
-                  <a:pt x="3255814" y="105678"/>
-                </a:lnTo>
-                <a:close/>
-                <a:lnTo>
-                  <a:pt x="3258065" y="99399"/>
-                </a:lnTo>
-                <a:close/>
-                <a:lnTo>
-                  <a:pt x="3260317" y="93100"/>
-                </a:lnTo>
-                <a:close/>
-                <a:lnTo>
-                  <a:pt x="3262569" y="86774"/>
-                </a:lnTo>
-                <a:close/>
-                <a:lnTo>
-                  <a:pt x="3264820" y="80419"/>
-                </a:lnTo>
-                <a:close/>
-                <a:lnTo>
-                  <a:pt x="3267072" y="74028"/>
-                </a:lnTo>
-                <a:close/>
-                <a:lnTo>
-                  <a:pt x="3269323" y="67596"/>
-                </a:lnTo>
-                <a:close/>
-                <a:lnTo>
-                  <a:pt x="3271575" y="61120"/>
-                </a:lnTo>
-                <a:close/>
-                <a:lnTo>
-                  <a:pt x="3273827" y="54593"/>
-                </a:lnTo>
-                <a:close/>
-                <a:lnTo>
-                  <a:pt x="3276078" y="48012"/>
-                </a:lnTo>
-                <a:close/>
-                <a:lnTo>
-                  <a:pt x="3278330" y="41371"/>
-                </a:lnTo>
-                <a:close/>
-                <a:lnTo>
-                  <a:pt x="3280582" y="34666"/>
-                </a:lnTo>
-                <a:close/>
-                <a:lnTo>
-                  <a:pt x="3282833" y="27891"/>
-                </a:lnTo>
-                <a:close/>
-                <a:lnTo>
-                  <a:pt x="3285085" y="21042"/>
-                </a:lnTo>
-                <a:close/>
-                <a:lnTo>
-                  <a:pt x="3287337" y="14113"/>
-                </a:lnTo>
-                <a:close/>
-                <a:lnTo>
-                  <a:pt x="3289588" y="7101"/>
-                </a:lnTo>
-                <a:close/>
-                <a:lnTo>
-                  <a:pt x="3291840" y="0"/>
+                  <a:pt x="2198" y="4195882"/>
+                </a:lnTo>
+                <a:close/>
+                <a:lnTo>
+                  <a:pt x="4396" y="4184967"/>
+                </a:lnTo>
+                <a:close/>
+                <a:lnTo>
+                  <a:pt x="6595" y="4173533"/>
+                </a:lnTo>
+                <a:close/>
+                <a:lnTo>
+                  <a:pt x="8793" y="4161622"/>
+                </a:lnTo>
+                <a:close/>
+                <a:lnTo>
+                  <a:pt x="10991" y="4149273"/>
+                </a:lnTo>
+                <a:close/>
+                <a:lnTo>
+                  <a:pt x="13189" y="4136527"/>
+                </a:lnTo>
+                <a:close/>
+                <a:lnTo>
+                  <a:pt x="15388" y="4123424"/>
+                </a:lnTo>
+                <a:close/>
+                <a:lnTo>
+                  <a:pt x="17586" y="4110003"/>
+                </a:lnTo>
+                <a:close/>
+                <a:lnTo>
+                  <a:pt x="19784" y="4096306"/>
+                </a:lnTo>
+                <a:close/>
+                <a:lnTo>
+                  <a:pt x="21982" y="4082371"/>
+                </a:lnTo>
+                <a:close/>
+                <a:lnTo>
+                  <a:pt x="24180" y="4068240"/>
+                </a:lnTo>
+                <a:close/>
+                <a:lnTo>
+                  <a:pt x="26379" y="4053952"/>
+                </a:lnTo>
+                <a:close/>
+                <a:lnTo>
+                  <a:pt x="28577" y="4039547"/>
+                </a:lnTo>
+                <a:close/>
+                <a:lnTo>
+                  <a:pt x="30775" y="4025067"/>
+                </a:lnTo>
+                <a:close/>
+                <a:lnTo>
+                  <a:pt x="32973" y="4010549"/>
+                </a:lnTo>
+                <a:close/>
+                <a:lnTo>
+                  <a:pt x="35172" y="3996036"/>
+                </a:lnTo>
+                <a:close/>
+                <a:lnTo>
+                  <a:pt x="37370" y="3981566"/>
+                </a:lnTo>
+                <a:close/>
+                <a:lnTo>
+                  <a:pt x="39568" y="3967160"/>
+                </a:lnTo>
+                <a:close/>
+                <a:lnTo>
+                  <a:pt x="41766" y="3952810"/>
+                </a:lnTo>
+                <a:close/>
+                <a:lnTo>
+                  <a:pt x="43964" y="3938506"/>
+                </a:lnTo>
+                <a:close/>
+                <a:lnTo>
+                  <a:pt x="46163" y="3924237"/>
+                </a:lnTo>
+                <a:close/>
+                <a:lnTo>
+                  <a:pt x="48361" y="3909994"/>
+                </a:lnTo>
+                <a:close/>
+                <a:lnTo>
+                  <a:pt x="50559" y="3895767"/>
+                </a:lnTo>
+                <a:close/>
+                <a:lnTo>
+                  <a:pt x="52757" y="3881545"/>
+                </a:lnTo>
+                <a:close/>
+                <a:lnTo>
+                  <a:pt x="54956" y="3867319"/>
+                </a:lnTo>
+                <a:close/>
+                <a:lnTo>
+                  <a:pt x="57154" y="3853080"/>
+                </a:lnTo>
+                <a:close/>
+                <a:lnTo>
+                  <a:pt x="59352" y="3838827"/>
+                </a:lnTo>
+                <a:close/>
+                <a:lnTo>
+                  <a:pt x="61550" y="3824560"/>
+                </a:lnTo>
+                <a:close/>
+                <a:lnTo>
+                  <a:pt x="63748" y="3810279"/>
+                </a:lnTo>
+                <a:close/>
+                <a:lnTo>
+                  <a:pt x="65947" y="3795985"/>
+                </a:lnTo>
+                <a:close/>
+                <a:lnTo>
+                  <a:pt x="68145" y="3781678"/>
+                </a:lnTo>
+                <a:close/>
+                <a:lnTo>
+                  <a:pt x="70343" y="3767357"/>
+                </a:lnTo>
+                <a:close/>
+                <a:lnTo>
+                  <a:pt x="72541" y="3753024"/>
+                </a:lnTo>
+                <a:close/>
+                <a:lnTo>
+                  <a:pt x="74740" y="3738678"/>
+                </a:lnTo>
+                <a:close/>
+                <a:lnTo>
+                  <a:pt x="76938" y="3724326"/>
+                </a:lnTo>
+                <a:close/>
+                <a:lnTo>
+                  <a:pt x="79136" y="3709978"/>
+                </a:lnTo>
+                <a:close/>
+                <a:lnTo>
+                  <a:pt x="81334" y="3695642"/>
+                </a:lnTo>
+                <a:close/>
+                <a:lnTo>
+                  <a:pt x="83533" y="3681329"/>
+                </a:lnTo>
+                <a:close/>
+                <a:lnTo>
+                  <a:pt x="85731" y="3667047"/>
+                </a:lnTo>
+                <a:close/>
+                <a:lnTo>
+                  <a:pt x="87929" y="3652806"/>
+                </a:lnTo>
+                <a:close/>
+                <a:lnTo>
+                  <a:pt x="90127" y="3638615"/>
+                </a:lnTo>
+                <a:close/>
+                <a:lnTo>
+                  <a:pt x="92325" y="3624484"/>
+                </a:lnTo>
+                <a:close/>
+                <a:lnTo>
+                  <a:pt x="94524" y="3610400"/>
+                </a:lnTo>
+                <a:close/>
+                <a:lnTo>
+                  <a:pt x="96722" y="3596330"/>
+                </a:lnTo>
+                <a:close/>
+                <a:lnTo>
+                  <a:pt x="98920" y="3582233"/>
+                </a:lnTo>
+                <a:close/>
+                <a:lnTo>
+                  <a:pt x="101118" y="3568074"/>
+                </a:lnTo>
+                <a:close/>
+                <a:lnTo>
+                  <a:pt x="103317" y="3553815"/>
+                </a:lnTo>
+                <a:close/>
+                <a:lnTo>
+                  <a:pt x="105515" y="3539417"/>
+                </a:lnTo>
+                <a:close/>
+                <a:lnTo>
+                  <a:pt x="107713" y="3524842"/>
+                </a:lnTo>
+                <a:close/>
+                <a:lnTo>
+                  <a:pt x="109911" y="3510055"/>
+                </a:lnTo>
+                <a:close/>
+                <a:lnTo>
+                  <a:pt x="112109" y="3495043"/>
+                </a:lnTo>
+                <a:close/>
+                <a:lnTo>
+                  <a:pt x="114308" y="3479885"/>
+                </a:lnTo>
+                <a:close/>
+                <a:lnTo>
+                  <a:pt x="116506" y="3464674"/>
+                </a:lnTo>
+                <a:close/>
+                <a:lnTo>
+                  <a:pt x="118704" y="3449503"/>
+                </a:lnTo>
+                <a:close/>
+                <a:lnTo>
+                  <a:pt x="120902" y="3434467"/>
+                </a:lnTo>
+                <a:close/>
+                <a:lnTo>
+                  <a:pt x="123101" y="3419660"/>
+                </a:lnTo>
+                <a:close/>
+                <a:lnTo>
+                  <a:pt x="125299" y="3405174"/>
+                </a:lnTo>
+                <a:close/>
+                <a:lnTo>
+                  <a:pt x="127497" y="3391103"/>
+                </a:lnTo>
+                <a:close/>
+                <a:lnTo>
+                  <a:pt x="129695" y="3377528"/>
+                </a:lnTo>
+                <a:close/>
+                <a:lnTo>
+                  <a:pt x="131893" y="3364408"/>
+                </a:lnTo>
+                <a:close/>
+                <a:lnTo>
+                  <a:pt x="134092" y="3351645"/>
+                </a:lnTo>
+                <a:close/>
+                <a:lnTo>
+                  <a:pt x="136290" y="3339140"/>
+                </a:lnTo>
+                <a:close/>
+                <a:lnTo>
+                  <a:pt x="138488" y="3326793"/>
+                </a:lnTo>
+                <a:close/>
+                <a:lnTo>
+                  <a:pt x="140686" y="3314507"/>
+                </a:lnTo>
+                <a:close/>
+                <a:lnTo>
+                  <a:pt x="142885" y="3302181"/>
+                </a:lnTo>
+                <a:close/>
+                <a:lnTo>
+                  <a:pt x="145083" y="3289717"/>
+                </a:lnTo>
+                <a:close/>
+                <a:lnTo>
+                  <a:pt x="147281" y="3277018"/>
+                </a:lnTo>
+                <a:close/>
+                <a:lnTo>
+                  <a:pt x="149479" y="3264060"/>
+                </a:lnTo>
+                <a:close/>
+                <a:lnTo>
+                  <a:pt x="151677" y="3250902"/>
+                </a:lnTo>
+                <a:close/>
+                <a:lnTo>
+                  <a:pt x="153876" y="3237609"/>
+                </a:lnTo>
+                <a:close/>
+                <a:lnTo>
+                  <a:pt x="156074" y="3224245"/>
+                </a:lnTo>
+                <a:close/>
+                <a:lnTo>
+                  <a:pt x="158272" y="3210873"/>
+                </a:lnTo>
+                <a:close/>
+                <a:lnTo>
+                  <a:pt x="160470" y="3197558"/>
+                </a:lnTo>
+                <a:close/>
+                <a:lnTo>
+                  <a:pt x="162669" y="3184363"/>
+                </a:lnTo>
+                <a:close/>
+                <a:lnTo>
+                  <a:pt x="164867" y="3171354"/>
+                </a:lnTo>
+                <a:close/>
+                <a:lnTo>
+                  <a:pt x="167065" y="3158575"/>
+                </a:lnTo>
+                <a:close/>
+                <a:lnTo>
+                  <a:pt x="169263" y="3146021"/>
+                </a:lnTo>
+                <a:close/>
+                <a:lnTo>
+                  <a:pt x="171461" y="3133677"/>
+                </a:lnTo>
+                <a:close/>
+                <a:lnTo>
+                  <a:pt x="173660" y="3121529"/>
+                </a:lnTo>
+                <a:close/>
+                <a:lnTo>
+                  <a:pt x="175858" y="3109563"/>
+                </a:lnTo>
+                <a:close/>
+                <a:lnTo>
+                  <a:pt x="178056" y="3097763"/>
+                </a:lnTo>
+                <a:close/>
+                <a:lnTo>
+                  <a:pt x="180254" y="3086116"/>
+                </a:lnTo>
+                <a:close/>
+                <a:lnTo>
+                  <a:pt x="182453" y="3074607"/>
+                </a:lnTo>
+                <a:close/>
+                <a:lnTo>
+                  <a:pt x="184651" y="3063222"/>
+                </a:lnTo>
+                <a:close/>
+                <a:lnTo>
+                  <a:pt x="186849" y="3051953"/>
+                </a:lnTo>
+                <a:close/>
+                <a:lnTo>
+                  <a:pt x="189047" y="3040794"/>
+                </a:lnTo>
+                <a:close/>
+                <a:lnTo>
+                  <a:pt x="191245" y="3029737"/>
+                </a:lnTo>
+                <a:close/>
+                <a:lnTo>
+                  <a:pt x="193444" y="3018778"/>
+                </a:lnTo>
+                <a:close/>
+                <a:lnTo>
+                  <a:pt x="195642" y="3007909"/>
+                </a:lnTo>
+                <a:close/>
+                <a:lnTo>
+                  <a:pt x="197840" y="2997124"/>
+                </a:lnTo>
+                <a:close/>
+                <a:lnTo>
+                  <a:pt x="200038" y="2986418"/>
+                </a:lnTo>
+                <a:close/>
+                <a:lnTo>
+                  <a:pt x="202237" y="2975783"/>
+                </a:lnTo>
+                <a:close/>
+                <a:lnTo>
+                  <a:pt x="204435" y="2965212"/>
+                </a:lnTo>
+                <a:close/>
+                <a:lnTo>
+                  <a:pt x="206633" y="2954699"/>
+                </a:lnTo>
+                <a:close/>
+                <a:lnTo>
+                  <a:pt x="208831" y="2944233"/>
+                </a:lnTo>
+                <a:close/>
+                <a:lnTo>
+                  <a:pt x="211029" y="2933809"/>
+                </a:lnTo>
+                <a:close/>
+                <a:lnTo>
+                  <a:pt x="213228" y="2923416"/>
+                </a:lnTo>
+                <a:close/>
+                <a:lnTo>
+                  <a:pt x="215426" y="2913048"/>
+                </a:lnTo>
+                <a:close/>
+                <a:lnTo>
+                  <a:pt x="217624" y="2902696"/>
+                </a:lnTo>
+                <a:close/>
+                <a:lnTo>
+                  <a:pt x="219822" y="2892352"/>
+                </a:lnTo>
+                <a:close/>
+                <a:lnTo>
+                  <a:pt x="222021" y="2882021"/>
+                </a:lnTo>
+                <a:close/>
+                <a:lnTo>
+                  <a:pt x="224219" y="2871736"/>
+                </a:lnTo>
+                <a:close/>
+                <a:lnTo>
+                  <a:pt x="226417" y="2861536"/>
+                </a:lnTo>
+                <a:close/>
+                <a:lnTo>
+                  <a:pt x="228615" y="2851460"/>
+                </a:lnTo>
+                <a:close/>
+                <a:lnTo>
+                  <a:pt x="230813" y="2841545"/>
+                </a:lnTo>
+                <a:close/>
+                <a:lnTo>
+                  <a:pt x="233012" y="2831831"/>
+                </a:lnTo>
+                <a:close/>
+                <a:lnTo>
+                  <a:pt x="235210" y="2822356"/>
+                </a:lnTo>
+                <a:close/>
+                <a:lnTo>
+                  <a:pt x="237408" y="2813158"/>
+                </a:lnTo>
+                <a:close/>
+                <a:lnTo>
+                  <a:pt x="239606" y="2804268"/>
+                </a:lnTo>
+                <a:close/>
+                <a:lnTo>
+                  <a:pt x="241805" y="2795656"/>
+                </a:lnTo>
+                <a:close/>
+                <a:lnTo>
+                  <a:pt x="244003" y="2787272"/>
+                </a:lnTo>
+                <a:close/>
+                <a:lnTo>
+                  <a:pt x="246201" y="2779066"/>
+                </a:lnTo>
+                <a:close/>
+                <a:lnTo>
+                  <a:pt x="248399" y="2770987"/>
+                </a:lnTo>
+                <a:close/>
+                <a:lnTo>
+                  <a:pt x="250598" y="2762984"/>
+                </a:lnTo>
+                <a:close/>
+                <a:lnTo>
+                  <a:pt x="252796" y="2755006"/>
+                </a:lnTo>
+                <a:close/>
+                <a:lnTo>
+                  <a:pt x="254994" y="2747003"/>
+                </a:lnTo>
+                <a:close/>
+                <a:lnTo>
+                  <a:pt x="257192" y="2738925"/>
+                </a:lnTo>
+                <a:close/>
+                <a:lnTo>
+                  <a:pt x="259390" y="2730760"/>
+                </a:lnTo>
+                <a:close/>
+                <a:lnTo>
+                  <a:pt x="261589" y="2722528"/>
+                </a:lnTo>
+                <a:close/>
+                <a:lnTo>
+                  <a:pt x="263787" y="2714250"/>
+                </a:lnTo>
+                <a:close/>
+                <a:lnTo>
+                  <a:pt x="265985" y="2705947"/>
+                </a:lnTo>
+                <a:close/>
+                <a:lnTo>
+                  <a:pt x="268183" y="2697642"/>
+                </a:lnTo>
+                <a:close/>
+                <a:lnTo>
+                  <a:pt x="270382" y="2689354"/>
+                </a:lnTo>
+                <a:close/>
+                <a:lnTo>
+                  <a:pt x="272580" y="2681107"/>
+                </a:lnTo>
+                <a:close/>
+                <a:lnTo>
+                  <a:pt x="274778" y="2672921"/>
+                </a:lnTo>
+                <a:close/>
+                <a:lnTo>
+                  <a:pt x="276976" y="2664800"/>
+                </a:lnTo>
+                <a:close/>
+                <a:lnTo>
+                  <a:pt x="279174" y="2656716"/>
+                </a:lnTo>
+                <a:close/>
+                <a:lnTo>
+                  <a:pt x="281373" y="2648633"/>
+                </a:lnTo>
+                <a:close/>
+                <a:lnTo>
+                  <a:pt x="283571" y="2640515"/>
+                </a:lnTo>
+                <a:close/>
+                <a:lnTo>
+                  <a:pt x="285769" y="2632329"/>
+                </a:lnTo>
+                <a:close/>
+                <a:lnTo>
+                  <a:pt x="287967" y="2624039"/>
+                </a:lnTo>
+                <a:close/>
+                <a:lnTo>
+                  <a:pt x="290166" y="2615610"/>
+                </a:lnTo>
+                <a:close/>
+                <a:lnTo>
+                  <a:pt x="292364" y="2607008"/>
+                </a:lnTo>
+                <a:close/>
+                <a:lnTo>
+                  <a:pt x="294562" y="2598209"/>
+                </a:lnTo>
+                <a:close/>
+                <a:lnTo>
+                  <a:pt x="296760" y="2589261"/>
+                </a:lnTo>
+                <a:close/>
+                <a:lnTo>
+                  <a:pt x="298958" y="2580234"/>
+                </a:lnTo>
+                <a:close/>
+                <a:lnTo>
+                  <a:pt x="301157" y="2571198"/>
+                </a:lnTo>
+                <a:close/>
+                <a:lnTo>
+                  <a:pt x="303355" y="2562225"/>
+                </a:lnTo>
+                <a:close/>
+                <a:lnTo>
+                  <a:pt x="305553" y="2553385"/>
+                </a:lnTo>
+                <a:close/>
+                <a:lnTo>
+                  <a:pt x="307751" y="2544748"/>
+                </a:lnTo>
+                <a:close/>
+                <a:lnTo>
+                  <a:pt x="309950" y="2536386"/>
+                </a:lnTo>
+                <a:close/>
+                <a:lnTo>
+                  <a:pt x="312148" y="2528365"/>
+                </a:lnTo>
+                <a:close/>
+                <a:lnTo>
+                  <a:pt x="314346" y="2520686"/>
+                </a:lnTo>
+                <a:close/>
+                <a:lnTo>
+                  <a:pt x="316544" y="2513292"/>
+                </a:lnTo>
+                <a:close/>
+                <a:lnTo>
+                  <a:pt x="318742" y="2506126"/>
+                </a:lnTo>
+                <a:close/>
+                <a:lnTo>
+                  <a:pt x="320941" y="2499132"/>
+                </a:lnTo>
+                <a:close/>
+                <a:lnTo>
+                  <a:pt x="323139" y="2492252"/>
+                </a:lnTo>
+                <a:close/>
+                <a:lnTo>
+                  <a:pt x="325337" y="2485429"/>
+                </a:lnTo>
+                <a:close/>
+                <a:lnTo>
+                  <a:pt x="327535" y="2478605"/>
+                </a:lnTo>
+                <a:close/>
+                <a:lnTo>
+                  <a:pt x="329734" y="2471723"/>
+                </a:lnTo>
+                <a:close/>
+                <a:lnTo>
+                  <a:pt x="331932" y="2464750"/>
+                </a:lnTo>
+                <a:close/>
+                <a:lnTo>
+                  <a:pt x="334130" y="2457696"/>
+                </a:lnTo>
+                <a:close/>
+                <a:lnTo>
+                  <a:pt x="336328" y="2450575"/>
+                </a:lnTo>
+                <a:close/>
+                <a:lnTo>
+                  <a:pt x="338526" y="2443404"/>
+                </a:lnTo>
+                <a:close/>
+                <a:lnTo>
+                  <a:pt x="340725" y="2436197"/>
+                </a:lnTo>
+                <a:close/>
+                <a:lnTo>
+                  <a:pt x="342923" y="2428970"/>
+                </a:lnTo>
+                <a:close/>
+                <a:lnTo>
+                  <a:pt x="345121" y="2421738"/>
+                </a:lnTo>
+                <a:close/>
+                <a:lnTo>
+                  <a:pt x="347319" y="2414517"/>
+                </a:lnTo>
+                <a:close/>
+                <a:lnTo>
+                  <a:pt x="349518" y="2407319"/>
+                </a:lnTo>
+                <a:close/>
+                <a:lnTo>
+                  <a:pt x="351716" y="2400144"/>
+                </a:lnTo>
+                <a:close/>
+                <a:lnTo>
+                  <a:pt x="353914" y="2392988"/>
+                </a:lnTo>
+                <a:close/>
+                <a:lnTo>
+                  <a:pt x="356112" y="2385847"/>
+                </a:lnTo>
+                <a:close/>
+                <a:lnTo>
+                  <a:pt x="358310" y="2378717"/>
+                </a:lnTo>
+                <a:close/>
+                <a:lnTo>
+                  <a:pt x="360509" y="2371594"/>
+                </a:lnTo>
+                <a:close/>
+                <a:lnTo>
+                  <a:pt x="362707" y="2364473"/>
+                </a:lnTo>
+                <a:close/>
+                <a:lnTo>
+                  <a:pt x="364905" y="2357351"/>
+                </a:lnTo>
+                <a:close/>
+                <a:lnTo>
+                  <a:pt x="367103" y="2350224"/>
+                </a:lnTo>
+                <a:close/>
+                <a:lnTo>
+                  <a:pt x="369302" y="2343090"/>
+                </a:lnTo>
+                <a:close/>
+                <a:lnTo>
+                  <a:pt x="371500" y="2335950"/>
+                </a:lnTo>
+                <a:close/>
+                <a:lnTo>
+                  <a:pt x="373698" y="2328807"/>
+                </a:lnTo>
+                <a:close/>
+                <a:lnTo>
+                  <a:pt x="375896" y="2321659"/>
+                </a:lnTo>
+                <a:close/>
+                <a:lnTo>
+                  <a:pt x="378094" y="2314510"/>
+                </a:lnTo>
+                <a:close/>
+                <a:lnTo>
+                  <a:pt x="380293" y="2307359"/>
+                </a:lnTo>
+                <a:close/>
+                <a:lnTo>
+                  <a:pt x="382491" y="2300209"/>
+                </a:lnTo>
+                <a:close/>
+                <a:lnTo>
+                  <a:pt x="384689" y="2293059"/>
+                </a:lnTo>
+                <a:close/>
+                <a:lnTo>
+                  <a:pt x="386887" y="2285910"/>
+                </a:lnTo>
+                <a:close/>
+                <a:lnTo>
+                  <a:pt x="389086" y="2278763"/>
+                </a:lnTo>
+                <a:close/>
+                <a:lnTo>
+                  <a:pt x="391284" y="2271618"/>
+                </a:lnTo>
+                <a:close/>
+                <a:lnTo>
+                  <a:pt x="393482" y="2264473"/>
+                </a:lnTo>
+                <a:close/>
+                <a:lnTo>
+                  <a:pt x="395680" y="2257330"/>
+                </a:lnTo>
+                <a:close/>
+                <a:lnTo>
+                  <a:pt x="397878" y="2250188"/>
+                </a:lnTo>
+                <a:close/>
+                <a:lnTo>
+                  <a:pt x="400077" y="2243047"/>
+                </a:lnTo>
+                <a:close/>
+                <a:lnTo>
+                  <a:pt x="402275" y="2235906"/>
+                </a:lnTo>
+                <a:close/>
+                <a:lnTo>
+                  <a:pt x="404473" y="2228766"/>
+                </a:lnTo>
+                <a:close/>
+                <a:lnTo>
+                  <a:pt x="406671" y="2221627"/>
+                </a:lnTo>
+                <a:close/>
+                <a:lnTo>
+                  <a:pt x="408870" y="2214486"/>
+                </a:lnTo>
+                <a:close/>
+                <a:lnTo>
+                  <a:pt x="411068" y="2207345"/>
+                </a:lnTo>
+                <a:close/>
+                <a:lnTo>
+                  <a:pt x="413266" y="2200202"/>
+                </a:lnTo>
+                <a:close/>
+                <a:lnTo>
+                  <a:pt x="415464" y="2193057"/>
+                </a:lnTo>
+                <a:close/>
+                <a:lnTo>
+                  <a:pt x="417663" y="2185908"/>
+                </a:lnTo>
+                <a:close/>
+                <a:lnTo>
+                  <a:pt x="419861" y="2178756"/>
+                </a:lnTo>
+                <a:close/>
+                <a:lnTo>
+                  <a:pt x="422059" y="2171600"/>
+                </a:lnTo>
+                <a:close/>
+                <a:lnTo>
+                  <a:pt x="424257" y="2164442"/>
+                </a:lnTo>
+                <a:close/>
+                <a:lnTo>
+                  <a:pt x="426455" y="2157283"/>
+                </a:lnTo>
+                <a:close/>
+                <a:lnTo>
+                  <a:pt x="428654" y="2150126"/>
+                </a:lnTo>
+                <a:close/>
+                <a:lnTo>
+                  <a:pt x="430852" y="2142975"/>
+                </a:lnTo>
+                <a:close/>
+                <a:lnTo>
+                  <a:pt x="433050" y="2135831"/>
+                </a:lnTo>
+                <a:close/>
+                <a:lnTo>
+                  <a:pt x="435248" y="2128697"/>
+                </a:lnTo>
+                <a:close/>
+                <a:lnTo>
+                  <a:pt x="437447" y="2121575"/>
+                </a:lnTo>
+                <a:close/>
+                <a:lnTo>
+                  <a:pt x="439645" y="2114469"/>
+                </a:lnTo>
+                <a:close/>
+                <a:lnTo>
+                  <a:pt x="441843" y="2107376"/>
+                </a:lnTo>
+                <a:close/>
+                <a:lnTo>
+                  <a:pt x="444041" y="2100286"/>
+                </a:lnTo>
+                <a:close/>
+                <a:lnTo>
+                  <a:pt x="446239" y="2093191"/>
+                </a:lnTo>
+                <a:close/>
+                <a:lnTo>
+                  <a:pt x="448438" y="2086081"/>
+                </a:lnTo>
+                <a:close/>
+                <a:lnTo>
+                  <a:pt x="450636" y="2078947"/>
+                </a:lnTo>
+                <a:close/>
+                <a:lnTo>
+                  <a:pt x="452834" y="2071778"/>
+                </a:lnTo>
+                <a:close/>
+                <a:lnTo>
+                  <a:pt x="455032" y="2064565"/>
+                </a:lnTo>
+                <a:close/>
+                <a:lnTo>
+                  <a:pt x="457231" y="2057299"/>
+                </a:lnTo>
+                <a:close/>
+                <a:lnTo>
+                  <a:pt x="459429" y="2049977"/>
+                </a:lnTo>
+                <a:close/>
+                <a:lnTo>
+                  <a:pt x="461627" y="2042629"/>
+                </a:lnTo>
+                <a:close/>
+                <a:lnTo>
+                  <a:pt x="463825" y="2035291"/>
+                </a:lnTo>
+                <a:close/>
+                <a:lnTo>
+                  <a:pt x="466023" y="2027997"/>
+                </a:lnTo>
+                <a:close/>
+                <a:lnTo>
+                  <a:pt x="468221" y="2020783"/>
+                </a:lnTo>
+                <a:close/>
+                <a:lnTo>
+                  <a:pt x="470420" y="2013687"/>
+                </a:lnTo>
+                <a:close/>
+                <a:lnTo>
+                  <a:pt x="472618" y="2006742"/>
+                </a:lnTo>
+                <a:close/>
+                <a:lnTo>
+                  <a:pt x="474816" y="1999986"/>
+                </a:lnTo>
+                <a:close/>
+                <a:lnTo>
+                  <a:pt x="477015" y="1993449"/>
+                </a:lnTo>
+                <a:close/>
+                <a:lnTo>
+                  <a:pt x="479213" y="1987119"/>
+                </a:lnTo>
+                <a:close/>
+                <a:lnTo>
+                  <a:pt x="481412" y="1980960"/>
+                </a:lnTo>
+                <a:close/>
+                <a:lnTo>
+                  <a:pt x="483610" y="1974933"/>
+                </a:lnTo>
+                <a:close/>
+                <a:lnTo>
+                  <a:pt x="485808" y="1968999"/>
+                </a:lnTo>
+                <a:close/>
+                <a:lnTo>
+                  <a:pt x="488007" y="1963120"/>
+                </a:lnTo>
+                <a:close/>
+                <a:lnTo>
+                  <a:pt x="490205" y="1957259"/>
+                </a:lnTo>
+                <a:close/>
+                <a:lnTo>
+                  <a:pt x="492403" y="1951376"/>
+                </a:lnTo>
+                <a:close/>
+                <a:lnTo>
+                  <a:pt x="494600" y="1945435"/>
+                </a:lnTo>
+                <a:close/>
+                <a:lnTo>
+                  <a:pt x="496797" y="1939421"/>
+                </a:lnTo>
+                <a:close/>
+                <a:lnTo>
+                  <a:pt x="498994" y="1933354"/>
+                </a:lnTo>
+                <a:close/>
+                <a:lnTo>
+                  <a:pt x="501192" y="1927256"/>
+                </a:lnTo>
+                <a:close/>
+                <a:lnTo>
+                  <a:pt x="503389" y="1921148"/>
+                </a:lnTo>
+                <a:close/>
+                <a:lnTo>
+                  <a:pt x="505587" y="1915052"/>
+                </a:lnTo>
+                <a:close/>
+                <a:lnTo>
+                  <a:pt x="507786" y="1908989"/>
+                </a:lnTo>
+                <a:close/>
+                <a:lnTo>
+                  <a:pt x="509986" y="1902983"/>
+                </a:lnTo>
+                <a:close/>
+                <a:lnTo>
+                  <a:pt x="512186" y="1897053"/>
+                </a:lnTo>
+                <a:close/>
+                <a:lnTo>
+                  <a:pt x="514388" y="1891218"/>
+                </a:lnTo>
+                <a:close/>
+                <a:lnTo>
+                  <a:pt x="516590" y="1885480"/>
+                </a:lnTo>
+                <a:close/>
+                <a:lnTo>
+                  <a:pt x="518792" y="1879837"/>
+                </a:lnTo>
+                <a:close/>
+                <a:lnTo>
+                  <a:pt x="520993" y="1874288"/>
+                </a:lnTo>
+                <a:close/>
+                <a:lnTo>
+                  <a:pt x="523192" y="1868832"/>
+                </a:lnTo>
+                <a:close/>
+                <a:lnTo>
+                  <a:pt x="525389" y="1863469"/>
+                </a:lnTo>
+                <a:close/>
+                <a:lnTo>
+                  <a:pt x="527584" y="1858196"/>
+                </a:lnTo>
+                <a:close/>
+                <a:lnTo>
+                  <a:pt x="529775" y="1853013"/>
+                </a:lnTo>
+                <a:close/>
+                <a:lnTo>
+                  <a:pt x="531961" y="1847917"/>
+                </a:lnTo>
+                <a:close/>
+                <a:lnTo>
+                  <a:pt x="534146" y="1842897"/>
+                </a:lnTo>
+                <a:close/>
+                <a:lnTo>
+                  <a:pt x="536330" y="1837936"/>
+                </a:lnTo>
+                <a:close/>
+                <a:lnTo>
+                  <a:pt x="538516" y="1833016"/>
+                </a:lnTo>
+                <a:close/>
+                <a:lnTo>
+                  <a:pt x="540708" y="1828120"/>
+                </a:lnTo>
+                <a:close/>
+                <a:lnTo>
+                  <a:pt x="542907" y="1823231"/>
+                </a:lnTo>
+                <a:close/>
+                <a:lnTo>
+                  <a:pt x="545116" y="1818331"/>
+                </a:lnTo>
+                <a:close/>
+                <a:lnTo>
+                  <a:pt x="547337" y="1813405"/>
+                </a:lnTo>
+                <a:close/>
+                <a:lnTo>
+                  <a:pt x="549574" y="1808435"/>
+                </a:lnTo>
+                <a:close/>
+                <a:lnTo>
+                  <a:pt x="551822" y="1803421"/>
+                </a:lnTo>
+                <a:close/>
+                <a:lnTo>
+                  <a:pt x="554074" y="1798383"/>
+                </a:lnTo>
+                <a:close/>
+                <a:lnTo>
+                  <a:pt x="556319" y="1793345"/>
+                </a:lnTo>
+                <a:close/>
+                <a:lnTo>
+                  <a:pt x="558549" y="1788328"/>
+                </a:lnTo>
+                <a:close/>
+                <a:lnTo>
+                  <a:pt x="560754" y="1783354"/>
+                </a:lnTo>
+                <a:close/>
+                <a:lnTo>
+                  <a:pt x="562925" y="1778445"/>
+                </a:lnTo>
+                <a:close/>
+                <a:lnTo>
+                  <a:pt x="565053" y="1773623"/>
+                </a:lnTo>
+                <a:close/>
+                <a:lnTo>
+                  <a:pt x="567127" y="1768911"/>
+                </a:lnTo>
+                <a:close/>
+                <a:lnTo>
+                  <a:pt x="569149" y="1764310"/>
+                </a:lnTo>
+                <a:close/>
+                <a:lnTo>
+                  <a:pt x="571148" y="1759760"/>
+                </a:lnTo>
+                <a:close/>
+                <a:lnTo>
+                  <a:pt x="573159" y="1755190"/>
+                </a:lnTo>
+                <a:close/>
+                <a:lnTo>
+                  <a:pt x="575216" y="1750529"/>
+                </a:lnTo>
+                <a:close/>
+                <a:lnTo>
+                  <a:pt x="577356" y="1745705"/>
+                </a:lnTo>
+                <a:close/>
+                <a:lnTo>
+                  <a:pt x="579611" y="1740648"/>
+                </a:lnTo>
+                <a:close/>
+                <a:lnTo>
+                  <a:pt x="582018" y="1735287"/>
+                </a:lnTo>
+                <a:close/>
+                <a:lnTo>
+                  <a:pt x="584611" y="1729549"/>
+                </a:lnTo>
+                <a:close/>
+                <a:lnTo>
+                  <a:pt x="587420" y="1723376"/>
+                </a:lnTo>
+                <a:close/>
+                <a:lnTo>
+                  <a:pt x="590430" y="1716796"/>
+                </a:lnTo>
+                <a:close/>
+                <a:lnTo>
+                  <a:pt x="593607" y="1709881"/>
+                </a:lnTo>
+                <a:close/>
+                <a:lnTo>
+                  <a:pt x="596916" y="1702704"/>
+                </a:lnTo>
+                <a:close/>
+                <a:lnTo>
+                  <a:pt x="600322" y="1695336"/>
+                </a:lnTo>
+                <a:close/>
+                <a:lnTo>
+                  <a:pt x="603790" y="1687850"/>
+                </a:lnTo>
+                <a:close/>
+                <a:lnTo>
+                  <a:pt x="607286" y="1680317"/>
+                </a:lnTo>
+                <a:close/>
+                <a:lnTo>
+                  <a:pt x="610774" y="1672810"/>
+                </a:lnTo>
+                <a:close/>
+                <a:lnTo>
+                  <a:pt x="614220" y="1665399"/>
+                </a:lnTo>
+                <a:close/>
+                <a:lnTo>
+                  <a:pt x="617611" y="1658110"/>
+                </a:lnTo>
+                <a:close/>
+                <a:lnTo>
+                  <a:pt x="620954" y="1650919"/>
+                </a:lnTo>
+                <a:close/>
+                <a:lnTo>
+                  <a:pt x="624258" y="1643800"/>
+                </a:lnTo>
+                <a:close/>
+                <a:lnTo>
+                  <a:pt x="627534" y="1636725"/>
+                </a:lnTo>
+                <a:close/>
+                <a:lnTo>
+                  <a:pt x="630790" y="1629669"/>
+                </a:lnTo>
+                <a:close/>
+                <a:lnTo>
+                  <a:pt x="634035" y="1622605"/>
+                </a:lnTo>
+                <a:close/>
+                <a:lnTo>
+                  <a:pt x="637280" y="1615505"/>
+                </a:lnTo>
+                <a:close/>
+                <a:lnTo>
+                  <a:pt x="640533" y="1608345"/>
+                </a:lnTo>
+                <a:close/>
+                <a:lnTo>
+                  <a:pt x="643800" y="1601111"/>
+                </a:lnTo>
+                <a:close/>
+                <a:lnTo>
+                  <a:pt x="647082" y="1593833"/>
+                </a:lnTo>
+                <a:close/>
+                <a:lnTo>
+                  <a:pt x="650374" y="1586543"/>
+                </a:lnTo>
+                <a:close/>
+                <a:lnTo>
+                  <a:pt x="653675" y="1579276"/>
+                </a:lnTo>
+                <a:close/>
+                <a:lnTo>
+                  <a:pt x="656982" y="1572066"/>
+                </a:lnTo>
+                <a:close/>
+                <a:lnTo>
+                  <a:pt x="660293" y="1564948"/>
+                </a:lnTo>
+                <a:close/>
+                <a:lnTo>
+                  <a:pt x="663604" y="1557955"/>
+                </a:lnTo>
+                <a:close/>
+                <a:lnTo>
+                  <a:pt x="666915" y="1551122"/>
+                </a:lnTo>
+                <a:close/>
+                <a:lnTo>
+                  <a:pt x="670221" y="1544478"/>
+                </a:lnTo>
+                <a:close/>
+                <a:lnTo>
+                  <a:pt x="673524" y="1538022"/>
+                </a:lnTo>
+                <a:close/>
+                <a:lnTo>
+                  <a:pt x="676823" y="1531740"/>
+                </a:lnTo>
+                <a:close/>
+                <a:lnTo>
+                  <a:pt x="680120" y="1525615"/>
+                </a:lnTo>
+                <a:close/>
+                <a:lnTo>
+                  <a:pt x="683416" y="1519634"/>
+                </a:lnTo>
+                <a:close/>
+                <a:lnTo>
+                  <a:pt x="686710" y="1513782"/>
+                </a:lnTo>
+                <a:close/>
+                <a:lnTo>
+                  <a:pt x="690003" y="1508043"/>
+                </a:lnTo>
+                <a:close/>
+                <a:lnTo>
+                  <a:pt x="693297" y="1502403"/>
+                </a:lnTo>
+                <a:close/>
+                <a:lnTo>
+                  <a:pt x="696591" y="1496848"/>
+                </a:lnTo>
+                <a:close/>
+                <a:lnTo>
+                  <a:pt x="699887" y="1491357"/>
+                </a:lnTo>
+                <a:close/>
+                <a:lnTo>
+                  <a:pt x="703183" y="1485910"/>
+                </a:lnTo>
+                <a:close/>
+                <a:lnTo>
+                  <a:pt x="706481" y="1480483"/>
+                </a:lnTo>
+                <a:close/>
+                <a:lnTo>
+                  <a:pt x="709778" y="1475054"/>
+                </a:lnTo>
+                <a:close/>
+                <a:lnTo>
+                  <a:pt x="713077" y="1469601"/>
+                </a:lnTo>
+                <a:close/>
+                <a:lnTo>
+                  <a:pt x="716375" y="1464100"/>
+                </a:lnTo>
+                <a:close/>
+                <a:lnTo>
+                  <a:pt x="719673" y="1458529"/>
+                </a:lnTo>
+                <a:close/>
+                <a:lnTo>
+                  <a:pt x="722971" y="1452866"/>
+                </a:lnTo>
+                <a:close/>
+                <a:lnTo>
+                  <a:pt x="726269" y="1447096"/>
+                </a:lnTo>
+                <a:close/>
+                <a:lnTo>
+                  <a:pt x="729567" y="1441228"/>
+                </a:lnTo>
+                <a:close/>
+                <a:lnTo>
+                  <a:pt x="732864" y="1435270"/>
+                </a:lnTo>
+                <a:close/>
+                <a:lnTo>
+                  <a:pt x="736162" y="1429232"/>
+                </a:lnTo>
+                <a:close/>
+                <a:lnTo>
+                  <a:pt x="739459" y="1423124"/>
+                </a:lnTo>
+                <a:close/>
+                <a:lnTo>
+                  <a:pt x="742756" y="1416955"/>
+                </a:lnTo>
+                <a:close/>
+                <a:lnTo>
+                  <a:pt x="746053" y="1410736"/>
+                </a:lnTo>
+                <a:close/>
+                <a:lnTo>
+                  <a:pt x="749350" y="1404476"/>
+                </a:lnTo>
+                <a:close/>
+                <a:lnTo>
+                  <a:pt x="752647" y="1398187"/>
+                </a:lnTo>
+                <a:close/>
+                <a:lnTo>
+                  <a:pt x="755944" y="1391896"/>
+                </a:lnTo>
+                <a:close/>
+                <a:lnTo>
+                  <a:pt x="759242" y="1385632"/>
+                </a:lnTo>
+                <a:close/>
+                <a:lnTo>
+                  <a:pt x="762539" y="1379429"/>
+                </a:lnTo>
+                <a:close/>
+                <a:lnTo>
+                  <a:pt x="765836" y="1373315"/>
+                </a:lnTo>
+                <a:close/>
+                <a:lnTo>
+                  <a:pt x="769134" y="1367324"/>
+                </a:lnTo>
+                <a:close/>
+                <a:lnTo>
+                  <a:pt x="772431" y="1361487"/>
+                </a:lnTo>
+                <a:close/>
+                <a:lnTo>
+                  <a:pt x="775729" y="1355833"/>
+                </a:lnTo>
+                <a:close/>
+                <a:lnTo>
+                  <a:pt x="779026" y="1350393"/>
+                </a:lnTo>
+                <a:close/>
+                <a:lnTo>
+                  <a:pt x="782323" y="1345161"/>
+                </a:lnTo>
+                <a:close/>
+                <a:lnTo>
+                  <a:pt x="785621" y="1340098"/>
+                </a:lnTo>
+                <a:close/>
+                <a:lnTo>
+                  <a:pt x="788918" y="1335165"/>
+                </a:lnTo>
+                <a:close/>
+                <a:lnTo>
+                  <a:pt x="792215" y="1330323"/>
+                </a:lnTo>
+                <a:close/>
+                <a:lnTo>
+                  <a:pt x="795513" y="1325532"/>
+                </a:lnTo>
+                <a:close/>
+                <a:lnTo>
+                  <a:pt x="798810" y="1320753"/>
+                </a:lnTo>
+                <a:close/>
+                <a:lnTo>
+                  <a:pt x="802107" y="1315946"/>
+                </a:lnTo>
+                <a:close/>
+                <a:lnTo>
+                  <a:pt x="805405" y="1311073"/>
+                </a:lnTo>
+                <a:close/>
+                <a:lnTo>
+                  <a:pt x="808702" y="1306116"/>
+                </a:lnTo>
+                <a:close/>
+                <a:lnTo>
+                  <a:pt x="811999" y="1301098"/>
+                </a:lnTo>
+                <a:close/>
+                <a:lnTo>
+                  <a:pt x="815297" y="1296052"/>
+                </a:lnTo>
+                <a:close/>
+                <a:lnTo>
+                  <a:pt x="818594" y="1291008"/>
+                </a:lnTo>
+                <a:close/>
+                <a:lnTo>
+                  <a:pt x="821891" y="1285997"/>
+                </a:lnTo>
+                <a:close/>
+                <a:lnTo>
+                  <a:pt x="825189" y="1281049"/>
+                </a:lnTo>
+                <a:close/>
+                <a:lnTo>
+                  <a:pt x="828486" y="1276196"/>
+                </a:lnTo>
+                <a:close/>
+                <a:lnTo>
+                  <a:pt x="831783" y="1271468"/>
+                </a:lnTo>
+                <a:close/>
+                <a:lnTo>
+                  <a:pt x="835081" y="1266888"/>
+                </a:lnTo>
+                <a:close/>
+                <a:lnTo>
+                  <a:pt x="838378" y="1262434"/>
+                </a:lnTo>
+                <a:close/>
+                <a:lnTo>
+                  <a:pt x="841675" y="1258070"/>
+                </a:lnTo>
+                <a:close/>
+                <a:lnTo>
+                  <a:pt x="844973" y="1253760"/>
+                </a:lnTo>
+                <a:close/>
+                <a:lnTo>
+                  <a:pt x="848270" y="1249467"/>
+                </a:lnTo>
+                <a:close/>
+                <a:lnTo>
+                  <a:pt x="851567" y="1245156"/>
+                </a:lnTo>
+                <a:close/>
+                <a:lnTo>
+                  <a:pt x="854865" y="1240790"/>
+                </a:lnTo>
+                <a:close/>
+                <a:lnTo>
+                  <a:pt x="858162" y="1236333"/>
+                </a:lnTo>
+                <a:close/>
+                <a:lnTo>
+                  <a:pt x="861459" y="1231750"/>
+                </a:lnTo>
+                <a:close/>
+                <a:lnTo>
+                  <a:pt x="864757" y="1227036"/>
+                </a:lnTo>
+                <a:close/>
+                <a:lnTo>
+                  <a:pt x="868054" y="1222210"/>
+                </a:lnTo>
+                <a:close/>
+                <a:lnTo>
+                  <a:pt x="871351" y="1217290"/>
+                </a:lnTo>
+                <a:close/>
+                <a:lnTo>
+                  <a:pt x="874649" y="1212296"/>
+                </a:lnTo>
+                <a:close/>
+                <a:lnTo>
+                  <a:pt x="877946" y="1207245"/>
+                </a:lnTo>
+                <a:close/>
+                <a:lnTo>
+                  <a:pt x="881243" y="1202157"/>
+                </a:lnTo>
+                <a:close/>
+                <a:lnTo>
+                  <a:pt x="884541" y="1197051"/>
+                </a:lnTo>
+                <a:close/>
+                <a:lnTo>
+                  <a:pt x="887838" y="1191946"/>
+                </a:lnTo>
+                <a:close/>
+                <a:lnTo>
+                  <a:pt x="891135" y="1186857"/>
+                </a:lnTo>
+                <a:close/>
+                <a:lnTo>
+                  <a:pt x="894433" y="1181792"/>
+                </a:lnTo>
+                <a:close/>
+                <a:lnTo>
+                  <a:pt x="897730" y="1176762"/>
+                </a:lnTo>
+                <a:close/>
+                <a:lnTo>
+                  <a:pt x="901027" y="1171773"/>
+                </a:lnTo>
+                <a:close/>
+                <a:lnTo>
+                  <a:pt x="904325" y="1166835"/>
+                </a:lnTo>
+                <a:close/>
+                <a:lnTo>
+                  <a:pt x="907622" y="1161955"/>
+                </a:lnTo>
+                <a:close/>
+                <a:lnTo>
+                  <a:pt x="910919" y="1157142"/>
+                </a:lnTo>
+                <a:close/>
+                <a:lnTo>
+                  <a:pt x="914217" y="1152405"/>
+                </a:lnTo>
+                <a:close/>
+                <a:lnTo>
+                  <a:pt x="917514" y="1147749"/>
+                </a:lnTo>
+                <a:close/>
+                <a:lnTo>
+                  <a:pt x="920811" y="1143174"/>
+                </a:lnTo>
+                <a:close/>
+                <a:lnTo>
+                  <a:pt x="924109" y="1138673"/>
+                </a:lnTo>
+                <a:close/>
+                <a:lnTo>
+                  <a:pt x="927406" y="1134243"/>
+                </a:lnTo>
+                <a:close/>
+                <a:lnTo>
+                  <a:pt x="930703" y="1129878"/>
+                </a:lnTo>
+                <a:close/>
+                <a:lnTo>
+                  <a:pt x="934001" y="1125574"/>
+                </a:lnTo>
+                <a:close/>
+                <a:lnTo>
+                  <a:pt x="937298" y="1121326"/>
+                </a:lnTo>
+                <a:close/>
+                <a:lnTo>
+                  <a:pt x="940595" y="1117129"/>
+                </a:lnTo>
+                <a:close/>
+                <a:lnTo>
+                  <a:pt x="943893" y="1112980"/>
+                </a:lnTo>
+                <a:close/>
+                <a:lnTo>
+                  <a:pt x="947190" y="1108882"/>
+                </a:lnTo>
+                <a:close/>
+                <a:lnTo>
+                  <a:pt x="950488" y="1104846"/>
+                </a:lnTo>
+                <a:close/>
+                <a:lnTo>
+                  <a:pt x="953785" y="1100883"/>
+                </a:lnTo>
+                <a:close/>
+                <a:lnTo>
+                  <a:pt x="957082" y="1097003"/>
+                </a:lnTo>
+                <a:close/>
+                <a:lnTo>
+                  <a:pt x="960380" y="1093216"/>
+                </a:lnTo>
+                <a:close/>
+                <a:lnTo>
+                  <a:pt x="963677" y="1089535"/>
+                </a:lnTo>
+                <a:close/>
+                <a:lnTo>
+                  <a:pt x="966974" y="1085968"/>
+                </a:lnTo>
+                <a:close/>
+                <a:lnTo>
+                  <a:pt x="970272" y="1082526"/>
+                </a:lnTo>
+                <a:close/>
+                <a:lnTo>
+                  <a:pt x="973569" y="1079204"/>
+                </a:lnTo>
+                <a:close/>
+                <a:lnTo>
+                  <a:pt x="976866" y="1075965"/>
+                </a:lnTo>
+                <a:close/>
+                <a:lnTo>
+                  <a:pt x="980164" y="1072772"/>
+                </a:lnTo>
+                <a:close/>
+                <a:lnTo>
+                  <a:pt x="983461" y="1069588"/>
+                </a:lnTo>
+                <a:close/>
+                <a:lnTo>
+                  <a:pt x="986758" y="1066375"/>
+                </a:lnTo>
+                <a:close/>
+                <a:lnTo>
+                  <a:pt x="990056" y="1063094"/>
+                </a:lnTo>
+                <a:close/>
+                <a:lnTo>
+                  <a:pt x="993353" y="1059709"/>
+                </a:lnTo>
+                <a:close/>
+                <a:lnTo>
+                  <a:pt x="996650" y="1056182"/>
+                </a:lnTo>
+                <a:close/>
+                <a:lnTo>
+                  <a:pt x="999948" y="1052488"/>
+                </a:lnTo>
+                <a:close/>
+                <a:lnTo>
+                  <a:pt x="1003245" y="1048658"/>
+                </a:lnTo>
+                <a:close/>
+                <a:lnTo>
+                  <a:pt x="1006542" y="1044737"/>
+                </a:lnTo>
+                <a:close/>
+                <a:lnTo>
+                  <a:pt x="1009840" y="1040768"/>
+                </a:lnTo>
+                <a:close/>
+                <a:lnTo>
+                  <a:pt x="1013137" y="1036798"/>
+                </a:lnTo>
+                <a:close/>
+                <a:lnTo>
+                  <a:pt x="1016434" y="1032872"/>
+                </a:lnTo>
+                <a:close/>
+                <a:lnTo>
+                  <a:pt x="1019732" y="1029033"/>
+                </a:lnTo>
+                <a:close/>
+                <a:lnTo>
+                  <a:pt x="1023029" y="1025326"/>
+                </a:lnTo>
+                <a:close/>
+                <a:lnTo>
+                  <a:pt x="1026326" y="1021793"/>
+                </a:lnTo>
+                <a:close/>
+                <a:lnTo>
+                  <a:pt x="1029624" y="1018421"/>
+                </a:lnTo>
+                <a:close/>
+                <a:lnTo>
+                  <a:pt x="1032921" y="1015164"/>
+                </a:lnTo>
+                <a:close/>
+                <a:lnTo>
+                  <a:pt x="1036218" y="1011975"/>
+                </a:lnTo>
+                <a:close/>
+                <a:lnTo>
+                  <a:pt x="1039516" y="1008810"/>
+                </a:lnTo>
+                <a:close/>
+                <a:lnTo>
+                  <a:pt x="1042813" y="1005620"/>
+                </a:lnTo>
+                <a:close/>
+                <a:lnTo>
+                  <a:pt x="1046110" y="1002361"/>
+                </a:lnTo>
+                <a:close/>
+                <a:lnTo>
+                  <a:pt x="1049408" y="998985"/>
+                </a:lnTo>
+                <a:close/>
+                <a:lnTo>
+                  <a:pt x="1052705" y="995446"/>
+                </a:lnTo>
+                <a:close/>
+                <a:lnTo>
+                  <a:pt x="1056002" y="991735"/>
+                </a:lnTo>
+                <a:close/>
+                <a:lnTo>
+                  <a:pt x="1059300" y="987892"/>
+                </a:lnTo>
+                <a:close/>
+                <a:lnTo>
+                  <a:pt x="1062597" y="983961"/>
+                </a:lnTo>
+                <a:close/>
+                <a:lnTo>
+                  <a:pt x="1065894" y="979989"/>
+                </a:lnTo>
+                <a:close/>
+                <a:lnTo>
+                  <a:pt x="1069192" y="976021"/>
+                </a:lnTo>
+                <a:close/>
+                <a:lnTo>
+                  <a:pt x="1072489" y="972102"/>
+                </a:lnTo>
+                <a:close/>
+                <a:lnTo>
+                  <a:pt x="1075786" y="968277"/>
+                </a:lnTo>
+                <a:close/>
+                <a:lnTo>
+                  <a:pt x="1079084" y="964592"/>
+                </a:lnTo>
+                <a:close/>
+                <a:lnTo>
+                  <a:pt x="1082381" y="961076"/>
+                </a:lnTo>
+                <a:close/>
+                <a:lnTo>
+                  <a:pt x="1085678" y="957703"/>
+                </a:lnTo>
+                <a:close/>
+                <a:lnTo>
+                  <a:pt x="1088976" y="954434"/>
+                </a:lnTo>
+                <a:close/>
+                <a:lnTo>
+                  <a:pt x="1092273" y="951229"/>
+                </a:lnTo>
+                <a:close/>
+                <a:lnTo>
+                  <a:pt x="1095570" y="948048"/>
+                </a:lnTo>
+                <a:close/>
+                <a:lnTo>
+                  <a:pt x="1098868" y="944853"/>
+                </a:lnTo>
+                <a:close/>
+                <a:lnTo>
+                  <a:pt x="1102165" y="941603"/>
+                </a:lnTo>
+                <a:close/>
+                <a:lnTo>
+                  <a:pt x="1105462" y="938259"/>
+                </a:lnTo>
+                <a:close/>
+                <a:lnTo>
+                  <a:pt x="1108760" y="934785"/>
+                </a:lnTo>
+                <a:close/>
+                <a:lnTo>
+                  <a:pt x="1112057" y="931178"/>
+                </a:lnTo>
+                <a:close/>
+                <a:lnTo>
+                  <a:pt x="1115354" y="927457"/>
+                </a:lnTo>
+                <a:close/>
+                <a:lnTo>
+                  <a:pt x="1118652" y="923637"/>
+                </a:lnTo>
+                <a:close/>
+                <a:lnTo>
+                  <a:pt x="1121949" y="919738"/>
+                </a:lnTo>
+                <a:close/>
+                <a:lnTo>
+                  <a:pt x="1125246" y="915775"/>
+                </a:lnTo>
+                <a:close/>
+                <a:lnTo>
+                  <a:pt x="1128544" y="911766"/>
+                </a:lnTo>
+                <a:close/>
+                <a:lnTo>
+                  <a:pt x="1131841" y="907729"/>
+                </a:lnTo>
+                <a:close/>
+                <a:lnTo>
+                  <a:pt x="1135138" y="903682"/>
+                </a:lnTo>
+                <a:close/>
+                <a:lnTo>
+                  <a:pt x="1138436" y="899641"/>
+                </a:lnTo>
+                <a:close/>
+                <a:lnTo>
+                  <a:pt x="1141733" y="895624"/>
+                </a:lnTo>
+                <a:close/>
+                <a:lnTo>
+                  <a:pt x="1145030" y="891648"/>
+                </a:lnTo>
+                <a:close/>
+                <a:lnTo>
+                  <a:pt x="1148328" y="887732"/>
+                </a:lnTo>
+                <a:close/>
+                <a:lnTo>
+                  <a:pt x="1151625" y="883893"/>
+                </a:lnTo>
+                <a:close/>
+                <a:lnTo>
+                  <a:pt x="1154922" y="880149"/>
+                </a:lnTo>
+                <a:close/>
+                <a:lnTo>
+                  <a:pt x="1158220" y="876516"/>
+                </a:lnTo>
+                <a:close/>
+                <a:lnTo>
+                  <a:pt x="1161517" y="873013"/>
+                </a:lnTo>
+                <a:close/>
+                <a:lnTo>
+                  <a:pt x="1164814" y="869646"/>
+                </a:lnTo>
+                <a:close/>
+                <a:lnTo>
+                  <a:pt x="1168112" y="866381"/>
+                </a:lnTo>
+                <a:close/>
+                <a:lnTo>
+                  <a:pt x="1171409" y="863180"/>
+                </a:lnTo>
+                <a:close/>
+                <a:lnTo>
+                  <a:pt x="1174706" y="860002"/>
+                </a:lnTo>
+                <a:close/>
+                <a:lnTo>
+                  <a:pt x="1178004" y="856807"/>
+                </a:lnTo>
+                <a:close/>
+                <a:lnTo>
+                  <a:pt x="1181301" y="853554"/>
+                </a:lnTo>
+                <a:close/>
+                <a:lnTo>
+                  <a:pt x="1184598" y="850205"/>
+                </a:lnTo>
+                <a:close/>
+                <a:lnTo>
+                  <a:pt x="1187896" y="846718"/>
+                </a:lnTo>
+                <a:close/>
+                <a:lnTo>
+                  <a:pt x="1191193" y="843060"/>
+                </a:lnTo>
+                <a:close/>
+                <a:lnTo>
+                  <a:pt x="1194490" y="839250"/>
+                </a:lnTo>
+                <a:close/>
+                <a:lnTo>
+                  <a:pt x="1197788" y="835336"/>
+                </a:lnTo>
+                <a:close/>
+                <a:lnTo>
+                  <a:pt x="1201085" y="831366"/>
+                </a:lnTo>
+                <a:close/>
+                <a:lnTo>
+                  <a:pt x="1204382" y="827385"/>
+                </a:lnTo>
+                <a:close/>
+                <a:lnTo>
+                  <a:pt x="1207680" y="823442"/>
+                </a:lnTo>
+                <a:close/>
+                <a:lnTo>
+                  <a:pt x="1210977" y="819585"/>
+                </a:lnTo>
+                <a:close/>
+                <a:lnTo>
+                  <a:pt x="1214274" y="815860"/>
+                </a:lnTo>
+                <a:close/>
+                <a:lnTo>
+                  <a:pt x="1217572" y="812313"/>
+                </a:lnTo>
+                <a:close/>
+                <a:lnTo>
+                  <a:pt x="1220869" y="808947"/>
+                </a:lnTo>
+                <a:close/>
+                <a:lnTo>
+                  <a:pt x="1224166" y="805711"/>
+                </a:lnTo>
+                <a:close/>
+                <a:lnTo>
+                  <a:pt x="1227464" y="802549"/>
+                </a:lnTo>
+                <a:close/>
+                <a:lnTo>
+                  <a:pt x="1230761" y="799409"/>
+                </a:lnTo>
+                <a:close/>
+                <a:lnTo>
+                  <a:pt x="1234058" y="796235"/>
+                </a:lnTo>
+                <a:close/>
+                <a:lnTo>
+                  <a:pt x="1237356" y="792974"/>
+                </a:lnTo>
+                <a:close/>
+                <a:lnTo>
+                  <a:pt x="1240653" y="789571"/>
+                </a:lnTo>
+                <a:close/>
+                <a:lnTo>
+                  <a:pt x="1243950" y="785973"/>
+                </a:lnTo>
+                <a:close/>
+                <a:lnTo>
+                  <a:pt x="1247248" y="782154"/>
+                </a:lnTo>
+                <a:close/>
+                <a:lnTo>
+                  <a:pt x="1250545" y="778173"/>
+                </a:lnTo>
+                <a:close/>
+                <a:lnTo>
+                  <a:pt x="1253842" y="774104"/>
+                </a:lnTo>
+                <a:close/>
+                <a:lnTo>
+                  <a:pt x="1257140" y="770022"/>
+                </a:lnTo>
+                <a:close/>
+                <a:lnTo>
+                  <a:pt x="1260437" y="766001"/>
+                </a:lnTo>
+                <a:close/>
+                <a:lnTo>
+                  <a:pt x="1263734" y="762115"/>
+                </a:lnTo>
+                <a:close/>
+                <a:lnTo>
+                  <a:pt x="1267032" y="758438"/>
+                </a:lnTo>
+                <a:close/>
+                <a:lnTo>
+                  <a:pt x="1270329" y="755045"/>
+                </a:lnTo>
+                <a:close/>
+                <a:lnTo>
+                  <a:pt x="1273626" y="751998"/>
+                </a:lnTo>
+                <a:close/>
+                <a:lnTo>
+                  <a:pt x="1276924" y="749282"/>
+                </a:lnTo>
+                <a:close/>
+                <a:lnTo>
+                  <a:pt x="1280221" y="746847"/>
+                </a:lnTo>
+                <a:close/>
+                <a:lnTo>
+                  <a:pt x="1283518" y="744640"/>
+                </a:lnTo>
+                <a:close/>
+                <a:lnTo>
+                  <a:pt x="1286816" y="742609"/>
+                </a:lnTo>
+                <a:close/>
+                <a:lnTo>
+                  <a:pt x="1290113" y="740703"/>
+                </a:lnTo>
+                <a:close/>
+                <a:lnTo>
+                  <a:pt x="1293410" y="738870"/>
+                </a:lnTo>
+                <a:close/>
+                <a:lnTo>
+                  <a:pt x="1296708" y="737058"/>
+                </a:lnTo>
+                <a:close/>
+                <a:lnTo>
+                  <a:pt x="1300005" y="735215"/>
+                </a:lnTo>
+                <a:close/>
+                <a:lnTo>
+                  <a:pt x="1303302" y="733311"/>
+                </a:lnTo>
+                <a:close/>
+                <a:lnTo>
+                  <a:pt x="1306600" y="731334"/>
+                </a:lnTo>
+                <a:close/>
+                <a:lnTo>
+                  <a:pt x="1309897" y="729275"/>
+                </a:lnTo>
+                <a:close/>
+                <a:lnTo>
+                  <a:pt x="1313194" y="727123"/>
+                </a:lnTo>
+                <a:close/>
+                <a:lnTo>
+                  <a:pt x="1316492" y="724869"/>
+                </a:lnTo>
+                <a:close/>
+                <a:lnTo>
+                  <a:pt x="1319789" y="722503"/>
+                </a:lnTo>
+                <a:close/>
+                <a:lnTo>
+                  <a:pt x="1323086" y="720015"/>
+                </a:lnTo>
+                <a:close/>
+                <a:lnTo>
+                  <a:pt x="1326384" y="717395"/>
+                </a:lnTo>
+                <a:close/>
+                <a:lnTo>
+                  <a:pt x="1329681" y="714647"/>
+                </a:lnTo>
+                <a:close/>
+                <a:lnTo>
+                  <a:pt x="1332978" y="711808"/>
+                </a:lnTo>
+                <a:close/>
+                <a:lnTo>
+                  <a:pt x="1336276" y="708924"/>
+                </a:lnTo>
+                <a:close/>
+                <a:lnTo>
+                  <a:pt x="1339573" y="706037"/>
+                </a:lnTo>
+                <a:close/>
+                <a:lnTo>
+                  <a:pt x="1342870" y="703191"/>
+                </a:lnTo>
+                <a:close/>
+                <a:lnTo>
+                  <a:pt x="1346168" y="700429"/>
+                </a:lnTo>
+                <a:close/>
+                <a:lnTo>
+                  <a:pt x="1349465" y="697796"/>
+                </a:lnTo>
+                <a:close/>
+                <a:lnTo>
+                  <a:pt x="1352762" y="695334"/>
+                </a:lnTo>
+                <a:close/>
+                <a:lnTo>
+                  <a:pt x="1356060" y="693078"/>
+                </a:lnTo>
+                <a:close/>
+                <a:lnTo>
+                  <a:pt x="1359357" y="690986"/>
+                </a:lnTo>
+                <a:close/>
+                <a:lnTo>
+                  <a:pt x="1362654" y="688989"/>
+                </a:lnTo>
+                <a:close/>
+                <a:lnTo>
+                  <a:pt x="1365952" y="687019"/>
+                </a:lnTo>
+                <a:close/>
+                <a:lnTo>
+                  <a:pt x="1369249" y="685006"/>
+                </a:lnTo>
+                <a:close/>
+                <a:lnTo>
+                  <a:pt x="1372546" y="682879"/>
+                </a:lnTo>
+                <a:close/>
+                <a:lnTo>
+                  <a:pt x="1375844" y="680571"/>
+                </a:lnTo>
+                <a:close/>
+                <a:lnTo>
+                  <a:pt x="1379141" y="678012"/>
+                </a:lnTo>
+                <a:close/>
+                <a:lnTo>
+                  <a:pt x="1382438" y="675134"/>
+                </a:lnTo>
+                <a:close/>
+                <a:lnTo>
+                  <a:pt x="1385736" y="671926"/>
+                </a:lnTo>
+                <a:close/>
+                <a:lnTo>
+                  <a:pt x="1389033" y="668429"/>
+                </a:lnTo>
+                <a:close/>
+                <a:lnTo>
+                  <a:pt x="1392330" y="664687"/>
+                </a:lnTo>
+                <a:close/>
+                <a:lnTo>
+                  <a:pt x="1395628" y="660743"/>
+                </a:lnTo>
+                <a:close/>
+                <a:lnTo>
+                  <a:pt x="1398925" y="656640"/>
+                </a:lnTo>
+                <a:close/>
+                <a:lnTo>
+                  <a:pt x="1402222" y="652421"/>
+                </a:lnTo>
+                <a:close/>
+                <a:lnTo>
+                  <a:pt x="1405520" y="648131"/>
+                </a:lnTo>
+                <a:close/>
+                <a:lnTo>
+                  <a:pt x="1408817" y="643812"/>
+                </a:lnTo>
+                <a:close/>
+                <a:lnTo>
+                  <a:pt x="1412114" y="639493"/>
+                </a:lnTo>
+                <a:close/>
+                <a:lnTo>
+                  <a:pt x="1415412" y="635170"/>
+                </a:lnTo>
+                <a:close/>
+                <a:lnTo>
+                  <a:pt x="1418709" y="630833"/>
+                </a:lnTo>
+                <a:close/>
+                <a:lnTo>
+                  <a:pt x="1422007" y="626475"/>
+                </a:lnTo>
+                <a:close/>
+                <a:lnTo>
+                  <a:pt x="1425304" y="622086"/>
+                </a:lnTo>
+                <a:close/>
+                <a:lnTo>
+                  <a:pt x="1428601" y="617658"/>
+                </a:lnTo>
+                <a:close/>
+                <a:lnTo>
+                  <a:pt x="1431899" y="613181"/>
+                </a:lnTo>
+                <a:close/>
+                <a:lnTo>
+                  <a:pt x="1435196" y="608647"/>
+                </a:lnTo>
+                <a:close/>
+                <a:lnTo>
+                  <a:pt x="1438493" y="604047"/>
+                </a:lnTo>
+                <a:close/>
+                <a:lnTo>
+                  <a:pt x="1441790" y="599373"/>
+                </a:lnTo>
+                <a:close/>
+                <a:lnTo>
+                  <a:pt x="1445088" y="594617"/>
+                </a:lnTo>
+                <a:close/>
+                <a:lnTo>
+                  <a:pt x="1448385" y="589770"/>
+                </a:lnTo>
+                <a:close/>
+                <a:lnTo>
+                  <a:pt x="1451682" y="584825"/>
+                </a:lnTo>
+                <a:close/>
+                <a:lnTo>
+                  <a:pt x="1454980" y="579774"/>
+                </a:lnTo>
+                <a:close/>
+                <a:lnTo>
+                  <a:pt x="1458277" y="574608"/>
+                </a:lnTo>
+                <a:close/>
+                <a:lnTo>
+                  <a:pt x="1461574" y="569320"/>
+                </a:lnTo>
+                <a:close/>
+                <a:lnTo>
+                  <a:pt x="1464872" y="563901"/>
+                </a:lnTo>
+                <a:close/>
+                <a:lnTo>
+                  <a:pt x="1468169" y="558344"/>
+                </a:lnTo>
+                <a:close/>
+                <a:lnTo>
+                  <a:pt x="1471467" y="552643"/>
+                </a:lnTo>
+                <a:close/>
+                <a:lnTo>
+                  <a:pt x="1474764" y="546791"/>
+                </a:lnTo>
+                <a:close/>
+                <a:lnTo>
+                  <a:pt x="1478061" y="540781"/>
+                </a:lnTo>
+                <a:close/>
+                <a:lnTo>
+                  <a:pt x="1481359" y="534607"/>
+                </a:lnTo>
+                <a:close/>
+                <a:lnTo>
+                  <a:pt x="1484656" y="528263"/>
+                </a:lnTo>
+                <a:close/>
+                <a:lnTo>
+                  <a:pt x="1487953" y="521741"/>
+                </a:lnTo>
+                <a:close/>
+                <a:lnTo>
+                  <a:pt x="1491250" y="515036"/>
+                </a:lnTo>
+                <a:close/>
+                <a:lnTo>
+                  <a:pt x="1494548" y="508153"/>
+                </a:lnTo>
+                <a:close/>
+                <a:lnTo>
+                  <a:pt x="1497845" y="501124"/>
+                </a:lnTo>
+                <a:close/>
+                <a:lnTo>
+                  <a:pt x="1501142" y="493983"/>
+                </a:lnTo>
+                <a:close/>
+                <a:lnTo>
+                  <a:pt x="1504439" y="486763"/>
+                </a:lnTo>
+                <a:close/>
+                <a:lnTo>
+                  <a:pt x="1507736" y="479501"/>
+                </a:lnTo>
+                <a:close/>
+                <a:lnTo>
+                  <a:pt x="1511034" y="472229"/>
+                </a:lnTo>
+                <a:close/>
+                <a:lnTo>
+                  <a:pt x="1514331" y="464982"/>
+                </a:lnTo>
+                <a:close/>
+                <a:lnTo>
+                  <a:pt x="1517629" y="457795"/>
+                </a:lnTo>
+                <a:close/>
+                <a:lnTo>
+                  <a:pt x="1520927" y="450693"/>
+                </a:lnTo>
+                <a:close/>
+                <a:lnTo>
+                  <a:pt x="1524225" y="443654"/>
+                </a:lnTo>
+                <a:close/>
+                <a:lnTo>
+                  <a:pt x="1527524" y="436645"/>
+                </a:lnTo>
+                <a:close/>
+                <a:lnTo>
+                  <a:pt x="1530822" y="429629"/>
+                </a:lnTo>
+                <a:close/>
+                <a:lnTo>
+                  <a:pt x="1534119" y="422571"/>
+                </a:lnTo>
+                <a:close/>
+                <a:lnTo>
+                  <a:pt x="1537417" y="415436"/>
+                </a:lnTo>
+                <a:close/>
+                <a:lnTo>
+                  <a:pt x="1540713" y="408188"/>
+                </a:lnTo>
+                <a:close/>
+                <a:lnTo>
+                  <a:pt x="1544009" y="400793"/>
+                </a:lnTo>
+                <a:close/>
+                <a:lnTo>
+                  <a:pt x="1547304" y="393215"/>
+                </a:lnTo>
+                <a:close/>
+                <a:lnTo>
+                  <a:pt x="1550598" y="385448"/>
+                </a:lnTo>
+                <a:close/>
+                <a:lnTo>
+                  <a:pt x="1553892" y="377503"/>
+                </a:lnTo>
+                <a:close/>
+                <a:lnTo>
+                  <a:pt x="1557186" y="369390"/>
+                </a:lnTo>
+                <a:close/>
+                <a:lnTo>
+                  <a:pt x="1560482" y="361122"/>
+                </a:lnTo>
+                <a:close/>
+                <a:lnTo>
+                  <a:pt x="1563779" y="352712"/>
+                </a:lnTo>
+                <a:close/>
+                <a:lnTo>
+                  <a:pt x="1567079" y="344169"/>
+                </a:lnTo>
+                <a:close/>
+                <a:lnTo>
+                  <a:pt x="1570381" y="335507"/>
+                </a:lnTo>
+                <a:close/>
+                <a:lnTo>
+                  <a:pt x="1573687" y="326738"/>
+                </a:lnTo>
+                <a:close/>
+                <a:lnTo>
+                  <a:pt x="1576995" y="317864"/>
+                </a:lnTo>
+                <a:close/>
+                <a:lnTo>
+                  <a:pt x="1580305" y="308876"/>
+                </a:lnTo>
+                <a:close/>
+                <a:lnTo>
+                  <a:pt x="1583614" y="299761"/>
+                </a:lnTo>
+                <a:close/>
+                <a:lnTo>
+                  <a:pt x="1586919" y="290509"/>
+                </a:lnTo>
+                <a:close/>
+                <a:lnTo>
+                  <a:pt x="1590219" y="281106"/>
+                </a:lnTo>
+                <a:close/>
+                <a:lnTo>
+                  <a:pt x="1593511" y="271541"/>
+                </a:lnTo>
+                <a:close/>
+                <a:lnTo>
+                  <a:pt x="1596794" y="261802"/>
+                </a:lnTo>
+                <a:close/>
+                <a:lnTo>
+                  <a:pt x="1600064" y="251878"/>
+                </a:lnTo>
+                <a:close/>
+                <a:lnTo>
+                  <a:pt x="1603322" y="241756"/>
+                </a:lnTo>
+                <a:close/>
+                <a:lnTo>
+                  <a:pt x="1606573" y="231424"/>
+                </a:lnTo>
+                <a:close/>
+                <a:lnTo>
+                  <a:pt x="1609826" y="220871"/>
+                </a:lnTo>
+                <a:close/>
+                <a:lnTo>
+                  <a:pt x="1613089" y="210085"/>
+                </a:lnTo>
+                <a:close/>
+                <a:lnTo>
+                  <a:pt x="1616369" y="199053"/>
+                </a:lnTo>
+                <a:close/>
+                <a:lnTo>
+                  <a:pt x="1619676" y="187764"/>
+                </a:lnTo>
+                <a:close/>
+                <a:lnTo>
+                  <a:pt x="1623016" y="176206"/>
+                </a:lnTo>
+                <a:close/>
+                <a:lnTo>
+                  <a:pt x="1626399" y="164367"/>
+                </a:lnTo>
+                <a:close/>
+                <a:lnTo>
+                  <a:pt x="1629830" y="152240"/>
+                </a:lnTo>
+                <a:close/>
+                <a:lnTo>
+                  <a:pt x="1633294" y="139885"/>
+                </a:lnTo>
+                <a:close/>
+                <a:lnTo>
+                  <a:pt x="1636762" y="127409"/>
+                </a:lnTo>
+                <a:close/>
+                <a:lnTo>
+                  <a:pt x="1640204" y="114918"/>
+                </a:lnTo>
+                <a:close/>
+                <a:lnTo>
+                  <a:pt x="1643588" y="102520"/>
+                </a:lnTo>
+                <a:close/>
+                <a:lnTo>
+                  <a:pt x="1646886" y="90322"/>
+                </a:lnTo>
+                <a:close/>
+                <a:lnTo>
+                  <a:pt x="1650067" y="78431"/>
+                </a:lnTo>
+                <a:close/>
+                <a:lnTo>
+                  <a:pt x="1653100" y="66955"/>
+                </a:lnTo>
+                <a:close/>
+                <a:lnTo>
+                  <a:pt x="1655955" y="56000"/>
+                </a:lnTo>
+                <a:close/>
+                <a:lnTo>
+                  <a:pt x="1658603" y="45674"/>
+                </a:lnTo>
+                <a:close/>
+                <a:lnTo>
+                  <a:pt x="1661012" y="36083"/>
+                </a:lnTo>
+                <a:close/>
+                <a:lnTo>
+                  <a:pt x="1663154" y="27336"/>
+                </a:lnTo>
+                <a:close/>
+                <a:lnTo>
+                  <a:pt x="1664997" y="19540"/>
+                </a:lnTo>
+                <a:close/>
+                <a:lnTo>
+                  <a:pt x="1666511" y="12801"/>
+                </a:lnTo>
+                <a:close/>
+                <a:lnTo>
+                  <a:pt x="1667666" y="7226"/>
+                </a:lnTo>
+                <a:close/>
+                <a:lnTo>
+                  <a:pt x="1668433" y="2923"/>
+                </a:lnTo>
+                <a:close/>
+                <a:lnTo>
+                  <a:pt x="1668780" y="0"/>
                 </a:lnTo>
                 <a:close/>
               </a:path>
@@ -5623,7 +5623,7 @@
         </p:nvCxnSpPr>
         <p:spPr>
           <a:xfrm flipV="1">
-            <a:off x="6400800.0" y="1200150.0"/>
+            <a:off x="5486400.0" y="1200150.0"/>
             <a:ext cx="0.0" cy="1371600.0"/>
           </a:xfrm>
           <a:prstGeom prst="line">
@@ -5660,7 +5660,7 @@
         <p:spPr>
           <a:xfrm>
             <a:off x="4572000.0" y="1200150.0"/>
-            <a:ext cx="1828800.0" cy="0.0"/>
+            <a:ext cx="914400.0" cy="0.0"/>
           </a:xfrm>
           <a:prstGeom prst="line">
             <a:avLst/>
@@ -5695,7 +5695,7 @@
         </p:nvSpPr>
         <p:spPr>
           <a:xfrm>
-            <a:off x="6311900" y="1111250"/>
+            <a:off x="5397500" y="1111250"/>
             <a:ext cx="177800" cy="177800"/>
           </a:xfrm>
           <a:prstGeom prst="ellipse">
@@ -5740,8 +5740,8 @@
         </p:nvCxnSpPr>
         <p:spPr>
           <a:xfrm>
-            <a:off x="5852160.0" y="2571750.0"/>
-            <a:ext cx="480060.0" cy="0.0"/>
+            <a:off x="5198364.0" y="2571750.0"/>
+            <a:ext cx="205740.0" cy="0.0"/>
           </a:xfrm>
           <a:prstGeom prst="line">
             <a:avLst/>
@@ -5775,8 +5775,8 @@
         </p:nvCxnSpPr>
         <p:spPr>
           <a:xfrm flipH="1">
-            <a:off x="6469380.0" y="2571750.0"/>
-            <a:ext cx="480060.0" cy="0.0"/>
+            <a:off x="5564124.0" y="2571750.0"/>
+            <a:ext cx="228600.0" cy="0.0"/>
           </a:xfrm>
           <a:prstGeom prst="line">
             <a:avLst/>
@@ -5802,85 +5802,15 @@
           </a:fontRef>
         </p:style>
       </p:cxnSp>
-      <p:cxnSp>
-        <p:nvCxnSpPr>
-          <p:cNvPr id="10" name="Connector 9"/>
-          <p:cNvCxnSpPr/>
-          <p:nvPr/>
-        </p:nvCxnSpPr>
-        <p:spPr>
-          <a:xfrm flipV="1">
-            <a:off x="6080760.0" y="1346454.0"/>
-            <a:ext cx="228600.0" cy="306324.0"/>
-          </a:xfrm>
-          <a:prstGeom prst="line">
-            <a:avLst/>
-          </a:prstGeom>
-          <a:ln w="15240">
-            <a:solidFill>
-              <a:srgbClr val="FFFFFF"/>
-            </a:solidFill>
-          </a:ln>
-        </p:spPr>
-        <p:style>
-          <a:lnRef idx="2">
-            <a:schemeClr val="accent1"/>
-          </a:lnRef>
-          <a:fillRef idx="0">
-            <a:schemeClr val="accent1"/>
-          </a:fillRef>
-          <a:effectRef idx="1">
-            <a:schemeClr val="accent1"/>
-          </a:effectRef>
-          <a:fontRef idx="minor">
-            <a:schemeClr val="tx1"/>
-          </a:fontRef>
-        </p:style>
-      </p:cxnSp>
-      <p:cxnSp>
-        <p:nvCxnSpPr>
-          <p:cNvPr id="11" name="Connector 10"/>
-          <p:cNvCxnSpPr/>
-          <p:nvPr/>
-        </p:nvCxnSpPr>
-        <p:spPr>
-          <a:xfrm flipH="1">
-            <a:off x="6446520.0" y="752094.0"/>
-            <a:ext cx="137160.0" cy="342900.0"/>
-          </a:xfrm>
-          <a:prstGeom prst="line">
-            <a:avLst/>
-          </a:prstGeom>
-          <a:ln w="15240">
-            <a:solidFill>
-              <a:srgbClr val="FFFFFF"/>
-            </a:solidFill>
-          </a:ln>
-        </p:spPr>
-        <p:style>
-          <a:lnRef idx="2">
-            <a:schemeClr val="accent1"/>
-          </a:lnRef>
-          <a:fillRef idx="0">
-            <a:schemeClr val="accent1"/>
-          </a:fillRef>
-          <a:effectRef idx="1">
-            <a:schemeClr val="accent1"/>
-          </a:effectRef>
-          <a:fontRef idx="minor">
-            <a:schemeClr val="tx1"/>
-          </a:fontRef>
-        </p:style>
-      </p:cxnSp>
-      <p:sp>
-        <p:nvSpPr>
-          <p:cNvPr id="12" name="TextBox 11"/>
+      <p:sp>
+        <p:nvSpPr>
+          <p:cNvPr id="10" name="TextBox 9"/>
           <p:cNvSpPr txBox="1"/>
           <p:nvPr/>
         </p:nvSpPr>
         <p:spPr>
           <a:xfrm>
-            <a:off x="5232400" y="196850"/>
+            <a:off x="4775200" y="334010"/>
             <a:ext cx="1524000" cy="508000"/>
           </a:xfrm>
           <a:prstGeom prst="rect">
@@ -5910,13 +5840,13 @@
       </p:sp>
       <p:sp>
         <p:nvSpPr>
-          <p:cNvPr id="13" name="TextBox 12"/>
+          <p:cNvPr id="11" name="TextBox 10"/>
           <p:cNvSpPr txBox="1"/>
           <p:nvPr/>
         </p:nvSpPr>
         <p:spPr>
           <a:xfrm>
-            <a:off x="6146800" y="2437130"/>
+            <a:off x="4135120" y="882650"/>
             <a:ext cx="1524000" cy="508000"/>
           </a:xfrm>
           <a:prstGeom prst="rect">
@@ -5939,20 +5869,20 @@
               </a:defRPr>
             </a:pPr>
             <a:r>
-              <a:t>a</a:t>
-            </a:r>
-          </a:p>
-        </p:txBody>
-      </p:sp>
-      <p:sp>
-        <p:nvSpPr>
-          <p:cNvPr id="14" name="TextBox 13"/>
+              <a:t>L</a:t>
+            </a:r>
+          </a:p>
+        </p:txBody>
+      </p:sp>
+      <p:sp>
+        <p:nvSpPr>
+          <p:cNvPr id="12" name="TextBox 11"/>
           <p:cNvSpPr txBox="1"/>
           <p:nvPr/>
         </p:nvSpPr>
         <p:spPr>
           <a:xfrm>
-            <a:off x="4089400" y="882650"/>
+            <a:off x="5232400" y="2437130"/>
             <a:ext cx="1524000" cy="508000"/>
           </a:xfrm>
           <a:prstGeom prst="rect">
@@ -5975,20 +5905,20 @@
               </a:defRPr>
             </a:pPr>
             <a:r>
-              <a:t>L</a:t>
-            </a:r>
-          </a:p>
-        </p:txBody>
-      </p:sp>
-      <p:sp>
-        <p:nvSpPr>
-          <p:cNvPr id="15" name="TextBox 14"/>
+              <a:t>a</a:t>
+            </a:r>
+          </a:p>
+        </p:txBody>
+      </p:sp>
+      <p:sp>
+        <p:nvSpPr>
+          <p:cNvPr id="13" name="TextBox 12"/>
           <p:cNvSpPr txBox="1"/>
           <p:nvPr/>
         </p:nvSpPr>
         <p:spPr>
           <a:xfrm>
-            <a:off x="4135120" y="2437130"/>
+            <a:off x="4180840" y="2437130"/>
             <a:ext cx="1524000" cy="508000"/>
           </a:xfrm>
           <a:prstGeom prst="rect">

--- a/output/1.pptx
+++ b/output/1.pptx
@@ -3104,8 +3104,8 @@
         </p:nvCxnSpPr>
         <p:spPr>
           <a:xfrm>
-            <a:off x="3429000.0" y="2571750.0"/>
-            <a:ext cx="2971800.0" cy="0.0"/>
+            <a:off x="2286000.0" y="2571750.0"/>
+            <a:ext cx="4572000.0" cy="0.0"/>
           </a:xfrm>
           <a:prstGeom prst="line">
             <a:avLst/>
@@ -3139,8 +3139,8 @@
         </p:nvCxnSpPr>
         <p:spPr>
           <a:xfrm flipV="1">
-            <a:off x="4572000.0" y="57150.0"/>
-            <a:ext cx="0.0" cy="4800600.0"/>
+            <a:off x="4572000.0" y="285750.0"/>
+            <a:ext cx="0.0" cy="4572000.0"/>
           </a:xfrm>
           <a:prstGeom prst="line">
             <a:avLst/>
@@ -3174,8 +3174,8 @@
         </p:nvSpPr>
         <p:spPr>
           <a:xfrm>
-            <a:off x="4105656" y="523494"/>
-            <a:ext cx="1668780" cy="4206240"/>
+            <a:off x="3749040" y="-1681627"/>
+            <a:ext cx="1965960" cy="5576285"/>
           </a:xfrm>
           <a:custGeom>
             <a:avLst/>
@@ -3184,2404 +3184,2404 @@
             <a:cxnLst/>
             <a:rect l="l" t="t" r="r" b="b"/>
             <a:pathLst>
-              <a:path w="1668780" h="4206240">
+              <a:path w="1965960" h="5576285">
                 <a:moveTo>
-                  <a:pt x="0" y="4206240"/>
+                  <a:pt x="0" y="5576285"/>
                 </a:moveTo>
                 <a:lnTo>
-                  <a:pt x="2198" y="4195882"/>
-                </a:lnTo>
-                <a:close/>
-                <a:lnTo>
-                  <a:pt x="4396" y="4184967"/>
-                </a:lnTo>
-                <a:close/>
-                <a:lnTo>
-                  <a:pt x="6595" y="4173533"/>
-                </a:lnTo>
-                <a:close/>
-                <a:lnTo>
-                  <a:pt x="8793" y="4161622"/>
-                </a:lnTo>
-                <a:close/>
-                <a:lnTo>
-                  <a:pt x="10991" y="4149273"/>
-                </a:lnTo>
-                <a:close/>
-                <a:lnTo>
-                  <a:pt x="13189" y="4136527"/>
-                </a:lnTo>
-                <a:close/>
-                <a:lnTo>
-                  <a:pt x="15388" y="4123424"/>
-                </a:lnTo>
-                <a:close/>
-                <a:lnTo>
-                  <a:pt x="17586" y="4110003"/>
-                </a:lnTo>
-                <a:close/>
-                <a:lnTo>
-                  <a:pt x="19784" y="4096306"/>
-                </a:lnTo>
-                <a:close/>
-                <a:lnTo>
-                  <a:pt x="21982" y="4082371"/>
-                </a:lnTo>
-                <a:close/>
-                <a:lnTo>
-                  <a:pt x="24180" y="4068240"/>
-                </a:lnTo>
-                <a:close/>
-                <a:lnTo>
-                  <a:pt x="26379" y="4053952"/>
-                </a:lnTo>
-                <a:close/>
-                <a:lnTo>
-                  <a:pt x="28577" y="4039547"/>
-                </a:lnTo>
-                <a:close/>
-                <a:lnTo>
-                  <a:pt x="30775" y="4025067"/>
-                </a:lnTo>
-                <a:close/>
-                <a:lnTo>
-                  <a:pt x="32973" y="4010549"/>
-                </a:lnTo>
-                <a:close/>
-                <a:lnTo>
-                  <a:pt x="35172" y="3996036"/>
-                </a:lnTo>
-                <a:close/>
-                <a:lnTo>
-                  <a:pt x="37370" y="3981566"/>
-                </a:lnTo>
-                <a:close/>
-                <a:lnTo>
-                  <a:pt x="39568" y="3967160"/>
-                </a:lnTo>
-                <a:close/>
-                <a:lnTo>
-                  <a:pt x="41766" y="3952810"/>
-                </a:lnTo>
-                <a:close/>
-                <a:lnTo>
-                  <a:pt x="43964" y="3938506"/>
-                </a:lnTo>
-                <a:close/>
-                <a:lnTo>
-                  <a:pt x="46163" y="3924237"/>
-                </a:lnTo>
-                <a:close/>
-                <a:lnTo>
-                  <a:pt x="48361" y="3909994"/>
-                </a:lnTo>
-                <a:close/>
-                <a:lnTo>
-                  <a:pt x="50559" y="3895767"/>
-                </a:lnTo>
-                <a:close/>
-                <a:lnTo>
-                  <a:pt x="52757" y="3881545"/>
-                </a:lnTo>
-                <a:close/>
-                <a:lnTo>
-                  <a:pt x="54956" y="3867319"/>
-                </a:lnTo>
-                <a:close/>
-                <a:lnTo>
-                  <a:pt x="57154" y="3853080"/>
-                </a:lnTo>
-                <a:close/>
-                <a:lnTo>
-                  <a:pt x="59352" y="3838827"/>
-                </a:lnTo>
-                <a:close/>
-                <a:lnTo>
-                  <a:pt x="61550" y="3824560"/>
-                </a:lnTo>
-                <a:close/>
-                <a:lnTo>
-                  <a:pt x="63748" y="3810279"/>
-                </a:lnTo>
-                <a:close/>
-                <a:lnTo>
-                  <a:pt x="65947" y="3795985"/>
-                </a:lnTo>
-                <a:close/>
-                <a:lnTo>
-                  <a:pt x="68145" y="3781678"/>
-                </a:lnTo>
-                <a:close/>
-                <a:lnTo>
-                  <a:pt x="70343" y="3767357"/>
-                </a:lnTo>
-                <a:close/>
-                <a:lnTo>
-                  <a:pt x="72541" y="3753024"/>
-                </a:lnTo>
-                <a:close/>
-                <a:lnTo>
-                  <a:pt x="74740" y="3738678"/>
-                </a:lnTo>
-                <a:close/>
-                <a:lnTo>
-                  <a:pt x="76938" y="3724326"/>
-                </a:lnTo>
-                <a:close/>
-                <a:lnTo>
-                  <a:pt x="79136" y="3709978"/>
-                </a:lnTo>
-                <a:close/>
-                <a:lnTo>
-                  <a:pt x="81334" y="3695642"/>
-                </a:lnTo>
-                <a:close/>
-                <a:lnTo>
-                  <a:pt x="83533" y="3681329"/>
-                </a:lnTo>
-                <a:close/>
-                <a:lnTo>
-                  <a:pt x="85731" y="3667047"/>
-                </a:lnTo>
-                <a:close/>
-                <a:lnTo>
-                  <a:pt x="87929" y="3652806"/>
-                </a:lnTo>
-                <a:close/>
-                <a:lnTo>
-                  <a:pt x="90127" y="3638615"/>
-                </a:lnTo>
-                <a:close/>
-                <a:lnTo>
-                  <a:pt x="92325" y="3624484"/>
-                </a:lnTo>
-                <a:close/>
-                <a:lnTo>
-                  <a:pt x="94524" y="3610400"/>
-                </a:lnTo>
-                <a:close/>
-                <a:lnTo>
-                  <a:pt x="96722" y="3596330"/>
-                </a:lnTo>
-                <a:close/>
-                <a:lnTo>
-                  <a:pt x="98920" y="3582233"/>
-                </a:lnTo>
-                <a:close/>
-                <a:lnTo>
-                  <a:pt x="101118" y="3568074"/>
-                </a:lnTo>
-                <a:close/>
-                <a:lnTo>
-                  <a:pt x="103317" y="3553815"/>
-                </a:lnTo>
-                <a:close/>
-                <a:lnTo>
-                  <a:pt x="105515" y="3539417"/>
-                </a:lnTo>
-                <a:close/>
-                <a:lnTo>
-                  <a:pt x="107713" y="3524842"/>
-                </a:lnTo>
-                <a:close/>
-                <a:lnTo>
-                  <a:pt x="109911" y="3510055"/>
-                </a:lnTo>
-                <a:close/>
-                <a:lnTo>
-                  <a:pt x="112109" y="3495043"/>
-                </a:lnTo>
-                <a:close/>
-                <a:lnTo>
-                  <a:pt x="114308" y="3479885"/>
-                </a:lnTo>
-                <a:close/>
-                <a:lnTo>
-                  <a:pt x="116506" y="3464674"/>
-                </a:lnTo>
-                <a:close/>
-                <a:lnTo>
-                  <a:pt x="118704" y="3449503"/>
-                </a:lnTo>
-                <a:close/>
-                <a:lnTo>
-                  <a:pt x="120902" y="3434467"/>
-                </a:lnTo>
-                <a:close/>
-                <a:lnTo>
-                  <a:pt x="123101" y="3419660"/>
-                </a:lnTo>
-                <a:close/>
-                <a:lnTo>
-                  <a:pt x="125299" y="3405174"/>
-                </a:lnTo>
-                <a:close/>
-                <a:lnTo>
-                  <a:pt x="127497" y="3391103"/>
-                </a:lnTo>
-                <a:close/>
-                <a:lnTo>
-                  <a:pt x="129695" y="3377528"/>
-                </a:lnTo>
-                <a:close/>
-                <a:lnTo>
-                  <a:pt x="131893" y="3364408"/>
-                </a:lnTo>
-                <a:close/>
-                <a:lnTo>
-                  <a:pt x="134092" y="3351645"/>
-                </a:lnTo>
-                <a:close/>
-                <a:lnTo>
-                  <a:pt x="136290" y="3339140"/>
-                </a:lnTo>
-                <a:close/>
-                <a:lnTo>
-                  <a:pt x="138488" y="3326793"/>
-                </a:lnTo>
-                <a:close/>
-                <a:lnTo>
-                  <a:pt x="140686" y="3314507"/>
-                </a:lnTo>
-                <a:close/>
-                <a:lnTo>
-                  <a:pt x="142885" y="3302181"/>
-                </a:lnTo>
-                <a:close/>
-                <a:lnTo>
-                  <a:pt x="145083" y="3289717"/>
-                </a:lnTo>
-                <a:close/>
-                <a:lnTo>
-                  <a:pt x="147281" y="3277018"/>
-                </a:lnTo>
-                <a:close/>
-                <a:lnTo>
-                  <a:pt x="149479" y="3264060"/>
-                </a:lnTo>
-                <a:close/>
-                <a:lnTo>
-                  <a:pt x="151677" y="3250902"/>
-                </a:lnTo>
-                <a:close/>
-                <a:lnTo>
-                  <a:pt x="153876" y="3237609"/>
-                </a:lnTo>
-                <a:close/>
-                <a:lnTo>
-                  <a:pt x="156074" y="3224245"/>
-                </a:lnTo>
-                <a:close/>
-                <a:lnTo>
-                  <a:pt x="158272" y="3210873"/>
-                </a:lnTo>
-                <a:close/>
-                <a:lnTo>
-                  <a:pt x="160470" y="3197558"/>
-                </a:lnTo>
-                <a:close/>
-                <a:lnTo>
-                  <a:pt x="162669" y="3184363"/>
-                </a:lnTo>
-                <a:close/>
-                <a:lnTo>
-                  <a:pt x="164867" y="3171354"/>
-                </a:lnTo>
-                <a:close/>
-                <a:lnTo>
-                  <a:pt x="167065" y="3158575"/>
-                </a:lnTo>
-                <a:close/>
-                <a:lnTo>
-                  <a:pt x="169263" y="3146021"/>
-                </a:lnTo>
-                <a:close/>
-                <a:lnTo>
-                  <a:pt x="171461" y="3133677"/>
-                </a:lnTo>
-                <a:close/>
-                <a:lnTo>
-                  <a:pt x="173660" y="3121529"/>
-                </a:lnTo>
-                <a:close/>
-                <a:lnTo>
-                  <a:pt x="175858" y="3109563"/>
-                </a:lnTo>
-                <a:close/>
-                <a:lnTo>
-                  <a:pt x="178056" y="3097763"/>
-                </a:lnTo>
-                <a:close/>
-                <a:lnTo>
-                  <a:pt x="180254" y="3086116"/>
-                </a:lnTo>
-                <a:close/>
-                <a:lnTo>
-                  <a:pt x="182453" y="3074607"/>
-                </a:lnTo>
-                <a:close/>
-                <a:lnTo>
-                  <a:pt x="184651" y="3063222"/>
-                </a:lnTo>
-                <a:close/>
-                <a:lnTo>
-                  <a:pt x="186849" y="3051953"/>
-                </a:lnTo>
-                <a:close/>
-                <a:lnTo>
-                  <a:pt x="189047" y="3040794"/>
-                </a:lnTo>
-                <a:close/>
-                <a:lnTo>
-                  <a:pt x="191245" y="3029737"/>
-                </a:lnTo>
-                <a:close/>
-                <a:lnTo>
-                  <a:pt x="193444" y="3018778"/>
-                </a:lnTo>
-                <a:close/>
-                <a:lnTo>
-                  <a:pt x="195642" y="3007909"/>
-                </a:lnTo>
-                <a:close/>
-                <a:lnTo>
-                  <a:pt x="197840" y="2997124"/>
-                </a:lnTo>
-                <a:close/>
-                <a:lnTo>
-                  <a:pt x="200038" y="2986418"/>
-                </a:lnTo>
-                <a:close/>
-                <a:lnTo>
-                  <a:pt x="202237" y="2975783"/>
-                </a:lnTo>
-                <a:close/>
-                <a:lnTo>
-                  <a:pt x="204435" y="2965212"/>
-                </a:lnTo>
-                <a:close/>
-                <a:lnTo>
-                  <a:pt x="206633" y="2954699"/>
-                </a:lnTo>
-                <a:close/>
-                <a:lnTo>
-                  <a:pt x="208831" y="2944233"/>
-                </a:lnTo>
-                <a:close/>
-                <a:lnTo>
-                  <a:pt x="211029" y="2933809"/>
-                </a:lnTo>
-                <a:close/>
-                <a:lnTo>
-                  <a:pt x="213228" y="2923416"/>
-                </a:lnTo>
-                <a:close/>
-                <a:lnTo>
-                  <a:pt x="215426" y="2913048"/>
-                </a:lnTo>
-                <a:close/>
-                <a:lnTo>
-                  <a:pt x="217624" y="2902696"/>
-                </a:lnTo>
-                <a:close/>
-                <a:lnTo>
-                  <a:pt x="219822" y="2892352"/>
-                </a:lnTo>
-                <a:close/>
-                <a:lnTo>
-                  <a:pt x="222021" y="2882021"/>
-                </a:lnTo>
-                <a:close/>
-                <a:lnTo>
-                  <a:pt x="224219" y="2871736"/>
-                </a:lnTo>
-                <a:close/>
-                <a:lnTo>
-                  <a:pt x="226417" y="2861536"/>
-                </a:lnTo>
-                <a:close/>
-                <a:lnTo>
-                  <a:pt x="228615" y="2851460"/>
-                </a:lnTo>
-                <a:close/>
-                <a:lnTo>
-                  <a:pt x="230813" y="2841545"/>
-                </a:lnTo>
-                <a:close/>
-                <a:lnTo>
-                  <a:pt x="233012" y="2831831"/>
-                </a:lnTo>
-                <a:close/>
-                <a:lnTo>
-                  <a:pt x="235210" y="2822356"/>
-                </a:lnTo>
-                <a:close/>
-                <a:lnTo>
-                  <a:pt x="237408" y="2813158"/>
-                </a:lnTo>
-                <a:close/>
-                <a:lnTo>
-                  <a:pt x="239606" y="2804268"/>
-                </a:lnTo>
-                <a:close/>
-                <a:lnTo>
-                  <a:pt x="241805" y="2795656"/>
-                </a:lnTo>
-                <a:close/>
-                <a:lnTo>
-                  <a:pt x="244003" y="2787272"/>
-                </a:lnTo>
-                <a:close/>
-                <a:lnTo>
-                  <a:pt x="246201" y="2779066"/>
-                </a:lnTo>
-                <a:close/>
-                <a:lnTo>
-                  <a:pt x="248399" y="2770987"/>
-                </a:lnTo>
-                <a:close/>
-                <a:lnTo>
-                  <a:pt x="250598" y="2762984"/>
-                </a:lnTo>
-                <a:close/>
-                <a:lnTo>
-                  <a:pt x="252796" y="2755006"/>
-                </a:lnTo>
-                <a:close/>
-                <a:lnTo>
-                  <a:pt x="254994" y="2747003"/>
-                </a:lnTo>
-                <a:close/>
-                <a:lnTo>
-                  <a:pt x="257192" y="2738925"/>
-                </a:lnTo>
-                <a:close/>
-                <a:lnTo>
-                  <a:pt x="259390" y="2730760"/>
-                </a:lnTo>
-                <a:close/>
-                <a:lnTo>
-                  <a:pt x="261589" y="2722528"/>
-                </a:lnTo>
-                <a:close/>
-                <a:lnTo>
-                  <a:pt x="263787" y="2714250"/>
-                </a:lnTo>
-                <a:close/>
-                <a:lnTo>
-                  <a:pt x="265985" y="2705947"/>
-                </a:lnTo>
-                <a:close/>
-                <a:lnTo>
-                  <a:pt x="268183" y="2697642"/>
-                </a:lnTo>
-                <a:close/>
-                <a:lnTo>
-                  <a:pt x="270382" y="2689354"/>
-                </a:lnTo>
-                <a:close/>
-                <a:lnTo>
-                  <a:pt x="272580" y="2681107"/>
-                </a:lnTo>
-                <a:close/>
-                <a:lnTo>
-                  <a:pt x="274778" y="2672921"/>
-                </a:lnTo>
-                <a:close/>
-                <a:lnTo>
-                  <a:pt x="276976" y="2664800"/>
-                </a:lnTo>
-                <a:close/>
-                <a:lnTo>
-                  <a:pt x="279174" y="2656716"/>
-                </a:lnTo>
-                <a:close/>
-                <a:lnTo>
-                  <a:pt x="281373" y="2648633"/>
-                </a:lnTo>
-                <a:close/>
-                <a:lnTo>
-                  <a:pt x="283571" y="2640515"/>
-                </a:lnTo>
-                <a:close/>
-                <a:lnTo>
-                  <a:pt x="285769" y="2632329"/>
-                </a:lnTo>
-                <a:close/>
-                <a:lnTo>
-                  <a:pt x="287967" y="2624039"/>
-                </a:lnTo>
-                <a:close/>
-                <a:lnTo>
-                  <a:pt x="290166" y="2615610"/>
-                </a:lnTo>
-                <a:close/>
-                <a:lnTo>
-                  <a:pt x="292364" y="2607008"/>
-                </a:lnTo>
-                <a:close/>
-                <a:lnTo>
-                  <a:pt x="294562" y="2598209"/>
-                </a:lnTo>
-                <a:close/>
-                <a:lnTo>
-                  <a:pt x="296760" y="2589261"/>
-                </a:lnTo>
-                <a:close/>
-                <a:lnTo>
-                  <a:pt x="298958" y="2580234"/>
-                </a:lnTo>
-                <a:close/>
-                <a:lnTo>
-                  <a:pt x="301157" y="2571198"/>
-                </a:lnTo>
-                <a:close/>
-                <a:lnTo>
-                  <a:pt x="303355" y="2562225"/>
-                </a:lnTo>
-                <a:close/>
-                <a:lnTo>
-                  <a:pt x="305553" y="2553385"/>
-                </a:lnTo>
-                <a:close/>
-                <a:lnTo>
-                  <a:pt x="307751" y="2544748"/>
-                </a:lnTo>
-                <a:close/>
-                <a:lnTo>
-                  <a:pt x="309950" y="2536386"/>
-                </a:lnTo>
-                <a:close/>
-                <a:lnTo>
-                  <a:pt x="312148" y="2528365"/>
-                </a:lnTo>
-                <a:close/>
-                <a:lnTo>
-                  <a:pt x="314346" y="2520686"/>
-                </a:lnTo>
-                <a:close/>
-                <a:lnTo>
-                  <a:pt x="316544" y="2513292"/>
-                </a:lnTo>
-                <a:close/>
-                <a:lnTo>
-                  <a:pt x="318742" y="2506126"/>
-                </a:lnTo>
-                <a:close/>
-                <a:lnTo>
-                  <a:pt x="320941" y="2499132"/>
-                </a:lnTo>
-                <a:close/>
-                <a:lnTo>
-                  <a:pt x="323139" y="2492252"/>
-                </a:lnTo>
-                <a:close/>
-                <a:lnTo>
-                  <a:pt x="325337" y="2485429"/>
-                </a:lnTo>
-                <a:close/>
-                <a:lnTo>
-                  <a:pt x="327535" y="2478605"/>
-                </a:lnTo>
-                <a:close/>
-                <a:lnTo>
-                  <a:pt x="329734" y="2471723"/>
-                </a:lnTo>
-                <a:close/>
-                <a:lnTo>
-                  <a:pt x="331932" y="2464750"/>
-                </a:lnTo>
-                <a:close/>
-                <a:lnTo>
-                  <a:pt x="334130" y="2457696"/>
-                </a:lnTo>
-                <a:close/>
-                <a:lnTo>
-                  <a:pt x="336328" y="2450575"/>
-                </a:lnTo>
-                <a:close/>
-                <a:lnTo>
-                  <a:pt x="338526" y="2443404"/>
-                </a:lnTo>
-                <a:close/>
-                <a:lnTo>
-                  <a:pt x="340725" y="2436197"/>
-                </a:lnTo>
-                <a:close/>
-                <a:lnTo>
-                  <a:pt x="342923" y="2428970"/>
-                </a:lnTo>
-                <a:close/>
-                <a:lnTo>
-                  <a:pt x="345121" y="2421738"/>
-                </a:lnTo>
-                <a:close/>
-                <a:lnTo>
-                  <a:pt x="347319" y="2414517"/>
-                </a:lnTo>
-                <a:close/>
-                <a:lnTo>
-                  <a:pt x="349518" y="2407319"/>
-                </a:lnTo>
-                <a:close/>
-                <a:lnTo>
-                  <a:pt x="351716" y="2400144"/>
-                </a:lnTo>
-                <a:close/>
-                <a:lnTo>
-                  <a:pt x="353914" y="2392988"/>
-                </a:lnTo>
-                <a:close/>
-                <a:lnTo>
-                  <a:pt x="356112" y="2385847"/>
-                </a:lnTo>
-                <a:close/>
-                <a:lnTo>
-                  <a:pt x="358310" y="2378717"/>
-                </a:lnTo>
-                <a:close/>
-                <a:lnTo>
-                  <a:pt x="360509" y="2371594"/>
-                </a:lnTo>
-                <a:close/>
-                <a:lnTo>
-                  <a:pt x="362707" y="2364473"/>
-                </a:lnTo>
-                <a:close/>
-                <a:lnTo>
-                  <a:pt x="364905" y="2357351"/>
-                </a:lnTo>
-                <a:close/>
-                <a:lnTo>
-                  <a:pt x="367103" y="2350224"/>
-                </a:lnTo>
-                <a:close/>
-                <a:lnTo>
-                  <a:pt x="369302" y="2343090"/>
-                </a:lnTo>
-                <a:close/>
-                <a:lnTo>
-                  <a:pt x="371500" y="2335950"/>
-                </a:lnTo>
-                <a:close/>
-                <a:lnTo>
-                  <a:pt x="373698" y="2328807"/>
-                </a:lnTo>
-                <a:close/>
-                <a:lnTo>
-                  <a:pt x="375896" y="2321659"/>
-                </a:lnTo>
-                <a:close/>
-                <a:lnTo>
-                  <a:pt x="378094" y="2314510"/>
-                </a:lnTo>
-                <a:close/>
-                <a:lnTo>
-                  <a:pt x="380293" y="2307359"/>
-                </a:lnTo>
-                <a:close/>
-                <a:lnTo>
-                  <a:pt x="382491" y="2300209"/>
-                </a:lnTo>
-                <a:close/>
-                <a:lnTo>
-                  <a:pt x="384689" y="2293059"/>
-                </a:lnTo>
-                <a:close/>
-                <a:lnTo>
-                  <a:pt x="386887" y="2285910"/>
-                </a:lnTo>
-                <a:close/>
-                <a:lnTo>
-                  <a:pt x="389086" y="2278763"/>
-                </a:lnTo>
-                <a:close/>
-                <a:lnTo>
-                  <a:pt x="391284" y="2271618"/>
-                </a:lnTo>
-                <a:close/>
-                <a:lnTo>
-                  <a:pt x="393482" y="2264473"/>
-                </a:lnTo>
-                <a:close/>
-                <a:lnTo>
-                  <a:pt x="395680" y="2257330"/>
-                </a:lnTo>
-                <a:close/>
-                <a:lnTo>
-                  <a:pt x="397878" y="2250188"/>
-                </a:lnTo>
-                <a:close/>
-                <a:lnTo>
-                  <a:pt x="400077" y="2243047"/>
-                </a:lnTo>
-                <a:close/>
-                <a:lnTo>
-                  <a:pt x="402275" y="2235906"/>
-                </a:lnTo>
-                <a:close/>
-                <a:lnTo>
-                  <a:pt x="404473" y="2228766"/>
-                </a:lnTo>
-                <a:close/>
-                <a:lnTo>
-                  <a:pt x="406671" y="2221627"/>
-                </a:lnTo>
-                <a:close/>
-                <a:lnTo>
-                  <a:pt x="408870" y="2214486"/>
-                </a:lnTo>
-                <a:close/>
-                <a:lnTo>
-                  <a:pt x="411068" y="2207345"/>
-                </a:lnTo>
-                <a:close/>
-                <a:lnTo>
-                  <a:pt x="413266" y="2200202"/>
-                </a:lnTo>
-                <a:close/>
-                <a:lnTo>
-                  <a:pt x="415464" y="2193057"/>
-                </a:lnTo>
-                <a:close/>
-                <a:lnTo>
-                  <a:pt x="417663" y="2185908"/>
-                </a:lnTo>
-                <a:close/>
-                <a:lnTo>
-                  <a:pt x="419861" y="2178756"/>
-                </a:lnTo>
-                <a:close/>
-                <a:lnTo>
-                  <a:pt x="422059" y="2171600"/>
-                </a:lnTo>
-                <a:close/>
-                <a:lnTo>
-                  <a:pt x="424257" y="2164442"/>
-                </a:lnTo>
-                <a:close/>
-                <a:lnTo>
-                  <a:pt x="426455" y="2157283"/>
-                </a:lnTo>
-                <a:close/>
-                <a:lnTo>
-                  <a:pt x="428654" y="2150126"/>
-                </a:lnTo>
-                <a:close/>
-                <a:lnTo>
-                  <a:pt x="430852" y="2142975"/>
-                </a:lnTo>
-                <a:close/>
-                <a:lnTo>
-                  <a:pt x="433050" y="2135831"/>
-                </a:lnTo>
-                <a:close/>
-                <a:lnTo>
-                  <a:pt x="435248" y="2128697"/>
-                </a:lnTo>
-                <a:close/>
-                <a:lnTo>
-                  <a:pt x="437447" y="2121575"/>
-                </a:lnTo>
-                <a:close/>
-                <a:lnTo>
-                  <a:pt x="439645" y="2114469"/>
-                </a:lnTo>
-                <a:close/>
-                <a:lnTo>
-                  <a:pt x="441843" y="2107376"/>
-                </a:lnTo>
-                <a:close/>
-                <a:lnTo>
-                  <a:pt x="444041" y="2100286"/>
-                </a:lnTo>
-                <a:close/>
-                <a:lnTo>
-                  <a:pt x="446239" y="2093191"/>
-                </a:lnTo>
-                <a:close/>
-                <a:lnTo>
-                  <a:pt x="448438" y="2086081"/>
-                </a:lnTo>
-                <a:close/>
-                <a:lnTo>
-                  <a:pt x="450636" y="2078947"/>
-                </a:lnTo>
-                <a:close/>
-                <a:lnTo>
-                  <a:pt x="452834" y="2071778"/>
-                </a:lnTo>
-                <a:close/>
-                <a:lnTo>
-                  <a:pt x="455032" y="2064565"/>
-                </a:lnTo>
-                <a:close/>
-                <a:lnTo>
-                  <a:pt x="457231" y="2057299"/>
-                </a:lnTo>
-                <a:close/>
-                <a:lnTo>
-                  <a:pt x="459429" y="2049977"/>
-                </a:lnTo>
-                <a:close/>
-                <a:lnTo>
-                  <a:pt x="461627" y="2042629"/>
-                </a:lnTo>
-                <a:close/>
-                <a:lnTo>
-                  <a:pt x="463825" y="2035291"/>
-                </a:lnTo>
-                <a:close/>
-                <a:lnTo>
-                  <a:pt x="466023" y="2027997"/>
-                </a:lnTo>
-                <a:close/>
-                <a:lnTo>
-                  <a:pt x="468221" y="2020783"/>
-                </a:lnTo>
-                <a:close/>
-                <a:lnTo>
-                  <a:pt x="470420" y="2013687"/>
-                </a:lnTo>
-                <a:close/>
-                <a:lnTo>
-                  <a:pt x="472618" y="2006742"/>
-                </a:lnTo>
-                <a:close/>
-                <a:lnTo>
-                  <a:pt x="474816" y="1999986"/>
-                </a:lnTo>
-                <a:close/>
-                <a:lnTo>
-                  <a:pt x="477015" y="1993449"/>
-                </a:lnTo>
-                <a:close/>
-                <a:lnTo>
-                  <a:pt x="479213" y="1987119"/>
-                </a:lnTo>
-                <a:close/>
-                <a:lnTo>
-                  <a:pt x="481412" y="1980960"/>
-                </a:lnTo>
-                <a:close/>
-                <a:lnTo>
-                  <a:pt x="483610" y="1974933"/>
-                </a:lnTo>
-                <a:close/>
-                <a:lnTo>
-                  <a:pt x="485808" y="1968999"/>
-                </a:lnTo>
-                <a:close/>
-                <a:lnTo>
-                  <a:pt x="488007" y="1963120"/>
-                </a:lnTo>
-                <a:close/>
-                <a:lnTo>
-                  <a:pt x="490205" y="1957259"/>
-                </a:lnTo>
-                <a:close/>
-                <a:lnTo>
-                  <a:pt x="492403" y="1951376"/>
-                </a:lnTo>
-                <a:close/>
-                <a:lnTo>
-                  <a:pt x="494600" y="1945435"/>
-                </a:lnTo>
-                <a:close/>
-                <a:lnTo>
-                  <a:pt x="496797" y="1939421"/>
-                </a:lnTo>
-                <a:close/>
-                <a:lnTo>
-                  <a:pt x="498994" y="1933354"/>
-                </a:lnTo>
-                <a:close/>
-                <a:lnTo>
-                  <a:pt x="501192" y="1927256"/>
-                </a:lnTo>
-                <a:close/>
-                <a:lnTo>
-                  <a:pt x="503389" y="1921148"/>
-                </a:lnTo>
-                <a:close/>
-                <a:lnTo>
-                  <a:pt x="505587" y="1915052"/>
-                </a:lnTo>
-                <a:close/>
-                <a:lnTo>
-                  <a:pt x="507786" y="1908989"/>
-                </a:lnTo>
-                <a:close/>
-                <a:lnTo>
-                  <a:pt x="509986" y="1902983"/>
-                </a:lnTo>
-                <a:close/>
-                <a:lnTo>
-                  <a:pt x="512186" y="1897053"/>
-                </a:lnTo>
-                <a:close/>
-                <a:lnTo>
-                  <a:pt x="514388" y="1891218"/>
-                </a:lnTo>
-                <a:close/>
-                <a:lnTo>
-                  <a:pt x="516590" y="1885480"/>
-                </a:lnTo>
-                <a:close/>
-                <a:lnTo>
-                  <a:pt x="518792" y="1879837"/>
-                </a:lnTo>
-                <a:close/>
-                <a:lnTo>
-                  <a:pt x="520993" y="1874288"/>
-                </a:lnTo>
-                <a:close/>
-                <a:lnTo>
-                  <a:pt x="523192" y="1868832"/>
-                </a:lnTo>
-                <a:close/>
-                <a:lnTo>
-                  <a:pt x="525389" y="1863469"/>
-                </a:lnTo>
-                <a:close/>
-                <a:lnTo>
-                  <a:pt x="527584" y="1858196"/>
-                </a:lnTo>
-                <a:close/>
-                <a:lnTo>
-                  <a:pt x="529775" y="1853013"/>
-                </a:lnTo>
-                <a:close/>
-                <a:lnTo>
-                  <a:pt x="531961" y="1847917"/>
-                </a:lnTo>
-                <a:close/>
-                <a:lnTo>
-                  <a:pt x="534146" y="1842897"/>
-                </a:lnTo>
-                <a:close/>
-                <a:lnTo>
-                  <a:pt x="536330" y="1837936"/>
-                </a:lnTo>
-                <a:close/>
-                <a:lnTo>
-                  <a:pt x="538516" y="1833016"/>
-                </a:lnTo>
-                <a:close/>
-                <a:lnTo>
-                  <a:pt x="540708" y="1828120"/>
-                </a:lnTo>
-                <a:close/>
-                <a:lnTo>
-                  <a:pt x="542907" y="1823231"/>
-                </a:lnTo>
-                <a:close/>
-                <a:lnTo>
-                  <a:pt x="545116" y="1818331"/>
-                </a:lnTo>
-                <a:close/>
-                <a:lnTo>
-                  <a:pt x="547337" y="1813405"/>
-                </a:lnTo>
-                <a:close/>
-                <a:lnTo>
-                  <a:pt x="549574" y="1808435"/>
-                </a:lnTo>
-                <a:close/>
-                <a:lnTo>
-                  <a:pt x="551822" y="1803421"/>
-                </a:lnTo>
-                <a:close/>
-                <a:lnTo>
-                  <a:pt x="554074" y="1798383"/>
-                </a:lnTo>
-                <a:close/>
-                <a:lnTo>
-                  <a:pt x="556319" y="1793345"/>
-                </a:lnTo>
-                <a:close/>
-                <a:lnTo>
-                  <a:pt x="558549" y="1788328"/>
-                </a:lnTo>
-                <a:close/>
-                <a:lnTo>
-                  <a:pt x="560754" y="1783354"/>
-                </a:lnTo>
-                <a:close/>
-                <a:lnTo>
-                  <a:pt x="562925" y="1778445"/>
-                </a:lnTo>
-                <a:close/>
-                <a:lnTo>
-                  <a:pt x="565053" y="1773623"/>
-                </a:lnTo>
-                <a:close/>
-                <a:lnTo>
-                  <a:pt x="567127" y="1768911"/>
-                </a:lnTo>
-                <a:close/>
-                <a:lnTo>
-                  <a:pt x="569149" y="1764310"/>
-                </a:lnTo>
-                <a:close/>
-                <a:lnTo>
-                  <a:pt x="571148" y="1759760"/>
-                </a:lnTo>
-                <a:close/>
-                <a:lnTo>
-                  <a:pt x="573159" y="1755190"/>
-                </a:lnTo>
-                <a:close/>
-                <a:lnTo>
-                  <a:pt x="575216" y="1750529"/>
-                </a:lnTo>
-                <a:close/>
-                <a:lnTo>
-                  <a:pt x="577356" y="1745705"/>
-                </a:lnTo>
-                <a:close/>
-                <a:lnTo>
-                  <a:pt x="579611" y="1740648"/>
-                </a:lnTo>
-                <a:close/>
-                <a:lnTo>
-                  <a:pt x="582018" y="1735287"/>
-                </a:lnTo>
-                <a:close/>
-                <a:lnTo>
-                  <a:pt x="584611" y="1729549"/>
-                </a:lnTo>
-                <a:close/>
-                <a:lnTo>
-                  <a:pt x="587420" y="1723376"/>
-                </a:lnTo>
-                <a:close/>
-                <a:lnTo>
-                  <a:pt x="590430" y="1716796"/>
-                </a:lnTo>
-                <a:close/>
-                <a:lnTo>
-                  <a:pt x="593607" y="1709881"/>
-                </a:lnTo>
-                <a:close/>
-                <a:lnTo>
-                  <a:pt x="596916" y="1702704"/>
-                </a:lnTo>
-                <a:close/>
-                <a:lnTo>
-                  <a:pt x="600322" y="1695336"/>
-                </a:lnTo>
-                <a:close/>
-                <a:lnTo>
-                  <a:pt x="603790" y="1687850"/>
-                </a:lnTo>
-                <a:close/>
-                <a:lnTo>
-                  <a:pt x="607286" y="1680317"/>
-                </a:lnTo>
-                <a:close/>
-                <a:lnTo>
-                  <a:pt x="610774" y="1672810"/>
-                </a:lnTo>
-                <a:close/>
-                <a:lnTo>
-                  <a:pt x="614220" y="1665399"/>
-                </a:lnTo>
-                <a:close/>
-                <a:lnTo>
-                  <a:pt x="617611" y="1658110"/>
-                </a:lnTo>
-                <a:close/>
-                <a:lnTo>
-                  <a:pt x="620954" y="1650919"/>
-                </a:lnTo>
-                <a:close/>
-                <a:lnTo>
-                  <a:pt x="624258" y="1643800"/>
-                </a:lnTo>
-                <a:close/>
-                <a:lnTo>
-                  <a:pt x="627534" y="1636725"/>
-                </a:lnTo>
-                <a:close/>
-                <a:lnTo>
-                  <a:pt x="630790" y="1629669"/>
-                </a:lnTo>
-                <a:close/>
-                <a:lnTo>
-                  <a:pt x="634035" y="1622605"/>
-                </a:lnTo>
-                <a:close/>
-                <a:lnTo>
-                  <a:pt x="637280" y="1615505"/>
-                </a:lnTo>
-                <a:close/>
-                <a:lnTo>
-                  <a:pt x="640533" y="1608345"/>
-                </a:lnTo>
-                <a:close/>
-                <a:lnTo>
-                  <a:pt x="643800" y="1601111"/>
-                </a:lnTo>
-                <a:close/>
-                <a:lnTo>
-                  <a:pt x="647082" y="1593833"/>
-                </a:lnTo>
-                <a:close/>
-                <a:lnTo>
-                  <a:pt x="650374" y="1586543"/>
-                </a:lnTo>
-                <a:close/>
-                <a:lnTo>
-                  <a:pt x="653675" y="1579276"/>
-                </a:lnTo>
-                <a:close/>
-                <a:lnTo>
-                  <a:pt x="656982" y="1572066"/>
-                </a:lnTo>
-                <a:close/>
-                <a:lnTo>
-                  <a:pt x="660293" y="1564948"/>
-                </a:lnTo>
-                <a:close/>
-                <a:lnTo>
-                  <a:pt x="663604" y="1557955"/>
-                </a:lnTo>
-                <a:close/>
-                <a:lnTo>
-                  <a:pt x="666915" y="1551122"/>
-                </a:lnTo>
-                <a:close/>
-                <a:lnTo>
-                  <a:pt x="670221" y="1544478"/>
-                </a:lnTo>
-                <a:close/>
-                <a:lnTo>
-                  <a:pt x="673524" y="1538022"/>
-                </a:lnTo>
-                <a:close/>
-                <a:lnTo>
-                  <a:pt x="676823" y="1531740"/>
-                </a:lnTo>
-                <a:close/>
-                <a:lnTo>
-                  <a:pt x="680120" y="1525615"/>
-                </a:lnTo>
-                <a:close/>
-                <a:lnTo>
-                  <a:pt x="683416" y="1519634"/>
-                </a:lnTo>
-                <a:close/>
-                <a:lnTo>
-                  <a:pt x="686710" y="1513782"/>
-                </a:lnTo>
-                <a:close/>
-                <a:lnTo>
-                  <a:pt x="690003" y="1508043"/>
-                </a:lnTo>
-                <a:close/>
-                <a:lnTo>
-                  <a:pt x="693297" y="1502403"/>
-                </a:lnTo>
-                <a:close/>
-                <a:lnTo>
-                  <a:pt x="696591" y="1496848"/>
-                </a:lnTo>
-                <a:close/>
-                <a:lnTo>
-                  <a:pt x="699887" y="1491357"/>
-                </a:lnTo>
-                <a:close/>
-                <a:lnTo>
-                  <a:pt x="703183" y="1485910"/>
-                </a:lnTo>
-                <a:close/>
-                <a:lnTo>
-                  <a:pt x="706481" y="1480483"/>
-                </a:lnTo>
-                <a:close/>
-                <a:lnTo>
-                  <a:pt x="709778" y="1475054"/>
-                </a:lnTo>
-                <a:close/>
-                <a:lnTo>
-                  <a:pt x="713077" y="1469601"/>
-                </a:lnTo>
-                <a:close/>
-                <a:lnTo>
-                  <a:pt x="716375" y="1464100"/>
-                </a:lnTo>
-                <a:close/>
-                <a:lnTo>
-                  <a:pt x="719673" y="1458529"/>
-                </a:lnTo>
-                <a:close/>
-                <a:lnTo>
-                  <a:pt x="722971" y="1452866"/>
-                </a:lnTo>
-                <a:close/>
-                <a:lnTo>
-                  <a:pt x="726269" y="1447096"/>
-                </a:lnTo>
-                <a:close/>
-                <a:lnTo>
-                  <a:pt x="729567" y="1441228"/>
-                </a:lnTo>
-                <a:close/>
-                <a:lnTo>
-                  <a:pt x="732864" y="1435270"/>
-                </a:lnTo>
-                <a:close/>
-                <a:lnTo>
-                  <a:pt x="736162" y="1429232"/>
-                </a:lnTo>
-                <a:close/>
-                <a:lnTo>
-                  <a:pt x="739459" y="1423124"/>
-                </a:lnTo>
-                <a:close/>
-                <a:lnTo>
-                  <a:pt x="742756" y="1416955"/>
-                </a:lnTo>
-                <a:close/>
-                <a:lnTo>
-                  <a:pt x="746053" y="1410736"/>
-                </a:lnTo>
-                <a:close/>
-                <a:lnTo>
-                  <a:pt x="749350" y="1404476"/>
-                </a:lnTo>
-                <a:close/>
-                <a:lnTo>
-                  <a:pt x="752647" y="1398187"/>
-                </a:lnTo>
-                <a:close/>
-                <a:lnTo>
-                  <a:pt x="755944" y="1391896"/>
-                </a:lnTo>
-                <a:close/>
-                <a:lnTo>
-                  <a:pt x="759242" y="1385632"/>
-                </a:lnTo>
-                <a:close/>
-                <a:lnTo>
-                  <a:pt x="762539" y="1379429"/>
-                </a:lnTo>
-                <a:close/>
-                <a:lnTo>
-                  <a:pt x="765836" y="1373315"/>
-                </a:lnTo>
-                <a:close/>
-                <a:lnTo>
-                  <a:pt x="769134" y="1367324"/>
-                </a:lnTo>
-                <a:close/>
-                <a:lnTo>
-                  <a:pt x="772431" y="1361487"/>
-                </a:lnTo>
-                <a:close/>
-                <a:lnTo>
-                  <a:pt x="775729" y="1355833"/>
-                </a:lnTo>
-                <a:close/>
-                <a:lnTo>
-                  <a:pt x="779026" y="1350393"/>
-                </a:lnTo>
-                <a:close/>
-                <a:lnTo>
-                  <a:pt x="782323" y="1345161"/>
-                </a:lnTo>
-                <a:close/>
-                <a:lnTo>
-                  <a:pt x="785621" y="1340098"/>
-                </a:lnTo>
-                <a:close/>
-                <a:lnTo>
-                  <a:pt x="788918" y="1335165"/>
-                </a:lnTo>
-                <a:close/>
-                <a:lnTo>
-                  <a:pt x="792215" y="1330323"/>
-                </a:lnTo>
-                <a:close/>
-                <a:lnTo>
-                  <a:pt x="795513" y="1325532"/>
-                </a:lnTo>
-                <a:close/>
-                <a:lnTo>
-                  <a:pt x="798810" y="1320753"/>
-                </a:lnTo>
-                <a:close/>
-                <a:lnTo>
-                  <a:pt x="802107" y="1315946"/>
-                </a:lnTo>
-                <a:close/>
-                <a:lnTo>
-                  <a:pt x="805405" y="1311073"/>
-                </a:lnTo>
-                <a:close/>
-                <a:lnTo>
-                  <a:pt x="808702" y="1306116"/>
-                </a:lnTo>
-                <a:close/>
-                <a:lnTo>
-                  <a:pt x="811999" y="1301098"/>
-                </a:lnTo>
-                <a:close/>
-                <a:lnTo>
-                  <a:pt x="815297" y="1296052"/>
-                </a:lnTo>
-                <a:close/>
-                <a:lnTo>
-                  <a:pt x="818594" y="1291008"/>
-                </a:lnTo>
-                <a:close/>
-                <a:lnTo>
-                  <a:pt x="821891" y="1285997"/>
-                </a:lnTo>
-                <a:close/>
-                <a:lnTo>
-                  <a:pt x="825189" y="1281049"/>
-                </a:lnTo>
-                <a:close/>
-                <a:lnTo>
-                  <a:pt x="828486" y="1276196"/>
-                </a:lnTo>
-                <a:close/>
-                <a:lnTo>
-                  <a:pt x="831783" y="1271468"/>
-                </a:lnTo>
-                <a:close/>
-                <a:lnTo>
-                  <a:pt x="835081" y="1266888"/>
-                </a:lnTo>
-                <a:close/>
-                <a:lnTo>
-                  <a:pt x="838378" y="1262434"/>
-                </a:lnTo>
-                <a:close/>
-                <a:lnTo>
-                  <a:pt x="841675" y="1258070"/>
-                </a:lnTo>
-                <a:close/>
-                <a:lnTo>
-                  <a:pt x="844973" y="1253760"/>
-                </a:lnTo>
-                <a:close/>
-                <a:lnTo>
-                  <a:pt x="848270" y="1249467"/>
-                </a:lnTo>
-                <a:close/>
-                <a:lnTo>
-                  <a:pt x="851567" y="1245156"/>
-                </a:lnTo>
-                <a:close/>
-                <a:lnTo>
-                  <a:pt x="854865" y="1240790"/>
-                </a:lnTo>
-                <a:close/>
-                <a:lnTo>
-                  <a:pt x="858162" y="1236333"/>
-                </a:lnTo>
-                <a:close/>
-                <a:lnTo>
-                  <a:pt x="861459" y="1231750"/>
-                </a:lnTo>
-                <a:close/>
-                <a:lnTo>
-                  <a:pt x="864757" y="1227036"/>
-                </a:lnTo>
-                <a:close/>
-                <a:lnTo>
-                  <a:pt x="868054" y="1222210"/>
-                </a:lnTo>
-                <a:close/>
-                <a:lnTo>
-                  <a:pt x="871351" y="1217290"/>
-                </a:lnTo>
-                <a:close/>
-                <a:lnTo>
-                  <a:pt x="874649" y="1212296"/>
-                </a:lnTo>
-                <a:close/>
-                <a:lnTo>
-                  <a:pt x="877946" y="1207245"/>
-                </a:lnTo>
-                <a:close/>
-                <a:lnTo>
-                  <a:pt x="881243" y="1202157"/>
-                </a:lnTo>
-                <a:close/>
-                <a:lnTo>
-                  <a:pt x="884541" y="1197051"/>
-                </a:lnTo>
-                <a:close/>
-                <a:lnTo>
-                  <a:pt x="887838" y="1191946"/>
-                </a:lnTo>
-                <a:close/>
-                <a:lnTo>
-                  <a:pt x="891135" y="1186857"/>
-                </a:lnTo>
-                <a:close/>
-                <a:lnTo>
-                  <a:pt x="894433" y="1181792"/>
-                </a:lnTo>
-                <a:close/>
-                <a:lnTo>
-                  <a:pt x="897730" y="1176762"/>
-                </a:lnTo>
-                <a:close/>
-                <a:lnTo>
-                  <a:pt x="901027" y="1171773"/>
-                </a:lnTo>
-                <a:close/>
-                <a:lnTo>
-                  <a:pt x="904325" y="1166835"/>
-                </a:lnTo>
-                <a:close/>
-                <a:lnTo>
-                  <a:pt x="907622" y="1161955"/>
-                </a:lnTo>
-                <a:close/>
-                <a:lnTo>
-                  <a:pt x="910919" y="1157142"/>
-                </a:lnTo>
-                <a:close/>
-                <a:lnTo>
-                  <a:pt x="914217" y="1152405"/>
-                </a:lnTo>
-                <a:close/>
-                <a:lnTo>
-                  <a:pt x="917514" y="1147749"/>
-                </a:lnTo>
-                <a:close/>
-                <a:lnTo>
-                  <a:pt x="920811" y="1143174"/>
-                </a:lnTo>
-                <a:close/>
-                <a:lnTo>
-                  <a:pt x="924109" y="1138673"/>
-                </a:lnTo>
-                <a:close/>
-                <a:lnTo>
-                  <a:pt x="927406" y="1134243"/>
-                </a:lnTo>
-                <a:close/>
-                <a:lnTo>
-                  <a:pt x="930703" y="1129878"/>
-                </a:lnTo>
-                <a:close/>
-                <a:lnTo>
-                  <a:pt x="934001" y="1125574"/>
-                </a:lnTo>
-                <a:close/>
-                <a:lnTo>
-                  <a:pt x="937298" y="1121326"/>
-                </a:lnTo>
-                <a:close/>
-                <a:lnTo>
-                  <a:pt x="940595" y="1117129"/>
-                </a:lnTo>
-                <a:close/>
-                <a:lnTo>
-                  <a:pt x="943893" y="1112980"/>
-                </a:lnTo>
-                <a:close/>
-                <a:lnTo>
-                  <a:pt x="947190" y="1108882"/>
-                </a:lnTo>
-                <a:close/>
-                <a:lnTo>
-                  <a:pt x="950488" y="1104846"/>
-                </a:lnTo>
-                <a:close/>
-                <a:lnTo>
-                  <a:pt x="953785" y="1100883"/>
-                </a:lnTo>
-                <a:close/>
-                <a:lnTo>
-                  <a:pt x="957082" y="1097003"/>
-                </a:lnTo>
-                <a:close/>
-                <a:lnTo>
-                  <a:pt x="960380" y="1093216"/>
-                </a:lnTo>
-                <a:close/>
-                <a:lnTo>
-                  <a:pt x="963677" y="1089535"/>
-                </a:lnTo>
-                <a:close/>
-                <a:lnTo>
-                  <a:pt x="966974" y="1085968"/>
-                </a:lnTo>
-                <a:close/>
-                <a:lnTo>
-                  <a:pt x="970272" y="1082526"/>
-                </a:lnTo>
-                <a:close/>
-                <a:lnTo>
-                  <a:pt x="973569" y="1079204"/>
-                </a:lnTo>
-                <a:close/>
-                <a:lnTo>
-                  <a:pt x="976866" y="1075965"/>
-                </a:lnTo>
-                <a:close/>
-                <a:lnTo>
-                  <a:pt x="980164" y="1072772"/>
-                </a:lnTo>
-                <a:close/>
-                <a:lnTo>
-                  <a:pt x="983461" y="1069588"/>
-                </a:lnTo>
-                <a:close/>
-                <a:lnTo>
-                  <a:pt x="986758" y="1066375"/>
-                </a:lnTo>
-                <a:close/>
-                <a:lnTo>
-                  <a:pt x="990056" y="1063094"/>
-                </a:lnTo>
-                <a:close/>
-                <a:lnTo>
-                  <a:pt x="993353" y="1059709"/>
-                </a:lnTo>
-                <a:close/>
-                <a:lnTo>
-                  <a:pt x="996650" y="1056182"/>
-                </a:lnTo>
-                <a:close/>
-                <a:lnTo>
-                  <a:pt x="999948" y="1052488"/>
-                </a:lnTo>
-                <a:close/>
-                <a:lnTo>
-                  <a:pt x="1003245" y="1048658"/>
-                </a:lnTo>
-                <a:close/>
-                <a:lnTo>
-                  <a:pt x="1006542" y="1044737"/>
-                </a:lnTo>
-                <a:close/>
-                <a:lnTo>
-                  <a:pt x="1009840" y="1040768"/>
-                </a:lnTo>
-                <a:close/>
-                <a:lnTo>
-                  <a:pt x="1013137" y="1036798"/>
-                </a:lnTo>
-                <a:close/>
-                <a:lnTo>
-                  <a:pt x="1016434" y="1032872"/>
-                </a:lnTo>
-                <a:close/>
-                <a:lnTo>
-                  <a:pt x="1019732" y="1029033"/>
-                </a:lnTo>
-                <a:close/>
-                <a:lnTo>
-                  <a:pt x="1023029" y="1025326"/>
-                </a:lnTo>
-                <a:close/>
-                <a:lnTo>
-                  <a:pt x="1026326" y="1021793"/>
-                </a:lnTo>
-                <a:close/>
-                <a:lnTo>
-                  <a:pt x="1029624" y="1018421"/>
-                </a:lnTo>
-                <a:close/>
-                <a:lnTo>
-                  <a:pt x="1032921" y="1015164"/>
-                </a:lnTo>
-                <a:close/>
-                <a:lnTo>
-                  <a:pt x="1036218" y="1011975"/>
-                </a:lnTo>
-                <a:close/>
-                <a:lnTo>
-                  <a:pt x="1039516" y="1008810"/>
-                </a:lnTo>
-                <a:close/>
-                <a:lnTo>
-                  <a:pt x="1042813" y="1005620"/>
-                </a:lnTo>
-                <a:close/>
-                <a:lnTo>
-                  <a:pt x="1046110" y="1002361"/>
-                </a:lnTo>
-                <a:close/>
-                <a:lnTo>
-                  <a:pt x="1049408" y="998985"/>
-                </a:lnTo>
-                <a:close/>
-                <a:lnTo>
-                  <a:pt x="1052705" y="995446"/>
-                </a:lnTo>
-                <a:close/>
-                <a:lnTo>
-                  <a:pt x="1056002" y="991735"/>
-                </a:lnTo>
-                <a:close/>
-                <a:lnTo>
-                  <a:pt x="1059300" y="987892"/>
-                </a:lnTo>
-                <a:close/>
-                <a:lnTo>
-                  <a:pt x="1062597" y="983961"/>
-                </a:lnTo>
-                <a:close/>
-                <a:lnTo>
-                  <a:pt x="1065894" y="979989"/>
-                </a:lnTo>
-                <a:close/>
-                <a:lnTo>
-                  <a:pt x="1069192" y="976021"/>
-                </a:lnTo>
-                <a:close/>
-                <a:lnTo>
-                  <a:pt x="1072489" y="972102"/>
-                </a:lnTo>
-                <a:close/>
-                <a:lnTo>
-                  <a:pt x="1075786" y="968277"/>
-                </a:lnTo>
-                <a:close/>
-                <a:lnTo>
-                  <a:pt x="1079084" y="964592"/>
-                </a:lnTo>
-                <a:close/>
-                <a:lnTo>
-                  <a:pt x="1082381" y="961076"/>
-                </a:lnTo>
-                <a:close/>
-                <a:lnTo>
-                  <a:pt x="1085678" y="957703"/>
-                </a:lnTo>
-                <a:close/>
-                <a:lnTo>
-                  <a:pt x="1088976" y="954434"/>
-                </a:lnTo>
-                <a:close/>
-                <a:lnTo>
-                  <a:pt x="1092273" y="951229"/>
-                </a:lnTo>
-                <a:close/>
-                <a:lnTo>
-                  <a:pt x="1095570" y="948048"/>
-                </a:lnTo>
-                <a:close/>
-                <a:lnTo>
-                  <a:pt x="1098868" y="944853"/>
-                </a:lnTo>
-                <a:close/>
-                <a:lnTo>
-                  <a:pt x="1102165" y="941603"/>
-                </a:lnTo>
-                <a:close/>
-                <a:lnTo>
-                  <a:pt x="1105462" y="938259"/>
-                </a:lnTo>
-                <a:close/>
-                <a:lnTo>
-                  <a:pt x="1108760" y="934785"/>
-                </a:lnTo>
-                <a:close/>
-                <a:lnTo>
-                  <a:pt x="1112057" y="931178"/>
-                </a:lnTo>
-                <a:close/>
-                <a:lnTo>
-                  <a:pt x="1115354" y="927457"/>
-                </a:lnTo>
-                <a:close/>
-                <a:lnTo>
-                  <a:pt x="1118652" y="923637"/>
-                </a:lnTo>
-                <a:close/>
-                <a:lnTo>
-                  <a:pt x="1121949" y="919738"/>
-                </a:lnTo>
-                <a:close/>
-                <a:lnTo>
-                  <a:pt x="1125246" y="915775"/>
-                </a:lnTo>
-                <a:close/>
-                <a:lnTo>
-                  <a:pt x="1128544" y="911766"/>
-                </a:lnTo>
-                <a:close/>
-                <a:lnTo>
-                  <a:pt x="1131841" y="907729"/>
-                </a:lnTo>
-                <a:close/>
-                <a:lnTo>
-                  <a:pt x="1135138" y="903682"/>
-                </a:lnTo>
-                <a:close/>
-                <a:lnTo>
-                  <a:pt x="1138436" y="899641"/>
-                </a:lnTo>
-                <a:close/>
-                <a:lnTo>
-                  <a:pt x="1141733" y="895624"/>
-                </a:lnTo>
-                <a:close/>
-                <a:lnTo>
-                  <a:pt x="1145030" y="891648"/>
-                </a:lnTo>
-                <a:close/>
-                <a:lnTo>
-                  <a:pt x="1148328" y="887732"/>
-                </a:lnTo>
-                <a:close/>
-                <a:lnTo>
-                  <a:pt x="1151625" y="883893"/>
-                </a:lnTo>
-                <a:close/>
-                <a:lnTo>
-                  <a:pt x="1154922" y="880149"/>
-                </a:lnTo>
-                <a:close/>
-                <a:lnTo>
-                  <a:pt x="1158220" y="876516"/>
-                </a:lnTo>
-                <a:close/>
-                <a:lnTo>
-                  <a:pt x="1161517" y="873013"/>
-                </a:lnTo>
-                <a:close/>
-                <a:lnTo>
-                  <a:pt x="1164814" y="869646"/>
-                </a:lnTo>
-                <a:close/>
-                <a:lnTo>
-                  <a:pt x="1168112" y="866381"/>
-                </a:lnTo>
-                <a:close/>
-                <a:lnTo>
-                  <a:pt x="1171409" y="863180"/>
-                </a:lnTo>
-                <a:close/>
-                <a:lnTo>
-                  <a:pt x="1174706" y="860002"/>
-                </a:lnTo>
-                <a:close/>
-                <a:lnTo>
-                  <a:pt x="1178004" y="856807"/>
-                </a:lnTo>
-                <a:close/>
-                <a:lnTo>
-                  <a:pt x="1181301" y="853554"/>
-                </a:lnTo>
-                <a:close/>
-                <a:lnTo>
-                  <a:pt x="1184598" y="850205"/>
-                </a:lnTo>
-                <a:close/>
-                <a:lnTo>
-                  <a:pt x="1187896" y="846718"/>
-                </a:lnTo>
-                <a:close/>
-                <a:lnTo>
-                  <a:pt x="1191193" y="843060"/>
-                </a:lnTo>
-                <a:close/>
-                <a:lnTo>
-                  <a:pt x="1194490" y="839250"/>
-                </a:lnTo>
-                <a:close/>
-                <a:lnTo>
-                  <a:pt x="1197788" y="835336"/>
-                </a:lnTo>
-                <a:close/>
-                <a:lnTo>
-                  <a:pt x="1201085" y="831366"/>
-                </a:lnTo>
-                <a:close/>
-                <a:lnTo>
-                  <a:pt x="1204382" y="827385"/>
-                </a:lnTo>
-                <a:close/>
-                <a:lnTo>
-                  <a:pt x="1207680" y="823442"/>
-                </a:lnTo>
-                <a:close/>
-                <a:lnTo>
-                  <a:pt x="1210977" y="819585"/>
-                </a:lnTo>
-                <a:close/>
-                <a:lnTo>
-                  <a:pt x="1214274" y="815860"/>
-                </a:lnTo>
-                <a:close/>
-                <a:lnTo>
-                  <a:pt x="1217572" y="812313"/>
-                </a:lnTo>
-                <a:close/>
-                <a:lnTo>
-                  <a:pt x="1220869" y="808947"/>
-                </a:lnTo>
-                <a:close/>
-                <a:lnTo>
-                  <a:pt x="1224166" y="805711"/>
-                </a:lnTo>
-                <a:close/>
-                <a:lnTo>
-                  <a:pt x="1227464" y="802549"/>
-                </a:lnTo>
-                <a:close/>
-                <a:lnTo>
-                  <a:pt x="1230761" y="799409"/>
-                </a:lnTo>
-                <a:close/>
-                <a:lnTo>
-                  <a:pt x="1234058" y="796235"/>
-                </a:lnTo>
-                <a:close/>
-                <a:lnTo>
-                  <a:pt x="1237356" y="792974"/>
-                </a:lnTo>
-                <a:close/>
-                <a:lnTo>
-                  <a:pt x="1240653" y="789571"/>
-                </a:lnTo>
-                <a:close/>
-                <a:lnTo>
-                  <a:pt x="1243950" y="785973"/>
-                </a:lnTo>
-                <a:close/>
-                <a:lnTo>
-                  <a:pt x="1247248" y="782154"/>
-                </a:lnTo>
-                <a:close/>
-                <a:lnTo>
-                  <a:pt x="1250545" y="778173"/>
-                </a:lnTo>
-                <a:close/>
-                <a:lnTo>
-                  <a:pt x="1253842" y="774104"/>
-                </a:lnTo>
-                <a:close/>
-                <a:lnTo>
-                  <a:pt x="1257140" y="770022"/>
-                </a:lnTo>
-                <a:close/>
-                <a:lnTo>
-                  <a:pt x="1260437" y="766001"/>
-                </a:lnTo>
-                <a:close/>
-                <a:lnTo>
-                  <a:pt x="1263734" y="762115"/>
-                </a:lnTo>
-                <a:close/>
-                <a:lnTo>
-                  <a:pt x="1267032" y="758438"/>
-                </a:lnTo>
-                <a:close/>
-                <a:lnTo>
-                  <a:pt x="1270329" y="755045"/>
-                </a:lnTo>
-                <a:close/>
-                <a:lnTo>
-                  <a:pt x="1273626" y="751998"/>
-                </a:lnTo>
-                <a:close/>
-                <a:lnTo>
-                  <a:pt x="1276924" y="749282"/>
-                </a:lnTo>
-                <a:close/>
-                <a:lnTo>
-                  <a:pt x="1280221" y="746847"/>
-                </a:lnTo>
-                <a:close/>
-                <a:lnTo>
-                  <a:pt x="1283518" y="744640"/>
-                </a:lnTo>
-                <a:close/>
-                <a:lnTo>
-                  <a:pt x="1286816" y="742609"/>
-                </a:lnTo>
-                <a:close/>
-                <a:lnTo>
-                  <a:pt x="1290113" y="740703"/>
-                </a:lnTo>
-                <a:close/>
-                <a:lnTo>
-                  <a:pt x="1293410" y="738870"/>
-                </a:lnTo>
-                <a:close/>
-                <a:lnTo>
-                  <a:pt x="1296708" y="737058"/>
-                </a:lnTo>
-                <a:close/>
-                <a:lnTo>
-                  <a:pt x="1300005" y="735215"/>
-                </a:lnTo>
-                <a:close/>
-                <a:lnTo>
-                  <a:pt x="1303302" y="733311"/>
-                </a:lnTo>
-                <a:close/>
-                <a:lnTo>
-                  <a:pt x="1306600" y="731334"/>
-                </a:lnTo>
-                <a:close/>
-                <a:lnTo>
-                  <a:pt x="1309897" y="729275"/>
-                </a:lnTo>
-                <a:close/>
-                <a:lnTo>
-                  <a:pt x="1313194" y="727123"/>
-                </a:lnTo>
-                <a:close/>
-                <a:lnTo>
-                  <a:pt x="1316492" y="724869"/>
-                </a:lnTo>
-                <a:close/>
-                <a:lnTo>
-                  <a:pt x="1319789" y="722503"/>
-                </a:lnTo>
-                <a:close/>
-                <a:lnTo>
-                  <a:pt x="1323086" y="720015"/>
-                </a:lnTo>
-                <a:close/>
-                <a:lnTo>
-                  <a:pt x="1326384" y="717395"/>
-                </a:lnTo>
-                <a:close/>
-                <a:lnTo>
-                  <a:pt x="1329681" y="714647"/>
-                </a:lnTo>
-                <a:close/>
-                <a:lnTo>
-                  <a:pt x="1332978" y="711808"/>
-                </a:lnTo>
-                <a:close/>
-                <a:lnTo>
-                  <a:pt x="1336276" y="708924"/>
-                </a:lnTo>
-                <a:close/>
-                <a:lnTo>
-                  <a:pt x="1339573" y="706037"/>
-                </a:lnTo>
-                <a:close/>
-                <a:lnTo>
-                  <a:pt x="1342870" y="703191"/>
-                </a:lnTo>
-                <a:close/>
-                <a:lnTo>
-                  <a:pt x="1346168" y="700429"/>
-                </a:lnTo>
-                <a:close/>
-                <a:lnTo>
-                  <a:pt x="1349465" y="697796"/>
-                </a:lnTo>
-                <a:close/>
-                <a:lnTo>
-                  <a:pt x="1352762" y="695334"/>
-                </a:lnTo>
-                <a:close/>
-                <a:lnTo>
-                  <a:pt x="1356060" y="693078"/>
-                </a:lnTo>
-                <a:close/>
-                <a:lnTo>
-                  <a:pt x="1359357" y="690986"/>
-                </a:lnTo>
-                <a:close/>
-                <a:lnTo>
-                  <a:pt x="1362654" y="688989"/>
-                </a:lnTo>
-                <a:close/>
-                <a:lnTo>
-                  <a:pt x="1365952" y="687019"/>
-                </a:lnTo>
-                <a:close/>
-                <a:lnTo>
-                  <a:pt x="1369249" y="685006"/>
-                </a:lnTo>
-                <a:close/>
-                <a:lnTo>
-                  <a:pt x="1372546" y="682879"/>
-                </a:lnTo>
-                <a:close/>
-                <a:lnTo>
-                  <a:pt x="1375844" y="680571"/>
-                </a:lnTo>
-                <a:close/>
-                <a:lnTo>
-                  <a:pt x="1379141" y="678012"/>
-                </a:lnTo>
-                <a:close/>
-                <a:lnTo>
-                  <a:pt x="1382438" y="675134"/>
-                </a:lnTo>
-                <a:close/>
-                <a:lnTo>
-                  <a:pt x="1385736" y="671926"/>
-                </a:lnTo>
-                <a:close/>
-                <a:lnTo>
-                  <a:pt x="1389033" y="668429"/>
-                </a:lnTo>
-                <a:close/>
-                <a:lnTo>
-                  <a:pt x="1392330" y="664687"/>
-                </a:lnTo>
-                <a:close/>
-                <a:lnTo>
-                  <a:pt x="1395628" y="660743"/>
-                </a:lnTo>
-                <a:close/>
-                <a:lnTo>
-                  <a:pt x="1398925" y="656640"/>
-                </a:lnTo>
-                <a:close/>
-                <a:lnTo>
-                  <a:pt x="1402222" y="652421"/>
-                </a:lnTo>
-                <a:close/>
-                <a:lnTo>
-                  <a:pt x="1405520" y="648131"/>
-                </a:lnTo>
-                <a:close/>
-                <a:lnTo>
-                  <a:pt x="1408817" y="643812"/>
-                </a:lnTo>
-                <a:close/>
-                <a:lnTo>
-                  <a:pt x="1412114" y="639493"/>
-                </a:lnTo>
-                <a:close/>
-                <a:lnTo>
-                  <a:pt x="1415412" y="635170"/>
-                </a:lnTo>
-                <a:close/>
-                <a:lnTo>
-                  <a:pt x="1418709" y="630833"/>
-                </a:lnTo>
-                <a:close/>
-                <a:lnTo>
-                  <a:pt x="1422007" y="626475"/>
-                </a:lnTo>
-                <a:close/>
-                <a:lnTo>
-                  <a:pt x="1425304" y="622086"/>
-                </a:lnTo>
-                <a:close/>
-                <a:lnTo>
-                  <a:pt x="1428601" y="617658"/>
-                </a:lnTo>
-                <a:close/>
-                <a:lnTo>
-                  <a:pt x="1431899" y="613181"/>
-                </a:lnTo>
-                <a:close/>
-                <a:lnTo>
-                  <a:pt x="1435196" y="608647"/>
-                </a:lnTo>
-                <a:close/>
-                <a:lnTo>
-                  <a:pt x="1438493" y="604047"/>
-                </a:lnTo>
-                <a:close/>
-                <a:lnTo>
-                  <a:pt x="1441790" y="599373"/>
-                </a:lnTo>
-                <a:close/>
-                <a:lnTo>
-                  <a:pt x="1445088" y="594617"/>
-                </a:lnTo>
-                <a:close/>
-                <a:lnTo>
-                  <a:pt x="1448385" y="589770"/>
-                </a:lnTo>
-                <a:close/>
-                <a:lnTo>
-                  <a:pt x="1451682" y="584825"/>
-                </a:lnTo>
-                <a:close/>
-                <a:lnTo>
-                  <a:pt x="1454980" y="579774"/>
-                </a:lnTo>
-                <a:close/>
-                <a:lnTo>
-                  <a:pt x="1458277" y="574608"/>
-                </a:lnTo>
-                <a:close/>
-                <a:lnTo>
-                  <a:pt x="1461574" y="569320"/>
-                </a:lnTo>
-                <a:close/>
-                <a:lnTo>
-                  <a:pt x="1464872" y="563901"/>
-                </a:lnTo>
-                <a:close/>
-                <a:lnTo>
-                  <a:pt x="1468169" y="558344"/>
-                </a:lnTo>
-                <a:close/>
-                <a:lnTo>
-                  <a:pt x="1471467" y="552643"/>
-                </a:lnTo>
-                <a:close/>
-                <a:lnTo>
-                  <a:pt x="1474764" y="546791"/>
-                </a:lnTo>
-                <a:close/>
-                <a:lnTo>
-                  <a:pt x="1478061" y="540781"/>
-                </a:lnTo>
-                <a:close/>
-                <a:lnTo>
-                  <a:pt x="1481359" y="534607"/>
-                </a:lnTo>
-                <a:close/>
-                <a:lnTo>
-                  <a:pt x="1484656" y="528263"/>
-                </a:lnTo>
-                <a:close/>
-                <a:lnTo>
-                  <a:pt x="1487953" y="521741"/>
-                </a:lnTo>
-                <a:close/>
-                <a:lnTo>
-                  <a:pt x="1491250" y="515036"/>
-                </a:lnTo>
-                <a:close/>
-                <a:lnTo>
-                  <a:pt x="1494548" y="508153"/>
-                </a:lnTo>
-                <a:close/>
-                <a:lnTo>
-                  <a:pt x="1497845" y="501124"/>
-                </a:lnTo>
-                <a:close/>
-                <a:lnTo>
-                  <a:pt x="1501142" y="493983"/>
-                </a:lnTo>
-                <a:close/>
-                <a:lnTo>
-                  <a:pt x="1504439" y="486763"/>
-                </a:lnTo>
-                <a:close/>
-                <a:lnTo>
-                  <a:pt x="1507736" y="479501"/>
-                </a:lnTo>
-                <a:close/>
-                <a:lnTo>
-                  <a:pt x="1511034" y="472229"/>
-                </a:lnTo>
-                <a:close/>
-                <a:lnTo>
-                  <a:pt x="1514331" y="464982"/>
-                </a:lnTo>
-                <a:close/>
-                <a:lnTo>
-                  <a:pt x="1517629" y="457795"/>
-                </a:lnTo>
-                <a:close/>
-                <a:lnTo>
-                  <a:pt x="1520927" y="450693"/>
-                </a:lnTo>
-                <a:close/>
-                <a:lnTo>
-                  <a:pt x="1524225" y="443654"/>
-                </a:lnTo>
-                <a:close/>
-                <a:lnTo>
-                  <a:pt x="1527524" y="436645"/>
-                </a:lnTo>
-                <a:close/>
-                <a:lnTo>
-                  <a:pt x="1530822" y="429629"/>
-                </a:lnTo>
-                <a:close/>
-                <a:lnTo>
-                  <a:pt x="1534119" y="422571"/>
-                </a:lnTo>
-                <a:close/>
-                <a:lnTo>
-                  <a:pt x="1537417" y="415436"/>
-                </a:lnTo>
-                <a:close/>
-                <a:lnTo>
-                  <a:pt x="1540713" y="408188"/>
-                </a:lnTo>
-                <a:close/>
-                <a:lnTo>
-                  <a:pt x="1544009" y="400793"/>
-                </a:lnTo>
-                <a:close/>
-                <a:lnTo>
-                  <a:pt x="1547304" y="393215"/>
-                </a:lnTo>
-                <a:close/>
-                <a:lnTo>
-                  <a:pt x="1550598" y="385448"/>
-                </a:lnTo>
-                <a:close/>
-                <a:lnTo>
-                  <a:pt x="1553892" y="377503"/>
-                </a:lnTo>
-                <a:close/>
-                <a:lnTo>
-                  <a:pt x="1557186" y="369390"/>
-                </a:lnTo>
-                <a:close/>
-                <a:lnTo>
-                  <a:pt x="1560482" y="361122"/>
-                </a:lnTo>
-                <a:close/>
-                <a:lnTo>
-                  <a:pt x="1563779" y="352712"/>
-                </a:lnTo>
-                <a:close/>
-                <a:lnTo>
-                  <a:pt x="1567079" y="344169"/>
-                </a:lnTo>
-                <a:close/>
-                <a:lnTo>
-                  <a:pt x="1570381" y="335507"/>
-                </a:lnTo>
-                <a:close/>
-                <a:lnTo>
-                  <a:pt x="1573687" y="326738"/>
-                </a:lnTo>
-                <a:close/>
-                <a:lnTo>
-                  <a:pt x="1576995" y="317864"/>
-                </a:lnTo>
-                <a:close/>
-                <a:lnTo>
-                  <a:pt x="1580305" y="308876"/>
-                </a:lnTo>
-                <a:close/>
-                <a:lnTo>
-                  <a:pt x="1583614" y="299761"/>
-                </a:lnTo>
-                <a:close/>
-                <a:lnTo>
-                  <a:pt x="1586919" y="290509"/>
-                </a:lnTo>
-                <a:close/>
-                <a:lnTo>
-                  <a:pt x="1590219" y="281106"/>
-                </a:lnTo>
-                <a:close/>
-                <a:lnTo>
-                  <a:pt x="1593511" y="271541"/>
-                </a:lnTo>
-                <a:close/>
-                <a:lnTo>
-                  <a:pt x="1596794" y="261802"/>
-                </a:lnTo>
-                <a:close/>
-                <a:lnTo>
-                  <a:pt x="1600064" y="251878"/>
-                </a:lnTo>
-                <a:close/>
-                <a:lnTo>
-                  <a:pt x="1603322" y="241756"/>
-                </a:lnTo>
-                <a:close/>
-                <a:lnTo>
-                  <a:pt x="1606573" y="231424"/>
-                </a:lnTo>
-                <a:close/>
-                <a:lnTo>
-                  <a:pt x="1609826" y="220871"/>
-                </a:lnTo>
-                <a:close/>
-                <a:lnTo>
-                  <a:pt x="1613089" y="210085"/>
-                </a:lnTo>
-                <a:close/>
-                <a:lnTo>
-                  <a:pt x="1616369" y="199053"/>
-                </a:lnTo>
-                <a:close/>
-                <a:lnTo>
-                  <a:pt x="1619676" y="187764"/>
-                </a:lnTo>
-                <a:close/>
-                <a:lnTo>
-                  <a:pt x="1623016" y="176206"/>
-                </a:lnTo>
-                <a:close/>
-                <a:lnTo>
-                  <a:pt x="1626399" y="164367"/>
-                </a:lnTo>
-                <a:close/>
-                <a:lnTo>
-                  <a:pt x="1629830" y="152240"/>
-                </a:lnTo>
-                <a:close/>
-                <a:lnTo>
-                  <a:pt x="1633294" y="139885"/>
-                </a:lnTo>
-                <a:close/>
-                <a:lnTo>
-                  <a:pt x="1636762" y="127409"/>
-                </a:lnTo>
-                <a:close/>
-                <a:lnTo>
-                  <a:pt x="1640204" y="114918"/>
-                </a:lnTo>
-                <a:close/>
-                <a:lnTo>
-                  <a:pt x="1643588" y="102520"/>
-                </a:lnTo>
-                <a:close/>
-                <a:lnTo>
-                  <a:pt x="1646886" y="90322"/>
-                </a:lnTo>
-                <a:close/>
-                <a:lnTo>
-                  <a:pt x="1650067" y="78431"/>
-                </a:lnTo>
-                <a:close/>
-                <a:lnTo>
-                  <a:pt x="1653100" y="66955"/>
-                </a:lnTo>
-                <a:close/>
-                <a:lnTo>
-                  <a:pt x="1655955" y="56000"/>
-                </a:lnTo>
-                <a:close/>
-                <a:lnTo>
-                  <a:pt x="1658603" y="45674"/>
-                </a:lnTo>
-                <a:close/>
-                <a:lnTo>
-                  <a:pt x="1661012" y="36083"/>
-                </a:lnTo>
-                <a:close/>
-                <a:lnTo>
-                  <a:pt x="1663154" y="27336"/>
-                </a:lnTo>
-                <a:close/>
-                <a:lnTo>
-                  <a:pt x="1664997" y="19540"/>
-                </a:lnTo>
-                <a:close/>
-                <a:lnTo>
-                  <a:pt x="1666511" y="12801"/>
-                </a:lnTo>
-                <a:close/>
-                <a:lnTo>
-                  <a:pt x="1667666" y="7226"/>
-                </a:lnTo>
-                <a:close/>
-                <a:lnTo>
-                  <a:pt x="1668433" y="2923"/>
-                </a:lnTo>
-                <a:close/>
-                <a:lnTo>
-                  <a:pt x="1668780" y="0"/>
+                  <a:pt x="3293" y="5567854"/>
+                </a:lnTo>
+                <a:close/>
+                <a:lnTo>
+                  <a:pt x="6584" y="5559444"/>
+                </a:lnTo>
+                <a:close/>
+                <a:lnTo>
+                  <a:pt x="9871" y="5551057"/>
+                </a:lnTo>
+                <a:close/>
+                <a:lnTo>
+                  <a:pt x="13156" y="5542692"/>
+                </a:lnTo>
+                <a:close/>
+                <a:lnTo>
+                  <a:pt x="16438" y="5534349"/>
+                </a:lnTo>
+                <a:close/>
+                <a:lnTo>
+                  <a:pt x="19719" y="5526029"/>
+                </a:lnTo>
+                <a:close/>
+                <a:lnTo>
+                  <a:pt x="22999" y="5517731"/>
+                </a:lnTo>
+                <a:close/>
+                <a:lnTo>
+                  <a:pt x="26278" y="5509457"/>
+                </a:lnTo>
+                <a:close/>
+                <a:lnTo>
+                  <a:pt x="29555" y="5501205"/>
+                </a:lnTo>
+                <a:close/>
+                <a:lnTo>
+                  <a:pt x="32833" y="5492976"/>
+                </a:lnTo>
+                <a:close/>
+                <a:lnTo>
+                  <a:pt x="36111" y="5484770"/>
+                </a:lnTo>
+                <a:close/>
+                <a:lnTo>
+                  <a:pt x="39389" y="5476588"/>
+                </a:lnTo>
+                <a:close/>
+                <a:lnTo>
+                  <a:pt x="42668" y="5468429"/>
+                </a:lnTo>
+                <a:close/>
+                <a:lnTo>
+                  <a:pt x="45949" y="5460293"/>
+                </a:lnTo>
+                <a:close/>
+                <a:lnTo>
+                  <a:pt x="49231" y="5452181"/>
+                </a:lnTo>
+                <a:close/>
+                <a:lnTo>
+                  <a:pt x="52515" y="5444093"/>
+                </a:lnTo>
+                <a:close/>
+                <a:lnTo>
+                  <a:pt x="55800" y="5436029"/>
+                </a:lnTo>
+                <a:close/>
+                <a:lnTo>
+                  <a:pt x="59087" y="5427989"/>
+                </a:lnTo>
+                <a:close/>
+                <a:lnTo>
+                  <a:pt x="62373" y="5419972"/>
+                </a:lnTo>
+                <a:close/>
+                <a:lnTo>
+                  <a:pt x="65659" y="5411979"/>
+                </a:lnTo>
+                <a:close/>
+                <a:lnTo>
+                  <a:pt x="68945" y="5404011"/>
+                </a:lnTo>
+                <a:close/>
+                <a:lnTo>
+                  <a:pt x="72228" y="5396066"/>
+                </a:lnTo>
+                <a:close/>
+                <a:lnTo>
+                  <a:pt x="75510" y="5388145"/>
+                </a:lnTo>
+                <a:close/>
+                <a:lnTo>
+                  <a:pt x="78790" y="5380248"/>
+                </a:lnTo>
+                <a:close/>
+                <a:lnTo>
+                  <a:pt x="82068" y="5372376"/>
+                </a:lnTo>
+                <a:close/>
+                <a:lnTo>
+                  <a:pt x="85346" y="5364529"/>
+                </a:lnTo>
+                <a:close/>
+                <a:lnTo>
+                  <a:pt x="88623" y="5356708"/>
+                </a:lnTo>
+                <a:close/>
+                <a:lnTo>
+                  <a:pt x="91902" y="5348912"/>
+                </a:lnTo>
+                <a:close/>
+                <a:lnTo>
+                  <a:pt x="95181" y="5341143"/>
+                </a:lnTo>
+                <a:close/>
+                <a:lnTo>
+                  <a:pt x="98462" y="5333400"/>
+                </a:lnTo>
+                <a:close/>
+                <a:lnTo>
+                  <a:pt x="101745" y="5325684"/>
+                </a:lnTo>
+                <a:close/>
+                <a:lnTo>
+                  <a:pt x="105031" y="5317995"/>
+                </a:lnTo>
+                <a:close/>
+                <a:lnTo>
+                  <a:pt x="108317" y="5310332"/>
+                </a:lnTo>
+                <a:close/>
+                <a:lnTo>
+                  <a:pt x="111603" y="5302695"/>
+                </a:lnTo>
+                <a:close/>
+                <a:lnTo>
+                  <a:pt x="114890" y="5295084"/>
+                </a:lnTo>
+                <a:close/>
+                <a:lnTo>
+                  <a:pt x="118175" y="5287498"/>
+                </a:lnTo>
+                <a:close/>
+                <a:lnTo>
+                  <a:pt x="121459" y="5279937"/>
+                </a:lnTo>
+                <a:close/>
+                <a:lnTo>
+                  <a:pt x="124741" y="5272400"/>
+                </a:lnTo>
+                <a:close/>
+                <a:lnTo>
+                  <a:pt x="128021" y="5264888"/>
+                </a:lnTo>
+                <a:close/>
+                <a:lnTo>
+                  <a:pt x="131299" y="5257401"/>
+                </a:lnTo>
+                <a:close/>
+                <a:lnTo>
+                  <a:pt x="134577" y="5249939"/>
+                </a:lnTo>
+                <a:close/>
+                <a:lnTo>
+                  <a:pt x="137855" y="5242503"/>
+                </a:lnTo>
+                <a:close/>
+                <a:lnTo>
+                  <a:pt x="141133" y="5235093"/>
+                </a:lnTo>
+                <a:close/>
+                <a:lnTo>
+                  <a:pt x="144412" y="5227709"/>
+                </a:lnTo>
+                <a:close/>
+                <a:lnTo>
+                  <a:pt x="147693" y="5220353"/>
+                </a:lnTo>
+                <a:close/>
+                <a:lnTo>
+                  <a:pt x="150977" y="5213024"/>
+                </a:lnTo>
+                <a:close/>
+                <a:lnTo>
+                  <a:pt x="154262" y="5205722"/>
+                </a:lnTo>
+                <a:close/>
+                <a:lnTo>
+                  <a:pt x="157548" y="5198448"/>
+                </a:lnTo>
+                <a:close/>
+                <a:lnTo>
+                  <a:pt x="160834" y="5191201"/>
+                </a:lnTo>
+                <a:close/>
+                <a:lnTo>
+                  <a:pt x="164121" y="5183982"/>
+                </a:lnTo>
+                <a:close/>
+                <a:lnTo>
+                  <a:pt x="167406" y="5176790"/>
+                </a:lnTo>
+                <a:close/>
+                <a:lnTo>
+                  <a:pt x="170690" y="5169627"/>
+                </a:lnTo>
+                <a:close/>
+                <a:lnTo>
+                  <a:pt x="173972" y="5162491"/>
+                </a:lnTo>
+                <a:close/>
+                <a:lnTo>
+                  <a:pt x="177252" y="5155383"/>
+                </a:lnTo>
+                <a:close/>
+                <a:lnTo>
+                  <a:pt x="180530" y="5148303"/>
+                </a:lnTo>
+                <a:close/>
+                <a:lnTo>
+                  <a:pt x="183808" y="5141250"/>
+                </a:lnTo>
+                <a:close/>
+                <a:lnTo>
+                  <a:pt x="187086" y="5134226"/>
+                </a:lnTo>
+                <a:close/>
+                <a:lnTo>
+                  <a:pt x="190364" y="5127229"/>
+                </a:lnTo>
+                <a:close/>
+                <a:lnTo>
+                  <a:pt x="193643" y="5120259"/>
+                </a:lnTo>
+                <a:close/>
+                <a:lnTo>
+                  <a:pt x="196924" y="5113317"/>
+                </a:lnTo>
+                <a:close/>
+                <a:lnTo>
+                  <a:pt x="200208" y="5106403"/>
+                </a:lnTo>
+                <a:close/>
+                <a:lnTo>
+                  <a:pt x="203493" y="5099516"/>
+                </a:lnTo>
+                <a:close/>
+                <a:lnTo>
+                  <a:pt x="206779" y="5092657"/>
+                </a:lnTo>
+                <a:close/>
+                <a:lnTo>
+                  <a:pt x="210066" y="5085826"/>
+                </a:lnTo>
+                <a:close/>
+                <a:lnTo>
+                  <a:pt x="213352" y="5079023"/>
+                </a:lnTo>
+                <a:close/>
+                <a:lnTo>
+                  <a:pt x="216637" y="5072248"/>
+                </a:lnTo>
+                <a:close/>
+                <a:lnTo>
+                  <a:pt x="219921" y="5065502"/>
+                </a:lnTo>
+                <a:close/>
+                <a:lnTo>
+                  <a:pt x="223203" y="5058784"/>
+                </a:lnTo>
+                <a:close/>
+                <a:lnTo>
+                  <a:pt x="226483" y="5052094"/>
+                </a:lnTo>
+                <a:close/>
+                <a:lnTo>
+                  <a:pt x="229761" y="5045434"/>
+                </a:lnTo>
+                <a:close/>
+                <a:lnTo>
+                  <a:pt x="233039" y="5038802"/>
+                </a:lnTo>
+                <a:close/>
+                <a:lnTo>
+                  <a:pt x="236317" y="5032199"/>
+                </a:lnTo>
+                <a:close/>
+                <a:lnTo>
+                  <a:pt x="239595" y="5025626"/>
+                </a:lnTo>
+                <a:close/>
+                <a:lnTo>
+                  <a:pt x="242874" y="5019082"/>
+                </a:lnTo>
+                <a:close/>
+                <a:lnTo>
+                  <a:pt x="246155" y="5012568"/>
+                </a:lnTo>
+                <a:close/>
+                <a:lnTo>
+                  <a:pt x="249439" y="5006083"/>
+                </a:lnTo>
+                <a:close/>
+                <a:lnTo>
+                  <a:pt x="252724" y="4999628"/>
+                </a:lnTo>
+                <a:close/>
+                <a:lnTo>
+                  <a:pt x="256010" y="4993203"/>
+                </a:lnTo>
+                <a:close/>
+                <a:lnTo>
+                  <a:pt x="259297" y="4986806"/>
+                </a:lnTo>
+                <a:close/>
+                <a:lnTo>
+                  <a:pt x="262583" y="4980439"/>
+                </a:lnTo>
+                <a:close/>
+                <a:lnTo>
+                  <a:pt x="265869" y="4974101"/>
+                </a:lnTo>
+                <a:close/>
+                <a:lnTo>
+                  <a:pt x="269152" y="4967792"/>
+                </a:lnTo>
+                <a:close/>
+                <a:lnTo>
+                  <a:pt x="272434" y="4961511"/>
+                </a:lnTo>
+                <a:close/>
+                <a:lnTo>
+                  <a:pt x="275714" y="4955260"/>
+                </a:lnTo>
+                <a:close/>
+                <a:lnTo>
+                  <a:pt x="278992" y="4949037"/>
+                </a:lnTo>
+                <a:close/>
+                <a:lnTo>
+                  <a:pt x="282270" y="4942845"/>
+                </a:lnTo>
+                <a:close/>
+                <a:lnTo>
+                  <a:pt x="285548" y="4936683"/>
+                </a:lnTo>
+                <a:close/>
+                <a:lnTo>
+                  <a:pt x="288826" y="4930551"/>
+                </a:lnTo>
+                <a:close/>
+                <a:lnTo>
+                  <a:pt x="292105" y="4924450"/>
+                </a:lnTo>
+                <a:close/>
+                <a:lnTo>
+                  <a:pt x="295386" y="4918380"/>
+                </a:lnTo>
+                <a:close/>
+                <a:lnTo>
+                  <a:pt x="298670" y="4912342"/>
+                </a:lnTo>
+                <a:close/>
+                <a:lnTo>
+                  <a:pt x="301955" y="4906336"/>
+                </a:lnTo>
+                <a:close/>
+                <a:lnTo>
+                  <a:pt x="305241" y="4900361"/>
+                </a:lnTo>
+                <a:close/>
+                <a:lnTo>
+                  <a:pt x="308528" y="4894417"/>
+                </a:lnTo>
+                <a:close/>
+                <a:lnTo>
+                  <a:pt x="311814" y="4888504"/>
+                </a:lnTo>
+                <a:close/>
+                <a:lnTo>
+                  <a:pt x="315100" y="4882622"/>
+                </a:lnTo>
+                <a:close/>
+                <a:lnTo>
+                  <a:pt x="318384" y="4876771"/>
+                </a:lnTo>
+                <a:close/>
+                <a:lnTo>
+                  <a:pt x="321665" y="4870950"/>
+                </a:lnTo>
+                <a:close/>
+                <a:lnTo>
+                  <a:pt x="324945" y="4865160"/>
+                </a:lnTo>
+                <a:close/>
+                <a:lnTo>
+                  <a:pt x="328223" y="4859401"/>
+                </a:lnTo>
+                <a:close/>
+                <a:lnTo>
+                  <a:pt x="331501" y="4853673"/>
+                </a:lnTo>
+                <a:close/>
+                <a:lnTo>
+                  <a:pt x="334778" y="4847976"/>
+                </a:lnTo>
+                <a:close/>
+                <a:lnTo>
+                  <a:pt x="338057" y="4842311"/>
+                </a:lnTo>
+                <a:close/>
+                <a:lnTo>
+                  <a:pt x="341336" y="4836678"/>
+                </a:lnTo>
+                <a:close/>
+                <a:lnTo>
+                  <a:pt x="344617" y="4831077"/>
+                </a:lnTo>
+                <a:close/>
+                <a:lnTo>
+                  <a:pt x="347901" y="4825508"/>
+                </a:lnTo>
+                <a:close/>
+                <a:lnTo>
+                  <a:pt x="351186" y="4819972"/>
+                </a:lnTo>
+                <a:close/>
+                <a:lnTo>
+                  <a:pt x="354472" y="4814467"/>
+                </a:lnTo>
+                <a:close/>
+                <a:lnTo>
+                  <a:pt x="357759" y="4808994"/>
+                </a:lnTo>
+                <a:close/>
+                <a:lnTo>
+                  <a:pt x="361045" y="4803553"/>
+                </a:lnTo>
+                <a:close/>
+                <a:lnTo>
+                  <a:pt x="364331" y="4798143"/>
+                </a:lnTo>
+                <a:close/>
+                <a:lnTo>
+                  <a:pt x="367615" y="4792764"/>
+                </a:lnTo>
+                <a:close/>
+                <a:lnTo>
+                  <a:pt x="370896" y="4787417"/>
+                </a:lnTo>
+                <a:close/>
+                <a:lnTo>
+                  <a:pt x="374176" y="4782101"/>
+                </a:lnTo>
+                <a:close/>
+                <a:lnTo>
+                  <a:pt x="377454" y="4776816"/>
+                </a:lnTo>
+                <a:close/>
+                <a:lnTo>
+                  <a:pt x="380732" y="4771564"/>
+                </a:lnTo>
+                <a:close/>
+                <a:lnTo>
+                  <a:pt x="384009" y="4766345"/>
+                </a:lnTo>
+                <a:close/>
+                <a:lnTo>
+                  <a:pt x="387288" y="4761158"/>
+                </a:lnTo>
+                <a:close/>
+                <a:lnTo>
+                  <a:pt x="390567" y="4756006"/>
+                </a:lnTo>
+                <a:close/>
+                <a:lnTo>
+                  <a:pt x="393848" y="4750887"/>
+                </a:lnTo>
+                <a:close/>
+                <a:lnTo>
+                  <a:pt x="397132" y="4745802"/>
+                </a:lnTo>
+                <a:close/>
+                <a:lnTo>
+                  <a:pt x="400417" y="4740752"/>
+                </a:lnTo>
+                <a:close/>
+                <a:lnTo>
+                  <a:pt x="403704" y="4735735"/>
+                </a:lnTo>
+                <a:close/>
+                <a:lnTo>
+                  <a:pt x="406990" y="4730752"/>
+                </a:lnTo>
+                <a:close/>
+                <a:lnTo>
+                  <a:pt x="410277" y="4725801"/>
+                </a:lnTo>
+                <a:close/>
+                <a:lnTo>
+                  <a:pt x="413562" y="4720884"/>
+                </a:lnTo>
+                <a:close/>
+                <a:lnTo>
+                  <a:pt x="416846" y="4715999"/>
+                </a:lnTo>
+                <a:close/>
+                <a:lnTo>
+                  <a:pt x="420127" y="4711146"/>
+                </a:lnTo>
+                <a:close/>
+                <a:lnTo>
+                  <a:pt x="423407" y="4706325"/>
+                </a:lnTo>
+                <a:close/>
+                <a:lnTo>
+                  <a:pt x="426685" y="4701537"/>
+                </a:lnTo>
+                <a:close/>
+                <a:lnTo>
+                  <a:pt x="429963" y="4696781"/>
+                </a:lnTo>
+                <a:close/>
+                <a:lnTo>
+                  <a:pt x="433240" y="4692057"/>
+                </a:lnTo>
+                <a:close/>
+                <a:lnTo>
+                  <a:pt x="436519" y="4687367"/>
+                </a:lnTo>
+                <a:close/>
+                <a:lnTo>
+                  <a:pt x="439798" y="4682709"/>
+                </a:lnTo>
+                <a:close/>
+                <a:lnTo>
+                  <a:pt x="443080" y="4678084"/>
+                </a:lnTo>
+                <a:close/>
+                <a:lnTo>
+                  <a:pt x="446363" y="4673492"/>
+                </a:lnTo>
+                <a:close/>
+                <a:lnTo>
+                  <a:pt x="449648" y="4668934"/>
+                </a:lnTo>
+                <a:close/>
+                <a:lnTo>
+                  <a:pt x="452935" y="4664411"/>
+                </a:lnTo>
+                <a:close/>
+                <a:lnTo>
+                  <a:pt x="456221" y="4659921"/>
+                </a:lnTo>
+                <a:close/>
+                <a:lnTo>
+                  <a:pt x="459508" y="4655466"/>
+                </a:lnTo>
+                <a:close/>
+                <a:lnTo>
+                  <a:pt x="462793" y="4651046"/>
+                </a:lnTo>
+                <a:close/>
+                <a:lnTo>
+                  <a:pt x="466077" y="4646662"/>
+                </a:lnTo>
+                <a:close/>
+                <a:lnTo>
+                  <a:pt x="469358" y="4642314"/>
+                </a:lnTo>
+                <a:close/>
+                <a:lnTo>
+                  <a:pt x="472638" y="4638001"/>
+                </a:lnTo>
+                <a:close/>
+                <a:lnTo>
+                  <a:pt x="475916" y="4633724"/>
+                </a:lnTo>
+                <a:close/>
+                <a:lnTo>
+                  <a:pt x="479194" y="4629482"/>
+                </a:lnTo>
+                <a:close/>
+                <a:lnTo>
+                  <a:pt x="482471" y="4625275"/>
+                </a:lnTo>
+                <a:close/>
+                <a:lnTo>
+                  <a:pt x="485750" y="4621101"/>
+                </a:lnTo>
+                <a:close/>
+                <a:lnTo>
+                  <a:pt x="489029" y="4616962"/>
+                </a:lnTo>
+                <a:close/>
+                <a:lnTo>
+                  <a:pt x="492311" y="4612856"/>
+                </a:lnTo>
+                <a:close/>
+                <a:lnTo>
+                  <a:pt x="495594" y="4608783"/>
+                </a:lnTo>
+                <a:close/>
+                <a:lnTo>
+                  <a:pt x="498880" y="4604745"/>
+                </a:lnTo>
+                <a:close/>
+                <a:lnTo>
+                  <a:pt x="502166" y="4600740"/>
+                </a:lnTo>
+                <a:close/>
+                <a:lnTo>
+                  <a:pt x="505453" y="4596770"/>
+                </a:lnTo>
+                <a:close/>
+                <a:lnTo>
+                  <a:pt x="508739" y="4592836"/>
+                </a:lnTo>
+                <a:close/>
+                <a:lnTo>
+                  <a:pt x="512024" y="4588936"/>
+                </a:lnTo>
+                <a:close/>
+                <a:lnTo>
+                  <a:pt x="515308" y="4585073"/>
+                </a:lnTo>
+                <a:close/>
+                <a:lnTo>
+                  <a:pt x="518589" y="4581247"/>
+                </a:lnTo>
+                <a:close/>
+                <a:lnTo>
+                  <a:pt x="521869" y="4577456"/>
+                </a:lnTo>
+                <a:close/>
+                <a:lnTo>
+                  <a:pt x="525147" y="4573703"/>
+                </a:lnTo>
+                <a:close/>
+                <a:lnTo>
+                  <a:pt x="528425" y="4569985"/>
+                </a:lnTo>
+                <a:close/>
+                <a:lnTo>
+                  <a:pt x="531702" y="4566304"/>
+                </a:lnTo>
+                <a:close/>
+                <a:lnTo>
+                  <a:pt x="534981" y="4562658"/>
+                </a:lnTo>
+                <a:close/>
+                <a:lnTo>
+                  <a:pt x="538260" y="4559049"/>
+                </a:lnTo>
+                <a:close/>
+                <a:lnTo>
+                  <a:pt x="541542" y="4555476"/>
+                </a:lnTo>
+                <a:close/>
+                <a:lnTo>
+                  <a:pt x="544825" y="4551938"/>
+                </a:lnTo>
+                <a:close/>
+                <a:lnTo>
+                  <a:pt x="548111" y="4548437"/>
+                </a:lnTo>
+                <a:close/>
+                <a:lnTo>
+                  <a:pt x="551397" y="4544971"/>
+                </a:lnTo>
+                <a:close/>
+                <a:lnTo>
+                  <a:pt x="554684" y="4541540"/>
+                </a:lnTo>
+                <a:close/>
+                <a:lnTo>
+                  <a:pt x="557970" y="4538145"/>
+                </a:lnTo>
+                <a:close/>
+                <a:lnTo>
+                  <a:pt x="561255" y="4534786"/>
+                </a:lnTo>
+                <a:close/>
+                <a:lnTo>
+                  <a:pt x="564539" y="4531462"/>
+                </a:lnTo>
+                <a:close/>
+                <a:lnTo>
+                  <a:pt x="567820" y="4528174"/>
+                </a:lnTo>
+                <a:close/>
+                <a:lnTo>
+                  <a:pt x="571100" y="4524921"/>
+                </a:lnTo>
+                <a:close/>
+                <a:lnTo>
+                  <a:pt x="574378" y="4521704"/>
+                </a:lnTo>
+                <a:close/>
+                <a:lnTo>
+                  <a:pt x="577656" y="4518523"/>
+                </a:lnTo>
+                <a:close/>
+                <a:lnTo>
+                  <a:pt x="580933" y="4515379"/>
+                </a:lnTo>
+                <a:close/>
+                <a:lnTo>
+                  <a:pt x="584211" y="4512273"/>
+                </a:lnTo>
+                <a:close/>
+                <a:lnTo>
+                  <a:pt x="587491" y="4509203"/>
+                </a:lnTo>
+                <a:close/>
+                <a:lnTo>
+                  <a:pt x="590773" y="4506172"/>
+                </a:lnTo>
+                <a:close/>
+                <a:lnTo>
+                  <a:pt x="594057" y="4503178"/>
+                </a:lnTo>
+                <a:close/>
+                <a:lnTo>
+                  <a:pt x="597342" y="4500223"/>
+                </a:lnTo>
+                <a:close/>
+                <a:lnTo>
+                  <a:pt x="600628" y="4497305"/>
+                </a:lnTo>
+                <a:close/>
+                <a:lnTo>
+                  <a:pt x="603915" y="4494425"/>
+                </a:lnTo>
+                <a:close/>
+                <a:lnTo>
+                  <a:pt x="607201" y="4491583"/>
+                </a:lnTo>
+                <a:close/>
+                <a:lnTo>
+                  <a:pt x="610486" y="4488779"/>
+                </a:lnTo>
+                <a:close/>
+                <a:lnTo>
+                  <a:pt x="613770" y="4486012"/>
+                </a:lnTo>
+                <a:close/>
+                <a:lnTo>
+                  <a:pt x="617051" y="4483283"/>
+                </a:lnTo>
+                <a:close/>
+                <a:lnTo>
+                  <a:pt x="620331" y="4480591"/>
+                </a:lnTo>
+                <a:close/>
+                <a:lnTo>
+                  <a:pt x="623609" y="4477937"/>
+                </a:lnTo>
+                <a:close/>
+                <a:lnTo>
+                  <a:pt x="626887" y="4475320"/>
+                </a:lnTo>
+                <a:close/>
+                <a:lnTo>
+                  <a:pt x="630164" y="4472740"/>
+                </a:lnTo>
+                <a:close/>
+                <a:lnTo>
+                  <a:pt x="633442" y="4470197"/>
+                </a:lnTo>
+                <a:close/>
+                <a:lnTo>
+                  <a:pt x="636722" y="4467691"/>
+                </a:lnTo>
+                <a:close/>
+                <a:lnTo>
+                  <a:pt x="640004" y="4465222"/>
+                </a:lnTo>
+                <a:close/>
+                <a:lnTo>
+                  <a:pt x="643288" y="4462790"/>
+                </a:lnTo>
+                <a:close/>
+                <a:lnTo>
+                  <a:pt x="646573" y="4460396"/>
+                </a:lnTo>
+                <a:close/>
+                <a:lnTo>
+                  <a:pt x="649859" y="4458039"/>
+                </a:lnTo>
+                <a:close/>
+                <a:lnTo>
+                  <a:pt x="653146" y="4455721"/>
+                </a:lnTo>
+                <a:close/>
+                <a:lnTo>
+                  <a:pt x="656432" y="4453442"/>
+                </a:lnTo>
+                <a:close/>
+                <a:lnTo>
+                  <a:pt x="659717" y="4451201"/>
+                </a:lnTo>
+                <a:close/>
+                <a:lnTo>
+                  <a:pt x="663001" y="4449001"/>
+                </a:lnTo>
+                <a:close/>
+                <a:lnTo>
+                  <a:pt x="666282" y="4446841"/>
+                </a:lnTo>
+                <a:close/>
+                <a:lnTo>
+                  <a:pt x="669562" y="4444720"/>
+                </a:lnTo>
+                <a:close/>
+                <a:lnTo>
+                  <a:pt x="672840" y="4442639"/>
+                </a:lnTo>
+                <a:close/>
+                <a:lnTo>
+                  <a:pt x="676117" y="4440597"/>
+                </a:lnTo>
+                <a:close/>
+                <a:lnTo>
+                  <a:pt x="679395" y="4438594"/>
+                </a:lnTo>
+                <a:close/>
+                <a:lnTo>
+                  <a:pt x="682673" y="4436628"/>
+                </a:lnTo>
+                <a:close/>
+                <a:lnTo>
+                  <a:pt x="685953" y="4434701"/>
+                </a:lnTo>
+                <a:close/>
+                <a:lnTo>
+                  <a:pt x="689235" y="4432811"/>
+                </a:lnTo>
+                <a:close/>
+                <a:lnTo>
+                  <a:pt x="692519" y="4430958"/>
+                </a:lnTo>
+                <a:close/>
+                <a:lnTo>
+                  <a:pt x="695804" y="4429143"/>
+                </a:lnTo>
+                <a:close/>
+                <a:lnTo>
+                  <a:pt x="699091" y="4427366"/>
+                </a:lnTo>
+                <a:close/>
+                <a:lnTo>
+                  <a:pt x="702377" y="4425629"/>
+                </a:lnTo>
+                <a:close/>
+                <a:lnTo>
+                  <a:pt x="705663" y="4423931"/>
+                </a:lnTo>
+                <a:close/>
+                <a:lnTo>
+                  <a:pt x="708949" y="4422274"/>
+                </a:lnTo>
+                <a:close/>
+                <a:lnTo>
+                  <a:pt x="712232" y="4420657"/>
+                </a:lnTo>
+                <a:close/>
+                <a:lnTo>
+                  <a:pt x="715513" y="4419082"/>
+                </a:lnTo>
+                <a:close/>
+                <a:lnTo>
+                  <a:pt x="718793" y="4417547"/>
+                </a:lnTo>
+                <a:close/>
+                <a:lnTo>
+                  <a:pt x="722071" y="4416053"/>
+                </a:lnTo>
+                <a:close/>
+                <a:lnTo>
+                  <a:pt x="725348" y="4414599"/>
+                </a:lnTo>
+                <a:close/>
+                <a:lnTo>
+                  <a:pt x="728626" y="4413184"/>
+                </a:lnTo>
+                <a:close/>
+                <a:lnTo>
+                  <a:pt x="731904" y="4411806"/>
+                </a:lnTo>
+                <a:close/>
+                <a:lnTo>
+                  <a:pt x="735184" y="4410467"/>
+                </a:lnTo>
+                <a:close/>
+                <a:lnTo>
+                  <a:pt x="738466" y="4409164"/>
+                </a:lnTo>
+                <a:close/>
+                <a:lnTo>
+                  <a:pt x="741750" y="4407898"/>
+                </a:lnTo>
+                <a:close/>
+                <a:lnTo>
+                  <a:pt x="745035" y="4406669"/>
+                </a:lnTo>
+                <a:close/>
+                <a:lnTo>
+                  <a:pt x="748322" y="4405479"/>
+                </a:lnTo>
+                <a:close/>
+                <a:lnTo>
+                  <a:pt x="751608" y="4404328"/>
+                </a:lnTo>
+                <a:close/>
+                <a:lnTo>
+                  <a:pt x="754894" y="4403217"/>
+                </a:lnTo>
+                <a:close/>
+                <a:lnTo>
+                  <a:pt x="758180" y="4402148"/>
+                </a:lnTo>
+                <a:close/>
+                <a:lnTo>
+                  <a:pt x="761463" y="4401120"/>
+                </a:lnTo>
+                <a:close/>
+                <a:lnTo>
+                  <a:pt x="764744" y="4400134"/>
+                </a:lnTo>
+                <a:close/>
+                <a:lnTo>
+                  <a:pt x="768024" y="4399191"/>
+                </a:lnTo>
+                <a:close/>
+                <a:lnTo>
+                  <a:pt x="771302" y="4398289"/>
+                </a:lnTo>
+                <a:close/>
+                <a:lnTo>
+                  <a:pt x="774580" y="4397428"/>
+                </a:lnTo>
+                <a:close/>
+                <a:lnTo>
+                  <a:pt x="777857" y="4396607"/>
+                </a:lnTo>
+                <a:close/>
+                <a:lnTo>
+                  <a:pt x="781136" y="4395824"/>
+                </a:lnTo>
+                <a:close/>
+                <a:lnTo>
+                  <a:pt x="784415" y="4395080"/>
+                </a:lnTo>
+                <a:close/>
+                <a:lnTo>
+                  <a:pt x="787697" y="4394374"/>
+                </a:lnTo>
+                <a:close/>
+                <a:lnTo>
+                  <a:pt x="790980" y="4393705"/>
+                </a:lnTo>
+                <a:close/>
+                <a:lnTo>
+                  <a:pt x="794265" y="4393074"/>
+                </a:lnTo>
+                <a:close/>
+                <a:lnTo>
+                  <a:pt x="797551" y="4392483"/>
+                </a:lnTo>
+                <a:close/>
+                <a:lnTo>
+                  <a:pt x="800838" y="4391932"/>
+                </a:lnTo>
+                <a:close/>
+                <a:lnTo>
+                  <a:pt x="804124" y="4391421"/>
+                </a:lnTo>
+                <a:close/>
+                <a:lnTo>
+                  <a:pt x="807410" y="4390953"/>
+                </a:lnTo>
+                <a:close/>
+                <a:lnTo>
+                  <a:pt x="810694" y="4390527"/>
+                </a:lnTo>
+                <a:close/>
+                <a:lnTo>
+                  <a:pt x="813977" y="4390144"/>
+                </a:lnTo>
+                <a:close/>
+                <a:lnTo>
+                  <a:pt x="817258" y="4389803"/>
+                </a:lnTo>
+                <a:close/>
+                <a:lnTo>
+                  <a:pt x="820538" y="4389504"/>
+                </a:lnTo>
+                <a:close/>
+                <a:lnTo>
+                  <a:pt x="823817" y="4389243"/>
+                </a:lnTo>
+                <a:close/>
+                <a:lnTo>
+                  <a:pt x="827095" y="4389022"/>
+                </a:lnTo>
+                <a:close/>
+                <a:lnTo>
+                  <a:pt x="830372" y="4388837"/>
+                </a:lnTo>
+                <a:close/>
+                <a:lnTo>
+                  <a:pt x="833649" y="4388687"/>
+                </a:lnTo>
+                <a:close/>
+                <a:lnTo>
+                  <a:pt x="836926" y="4388572"/>
+                </a:lnTo>
+                <a:close/>
+                <a:lnTo>
+                  <a:pt x="840203" y="4388489"/>
+                </a:lnTo>
+                <a:close/>
+                <a:lnTo>
+                  <a:pt x="843480" y="4388438"/>
+                </a:lnTo>
+                <a:close/>
+                <a:lnTo>
+                  <a:pt x="846758" y="4388417"/>
+                </a:lnTo>
+                <a:close/>
+                <a:lnTo>
+                  <a:pt x="850036" y="4388425"/>
+                </a:lnTo>
+                <a:close/>
+                <a:lnTo>
+                  <a:pt x="853316" y="4388461"/>
+                </a:lnTo>
+                <a:close/>
+                <a:lnTo>
+                  <a:pt x="856597" y="4388523"/>
+                </a:lnTo>
+                <a:close/>
+                <a:lnTo>
+                  <a:pt x="859879" y="4388611"/>
+                </a:lnTo>
+                <a:close/>
+                <a:lnTo>
+                  <a:pt x="863164" y="4388722"/>
+                </a:lnTo>
+                <a:close/>
+                <a:lnTo>
+                  <a:pt x="866449" y="4388856"/>
+                </a:lnTo>
+                <a:close/>
+                <a:lnTo>
+                  <a:pt x="869735" y="4389012"/>
+                </a:lnTo>
+                <a:close/>
+                <a:lnTo>
+                  <a:pt x="873022" y="4389191"/>
+                </a:lnTo>
+                <a:close/>
+                <a:lnTo>
+                  <a:pt x="876308" y="4389390"/>
+                </a:lnTo>
+                <a:close/>
+                <a:lnTo>
+                  <a:pt x="879593" y="4389609"/>
+                </a:lnTo>
+                <a:close/>
+                <a:lnTo>
+                  <a:pt x="882877" y="4389849"/>
+                </a:lnTo>
+                <a:close/>
+                <a:lnTo>
+                  <a:pt x="886159" y="4390107"/>
+                </a:lnTo>
+                <a:close/>
+                <a:lnTo>
+                  <a:pt x="889438" y="4390383"/>
+                </a:lnTo>
+                <a:close/>
+                <a:lnTo>
+                  <a:pt x="892717" y="4390676"/>
+                </a:lnTo>
+                <a:close/>
+                <a:lnTo>
+                  <a:pt x="895995" y="4390985"/>
+                </a:lnTo>
+                <a:close/>
+                <a:lnTo>
+                  <a:pt x="899272" y="4391308"/>
+                </a:lnTo>
+                <a:close/>
+                <a:lnTo>
+                  <a:pt x="902550" y="4391644"/>
+                </a:lnTo>
+                <a:close/>
+                <a:lnTo>
+                  <a:pt x="905830" y="4391993"/>
+                </a:lnTo>
+                <a:close/>
+                <a:lnTo>
+                  <a:pt x="909111" y="4392352"/>
+                </a:lnTo>
+                <a:close/>
+                <a:lnTo>
+                  <a:pt x="912394" y="4392721"/>
+                </a:lnTo>
+                <a:close/>
+                <a:lnTo>
+                  <a:pt x="915679" y="4393099"/>
+                </a:lnTo>
+                <a:close/>
+                <a:lnTo>
+                  <a:pt x="918965" y="4393485"/>
+                </a:lnTo>
+                <a:close/>
+                <a:lnTo>
+                  <a:pt x="922251" y="4393877"/>
+                </a:lnTo>
+                <a:close/>
+                <a:lnTo>
+                  <a:pt x="925538" y="4394274"/>
+                </a:lnTo>
+                <a:close/>
+                <a:lnTo>
+                  <a:pt x="928823" y="4394675"/>
+                </a:lnTo>
+                <a:close/>
+                <a:lnTo>
+                  <a:pt x="932108" y="4395079"/>
+                </a:lnTo>
+                <a:close/>
+                <a:lnTo>
+                  <a:pt x="935390" y="4395485"/>
+                </a:lnTo>
+                <a:close/>
+                <a:lnTo>
+                  <a:pt x="938670" y="4395892"/>
+                </a:lnTo>
+                <a:close/>
+                <a:lnTo>
+                  <a:pt x="941948" y="4396299"/>
+                </a:lnTo>
+                <a:close/>
+                <a:lnTo>
+                  <a:pt x="945226" y="4396705"/>
+                </a:lnTo>
+                <a:close/>
+                <a:lnTo>
+                  <a:pt x="948503" y="4397109"/>
+                </a:lnTo>
+                <a:close/>
+                <a:lnTo>
+                  <a:pt x="951782" y="4397511"/>
+                </a:lnTo>
+                <a:close/>
+                <a:lnTo>
+                  <a:pt x="955061" y="4397910"/>
+                </a:lnTo>
+                <a:close/>
+                <a:lnTo>
+                  <a:pt x="958342" y="4398304"/>
+                </a:lnTo>
+                <a:close/>
+                <a:lnTo>
+                  <a:pt x="961625" y="4398694"/>
+                </a:lnTo>
+                <a:close/>
+                <a:lnTo>
+                  <a:pt x="964910" y="4399077"/>
+                </a:lnTo>
+                <a:close/>
+                <a:lnTo>
+                  <a:pt x="968196" y="4399452"/>
+                </a:lnTo>
+                <a:close/>
+                <a:lnTo>
+                  <a:pt x="971482" y="4399818"/>
+                </a:lnTo>
+                <a:close/>
+                <a:lnTo>
+                  <a:pt x="974769" y="4400174"/>
+                </a:lnTo>
+                <a:close/>
+                <a:lnTo>
+                  <a:pt x="978055" y="4400517"/>
+                </a:lnTo>
+                <a:close/>
+                <a:lnTo>
+                  <a:pt x="981339" y="4400847"/>
+                </a:lnTo>
+                <a:close/>
+                <a:lnTo>
+                  <a:pt x="984621" y="4401163"/>
+                </a:lnTo>
+                <a:close/>
+                <a:lnTo>
+                  <a:pt x="987901" y="4401462"/>
+                </a:lnTo>
+                <a:close/>
+                <a:lnTo>
+                  <a:pt x="991179" y="4401745"/>
+                </a:lnTo>
+                <a:close/>
+                <a:lnTo>
+                  <a:pt x="994457" y="4402011"/>
+                </a:lnTo>
+                <a:close/>
+                <a:lnTo>
+                  <a:pt x="997734" y="4402258"/>
+                </a:lnTo>
+                <a:close/>
+                <a:lnTo>
+                  <a:pt x="1001013" y="4402487"/>
+                </a:lnTo>
+                <a:close/>
+                <a:lnTo>
+                  <a:pt x="1004292" y="4402696"/>
+                </a:lnTo>
+                <a:close/>
+                <a:lnTo>
+                  <a:pt x="1007573" y="4402884"/>
+                </a:lnTo>
+                <a:close/>
+                <a:lnTo>
+                  <a:pt x="1010856" y="4403050"/>
+                </a:lnTo>
+                <a:close/>
+                <a:lnTo>
+                  <a:pt x="1014141" y="4403194"/>
+                </a:lnTo>
+                <a:close/>
+                <a:lnTo>
+                  <a:pt x="1017427" y="4403314"/>
+                </a:lnTo>
+                <a:close/>
+                <a:lnTo>
+                  <a:pt x="1020714" y="4403409"/>
+                </a:lnTo>
+                <a:close/>
+                <a:lnTo>
+                  <a:pt x="1024000" y="4403477"/>
+                </a:lnTo>
+                <a:close/>
+                <a:lnTo>
+                  <a:pt x="1027286" y="4403517"/>
+                </a:lnTo>
+                <a:close/>
+                <a:lnTo>
+                  <a:pt x="1030570" y="4403527"/>
+                </a:lnTo>
+                <a:close/>
+                <a:lnTo>
+                  <a:pt x="1033852" y="4403507"/>
+                </a:lnTo>
+                <a:close/>
+                <a:lnTo>
+                  <a:pt x="1037132" y="4403455"/>
+                </a:lnTo>
+                <a:close/>
+                <a:lnTo>
+                  <a:pt x="1040410" y="4403370"/>
+                </a:lnTo>
+                <a:close/>
+                <a:lnTo>
+                  <a:pt x="1043688" y="4403251"/>
+                </a:lnTo>
+                <a:close/>
+                <a:lnTo>
+                  <a:pt x="1046965" y="4403097"/>
+                </a:lnTo>
+                <a:close/>
+                <a:lnTo>
+                  <a:pt x="1050243" y="4402907"/>
+                </a:lnTo>
+                <a:close/>
+                <a:lnTo>
+                  <a:pt x="1053523" y="4402679"/>
+                </a:lnTo>
+                <a:close/>
+                <a:lnTo>
+                  <a:pt x="1056804" y="4402414"/>
+                </a:lnTo>
+                <a:close/>
+                <a:lnTo>
+                  <a:pt x="1060087" y="4402108"/>
+                </a:lnTo>
+                <a:close/>
+                <a:lnTo>
+                  <a:pt x="1063372" y="4401762"/>
+                </a:lnTo>
+                <a:close/>
+                <a:lnTo>
+                  <a:pt x="1066658" y="4401376"/>
+                </a:lnTo>
+                <a:close/>
+                <a:lnTo>
+                  <a:pt x="1069945" y="4400947"/>
+                </a:lnTo>
+                <a:close/>
+                <a:lnTo>
+                  <a:pt x="1073231" y="4400475"/>
+                </a:lnTo>
+                <a:close/>
+                <a:lnTo>
+                  <a:pt x="1076517" y="4399959"/>
+                </a:lnTo>
+                <a:close/>
+                <a:lnTo>
+                  <a:pt x="1079801" y="4399399"/>
+                </a:lnTo>
+                <a:close/>
+                <a:lnTo>
+                  <a:pt x="1083083" y="4398794"/>
+                </a:lnTo>
+                <a:close/>
+                <a:lnTo>
+                  <a:pt x="1086363" y="4398141"/>
+                </a:lnTo>
+                <a:close/>
+                <a:lnTo>
+                  <a:pt x="1089641" y="4397441"/>
+                </a:lnTo>
+                <a:close/>
+                <a:lnTo>
+                  <a:pt x="1092919" y="4396692"/>
+                </a:lnTo>
+                <a:close/>
+                <a:lnTo>
+                  <a:pt x="1096196" y="4395891"/>
+                </a:lnTo>
+                <a:close/>
+                <a:lnTo>
+                  <a:pt x="1099474" y="4395039"/>
+                </a:lnTo>
+                <a:close/>
+                <a:lnTo>
+                  <a:pt x="1102754" y="4394133"/>
+                </a:lnTo>
+                <a:close/>
+                <a:lnTo>
+                  <a:pt x="1106035" y="4393173"/>
+                </a:lnTo>
+                <a:close/>
+                <a:lnTo>
+                  <a:pt x="1109318" y="4392156"/>
+                </a:lnTo>
+                <a:close/>
+                <a:lnTo>
+                  <a:pt x="1112603" y="4391082"/>
+                </a:lnTo>
+                <a:close/>
+                <a:lnTo>
+                  <a:pt x="1115889" y="4389951"/>
+                </a:lnTo>
+                <a:close/>
+                <a:lnTo>
+                  <a:pt x="1119176" y="4388761"/>
+                </a:lnTo>
+                <a:close/>
+                <a:lnTo>
+                  <a:pt x="1122462" y="4387511"/>
+                </a:lnTo>
+                <a:close/>
+                <a:lnTo>
+                  <a:pt x="1125748" y="4386201"/>
+                </a:lnTo>
+                <a:close/>
+                <a:lnTo>
+                  <a:pt x="1129032" y="4384829"/>
+                </a:lnTo>
+                <a:close/>
+                <a:lnTo>
+                  <a:pt x="1132314" y="4383396"/>
+                </a:lnTo>
+                <a:close/>
+                <a:lnTo>
+                  <a:pt x="1135594" y="4381899"/>
+                </a:lnTo>
+                <a:close/>
+                <a:lnTo>
+                  <a:pt x="1138872" y="4380338"/>
+                </a:lnTo>
+                <a:close/>
+                <a:lnTo>
+                  <a:pt x="1142150" y="4378712"/>
+                </a:lnTo>
+                <a:close/>
+                <a:lnTo>
+                  <a:pt x="1145427" y="4377020"/>
+                </a:lnTo>
+                <a:close/>
+                <a:lnTo>
+                  <a:pt x="1148705" y="4375259"/>
+                </a:lnTo>
+                <a:close/>
+                <a:lnTo>
+                  <a:pt x="1151985" y="4373430"/>
+                </a:lnTo>
+                <a:close/>
+                <a:lnTo>
+                  <a:pt x="1155266" y="4371531"/>
+                </a:lnTo>
+                <a:close/>
+                <a:lnTo>
+                  <a:pt x="1158549" y="4369561"/>
+                </a:lnTo>
+                <a:close/>
+                <a:lnTo>
+                  <a:pt x="1161834" y="4367519"/>
+                </a:lnTo>
+                <a:close/>
+                <a:lnTo>
+                  <a:pt x="1165120" y="4365404"/>
+                </a:lnTo>
+                <a:close/>
+                <a:lnTo>
+                  <a:pt x="1168407" y="4363214"/>
+                </a:lnTo>
+                <a:close/>
+                <a:lnTo>
+                  <a:pt x="1171693" y="4360948"/>
+                </a:lnTo>
+                <a:close/>
+                <a:lnTo>
+                  <a:pt x="1174979" y="4358606"/>
+                </a:lnTo>
+                <a:close/>
+                <a:lnTo>
+                  <a:pt x="1178263" y="4356186"/>
+                </a:lnTo>
+                <a:close/>
+                <a:lnTo>
+                  <a:pt x="1181545" y="4353686"/>
+                </a:lnTo>
+                <a:close/>
+                <a:lnTo>
+                  <a:pt x="1184825" y="4351107"/>
+                </a:lnTo>
+                <a:close/>
+                <a:lnTo>
+                  <a:pt x="1188103" y="4348447"/>
+                </a:lnTo>
+                <a:close/>
+                <a:lnTo>
+                  <a:pt x="1191381" y="4345705"/>
+                </a:lnTo>
+                <a:close/>
+                <a:lnTo>
+                  <a:pt x="1194658" y="4342880"/>
+                </a:lnTo>
+                <a:close/>
+                <a:lnTo>
+                  <a:pt x="1197936" y="4339973"/>
+                </a:lnTo>
+                <a:close/>
+                <a:lnTo>
+                  <a:pt x="1201216" y="4336982"/>
+                </a:lnTo>
+                <a:close/>
+                <a:lnTo>
+                  <a:pt x="1204497" y="4333905"/>
+                </a:lnTo>
+                <a:close/>
+                <a:lnTo>
+                  <a:pt x="1207780" y="4330743"/>
+                </a:lnTo>
+                <a:close/>
+                <a:lnTo>
+                  <a:pt x="1211065" y="4327494"/>
+                </a:lnTo>
+                <a:close/>
+                <a:lnTo>
+                  <a:pt x="1214352" y="4324156"/>
+                </a:lnTo>
+                <a:close/>
+                <a:lnTo>
+                  <a:pt x="1217638" y="4320728"/>
+                </a:lnTo>
+                <a:close/>
+                <a:lnTo>
+                  <a:pt x="1220925" y="4317208"/>
+                </a:lnTo>
+                <a:close/>
+                <a:lnTo>
+                  <a:pt x="1224210" y="4313594"/>
+                </a:lnTo>
+                <a:close/>
+                <a:lnTo>
+                  <a:pt x="1227494" y="4309885"/>
+                </a:lnTo>
+                <a:close/>
+                <a:lnTo>
+                  <a:pt x="1230776" y="4306080"/>
+                </a:lnTo>
+                <a:close/>
+                <a:lnTo>
+                  <a:pt x="1234056" y="4302178"/>
+                </a:lnTo>
+                <a:close/>
+                <a:lnTo>
+                  <a:pt x="1237334" y="4298179"/>
+                </a:lnTo>
+                <a:close/>
+                <a:lnTo>
+                  <a:pt x="1240612" y="4294085"/>
+                </a:lnTo>
+                <a:close/>
+                <a:lnTo>
+                  <a:pt x="1243889" y="4289895"/>
+                </a:lnTo>
+                <a:close/>
+                <a:lnTo>
+                  <a:pt x="1247167" y="4285611"/>
+                </a:lnTo>
+                <a:close/>
+                <a:lnTo>
+                  <a:pt x="1250447" y="4281232"/>
+                </a:lnTo>
+                <a:close/>
+                <a:lnTo>
+                  <a:pt x="1253728" y="4276759"/>
+                </a:lnTo>
+                <a:close/>
+                <a:lnTo>
+                  <a:pt x="1257011" y="4272193"/>
+                </a:lnTo>
+                <a:close/>
+                <a:lnTo>
+                  <a:pt x="1260297" y="4267532"/>
+                </a:lnTo>
+                <a:close/>
+                <a:lnTo>
+                  <a:pt x="1263583" y="4262775"/>
+                </a:lnTo>
+                <a:close/>
+                <a:lnTo>
+                  <a:pt x="1266869" y="4257922"/>
+                </a:lnTo>
+                <a:close/>
+                <a:lnTo>
+                  <a:pt x="1270156" y="4252970"/>
+                </a:lnTo>
+                <a:close/>
+                <a:lnTo>
+                  <a:pt x="1273441" y="4247919"/>
+                </a:lnTo>
+                <a:close/>
+                <a:lnTo>
+                  <a:pt x="1276725" y="4242768"/>
+                </a:lnTo>
+                <a:close/>
+                <a:lnTo>
+                  <a:pt x="1280007" y="4237515"/>
+                </a:lnTo>
+                <a:close/>
+                <a:lnTo>
+                  <a:pt x="1283287" y="4232160"/>
+                </a:lnTo>
+                <a:close/>
+                <a:lnTo>
+                  <a:pt x="1286565" y="4226701"/>
+                </a:lnTo>
+                <a:close/>
+                <a:lnTo>
+                  <a:pt x="1289843" y="4221137"/>
+                </a:lnTo>
+                <a:close/>
+                <a:lnTo>
+                  <a:pt x="1293120" y="4215467"/>
+                </a:lnTo>
+                <a:close/>
+                <a:lnTo>
+                  <a:pt x="1296398" y="4209689"/>
+                </a:lnTo>
+                <a:close/>
+                <a:lnTo>
+                  <a:pt x="1299678" y="4203802"/>
+                </a:lnTo>
+                <a:close/>
+                <a:lnTo>
+                  <a:pt x="1302959" y="4197805"/>
+                </a:lnTo>
+                <a:close/>
+                <a:lnTo>
+                  <a:pt x="1306243" y="4191697"/>
+                </a:lnTo>
+                <a:close/>
+                <a:lnTo>
+                  <a:pt x="1309528" y="4185477"/>
+                </a:lnTo>
+                <a:close/>
+                <a:lnTo>
+                  <a:pt x="1312814" y="4179143"/>
+                </a:lnTo>
+                <a:close/>
+                <a:lnTo>
+                  <a:pt x="1316101" y="4172694"/>
+                </a:lnTo>
+                <a:close/>
+                <a:lnTo>
+                  <a:pt x="1319387" y="4166130"/>
+                </a:lnTo>
+                <a:close/>
+                <a:lnTo>
+                  <a:pt x="1322672" y="4159449"/>
+                </a:lnTo>
+                <a:close/>
+                <a:lnTo>
+                  <a:pt x="1325956" y="4152651"/>
+                </a:lnTo>
+                <a:close/>
+                <a:lnTo>
+                  <a:pt x="1329238" y="4145733"/>
+                </a:lnTo>
+                <a:close/>
+                <a:lnTo>
+                  <a:pt x="1332518" y="4138696"/>
+                </a:lnTo>
+                <a:close/>
+                <a:lnTo>
+                  <a:pt x="1335796" y="4131537"/>
+                </a:lnTo>
+                <a:close/>
+                <a:lnTo>
+                  <a:pt x="1339073" y="4124257"/>
+                </a:lnTo>
+                <a:close/>
+                <a:lnTo>
+                  <a:pt x="1342351" y="4116854"/>
+                </a:lnTo>
+                <a:close/>
+                <a:lnTo>
+                  <a:pt x="1345629" y="4109328"/>
+                </a:lnTo>
+                <a:close/>
+                <a:lnTo>
+                  <a:pt x="1348909" y="4101677"/>
+                </a:lnTo>
+                <a:close/>
+                <a:lnTo>
+                  <a:pt x="1352190" y="4093901"/>
+                </a:lnTo>
+                <a:close/>
+                <a:lnTo>
+                  <a:pt x="1355474" y="4085998"/>
+                </a:lnTo>
+                <a:close/>
+                <a:lnTo>
+                  <a:pt x="1358759" y="4077967"/>
+                </a:lnTo>
+                <a:close/>
+                <a:lnTo>
+                  <a:pt x="1362045" y="4069806"/>
+                </a:lnTo>
+                <a:close/>
+                <a:lnTo>
+                  <a:pt x="1365332" y="4061513"/>
+                </a:lnTo>
+                <a:close/>
+                <a:lnTo>
+                  <a:pt x="1368618" y="4053087"/>
+                </a:lnTo>
+                <a:close/>
+                <a:lnTo>
+                  <a:pt x="1371903" y="4044525"/>
+                </a:lnTo>
+                <a:close/>
+                <a:lnTo>
+                  <a:pt x="1375187" y="4035826"/>
+                </a:lnTo>
+                <a:close/>
+                <a:lnTo>
+                  <a:pt x="1378469" y="4026989"/>
+                </a:lnTo>
+                <a:close/>
+                <a:lnTo>
+                  <a:pt x="1381749" y="4018013"/>
+                </a:lnTo>
+                <a:close/>
+                <a:lnTo>
+                  <a:pt x="1385027" y="4008898"/>
+                </a:lnTo>
+                <a:close/>
+                <a:lnTo>
+                  <a:pt x="1388304" y="3999647"/>
+                </a:lnTo>
+                <a:close/>
+                <a:lnTo>
+                  <a:pt x="1391582" y="3990259"/>
+                </a:lnTo>
+                <a:close/>
+                <a:lnTo>
+                  <a:pt x="1394860" y="3980735"/>
+                </a:lnTo>
+                <a:close/>
+                <a:lnTo>
+                  <a:pt x="1398140" y="3971076"/>
+                </a:lnTo>
+                <a:close/>
+                <a:lnTo>
+                  <a:pt x="1401421" y="3961283"/>
+                </a:lnTo>
+                <a:close/>
+                <a:lnTo>
+                  <a:pt x="1404705" y="3951356"/>
+                </a:lnTo>
+                <a:close/>
+                <a:lnTo>
+                  <a:pt x="1407990" y="3941294"/>
+                </a:lnTo>
+                <a:close/>
+                <a:lnTo>
+                  <a:pt x="1411276" y="3931097"/>
+                </a:lnTo>
+                <a:close/>
+                <a:lnTo>
+                  <a:pt x="1414563" y="3920765"/>
+                </a:lnTo>
+                <a:close/>
+                <a:lnTo>
+                  <a:pt x="1417849" y="3910297"/>
+                </a:lnTo>
+                <a:close/>
+                <a:lnTo>
+                  <a:pt x="1421135" y="3899692"/>
+                </a:lnTo>
+                <a:close/>
+                <a:lnTo>
+                  <a:pt x="1424418" y="3888949"/>
+                </a:lnTo>
+                <a:close/>
+                <a:lnTo>
+                  <a:pt x="1427700" y="3878069"/>
+                </a:lnTo>
+                <a:close/>
+                <a:lnTo>
+                  <a:pt x="1430979" y="3867051"/>
+                </a:lnTo>
+                <a:close/>
+                <a:lnTo>
+                  <a:pt x="1434258" y="3855896"/>
+                </a:lnTo>
+                <a:close/>
+                <a:lnTo>
+                  <a:pt x="1437535" y="3844603"/>
+                </a:lnTo>
+                <a:close/>
+                <a:lnTo>
+                  <a:pt x="1440813" y="3833172"/>
+                </a:lnTo>
+                <a:close/>
+                <a:lnTo>
+                  <a:pt x="1444091" y="3821605"/>
+                </a:lnTo>
+                <a:close/>
+                <a:lnTo>
+                  <a:pt x="1447371" y="3809902"/>
+                </a:lnTo>
+                <a:close/>
+                <a:lnTo>
+                  <a:pt x="1450652" y="3798062"/>
+                </a:lnTo>
+                <a:close/>
+                <a:lnTo>
+                  <a:pt x="1453936" y="3786086"/>
+                </a:lnTo>
+                <a:close/>
+                <a:lnTo>
+                  <a:pt x="1457221" y="3773974"/>
+                </a:lnTo>
+                <a:close/>
+                <a:lnTo>
+                  <a:pt x="1460507" y="3761726"/>
+                </a:lnTo>
+                <a:close/>
+                <a:lnTo>
+                  <a:pt x="1463794" y="3749343"/>
+                </a:lnTo>
+                <a:close/>
+                <a:lnTo>
+                  <a:pt x="1467080" y="3736825"/>
+                </a:lnTo>
+                <a:close/>
+                <a:lnTo>
+                  <a:pt x="1470366" y="3724172"/>
+                </a:lnTo>
+                <a:close/>
+                <a:lnTo>
+                  <a:pt x="1473649" y="3711384"/>
+                </a:lnTo>
+                <a:close/>
+                <a:lnTo>
+                  <a:pt x="1476931" y="3698462"/>
+                </a:lnTo>
+                <a:close/>
+                <a:lnTo>
+                  <a:pt x="1480210" y="3685403"/>
+                </a:lnTo>
+                <a:close/>
+                <a:lnTo>
+                  <a:pt x="1483489" y="3672208"/>
+                </a:lnTo>
+                <a:close/>
+                <a:lnTo>
+                  <a:pt x="1486766" y="3658872"/>
+                </a:lnTo>
+                <a:close/>
+                <a:lnTo>
+                  <a:pt x="1490044" y="3645396"/>
+                </a:lnTo>
+                <a:close/>
+                <a:lnTo>
+                  <a:pt x="1493322" y="3631776"/>
+                </a:lnTo>
+                <a:close/>
+                <a:lnTo>
+                  <a:pt x="1496602" y="3618011"/>
+                </a:lnTo>
+                <a:close/>
+                <a:lnTo>
+                  <a:pt x="1499883" y="3604099"/>
+                </a:lnTo>
+                <a:close/>
+                <a:lnTo>
+                  <a:pt x="1503167" y="3590038"/>
+                </a:lnTo>
+                <a:close/>
+                <a:lnTo>
+                  <a:pt x="1506452" y="3575831"/>
+                </a:lnTo>
+                <a:close/>
+                <a:lnTo>
+                  <a:pt x="1509739" y="3561476"/>
+                </a:lnTo>
+                <a:close/>
+                <a:lnTo>
+                  <a:pt x="1513025" y="3546976"/>
+                </a:lnTo>
+                <a:close/>
+                <a:lnTo>
+                  <a:pt x="1516312" y="3532330"/>
+                </a:lnTo>
+                <a:close/>
+                <a:lnTo>
+                  <a:pt x="1519597" y="3517540"/>
+                </a:lnTo>
+                <a:close/>
+                <a:lnTo>
+                  <a:pt x="1522880" y="3502606"/>
+                </a:lnTo>
+                <a:close/>
+                <a:lnTo>
+                  <a:pt x="1526162" y="3487528"/>
+                </a:lnTo>
+                <a:close/>
+                <a:lnTo>
+                  <a:pt x="1529441" y="3472306"/>
+                </a:lnTo>
+                <a:close/>
+                <a:lnTo>
+                  <a:pt x="1532720" y="3456938"/>
+                </a:lnTo>
+                <a:close/>
+                <a:lnTo>
+                  <a:pt x="1535997" y="3441423"/>
+                </a:lnTo>
+                <a:close/>
+                <a:lnTo>
+                  <a:pt x="1539275" y="3425758"/>
+                </a:lnTo>
+                <a:close/>
+                <a:lnTo>
+                  <a:pt x="1542553" y="3409942"/>
+                </a:lnTo>
+                <a:close/>
+                <a:lnTo>
+                  <a:pt x="1545833" y="3393974"/>
+                </a:lnTo>
+                <a:close/>
+                <a:lnTo>
+                  <a:pt x="1549114" y="3377851"/>
+                </a:lnTo>
+                <a:close/>
+                <a:lnTo>
+                  <a:pt x="1552398" y="3361573"/>
+                </a:lnTo>
+                <a:close/>
+                <a:lnTo>
+                  <a:pt x="1555683" y="3345140"/>
+                </a:lnTo>
+                <a:close/>
+                <a:lnTo>
+                  <a:pt x="1558970" y="3328552"/>
+                </a:lnTo>
+                <a:close/>
+                <a:lnTo>
+                  <a:pt x="1562256" y="3311808"/>
+                </a:lnTo>
+                <a:close/>
+                <a:lnTo>
+                  <a:pt x="1565543" y="3294908"/>
+                </a:lnTo>
+                <a:close/>
+                <a:lnTo>
+                  <a:pt x="1568828" y="3277854"/>
+                </a:lnTo>
+                <a:close/>
+                <a:lnTo>
+                  <a:pt x="1572112" y="3260644"/>
+                </a:lnTo>
+                <a:close/>
+                <a:lnTo>
+                  <a:pt x="1575393" y="3243280"/>
+                </a:lnTo>
+                <a:close/>
+                <a:lnTo>
+                  <a:pt x="1578672" y="3225760"/>
+                </a:lnTo>
+                <a:close/>
+                <a:lnTo>
+                  <a:pt x="1581951" y="3208086"/>
+                </a:lnTo>
+                <a:close/>
+                <a:lnTo>
+                  <a:pt x="1585228" y="3190257"/>
+                </a:lnTo>
+                <a:close/>
+                <a:lnTo>
+                  <a:pt x="1588506" y="3172273"/>
+                </a:lnTo>
+                <a:close/>
+                <a:lnTo>
+                  <a:pt x="1591784" y="3154135"/>
+                </a:lnTo>
+                <a:close/>
+                <a:lnTo>
+                  <a:pt x="1595064" y="3135844"/>
+                </a:lnTo>
+                <a:close/>
+                <a:lnTo>
+                  <a:pt x="1598345" y="3117398"/>
+                </a:lnTo>
+                <a:close/>
+                <a:lnTo>
+                  <a:pt x="1601629" y="3098798"/>
+                </a:lnTo>
+                <a:close/>
+                <a:lnTo>
+                  <a:pt x="1604915" y="3080045"/>
+                </a:lnTo>
+                <a:close/>
+                <a:lnTo>
+                  <a:pt x="1608201" y="3061137"/>
+                </a:lnTo>
+                <a:close/>
+                <a:lnTo>
+                  <a:pt x="1611488" y="3042076"/>
+                </a:lnTo>
+                <a:close/>
+                <a:lnTo>
+                  <a:pt x="1614774" y="3022860"/>
+                </a:lnTo>
+                <a:close/>
+                <a:lnTo>
+                  <a:pt x="1618059" y="3003490"/>
+                </a:lnTo>
+                <a:close/>
+                <a:lnTo>
+                  <a:pt x="1621343" y="2983965"/>
+                </a:lnTo>
+                <a:close/>
+                <a:lnTo>
+                  <a:pt x="1624624" y="2964286"/>
+                </a:lnTo>
+                <a:close/>
+                <a:lnTo>
+                  <a:pt x="1627903" y="2944452"/>
+                </a:lnTo>
+                <a:close/>
+                <a:lnTo>
+                  <a:pt x="1631182" y="2924462"/>
+                </a:lnTo>
+                <a:close/>
+                <a:lnTo>
+                  <a:pt x="1634459" y="2904317"/>
+                </a:lnTo>
+                <a:close/>
+                <a:lnTo>
+                  <a:pt x="1637737" y="2884016"/>
+                </a:lnTo>
+                <a:close/>
+                <a:lnTo>
+                  <a:pt x="1641015" y="2863558"/>
+                </a:lnTo>
+                <a:close/>
+                <a:lnTo>
+                  <a:pt x="1644295" y="2842943"/>
+                </a:lnTo>
+                <a:close/>
+                <a:lnTo>
+                  <a:pt x="1647576" y="2822171"/>
+                </a:lnTo>
+                <a:close/>
+                <a:lnTo>
+                  <a:pt x="1650860" y="2801241"/>
+                </a:lnTo>
+                <a:close/>
+                <a:lnTo>
+                  <a:pt x="1654146" y="2780155"/>
+                </a:lnTo>
+                <a:close/>
+                <a:lnTo>
+                  <a:pt x="1657432" y="2758915"/>
+                </a:lnTo>
+                <a:close/>
+                <a:lnTo>
+                  <a:pt x="1660719" y="2737520"/>
+                </a:lnTo>
+                <a:close/>
+                <a:lnTo>
+                  <a:pt x="1664005" y="2715972"/>
+                </a:lnTo>
+                <a:close/>
+                <a:lnTo>
+                  <a:pt x="1667290" y="2694273"/>
+                </a:lnTo>
+                <a:close/>
+                <a:lnTo>
+                  <a:pt x="1670574" y="2672424"/>
+                </a:lnTo>
+                <a:close/>
+                <a:lnTo>
+                  <a:pt x="1673855" y="2650424"/>
+                </a:lnTo>
+                <a:close/>
+                <a:lnTo>
+                  <a:pt x="1677134" y="2628273"/>
+                </a:lnTo>
+                <a:close/>
+                <a:lnTo>
+                  <a:pt x="1680412" y="2605968"/>
+                </a:lnTo>
+                <a:close/>
+                <a:lnTo>
+                  <a:pt x="1683690" y="2583505"/>
+                </a:lnTo>
+                <a:close/>
+                <a:lnTo>
+                  <a:pt x="1686968" y="2560883"/>
+                </a:lnTo>
+                <a:close/>
+                <a:lnTo>
+                  <a:pt x="1690246" y="2538097"/>
+                </a:lnTo>
+                <a:close/>
+                <a:lnTo>
+                  <a:pt x="1693526" y="2515146"/>
+                </a:lnTo>
+                <a:close/>
+                <a:lnTo>
+                  <a:pt x="1696808" y="2492026"/>
+                </a:lnTo>
+                <a:close/>
+                <a:lnTo>
+                  <a:pt x="1700091" y="2468736"/>
+                </a:lnTo>
+                <a:close/>
+                <a:lnTo>
+                  <a:pt x="1703377" y="2445279"/>
+                </a:lnTo>
+                <a:close/>
+                <a:lnTo>
+                  <a:pt x="1706663" y="2421655"/>
+                </a:lnTo>
+                <a:close/>
+                <a:lnTo>
+                  <a:pt x="1709950" y="2397866"/>
+                </a:lnTo>
+                <a:close/>
+                <a:lnTo>
+                  <a:pt x="1713236" y="2373915"/>
+                </a:lnTo>
+                <a:close/>
+                <a:lnTo>
+                  <a:pt x="1716521" y="2349802"/>
+                </a:lnTo>
+                <a:close/>
+                <a:lnTo>
+                  <a:pt x="1719805" y="2325529"/>
+                </a:lnTo>
+                <a:close/>
+                <a:lnTo>
+                  <a:pt x="1723086" y="2301098"/>
+                </a:lnTo>
+                <a:close/>
+                <a:lnTo>
+                  <a:pt x="1726365" y="2276507"/>
+                </a:lnTo>
+                <a:close/>
+                <a:lnTo>
+                  <a:pt x="1729643" y="2251754"/>
+                </a:lnTo>
+                <a:close/>
+                <a:lnTo>
+                  <a:pt x="1732921" y="2226835"/>
+                </a:lnTo>
+                <a:close/>
+                <a:lnTo>
+                  <a:pt x="1736199" y="2201748"/>
+                </a:lnTo>
+                <a:close/>
+                <a:lnTo>
+                  <a:pt x="1739477" y="2176491"/>
+                </a:lnTo>
+                <a:close/>
+                <a:lnTo>
+                  <a:pt x="1742757" y="2151061"/>
+                </a:lnTo>
+                <a:close/>
+                <a:lnTo>
+                  <a:pt x="1746039" y="2125455"/>
+                </a:lnTo>
+                <a:close/>
+                <a:lnTo>
+                  <a:pt x="1749323" y="2099672"/>
+                </a:lnTo>
+                <a:close/>
+                <a:lnTo>
+                  <a:pt x="1752608" y="2073713"/>
+                </a:lnTo>
+                <a:close/>
+                <a:lnTo>
+                  <a:pt x="1755894" y="2047579"/>
+                </a:lnTo>
+                <a:close/>
+                <a:lnTo>
+                  <a:pt x="1759181" y="2021271"/>
+                </a:lnTo>
+                <a:close/>
+                <a:lnTo>
+                  <a:pt x="1762467" y="1994790"/>
+                </a:lnTo>
+                <a:close/>
+                <a:lnTo>
+                  <a:pt x="1765752" y="1968136"/>
+                </a:lnTo>
+                <a:close/>
+                <a:lnTo>
+                  <a:pt x="1769036" y="1941311"/>
+                </a:lnTo>
+                <a:close/>
+                <a:lnTo>
+                  <a:pt x="1772317" y="1914315"/>
+                </a:lnTo>
+                <a:close/>
+                <a:lnTo>
+                  <a:pt x="1775596" y="1887149"/>
+                </a:lnTo>
+                <a:close/>
+                <a:lnTo>
+                  <a:pt x="1778874" y="1859811"/>
+                </a:lnTo>
+                <a:close/>
+                <a:lnTo>
+                  <a:pt x="1782152" y="1832302"/>
+                </a:lnTo>
+                <a:close/>
+                <a:lnTo>
+                  <a:pt x="1785430" y="1804621"/>
+                </a:lnTo>
+                <a:close/>
+                <a:lnTo>
+                  <a:pt x="1788708" y="1776767"/>
+                </a:lnTo>
+                <a:close/>
+                <a:lnTo>
+                  <a:pt x="1791988" y="1748740"/>
+                </a:lnTo>
+                <a:close/>
+                <a:lnTo>
+                  <a:pt x="1795270" y="1720540"/>
+                </a:lnTo>
+                <a:close/>
+                <a:lnTo>
+                  <a:pt x="1798554" y="1692166"/>
+                </a:lnTo>
+                <a:close/>
+                <a:lnTo>
+                  <a:pt x="1801839" y="1663618"/>
+                </a:lnTo>
+                <a:close/>
+                <a:lnTo>
+                  <a:pt x="1805126" y="1634897"/>
+                </a:lnTo>
+                <a:close/>
+                <a:lnTo>
+                  <a:pt x="1808412" y="1606004"/>
+                </a:lnTo>
+                <a:close/>
+                <a:lnTo>
+                  <a:pt x="1811698" y="1576937"/>
+                </a:lnTo>
+                <a:close/>
+                <a:lnTo>
+                  <a:pt x="1814983" y="1547699"/>
+                </a:lnTo>
+                <a:close/>
+                <a:lnTo>
+                  <a:pt x="1818267" y="1518288"/>
+                </a:lnTo>
+                <a:close/>
+                <a:lnTo>
+                  <a:pt x="1821548" y="1488704"/>
+                </a:lnTo>
+                <a:close/>
+                <a:lnTo>
+                  <a:pt x="1824827" y="1458948"/>
+                </a:lnTo>
+                <a:close/>
+                <a:lnTo>
+                  <a:pt x="1828105" y="1429018"/>
+                </a:lnTo>
+                <a:close/>
+                <a:lnTo>
+                  <a:pt x="1831383" y="1398912"/>
+                </a:lnTo>
+                <a:close/>
+                <a:lnTo>
+                  <a:pt x="1834661" y="1368630"/>
+                </a:lnTo>
+                <a:close/>
+                <a:lnTo>
+                  <a:pt x="1837939" y="1338170"/>
+                </a:lnTo>
+                <a:close/>
+                <a:lnTo>
+                  <a:pt x="1841219" y="1307531"/>
+                </a:lnTo>
+                <a:close/>
+                <a:lnTo>
+                  <a:pt x="1844501" y="1276713"/>
+                </a:lnTo>
+                <a:close/>
+                <a:lnTo>
+                  <a:pt x="1847785" y="1245713"/>
+                </a:lnTo>
+                <a:close/>
+                <a:lnTo>
+                  <a:pt x="1851070" y="1214531"/>
+                </a:lnTo>
+                <a:close/>
+                <a:lnTo>
+                  <a:pt x="1854357" y="1183164"/>
+                </a:lnTo>
+                <a:close/>
+                <a:lnTo>
+                  <a:pt x="1857643" y="1151611"/>
+                </a:lnTo>
+                <a:close/>
+                <a:lnTo>
+                  <a:pt x="1860929" y="1119871"/>
+                </a:lnTo>
+                <a:close/>
+                <a:lnTo>
+                  <a:pt x="1864215" y="1087942"/>
+                </a:lnTo>
+                <a:close/>
+                <a:lnTo>
+                  <a:pt x="1867498" y="1055822"/>
+                </a:lnTo>
+                <a:close/>
+                <a:lnTo>
+                  <a:pt x="1870779" y="1023511"/>
+                </a:lnTo>
+                <a:close/>
+                <a:lnTo>
+                  <a:pt x="1874058" y="991007"/>
+                </a:lnTo>
+                <a:close/>
+                <a:lnTo>
+                  <a:pt x="1877337" y="958310"/>
+                </a:lnTo>
+                <a:close/>
+                <a:lnTo>
+                  <a:pt x="1880614" y="925419"/>
+                </a:lnTo>
+                <a:close/>
+                <a:lnTo>
+                  <a:pt x="1883892" y="892334"/>
+                </a:lnTo>
+                <a:close/>
+                <a:lnTo>
+                  <a:pt x="1887170" y="859054"/>
+                </a:lnTo>
+                <a:close/>
+                <a:lnTo>
+                  <a:pt x="1890450" y="825580"/>
+                </a:lnTo>
+                <a:close/>
+                <a:lnTo>
+                  <a:pt x="1893732" y="791909"/>
+                </a:lnTo>
+                <a:close/>
+                <a:lnTo>
+                  <a:pt x="1897015" y="758042"/>
+                </a:lnTo>
+                <a:close/>
+                <a:lnTo>
+                  <a:pt x="1900301" y="723976"/>
+                </a:lnTo>
+                <a:close/>
+                <a:lnTo>
+                  <a:pt x="1903587" y="689707"/>
+                </a:lnTo>
+                <a:close/>
+                <a:lnTo>
+                  <a:pt x="1906873" y="655235"/>
+                </a:lnTo>
+                <a:close/>
+                <a:lnTo>
+                  <a:pt x="1910160" y="620557"/>
+                </a:lnTo>
+                <a:close/>
+                <a:lnTo>
+                  <a:pt x="1913445" y="585670"/>
+                </a:lnTo>
+                <a:close/>
+                <a:lnTo>
+                  <a:pt x="1916729" y="550571"/>
+                </a:lnTo>
+                <a:close/>
+                <a:lnTo>
+                  <a:pt x="1920011" y="515261"/>
+                </a:lnTo>
+                <a:close/>
+                <a:lnTo>
+                  <a:pt x="1923292" y="479739"/>
+                </a:lnTo>
+                <a:close/>
+                <a:lnTo>
+                  <a:pt x="1926571" y="444009"/>
+                </a:lnTo>
+                <a:close/>
+                <a:lnTo>
+                  <a:pt x="1929849" y="408074"/>
+                </a:lnTo>
+                <a:close/>
+                <a:lnTo>
+                  <a:pt x="1933127" y="371936"/>
+                </a:lnTo>
+                <a:close/>
+                <a:lnTo>
+                  <a:pt x="1936405" y="335598"/>
+                </a:lnTo>
+                <a:close/>
+                <a:lnTo>
+                  <a:pt x="1939682" y="299063"/>
+                </a:lnTo>
+                <a:close/>
+                <a:lnTo>
+                  <a:pt x="1942961" y="262333"/>
+                </a:lnTo>
+                <a:close/>
+                <a:lnTo>
+                  <a:pt x="1946241" y="225411"/>
+                </a:lnTo>
+                <a:close/>
+                <a:lnTo>
+                  <a:pt x="1949522" y="188300"/>
+                </a:lnTo>
+                <a:close/>
+                <a:lnTo>
+                  <a:pt x="1952804" y="151003"/>
+                </a:lnTo>
+                <a:close/>
+                <a:lnTo>
+                  <a:pt x="1956089" y="113521"/>
+                </a:lnTo>
+                <a:close/>
+                <a:lnTo>
+                  <a:pt x="1959376" y="75858"/>
+                </a:lnTo>
+                <a:close/>
+                <a:lnTo>
+                  <a:pt x="1962667" y="38017"/>
+                </a:lnTo>
+                <a:close/>
+                <a:lnTo>
+                  <a:pt x="1965960" y="0"/>
                 </a:lnTo>
                 <a:close/>
               </a:path>
@@ -5623,8 +5623,8 @@
         </p:nvCxnSpPr>
         <p:spPr>
           <a:xfrm flipV="1">
-            <a:off x="5486400.0" y="1200150.0"/>
-            <a:ext cx="0.0" cy="1371600.0"/>
+            <a:off x="5486400.0" y="971550.0"/>
+            <a:ext cx="0.0" cy="1600200.0"/>
           </a:xfrm>
           <a:prstGeom prst="line">
             <a:avLst/>
@@ -5659,7 +5659,7 @@
         </p:nvCxnSpPr>
         <p:spPr>
           <a:xfrm>
-            <a:off x="4572000.0" y="1200150.0"/>
+            <a:off x="4572000.0" y="971550.0"/>
             <a:ext cx="914400.0" cy="0.0"/>
           </a:xfrm>
           <a:prstGeom prst="line">
@@ -5695,7 +5695,7 @@
         </p:nvSpPr>
         <p:spPr>
           <a:xfrm>
-            <a:off x="5397500" y="1111250"/>
+            <a:off x="5397500" y="882650"/>
             <a:ext cx="177800" cy="177800"/>
           </a:xfrm>
           <a:prstGeom prst="ellipse">
@@ -5740,8 +5740,8 @@
         </p:nvCxnSpPr>
         <p:spPr>
           <a:xfrm>
-            <a:off x="5198364.0" y="2571750.0"/>
-            <a:ext cx="205740.0" cy="0.0"/>
+            <a:off x="5029200.0" y="2480310.0"/>
+            <a:ext cx="365760.0" cy="0.0"/>
           </a:xfrm>
           <a:prstGeom prst="line">
             <a:avLst/>
@@ -5775,8 +5775,8 @@
         </p:nvCxnSpPr>
         <p:spPr>
           <a:xfrm flipH="1">
-            <a:off x="5564124.0" y="2571750.0"/>
-            <a:ext cx="228600.0" cy="0.0"/>
+            <a:off x="5577840.0" y="2480310.0"/>
+            <a:ext cx="365760.0" cy="0.0"/>
           </a:xfrm>
           <a:prstGeom prst="line">
             <a:avLst/>
@@ -5802,15 +5802,85 @@
           </a:fontRef>
         </p:style>
       </p:cxnSp>
-      <p:sp>
-        <p:nvSpPr>
-          <p:cNvPr id="10" name="TextBox 9"/>
+      <p:cxnSp>
+        <p:nvCxnSpPr>
+          <p:cNvPr id="10" name="Connector 9"/>
+          <p:cNvCxnSpPr/>
+          <p:nvPr/>
+        </p:nvCxnSpPr>
+        <p:spPr>
+          <a:xfrm flipV="1">
+            <a:off x="5326380.0" y="1186434.0"/>
+            <a:ext cx="91440.0" cy="370332.0"/>
+          </a:xfrm>
+          <a:prstGeom prst="line">
+            <a:avLst/>
+          </a:prstGeom>
+          <a:ln w="15240">
+            <a:solidFill>
+              <a:srgbClr val="FFFFFF"/>
+            </a:solidFill>
+          </a:ln>
+        </p:spPr>
+        <p:style>
+          <a:lnRef idx="2">
+            <a:schemeClr val="accent1"/>
+          </a:lnRef>
+          <a:fillRef idx="0">
+            <a:schemeClr val="accent1"/>
+          </a:fillRef>
+          <a:effectRef idx="1">
+            <a:schemeClr val="accent1"/>
+          </a:effectRef>
+          <a:fontRef idx="minor">
+            <a:schemeClr val="tx1"/>
+          </a:fontRef>
+        </p:style>
+      </p:cxnSp>
+      <p:cxnSp>
+        <p:nvCxnSpPr>
+          <p:cNvPr id="11" name="Connector 10"/>
+          <p:cNvCxnSpPr/>
+          <p:nvPr/>
+        </p:nvCxnSpPr>
+        <p:spPr>
+          <a:xfrm flipH="1">
+            <a:off x="5500116.0" y="537210.0"/>
+            <a:ext cx="54864.0" cy="365760.0"/>
+          </a:xfrm>
+          <a:prstGeom prst="line">
+            <a:avLst/>
+          </a:prstGeom>
+          <a:ln w="15240">
+            <a:solidFill>
+              <a:srgbClr val="FFFFFF"/>
+            </a:solidFill>
+          </a:ln>
+        </p:spPr>
+        <p:style>
+          <a:lnRef idx="2">
+            <a:schemeClr val="accent1"/>
+          </a:lnRef>
+          <a:fillRef idx="0">
+            <a:schemeClr val="accent1"/>
+          </a:fillRef>
+          <a:effectRef idx="1">
+            <a:schemeClr val="accent1"/>
+          </a:effectRef>
+          <a:fontRef idx="minor">
+            <a:schemeClr val="tx1"/>
+          </a:fontRef>
+        </p:style>
+      </p:cxnSp>
+      <p:sp>
+        <p:nvSpPr>
+          <p:cNvPr id="12" name="TextBox 11"/>
           <p:cNvSpPr txBox="1"/>
           <p:nvPr/>
         </p:nvSpPr>
         <p:spPr>
           <a:xfrm>
-            <a:off x="4775200" y="334010"/>
+            <a:off x="4775200" y="-31750"/>
             <a:ext cx="1524000" cy="508000"/>
           </a:xfrm>
           <a:prstGeom prst="rect">
@@ -5840,13 +5910,13 @@
       </p:sp>
       <p:sp>
         <p:nvSpPr>
-          <p:cNvPr id="11" name="TextBox 10"/>
+          <p:cNvPr id="13" name="TextBox 12"/>
           <p:cNvSpPr txBox="1"/>
           <p:nvPr/>
         </p:nvSpPr>
         <p:spPr>
           <a:xfrm>
-            <a:off x="4135120" y="882650"/>
+            <a:off x="4135120" y="654050"/>
             <a:ext cx="1524000" cy="508000"/>
           </a:xfrm>
           <a:prstGeom prst="rect">
@@ -5876,7 +5946,7 @@
       </p:sp>
       <p:sp>
         <p:nvSpPr>
-          <p:cNvPr id="12" name="TextBox 11"/>
+          <p:cNvPr id="14" name="TextBox 13"/>
           <p:cNvSpPr txBox="1"/>
           <p:nvPr/>
         </p:nvSpPr>
@@ -5912,13 +5982,13 @@
       </p:sp>
       <p:sp>
         <p:nvSpPr>
-          <p:cNvPr id="13" name="TextBox 12"/>
+          <p:cNvPr id="15" name="TextBox 14"/>
           <p:cNvSpPr txBox="1"/>
           <p:nvPr/>
         </p:nvSpPr>
         <p:spPr>
           <a:xfrm>
-            <a:off x="4180840" y="2437130"/>
+            <a:off x="4135120" y="2437130"/>
             <a:ext cx="1524000" cy="508000"/>
           </a:xfrm>
           <a:prstGeom prst="rect">

--- a/output/1.pptx
+++ b/output/1.pptx
@@ -3104,8 +3104,8 @@
         </p:nvCxnSpPr>
         <p:spPr>
           <a:xfrm>
-            <a:off x="2286000.0" y="2571750.0"/>
-            <a:ext cx="4572000.0" cy="0.0"/>
+            <a:off x="3657600.0" y="2571750.0"/>
+            <a:ext cx="2743200.0" cy="0.0"/>
           </a:xfrm>
           <a:prstGeom prst="line">
             <a:avLst/>
@@ -3139,8 +3139,8 @@
         </p:nvCxnSpPr>
         <p:spPr>
           <a:xfrm flipV="1">
-            <a:off x="4572000.0" y="285750.0"/>
-            <a:ext cx="0.0" cy="4572000.0"/>
+            <a:off x="4572000.0" y="-171450.0"/>
+            <a:ext cx="0.0" cy="4114800.0"/>
           </a:xfrm>
           <a:prstGeom prst="line">
             <a:avLst/>
@@ -3174,8 +3174,8 @@
         </p:nvSpPr>
         <p:spPr>
           <a:xfrm>
-            <a:off x="3749040" y="-1681627"/>
-            <a:ext cx="1965960" cy="5576285"/>
+            <a:off x="3886200" y="57150"/>
+            <a:ext cx="2318811" cy="3657600"/>
           </a:xfrm>
           <a:custGeom>
             <a:avLst/>
@@ -3184,2404 +3184,2404 @@
             <a:cxnLst/>
             <a:rect l="l" t="t" r="r" b="b"/>
             <a:pathLst>
-              <a:path w="1965960" h="5576285">
+              <a:path w="2318811" h="3657600">
                 <a:moveTo>
-                  <a:pt x="0" y="5576285"/>
+                  <a:pt x="0" y="3657600"/>
                 </a:moveTo>
                 <a:lnTo>
-                  <a:pt x="3293" y="5567854"/>
-                </a:lnTo>
-                <a:close/>
-                <a:lnTo>
-                  <a:pt x="6584" y="5559444"/>
-                </a:lnTo>
-                <a:close/>
-                <a:lnTo>
-                  <a:pt x="9871" y="5551057"/>
-                </a:lnTo>
-                <a:close/>
-                <a:lnTo>
-                  <a:pt x="13156" y="5542692"/>
-                </a:lnTo>
-                <a:close/>
-                <a:lnTo>
-                  <a:pt x="16438" y="5534349"/>
-                </a:lnTo>
-                <a:close/>
-                <a:lnTo>
-                  <a:pt x="19719" y="5526029"/>
-                </a:lnTo>
-                <a:close/>
-                <a:lnTo>
-                  <a:pt x="22999" y="5517731"/>
-                </a:lnTo>
-                <a:close/>
-                <a:lnTo>
-                  <a:pt x="26278" y="5509457"/>
-                </a:lnTo>
-                <a:close/>
-                <a:lnTo>
-                  <a:pt x="29555" y="5501205"/>
-                </a:lnTo>
-                <a:close/>
-                <a:lnTo>
-                  <a:pt x="32833" y="5492976"/>
-                </a:lnTo>
-                <a:close/>
-                <a:lnTo>
-                  <a:pt x="36111" y="5484770"/>
-                </a:lnTo>
-                <a:close/>
-                <a:lnTo>
-                  <a:pt x="39389" y="5476588"/>
-                </a:lnTo>
-                <a:close/>
-                <a:lnTo>
-                  <a:pt x="42668" y="5468429"/>
-                </a:lnTo>
-                <a:close/>
-                <a:lnTo>
-                  <a:pt x="45949" y="5460293"/>
-                </a:lnTo>
-                <a:close/>
-                <a:lnTo>
-                  <a:pt x="49231" y="5452181"/>
-                </a:lnTo>
-                <a:close/>
-                <a:lnTo>
-                  <a:pt x="52515" y="5444093"/>
-                </a:lnTo>
-                <a:close/>
-                <a:lnTo>
-                  <a:pt x="55800" y="5436029"/>
-                </a:lnTo>
-                <a:close/>
-                <a:lnTo>
-                  <a:pt x="59087" y="5427989"/>
-                </a:lnTo>
-                <a:close/>
-                <a:lnTo>
-                  <a:pt x="62373" y="5419972"/>
-                </a:lnTo>
-                <a:close/>
-                <a:lnTo>
-                  <a:pt x="65659" y="5411979"/>
-                </a:lnTo>
-                <a:close/>
-                <a:lnTo>
-                  <a:pt x="68945" y="5404011"/>
-                </a:lnTo>
-                <a:close/>
-                <a:lnTo>
-                  <a:pt x="72228" y="5396066"/>
-                </a:lnTo>
-                <a:close/>
-                <a:lnTo>
-                  <a:pt x="75510" y="5388145"/>
-                </a:lnTo>
-                <a:close/>
-                <a:lnTo>
-                  <a:pt x="78790" y="5380248"/>
-                </a:lnTo>
-                <a:close/>
-                <a:lnTo>
-                  <a:pt x="82068" y="5372376"/>
-                </a:lnTo>
-                <a:close/>
-                <a:lnTo>
-                  <a:pt x="85346" y="5364529"/>
-                </a:lnTo>
-                <a:close/>
-                <a:lnTo>
-                  <a:pt x="88623" y="5356708"/>
-                </a:lnTo>
-                <a:close/>
-                <a:lnTo>
-                  <a:pt x="91902" y="5348912"/>
-                </a:lnTo>
-                <a:close/>
-                <a:lnTo>
-                  <a:pt x="95181" y="5341143"/>
-                </a:lnTo>
-                <a:close/>
-                <a:lnTo>
-                  <a:pt x="98462" y="5333400"/>
-                </a:lnTo>
-                <a:close/>
-                <a:lnTo>
-                  <a:pt x="101745" y="5325684"/>
-                </a:lnTo>
-                <a:close/>
-                <a:lnTo>
-                  <a:pt x="105031" y="5317995"/>
-                </a:lnTo>
-                <a:close/>
-                <a:lnTo>
-                  <a:pt x="108317" y="5310332"/>
-                </a:lnTo>
-                <a:close/>
-                <a:lnTo>
-                  <a:pt x="111603" y="5302695"/>
-                </a:lnTo>
-                <a:close/>
-                <a:lnTo>
-                  <a:pt x="114890" y="5295084"/>
-                </a:lnTo>
-                <a:close/>
-                <a:lnTo>
-                  <a:pt x="118175" y="5287498"/>
-                </a:lnTo>
-                <a:close/>
-                <a:lnTo>
-                  <a:pt x="121459" y="5279937"/>
-                </a:lnTo>
-                <a:close/>
-                <a:lnTo>
-                  <a:pt x="124741" y="5272400"/>
-                </a:lnTo>
-                <a:close/>
-                <a:lnTo>
-                  <a:pt x="128021" y="5264888"/>
-                </a:lnTo>
-                <a:close/>
-                <a:lnTo>
-                  <a:pt x="131299" y="5257401"/>
-                </a:lnTo>
-                <a:close/>
-                <a:lnTo>
-                  <a:pt x="134577" y="5249939"/>
-                </a:lnTo>
-                <a:close/>
-                <a:lnTo>
-                  <a:pt x="137855" y="5242503"/>
-                </a:lnTo>
-                <a:close/>
-                <a:lnTo>
-                  <a:pt x="141133" y="5235093"/>
-                </a:lnTo>
-                <a:close/>
-                <a:lnTo>
-                  <a:pt x="144412" y="5227709"/>
-                </a:lnTo>
-                <a:close/>
-                <a:lnTo>
-                  <a:pt x="147693" y="5220353"/>
-                </a:lnTo>
-                <a:close/>
-                <a:lnTo>
-                  <a:pt x="150977" y="5213024"/>
-                </a:lnTo>
-                <a:close/>
-                <a:lnTo>
-                  <a:pt x="154262" y="5205722"/>
-                </a:lnTo>
-                <a:close/>
-                <a:lnTo>
-                  <a:pt x="157548" y="5198448"/>
-                </a:lnTo>
-                <a:close/>
-                <a:lnTo>
-                  <a:pt x="160834" y="5191201"/>
-                </a:lnTo>
-                <a:close/>
-                <a:lnTo>
-                  <a:pt x="164121" y="5183982"/>
-                </a:lnTo>
-                <a:close/>
-                <a:lnTo>
-                  <a:pt x="167406" y="5176790"/>
-                </a:lnTo>
-                <a:close/>
-                <a:lnTo>
-                  <a:pt x="170690" y="5169627"/>
-                </a:lnTo>
-                <a:close/>
-                <a:lnTo>
-                  <a:pt x="173972" y="5162491"/>
-                </a:lnTo>
-                <a:close/>
-                <a:lnTo>
-                  <a:pt x="177252" y="5155383"/>
-                </a:lnTo>
-                <a:close/>
-                <a:lnTo>
-                  <a:pt x="180530" y="5148303"/>
-                </a:lnTo>
-                <a:close/>
-                <a:lnTo>
-                  <a:pt x="183808" y="5141250"/>
-                </a:lnTo>
-                <a:close/>
-                <a:lnTo>
-                  <a:pt x="187086" y="5134226"/>
-                </a:lnTo>
-                <a:close/>
-                <a:lnTo>
-                  <a:pt x="190364" y="5127229"/>
-                </a:lnTo>
-                <a:close/>
-                <a:lnTo>
-                  <a:pt x="193643" y="5120259"/>
-                </a:lnTo>
-                <a:close/>
-                <a:lnTo>
-                  <a:pt x="196924" y="5113317"/>
-                </a:lnTo>
-                <a:close/>
-                <a:lnTo>
-                  <a:pt x="200208" y="5106403"/>
-                </a:lnTo>
-                <a:close/>
-                <a:lnTo>
-                  <a:pt x="203493" y="5099516"/>
-                </a:lnTo>
-                <a:close/>
-                <a:lnTo>
-                  <a:pt x="206779" y="5092657"/>
-                </a:lnTo>
-                <a:close/>
-                <a:lnTo>
-                  <a:pt x="210066" y="5085826"/>
-                </a:lnTo>
-                <a:close/>
-                <a:lnTo>
-                  <a:pt x="213352" y="5079023"/>
-                </a:lnTo>
-                <a:close/>
-                <a:lnTo>
-                  <a:pt x="216637" y="5072248"/>
-                </a:lnTo>
-                <a:close/>
-                <a:lnTo>
-                  <a:pt x="219921" y="5065502"/>
-                </a:lnTo>
-                <a:close/>
-                <a:lnTo>
-                  <a:pt x="223203" y="5058784"/>
-                </a:lnTo>
-                <a:close/>
-                <a:lnTo>
-                  <a:pt x="226483" y="5052094"/>
-                </a:lnTo>
-                <a:close/>
-                <a:lnTo>
-                  <a:pt x="229761" y="5045434"/>
-                </a:lnTo>
-                <a:close/>
-                <a:lnTo>
-                  <a:pt x="233039" y="5038802"/>
-                </a:lnTo>
-                <a:close/>
-                <a:lnTo>
-                  <a:pt x="236317" y="5032199"/>
-                </a:lnTo>
-                <a:close/>
-                <a:lnTo>
-                  <a:pt x="239595" y="5025626"/>
-                </a:lnTo>
-                <a:close/>
-                <a:lnTo>
-                  <a:pt x="242874" y="5019082"/>
-                </a:lnTo>
-                <a:close/>
-                <a:lnTo>
-                  <a:pt x="246155" y="5012568"/>
-                </a:lnTo>
-                <a:close/>
-                <a:lnTo>
-                  <a:pt x="249439" y="5006083"/>
-                </a:lnTo>
-                <a:close/>
-                <a:lnTo>
-                  <a:pt x="252724" y="4999628"/>
-                </a:lnTo>
-                <a:close/>
-                <a:lnTo>
-                  <a:pt x="256010" y="4993203"/>
-                </a:lnTo>
-                <a:close/>
-                <a:lnTo>
-                  <a:pt x="259297" y="4986806"/>
-                </a:lnTo>
-                <a:close/>
-                <a:lnTo>
-                  <a:pt x="262583" y="4980439"/>
-                </a:lnTo>
-                <a:close/>
-                <a:lnTo>
-                  <a:pt x="265869" y="4974101"/>
-                </a:lnTo>
-                <a:close/>
-                <a:lnTo>
-                  <a:pt x="269152" y="4967792"/>
-                </a:lnTo>
-                <a:close/>
-                <a:lnTo>
-                  <a:pt x="272434" y="4961511"/>
-                </a:lnTo>
-                <a:close/>
-                <a:lnTo>
-                  <a:pt x="275714" y="4955260"/>
-                </a:lnTo>
-                <a:close/>
-                <a:lnTo>
-                  <a:pt x="278992" y="4949037"/>
-                </a:lnTo>
-                <a:close/>
-                <a:lnTo>
-                  <a:pt x="282270" y="4942845"/>
-                </a:lnTo>
-                <a:close/>
-                <a:lnTo>
-                  <a:pt x="285548" y="4936683"/>
-                </a:lnTo>
-                <a:close/>
-                <a:lnTo>
-                  <a:pt x="288826" y="4930551"/>
-                </a:lnTo>
-                <a:close/>
-                <a:lnTo>
-                  <a:pt x="292105" y="4924450"/>
-                </a:lnTo>
-                <a:close/>
-                <a:lnTo>
-                  <a:pt x="295386" y="4918380"/>
-                </a:lnTo>
-                <a:close/>
-                <a:lnTo>
-                  <a:pt x="298670" y="4912342"/>
-                </a:lnTo>
-                <a:close/>
-                <a:lnTo>
-                  <a:pt x="301955" y="4906336"/>
-                </a:lnTo>
-                <a:close/>
-                <a:lnTo>
-                  <a:pt x="305241" y="4900361"/>
-                </a:lnTo>
-                <a:close/>
-                <a:lnTo>
-                  <a:pt x="308528" y="4894417"/>
-                </a:lnTo>
-                <a:close/>
-                <a:lnTo>
-                  <a:pt x="311814" y="4888504"/>
-                </a:lnTo>
-                <a:close/>
-                <a:lnTo>
-                  <a:pt x="315100" y="4882622"/>
-                </a:lnTo>
-                <a:close/>
-                <a:lnTo>
-                  <a:pt x="318384" y="4876771"/>
-                </a:lnTo>
-                <a:close/>
-                <a:lnTo>
-                  <a:pt x="321665" y="4870950"/>
-                </a:lnTo>
-                <a:close/>
-                <a:lnTo>
-                  <a:pt x="324945" y="4865160"/>
-                </a:lnTo>
-                <a:close/>
-                <a:lnTo>
-                  <a:pt x="328223" y="4859401"/>
-                </a:lnTo>
-                <a:close/>
-                <a:lnTo>
-                  <a:pt x="331501" y="4853673"/>
-                </a:lnTo>
-                <a:close/>
-                <a:lnTo>
-                  <a:pt x="334778" y="4847976"/>
-                </a:lnTo>
-                <a:close/>
-                <a:lnTo>
-                  <a:pt x="338057" y="4842311"/>
-                </a:lnTo>
-                <a:close/>
-                <a:lnTo>
-                  <a:pt x="341336" y="4836678"/>
-                </a:lnTo>
-                <a:close/>
-                <a:lnTo>
-                  <a:pt x="344617" y="4831077"/>
-                </a:lnTo>
-                <a:close/>
-                <a:lnTo>
-                  <a:pt x="347901" y="4825508"/>
-                </a:lnTo>
-                <a:close/>
-                <a:lnTo>
-                  <a:pt x="351186" y="4819972"/>
-                </a:lnTo>
-                <a:close/>
-                <a:lnTo>
-                  <a:pt x="354472" y="4814467"/>
-                </a:lnTo>
-                <a:close/>
-                <a:lnTo>
-                  <a:pt x="357759" y="4808994"/>
-                </a:lnTo>
-                <a:close/>
-                <a:lnTo>
-                  <a:pt x="361045" y="4803553"/>
-                </a:lnTo>
-                <a:close/>
-                <a:lnTo>
-                  <a:pt x="364331" y="4798143"/>
-                </a:lnTo>
-                <a:close/>
-                <a:lnTo>
-                  <a:pt x="367615" y="4792764"/>
-                </a:lnTo>
-                <a:close/>
-                <a:lnTo>
-                  <a:pt x="370896" y="4787417"/>
-                </a:lnTo>
-                <a:close/>
-                <a:lnTo>
-                  <a:pt x="374176" y="4782101"/>
-                </a:lnTo>
-                <a:close/>
-                <a:lnTo>
-                  <a:pt x="377454" y="4776816"/>
-                </a:lnTo>
-                <a:close/>
-                <a:lnTo>
-                  <a:pt x="380732" y="4771564"/>
-                </a:lnTo>
-                <a:close/>
-                <a:lnTo>
-                  <a:pt x="384009" y="4766345"/>
-                </a:lnTo>
-                <a:close/>
-                <a:lnTo>
-                  <a:pt x="387288" y="4761158"/>
-                </a:lnTo>
-                <a:close/>
-                <a:lnTo>
-                  <a:pt x="390567" y="4756006"/>
-                </a:lnTo>
-                <a:close/>
-                <a:lnTo>
-                  <a:pt x="393848" y="4750887"/>
-                </a:lnTo>
-                <a:close/>
-                <a:lnTo>
-                  <a:pt x="397132" y="4745802"/>
-                </a:lnTo>
-                <a:close/>
-                <a:lnTo>
-                  <a:pt x="400417" y="4740752"/>
-                </a:lnTo>
-                <a:close/>
-                <a:lnTo>
-                  <a:pt x="403704" y="4735735"/>
-                </a:lnTo>
-                <a:close/>
-                <a:lnTo>
-                  <a:pt x="406990" y="4730752"/>
-                </a:lnTo>
-                <a:close/>
-                <a:lnTo>
-                  <a:pt x="410277" y="4725801"/>
-                </a:lnTo>
-                <a:close/>
-                <a:lnTo>
-                  <a:pt x="413562" y="4720884"/>
-                </a:lnTo>
-                <a:close/>
-                <a:lnTo>
-                  <a:pt x="416846" y="4715999"/>
-                </a:lnTo>
-                <a:close/>
-                <a:lnTo>
-                  <a:pt x="420127" y="4711146"/>
-                </a:lnTo>
-                <a:close/>
-                <a:lnTo>
-                  <a:pt x="423407" y="4706325"/>
-                </a:lnTo>
-                <a:close/>
-                <a:lnTo>
-                  <a:pt x="426685" y="4701537"/>
-                </a:lnTo>
-                <a:close/>
-                <a:lnTo>
-                  <a:pt x="429963" y="4696781"/>
-                </a:lnTo>
-                <a:close/>
-                <a:lnTo>
-                  <a:pt x="433240" y="4692057"/>
-                </a:lnTo>
-                <a:close/>
-                <a:lnTo>
-                  <a:pt x="436519" y="4687367"/>
-                </a:lnTo>
-                <a:close/>
-                <a:lnTo>
-                  <a:pt x="439798" y="4682709"/>
-                </a:lnTo>
-                <a:close/>
-                <a:lnTo>
-                  <a:pt x="443080" y="4678084"/>
-                </a:lnTo>
-                <a:close/>
-                <a:lnTo>
-                  <a:pt x="446363" y="4673492"/>
-                </a:lnTo>
-                <a:close/>
-                <a:lnTo>
-                  <a:pt x="449648" y="4668934"/>
-                </a:lnTo>
-                <a:close/>
-                <a:lnTo>
-                  <a:pt x="452935" y="4664411"/>
-                </a:lnTo>
-                <a:close/>
-                <a:lnTo>
-                  <a:pt x="456221" y="4659921"/>
-                </a:lnTo>
-                <a:close/>
-                <a:lnTo>
-                  <a:pt x="459508" y="4655466"/>
-                </a:lnTo>
-                <a:close/>
-                <a:lnTo>
-                  <a:pt x="462793" y="4651046"/>
-                </a:lnTo>
-                <a:close/>
-                <a:lnTo>
-                  <a:pt x="466077" y="4646662"/>
-                </a:lnTo>
-                <a:close/>
-                <a:lnTo>
-                  <a:pt x="469358" y="4642314"/>
-                </a:lnTo>
-                <a:close/>
-                <a:lnTo>
-                  <a:pt x="472638" y="4638001"/>
-                </a:lnTo>
-                <a:close/>
-                <a:lnTo>
-                  <a:pt x="475916" y="4633724"/>
-                </a:lnTo>
-                <a:close/>
-                <a:lnTo>
-                  <a:pt x="479194" y="4629482"/>
-                </a:lnTo>
-                <a:close/>
-                <a:lnTo>
-                  <a:pt x="482471" y="4625275"/>
-                </a:lnTo>
-                <a:close/>
-                <a:lnTo>
-                  <a:pt x="485750" y="4621101"/>
-                </a:lnTo>
-                <a:close/>
-                <a:lnTo>
-                  <a:pt x="489029" y="4616962"/>
-                </a:lnTo>
-                <a:close/>
-                <a:lnTo>
-                  <a:pt x="492311" y="4612856"/>
-                </a:lnTo>
-                <a:close/>
-                <a:lnTo>
-                  <a:pt x="495594" y="4608783"/>
-                </a:lnTo>
-                <a:close/>
-                <a:lnTo>
-                  <a:pt x="498880" y="4604745"/>
-                </a:lnTo>
-                <a:close/>
-                <a:lnTo>
-                  <a:pt x="502166" y="4600740"/>
-                </a:lnTo>
-                <a:close/>
-                <a:lnTo>
-                  <a:pt x="505453" y="4596770"/>
-                </a:lnTo>
-                <a:close/>
-                <a:lnTo>
-                  <a:pt x="508739" y="4592836"/>
-                </a:lnTo>
-                <a:close/>
-                <a:lnTo>
-                  <a:pt x="512024" y="4588936"/>
-                </a:lnTo>
-                <a:close/>
-                <a:lnTo>
-                  <a:pt x="515308" y="4585073"/>
-                </a:lnTo>
-                <a:close/>
-                <a:lnTo>
-                  <a:pt x="518589" y="4581247"/>
-                </a:lnTo>
-                <a:close/>
-                <a:lnTo>
-                  <a:pt x="521869" y="4577456"/>
-                </a:lnTo>
-                <a:close/>
-                <a:lnTo>
-                  <a:pt x="525147" y="4573703"/>
-                </a:lnTo>
-                <a:close/>
-                <a:lnTo>
-                  <a:pt x="528425" y="4569985"/>
-                </a:lnTo>
-                <a:close/>
-                <a:lnTo>
-                  <a:pt x="531702" y="4566304"/>
-                </a:lnTo>
-                <a:close/>
-                <a:lnTo>
-                  <a:pt x="534981" y="4562658"/>
-                </a:lnTo>
-                <a:close/>
-                <a:lnTo>
-                  <a:pt x="538260" y="4559049"/>
-                </a:lnTo>
-                <a:close/>
-                <a:lnTo>
-                  <a:pt x="541542" y="4555476"/>
-                </a:lnTo>
-                <a:close/>
-                <a:lnTo>
-                  <a:pt x="544825" y="4551938"/>
-                </a:lnTo>
-                <a:close/>
-                <a:lnTo>
-                  <a:pt x="548111" y="4548437"/>
-                </a:lnTo>
-                <a:close/>
-                <a:lnTo>
-                  <a:pt x="551397" y="4544971"/>
-                </a:lnTo>
-                <a:close/>
-                <a:lnTo>
-                  <a:pt x="554684" y="4541540"/>
-                </a:lnTo>
-                <a:close/>
-                <a:lnTo>
-                  <a:pt x="557970" y="4538145"/>
-                </a:lnTo>
-                <a:close/>
-                <a:lnTo>
-                  <a:pt x="561255" y="4534786"/>
-                </a:lnTo>
-                <a:close/>
-                <a:lnTo>
-                  <a:pt x="564539" y="4531462"/>
-                </a:lnTo>
-                <a:close/>
-                <a:lnTo>
-                  <a:pt x="567820" y="4528174"/>
-                </a:lnTo>
-                <a:close/>
-                <a:lnTo>
-                  <a:pt x="571100" y="4524921"/>
-                </a:lnTo>
-                <a:close/>
-                <a:lnTo>
-                  <a:pt x="574378" y="4521704"/>
-                </a:lnTo>
-                <a:close/>
-                <a:lnTo>
-                  <a:pt x="577656" y="4518523"/>
-                </a:lnTo>
-                <a:close/>
-                <a:lnTo>
-                  <a:pt x="580933" y="4515379"/>
-                </a:lnTo>
-                <a:close/>
-                <a:lnTo>
-                  <a:pt x="584211" y="4512273"/>
-                </a:lnTo>
-                <a:close/>
-                <a:lnTo>
-                  <a:pt x="587491" y="4509203"/>
-                </a:lnTo>
-                <a:close/>
-                <a:lnTo>
-                  <a:pt x="590773" y="4506172"/>
-                </a:lnTo>
-                <a:close/>
-                <a:lnTo>
-                  <a:pt x="594057" y="4503178"/>
-                </a:lnTo>
-                <a:close/>
-                <a:lnTo>
-                  <a:pt x="597342" y="4500223"/>
-                </a:lnTo>
-                <a:close/>
-                <a:lnTo>
-                  <a:pt x="600628" y="4497305"/>
-                </a:lnTo>
-                <a:close/>
-                <a:lnTo>
-                  <a:pt x="603915" y="4494425"/>
-                </a:lnTo>
-                <a:close/>
-                <a:lnTo>
-                  <a:pt x="607201" y="4491583"/>
-                </a:lnTo>
-                <a:close/>
-                <a:lnTo>
-                  <a:pt x="610486" y="4488779"/>
-                </a:lnTo>
-                <a:close/>
-                <a:lnTo>
-                  <a:pt x="613770" y="4486012"/>
-                </a:lnTo>
-                <a:close/>
-                <a:lnTo>
-                  <a:pt x="617051" y="4483283"/>
-                </a:lnTo>
-                <a:close/>
-                <a:lnTo>
-                  <a:pt x="620331" y="4480591"/>
-                </a:lnTo>
-                <a:close/>
-                <a:lnTo>
-                  <a:pt x="623609" y="4477937"/>
-                </a:lnTo>
-                <a:close/>
-                <a:lnTo>
-                  <a:pt x="626887" y="4475320"/>
-                </a:lnTo>
-                <a:close/>
-                <a:lnTo>
-                  <a:pt x="630164" y="4472740"/>
-                </a:lnTo>
-                <a:close/>
-                <a:lnTo>
-                  <a:pt x="633442" y="4470197"/>
-                </a:lnTo>
-                <a:close/>
-                <a:lnTo>
-                  <a:pt x="636722" y="4467691"/>
-                </a:lnTo>
-                <a:close/>
-                <a:lnTo>
-                  <a:pt x="640004" y="4465222"/>
-                </a:lnTo>
-                <a:close/>
-                <a:lnTo>
-                  <a:pt x="643288" y="4462790"/>
-                </a:lnTo>
-                <a:close/>
-                <a:lnTo>
-                  <a:pt x="646573" y="4460396"/>
-                </a:lnTo>
-                <a:close/>
-                <a:lnTo>
-                  <a:pt x="649859" y="4458039"/>
-                </a:lnTo>
-                <a:close/>
-                <a:lnTo>
-                  <a:pt x="653146" y="4455721"/>
-                </a:lnTo>
-                <a:close/>
-                <a:lnTo>
-                  <a:pt x="656432" y="4453442"/>
-                </a:lnTo>
-                <a:close/>
-                <a:lnTo>
-                  <a:pt x="659717" y="4451201"/>
-                </a:lnTo>
-                <a:close/>
-                <a:lnTo>
-                  <a:pt x="663001" y="4449001"/>
-                </a:lnTo>
-                <a:close/>
-                <a:lnTo>
-                  <a:pt x="666282" y="4446841"/>
-                </a:lnTo>
-                <a:close/>
-                <a:lnTo>
-                  <a:pt x="669562" y="4444720"/>
-                </a:lnTo>
-                <a:close/>
-                <a:lnTo>
-                  <a:pt x="672840" y="4442639"/>
-                </a:lnTo>
-                <a:close/>
-                <a:lnTo>
-                  <a:pt x="676117" y="4440597"/>
-                </a:lnTo>
-                <a:close/>
-                <a:lnTo>
-                  <a:pt x="679395" y="4438594"/>
-                </a:lnTo>
-                <a:close/>
-                <a:lnTo>
-                  <a:pt x="682673" y="4436628"/>
-                </a:lnTo>
-                <a:close/>
-                <a:lnTo>
-                  <a:pt x="685953" y="4434701"/>
-                </a:lnTo>
-                <a:close/>
-                <a:lnTo>
-                  <a:pt x="689235" y="4432811"/>
-                </a:lnTo>
-                <a:close/>
-                <a:lnTo>
-                  <a:pt x="692519" y="4430958"/>
-                </a:lnTo>
-                <a:close/>
-                <a:lnTo>
-                  <a:pt x="695804" y="4429143"/>
-                </a:lnTo>
-                <a:close/>
-                <a:lnTo>
-                  <a:pt x="699091" y="4427366"/>
-                </a:lnTo>
-                <a:close/>
-                <a:lnTo>
-                  <a:pt x="702377" y="4425629"/>
-                </a:lnTo>
-                <a:close/>
-                <a:lnTo>
-                  <a:pt x="705663" y="4423931"/>
-                </a:lnTo>
-                <a:close/>
-                <a:lnTo>
-                  <a:pt x="708949" y="4422274"/>
-                </a:lnTo>
-                <a:close/>
-                <a:lnTo>
-                  <a:pt x="712232" y="4420657"/>
-                </a:lnTo>
-                <a:close/>
-                <a:lnTo>
-                  <a:pt x="715513" y="4419082"/>
-                </a:lnTo>
-                <a:close/>
-                <a:lnTo>
-                  <a:pt x="718793" y="4417547"/>
-                </a:lnTo>
-                <a:close/>
-                <a:lnTo>
-                  <a:pt x="722071" y="4416053"/>
-                </a:lnTo>
-                <a:close/>
-                <a:lnTo>
-                  <a:pt x="725348" y="4414599"/>
-                </a:lnTo>
-                <a:close/>
-                <a:lnTo>
-                  <a:pt x="728626" y="4413184"/>
-                </a:lnTo>
-                <a:close/>
-                <a:lnTo>
-                  <a:pt x="731904" y="4411806"/>
-                </a:lnTo>
-                <a:close/>
-                <a:lnTo>
-                  <a:pt x="735184" y="4410467"/>
-                </a:lnTo>
-                <a:close/>
-                <a:lnTo>
-                  <a:pt x="738466" y="4409164"/>
-                </a:lnTo>
-                <a:close/>
-                <a:lnTo>
-                  <a:pt x="741750" y="4407898"/>
-                </a:lnTo>
-                <a:close/>
-                <a:lnTo>
-                  <a:pt x="745035" y="4406669"/>
-                </a:lnTo>
-                <a:close/>
-                <a:lnTo>
-                  <a:pt x="748322" y="4405479"/>
-                </a:lnTo>
-                <a:close/>
-                <a:lnTo>
-                  <a:pt x="751608" y="4404328"/>
-                </a:lnTo>
-                <a:close/>
-                <a:lnTo>
-                  <a:pt x="754894" y="4403217"/>
-                </a:lnTo>
-                <a:close/>
-                <a:lnTo>
-                  <a:pt x="758180" y="4402148"/>
-                </a:lnTo>
-                <a:close/>
-                <a:lnTo>
-                  <a:pt x="761463" y="4401120"/>
-                </a:lnTo>
-                <a:close/>
-                <a:lnTo>
-                  <a:pt x="764744" y="4400134"/>
-                </a:lnTo>
-                <a:close/>
-                <a:lnTo>
-                  <a:pt x="768024" y="4399191"/>
-                </a:lnTo>
-                <a:close/>
-                <a:lnTo>
-                  <a:pt x="771302" y="4398289"/>
-                </a:lnTo>
-                <a:close/>
-                <a:lnTo>
-                  <a:pt x="774580" y="4397428"/>
-                </a:lnTo>
-                <a:close/>
-                <a:lnTo>
-                  <a:pt x="777857" y="4396607"/>
-                </a:lnTo>
-                <a:close/>
-                <a:lnTo>
-                  <a:pt x="781136" y="4395824"/>
-                </a:lnTo>
-                <a:close/>
-                <a:lnTo>
-                  <a:pt x="784415" y="4395080"/>
-                </a:lnTo>
-                <a:close/>
-                <a:lnTo>
-                  <a:pt x="787697" y="4394374"/>
-                </a:lnTo>
-                <a:close/>
-                <a:lnTo>
-                  <a:pt x="790980" y="4393705"/>
-                </a:lnTo>
-                <a:close/>
-                <a:lnTo>
-                  <a:pt x="794265" y="4393074"/>
-                </a:lnTo>
-                <a:close/>
-                <a:lnTo>
-                  <a:pt x="797551" y="4392483"/>
-                </a:lnTo>
-                <a:close/>
-                <a:lnTo>
-                  <a:pt x="800838" y="4391932"/>
-                </a:lnTo>
-                <a:close/>
-                <a:lnTo>
-                  <a:pt x="804124" y="4391421"/>
-                </a:lnTo>
-                <a:close/>
-                <a:lnTo>
-                  <a:pt x="807410" y="4390953"/>
-                </a:lnTo>
-                <a:close/>
-                <a:lnTo>
-                  <a:pt x="810694" y="4390527"/>
-                </a:lnTo>
-                <a:close/>
-                <a:lnTo>
-                  <a:pt x="813977" y="4390144"/>
-                </a:lnTo>
-                <a:close/>
-                <a:lnTo>
-                  <a:pt x="817258" y="4389803"/>
-                </a:lnTo>
-                <a:close/>
-                <a:lnTo>
-                  <a:pt x="820538" y="4389504"/>
-                </a:lnTo>
-                <a:close/>
-                <a:lnTo>
-                  <a:pt x="823817" y="4389243"/>
-                </a:lnTo>
-                <a:close/>
-                <a:lnTo>
-                  <a:pt x="827095" y="4389022"/>
-                </a:lnTo>
-                <a:close/>
-                <a:lnTo>
-                  <a:pt x="830372" y="4388837"/>
-                </a:lnTo>
-                <a:close/>
-                <a:lnTo>
-                  <a:pt x="833649" y="4388687"/>
-                </a:lnTo>
-                <a:close/>
-                <a:lnTo>
-                  <a:pt x="836926" y="4388572"/>
-                </a:lnTo>
-                <a:close/>
-                <a:lnTo>
-                  <a:pt x="840203" y="4388489"/>
-                </a:lnTo>
-                <a:close/>
-                <a:lnTo>
-                  <a:pt x="843480" y="4388438"/>
-                </a:lnTo>
-                <a:close/>
-                <a:lnTo>
-                  <a:pt x="846758" y="4388417"/>
-                </a:lnTo>
-                <a:close/>
-                <a:lnTo>
-                  <a:pt x="850036" y="4388425"/>
-                </a:lnTo>
-                <a:close/>
-                <a:lnTo>
-                  <a:pt x="853316" y="4388461"/>
-                </a:lnTo>
-                <a:close/>
-                <a:lnTo>
-                  <a:pt x="856597" y="4388523"/>
-                </a:lnTo>
-                <a:close/>
-                <a:lnTo>
-                  <a:pt x="859879" y="4388611"/>
-                </a:lnTo>
-                <a:close/>
-                <a:lnTo>
-                  <a:pt x="863164" y="4388722"/>
-                </a:lnTo>
-                <a:close/>
-                <a:lnTo>
-                  <a:pt x="866449" y="4388856"/>
-                </a:lnTo>
-                <a:close/>
-                <a:lnTo>
-                  <a:pt x="869735" y="4389012"/>
-                </a:lnTo>
-                <a:close/>
-                <a:lnTo>
-                  <a:pt x="873022" y="4389191"/>
-                </a:lnTo>
-                <a:close/>
-                <a:lnTo>
-                  <a:pt x="876308" y="4389390"/>
-                </a:lnTo>
-                <a:close/>
-                <a:lnTo>
-                  <a:pt x="879593" y="4389609"/>
-                </a:lnTo>
-                <a:close/>
-                <a:lnTo>
-                  <a:pt x="882877" y="4389849"/>
-                </a:lnTo>
-                <a:close/>
-                <a:lnTo>
-                  <a:pt x="886159" y="4390107"/>
-                </a:lnTo>
-                <a:close/>
-                <a:lnTo>
-                  <a:pt x="889438" y="4390383"/>
-                </a:lnTo>
-                <a:close/>
-                <a:lnTo>
-                  <a:pt x="892717" y="4390676"/>
-                </a:lnTo>
-                <a:close/>
-                <a:lnTo>
-                  <a:pt x="895995" y="4390985"/>
-                </a:lnTo>
-                <a:close/>
-                <a:lnTo>
-                  <a:pt x="899272" y="4391308"/>
-                </a:lnTo>
-                <a:close/>
-                <a:lnTo>
-                  <a:pt x="902550" y="4391644"/>
-                </a:lnTo>
-                <a:close/>
-                <a:lnTo>
-                  <a:pt x="905830" y="4391993"/>
-                </a:lnTo>
-                <a:close/>
-                <a:lnTo>
-                  <a:pt x="909111" y="4392352"/>
-                </a:lnTo>
-                <a:close/>
-                <a:lnTo>
-                  <a:pt x="912394" y="4392721"/>
-                </a:lnTo>
-                <a:close/>
-                <a:lnTo>
-                  <a:pt x="915679" y="4393099"/>
-                </a:lnTo>
-                <a:close/>
-                <a:lnTo>
-                  <a:pt x="918965" y="4393485"/>
-                </a:lnTo>
-                <a:close/>
-                <a:lnTo>
-                  <a:pt x="922251" y="4393877"/>
-                </a:lnTo>
-                <a:close/>
-                <a:lnTo>
-                  <a:pt x="925538" y="4394274"/>
-                </a:lnTo>
-                <a:close/>
-                <a:lnTo>
-                  <a:pt x="928823" y="4394675"/>
-                </a:lnTo>
-                <a:close/>
-                <a:lnTo>
-                  <a:pt x="932108" y="4395079"/>
-                </a:lnTo>
-                <a:close/>
-                <a:lnTo>
-                  <a:pt x="935390" y="4395485"/>
-                </a:lnTo>
-                <a:close/>
-                <a:lnTo>
-                  <a:pt x="938670" y="4395892"/>
-                </a:lnTo>
-                <a:close/>
-                <a:lnTo>
-                  <a:pt x="941948" y="4396299"/>
-                </a:lnTo>
-                <a:close/>
-                <a:lnTo>
-                  <a:pt x="945226" y="4396705"/>
-                </a:lnTo>
-                <a:close/>
-                <a:lnTo>
-                  <a:pt x="948503" y="4397109"/>
-                </a:lnTo>
-                <a:close/>
-                <a:lnTo>
-                  <a:pt x="951782" y="4397511"/>
-                </a:lnTo>
-                <a:close/>
-                <a:lnTo>
-                  <a:pt x="955061" y="4397910"/>
-                </a:lnTo>
-                <a:close/>
-                <a:lnTo>
-                  <a:pt x="958342" y="4398304"/>
-                </a:lnTo>
-                <a:close/>
-                <a:lnTo>
-                  <a:pt x="961625" y="4398694"/>
-                </a:lnTo>
-                <a:close/>
-                <a:lnTo>
-                  <a:pt x="964910" y="4399077"/>
-                </a:lnTo>
-                <a:close/>
-                <a:lnTo>
-                  <a:pt x="968196" y="4399452"/>
-                </a:lnTo>
-                <a:close/>
-                <a:lnTo>
-                  <a:pt x="971482" y="4399818"/>
-                </a:lnTo>
-                <a:close/>
-                <a:lnTo>
-                  <a:pt x="974769" y="4400174"/>
-                </a:lnTo>
-                <a:close/>
-                <a:lnTo>
-                  <a:pt x="978055" y="4400517"/>
-                </a:lnTo>
-                <a:close/>
-                <a:lnTo>
-                  <a:pt x="981339" y="4400847"/>
-                </a:lnTo>
-                <a:close/>
-                <a:lnTo>
-                  <a:pt x="984621" y="4401163"/>
-                </a:lnTo>
-                <a:close/>
-                <a:lnTo>
-                  <a:pt x="987901" y="4401462"/>
-                </a:lnTo>
-                <a:close/>
-                <a:lnTo>
-                  <a:pt x="991179" y="4401745"/>
-                </a:lnTo>
-                <a:close/>
-                <a:lnTo>
-                  <a:pt x="994457" y="4402011"/>
-                </a:lnTo>
-                <a:close/>
-                <a:lnTo>
-                  <a:pt x="997734" y="4402258"/>
-                </a:lnTo>
-                <a:close/>
-                <a:lnTo>
-                  <a:pt x="1001013" y="4402487"/>
-                </a:lnTo>
-                <a:close/>
-                <a:lnTo>
-                  <a:pt x="1004292" y="4402696"/>
-                </a:lnTo>
-                <a:close/>
-                <a:lnTo>
-                  <a:pt x="1007573" y="4402884"/>
-                </a:lnTo>
-                <a:close/>
-                <a:lnTo>
-                  <a:pt x="1010856" y="4403050"/>
-                </a:lnTo>
-                <a:close/>
-                <a:lnTo>
-                  <a:pt x="1014141" y="4403194"/>
-                </a:lnTo>
-                <a:close/>
-                <a:lnTo>
-                  <a:pt x="1017427" y="4403314"/>
-                </a:lnTo>
-                <a:close/>
-                <a:lnTo>
-                  <a:pt x="1020714" y="4403409"/>
-                </a:lnTo>
-                <a:close/>
-                <a:lnTo>
-                  <a:pt x="1024000" y="4403477"/>
-                </a:lnTo>
-                <a:close/>
-                <a:lnTo>
-                  <a:pt x="1027286" y="4403517"/>
-                </a:lnTo>
-                <a:close/>
-                <a:lnTo>
-                  <a:pt x="1030570" y="4403527"/>
-                </a:lnTo>
-                <a:close/>
-                <a:lnTo>
-                  <a:pt x="1033852" y="4403507"/>
-                </a:lnTo>
-                <a:close/>
-                <a:lnTo>
-                  <a:pt x="1037132" y="4403455"/>
-                </a:lnTo>
-                <a:close/>
-                <a:lnTo>
-                  <a:pt x="1040410" y="4403370"/>
-                </a:lnTo>
-                <a:close/>
-                <a:lnTo>
-                  <a:pt x="1043688" y="4403251"/>
-                </a:lnTo>
-                <a:close/>
-                <a:lnTo>
-                  <a:pt x="1046965" y="4403097"/>
-                </a:lnTo>
-                <a:close/>
-                <a:lnTo>
-                  <a:pt x="1050243" y="4402907"/>
-                </a:lnTo>
-                <a:close/>
-                <a:lnTo>
-                  <a:pt x="1053523" y="4402679"/>
-                </a:lnTo>
-                <a:close/>
-                <a:lnTo>
-                  <a:pt x="1056804" y="4402414"/>
-                </a:lnTo>
-                <a:close/>
-                <a:lnTo>
-                  <a:pt x="1060087" y="4402108"/>
-                </a:lnTo>
-                <a:close/>
-                <a:lnTo>
-                  <a:pt x="1063372" y="4401762"/>
-                </a:lnTo>
-                <a:close/>
-                <a:lnTo>
-                  <a:pt x="1066658" y="4401376"/>
-                </a:lnTo>
-                <a:close/>
-                <a:lnTo>
-                  <a:pt x="1069945" y="4400947"/>
-                </a:lnTo>
-                <a:close/>
-                <a:lnTo>
-                  <a:pt x="1073231" y="4400475"/>
-                </a:lnTo>
-                <a:close/>
-                <a:lnTo>
-                  <a:pt x="1076517" y="4399959"/>
-                </a:lnTo>
-                <a:close/>
-                <a:lnTo>
-                  <a:pt x="1079801" y="4399399"/>
-                </a:lnTo>
-                <a:close/>
-                <a:lnTo>
-                  <a:pt x="1083083" y="4398794"/>
-                </a:lnTo>
-                <a:close/>
-                <a:lnTo>
-                  <a:pt x="1086363" y="4398141"/>
-                </a:lnTo>
-                <a:close/>
-                <a:lnTo>
-                  <a:pt x="1089641" y="4397441"/>
-                </a:lnTo>
-                <a:close/>
-                <a:lnTo>
-                  <a:pt x="1092919" y="4396692"/>
-                </a:lnTo>
-                <a:close/>
-                <a:lnTo>
-                  <a:pt x="1096196" y="4395891"/>
-                </a:lnTo>
-                <a:close/>
-                <a:lnTo>
-                  <a:pt x="1099474" y="4395039"/>
-                </a:lnTo>
-                <a:close/>
-                <a:lnTo>
-                  <a:pt x="1102754" y="4394133"/>
-                </a:lnTo>
-                <a:close/>
-                <a:lnTo>
-                  <a:pt x="1106035" y="4393173"/>
-                </a:lnTo>
-                <a:close/>
-                <a:lnTo>
-                  <a:pt x="1109318" y="4392156"/>
-                </a:lnTo>
-                <a:close/>
-                <a:lnTo>
-                  <a:pt x="1112603" y="4391082"/>
-                </a:lnTo>
-                <a:close/>
-                <a:lnTo>
-                  <a:pt x="1115889" y="4389951"/>
-                </a:lnTo>
-                <a:close/>
-                <a:lnTo>
-                  <a:pt x="1119176" y="4388761"/>
-                </a:lnTo>
-                <a:close/>
-                <a:lnTo>
-                  <a:pt x="1122462" y="4387511"/>
-                </a:lnTo>
-                <a:close/>
-                <a:lnTo>
-                  <a:pt x="1125748" y="4386201"/>
-                </a:lnTo>
-                <a:close/>
-                <a:lnTo>
-                  <a:pt x="1129032" y="4384829"/>
-                </a:lnTo>
-                <a:close/>
-                <a:lnTo>
-                  <a:pt x="1132314" y="4383396"/>
-                </a:lnTo>
-                <a:close/>
-                <a:lnTo>
-                  <a:pt x="1135594" y="4381899"/>
-                </a:lnTo>
-                <a:close/>
-                <a:lnTo>
-                  <a:pt x="1138872" y="4380338"/>
-                </a:lnTo>
-                <a:close/>
-                <a:lnTo>
-                  <a:pt x="1142150" y="4378712"/>
-                </a:lnTo>
-                <a:close/>
-                <a:lnTo>
-                  <a:pt x="1145427" y="4377020"/>
-                </a:lnTo>
-                <a:close/>
-                <a:lnTo>
-                  <a:pt x="1148705" y="4375259"/>
-                </a:lnTo>
-                <a:close/>
-                <a:lnTo>
-                  <a:pt x="1151985" y="4373430"/>
-                </a:lnTo>
-                <a:close/>
-                <a:lnTo>
-                  <a:pt x="1155266" y="4371531"/>
-                </a:lnTo>
-                <a:close/>
-                <a:lnTo>
-                  <a:pt x="1158549" y="4369561"/>
-                </a:lnTo>
-                <a:close/>
-                <a:lnTo>
-                  <a:pt x="1161834" y="4367519"/>
-                </a:lnTo>
-                <a:close/>
-                <a:lnTo>
-                  <a:pt x="1165120" y="4365404"/>
-                </a:lnTo>
-                <a:close/>
-                <a:lnTo>
-                  <a:pt x="1168407" y="4363214"/>
-                </a:lnTo>
-                <a:close/>
-                <a:lnTo>
-                  <a:pt x="1171693" y="4360948"/>
-                </a:lnTo>
-                <a:close/>
-                <a:lnTo>
-                  <a:pt x="1174979" y="4358606"/>
-                </a:lnTo>
-                <a:close/>
-                <a:lnTo>
-                  <a:pt x="1178263" y="4356186"/>
-                </a:lnTo>
-                <a:close/>
-                <a:lnTo>
-                  <a:pt x="1181545" y="4353686"/>
-                </a:lnTo>
-                <a:close/>
-                <a:lnTo>
-                  <a:pt x="1184825" y="4351107"/>
-                </a:lnTo>
-                <a:close/>
-                <a:lnTo>
-                  <a:pt x="1188103" y="4348447"/>
-                </a:lnTo>
-                <a:close/>
-                <a:lnTo>
-                  <a:pt x="1191381" y="4345705"/>
-                </a:lnTo>
-                <a:close/>
-                <a:lnTo>
-                  <a:pt x="1194658" y="4342880"/>
-                </a:lnTo>
-                <a:close/>
-                <a:lnTo>
-                  <a:pt x="1197936" y="4339973"/>
-                </a:lnTo>
-                <a:close/>
-                <a:lnTo>
-                  <a:pt x="1201216" y="4336982"/>
-                </a:lnTo>
-                <a:close/>
-                <a:lnTo>
-                  <a:pt x="1204497" y="4333905"/>
-                </a:lnTo>
-                <a:close/>
-                <a:lnTo>
-                  <a:pt x="1207780" y="4330743"/>
-                </a:lnTo>
-                <a:close/>
-                <a:lnTo>
-                  <a:pt x="1211065" y="4327494"/>
-                </a:lnTo>
-                <a:close/>
-                <a:lnTo>
-                  <a:pt x="1214352" y="4324156"/>
-                </a:lnTo>
-                <a:close/>
-                <a:lnTo>
-                  <a:pt x="1217638" y="4320728"/>
-                </a:lnTo>
-                <a:close/>
-                <a:lnTo>
-                  <a:pt x="1220925" y="4317208"/>
-                </a:lnTo>
-                <a:close/>
-                <a:lnTo>
-                  <a:pt x="1224210" y="4313594"/>
-                </a:lnTo>
-                <a:close/>
-                <a:lnTo>
-                  <a:pt x="1227494" y="4309885"/>
-                </a:lnTo>
-                <a:close/>
-                <a:lnTo>
-                  <a:pt x="1230776" y="4306080"/>
-                </a:lnTo>
-                <a:close/>
-                <a:lnTo>
-                  <a:pt x="1234056" y="4302178"/>
-                </a:lnTo>
-                <a:close/>
-                <a:lnTo>
-                  <a:pt x="1237334" y="4298179"/>
-                </a:lnTo>
-                <a:close/>
-                <a:lnTo>
-                  <a:pt x="1240612" y="4294085"/>
-                </a:lnTo>
-                <a:close/>
-                <a:lnTo>
-                  <a:pt x="1243889" y="4289895"/>
-                </a:lnTo>
-                <a:close/>
-                <a:lnTo>
-                  <a:pt x="1247167" y="4285611"/>
-                </a:lnTo>
-                <a:close/>
-                <a:lnTo>
-                  <a:pt x="1250447" y="4281232"/>
-                </a:lnTo>
-                <a:close/>
-                <a:lnTo>
-                  <a:pt x="1253728" y="4276759"/>
-                </a:lnTo>
-                <a:close/>
-                <a:lnTo>
-                  <a:pt x="1257011" y="4272193"/>
-                </a:lnTo>
-                <a:close/>
-                <a:lnTo>
-                  <a:pt x="1260297" y="4267532"/>
-                </a:lnTo>
-                <a:close/>
-                <a:lnTo>
-                  <a:pt x="1263583" y="4262775"/>
-                </a:lnTo>
-                <a:close/>
-                <a:lnTo>
-                  <a:pt x="1266869" y="4257922"/>
-                </a:lnTo>
-                <a:close/>
-                <a:lnTo>
-                  <a:pt x="1270156" y="4252970"/>
-                </a:lnTo>
-                <a:close/>
-                <a:lnTo>
-                  <a:pt x="1273441" y="4247919"/>
-                </a:lnTo>
-                <a:close/>
-                <a:lnTo>
-                  <a:pt x="1276725" y="4242768"/>
-                </a:lnTo>
-                <a:close/>
-                <a:lnTo>
-                  <a:pt x="1280007" y="4237515"/>
-                </a:lnTo>
-                <a:close/>
-                <a:lnTo>
-                  <a:pt x="1283287" y="4232160"/>
-                </a:lnTo>
-                <a:close/>
-                <a:lnTo>
-                  <a:pt x="1286565" y="4226701"/>
-                </a:lnTo>
-                <a:close/>
-                <a:lnTo>
-                  <a:pt x="1289843" y="4221137"/>
-                </a:lnTo>
-                <a:close/>
-                <a:lnTo>
-                  <a:pt x="1293120" y="4215467"/>
-                </a:lnTo>
-                <a:close/>
-                <a:lnTo>
-                  <a:pt x="1296398" y="4209689"/>
-                </a:lnTo>
-                <a:close/>
-                <a:lnTo>
-                  <a:pt x="1299678" y="4203802"/>
-                </a:lnTo>
-                <a:close/>
-                <a:lnTo>
-                  <a:pt x="1302959" y="4197805"/>
-                </a:lnTo>
-                <a:close/>
-                <a:lnTo>
-                  <a:pt x="1306243" y="4191697"/>
-                </a:lnTo>
-                <a:close/>
-                <a:lnTo>
-                  <a:pt x="1309528" y="4185477"/>
-                </a:lnTo>
-                <a:close/>
-                <a:lnTo>
-                  <a:pt x="1312814" y="4179143"/>
-                </a:lnTo>
-                <a:close/>
-                <a:lnTo>
-                  <a:pt x="1316101" y="4172694"/>
-                </a:lnTo>
-                <a:close/>
-                <a:lnTo>
-                  <a:pt x="1319387" y="4166130"/>
-                </a:lnTo>
-                <a:close/>
-                <a:lnTo>
-                  <a:pt x="1322672" y="4159449"/>
-                </a:lnTo>
-                <a:close/>
-                <a:lnTo>
-                  <a:pt x="1325956" y="4152651"/>
-                </a:lnTo>
-                <a:close/>
-                <a:lnTo>
-                  <a:pt x="1329238" y="4145733"/>
-                </a:lnTo>
-                <a:close/>
-                <a:lnTo>
-                  <a:pt x="1332518" y="4138696"/>
-                </a:lnTo>
-                <a:close/>
-                <a:lnTo>
-                  <a:pt x="1335796" y="4131537"/>
-                </a:lnTo>
-                <a:close/>
-                <a:lnTo>
-                  <a:pt x="1339073" y="4124257"/>
-                </a:lnTo>
-                <a:close/>
-                <a:lnTo>
-                  <a:pt x="1342351" y="4116854"/>
-                </a:lnTo>
-                <a:close/>
-                <a:lnTo>
-                  <a:pt x="1345629" y="4109328"/>
-                </a:lnTo>
-                <a:close/>
-                <a:lnTo>
-                  <a:pt x="1348909" y="4101677"/>
-                </a:lnTo>
-                <a:close/>
-                <a:lnTo>
-                  <a:pt x="1352190" y="4093901"/>
-                </a:lnTo>
-                <a:close/>
-                <a:lnTo>
-                  <a:pt x="1355474" y="4085998"/>
-                </a:lnTo>
-                <a:close/>
-                <a:lnTo>
-                  <a:pt x="1358759" y="4077967"/>
-                </a:lnTo>
-                <a:close/>
-                <a:lnTo>
-                  <a:pt x="1362045" y="4069806"/>
-                </a:lnTo>
-                <a:close/>
-                <a:lnTo>
-                  <a:pt x="1365332" y="4061513"/>
-                </a:lnTo>
-                <a:close/>
-                <a:lnTo>
-                  <a:pt x="1368618" y="4053087"/>
-                </a:lnTo>
-                <a:close/>
-                <a:lnTo>
-                  <a:pt x="1371903" y="4044525"/>
-                </a:lnTo>
-                <a:close/>
-                <a:lnTo>
-                  <a:pt x="1375187" y="4035826"/>
-                </a:lnTo>
-                <a:close/>
-                <a:lnTo>
-                  <a:pt x="1378469" y="4026989"/>
-                </a:lnTo>
-                <a:close/>
-                <a:lnTo>
-                  <a:pt x="1381749" y="4018013"/>
-                </a:lnTo>
-                <a:close/>
-                <a:lnTo>
-                  <a:pt x="1385027" y="4008898"/>
-                </a:lnTo>
-                <a:close/>
-                <a:lnTo>
-                  <a:pt x="1388304" y="3999647"/>
-                </a:lnTo>
-                <a:close/>
-                <a:lnTo>
-                  <a:pt x="1391582" y="3990259"/>
-                </a:lnTo>
-                <a:close/>
-                <a:lnTo>
-                  <a:pt x="1394860" y="3980735"/>
-                </a:lnTo>
-                <a:close/>
-                <a:lnTo>
-                  <a:pt x="1398140" y="3971076"/>
-                </a:lnTo>
-                <a:close/>
-                <a:lnTo>
-                  <a:pt x="1401421" y="3961283"/>
-                </a:lnTo>
-                <a:close/>
-                <a:lnTo>
-                  <a:pt x="1404705" y="3951356"/>
-                </a:lnTo>
-                <a:close/>
-                <a:lnTo>
-                  <a:pt x="1407990" y="3941294"/>
-                </a:lnTo>
-                <a:close/>
-                <a:lnTo>
-                  <a:pt x="1411276" y="3931097"/>
-                </a:lnTo>
-                <a:close/>
-                <a:lnTo>
-                  <a:pt x="1414563" y="3920765"/>
-                </a:lnTo>
-                <a:close/>
-                <a:lnTo>
-                  <a:pt x="1417849" y="3910297"/>
-                </a:lnTo>
-                <a:close/>
-                <a:lnTo>
-                  <a:pt x="1421135" y="3899692"/>
-                </a:lnTo>
-                <a:close/>
-                <a:lnTo>
-                  <a:pt x="1424418" y="3888949"/>
-                </a:lnTo>
-                <a:close/>
-                <a:lnTo>
-                  <a:pt x="1427700" y="3878069"/>
-                </a:lnTo>
-                <a:close/>
-                <a:lnTo>
-                  <a:pt x="1430979" y="3867051"/>
-                </a:lnTo>
-                <a:close/>
-                <a:lnTo>
-                  <a:pt x="1434258" y="3855896"/>
-                </a:lnTo>
-                <a:close/>
-                <a:lnTo>
-                  <a:pt x="1437535" y="3844603"/>
-                </a:lnTo>
-                <a:close/>
-                <a:lnTo>
-                  <a:pt x="1440813" y="3833172"/>
-                </a:lnTo>
-                <a:close/>
-                <a:lnTo>
-                  <a:pt x="1444091" y="3821605"/>
-                </a:lnTo>
-                <a:close/>
-                <a:lnTo>
-                  <a:pt x="1447371" y="3809902"/>
-                </a:lnTo>
-                <a:close/>
-                <a:lnTo>
-                  <a:pt x="1450652" y="3798062"/>
-                </a:lnTo>
-                <a:close/>
-                <a:lnTo>
-                  <a:pt x="1453936" y="3786086"/>
-                </a:lnTo>
-                <a:close/>
-                <a:lnTo>
-                  <a:pt x="1457221" y="3773974"/>
-                </a:lnTo>
-                <a:close/>
-                <a:lnTo>
-                  <a:pt x="1460507" y="3761726"/>
-                </a:lnTo>
-                <a:close/>
-                <a:lnTo>
-                  <a:pt x="1463794" y="3749343"/>
-                </a:lnTo>
-                <a:close/>
-                <a:lnTo>
-                  <a:pt x="1467080" y="3736825"/>
-                </a:lnTo>
-                <a:close/>
-                <a:lnTo>
-                  <a:pt x="1470366" y="3724172"/>
-                </a:lnTo>
-                <a:close/>
-                <a:lnTo>
-                  <a:pt x="1473649" y="3711384"/>
-                </a:lnTo>
-                <a:close/>
-                <a:lnTo>
-                  <a:pt x="1476931" y="3698462"/>
-                </a:lnTo>
-                <a:close/>
-                <a:lnTo>
-                  <a:pt x="1480210" y="3685403"/>
-                </a:lnTo>
-                <a:close/>
-                <a:lnTo>
-                  <a:pt x="1483489" y="3672208"/>
-                </a:lnTo>
-                <a:close/>
-                <a:lnTo>
-                  <a:pt x="1486766" y="3658872"/>
-                </a:lnTo>
-                <a:close/>
-                <a:lnTo>
-                  <a:pt x="1490044" y="3645396"/>
-                </a:lnTo>
-                <a:close/>
-                <a:lnTo>
-                  <a:pt x="1493322" y="3631776"/>
-                </a:lnTo>
-                <a:close/>
-                <a:lnTo>
-                  <a:pt x="1496602" y="3618011"/>
-                </a:lnTo>
-                <a:close/>
-                <a:lnTo>
-                  <a:pt x="1499883" y="3604099"/>
-                </a:lnTo>
-                <a:close/>
-                <a:lnTo>
-                  <a:pt x="1503167" y="3590038"/>
-                </a:lnTo>
-                <a:close/>
-                <a:lnTo>
-                  <a:pt x="1506452" y="3575831"/>
-                </a:lnTo>
-                <a:close/>
-                <a:lnTo>
-                  <a:pt x="1509739" y="3561476"/>
-                </a:lnTo>
-                <a:close/>
-                <a:lnTo>
-                  <a:pt x="1513025" y="3546976"/>
-                </a:lnTo>
-                <a:close/>
-                <a:lnTo>
-                  <a:pt x="1516312" y="3532330"/>
-                </a:lnTo>
-                <a:close/>
-                <a:lnTo>
-                  <a:pt x="1519597" y="3517540"/>
-                </a:lnTo>
-                <a:close/>
-                <a:lnTo>
-                  <a:pt x="1522880" y="3502606"/>
-                </a:lnTo>
-                <a:close/>
-                <a:lnTo>
-                  <a:pt x="1526162" y="3487528"/>
-                </a:lnTo>
-                <a:close/>
-                <a:lnTo>
-                  <a:pt x="1529441" y="3472306"/>
-                </a:lnTo>
-                <a:close/>
-                <a:lnTo>
-                  <a:pt x="1532720" y="3456938"/>
-                </a:lnTo>
-                <a:close/>
-                <a:lnTo>
-                  <a:pt x="1535997" y="3441423"/>
-                </a:lnTo>
-                <a:close/>
-                <a:lnTo>
-                  <a:pt x="1539275" y="3425758"/>
-                </a:lnTo>
-                <a:close/>
-                <a:lnTo>
-                  <a:pt x="1542553" y="3409942"/>
-                </a:lnTo>
-                <a:close/>
-                <a:lnTo>
-                  <a:pt x="1545833" y="3393974"/>
-                </a:lnTo>
-                <a:close/>
-                <a:lnTo>
-                  <a:pt x="1549114" y="3377851"/>
-                </a:lnTo>
-                <a:close/>
-                <a:lnTo>
-                  <a:pt x="1552398" y="3361573"/>
-                </a:lnTo>
-                <a:close/>
-                <a:lnTo>
-                  <a:pt x="1555683" y="3345140"/>
-                </a:lnTo>
-                <a:close/>
-                <a:lnTo>
-                  <a:pt x="1558970" y="3328552"/>
-                </a:lnTo>
-                <a:close/>
-                <a:lnTo>
-                  <a:pt x="1562256" y="3311808"/>
-                </a:lnTo>
-                <a:close/>
-                <a:lnTo>
-                  <a:pt x="1565543" y="3294908"/>
-                </a:lnTo>
-                <a:close/>
-                <a:lnTo>
-                  <a:pt x="1568828" y="3277854"/>
-                </a:lnTo>
-                <a:close/>
-                <a:lnTo>
-                  <a:pt x="1572112" y="3260644"/>
-                </a:lnTo>
-                <a:close/>
-                <a:lnTo>
-                  <a:pt x="1575393" y="3243280"/>
-                </a:lnTo>
-                <a:close/>
-                <a:lnTo>
-                  <a:pt x="1578672" y="3225760"/>
-                </a:lnTo>
-                <a:close/>
-                <a:lnTo>
-                  <a:pt x="1581951" y="3208086"/>
-                </a:lnTo>
-                <a:close/>
-                <a:lnTo>
-                  <a:pt x="1585228" y="3190257"/>
-                </a:lnTo>
-                <a:close/>
-                <a:lnTo>
-                  <a:pt x="1588506" y="3172273"/>
-                </a:lnTo>
-                <a:close/>
-                <a:lnTo>
-                  <a:pt x="1591784" y="3154135"/>
-                </a:lnTo>
-                <a:close/>
-                <a:lnTo>
-                  <a:pt x="1595064" y="3135844"/>
-                </a:lnTo>
-                <a:close/>
-                <a:lnTo>
-                  <a:pt x="1598345" y="3117398"/>
-                </a:lnTo>
-                <a:close/>
-                <a:lnTo>
-                  <a:pt x="1601629" y="3098798"/>
-                </a:lnTo>
-                <a:close/>
-                <a:lnTo>
-                  <a:pt x="1604915" y="3080045"/>
-                </a:lnTo>
-                <a:close/>
-                <a:lnTo>
-                  <a:pt x="1608201" y="3061137"/>
-                </a:lnTo>
-                <a:close/>
-                <a:lnTo>
-                  <a:pt x="1611488" y="3042076"/>
-                </a:lnTo>
-                <a:close/>
-                <a:lnTo>
-                  <a:pt x="1614774" y="3022860"/>
-                </a:lnTo>
-                <a:close/>
-                <a:lnTo>
-                  <a:pt x="1618059" y="3003490"/>
-                </a:lnTo>
-                <a:close/>
-                <a:lnTo>
-                  <a:pt x="1621343" y="2983965"/>
-                </a:lnTo>
-                <a:close/>
-                <a:lnTo>
-                  <a:pt x="1624624" y="2964286"/>
-                </a:lnTo>
-                <a:close/>
-                <a:lnTo>
-                  <a:pt x="1627903" y="2944452"/>
-                </a:lnTo>
-                <a:close/>
-                <a:lnTo>
-                  <a:pt x="1631182" y="2924462"/>
-                </a:lnTo>
-                <a:close/>
-                <a:lnTo>
-                  <a:pt x="1634459" y="2904317"/>
-                </a:lnTo>
-                <a:close/>
-                <a:lnTo>
-                  <a:pt x="1637737" y="2884016"/>
-                </a:lnTo>
-                <a:close/>
-                <a:lnTo>
-                  <a:pt x="1641015" y="2863558"/>
-                </a:lnTo>
-                <a:close/>
-                <a:lnTo>
-                  <a:pt x="1644295" y="2842943"/>
-                </a:lnTo>
-                <a:close/>
-                <a:lnTo>
-                  <a:pt x="1647576" y="2822171"/>
-                </a:lnTo>
-                <a:close/>
-                <a:lnTo>
-                  <a:pt x="1650860" y="2801241"/>
-                </a:lnTo>
-                <a:close/>
-                <a:lnTo>
-                  <a:pt x="1654146" y="2780155"/>
-                </a:lnTo>
-                <a:close/>
-                <a:lnTo>
-                  <a:pt x="1657432" y="2758915"/>
-                </a:lnTo>
-                <a:close/>
-                <a:lnTo>
-                  <a:pt x="1660719" y="2737520"/>
-                </a:lnTo>
-                <a:close/>
-                <a:lnTo>
-                  <a:pt x="1664005" y="2715972"/>
-                </a:lnTo>
-                <a:close/>
-                <a:lnTo>
-                  <a:pt x="1667290" y="2694273"/>
-                </a:lnTo>
-                <a:close/>
-                <a:lnTo>
-                  <a:pt x="1670574" y="2672424"/>
-                </a:lnTo>
-                <a:close/>
-                <a:lnTo>
-                  <a:pt x="1673855" y="2650424"/>
-                </a:lnTo>
-                <a:close/>
-                <a:lnTo>
-                  <a:pt x="1677134" y="2628273"/>
-                </a:lnTo>
-                <a:close/>
-                <a:lnTo>
-                  <a:pt x="1680412" y="2605968"/>
-                </a:lnTo>
-                <a:close/>
-                <a:lnTo>
-                  <a:pt x="1683690" y="2583505"/>
-                </a:lnTo>
-                <a:close/>
-                <a:lnTo>
-                  <a:pt x="1686968" y="2560883"/>
-                </a:lnTo>
-                <a:close/>
-                <a:lnTo>
-                  <a:pt x="1690246" y="2538097"/>
-                </a:lnTo>
-                <a:close/>
-                <a:lnTo>
-                  <a:pt x="1693526" y="2515146"/>
-                </a:lnTo>
-                <a:close/>
-                <a:lnTo>
-                  <a:pt x="1696808" y="2492026"/>
-                </a:lnTo>
-                <a:close/>
-                <a:lnTo>
-                  <a:pt x="1700091" y="2468736"/>
-                </a:lnTo>
-                <a:close/>
-                <a:lnTo>
-                  <a:pt x="1703377" y="2445279"/>
-                </a:lnTo>
-                <a:close/>
-                <a:lnTo>
-                  <a:pt x="1706663" y="2421655"/>
-                </a:lnTo>
-                <a:close/>
-                <a:lnTo>
-                  <a:pt x="1709950" y="2397866"/>
-                </a:lnTo>
-                <a:close/>
-                <a:lnTo>
-                  <a:pt x="1713236" y="2373915"/>
-                </a:lnTo>
-                <a:close/>
-                <a:lnTo>
-                  <a:pt x="1716521" y="2349802"/>
-                </a:lnTo>
-                <a:close/>
-                <a:lnTo>
-                  <a:pt x="1719805" y="2325529"/>
-                </a:lnTo>
-                <a:close/>
-                <a:lnTo>
-                  <a:pt x="1723086" y="2301098"/>
-                </a:lnTo>
-                <a:close/>
-                <a:lnTo>
-                  <a:pt x="1726365" y="2276507"/>
-                </a:lnTo>
-                <a:close/>
-                <a:lnTo>
-                  <a:pt x="1729643" y="2251754"/>
-                </a:lnTo>
-                <a:close/>
-                <a:lnTo>
-                  <a:pt x="1732921" y="2226835"/>
-                </a:lnTo>
-                <a:close/>
-                <a:lnTo>
-                  <a:pt x="1736199" y="2201748"/>
-                </a:lnTo>
-                <a:close/>
-                <a:lnTo>
-                  <a:pt x="1739477" y="2176491"/>
-                </a:lnTo>
-                <a:close/>
-                <a:lnTo>
-                  <a:pt x="1742757" y="2151061"/>
-                </a:lnTo>
-                <a:close/>
-                <a:lnTo>
-                  <a:pt x="1746039" y="2125455"/>
-                </a:lnTo>
-                <a:close/>
-                <a:lnTo>
-                  <a:pt x="1749323" y="2099672"/>
-                </a:lnTo>
-                <a:close/>
-                <a:lnTo>
-                  <a:pt x="1752608" y="2073713"/>
-                </a:lnTo>
-                <a:close/>
-                <a:lnTo>
-                  <a:pt x="1755894" y="2047579"/>
-                </a:lnTo>
-                <a:close/>
-                <a:lnTo>
-                  <a:pt x="1759181" y="2021271"/>
-                </a:lnTo>
-                <a:close/>
-                <a:lnTo>
-                  <a:pt x="1762467" y="1994790"/>
-                </a:lnTo>
-                <a:close/>
-                <a:lnTo>
-                  <a:pt x="1765752" y="1968136"/>
-                </a:lnTo>
-                <a:close/>
-                <a:lnTo>
-                  <a:pt x="1769036" y="1941311"/>
-                </a:lnTo>
-                <a:close/>
-                <a:lnTo>
-                  <a:pt x="1772317" y="1914315"/>
-                </a:lnTo>
-                <a:close/>
-                <a:lnTo>
-                  <a:pt x="1775596" y="1887149"/>
-                </a:lnTo>
-                <a:close/>
-                <a:lnTo>
-                  <a:pt x="1778874" y="1859811"/>
-                </a:lnTo>
-                <a:close/>
-                <a:lnTo>
-                  <a:pt x="1782152" y="1832302"/>
-                </a:lnTo>
-                <a:close/>
-                <a:lnTo>
-                  <a:pt x="1785430" y="1804621"/>
-                </a:lnTo>
-                <a:close/>
-                <a:lnTo>
-                  <a:pt x="1788708" y="1776767"/>
-                </a:lnTo>
-                <a:close/>
-                <a:lnTo>
-                  <a:pt x="1791988" y="1748740"/>
-                </a:lnTo>
-                <a:close/>
-                <a:lnTo>
-                  <a:pt x="1795270" y="1720540"/>
-                </a:lnTo>
-                <a:close/>
-                <a:lnTo>
-                  <a:pt x="1798554" y="1692166"/>
-                </a:lnTo>
-                <a:close/>
-                <a:lnTo>
-                  <a:pt x="1801839" y="1663618"/>
-                </a:lnTo>
-                <a:close/>
-                <a:lnTo>
-                  <a:pt x="1805126" y="1634897"/>
-                </a:lnTo>
-                <a:close/>
-                <a:lnTo>
-                  <a:pt x="1808412" y="1606004"/>
-                </a:lnTo>
-                <a:close/>
-                <a:lnTo>
-                  <a:pt x="1811698" y="1576937"/>
-                </a:lnTo>
-                <a:close/>
-                <a:lnTo>
-                  <a:pt x="1814983" y="1547699"/>
-                </a:lnTo>
-                <a:close/>
-                <a:lnTo>
-                  <a:pt x="1818267" y="1518288"/>
-                </a:lnTo>
-                <a:close/>
-                <a:lnTo>
-                  <a:pt x="1821548" y="1488704"/>
-                </a:lnTo>
-                <a:close/>
-                <a:lnTo>
-                  <a:pt x="1824827" y="1458948"/>
-                </a:lnTo>
-                <a:close/>
-                <a:lnTo>
-                  <a:pt x="1828105" y="1429018"/>
-                </a:lnTo>
-                <a:close/>
-                <a:lnTo>
-                  <a:pt x="1831383" y="1398912"/>
-                </a:lnTo>
-                <a:close/>
-                <a:lnTo>
-                  <a:pt x="1834661" y="1368630"/>
-                </a:lnTo>
-                <a:close/>
-                <a:lnTo>
-                  <a:pt x="1837939" y="1338170"/>
-                </a:lnTo>
-                <a:close/>
-                <a:lnTo>
-                  <a:pt x="1841219" y="1307531"/>
-                </a:lnTo>
-                <a:close/>
-                <a:lnTo>
-                  <a:pt x="1844501" y="1276713"/>
-                </a:lnTo>
-                <a:close/>
-                <a:lnTo>
-                  <a:pt x="1847785" y="1245713"/>
-                </a:lnTo>
-                <a:close/>
-                <a:lnTo>
-                  <a:pt x="1851070" y="1214531"/>
-                </a:lnTo>
-                <a:close/>
-                <a:lnTo>
-                  <a:pt x="1854357" y="1183164"/>
-                </a:lnTo>
-                <a:close/>
-                <a:lnTo>
-                  <a:pt x="1857643" y="1151611"/>
-                </a:lnTo>
-                <a:close/>
-                <a:lnTo>
-                  <a:pt x="1860929" y="1119871"/>
-                </a:lnTo>
-                <a:close/>
-                <a:lnTo>
-                  <a:pt x="1864215" y="1087942"/>
-                </a:lnTo>
-                <a:close/>
-                <a:lnTo>
-                  <a:pt x="1867498" y="1055822"/>
-                </a:lnTo>
-                <a:close/>
-                <a:lnTo>
-                  <a:pt x="1870779" y="1023511"/>
-                </a:lnTo>
-                <a:close/>
-                <a:lnTo>
-                  <a:pt x="1874058" y="991007"/>
-                </a:lnTo>
-                <a:close/>
-                <a:lnTo>
-                  <a:pt x="1877337" y="958310"/>
-                </a:lnTo>
-                <a:close/>
-                <a:lnTo>
-                  <a:pt x="1880614" y="925419"/>
-                </a:lnTo>
-                <a:close/>
-                <a:lnTo>
-                  <a:pt x="1883892" y="892334"/>
-                </a:lnTo>
-                <a:close/>
-                <a:lnTo>
-                  <a:pt x="1887170" y="859054"/>
-                </a:lnTo>
-                <a:close/>
-                <a:lnTo>
-                  <a:pt x="1890450" y="825580"/>
-                </a:lnTo>
-                <a:close/>
-                <a:lnTo>
-                  <a:pt x="1893732" y="791909"/>
-                </a:lnTo>
-                <a:close/>
-                <a:lnTo>
-                  <a:pt x="1897015" y="758042"/>
-                </a:lnTo>
-                <a:close/>
-                <a:lnTo>
-                  <a:pt x="1900301" y="723976"/>
-                </a:lnTo>
-                <a:close/>
-                <a:lnTo>
-                  <a:pt x="1903587" y="689707"/>
-                </a:lnTo>
-                <a:close/>
-                <a:lnTo>
-                  <a:pt x="1906873" y="655235"/>
-                </a:lnTo>
-                <a:close/>
-                <a:lnTo>
-                  <a:pt x="1910160" y="620557"/>
-                </a:lnTo>
-                <a:close/>
-                <a:lnTo>
-                  <a:pt x="1913445" y="585670"/>
-                </a:lnTo>
-                <a:close/>
-                <a:lnTo>
-                  <a:pt x="1916729" y="550571"/>
-                </a:lnTo>
-                <a:close/>
-                <a:lnTo>
-                  <a:pt x="1920011" y="515261"/>
-                </a:lnTo>
-                <a:close/>
-                <a:lnTo>
-                  <a:pt x="1923292" y="479739"/>
-                </a:lnTo>
-                <a:close/>
-                <a:lnTo>
-                  <a:pt x="1926571" y="444009"/>
-                </a:lnTo>
-                <a:close/>
-                <a:lnTo>
-                  <a:pt x="1929849" y="408074"/>
-                </a:lnTo>
-                <a:close/>
-                <a:lnTo>
-                  <a:pt x="1933127" y="371936"/>
-                </a:lnTo>
-                <a:close/>
-                <a:lnTo>
-                  <a:pt x="1936405" y="335598"/>
-                </a:lnTo>
-                <a:close/>
-                <a:lnTo>
-                  <a:pt x="1939682" y="299063"/>
-                </a:lnTo>
-                <a:close/>
-                <a:lnTo>
-                  <a:pt x="1942961" y="262333"/>
-                </a:lnTo>
-                <a:close/>
-                <a:lnTo>
-                  <a:pt x="1946241" y="225411"/>
-                </a:lnTo>
-                <a:close/>
-                <a:lnTo>
-                  <a:pt x="1949522" y="188300"/>
-                </a:lnTo>
-                <a:close/>
-                <a:lnTo>
-                  <a:pt x="1952804" y="151003"/>
-                </a:lnTo>
-                <a:close/>
-                <a:lnTo>
-                  <a:pt x="1956089" y="113521"/>
-                </a:lnTo>
-                <a:close/>
-                <a:lnTo>
-                  <a:pt x="1959376" y="75858"/>
-                </a:lnTo>
-                <a:close/>
-                <a:lnTo>
-                  <a:pt x="1962667" y="38017"/>
-                </a:lnTo>
-                <a:close/>
-                <a:lnTo>
-                  <a:pt x="1965960" y="0"/>
+                  <a:pt x="6546" y="3645832"/>
+                </a:lnTo>
+                <a:close/>
+                <a:lnTo>
+                  <a:pt x="13032" y="3634104"/>
+                </a:lnTo>
+                <a:close/>
+                <a:lnTo>
+                  <a:pt x="19457" y="3622416"/>
+                </a:lnTo>
+                <a:close/>
+                <a:lnTo>
+                  <a:pt x="25822" y="3610769"/>
+                </a:lnTo>
+                <a:close/>
+                <a:lnTo>
+                  <a:pt x="32128" y="3599161"/>
+                </a:lnTo>
+                <a:close/>
+                <a:lnTo>
+                  <a:pt x="38374" y="3587594"/>
+                </a:lnTo>
+                <a:close/>
+                <a:lnTo>
+                  <a:pt x="44561" y="3576066"/>
+                </a:lnTo>
+                <a:close/>
+                <a:lnTo>
+                  <a:pt x="50690" y="3564579"/>
+                </a:lnTo>
+                <a:close/>
+                <a:lnTo>
+                  <a:pt x="56761" y="3553131"/>
+                </a:lnTo>
+                <a:close/>
+                <a:lnTo>
+                  <a:pt x="62773" y="3541723"/>
+                </a:lnTo>
+                <a:close/>
+                <a:lnTo>
+                  <a:pt x="68729" y="3530354"/>
+                </a:lnTo>
+                <a:close/>
+                <a:lnTo>
+                  <a:pt x="74627" y="3519025"/>
+                </a:lnTo>
+                <a:close/>
+                <a:lnTo>
+                  <a:pt x="80469" y="3507736"/>
+                </a:lnTo>
+                <a:close/>
+                <a:lnTo>
+                  <a:pt x="86255" y="3496486"/>
+                </a:lnTo>
+                <a:close/>
+                <a:lnTo>
+                  <a:pt x="91984" y="3485275"/>
+                </a:lnTo>
+                <a:close/>
+                <a:lnTo>
+                  <a:pt x="97659" y="3474104"/>
+                </a:lnTo>
+                <a:close/>
+                <a:lnTo>
+                  <a:pt x="103278" y="3462971"/>
+                </a:lnTo>
+                <a:close/>
+                <a:lnTo>
+                  <a:pt x="108842" y="3451878"/>
+                </a:lnTo>
+                <a:close/>
+                <a:lnTo>
+                  <a:pt x="114352" y="3440824"/>
+                </a:lnTo>
+                <a:close/>
+                <a:lnTo>
+                  <a:pt x="119808" y="3429809"/>
+                </a:lnTo>
+                <a:close/>
+                <a:lnTo>
+                  <a:pt x="125210" y="3418833"/>
+                </a:lnTo>
+                <a:close/>
+                <a:lnTo>
+                  <a:pt x="130559" y="3407896"/>
+                </a:lnTo>
+                <a:close/>
+                <a:lnTo>
+                  <a:pt x="135856" y="3396998"/>
+                </a:lnTo>
+                <a:close/>
+                <a:lnTo>
+                  <a:pt x="141100" y="3386138"/>
+                </a:lnTo>
+                <a:close/>
+                <a:lnTo>
+                  <a:pt x="146291" y="3375317"/>
+                </a:lnTo>
+                <a:close/>
+                <a:lnTo>
+                  <a:pt x="151431" y="3364535"/>
+                </a:lnTo>
+                <a:close/>
+                <a:lnTo>
+                  <a:pt x="156520" y="3353791"/>
+                </a:lnTo>
+                <a:close/>
+                <a:lnTo>
+                  <a:pt x="161557" y="3343085"/>
+                </a:lnTo>
+                <a:close/>
+                <a:lnTo>
+                  <a:pt x="166544" y="3332418"/>
+                </a:lnTo>
+                <a:close/>
+                <a:lnTo>
+                  <a:pt x="171481" y="3321789"/>
+                </a:lnTo>
+                <a:close/>
+                <a:lnTo>
+                  <a:pt x="176368" y="3311199"/>
+                </a:lnTo>
+                <a:close/>
+                <a:lnTo>
+                  <a:pt x="181206" y="3300646"/>
+                </a:lnTo>
+                <a:close/>
+                <a:lnTo>
+                  <a:pt x="185994" y="3290132"/>
+                </a:lnTo>
+                <a:close/>
+                <a:lnTo>
+                  <a:pt x="190734" y="3279656"/>
+                </a:lnTo>
+                <a:close/>
+                <a:lnTo>
+                  <a:pt x="195426" y="3269217"/>
+                </a:lnTo>
+                <a:close/>
+                <a:lnTo>
+                  <a:pt x="200069" y="3258817"/>
+                </a:lnTo>
+                <a:close/>
+                <a:lnTo>
+                  <a:pt x="204665" y="3248454"/>
+                </a:lnTo>
+                <a:close/>
+                <a:lnTo>
+                  <a:pt x="209214" y="3238129"/>
+                </a:lnTo>
+                <a:close/>
+                <a:lnTo>
+                  <a:pt x="213716" y="3227842"/>
+                </a:lnTo>
+                <a:close/>
+                <a:lnTo>
+                  <a:pt x="218171" y="3217592"/>
+                </a:lnTo>
+                <a:close/>
+                <a:lnTo>
+                  <a:pt x="222581" y="3207380"/>
+                </a:lnTo>
+                <a:close/>
+                <a:lnTo>
+                  <a:pt x="226944" y="3197205"/>
+                </a:lnTo>
+                <a:close/>
+                <a:lnTo>
+                  <a:pt x="231263" y="3187067"/>
+                </a:lnTo>
+                <a:close/>
+                <a:lnTo>
+                  <a:pt x="235536" y="3176967"/>
+                </a:lnTo>
+                <a:close/>
+                <a:lnTo>
+                  <a:pt x="239765" y="3166904"/>
+                </a:lnTo>
+                <a:close/>
+                <a:lnTo>
+                  <a:pt x="243950" y="3156879"/>
+                </a:lnTo>
+                <a:close/>
+                <a:lnTo>
+                  <a:pt x="248091" y="3146890"/>
+                </a:lnTo>
+                <a:close/>
+                <a:lnTo>
+                  <a:pt x="252189" y="3136938"/>
+                </a:lnTo>
+                <a:close/>
+                <a:lnTo>
+                  <a:pt x="256243" y="3127024"/>
+                </a:lnTo>
+                <a:close/>
+                <a:lnTo>
+                  <a:pt x="260255" y="3117146"/>
+                </a:lnTo>
+                <a:close/>
+                <a:lnTo>
+                  <a:pt x="264225" y="3107305"/>
+                </a:lnTo>
+                <a:close/>
+                <a:lnTo>
+                  <a:pt x="268152" y="3097501"/>
+                </a:lnTo>
+                <a:close/>
+                <a:lnTo>
+                  <a:pt x="272038" y="3087733"/>
+                </a:lnTo>
+                <a:close/>
+                <a:lnTo>
+                  <a:pt x="275883" y="3078002"/>
+                </a:lnTo>
+                <a:close/>
+                <a:lnTo>
+                  <a:pt x="279688" y="3068307"/>
+                </a:lnTo>
+                <a:close/>
+                <a:lnTo>
+                  <a:pt x="283451" y="3058649"/>
+                </a:lnTo>
+                <a:close/>
+                <a:lnTo>
+                  <a:pt x="287175" y="3049028"/>
+                </a:lnTo>
+                <a:close/>
+                <a:lnTo>
+                  <a:pt x="290859" y="3039442"/>
+                </a:lnTo>
+                <a:close/>
+                <a:lnTo>
+                  <a:pt x="294504" y="3029893"/>
+                </a:lnTo>
+                <a:close/>
+                <a:lnTo>
+                  <a:pt x="298110" y="3020380"/>
+                </a:lnTo>
+                <a:close/>
+                <a:lnTo>
+                  <a:pt x="301678" y="3010903"/>
+                </a:lnTo>
+                <a:close/>
+                <a:lnTo>
+                  <a:pt x="305207" y="3001463"/>
+                </a:lnTo>
+                <a:close/>
+                <a:lnTo>
+                  <a:pt x="308699" y="2992058"/>
+                </a:lnTo>
+                <a:close/>
+                <a:lnTo>
+                  <a:pt x="312153" y="2982689"/>
+                </a:lnTo>
+                <a:close/>
+                <a:lnTo>
+                  <a:pt x="315570" y="2973356"/>
+                </a:lnTo>
+                <a:close/>
+                <a:lnTo>
+                  <a:pt x="318951" y="2964058"/>
+                </a:lnTo>
+                <a:close/>
+                <a:lnTo>
+                  <a:pt x="322295" y="2954796"/>
+                </a:lnTo>
+                <a:close/>
+                <a:lnTo>
+                  <a:pt x="325604" y="2945570"/>
+                </a:lnTo>
+                <a:close/>
+                <a:lnTo>
+                  <a:pt x="328877" y="2936380"/>
+                </a:lnTo>
+                <a:close/>
+                <a:lnTo>
+                  <a:pt x="332115" y="2927224"/>
+                </a:lnTo>
+                <a:close/>
+                <a:lnTo>
+                  <a:pt x="335318" y="2918105"/>
+                </a:lnTo>
+                <a:close/>
+                <a:lnTo>
+                  <a:pt x="338487" y="2909020"/>
+                </a:lnTo>
+                <a:close/>
+                <a:lnTo>
+                  <a:pt x="341622" y="2899971"/>
+                </a:lnTo>
+                <a:close/>
+                <a:lnTo>
+                  <a:pt x="344723" y="2890957"/>
+                </a:lnTo>
+                <a:close/>
+                <a:lnTo>
+                  <a:pt x="347791" y="2881978"/>
+                </a:lnTo>
+                <a:close/>
+                <a:lnTo>
+                  <a:pt x="350826" y="2873034"/>
+                </a:lnTo>
+                <a:close/>
+                <a:lnTo>
+                  <a:pt x="353829" y="2864125"/>
+                </a:lnTo>
+                <a:close/>
+                <a:lnTo>
+                  <a:pt x="356800" y="2855251"/>
+                </a:lnTo>
+                <a:close/>
+                <a:lnTo>
+                  <a:pt x="359739" y="2846412"/>
+                </a:lnTo>
+                <a:close/>
+                <a:lnTo>
+                  <a:pt x="362646" y="2837607"/>
+                </a:lnTo>
+                <a:close/>
+                <a:lnTo>
+                  <a:pt x="365523" y="2828838"/>
+                </a:lnTo>
+                <a:close/>
+                <a:lnTo>
+                  <a:pt x="368369" y="2820102"/>
+                </a:lnTo>
+                <a:close/>
+                <a:lnTo>
+                  <a:pt x="371185" y="2811402"/>
+                </a:lnTo>
+                <a:close/>
+                <a:lnTo>
+                  <a:pt x="373971" y="2802735"/>
+                </a:lnTo>
+                <a:close/>
+                <a:lnTo>
+                  <a:pt x="376728" y="2794104"/>
+                </a:lnTo>
+                <a:close/>
+                <a:lnTo>
+                  <a:pt x="379455" y="2785506"/>
+                </a:lnTo>
+                <a:close/>
+                <a:lnTo>
+                  <a:pt x="382154" y="2776943"/>
+                </a:lnTo>
+                <a:close/>
+                <a:lnTo>
+                  <a:pt x="384824" y="2768414"/>
+                </a:lnTo>
+                <a:close/>
+                <a:lnTo>
+                  <a:pt x="387467" y="2759919"/>
+                </a:lnTo>
+                <a:close/>
+                <a:lnTo>
+                  <a:pt x="390082" y="2751458"/>
+                </a:lnTo>
+                <a:close/>
+                <a:lnTo>
+                  <a:pt x="392670" y="2743031"/>
+                </a:lnTo>
+                <a:close/>
+                <a:lnTo>
+                  <a:pt x="395231" y="2734638"/>
+                </a:lnTo>
+                <a:close/>
+                <a:lnTo>
+                  <a:pt x="397766" y="2726279"/>
+                </a:lnTo>
+                <a:close/>
+                <a:lnTo>
+                  <a:pt x="400274" y="2717953"/>
+                </a:lnTo>
+                <a:close/>
+                <a:lnTo>
+                  <a:pt x="402757" y="2709662"/>
+                </a:lnTo>
+                <a:close/>
+                <a:lnTo>
+                  <a:pt x="405215" y="2701404"/>
+                </a:lnTo>
+                <a:close/>
+                <a:lnTo>
+                  <a:pt x="407647" y="2693179"/>
+                </a:lnTo>
+                <a:close/>
+                <a:lnTo>
+                  <a:pt x="410056" y="2684988"/>
+                </a:lnTo>
+                <a:close/>
+                <a:lnTo>
+                  <a:pt x="412440" y="2676830"/>
+                </a:lnTo>
+                <a:close/>
+                <a:lnTo>
+                  <a:pt x="414800" y="2668706"/>
+                </a:lnTo>
+                <a:close/>
+                <a:lnTo>
+                  <a:pt x="417137" y="2660615"/>
+                </a:lnTo>
+                <a:close/>
+                <a:lnTo>
+                  <a:pt x="419450" y="2652557"/>
+                </a:lnTo>
+                <a:close/>
+                <a:lnTo>
+                  <a:pt x="421742" y="2644532"/>
+                </a:lnTo>
+                <a:close/>
+                <a:lnTo>
+                  <a:pt x="424010" y="2636540"/>
+                </a:lnTo>
+                <a:close/>
+                <a:lnTo>
+                  <a:pt x="426257" y="2628581"/>
+                </a:lnTo>
+                <a:close/>
+                <a:lnTo>
+                  <a:pt x="428483" y="2620655"/>
+                </a:lnTo>
+                <a:close/>
+                <a:lnTo>
+                  <a:pt x="430687" y="2612762"/>
+                </a:lnTo>
+                <a:close/>
+                <a:lnTo>
+                  <a:pt x="432871" y="2604902"/>
+                </a:lnTo>
+                <a:close/>
+                <a:lnTo>
+                  <a:pt x="435034" y="2597074"/>
+                </a:lnTo>
+                <a:close/>
+                <a:lnTo>
+                  <a:pt x="437177" y="2589279"/>
+                </a:lnTo>
+                <a:close/>
+                <a:lnTo>
+                  <a:pt x="439301" y="2581517"/>
+                </a:lnTo>
+                <a:close/>
+                <a:lnTo>
+                  <a:pt x="441405" y="2573787"/>
+                </a:lnTo>
+                <a:close/>
+                <a:lnTo>
+                  <a:pt x="443490" y="2566089"/>
+                </a:lnTo>
+                <a:close/>
+                <a:lnTo>
+                  <a:pt x="445557" y="2558424"/>
+                </a:lnTo>
+                <a:close/>
+                <a:lnTo>
+                  <a:pt x="447606" y="2550791"/>
+                </a:lnTo>
+                <a:close/>
+                <a:lnTo>
+                  <a:pt x="449637" y="2543190"/>
+                </a:lnTo>
+                <a:close/>
+                <a:lnTo>
+                  <a:pt x="451651" y="2535622"/>
+                </a:lnTo>
+                <a:close/>
+                <a:lnTo>
+                  <a:pt x="453648" y="2528085"/>
+                </a:lnTo>
+                <a:close/>
+                <a:lnTo>
+                  <a:pt x="455628" y="2520581"/>
+                </a:lnTo>
+                <a:close/>
+                <a:lnTo>
+                  <a:pt x="457591" y="2513108"/>
+                </a:lnTo>
+                <a:close/>
+                <a:lnTo>
+                  <a:pt x="459540" y="2505667"/>
+                </a:lnTo>
+                <a:close/>
+                <a:lnTo>
+                  <a:pt x="461472" y="2498258"/>
+                </a:lnTo>
+                <a:close/>
+                <a:lnTo>
+                  <a:pt x="463390" y="2490881"/>
+                </a:lnTo>
+                <a:close/>
+                <a:lnTo>
+                  <a:pt x="465292" y="2483535"/>
+                </a:lnTo>
+                <a:close/>
+                <a:lnTo>
+                  <a:pt x="467181" y="2476221"/>
+                </a:lnTo>
+                <a:close/>
+                <a:lnTo>
+                  <a:pt x="469055" y="2468938"/>
+                </a:lnTo>
+                <a:close/>
+                <a:lnTo>
+                  <a:pt x="470916" y="2461687"/>
+                </a:lnTo>
+                <a:close/>
+                <a:lnTo>
+                  <a:pt x="472764" y="2454467"/>
+                </a:lnTo>
+                <a:close/>
+                <a:lnTo>
+                  <a:pt x="474598" y="2447278"/>
+                </a:lnTo>
+                <a:close/>
+                <a:lnTo>
+                  <a:pt x="476421" y="2440121"/>
+                </a:lnTo>
+                <a:close/>
+                <a:lnTo>
+                  <a:pt x="478231" y="2432995"/>
+                </a:lnTo>
+                <a:close/>
+                <a:lnTo>
+                  <a:pt x="480030" y="2425899"/>
+                </a:lnTo>
+                <a:close/>
+                <a:lnTo>
+                  <a:pt x="481817" y="2418835"/>
+                </a:lnTo>
+                <a:close/>
+                <a:lnTo>
+                  <a:pt x="483593" y="2411802"/>
+                </a:lnTo>
+                <a:close/>
+                <a:lnTo>
+                  <a:pt x="485359" y="2404799"/>
+                </a:lnTo>
+                <a:close/>
+                <a:lnTo>
+                  <a:pt x="487114" y="2397828"/>
+                </a:lnTo>
+                <a:close/>
+                <a:lnTo>
+                  <a:pt x="488860" y="2390887"/>
+                </a:lnTo>
+                <a:close/>
+                <a:lnTo>
+                  <a:pt x="490596" y="2383976"/>
+                </a:lnTo>
+                <a:close/>
+                <a:lnTo>
+                  <a:pt x="492324" y="2377096"/>
+                </a:lnTo>
+                <a:close/>
+                <a:lnTo>
+                  <a:pt x="494042" y="2370247"/>
+                </a:lnTo>
+                <a:close/>
+                <a:lnTo>
+                  <a:pt x="495752" y="2363428"/>
+                </a:lnTo>
+                <a:close/>
+                <a:lnTo>
+                  <a:pt x="497455" y="2356640"/>
+                </a:lnTo>
+                <a:close/>
+                <a:lnTo>
+                  <a:pt x="499150" y="2349881"/>
+                </a:lnTo>
+                <a:close/>
+                <a:lnTo>
+                  <a:pt x="500837" y="2343153"/>
+                </a:lnTo>
+                <a:close/>
+                <a:lnTo>
+                  <a:pt x="502518" y="2336456"/>
+                </a:lnTo>
+                <a:close/>
+                <a:lnTo>
+                  <a:pt x="504192" y="2329788"/>
+                </a:lnTo>
+                <a:close/>
+                <a:lnTo>
+                  <a:pt x="505861" y="2323150"/>
+                </a:lnTo>
+                <a:close/>
+                <a:lnTo>
+                  <a:pt x="507524" y="2316542"/>
+                </a:lnTo>
+                <a:close/>
+                <a:lnTo>
+                  <a:pt x="509181" y="2309964"/>
+                </a:lnTo>
+                <a:close/>
+                <a:lnTo>
+                  <a:pt x="510834" y="2303416"/>
+                </a:lnTo>
+                <a:close/>
+                <a:lnTo>
+                  <a:pt x="512482" y="2296897"/>
+                </a:lnTo>
+                <a:close/>
+                <a:lnTo>
+                  <a:pt x="514126" y="2290408"/>
+                </a:lnTo>
+                <a:close/>
+                <a:lnTo>
+                  <a:pt x="515766" y="2283949"/>
+                </a:lnTo>
+                <a:close/>
+                <a:lnTo>
+                  <a:pt x="517402" y="2277519"/>
+                </a:lnTo>
+                <a:close/>
+                <a:lnTo>
+                  <a:pt x="519036" y="2271119"/>
+                </a:lnTo>
+                <a:close/>
+                <a:lnTo>
+                  <a:pt x="520667" y="2264748"/>
+                </a:lnTo>
+                <a:close/>
+                <a:lnTo>
+                  <a:pt x="522296" y="2258406"/>
+                </a:lnTo>
+                <a:close/>
+                <a:lnTo>
+                  <a:pt x="523923" y="2252093"/>
+                </a:lnTo>
+                <a:close/>
+                <a:lnTo>
+                  <a:pt x="525548" y="2245810"/>
+                </a:lnTo>
+                <a:close/>
+                <a:lnTo>
+                  <a:pt x="527173" y="2239556"/>
+                </a:lnTo>
+                <a:close/>
+                <a:lnTo>
+                  <a:pt x="528796" y="2233330"/>
+                </a:lnTo>
+                <a:close/>
+                <a:lnTo>
+                  <a:pt x="530419" y="2227134"/>
+                </a:lnTo>
+                <a:close/>
+                <a:lnTo>
+                  <a:pt x="532043" y="2220967"/>
+                </a:lnTo>
+                <a:close/>
+                <a:lnTo>
+                  <a:pt x="533666" y="2214828"/>
+                </a:lnTo>
+                <a:close/>
+                <a:lnTo>
+                  <a:pt x="535290" y="2208718"/>
+                </a:lnTo>
+                <a:close/>
+                <a:lnTo>
+                  <a:pt x="536916" y="2202637"/>
+                </a:lnTo>
+                <a:close/>
+                <a:lnTo>
+                  <a:pt x="538543" y="2196584"/>
+                </a:lnTo>
+                <a:close/>
+                <a:lnTo>
+                  <a:pt x="540172" y="2190560"/>
+                </a:lnTo>
+                <a:close/>
+                <a:lnTo>
+                  <a:pt x="541803" y="2184564"/>
+                </a:lnTo>
+                <a:close/>
+                <a:lnTo>
+                  <a:pt x="543437" y="2178596"/>
+                </a:lnTo>
+                <a:close/>
+                <a:lnTo>
+                  <a:pt x="545074" y="2172657"/>
+                </a:lnTo>
+                <a:close/>
+                <a:lnTo>
+                  <a:pt x="546714" y="2166746"/>
+                </a:lnTo>
+                <a:close/>
+                <a:lnTo>
+                  <a:pt x="548358" y="2160864"/>
+                </a:lnTo>
+                <a:close/>
+                <a:lnTo>
+                  <a:pt x="550006" y="2155009"/>
+                </a:lnTo>
+                <a:close/>
+                <a:lnTo>
+                  <a:pt x="551659" y="2149182"/>
+                </a:lnTo>
+                <a:close/>
+                <a:lnTo>
+                  <a:pt x="553316" y="2143383"/>
+                </a:lnTo>
+                <a:close/>
+                <a:lnTo>
+                  <a:pt x="554979" y="2137613"/>
+                </a:lnTo>
+                <a:close/>
+                <a:lnTo>
+                  <a:pt x="556648" y="2131870"/>
+                </a:lnTo>
+                <a:close/>
+                <a:lnTo>
+                  <a:pt x="558322" y="2126154"/>
+                </a:lnTo>
+                <a:close/>
+                <a:lnTo>
+                  <a:pt x="560004" y="2120467"/>
+                </a:lnTo>
+                <a:close/>
+                <a:lnTo>
+                  <a:pt x="561691" y="2114807"/>
+                </a:lnTo>
+                <a:close/>
+                <a:lnTo>
+                  <a:pt x="563386" y="2109174"/>
+                </a:lnTo>
+                <a:close/>
+                <a:lnTo>
+                  <a:pt x="565089" y="2103569"/>
+                </a:lnTo>
+                <a:close/>
+                <a:lnTo>
+                  <a:pt x="566800" y="2097991"/>
+                </a:lnTo>
+                <a:close/>
+                <a:lnTo>
+                  <a:pt x="568518" y="2092441"/>
+                </a:lnTo>
+                <a:close/>
+                <a:lnTo>
+                  <a:pt x="570246" y="2086917"/>
+                </a:lnTo>
+                <a:close/>
+                <a:lnTo>
+                  <a:pt x="571983" y="2081421"/>
+                </a:lnTo>
+                <a:close/>
+                <a:lnTo>
+                  <a:pt x="573729" y="2075952"/>
+                </a:lnTo>
+                <a:close/>
+                <a:lnTo>
+                  <a:pt x="575485" y="2070511"/>
+                </a:lnTo>
+                <a:close/>
+                <a:lnTo>
+                  <a:pt x="577251" y="2065096"/>
+                </a:lnTo>
+                <a:close/>
+                <a:lnTo>
+                  <a:pt x="579027" y="2059707"/>
+                </a:lnTo>
+                <a:close/>
+                <a:lnTo>
+                  <a:pt x="580815" y="2054346"/>
+                </a:lnTo>
+                <a:close/>
+                <a:lnTo>
+                  <a:pt x="582614" y="2049012"/>
+                </a:lnTo>
+                <a:close/>
+                <a:lnTo>
+                  <a:pt x="584425" y="2043704"/>
+                </a:lnTo>
+                <a:close/>
+                <a:lnTo>
+                  <a:pt x="586247" y="2038422"/>
+                </a:lnTo>
+                <a:close/>
+                <a:lnTo>
+                  <a:pt x="588083" y="2033168"/>
+                </a:lnTo>
+                <a:close/>
+                <a:lnTo>
+                  <a:pt x="589931" y="2027939"/>
+                </a:lnTo>
+                <a:close/>
+                <a:lnTo>
+                  <a:pt x="591792" y="2022737"/>
+                </a:lnTo>
+                <a:close/>
+                <a:lnTo>
+                  <a:pt x="593667" y="2017562"/>
+                </a:lnTo>
+                <a:close/>
+                <a:lnTo>
+                  <a:pt x="595556" y="2012412"/>
+                </a:lnTo>
+                <a:close/>
+                <a:lnTo>
+                  <a:pt x="597459" y="2007289"/>
+                </a:lnTo>
+                <a:close/>
+                <a:lnTo>
+                  <a:pt x="599377" y="2002192"/>
+                </a:lnTo>
+                <a:close/>
+                <a:lnTo>
+                  <a:pt x="601310" y="1997121"/>
+                </a:lnTo>
+                <a:close/>
+                <a:lnTo>
+                  <a:pt x="603258" y="1992076"/>
+                </a:lnTo>
+                <a:close/>
+                <a:lnTo>
+                  <a:pt x="605223" y="1987057"/>
+                </a:lnTo>
+                <a:close/>
+                <a:lnTo>
+                  <a:pt x="607204" y="1982063"/>
+                </a:lnTo>
+                <a:close/>
+                <a:lnTo>
+                  <a:pt x="609201" y="1977095"/>
+                </a:lnTo>
+                <a:close/>
+                <a:lnTo>
+                  <a:pt x="611215" y="1972153"/>
+                </a:lnTo>
+                <a:close/>
+                <a:lnTo>
+                  <a:pt x="613247" y="1967237"/>
+                </a:lnTo>
+                <a:close/>
+                <a:lnTo>
+                  <a:pt x="615296" y="1962346"/>
+                </a:lnTo>
+                <a:close/>
+                <a:lnTo>
+                  <a:pt x="617364" y="1957481"/>
+                </a:lnTo>
+                <a:close/>
+                <a:lnTo>
+                  <a:pt x="619450" y="1952641"/>
+                </a:lnTo>
+                <a:close/>
+                <a:lnTo>
+                  <a:pt x="621555" y="1947826"/>
+                </a:lnTo>
+                <a:close/>
+                <a:lnTo>
+                  <a:pt x="623679" y="1943036"/>
+                </a:lnTo>
+                <a:close/>
+                <a:lnTo>
+                  <a:pt x="625823" y="1938272"/>
+                </a:lnTo>
+                <a:close/>
+                <a:lnTo>
+                  <a:pt x="627987" y="1933533"/>
+                </a:lnTo>
+                <a:close/>
+                <a:lnTo>
+                  <a:pt x="630171" y="1928819"/>
+                </a:lnTo>
+                <a:close/>
+                <a:lnTo>
+                  <a:pt x="632376" y="1924130"/>
+                </a:lnTo>
+                <a:close/>
+                <a:lnTo>
+                  <a:pt x="634602" y="1919465"/>
+                </a:lnTo>
+                <a:close/>
+                <a:lnTo>
+                  <a:pt x="636850" y="1914826"/>
+                </a:lnTo>
+                <a:close/>
+                <a:lnTo>
+                  <a:pt x="639119" y="1910211"/>
+                </a:lnTo>
+                <a:close/>
+                <a:lnTo>
+                  <a:pt x="641411" y="1905621"/>
+                </a:lnTo>
+                <a:close/>
+                <a:lnTo>
+                  <a:pt x="643726" y="1901056"/>
+                </a:lnTo>
+                <a:close/>
+                <a:lnTo>
+                  <a:pt x="646063" y="1896515"/>
+                </a:lnTo>
+                <a:close/>
+                <a:lnTo>
+                  <a:pt x="648424" y="1891998"/>
+                </a:lnTo>
+                <a:close/>
+                <a:lnTo>
+                  <a:pt x="650809" y="1887506"/>
+                </a:lnTo>
+                <a:close/>
+                <a:lnTo>
+                  <a:pt x="653218" y="1883039"/>
+                </a:lnTo>
+                <a:close/>
+                <a:lnTo>
+                  <a:pt x="655652" y="1878595"/>
+                </a:lnTo>
+                <a:close/>
+                <a:lnTo>
+                  <a:pt x="658110" y="1874176"/>
+                </a:lnTo>
+                <a:close/>
+                <a:lnTo>
+                  <a:pt x="660594" y="1869781"/>
+                </a:lnTo>
+                <a:close/>
+                <a:lnTo>
+                  <a:pt x="663103" y="1865410"/>
+                </a:lnTo>
+                <a:close/>
+                <a:lnTo>
+                  <a:pt x="665639" y="1861062"/>
+                </a:lnTo>
+                <a:close/>
+                <a:lnTo>
+                  <a:pt x="668201" y="1856739"/>
+                </a:lnTo>
+                <a:close/>
+                <a:lnTo>
+                  <a:pt x="670790" y="1852440"/>
+                </a:lnTo>
+                <a:close/>
+                <a:lnTo>
+                  <a:pt x="673406" y="1848164"/>
+                </a:lnTo>
+                <a:close/>
+                <a:lnTo>
+                  <a:pt x="676049" y="1843912"/>
+                </a:lnTo>
+                <a:close/>
+                <a:lnTo>
+                  <a:pt x="678721" y="1839684"/>
+                </a:lnTo>
+                <a:close/>
+                <a:lnTo>
+                  <a:pt x="681420" y="1835479"/>
+                </a:lnTo>
+                <a:close/>
+                <a:lnTo>
+                  <a:pt x="684149" y="1831298"/>
+                </a:lnTo>
+                <a:close/>
+                <a:lnTo>
+                  <a:pt x="686907" y="1827140"/>
+                </a:lnTo>
+                <a:close/>
+                <a:lnTo>
+                  <a:pt x="689693" y="1823005"/>
+                </a:lnTo>
+                <a:close/>
+                <a:lnTo>
+                  <a:pt x="692510" y="1818893"/>
+                </a:lnTo>
+                <a:close/>
+                <a:lnTo>
+                  <a:pt x="695355" y="1814803"/>
+                </a:lnTo>
+                <a:close/>
+                <a:lnTo>
+                  <a:pt x="698230" y="1810735"/>
+                </a:lnTo>
+                <a:close/>
+                <a:lnTo>
+                  <a:pt x="701135" y="1806689"/>
+                </a:lnTo>
+                <a:close/>
+                <a:lnTo>
+                  <a:pt x="704069" y="1802663"/>
+                </a:lnTo>
+                <a:close/>
+                <a:lnTo>
+                  <a:pt x="707032" y="1798658"/>
+                </a:lnTo>
+                <a:close/>
+                <a:lnTo>
+                  <a:pt x="710025" y="1794673"/>
+                </a:lnTo>
+                <a:close/>
+                <a:lnTo>
+                  <a:pt x="713047" y="1790708"/>
+                </a:lnTo>
+                <a:close/>
+                <a:lnTo>
+                  <a:pt x="716099" y="1786762"/>
+                </a:lnTo>
+                <a:close/>
+                <a:lnTo>
+                  <a:pt x="719181" y="1782835"/>
+                </a:lnTo>
+                <a:close/>
+                <a:lnTo>
+                  <a:pt x="722292" y="1778926"/>
+                </a:lnTo>
+                <a:close/>
+                <a:lnTo>
+                  <a:pt x="725433" y="1775035"/>
+                </a:lnTo>
+                <a:close/>
+                <a:lnTo>
+                  <a:pt x="728603" y="1771161"/>
+                </a:lnTo>
+                <a:close/>
+                <a:lnTo>
+                  <a:pt x="731803" y="1767304"/>
+                </a:lnTo>
+                <a:close/>
+                <a:lnTo>
+                  <a:pt x="735033" y="1763464"/>
+                </a:lnTo>
+                <a:close/>
+                <a:lnTo>
+                  <a:pt x="738293" y="1759640"/>
+                </a:lnTo>
+                <a:close/>
+                <a:lnTo>
+                  <a:pt x="741582" y="1755832"/>
+                </a:lnTo>
+                <a:close/>
+                <a:lnTo>
+                  <a:pt x="744901" y="1752038"/>
+                </a:lnTo>
+                <a:close/>
+                <a:lnTo>
+                  <a:pt x="748250" y="1748260"/>
+                </a:lnTo>
+                <a:close/>
+                <a:lnTo>
+                  <a:pt x="751629" y="1744496"/>
+                </a:lnTo>
+                <a:close/>
+                <a:lnTo>
+                  <a:pt x="755038" y="1740745"/>
+                </a:lnTo>
+                <a:close/>
+                <a:lnTo>
+                  <a:pt x="758476" y="1737009"/>
+                </a:lnTo>
+                <a:close/>
+                <a:lnTo>
+                  <a:pt x="761945" y="1733285"/>
+                </a:lnTo>
+                <a:close/>
+                <a:lnTo>
+                  <a:pt x="765443" y="1729573"/>
+                </a:lnTo>
+                <a:close/>
+                <a:lnTo>
+                  <a:pt x="768972" y="1725874"/>
+                </a:lnTo>
+                <a:close/>
+                <a:lnTo>
+                  <a:pt x="772530" y="1722187"/>
+                </a:lnTo>
+                <a:close/>
+                <a:lnTo>
+                  <a:pt x="776119" y="1718510"/>
+                </a:lnTo>
+                <a:close/>
+                <a:lnTo>
+                  <a:pt x="779738" y="1714845"/>
+                </a:lnTo>
+                <a:close/>
+                <a:lnTo>
+                  <a:pt x="783386" y="1711190"/>
+                </a:lnTo>
+                <a:close/>
+                <a:lnTo>
+                  <a:pt x="787065" y="1707544"/>
+                </a:lnTo>
+                <a:close/>
+                <a:lnTo>
+                  <a:pt x="790774" y="1703908"/>
+                </a:lnTo>
+                <a:close/>
+                <a:lnTo>
+                  <a:pt x="794513" y="1700281"/>
+                </a:lnTo>
+                <a:close/>
+                <a:lnTo>
+                  <a:pt x="798282" y="1696663"/>
+                </a:lnTo>
+                <a:close/>
+                <a:lnTo>
+                  <a:pt x="802082" y="1693053"/>
+                </a:lnTo>
+                <a:close/>
+                <a:lnTo>
+                  <a:pt x="805912" y="1689450"/>
+                </a:lnTo>
+                <a:close/>
+                <a:lnTo>
+                  <a:pt x="809772" y="1685855"/>
+                </a:lnTo>
+                <a:close/>
+                <a:lnTo>
+                  <a:pt x="813662" y="1682267"/>
+                </a:lnTo>
+                <a:close/>
+                <a:lnTo>
+                  <a:pt x="817583" y="1678684"/>
+                </a:lnTo>
+                <a:close/>
+                <a:lnTo>
+                  <a:pt x="821534" y="1675108"/>
+                </a:lnTo>
+                <a:close/>
+                <a:lnTo>
+                  <a:pt x="825515" y="1671537"/>
+                </a:lnTo>
+                <a:close/>
+                <a:lnTo>
+                  <a:pt x="829527" y="1667971"/>
+                </a:lnTo>
+                <a:close/>
+                <a:lnTo>
+                  <a:pt x="833569" y="1664410"/>
+                </a:lnTo>
+                <a:close/>
+                <a:lnTo>
+                  <a:pt x="837642" y="1660853"/>
+                </a:lnTo>
+                <a:close/>
+                <a:lnTo>
+                  <a:pt x="841745" y="1657300"/>
+                </a:lnTo>
+                <a:close/>
+                <a:lnTo>
+                  <a:pt x="845879" y="1653749"/>
+                </a:lnTo>
+                <a:close/>
+                <a:lnTo>
+                  <a:pt x="850043" y="1650202"/>
+                </a:lnTo>
+                <a:close/>
+                <a:lnTo>
+                  <a:pt x="854238" y="1646657"/>
+                </a:lnTo>
+                <a:close/>
+                <a:lnTo>
+                  <a:pt x="858464" y="1643114"/>
+                </a:lnTo>
+                <a:close/>
+                <a:lnTo>
+                  <a:pt x="862720" y="1639572"/>
+                </a:lnTo>
+                <a:close/>
+                <a:lnTo>
+                  <a:pt x="867006" y="1636032"/>
+                </a:lnTo>
+                <a:close/>
+                <a:lnTo>
+                  <a:pt x="871324" y="1632492"/>
+                </a:lnTo>
+                <a:close/>
+                <a:lnTo>
+                  <a:pt x="875672" y="1628952"/>
+                </a:lnTo>
+                <a:close/>
+                <a:lnTo>
+                  <a:pt x="880051" y="1625411"/>
+                </a:lnTo>
+                <a:close/>
+                <a:lnTo>
+                  <a:pt x="884460" y="1621870"/>
+                </a:lnTo>
+                <a:close/>
+                <a:lnTo>
+                  <a:pt x="888901" y="1618328"/>
+                </a:lnTo>
+                <a:close/>
+                <a:lnTo>
+                  <a:pt x="893372" y="1614785"/>
+                </a:lnTo>
+                <a:close/>
+                <a:lnTo>
+                  <a:pt x="897874" y="1611239"/>
+                </a:lnTo>
+                <a:close/>
+                <a:lnTo>
+                  <a:pt x="902406" y="1607690"/>
+                </a:lnTo>
+                <a:close/>
+                <a:lnTo>
+                  <a:pt x="906970" y="1604139"/>
+                </a:lnTo>
+                <a:close/>
+                <a:lnTo>
+                  <a:pt x="911565" y="1600584"/>
+                </a:lnTo>
+                <a:close/>
+                <a:lnTo>
+                  <a:pt x="916190" y="1597026"/>
+                </a:lnTo>
+                <a:close/>
+                <a:lnTo>
+                  <a:pt x="920847" y="1593463"/>
+                </a:lnTo>
+                <a:close/>
+                <a:lnTo>
+                  <a:pt x="925535" y="1589895"/>
+                </a:lnTo>
+                <a:close/>
+                <a:lnTo>
+                  <a:pt x="930253" y="1586322"/>
+                </a:lnTo>
+                <a:close/>
+                <a:lnTo>
+                  <a:pt x="935003" y="1582744"/>
+                </a:lnTo>
+                <a:close/>
+                <a:lnTo>
+                  <a:pt x="939783" y="1579159"/>
+                </a:lnTo>
+                <a:close/>
+                <a:lnTo>
+                  <a:pt x="944595" y="1575568"/>
+                </a:lnTo>
+                <a:close/>
+                <a:lnTo>
+                  <a:pt x="949438" y="1571970"/>
+                </a:lnTo>
+                <a:close/>
+                <a:lnTo>
+                  <a:pt x="954312" y="1568365"/>
+                </a:lnTo>
+                <a:close/>
+                <a:lnTo>
+                  <a:pt x="959217" y="1564752"/>
+                </a:lnTo>
+                <a:close/>
+                <a:lnTo>
+                  <a:pt x="964154" y="1561130"/>
+                </a:lnTo>
+                <a:close/>
+                <a:lnTo>
+                  <a:pt x="969122" y="1557500"/>
+                </a:lnTo>
+                <a:close/>
+                <a:lnTo>
+                  <a:pt x="974121" y="1553861"/>
+                </a:lnTo>
+                <a:close/>
+                <a:lnTo>
+                  <a:pt x="979151" y="1550212"/>
+                </a:lnTo>
+                <a:close/>
+                <a:lnTo>
+                  <a:pt x="984212" y="1546553"/>
+                </a:lnTo>
+                <a:close/>
+                <a:lnTo>
+                  <a:pt x="989305" y="1542883"/>
+                </a:lnTo>
+                <a:close/>
+                <a:lnTo>
+                  <a:pt x="994429" y="1539202"/>
+                </a:lnTo>
+                <a:close/>
+                <a:lnTo>
+                  <a:pt x="999585" y="1535511"/>
+                </a:lnTo>
+                <a:close/>
+                <a:lnTo>
+                  <a:pt x="1004772" y="1531807"/>
+                </a:lnTo>
+                <a:close/>
+                <a:lnTo>
+                  <a:pt x="1009991" y="1528091"/>
+                </a:lnTo>
+                <a:close/>
+                <a:lnTo>
+                  <a:pt x="1015241" y="1524362"/>
+                </a:lnTo>
+                <a:close/>
+                <a:lnTo>
+                  <a:pt x="1020522" y="1520620"/>
+                </a:lnTo>
+                <a:close/>
+                <a:lnTo>
+                  <a:pt x="1025835" y="1516865"/>
+                </a:lnTo>
+                <a:close/>
+                <a:lnTo>
+                  <a:pt x="1031180" y="1513095"/>
+                </a:lnTo>
+                <a:close/>
+                <a:lnTo>
+                  <a:pt x="1036556" y="1509311"/>
+                </a:lnTo>
+                <a:close/>
+                <a:lnTo>
+                  <a:pt x="1041963" y="1505513"/>
+                </a:lnTo>
+                <a:close/>
+                <a:lnTo>
+                  <a:pt x="1047403" y="1501698"/>
+                </a:lnTo>
+                <a:close/>
+                <a:lnTo>
+                  <a:pt x="1052874" y="1497868"/>
+                </a:lnTo>
+                <a:close/>
+                <a:lnTo>
+                  <a:pt x="1058377" y="1494022"/>
+                </a:lnTo>
+                <a:close/>
+                <a:lnTo>
+                  <a:pt x="1063911" y="1490159"/>
+                </a:lnTo>
+                <a:close/>
+                <a:lnTo>
+                  <a:pt x="1069477" y="1486279"/>
+                </a:lnTo>
+                <a:close/>
+                <a:lnTo>
+                  <a:pt x="1075075" y="1482381"/>
+                </a:lnTo>
+                <a:close/>
+                <a:lnTo>
+                  <a:pt x="1080705" y="1478465"/>
+                </a:lnTo>
+                <a:close/>
+                <a:lnTo>
+                  <a:pt x="1086366" y="1474531"/>
+                </a:lnTo>
+                <a:close/>
+                <a:lnTo>
+                  <a:pt x="1092060" y="1470577"/>
+                </a:lnTo>
+                <a:close/>
+                <a:lnTo>
+                  <a:pt x="1097785" y="1466605"/>
+                </a:lnTo>
+                <a:close/>
+                <a:lnTo>
+                  <a:pt x="1103542" y="1462612"/>
+                </a:lnTo>
+                <a:close/>
+                <a:lnTo>
+                  <a:pt x="1109331" y="1458600"/>
+                </a:lnTo>
+                <a:close/>
+                <a:lnTo>
+                  <a:pt x="1115152" y="1454567"/>
+                </a:lnTo>
+                <a:close/>
+                <a:lnTo>
+                  <a:pt x="1121005" y="1450512"/>
+                </a:lnTo>
+                <a:close/>
+                <a:lnTo>
+                  <a:pt x="1126890" y="1446436"/>
+                </a:lnTo>
+                <a:close/>
+                <a:lnTo>
+                  <a:pt x="1132807" y="1442338"/>
+                </a:lnTo>
+                <a:close/>
+                <a:lnTo>
+                  <a:pt x="1138756" y="1438217"/>
+                </a:lnTo>
+                <a:close/>
+                <a:lnTo>
+                  <a:pt x="1144738" y="1434074"/>
+                </a:lnTo>
+                <a:close/>
+                <a:lnTo>
+                  <a:pt x="1150751" y="1429907"/>
+                </a:lnTo>
+                <a:close/>
+                <a:lnTo>
+                  <a:pt x="1156796" y="1425717"/>
+                </a:lnTo>
+                <a:close/>
+                <a:lnTo>
+                  <a:pt x="1162874" y="1421502"/>
+                </a:lnTo>
+                <a:close/>
+                <a:lnTo>
+                  <a:pt x="1168984" y="1417262"/>
+                </a:lnTo>
+                <a:close/>
+                <a:lnTo>
+                  <a:pt x="1175126" y="1412998"/>
+                </a:lnTo>
+                <a:close/>
+                <a:lnTo>
+                  <a:pt x="1181300" y="1408708"/>
+                </a:lnTo>
+                <a:close/>
+                <a:lnTo>
+                  <a:pt x="1187506" y="1404391"/>
+                </a:lnTo>
+                <a:close/>
+                <a:lnTo>
+                  <a:pt x="1193745" y="1400049"/>
+                </a:lnTo>
+                <a:close/>
+                <a:lnTo>
+                  <a:pt x="1200016" y="1395679"/>
+                </a:lnTo>
+                <a:close/>
+                <a:lnTo>
+                  <a:pt x="1206320" y="1391282"/>
+                </a:lnTo>
+                <a:close/>
+                <a:lnTo>
+                  <a:pt x="1212656" y="1386858"/>
+                </a:lnTo>
+                <a:close/>
+                <a:lnTo>
+                  <a:pt x="1219024" y="1382405"/>
+                </a:lnTo>
+                <a:close/>
+                <a:lnTo>
+                  <a:pt x="1225425" y="1377923"/>
+                </a:lnTo>
+                <a:close/>
+                <a:lnTo>
+                  <a:pt x="1231858" y="1373413"/>
+                </a:lnTo>
+                <a:close/>
+                <a:lnTo>
+                  <a:pt x="1238323" y="1368872"/>
+                </a:lnTo>
+                <a:close/>
+                <a:lnTo>
+                  <a:pt x="1244821" y="1364303"/>
+                </a:lnTo>
+                <a:close/>
+                <a:lnTo>
+                  <a:pt x="1251350" y="1359703"/>
+                </a:lnTo>
+                <a:close/>
+                <a:lnTo>
+                  <a:pt x="1257910" y="1355075"/>
+                </a:lnTo>
+                <a:close/>
+                <a:lnTo>
+                  <a:pt x="1264500" y="1350418"/>
+                </a:lnTo>
+                <a:close/>
+                <a:lnTo>
+                  <a:pt x="1271120" y="1345733"/>
+                </a:lnTo>
+                <a:close/>
+                <a:lnTo>
+                  <a:pt x="1277769" y="1341019"/>
+                </a:lnTo>
+                <a:close/>
+                <a:lnTo>
+                  <a:pt x="1284445" y="1336277"/>
+                </a:lnTo>
+                <a:close/>
+                <a:lnTo>
+                  <a:pt x="1291150" y="1331507"/>
+                </a:lnTo>
+                <a:close/>
+                <a:lnTo>
+                  <a:pt x="1297881" y="1326709"/>
+                </a:lnTo>
+                <a:close/>
+                <a:lnTo>
+                  <a:pt x="1304639" y="1321884"/>
+                </a:lnTo>
+                <a:close/>
+                <a:lnTo>
+                  <a:pt x="1311422" y="1317032"/>
+                </a:lnTo>
+                <a:close/>
+                <a:lnTo>
+                  <a:pt x="1318231" y="1312154"/>
+                </a:lnTo>
+                <a:close/>
+                <a:lnTo>
+                  <a:pt x="1325063" y="1307248"/>
+                </a:lnTo>
+                <a:close/>
+                <a:lnTo>
+                  <a:pt x="1331920" y="1302316"/>
+                </a:lnTo>
+                <a:close/>
+                <a:lnTo>
+                  <a:pt x="1338800" y="1297358"/>
+                </a:lnTo>
+                <a:close/>
+                <a:lnTo>
+                  <a:pt x="1345702" y="1292375"/>
+                </a:lnTo>
+                <a:close/>
+                <a:lnTo>
+                  <a:pt x="1352626" y="1287365"/>
+                </a:lnTo>
+                <a:close/>
+                <a:lnTo>
+                  <a:pt x="1359571" y="1282331"/>
+                </a:lnTo>
+                <a:close/>
+                <a:lnTo>
+                  <a:pt x="1366536" y="1277271"/>
+                </a:lnTo>
+                <a:close/>
+                <a:lnTo>
+                  <a:pt x="1373522" y="1272186"/>
+                </a:lnTo>
+                <a:close/>
+                <a:lnTo>
+                  <a:pt x="1380526" y="1267077"/>
+                </a:lnTo>
+                <a:close/>
+                <a:lnTo>
+                  <a:pt x="1387550" y="1261943"/>
+                </a:lnTo>
+                <a:close/>
+                <a:lnTo>
+                  <a:pt x="1394591" y="1256785"/>
+                </a:lnTo>
+                <a:close/>
+                <a:lnTo>
+                  <a:pt x="1401649" y="1251604"/>
+                </a:lnTo>
+                <a:close/>
+                <a:lnTo>
+                  <a:pt x="1408725" y="1246398"/>
+                </a:lnTo>
+                <a:close/>
+                <a:lnTo>
+                  <a:pt x="1415816" y="1241170"/>
+                </a:lnTo>
+                <a:close/>
+                <a:lnTo>
+                  <a:pt x="1422923" y="1235918"/>
+                </a:lnTo>
+                <a:close/>
+                <a:lnTo>
+                  <a:pt x="1430044" y="1230643"/>
+                </a:lnTo>
+                <a:close/>
+                <a:lnTo>
+                  <a:pt x="1437179" y="1225346"/>
+                </a:lnTo>
+                <a:close/>
+                <a:lnTo>
+                  <a:pt x="1444328" y="1220026"/>
+                </a:lnTo>
+                <a:close/>
+                <a:lnTo>
+                  <a:pt x="1451490" y="1214684"/>
+                </a:lnTo>
+                <a:close/>
+                <a:lnTo>
+                  <a:pt x="1458664" y="1209320"/>
+                </a:lnTo>
+                <a:close/>
+                <a:lnTo>
+                  <a:pt x="1465849" y="1203935"/>
+                </a:lnTo>
+                <a:close/>
+                <a:lnTo>
+                  <a:pt x="1473045" y="1198528"/>
+                </a:lnTo>
+                <a:close/>
+                <a:lnTo>
+                  <a:pt x="1480252" y="1193100"/>
+                </a:lnTo>
+                <a:close/>
+                <a:lnTo>
+                  <a:pt x="1487468" y="1187651"/>
+                </a:lnTo>
+                <a:close/>
+                <a:lnTo>
+                  <a:pt x="1494693" y="1182182"/>
+                </a:lnTo>
+                <a:close/>
+                <a:lnTo>
+                  <a:pt x="1501926" y="1176692"/>
+                </a:lnTo>
+                <a:close/>
+                <a:lnTo>
+                  <a:pt x="1509167" y="1171182"/>
+                </a:lnTo>
+                <a:close/>
+                <a:lnTo>
+                  <a:pt x="1516415" y="1165652"/>
+                </a:lnTo>
+                <a:close/>
+                <a:lnTo>
+                  <a:pt x="1523669" y="1160102"/>
+                </a:lnTo>
+                <a:close/>
+                <a:lnTo>
+                  <a:pt x="1530929" y="1154533"/>
+                </a:lnTo>
+                <a:close/>
+                <a:lnTo>
+                  <a:pt x="1538194" y="1148945"/>
+                </a:lnTo>
+                <a:close/>
+                <a:lnTo>
+                  <a:pt x="1545464" y="1143338"/>
+                </a:lnTo>
+                <a:close/>
+                <a:lnTo>
+                  <a:pt x="1552737" y="1137712"/>
+                </a:lnTo>
+                <a:close/>
+                <a:lnTo>
+                  <a:pt x="1560014" y="1132068"/>
+                </a:lnTo>
+                <a:close/>
+                <a:lnTo>
+                  <a:pt x="1567293" y="1126406"/>
+                </a:lnTo>
+                <a:close/>
+                <a:lnTo>
+                  <a:pt x="1574574" y="1120726"/>
+                </a:lnTo>
+                <a:close/>
+                <a:lnTo>
+                  <a:pt x="1581856" y="1115028"/>
+                </a:lnTo>
+                <a:close/>
+                <a:lnTo>
+                  <a:pt x="1589138" y="1109312"/>
+                </a:lnTo>
+                <a:close/>
+                <a:lnTo>
+                  <a:pt x="1596421" y="1103580"/>
+                </a:lnTo>
+                <a:close/>
+                <a:lnTo>
+                  <a:pt x="1603703" y="1097830"/>
+                </a:lnTo>
+                <a:close/>
+                <a:lnTo>
+                  <a:pt x="1610983" y="1092064"/>
+                </a:lnTo>
+                <a:close/>
+                <a:lnTo>
+                  <a:pt x="1618262" y="1086282"/>
+                </a:lnTo>
+                <a:close/>
+                <a:lnTo>
+                  <a:pt x="1625538" y="1080483"/>
+                </a:lnTo>
+                <a:close/>
+                <a:lnTo>
+                  <a:pt x="1632810" y="1074668"/>
+                </a:lnTo>
+                <a:close/>
+                <a:lnTo>
+                  <a:pt x="1640079" y="1068838"/>
+                </a:lnTo>
+                <a:close/>
+                <a:lnTo>
+                  <a:pt x="1647343" y="1062992"/>
+                </a:lnTo>
+                <a:close/>
+                <a:lnTo>
+                  <a:pt x="1654602" y="1057131"/>
+                </a:lnTo>
+                <a:close/>
+                <a:lnTo>
+                  <a:pt x="1661855" y="1051255"/>
+                </a:lnTo>
+                <a:close/>
+                <a:lnTo>
+                  <a:pt x="1669101" y="1045365"/>
+                </a:lnTo>
+                <a:close/>
+                <a:lnTo>
+                  <a:pt x="1676341" y="1039460"/>
+                </a:lnTo>
+                <a:close/>
+                <a:lnTo>
+                  <a:pt x="1683572" y="1033540"/>
+                </a:lnTo>
+                <a:close/>
+                <a:lnTo>
+                  <a:pt x="1690796" y="1027607"/>
+                </a:lnTo>
+                <a:close/>
+                <a:lnTo>
+                  <a:pt x="1698010" y="1021660"/>
+                </a:lnTo>
+                <a:close/>
+                <a:lnTo>
+                  <a:pt x="1705214" y="1015700"/>
+                </a:lnTo>
+                <a:close/>
+                <a:lnTo>
+                  <a:pt x="1712408" y="1009726"/>
+                </a:lnTo>
+                <a:close/>
+                <a:lnTo>
+                  <a:pt x="1719591" y="1003740"/>
+                </a:lnTo>
+                <a:close/>
+                <a:lnTo>
+                  <a:pt x="1726762" y="997741"/>
+                </a:lnTo>
+                <a:close/>
+                <a:lnTo>
+                  <a:pt x="1733921" y="991729"/>
+                </a:lnTo>
+                <a:close/>
+                <a:lnTo>
+                  <a:pt x="1741067" y="985705"/>
+                </a:lnTo>
+                <a:close/>
+                <a:lnTo>
+                  <a:pt x="1748200" y="979669"/>
+                </a:lnTo>
+                <a:close/>
+                <a:lnTo>
+                  <a:pt x="1755318" y="973622"/>
+                </a:lnTo>
+                <a:close/>
+                <a:lnTo>
+                  <a:pt x="1762422" y="967563"/>
+                </a:lnTo>
+                <a:close/>
+                <a:lnTo>
+                  <a:pt x="1769509" y="961492"/>
+                </a:lnTo>
+                <a:close/>
+                <a:lnTo>
+                  <a:pt x="1776581" y="955411"/>
+                </a:lnTo>
+                <a:close/>
+                <a:lnTo>
+                  <a:pt x="1783636" y="949319"/>
+                </a:lnTo>
+                <a:close/>
+                <a:lnTo>
+                  <a:pt x="1790674" y="943217"/>
+                </a:lnTo>
+                <a:close/>
+                <a:lnTo>
+                  <a:pt x="1797693" y="937104"/>
+                </a:lnTo>
+                <a:close/>
+                <a:lnTo>
+                  <a:pt x="1804694" y="930982"/>
+                </a:lnTo>
+                <a:close/>
+                <a:lnTo>
+                  <a:pt x="1811675" y="924849"/>
+                </a:lnTo>
+                <a:close/>
+                <a:lnTo>
+                  <a:pt x="1818636" y="918708"/>
+                </a:lnTo>
+                <a:close/>
+                <a:lnTo>
+                  <a:pt x="1825577" y="912557"/>
+                </a:lnTo>
+                <a:close/>
+                <a:lnTo>
+                  <a:pt x="1832496" y="906396"/>
+                </a:lnTo>
+                <a:close/>
+                <a:lnTo>
+                  <a:pt x="1839394" y="900228"/>
+                </a:lnTo>
+                <a:close/>
+                <a:lnTo>
+                  <a:pt x="1846269" y="894050"/>
+                </a:lnTo>
+                <a:close/>
+                <a:lnTo>
+                  <a:pt x="1853120" y="887865"/>
+                </a:lnTo>
+                <a:close/>
+                <a:lnTo>
+                  <a:pt x="1859948" y="881671"/>
+                </a:lnTo>
+                <a:close/>
+                <a:lnTo>
+                  <a:pt x="1866751" y="875470"/>
+                </a:lnTo>
+                <a:close/>
+                <a:lnTo>
+                  <a:pt x="1873529" y="869262"/>
+                </a:lnTo>
+                <a:close/>
+                <a:lnTo>
+                  <a:pt x="1880281" y="863046"/>
+                </a:lnTo>
+                <a:close/>
+                <a:lnTo>
+                  <a:pt x="1887007" y="856823"/>
+                </a:lnTo>
+                <a:close/>
+                <a:lnTo>
+                  <a:pt x="1893705" y="850593"/>
+                </a:lnTo>
+                <a:close/>
+                <a:lnTo>
+                  <a:pt x="1900376" y="844357"/>
+                </a:lnTo>
+                <a:close/>
+                <a:lnTo>
+                  <a:pt x="1907019" y="838114"/>
+                </a:lnTo>
+                <a:close/>
+                <a:lnTo>
+                  <a:pt x="1913632" y="831866"/>
+                </a:lnTo>
+                <a:close/>
+                <a:lnTo>
+                  <a:pt x="1920216" y="825611"/>
+                </a:lnTo>
+                <a:close/>
+                <a:lnTo>
+                  <a:pt x="1926770" y="819352"/>
+                </a:lnTo>
+                <a:close/>
+                <a:lnTo>
+                  <a:pt x="1933292" y="813087"/>
+                </a:lnTo>
+                <a:close/>
+                <a:lnTo>
+                  <a:pt x="1939783" y="806817"/>
+                </a:lnTo>
+                <a:close/>
+                <a:lnTo>
+                  <a:pt x="1946242" y="800542"/>
+                </a:lnTo>
+                <a:close/>
+                <a:lnTo>
+                  <a:pt x="1952668" y="794263"/>
+                </a:lnTo>
+                <a:close/>
+                <a:lnTo>
+                  <a:pt x="1959060" y="787979"/>
+                </a:lnTo>
+                <a:close/>
+                <a:lnTo>
+                  <a:pt x="1965418" y="781691"/>
+                </a:lnTo>
+                <a:close/>
+                <a:lnTo>
+                  <a:pt x="1971742" y="775400"/>
+                </a:lnTo>
+                <a:close/>
+                <a:lnTo>
+                  <a:pt x="1978029" y="769105"/>
+                </a:lnTo>
+                <a:close/>
+                <a:lnTo>
+                  <a:pt x="1984281" y="762807"/>
+                </a:lnTo>
+                <a:close/>
+                <a:lnTo>
+                  <a:pt x="1990496" y="756506"/>
+                </a:lnTo>
+                <a:close/>
+                <a:lnTo>
+                  <a:pt x="1996674" y="750202"/>
+                </a:lnTo>
+                <a:close/>
+                <a:lnTo>
+                  <a:pt x="2002813" y="743895"/>
+                </a:lnTo>
+                <a:close/>
+                <a:lnTo>
+                  <a:pt x="2008914" y="737586"/>
+                </a:lnTo>
+                <a:close/>
+                <a:lnTo>
+                  <a:pt x="2014976" y="731276"/>
+                </a:lnTo>
+                <a:close/>
+                <a:lnTo>
+                  <a:pt x="2020997" y="724963"/>
+                </a:lnTo>
+                <a:close/>
+                <a:lnTo>
+                  <a:pt x="2026978" y="718649"/>
+                </a:lnTo>
+                <a:close/>
+                <a:lnTo>
+                  <a:pt x="2032918" y="712333"/>
+                </a:lnTo>
+                <a:close/>
+                <a:lnTo>
+                  <a:pt x="2038816" y="706017"/>
+                </a:lnTo>
+                <a:close/>
+                <a:lnTo>
+                  <a:pt x="2044671" y="699700"/>
+                </a:lnTo>
+                <a:close/>
+                <a:lnTo>
+                  <a:pt x="2050483" y="693382"/>
+                </a:lnTo>
+                <a:close/>
+                <a:lnTo>
+                  <a:pt x="2056252" y="687064"/>
+                </a:lnTo>
+                <a:close/>
+                <a:lnTo>
+                  <a:pt x="2061975" y="680745"/>
+                </a:lnTo>
+                <a:close/>
+                <a:lnTo>
+                  <a:pt x="2067654" y="674427"/>
+                </a:lnTo>
+                <a:close/>
+                <a:lnTo>
+                  <a:pt x="2073287" y="668110"/>
+                </a:lnTo>
+                <a:close/>
+                <a:lnTo>
+                  <a:pt x="2078874" y="661793"/>
+                </a:lnTo>
+                <a:close/>
+                <a:lnTo>
+                  <a:pt x="2084413" y="655477"/>
+                </a:lnTo>
+                <a:close/>
+                <a:lnTo>
+                  <a:pt x="2089905" y="649163"/>
+                </a:lnTo>
+                <a:close/>
+                <a:lnTo>
+                  <a:pt x="2095349" y="642849"/>
+                </a:lnTo>
+                <a:close/>
+                <a:lnTo>
+                  <a:pt x="2100743" y="636538"/>
+                </a:lnTo>
+                <a:close/>
+                <a:lnTo>
+                  <a:pt x="2106088" y="630228"/>
+                </a:lnTo>
+                <a:close/>
+                <a:lnTo>
+                  <a:pt x="2111383" y="623921"/>
+                </a:lnTo>
+                <a:close/>
+                <a:lnTo>
+                  <a:pt x="2116626" y="617616"/>
+                </a:lnTo>
+                <a:close/>
+                <a:lnTo>
+                  <a:pt x="2121819" y="611313"/>
+                </a:lnTo>
+                <a:close/>
+                <a:lnTo>
+                  <a:pt x="2126959" y="605014"/>
+                </a:lnTo>
+                <a:close/>
+                <a:lnTo>
+                  <a:pt x="2132046" y="598718"/>
+                </a:lnTo>
+                <a:close/>
+                <a:lnTo>
+                  <a:pt x="2137079" y="592425"/>
+                </a:lnTo>
+                <a:close/>
+                <a:lnTo>
+                  <a:pt x="2142059" y="586136"/>
+                </a:lnTo>
+                <a:close/>
+                <a:lnTo>
+                  <a:pt x="2146984" y="579850"/>
+                </a:lnTo>
+                <a:close/>
+                <a:lnTo>
+                  <a:pt x="2151853" y="573569"/>
+                </a:lnTo>
+                <a:close/>
+                <a:lnTo>
+                  <a:pt x="2156666" y="567293"/>
+                </a:lnTo>
+                <a:close/>
+                <a:lnTo>
+                  <a:pt x="2161423" y="561021"/>
+                </a:lnTo>
+                <a:close/>
+                <a:lnTo>
+                  <a:pt x="2166122" y="554754"/>
+                </a:lnTo>
+                <a:close/>
+                <a:lnTo>
+                  <a:pt x="2170764" y="548492"/>
+                </a:lnTo>
+                <a:close/>
+                <a:lnTo>
+                  <a:pt x="2175346" y="542235"/>
+                </a:lnTo>
+                <a:close/>
+                <a:lnTo>
+                  <a:pt x="2179870" y="535985"/>
+                </a:lnTo>
+                <a:close/>
+                <a:lnTo>
+                  <a:pt x="2184333" y="529740"/>
+                </a:lnTo>
+                <a:close/>
+                <a:lnTo>
+                  <a:pt x="2188736" y="523501"/>
+                </a:lnTo>
+                <a:close/>
+                <a:lnTo>
+                  <a:pt x="2193078" y="517269"/>
+                </a:lnTo>
+                <a:close/>
+                <a:lnTo>
+                  <a:pt x="2197358" y="511043"/>
+                </a:lnTo>
+                <a:close/>
+                <a:lnTo>
+                  <a:pt x="2201575" y="504824"/>
+                </a:lnTo>
+                <a:close/>
+                <a:lnTo>
+                  <a:pt x="2205730" y="498612"/>
+                </a:lnTo>
+                <a:close/>
+                <a:lnTo>
+                  <a:pt x="2209820" y="492408"/>
+                </a:lnTo>
+                <a:close/>
+                <a:lnTo>
+                  <a:pt x="2213846" y="486211"/>
+                </a:lnTo>
+                <a:close/>
+                <a:lnTo>
+                  <a:pt x="2217807" y="480023"/>
+                </a:lnTo>
+                <a:close/>
+                <a:lnTo>
+                  <a:pt x="2221702" y="473842"/>
+                </a:lnTo>
+                <a:close/>
+                <a:lnTo>
+                  <a:pt x="2225531" y="467670"/>
+                </a:lnTo>
+                <a:close/>
+                <a:lnTo>
+                  <a:pt x="2229293" y="461506"/>
+                </a:lnTo>
+                <a:close/>
+                <a:lnTo>
+                  <a:pt x="2232988" y="455352"/>
+                </a:lnTo>
+                <a:close/>
+                <a:lnTo>
+                  <a:pt x="2236614" y="449206"/>
+                </a:lnTo>
+                <a:close/>
+                <a:lnTo>
+                  <a:pt x="2240171" y="443070"/>
+                </a:lnTo>
+                <a:close/>
+                <a:lnTo>
+                  <a:pt x="2243659" y="436944"/>
+                </a:lnTo>
+                <a:close/>
+                <a:lnTo>
+                  <a:pt x="2247076" y="430827"/>
+                </a:lnTo>
+                <a:close/>
+                <a:lnTo>
+                  <a:pt x="2250422" y="424720"/>
+                </a:lnTo>
+                <a:close/>
+                <a:lnTo>
+                  <a:pt x="2253697" y="418624"/>
+                </a:lnTo>
+                <a:close/>
+                <a:lnTo>
+                  <a:pt x="2256900" y="412539"/>
+                </a:lnTo>
+                <a:close/>
+                <a:lnTo>
+                  <a:pt x="2260030" y="406464"/>
+                </a:lnTo>
+                <a:close/>
+                <a:lnTo>
+                  <a:pt x="2263087" y="400400"/>
+                </a:lnTo>
+                <a:close/>
+                <a:lnTo>
+                  <a:pt x="2266070" y="394348"/>
+                </a:lnTo>
+                <a:close/>
+                <a:lnTo>
+                  <a:pt x="2268977" y="388308"/>
+                </a:lnTo>
+                <a:close/>
+                <a:lnTo>
+                  <a:pt x="2271810" y="382279"/>
+                </a:lnTo>
+                <a:close/>
+                <a:lnTo>
+                  <a:pt x="2274566" y="376262"/>
+                </a:lnTo>
+                <a:close/>
+                <a:lnTo>
+                  <a:pt x="2277246" y="370258"/>
+                </a:lnTo>
+                <a:close/>
+                <a:lnTo>
+                  <a:pt x="2279849" y="364267"/>
+                </a:lnTo>
+                <a:close/>
+                <a:lnTo>
+                  <a:pt x="2282374" y="358288"/>
+                </a:lnTo>
+                <a:close/>
+                <a:lnTo>
+                  <a:pt x="2284820" y="352322"/>
+                </a:lnTo>
+                <a:close/>
+                <a:lnTo>
+                  <a:pt x="2287186" y="346370"/>
+                </a:lnTo>
+                <a:close/>
+                <a:lnTo>
+                  <a:pt x="2289473" y="340431"/>
+                </a:lnTo>
+                <a:close/>
+                <a:lnTo>
+                  <a:pt x="2291680" y="334506"/>
+                </a:lnTo>
+                <a:close/>
+                <a:lnTo>
+                  <a:pt x="2293805" y="328596"/>
+                </a:lnTo>
+                <a:close/>
+                <a:lnTo>
+                  <a:pt x="2295849" y="322699"/>
+                </a:lnTo>
+                <a:close/>
+                <a:lnTo>
+                  <a:pt x="2297810" y="316817"/>
+                </a:lnTo>
+                <a:close/>
+                <a:lnTo>
+                  <a:pt x="2299688" y="310950"/>
+                </a:lnTo>
+                <a:close/>
+                <a:lnTo>
+                  <a:pt x="2301482" y="305099"/>
+                </a:lnTo>
+                <a:close/>
+                <a:lnTo>
+                  <a:pt x="2303192" y="299262"/>
+                </a:lnTo>
+                <a:close/>
+                <a:lnTo>
+                  <a:pt x="2304817" y="293441"/>
+                </a:lnTo>
+                <a:close/>
+                <a:lnTo>
+                  <a:pt x="2306356" y="287636"/>
+                </a:lnTo>
+                <a:close/>
+                <a:lnTo>
+                  <a:pt x="2307809" y="281847"/>
+                </a:lnTo>
+                <a:close/>
+                <a:lnTo>
+                  <a:pt x="2309175" y="276074"/>
+                </a:lnTo>
+                <a:close/>
+                <a:lnTo>
+                  <a:pt x="2310454" y="270318"/>
+                </a:lnTo>
+                <a:close/>
+                <a:lnTo>
+                  <a:pt x="2311644" y="264579"/>
+                </a:lnTo>
+                <a:close/>
+                <a:lnTo>
+                  <a:pt x="2312745" y="258856"/>
+                </a:lnTo>
+                <a:close/>
+                <a:lnTo>
+                  <a:pt x="2313757" y="253151"/>
+                </a:lnTo>
+                <a:close/>
+                <a:lnTo>
+                  <a:pt x="2314679" y="247464"/>
+                </a:lnTo>
+                <a:close/>
+                <a:lnTo>
+                  <a:pt x="2315510" y="241795"/>
+                </a:lnTo>
+                <a:close/>
+                <a:lnTo>
+                  <a:pt x="2316249" y="236143"/>
+                </a:lnTo>
+                <a:close/>
+                <a:lnTo>
+                  <a:pt x="2316897" y="230510"/>
+                </a:lnTo>
+                <a:close/>
+                <a:lnTo>
+                  <a:pt x="2317451" y="224895"/>
+                </a:lnTo>
+                <a:close/>
+                <a:lnTo>
+                  <a:pt x="2317912" y="219300"/>
+                </a:lnTo>
+                <a:close/>
+                <a:lnTo>
+                  <a:pt x="2318280" y="213723"/>
+                </a:lnTo>
+                <a:close/>
+                <a:lnTo>
+                  <a:pt x="2318552" y="208166"/>
+                </a:lnTo>
+                <a:close/>
+                <a:lnTo>
+                  <a:pt x="2318729" y="202628"/>
+                </a:lnTo>
+                <a:close/>
+                <a:lnTo>
+                  <a:pt x="2318811" y="197110"/>
+                </a:lnTo>
+                <a:close/>
+                <a:lnTo>
+                  <a:pt x="2318795" y="191612"/>
+                </a:lnTo>
+                <a:close/>
+                <a:lnTo>
+                  <a:pt x="2318683" y="186134"/>
+                </a:lnTo>
+                <a:close/>
+                <a:lnTo>
+                  <a:pt x="2318472" y="180677"/>
+                </a:lnTo>
+                <a:close/>
+                <a:lnTo>
+                  <a:pt x="2318163" y="175241"/>
+                </a:lnTo>
+                <a:close/>
+                <a:lnTo>
+                  <a:pt x="2317755" y="169825"/>
+                </a:lnTo>
+                <a:close/>
+                <a:lnTo>
+                  <a:pt x="2317247" y="164431"/>
+                </a:lnTo>
+                <a:close/>
+                <a:lnTo>
+                  <a:pt x="2316639" y="159059"/>
+                </a:lnTo>
+                <a:close/>
+                <a:lnTo>
+                  <a:pt x="2315930" y="153708"/>
+                </a:lnTo>
+                <a:close/>
+                <a:lnTo>
+                  <a:pt x="2315118" y="148380"/>
+                </a:lnTo>
+                <a:close/>
+                <a:lnTo>
+                  <a:pt x="2314205" y="143073"/>
+                </a:lnTo>
+                <a:close/>
+                <a:lnTo>
+                  <a:pt x="2313188" y="137789"/>
+                </a:lnTo>
+                <a:close/>
+                <a:lnTo>
+                  <a:pt x="2312068" y="132528"/>
+                </a:lnTo>
+                <a:close/>
+                <a:lnTo>
+                  <a:pt x="2310843" y="127290"/>
+                </a:lnTo>
+                <a:close/>
+                <a:lnTo>
+                  <a:pt x="2309514" y="122076"/>
+                </a:lnTo>
+                <a:close/>
+                <a:lnTo>
+                  <a:pt x="2308078" y="116885"/>
+                </a:lnTo>
+                <a:close/>
+                <a:lnTo>
+                  <a:pt x="2306537" y="111717"/>
+                </a:lnTo>
+                <a:close/>
+                <a:lnTo>
+                  <a:pt x="2304889" y="106574"/>
+                </a:lnTo>
+                <a:close/>
+                <a:lnTo>
+                  <a:pt x="2303133" y="101455"/>
+                </a:lnTo>
+                <a:close/>
+                <a:lnTo>
+                  <a:pt x="2301269" y="96360"/>
+                </a:lnTo>
+                <a:close/>
+                <a:lnTo>
+                  <a:pt x="2299296" y="91290"/>
+                </a:lnTo>
+                <a:close/>
+                <a:lnTo>
+                  <a:pt x="2297214" y="86246"/>
+                </a:lnTo>
+                <a:close/>
+                <a:lnTo>
+                  <a:pt x="2295021" y="81226"/>
+                </a:lnTo>
+                <a:close/>
+                <a:lnTo>
+                  <a:pt x="2292718" y="76232"/>
+                </a:lnTo>
+                <a:close/>
+                <a:lnTo>
+                  <a:pt x="2290303" y="71264"/>
+                </a:lnTo>
+                <a:close/>
+                <a:lnTo>
+                  <a:pt x="2287777" y="66321"/>
+                </a:lnTo>
+                <a:close/>
+                <a:lnTo>
+                  <a:pt x="2285138" y="61405"/>
+                </a:lnTo>
+                <a:close/>
+                <a:lnTo>
+                  <a:pt x="2282385" y="56516"/>
+                </a:lnTo>
+                <a:close/>
+                <a:lnTo>
+                  <a:pt x="2279518" y="51653"/>
+                </a:lnTo>
+                <a:close/>
+                <a:lnTo>
+                  <a:pt x="2276537" y="46818"/>
+                </a:lnTo>
+                <a:close/>
+                <a:lnTo>
+                  <a:pt x="2273441" y="42009"/>
+                </a:lnTo>
+                <a:close/>
+                <a:lnTo>
+                  <a:pt x="2270228" y="37228"/>
+                </a:lnTo>
+                <a:close/>
+                <a:lnTo>
+                  <a:pt x="2266899" y="32475"/>
+                </a:lnTo>
+                <a:close/>
+                <a:lnTo>
+                  <a:pt x="2263453" y="27750"/>
+                </a:lnTo>
+                <a:close/>
+                <a:lnTo>
+                  <a:pt x="2259889" y="23053"/>
+                </a:lnTo>
+                <a:close/>
+                <a:lnTo>
+                  <a:pt x="2256207" y="18384"/>
+                </a:lnTo>
+                <a:close/>
+                <a:lnTo>
+                  <a:pt x="2252406" y="13744"/>
+                </a:lnTo>
+                <a:close/>
+                <a:lnTo>
+                  <a:pt x="2248484" y="9134"/>
+                </a:lnTo>
+                <a:close/>
+                <a:lnTo>
+                  <a:pt x="2244443" y="4552"/>
+                </a:lnTo>
+                <a:close/>
+                <a:lnTo>
+                  <a:pt x="2240280" y="0"/>
                 </a:lnTo>
                 <a:close/>
               </a:path>
@@ -5623,8 +5623,8 @@
         </p:nvCxnSpPr>
         <p:spPr>
           <a:xfrm flipV="1">
-            <a:off x="5486400.0" y="971550.0"/>
-            <a:ext cx="0.0" cy="1600200.0"/>
+            <a:off x="5943600.0" y="742950.0"/>
+            <a:ext cx="0.0" cy="1828800.0"/>
           </a:xfrm>
           <a:prstGeom prst="line">
             <a:avLst/>
@@ -5659,8 +5659,8 @@
         </p:nvCxnSpPr>
         <p:spPr>
           <a:xfrm>
-            <a:off x="4572000.0" y="971550.0"/>
-            <a:ext cx="914400.0" cy="0.0"/>
+            <a:off x="4572000.0" y="742950.0"/>
+            <a:ext cx="1371600.0" cy="0.0"/>
           </a:xfrm>
           <a:prstGeom prst="line">
             <a:avLst/>
@@ -5695,7 +5695,7 @@
         </p:nvSpPr>
         <p:spPr>
           <a:xfrm>
-            <a:off x="5397500" y="882650"/>
+            <a:off x="5854700" y="654050"/>
             <a:ext cx="177800" cy="177800"/>
           </a:xfrm>
           <a:prstGeom prst="ellipse">
@@ -5740,8 +5740,8 @@
         </p:nvCxnSpPr>
         <p:spPr>
           <a:xfrm>
-            <a:off x="5029200.0" y="2480310.0"/>
-            <a:ext cx="365760.0" cy="0.0"/>
+            <a:off x="5486400.0" y="2571750.0"/>
+            <a:ext cx="411480.0" cy="0.0"/>
           </a:xfrm>
           <a:prstGeom prst="line">
             <a:avLst/>
@@ -5775,8 +5775,8 @@
         </p:nvCxnSpPr>
         <p:spPr>
           <a:xfrm flipH="1">
-            <a:off x="5577840.0" y="2480310.0"/>
-            <a:ext cx="365760.0" cy="0.0"/>
+            <a:off x="5989320.0" y="2571750.0"/>
+            <a:ext cx="320040.0" cy="0.0"/>
           </a:xfrm>
           <a:prstGeom prst="line">
             <a:avLst/>
@@ -5810,8 +5810,8 @@
         </p:nvCxnSpPr>
         <p:spPr>
           <a:xfrm flipV="1">
-            <a:off x="5326380.0" y="1186434.0"/>
-            <a:ext cx="91440.0" cy="370332.0"/>
+            <a:off x="5440680.0" y="1017270.0"/>
+            <a:ext cx="182880.0" cy="228600.0"/>
           </a:xfrm>
           <a:prstGeom prst="line">
             <a:avLst/>
@@ -5845,8 +5845,8 @@
         </p:nvCxnSpPr>
         <p:spPr>
           <a:xfrm flipH="1">
-            <a:off x="5500116.0" y="537210.0"/>
-            <a:ext cx="54864.0" cy="365760.0"/>
+            <a:off x="5989320.0" y="331470.0"/>
+            <a:ext cx="91440.0" cy="228599.99999999977"/>
           </a:xfrm>
           <a:prstGeom prst="line">
             <a:avLst/>
@@ -5880,7 +5880,7 @@
         </p:nvSpPr>
         <p:spPr>
           <a:xfrm>
-            <a:off x="4775200" y="-31750"/>
+            <a:off x="5003800" y="-123190"/>
             <a:ext cx="1524000" cy="508000"/>
           </a:xfrm>
           <a:prstGeom prst="rect">
@@ -5916,7 +5916,7 @@
         </p:nvSpPr>
         <p:spPr>
           <a:xfrm>
-            <a:off x="4135120" y="654050"/>
+            <a:off x="4089400" y="425450"/>
             <a:ext cx="1524000" cy="508000"/>
           </a:xfrm>
           <a:prstGeom prst="rect">
@@ -5952,7 +5952,7 @@
         </p:nvSpPr>
         <p:spPr>
           <a:xfrm>
-            <a:off x="5232400" y="2437130"/>
+            <a:off x="5689600" y="2482850"/>
             <a:ext cx="1524000" cy="508000"/>
           </a:xfrm>
           <a:prstGeom prst="rect">
